--- a/deck/CTS Monthly Business Review - September 2026.pptx
+++ b/deck/CTS Monthly Business Review - September 2026.pptx
@@ -15046,7 +15046,7 @@
                           <a:ea typeface="Calibri" pitchFamily="34" charset="-122"/>
                           <a:cs typeface="Calibri" pitchFamily="34" charset="-120"/>
                         </a:rPr>
-                        <a:t>12.1</a:t>
+                        <a:t>12.2</a:t>
                       </a:r>
                       <a:endParaRPr lang="en-US" sz="950" dirty="0">
                         <a:latin typeface="Calibri" charset="0"/>
@@ -15152,7 +15152,7 @@
                           <a:ea typeface="Calibri" pitchFamily="34" charset="-122"/>
                           <a:cs typeface="Calibri" pitchFamily="34" charset="-120"/>
                         </a:rPr>
-                        <a:t>0</a:t>
+                        <a:t>11</a:t>
                       </a:r>
                       <a:endParaRPr lang="en-US" sz="950" dirty="0">
                         <a:latin typeface="Calibri" charset="0"/>
@@ -15258,7 +15258,7 @@
                           <a:ea typeface="Calibri" pitchFamily="34" charset="-122"/>
                           <a:cs typeface="Calibri" pitchFamily="34" charset="-120"/>
                         </a:rPr>
-                        <a:t>100.0%</a:t>
+                        <a:t>99.5%</a:t>
                       </a:r>
                       <a:endParaRPr lang="en-US" sz="950" dirty="0">
                         <a:latin typeface="Calibri" charset="0"/>
@@ -15477,7 +15477,7 @@
                           <a:ea typeface="Calibri" pitchFamily="34" charset="-122"/>
                           <a:cs typeface="Calibri" pitchFamily="34" charset="-120"/>
                         </a:rPr>
-                        <a:t>3.1</a:t>
+                        <a:t>2.8</a:t>
                       </a:r>
                       <a:endParaRPr lang="en-US" sz="950" dirty="0">
                         <a:latin typeface="Calibri" charset="0"/>
@@ -15530,7 +15530,7 @@
                           <a:ea typeface="Calibri" pitchFamily="34" charset="-122"/>
                           <a:cs typeface="Calibri" pitchFamily="34" charset="-120"/>
                         </a:rPr>
-                        <a:t>266</a:t>
+                        <a:t>240</a:t>
                       </a:r>
                       <a:endParaRPr lang="en-US" sz="950" dirty="0">
                         <a:latin typeface="Calibri" charset="0"/>
@@ -15583,7 +15583,7 @@
                           <a:ea typeface="Calibri" pitchFamily="34" charset="-122"/>
                           <a:cs typeface="Calibri" pitchFamily="34" charset="-120"/>
                         </a:rPr>
-                        <a:t>283</a:t>
+                        <a:t>249</a:t>
                       </a:r>
                       <a:endParaRPr lang="en-US" sz="950" dirty="0">
                         <a:latin typeface="Calibri" charset="0"/>
@@ -15689,7 +15689,7 @@
                           <a:ea typeface="Calibri" pitchFamily="34" charset="-122"/>
                           <a:cs typeface="Calibri" pitchFamily="34" charset="-120"/>
                         </a:rPr>
-                        <a:t>48.4%</a:t>
+                        <a:t>49.1%</a:t>
                       </a:r>
                       <a:endParaRPr lang="en-US" sz="950" dirty="0">
                         <a:latin typeface="Calibri" charset="0"/>
@@ -15834,6 +15834,868 @@
                 <a:extLst>
                   <a:ext uri="{0D108BD9-81ED-4DB2-BD59-A6C34878D82A}">
                     <a16:rowId xmlns:a16="http://schemas.microsoft.com/office/drawing/2014/main" val="10002"/>
+                  </a:ext>
+                </a:extLst>
+              </a:tr>
+              <a:tr h="237744">
+                <a:tc>
+                  <a:txBody>
+                    <a:bodyPr/>
+                    <a:lstStyle/>
+                    <a:p>
+                      <a:pPr marL="0" indent="0" algn="l">
+                        <a:buNone/>
+                      </a:pPr>
+                      <a:r>
+                        <a:rPr lang="en-US" sz="950" dirty="0">
+                          <a:solidFill>
+                            <a:srgbClr val="1A1A1A"/>
+                          </a:solidFill>
+                          <a:latin typeface="Calibri" pitchFamily="34" charset="0"/>
+                          <a:ea typeface="Calibri" pitchFamily="34" charset="-122"/>
+                          <a:cs typeface="Calibri" pitchFamily="34" charset="-120"/>
+                        </a:rPr>
+                        <a:t>Video</a:t>
+                      </a:r>
+                      <a:endParaRPr lang="en-US" sz="950" dirty="0">
+                        <a:latin typeface="Calibri" charset="0"/>
+                        <a:ea typeface="Calibri" charset="0"/>
+                        <a:cs typeface="Calibri" charset="0"/>
+                      </a:endParaRPr>
+                    </a:p>
+                  </a:txBody>
+                  <a:tcPr marL="54864" marR="54864" marT="27432" marB="27432" anchor="ctr">
+                    <a:lnL w="0" cap="flat" cmpd="sng" algn="ctr">
+                      <a:noFill/>
+                    </a:lnL>
+                    <a:lnR w="0" cap="flat" cmpd="sng" algn="ctr">
+                      <a:noFill/>
+                    </a:lnR>
+                    <a:lnT w="6350" cap="flat" cmpd="sng" algn="ctr">
+                      <a:solidFill>
+                        <a:srgbClr val="E3E6EA"/>
+                      </a:solidFill>
+                      <a:prstDash val="solid"/>
+                      <a:round/>
+                      <a:headEnd type="none" w="med" len="med"/>
+                      <a:tailEnd type="none" w="med" len="med"/>
+                    </a:lnT>
+                    <a:lnB w="6350" cap="flat" cmpd="sng" algn="ctr">
+                      <a:solidFill>
+                        <a:srgbClr val="E3E6EA"/>
+                      </a:solidFill>
+                      <a:prstDash val="solid"/>
+                      <a:round/>
+                      <a:headEnd type="none" w="med" len="med"/>
+                      <a:tailEnd type="none" w="med" len="med"/>
+                    </a:lnB>
+                  </a:tcPr>
+                </a:tc>
+                <a:tc>
+                  <a:txBody>
+                    <a:bodyPr/>
+                    <a:lstStyle/>
+                    <a:p>
+                      <a:pPr marL="0" indent="0" algn="r">
+                        <a:buNone/>
+                      </a:pPr>
+                      <a:r>
+                        <a:rPr lang="en-US" sz="950" dirty="0">
+                          <a:solidFill>
+                            <a:srgbClr val="1A1A1A"/>
+                          </a:solidFill>
+                          <a:latin typeface="Calibri" pitchFamily="34" charset="0"/>
+                          <a:ea typeface="Calibri" pitchFamily="34" charset="-122"/>
+                          <a:cs typeface="Calibri" pitchFamily="34" charset="-120"/>
+                        </a:rPr>
+                        <a:t>0.2</a:t>
+                      </a:r>
+                      <a:endParaRPr lang="en-US" sz="950" dirty="0">
+                        <a:latin typeface="Calibri" charset="0"/>
+                        <a:ea typeface="Calibri" charset="0"/>
+                        <a:cs typeface="Calibri" charset="0"/>
+                      </a:endParaRPr>
+                    </a:p>
+                  </a:txBody>
+                  <a:tcPr marL="54864" marR="54864" marT="27432" marB="27432" anchor="ctr">
+                    <a:lnL w="0" cap="flat" cmpd="sng" algn="ctr">
+                      <a:noFill/>
+                    </a:lnL>
+                    <a:lnR w="0" cap="flat" cmpd="sng" algn="ctr">
+                      <a:noFill/>
+                    </a:lnR>
+                    <a:lnT w="6350" cap="flat" cmpd="sng" algn="ctr">
+                      <a:solidFill>
+                        <a:srgbClr val="E3E6EA"/>
+                      </a:solidFill>
+                      <a:prstDash val="solid"/>
+                      <a:round/>
+                      <a:headEnd type="none" w="med" len="med"/>
+                      <a:tailEnd type="none" w="med" len="med"/>
+                    </a:lnT>
+                    <a:lnB w="6350" cap="flat" cmpd="sng" algn="ctr">
+                      <a:solidFill>
+                        <a:srgbClr val="E3E6EA"/>
+                      </a:solidFill>
+                      <a:prstDash val="solid"/>
+                      <a:round/>
+                      <a:headEnd type="none" w="med" len="med"/>
+                      <a:tailEnd type="none" w="med" len="med"/>
+                    </a:lnB>
+                  </a:tcPr>
+                </a:tc>
+                <a:tc>
+                  <a:txBody>
+                    <a:bodyPr/>
+                    <a:lstStyle/>
+                    <a:p>
+                      <a:pPr marL="0" indent="0" algn="r">
+                        <a:buNone/>
+                      </a:pPr>
+                      <a:r>
+                        <a:rPr lang="en-US" sz="950" dirty="0">
+                          <a:solidFill>
+                            <a:srgbClr val="1A1A1A"/>
+                          </a:solidFill>
+                          <a:latin typeface="Calibri" pitchFamily="34" charset="0"/>
+                          <a:ea typeface="Calibri" pitchFamily="34" charset="-122"/>
+                          <a:cs typeface="Calibri" pitchFamily="34" charset="-120"/>
+                        </a:rPr>
+                        <a:t>24</a:t>
+                      </a:r>
+                      <a:endParaRPr lang="en-US" sz="950" dirty="0">
+                        <a:latin typeface="Calibri" charset="0"/>
+                        <a:ea typeface="Calibri" charset="0"/>
+                        <a:cs typeface="Calibri" charset="0"/>
+                      </a:endParaRPr>
+                    </a:p>
+                  </a:txBody>
+                  <a:tcPr marL="54864" marR="54864" marT="27432" marB="27432" anchor="ctr">
+                    <a:lnL w="0" cap="flat" cmpd="sng" algn="ctr">
+                      <a:noFill/>
+                    </a:lnL>
+                    <a:lnR w="0" cap="flat" cmpd="sng" algn="ctr">
+                      <a:noFill/>
+                    </a:lnR>
+                    <a:lnT w="6350" cap="flat" cmpd="sng" algn="ctr">
+                      <a:solidFill>
+                        <a:srgbClr val="E3E6EA"/>
+                      </a:solidFill>
+                      <a:prstDash val="solid"/>
+                      <a:round/>
+                      <a:headEnd type="none" w="med" len="med"/>
+                      <a:tailEnd type="none" w="med" len="med"/>
+                    </a:lnT>
+                    <a:lnB w="6350" cap="flat" cmpd="sng" algn="ctr">
+                      <a:solidFill>
+                        <a:srgbClr val="E3E6EA"/>
+                      </a:solidFill>
+                      <a:prstDash val="solid"/>
+                      <a:round/>
+                      <a:headEnd type="none" w="med" len="med"/>
+                      <a:tailEnd type="none" w="med" len="med"/>
+                    </a:lnB>
+                  </a:tcPr>
+                </a:tc>
+                <a:tc>
+                  <a:txBody>
+                    <a:bodyPr/>
+                    <a:lstStyle/>
+                    <a:p>
+                      <a:pPr marL="0" indent="0" algn="r">
+                        <a:buNone/>
+                      </a:pPr>
+                      <a:r>
+                        <a:rPr lang="en-US" sz="950" dirty="0">
+                          <a:solidFill>
+                            <a:srgbClr val="1A1A1A"/>
+                          </a:solidFill>
+                          <a:latin typeface="Calibri" pitchFamily="34" charset="0"/>
+                          <a:ea typeface="Calibri" pitchFamily="34" charset="-122"/>
+                          <a:cs typeface="Calibri" pitchFamily="34" charset="-120"/>
+                        </a:rPr>
+                        <a:t>8</a:t>
+                      </a:r>
+                      <a:endParaRPr lang="en-US" sz="950" dirty="0">
+                        <a:latin typeface="Calibri" charset="0"/>
+                        <a:ea typeface="Calibri" charset="0"/>
+                        <a:cs typeface="Calibri" charset="0"/>
+                      </a:endParaRPr>
+                    </a:p>
+                  </a:txBody>
+                  <a:tcPr marL="54864" marR="54864" marT="27432" marB="27432" anchor="ctr">
+                    <a:lnL w="0" cap="flat" cmpd="sng" algn="ctr">
+                      <a:noFill/>
+                    </a:lnL>
+                    <a:lnR w="0" cap="flat" cmpd="sng" algn="ctr">
+                      <a:noFill/>
+                    </a:lnR>
+                    <a:lnT w="6350" cap="flat" cmpd="sng" algn="ctr">
+                      <a:solidFill>
+                        <a:srgbClr val="E3E6EA"/>
+                      </a:solidFill>
+                      <a:prstDash val="solid"/>
+                      <a:round/>
+                      <a:headEnd type="none" w="med" len="med"/>
+                      <a:tailEnd type="none" w="med" len="med"/>
+                    </a:lnT>
+                    <a:lnB w="6350" cap="flat" cmpd="sng" algn="ctr">
+                      <a:solidFill>
+                        <a:srgbClr val="E3E6EA"/>
+                      </a:solidFill>
+                      <a:prstDash val="solid"/>
+                      <a:round/>
+                      <a:headEnd type="none" w="med" len="med"/>
+                      <a:tailEnd type="none" w="med" len="med"/>
+                    </a:lnB>
+                  </a:tcPr>
+                </a:tc>
+                <a:tc>
+                  <a:txBody>
+                    <a:bodyPr/>
+                    <a:lstStyle/>
+                    <a:p>
+                      <a:pPr marL="0" indent="0" algn="r">
+                        <a:buNone/>
+                      </a:pPr>
+                      <a:r>
+                        <a:rPr lang="en-US" sz="950" dirty="0">
+                          <a:solidFill>
+                            <a:srgbClr val="1A1A1A"/>
+                          </a:solidFill>
+                          <a:latin typeface="Calibri" pitchFamily="34" charset="0"/>
+                          <a:ea typeface="Calibri" pitchFamily="34" charset="-122"/>
+                          <a:cs typeface="Calibri" pitchFamily="34" charset="-120"/>
+                        </a:rPr>
+                        <a:t>0</a:t>
+                      </a:r>
+                      <a:endParaRPr lang="en-US" sz="950" dirty="0">
+                        <a:latin typeface="Calibri" charset="0"/>
+                        <a:ea typeface="Calibri" charset="0"/>
+                        <a:cs typeface="Calibri" charset="0"/>
+                      </a:endParaRPr>
+                    </a:p>
+                  </a:txBody>
+                  <a:tcPr marL="54864" marR="54864" marT="27432" marB="27432" anchor="ctr">
+                    <a:lnL w="0" cap="flat" cmpd="sng" algn="ctr">
+                      <a:noFill/>
+                    </a:lnL>
+                    <a:lnR w="0" cap="flat" cmpd="sng" algn="ctr">
+                      <a:noFill/>
+                    </a:lnR>
+                    <a:lnT w="6350" cap="flat" cmpd="sng" algn="ctr">
+                      <a:solidFill>
+                        <a:srgbClr val="E3E6EA"/>
+                      </a:solidFill>
+                      <a:prstDash val="solid"/>
+                      <a:round/>
+                      <a:headEnd type="none" w="med" len="med"/>
+                      <a:tailEnd type="none" w="med" len="med"/>
+                    </a:lnT>
+                    <a:lnB w="6350" cap="flat" cmpd="sng" algn="ctr">
+                      <a:solidFill>
+                        <a:srgbClr val="E3E6EA"/>
+                      </a:solidFill>
+                      <a:prstDash val="solid"/>
+                      <a:round/>
+                      <a:headEnd type="none" w="med" len="med"/>
+                      <a:tailEnd type="none" w="med" len="med"/>
+                    </a:lnB>
+                  </a:tcPr>
+                </a:tc>
+                <a:tc>
+                  <a:txBody>
+                    <a:bodyPr/>
+                    <a:lstStyle/>
+                    <a:p>
+                      <a:pPr marL="0" indent="0" algn="r">
+                        <a:buNone/>
+                      </a:pPr>
+                      <a:r>
+                        <a:rPr lang="en-US" sz="950" b="1" dirty="0">
+                          <a:solidFill>
+                            <a:srgbClr val="A8052E"/>
+                          </a:solidFill>
+                          <a:latin typeface="Calibri" pitchFamily="34" charset="0"/>
+                          <a:ea typeface="Calibri" pitchFamily="34" charset="-122"/>
+                          <a:cs typeface="Calibri" pitchFamily="34" charset="-120"/>
+                        </a:rPr>
+                        <a:t>76.0%</a:t>
+                      </a:r>
+                      <a:endParaRPr lang="en-US" sz="950" dirty="0">
+                        <a:latin typeface="Calibri" charset="0"/>
+                        <a:ea typeface="Calibri" charset="0"/>
+                        <a:cs typeface="Calibri" charset="0"/>
+                      </a:endParaRPr>
+                    </a:p>
+                  </a:txBody>
+                  <a:tcPr marL="54864" marR="54864" marT="27432" marB="27432" anchor="ctr">
+                    <a:lnL w="0" cap="flat" cmpd="sng" algn="ctr">
+                      <a:noFill/>
+                    </a:lnL>
+                    <a:lnR w="0" cap="flat" cmpd="sng" algn="ctr">
+                      <a:noFill/>
+                    </a:lnR>
+                    <a:lnT w="6350" cap="flat" cmpd="sng" algn="ctr">
+                      <a:solidFill>
+                        <a:srgbClr val="E3E6EA"/>
+                      </a:solidFill>
+                      <a:prstDash val="solid"/>
+                      <a:round/>
+                      <a:headEnd type="none" w="med" len="med"/>
+                      <a:tailEnd type="none" w="med" len="med"/>
+                    </a:lnT>
+                    <a:lnB w="6350" cap="flat" cmpd="sng" algn="ctr">
+                      <a:solidFill>
+                        <a:srgbClr val="E3E6EA"/>
+                      </a:solidFill>
+                      <a:prstDash val="solid"/>
+                      <a:round/>
+                      <a:headEnd type="none" w="med" len="med"/>
+                      <a:tailEnd type="none" w="med" len="med"/>
+                    </a:lnB>
+                  </a:tcPr>
+                </a:tc>
+                <a:tc>
+                  <a:txBody>
+                    <a:bodyPr/>
+                    <a:lstStyle/>
+                    <a:p>
+                      <a:pPr marL="0" indent="0" algn="r">
+                        <a:buNone/>
+                      </a:pPr>
+                      <a:r>
+                        <a:rPr lang="en-US" sz="950" dirty="0">
+                          <a:solidFill>
+                            <a:srgbClr val="1A1A1A"/>
+                          </a:solidFill>
+                          <a:latin typeface="Calibri" pitchFamily="34" charset="0"/>
+                          <a:ea typeface="Calibri" pitchFamily="34" charset="-122"/>
+                          <a:cs typeface="Calibri" pitchFamily="34" charset="-120"/>
+                        </a:rPr>
+                        <a:t/>
+                      </a:r>
+                      <a:endParaRPr lang="en-US" sz="950" dirty="0">
+                        <a:latin typeface="Calibri" charset="0"/>
+                        <a:ea typeface="Calibri" charset="0"/>
+                        <a:cs typeface="Calibri" charset="0"/>
+                      </a:endParaRPr>
+                    </a:p>
+                  </a:txBody>
+                  <a:tcPr marL="54864" marR="54864" marT="27432" marB="27432" anchor="ctr">
+                    <a:lnL w="0" cap="flat" cmpd="sng" algn="ctr">
+                      <a:noFill/>
+                    </a:lnL>
+                    <a:lnR w="0" cap="flat" cmpd="sng" algn="ctr">
+                      <a:noFill/>
+                    </a:lnR>
+                    <a:lnT w="6350" cap="flat" cmpd="sng" algn="ctr">
+                      <a:solidFill>
+                        <a:srgbClr val="E3E6EA"/>
+                      </a:solidFill>
+                      <a:prstDash val="solid"/>
+                      <a:round/>
+                      <a:headEnd type="none" w="med" len="med"/>
+                      <a:tailEnd type="none" w="med" len="med"/>
+                    </a:lnT>
+                    <a:lnB w="6350" cap="flat" cmpd="sng" algn="ctr">
+                      <a:solidFill>
+                        <a:srgbClr val="E3E6EA"/>
+                      </a:solidFill>
+                      <a:prstDash val="solid"/>
+                      <a:round/>
+                      <a:headEnd type="none" w="med" len="med"/>
+                      <a:tailEnd type="none" w="med" len="med"/>
+                    </a:lnB>
+                  </a:tcPr>
+                </a:tc>
+                <a:tc>
+                  <a:txBody>
+                    <a:bodyPr/>
+                    <a:lstStyle/>
+                    <a:p>
+                      <a:pPr marL="0" indent="0" algn="r">
+                        <a:buNone/>
+                      </a:pPr>
+                      <a:r>
+                        <a:rPr lang="en-US" sz="950" dirty="0">
+                          <a:solidFill>
+                            <a:srgbClr val="A8052E"/>
+                          </a:solidFill>
+                          <a:latin typeface="Calibri" pitchFamily="34" charset="0"/>
+                          <a:ea typeface="Calibri" pitchFamily="34" charset="-122"/>
+                          <a:cs typeface="Calibri" pitchFamily="34" charset="-120"/>
+                        </a:rPr>
+                        <a:t/>
+                      </a:r>
+                      <a:endParaRPr lang="en-US" sz="950" dirty="0">
+                        <a:latin typeface="Calibri" charset="0"/>
+                        <a:ea typeface="Calibri" charset="0"/>
+                        <a:cs typeface="Calibri" charset="0"/>
+                      </a:endParaRPr>
+                    </a:p>
+                  </a:txBody>
+                  <a:tcPr marL="54864" marR="54864" marT="27432" marB="27432" anchor="ctr">
+                    <a:lnL w="0" cap="flat" cmpd="sng" algn="ctr">
+                      <a:noFill/>
+                    </a:lnL>
+                    <a:lnR w="0" cap="flat" cmpd="sng" algn="ctr">
+                      <a:noFill/>
+                    </a:lnR>
+                    <a:lnT w="6350" cap="flat" cmpd="sng" algn="ctr">
+                      <a:solidFill>
+                        <a:srgbClr val="E3E6EA"/>
+                      </a:solidFill>
+                      <a:prstDash val="solid"/>
+                      <a:round/>
+                      <a:headEnd type="none" w="med" len="med"/>
+                      <a:tailEnd type="none" w="med" len="med"/>
+                    </a:lnT>
+                    <a:lnB w="6350" cap="flat" cmpd="sng" algn="ctr">
+                      <a:solidFill>
+                        <a:srgbClr val="E3E6EA"/>
+                      </a:solidFill>
+                      <a:prstDash val="solid"/>
+                      <a:round/>
+                      <a:headEnd type="none" w="med" len="med"/>
+                      <a:tailEnd type="none" w="med" len="med"/>
+                    </a:lnB>
+                  </a:tcPr>
+                </a:tc>
+                <a:extLst>
+                  <a:ext uri="{0D108BD9-81ED-4DB2-BD59-A6C34878D82A}">
+                    <a16:rowId xmlns:a16="http://schemas.microsoft.com/office/drawing/2014/main" val="10003"/>
+                  </a:ext>
+                </a:extLst>
+              </a:tr>
+              <a:tr h="237744">
+                <a:tc>
+                  <a:txBody>
+                    <a:bodyPr/>
+                    <a:lstStyle/>
+                    <a:p>
+                      <a:pPr marL="0" indent="0" algn="l">
+                        <a:buNone/>
+                      </a:pPr>
+                      <a:r>
+                        <a:rPr lang="en-US" sz="950" dirty="0">
+                          <a:solidFill>
+                            <a:srgbClr val="1A1A1A"/>
+                          </a:solidFill>
+                          <a:latin typeface="Calibri" pitchFamily="34" charset="0"/>
+                          <a:ea typeface="Calibri" pitchFamily="34" charset="-122"/>
+                          <a:cs typeface="Calibri" pitchFamily="34" charset="-120"/>
+                        </a:rPr>
+                        <a:t>Integration</a:t>
+                      </a:r>
+                      <a:endParaRPr lang="en-US" sz="950" dirty="0">
+                        <a:latin typeface="Calibri" charset="0"/>
+                        <a:ea typeface="Calibri" charset="0"/>
+                        <a:cs typeface="Calibri" charset="0"/>
+                      </a:endParaRPr>
+                    </a:p>
+                  </a:txBody>
+                  <a:tcPr marL="54864" marR="54864" marT="27432" marB="27432" anchor="ctr">
+                    <a:lnL w="0" cap="flat" cmpd="sng" algn="ctr">
+                      <a:noFill/>
+                    </a:lnL>
+                    <a:lnR w="0" cap="flat" cmpd="sng" algn="ctr">
+                      <a:noFill/>
+                    </a:lnR>
+                    <a:lnT w="6350" cap="flat" cmpd="sng" algn="ctr">
+                      <a:solidFill>
+                        <a:srgbClr val="E3E6EA"/>
+                      </a:solidFill>
+                      <a:prstDash val="solid"/>
+                      <a:round/>
+                      <a:headEnd type="none" w="med" len="med"/>
+                      <a:tailEnd type="none" w="med" len="med"/>
+                    </a:lnT>
+                    <a:lnB w="6350" cap="flat" cmpd="sng" algn="ctr">
+                      <a:solidFill>
+                        <a:srgbClr val="E3E6EA"/>
+                      </a:solidFill>
+                      <a:prstDash val="solid"/>
+                      <a:round/>
+                      <a:headEnd type="none" w="med" len="med"/>
+                      <a:tailEnd type="none" w="med" len="med"/>
+                    </a:lnB>
+                  </a:tcPr>
+                </a:tc>
+                <a:tc>
+                  <a:txBody>
+                    <a:bodyPr/>
+                    <a:lstStyle/>
+                    <a:p>
+                      <a:pPr marL="0" indent="0" algn="r">
+                        <a:buNone/>
+                      </a:pPr>
+                      <a:r>
+                        <a:rPr lang="en-US" sz="950" dirty="0">
+                          <a:solidFill>
+                            <a:srgbClr val="1A1A1A"/>
+                          </a:solidFill>
+                          <a:latin typeface="Calibri" pitchFamily="34" charset="0"/>
+                          <a:ea typeface="Calibri" pitchFamily="34" charset="-122"/>
+                          <a:cs typeface="Calibri" pitchFamily="34" charset="-120"/>
+                        </a:rPr>
+                        <a:t>0.1</a:t>
+                      </a:r>
+                      <a:endParaRPr lang="en-US" sz="950" dirty="0">
+                        <a:latin typeface="Calibri" charset="0"/>
+                        <a:ea typeface="Calibri" charset="0"/>
+                        <a:cs typeface="Calibri" charset="0"/>
+                      </a:endParaRPr>
+                    </a:p>
+                  </a:txBody>
+                  <a:tcPr marL="54864" marR="54864" marT="27432" marB="27432" anchor="ctr">
+                    <a:lnL w="0" cap="flat" cmpd="sng" algn="ctr">
+                      <a:noFill/>
+                    </a:lnL>
+                    <a:lnR w="0" cap="flat" cmpd="sng" algn="ctr">
+                      <a:noFill/>
+                    </a:lnR>
+                    <a:lnT w="6350" cap="flat" cmpd="sng" algn="ctr">
+                      <a:solidFill>
+                        <a:srgbClr val="E3E6EA"/>
+                      </a:solidFill>
+                      <a:prstDash val="solid"/>
+                      <a:round/>
+                      <a:headEnd type="none" w="med" len="med"/>
+                      <a:tailEnd type="none" w="med" len="med"/>
+                    </a:lnT>
+                    <a:lnB w="6350" cap="flat" cmpd="sng" algn="ctr">
+                      <a:solidFill>
+                        <a:srgbClr val="E3E6EA"/>
+                      </a:solidFill>
+                      <a:prstDash val="solid"/>
+                      <a:round/>
+                      <a:headEnd type="none" w="med" len="med"/>
+                      <a:tailEnd type="none" w="med" len="med"/>
+                    </a:lnB>
+                  </a:tcPr>
+                </a:tc>
+                <a:tc>
+                  <a:txBody>
+                    <a:bodyPr/>
+                    <a:lstStyle/>
+                    <a:p>
+                      <a:pPr marL="0" indent="0" algn="r">
+                        <a:buNone/>
+                      </a:pPr>
+                      <a:r>
+                        <a:rPr lang="en-US" sz="950" dirty="0">
+                          <a:solidFill>
+                            <a:srgbClr val="1A1A1A"/>
+                          </a:solidFill>
+                          <a:latin typeface="Calibri" pitchFamily="34" charset="0"/>
+                          <a:ea typeface="Calibri" pitchFamily="34" charset="-122"/>
+                          <a:cs typeface="Calibri" pitchFamily="34" charset="-120"/>
+                        </a:rPr>
+                        <a:t>10</a:t>
+                      </a:r>
+                      <a:endParaRPr lang="en-US" sz="950" dirty="0">
+                        <a:latin typeface="Calibri" charset="0"/>
+                        <a:ea typeface="Calibri" charset="0"/>
+                        <a:cs typeface="Calibri" charset="0"/>
+                      </a:endParaRPr>
+                    </a:p>
+                  </a:txBody>
+                  <a:tcPr marL="54864" marR="54864" marT="27432" marB="27432" anchor="ctr">
+                    <a:lnL w="0" cap="flat" cmpd="sng" algn="ctr">
+                      <a:noFill/>
+                    </a:lnL>
+                    <a:lnR w="0" cap="flat" cmpd="sng" algn="ctr">
+                      <a:noFill/>
+                    </a:lnR>
+                    <a:lnT w="6350" cap="flat" cmpd="sng" algn="ctr">
+                      <a:solidFill>
+                        <a:srgbClr val="E3E6EA"/>
+                      </a:solidFill>
+                      <a:prstDash val="solid"/>
+                      <a:round/>
+                      <a:headEnd type="none" w="med" len="med"/>
+                      <a:tailEnd type="none" w="med" len="med"/>
+                    </a:lnT>
+                    <a:lnB w="6350" cap="flat" cmpd="sng" algn="ctr">
+                      <a:solidFill>
+                        <a:srgbClr val="E3E6EA"/>
+                      </a:solidFill>
+                      <a:prstDash val="solid"/>
+                      <a:round/>
+                      <a:headEnd type="none" w="med" len="med"/>
+                      <a:tailEnd type="none" w="med" len="med"/>
+                    </a:lnB>
+                  </a:tcPr>
+                </a:tc>
+                <a:tc>
+                  <a:txBody>
+                    <a:bodyPr/>
+                    <a:lstStyle/>
+                    <a:p>
+                      <a:pPr marL="0" indent="0" algn="r">
+                        <a:buNone/>
+                      </a:pPr>
+                      <a:r>
+                        <a:rPr lang="en-US" sz="950" dirty="0">
+                          <a:solidFill>
+                            <a:srgbClr val="1A1A1A"/>
+                          </a:solidFill>
+                          <a:latin typeface="Calibri" pitchFamily="34" charset="0"/>
+                          <a:ea typeface="Calibri" pitchFamily="34" charset="-122"/>
+                          <a:cs typeface="Calibri" pitchFamily="34" charset="-120"/>
+                        </a:rPr>
+                        <a:t>0</a:t>
+                      </a:r>
+                      <a:endParaRPr lang="en-US" sz="950" dirty="0">
+                        <a:latin typeface="Calibri" charset="0"/>
+                        <a:ea typeface="Calibri" charset="0"/>
+                        <a:cs typeface="Calibri" charset="0"/>
+                      </a:endParaRPr>
+                    </a:p>
+                  </a:txBody>
+                  <a:tcPr marL="54864" marR="54864" marT="27432" marB="27432" anchor="ctr">
+                    <a:lnL w="0" cap="flat" cmpd="sng" algn="ctr">
+                      <a:noFill/>
+                    </a:lnL>
+                    <a:lnR w="0" cap="flat" cmpd="sng" algn="ctr">
+                      <a:noFill/>
+                    </a:lnR>
+                    <a:lnT w="6350" cap="flat" cmpd="sng" algn="ctr">
+                      <a:solidFill>
+                        <a:srgbClr val="E3E6EA"/>
+                      </a:solidFill>
+                      <a:prstDash val="solid"/>
+                      <a:round/>
+                      <a:headEnd type="none" w="med" len="med"/>
+                      <a:tailEnd type="none" w="med" len="med"/>
+                    </a:lnT>
+                    <a:lnB w="6350" cap="flat" cmpd="sng" algn="ctr">
+                      <a:solidFill>
+                        <a:srgbClr val="E3E6EA"/>
+                      </a:solidFill>
+                      <a:prstDash val="solid"/>
+                      <a:round/>
+                      <a:headEnd type="none" w="med" len="med"/>
+                      <a:tailEnd type="none" w="med" len="med"/>
+                    </a:lnB>
+                  </a:tcPr>
+                </a:tc>
+                <a:tc>
+                  <a:txBody>
+                    <a:bodyPr/>
+                    <a:lstStyle/>
+                    <a:p>
+                      <a:pPr marL="0" indent="0" algn="r">
+                        <a:buNone/>
+                      </a:pPr>
+                      <a:r>
+                        <a:rPr lang="en-US" sz="950" dirty="0">
+                          <a:solidFill>
+                            <a:srgbClr val="1A1A1A"/>
+                          </a:solidFill>
+                          <a:latin typeface="Calibri" pitchFamily="34" charset="0"/>
+                          <a:ea typeface="Calibri" pitchFamily="34" charset="-122"/>
+                          <a:cs typeface="Calibri" pitchFamily="34" charset="-120"/>
+                        </a:rPr>
+                        <a:t>0</a:t>
+                      </a:r>
+                      <a:endParaRPr lang="en-US" sz="950" dirty="0">
+                        <a:latin typeface="Calibri" charset="0"/>
+                        <a:ea typeface="Calibri" charset="0"/>
+                        <a:cs typeface="Calibri" charset="0"/>
+                      </a:endParaRPr>
+                    </a:p>
+                  </a:txBody>
+                  <a:tcPr marL="54864" marR="54864" marT="27432" marB="27432" anchor="ctr">
+                    <a:lnL w="0" cap="flat" cmpd="sng" algn="ctr">
+                      <a:noFill/>
+                    </a:lnL>
+                    <a:lnR w="0" cap="flat" cmpd="sng" algn="ctr">
+                      <a:noFill/>
+                    </a:lnR>
+                    <a:lnT w="6350" cap="flat" cmpd="sng" algn="ctr">
+                      <a:solidFill>
+                        <a:srgbClr val="E3E6EA"/>
+                      </a:solidFill>
+                      <a:prstDash val="solid"/>
+                      <a:round/>
+                      <a:headEnd type="none" w="med" len="med"/>
+                      <a:tailEnd type="none" w="med" len="med"/>
+                    </a:lnT>
+                    <a:lnB w="6350" cap="flat" cmpd="sng" algn="ctr">
+                      <a:solidFill>
+                        <a:srgbClr val="E3E6EA"/>
+                      </a:solidFill>
+                      <a:prstDash val="solid"/>
+                      <a:round/>
+                      <a:headEnd type="none" w="med" len="med"/>
+                      <a:tailEnd type="none" w="med" len="med"/>
+                    </a:lnB>
+                  </a:tcPr>
+                </a:tc>
+                <a:tc>
+                  <a:txBody>
+                    <a:bodyPr/>
+                    <a:lstStyle/>
+                    <a:p>
+                      <a:pPr marL="0" indent="0" algn="r">
+                        <a:buNone/>
+                      </a:pPr>
+                      <a:r>
+                        <a:rPr lang="en-US" sz="950" b="1" dirty="0">
+                          <a:solidFill>
+                            <a:srgbClr val="A8052E"/>
+                          </a:solidFill>
+                          <a:latin typeface="Calibri" pitchFamily="34" charset="0"/>
+                          <a:ea typeface="Calibri" pitchFamily="34" charset="-122"/>
+                          <a:cs typeface="Calibri" pitchFamily="34" charset="-120"/>
+                        </a:rPr>
+                        <a:t>100.0%</a:t>
+                      </a:r>
+                      <a:endParaRPr lang="en-US" sz="950" dirty="0">
+                        <a:latin typeface="Calibri" charset="0"/>
+                        <a:ea typeface="Calibri" charset="0"/>
+                        <a:cs typeface="Calibri" charset="0"/>
+                      </a:endParaRPr>
+                    </a:p>
+                  </a:txBody>
+                  <a:tcPr marL="54864" marR="54864" marT="27432" marB="27432" anchor="ctr">
+                    <a:lnL w="0" cap="flat" cmpd="sng" algn="ctr">
+                      <a:noFill/>
+                    </a:lnL>
+                    <a:lnR w="0" cap="flat" cmpd="sng" algn="ctr">
+                      <a:noFill/>
+                    </a:lnR>
+                    <a:lnT w="6350" cap="flat" cmpd="sng" algn="ctr">
+                      <a:solidFill>
+                        <a:srgbClr val="E3E6EA"/>
+                      </a:solidFill>
+                      <a:prstDash val="solid"/>
+                      <a:round/>
+                      <a:headEnd type="none" w="med" len="med"/>
+                      <a:tailEnd type="none" w="med" len="med"/>
+                    </a:lnT>
+                    <a:lnB w="6350" cap="flat" cmpd="sng" algn="ctr">
+                      <a:solidFill>
+                        <a:srgbClr val="E3E6EA"/>
+                      </a:solidFill>
+                      <a:prstDash val="solid"/>
+                      <a:round/>
+                      <a:headEnd type="none" w="med" len="med"/>
+                      <a:tailEnd type="none" w="med" len="med"/>
+                    </a:lnB>
+                  </a:tcPr>
+                </a:tc>
+                <a:tc>
+                  <a:txBody>
+                    <a:bodyPr/>
+                    <a:lstStyle/>
+                    <a:p>
+                      <a:pPr marL="0" indent="0" algn="r">
+                        <a:buNone/>
+                      </a:pPr>
+                      <a:r>
+                        <a:rPr lang="en-US" sz="950" dirty="0">
+                          <a:solidFill>
+                            <a:srgbClr val="1A1A1A"/>
+                          </a:solidFill>
+                          <a:latin typeface="Calibri" pitchFamily="34" charset="0"/>
+                          <a:ea typeface="Calibri" pitchFamily="34" charset="-122"/>
+                          <a:cs typeface="Calibri" pitchFamily="34" charset="-120"/>
+                        </a:rPr>
+                        <a:t/>
+                      </a:r>
+                      <a:endParaRPr lang="en-US" sz="950" dirty="0">
+                        <a:latin typeface="Calibri" charset="0"/>
+                        <a:ea typeface="Calibri" charset="0"/>
+                        <a:cs typeface="Calibri" charset="0"/>
+                      </a:endParaRPr>
+                    </a:p>
+                  </a:txBody>
+                  <a:tcPr marL="54864" marR="54864" marT="27432" marB="27432" anchor="ctr">
+                    <a:lnL w="0" cap="flat" cmpd="sng" algn="ctr">
+                      <a:noFill/>
+                    </a:lnL>
+                    <a:lnR w="0" cap="flat" cmpd="sng" algn="ctr">
+                      <a:noFill/>
+                    </a:lnR>
+                    <a:lnT w="6350" cap="flat" cmpd="sng" algn="ctr">
+                      <a:solidFill>
+                        <a:srgbClr val="E3E6EA"/>
+                      </a:solidFill>
+                      <a:prstDash val="solid"/>
+                      <a:round/>
+                      <a:headEnd type="none" w="med" len="med"/>
+                      <a:tailEnd type="none" w="med" len="med"/>
+                    </a:lnT>
+                    <a:lnB w="6350" cap="flat" cmpd="sng" algn="ctr">
+                      <a:solidFill>
+                        <a:srgbClr val="E3E6EA"/>
+                      </a:solidFill>
+                      <a:prstDash val="solid"/>
+                      <a:round/>
+                      <a:headEnd type="none" w="med" len="med"/>
+                      <a:tailEnd type="none" w="med" len="med"/>
+                    </a:lnB>
+                  </a:tcPr>
+                </a:tc>
+                <a:tc>
+                  <a:txBody>
+                    <a:bodyPr/>
+                    <a:lstStyle/>
+                    <a:p>
+                      <a:pPr marL="0" indent="0" algn="r">
+                        <a:buNone/>
+                      </a:pPr>
+                      <a:r>
+                        <a:rPr lang="en-US" sz="950" dirty="0">
+                          <a:solidFill>
+                            <a:srgbClr val="A8052E"/>
+                          </a:solidFill>
+                          <a:latin typeface="Calibri" pitchFamily="34" charset="0"/>
+                          <a:ea typeface="Calibri" pitchFamily="34" charset="-122"/>
+                          <a:cs typeface="Calibri" pitchFamily="34" charset="-120"/>
+                        </a:rPr>
+                        <a:t/>
+                      </a:r>
+                      <a:endParaRPr lang="en-US" sz="950" dirty="0">
+                        <a:latin typeface="Calibri" charset="0"/>
+                        <a:ea typeface="Calibri" charset="0"/>
+                        <a:cs typeface="Calibri" charset="0"/>
+                      </a:endParaRPr>
+                    </a:p>
+                  </a:txBody>
+                  <a:tcPr marL="54864" marR="54864" marT="27432" marB="27432" anchor="ctr">
+                    <a:lnL w="0" cap="flat" cmpd="sng" algn="ctr">
+                      <a:noFill/>
+                    </a:lnL>
+                    <a:lnR w="0" cap="flat" cmpd="sng" algn="ctr">
+                      <a:noFill/>
+                    </a:lnR>
+                    <a:lnT w="6350" cap="flat" cmpd="sng" algn="ctr">
+                      <a:solidFill>
+                        <a:srgbClr val="E3E6EA"/>
+                      </a:solidFill>
+                      <a:prstDash val="solid"/>
+                      <a:round/>
+                      <a:headEnd type="none" w="med" len="med"/>
+                      <a:tailEnd type="none" w="med" len="med"/>
+                    </a:lnT>
+                    <a:lnB w="6350" cap="flat" cmpd="sng" algn="ctr">
+                      <a:solidFill>
+                        <a:srgbClr val="E3E6EA"/>
+                      </a:solidFill>
+                      <a:prstDash val="solid"/>
+                      <a:round/>
+                      <a:headEnd type="none" w="med" len="med"/>
+                      <a:tailEnd type="none" w="med" len="med"/>
+                    </a:lnB>
+                  </a:tcPr>
+                </a:tc>
+                <a:extLst>
+                  <a:ext uri="{0D108BD9-81ED-4DB2-BD59-A6C34878D82A}">
+                    <a16:rowId xmlns:a16="http://schemas.microsoft.com/office/drawing/2014/main" val="10004"/>
                   </a:ext>
                 </a:extLst>
               </a:tr>
@@ -15961,7 +16823,7 @@
                           <a:ea typeface="Calibri" pitchFamily="34" charset="-122"/>
                           <a:cs typeface="Calibri" pitchFamily="34" charset="-120"/>
                         </a:rPr>
-                        <a:t>40</a:t>
+                        <a:t>31</a:t>
                       </a:r>
                       <a:endParaRPr lang="en-US" sz="950" dirty="0">
                         <a:latin typeface="Calibri" charset="0"/>
@@ -16014,7 +16876,7 @@
                           <a:ea typeface="Calibri" pitchFamily="34" charset="-122"/>
                           <a:cs typeface="Calibri" pitchFamily="34" charset="-120"/>
                         </a:rPr>
-                        <a:t>82</a:t>
+                        <a:t>84</a:t>
                       </a:r>
                       <a:endParaRPr lang="en-US" sz="950" dirty="0">
                         <a:latin typeface="Calibri" charset="0"/>
@@ -16120,7 +16982,7 @@
                           <a:ea typeface="Calibri" pitchFamily="34" charset="-122"/>
                           <a:cs typeface="Calibri" pitchFamily="34" charset="-120"/>
                         </a:rPr>
-                        <a:t>33.1%</a:t>
+                        <a:t>26.8%</a:t>
                       </a:r>
                       <a:endParaRPr lang="en-US" sz="950" dirty="0">
                         <a:latin typeface="Calibri" charset="0"/>
@@ -16264,7 +17126,7 @@
                 </a:tc>
                 <a:extLst>
                   <a:ext uri="{0D108BD9-81ED-4DB2-BD59-A6C34878D82A}">
-                    <a16:rowId xmlns:a16="http://schemas.microsoft.com/office/drawing/2014/main" val="10003"/>
+                    <a16:rowId xmlns:a16="http://schemas.microsoft.com/office/drawing/2014/main" val="10005"/>
                   </a:ext>
                 </a:extLst>
               </a:tr>
@@ -16342,7 +17204,7 @@
                           <a:ea typeface="Calibri" pitchFamily="34" charset="-122"/>
                           <a:cs typeface="Calibri" pitchFamily="34" charset="-120"/>
                         </a:rPr>
-                        <a:t>15.9</a:t>
+                        <a:t>15.8</a:t>
                       </a:r>
                       <a:endParaRPr lang="en-US" sz="950" dirty="0">
                         <a:latin typeface="Calibri" charset="0"/>
@@ -16398,7 +17260,7 @@
                           <a:ea typeface="Calibri" pitchFamily="34" charset="-122"/>
                           <a:cs typeface="Calibri" pitchFamily="34" charset="-120"/>
                         </a:rPr>
-                        <a:t>2,438</a:t>
+                        <a:t>2,437</a:t>
                       </a:r>
                       <a:endParaRPr lang="en-US" sz="950" dirty="0">
                         <a:latin typeface="Calibri" charset="0"/>
@@ -16454,7 +17316,7 @@
                           <a:ea typeface="Calibri" pitchFamily="34" charset="-122"/>
                           <a:cs typeface="Calibri" pitchFamily="34" charset="-120"/>
                         </a:rPr>
-                        <a:t>365</a:t>
+                        <a:t>366</a:t>
                       </a:r>
                       <a:endParaRPr lang="en-US" sz="950" dirty="0">
                         <a:latin typeface="Calibri" charset="0"/>
@@ -16824,7 +17686,7 @@
                 <a:ea typeface="Calibri" pitchFamily="34" charset="-122"/>
                 <a:cs typeface="Calibri" pitchFamily="34" charset="-120"/>
               </a:rPr>
-              <a:t>Support shows 100 per cent because no non-chargeable hours are recorded.</a:t>
+              <a:t>Every department reports hours now, off the raw timesheet in her report.</a:t>
             </a:r>
             <a:endParaRPr lang="en-US" sz="1050" dirty="0"/>
           </a:p>
@@ -16845,7 +17707,7 @@
                 <a:ea typeface="Calibri" pitchFamily="34" charset="-122"/>
                 <a:cs typeface="Calibri" pitchFamily="34" charset="-120"/>
               </a:rPr>
-              <a:t>That is a reporting gap. Fix it before the next board pack.</a:t>
+              <a:t>Support is at 99.5 per cent. It still records almost no non-chargeable time.</a:t>
             </a:r>
             <a:endParaRPr lang="en-US" sz="1050" dirty="0"/>
           </a:p>
@@ -16866,7 +17728,7 @@
                 <a:ea typeface="Calibri" pitchFamily="34" charset="-122"/>
                 <a:cs typeface="Calibri" pitchFamily="34" charset="-120"/>
               </a:rPr>
-              <a:t>Events is 48 per cent, with more leave than chargeable hours.</a:t>
+              <a:t>Events is at 49 per cent, with more leave than chargeable hours.</a:t>
             </a:r>
             <a:endParaRPr lang="en-US" sz="1050" dirty="0"/>
           </a:p>
@@ -16887,7 +17749,7 @@
                 <a:ea typeface="Calibri" pitchFamily="34" charset="-122"/>
                 <a:cs typeface="Calibri" pitchFamily="34" charset="-120"/>
               </a:rPr>
-              <a:t>Consulting is 33 per cent on 40 chargeable hours.</a:t>
+              <a:t>Consulting is 27 per cent. Video 76 and Integration 100, on tiny volumes.</a:t>
             </a:r>
             <a:endParaRPr lang="en-US" sz="1050" dirty="0"/>
           </a:p>
@@ -16908,7 +17770,7 @@
                 <a:ea typeface="Calibri" pitchFamily="34" charset="-122"/>
                 <a:cs typeface="Calibri" pitchFamily="34" charset="-120"/>
               </a:rPr>
-              <a:t>Video and Integration do not report hours at all.</a:t>
+              <a:t>Hours are split by the department the work was for, same as revenue.</a:t>
             </a:r>
             <a:endParaRPr lang="en-US" sz="1050" dirty="0"/>
           </a:p>
@@ -16978,8 +17840,8 @@
         </p:blipFill>
         <p:spPr>
           <a:xfrm>
-            <a:off x="950573" y="3264408"/>
-            <a:ext cx="4682534" cy="1353312"/>
+            <a:off x="502920" y="3675887"/>
+            <a:ext cx="5577840" cy="914400"/>
           </a:xfrm>
           <a:prstGeom prst="rect">
             <a:avLst/>
@@ -17184,7 +18046,7 @@
                   </a:extLst>
                 </a:gridCol>
               </a:tblGrid>
-              <a:tr h="237744">
+              <a:tr h="435102">
                 <a:tc>
                   <a:txBody>
                     <a:bodyPr/>
@@ -17641,7 +18503,7 @@
                   </a:ext>
                 </a:extLst>
               </a:tr>
-              <a:tr h="237744">
+              <a:tr h="435102">
                 <a:tc>
                   <a:txBody>
                     <a:bodyPr/>
@@ -17712,7 +18574,7 @@
                           <a:ea typeface="Calibri" pitchFamily="34" charset="-122"/>
                           <a:cs typeface="Calibri" pitchFamily="34" charset="-120"/>
                         </a:rPr>
-                        <a:t>100.0%</a:t>
+                        <a:t>99.5%</a:t>
                       </a:r>
                       <a:endParaRPr lang="en-US" sz="900" dirty="0">
                         <a:latin typeface="Calibri" charset="0"/>
@@ -18125,7 +18987,7 @@
                   </a:ext>
                 </a:extLst>
               </a:tr>
-              <a:tr h="237744">
+              <a:tr h="435102">
                 <a:tc>
                   <a:txBody>
                     <a:bodyPr/>
@@ -18196,7 +19058,7 @@
                           <a:ea typeface="Calibri" pitchFamily="34" charset="-122"/>
                           <a:cs typeface="Calibri" pitchFamily="34" charset="-120"/>
                         </a:rPr>
-                        <a:t>48.4%</a:t>
+                        <a:t>49.1%</a:t>
                       </a:r>
                       <a:endParaRPr lang="en-US" sz="900" dirty="0">
                         <a:latin typeface="Calibri" charset="0"/>
@@ -18249,7 +19111,7 @@
                           <a:ea typeface="Calibri" pitchFamily="34" charset="-122"/>
                           <a:cs typeface="Calibri" pitchFamily="34" charset="-120"/>
                         </a:rPr>
-                        <a:t>266</a:t>
+                        <a:t>240</a:t>
                       </a:r>
                       <a:endParaRPr lang="en-US" sz="900" dirty="0">
                         <a:latin typeface="Calibri" charset="0"/>
@@ -18302,7 +19164,7 @@
                           <a:ea typeface="Calibri" pitchFamily="34" charset="-122"/>
                           <a:cs typeface="Calibri" pitchFamily="34" charset="-120"/>
                         </a:rPr>
-                        <a:t>$276</a:t>
+                        <a:t>$305</a:t>
                       </a:r>
                       <a:endParaRPr lang="en-US" sz="900" dirty="0">
                         <a:latin typeface="Calibri" charset="0"/>
@@ -18514,7 +19376,7 @@
                           <a:ea typeface="Calibri" pitchFamily="34" charset="-122"/>
                           <a:cs typeface="Calibri" pitchFamily="34" charset="-120"/>
                         </a:rPr>
-                        <a:t>$233</a:t>
+                        <a:t>$258</a:t>
                       </a:r>
                       <a:endParaRPr lang="en-US" sz="900" dirty="0">
                         <a:latin typeface="Calibri" charset="0"/>
@@ -18567,7 +19429,7 @@
                           <a:ea typeface="Calibri" pitchFamily="34" charset="-122"/>
                           <a:cs typeface="Calibri" pitchFamily="34" charset="-120"/>
                         </a:rPr>
-                        <a:t>+8</a:t>
+                        <a:t>+7</a:t>
                       </a:r>
                       <a:endParaRPr lang="en-US" sz="900" dirty="0">
                         <a:latin typeface="Calibri" charset="0"/>
@@ -18609,491 +19471,7 @@
                   </a:ext>
                 </a:extLst>
               </a:tr>
-              <a:tr h="237744">
-                <a:tc>
-                  <a:txBody>
-                    <a:bodyPr/>
-                    <a:lstStyle/>
-                    <a:p>
-                      <a:pPr marL="0" indent="0" algn="l">
-                        <a:buNone/>
-                      </a:pPr>
-                      <a:r>
-                        <a:rPr lang="en-US" sz="900" dirty="0">
-                          <a:solidFill>
-                            <a:srgbClr val="1A1A1A"/>
-                          </a:solidFill>
-                          <a:latin typeface="Calibri" pitchFamily="34" charset="0"/>
-                          <a:ea typeface="Calibri" pitchFamily="34" charset="-122"/>
-                          <a:cs typeface="Calibri" pitchFamily="34" charset="-120"/>
-                        </a:rPr>
-                        <a:t>Consulting</a:t>
-                      </a:r>
-                      <a:endParaRPr lang="en-US" sz="900" dirty="0">
-                        <a:latin typeface="Calibri" charset="0"/>
-                        <a:ea typeface="Calibri" charset="0"/>
-                        <a:cs typeface="Calibri" charset="0"/>
-                      </a:endParaRPr>
-                    </a:p>
-                  </a:txBody>
-                  <a:tcPr marL="54864" marR="54864" marT="27432" marB="27432" anchor="ctr">
-                    <a:lnL w="0" cap="flat" cmpd="sng" algn="ctr">
-                      <a:noFill/>
-                    </a:lnL>
-                    <a:lnR w="0" cap="flat" cmpd="sng" algn="ctr">
-                      <a:noFill/>
-                    </a:lnR>
-                    <a:lnT w="6350" cap="flat" cmpd="sng" algn="ctr">
-                      <a:solidFill>
-                        <a:srgbClr val="E3E6EA"/>
-                      </a:solidFill>
-                      <a:prstDash val="solid"/>
-                      <a:round/>
-                      <a:headEnd type="none" w="med" len="med"/>
-                      <a:tailEnd type="none" w="med" len="med"/>
-                    </a:lnT>
-                    <a:lnB w="6350" cap="flat" cmpd="sng" algn="ctr">
-                      <a:solidFill>
-                        <a:srgbClr val="E3E6EA"/>
-                      </a:solidFill>
-                      <a:prstDash val="solid"/>
-                      <a:round/>
-                      <a:headEnd type="none" w="med" len="med"/>
-                      <a:tailEnd type="none" w="med" len="med"/>
-                    </a:lnB>
-                  </a:tcPr>
-                </a:tc>
-                <a:tc>
-                  <a:txBody>
-                    <a:bodyPr/>
-                    <a:lstStyle/>
-                    <a:p>
-                      <a:pPr marL="0" indent="0" algn="r">
-                        <a:buNone/>
-                      </a:pPr>
-                      <a:r>
-                        <a:rPr lang="en-US" sz="900" dirty="0">
-                          <a:solidFill>
-                            <a:srgbClr val="1A1A1A"/>
-                          </a:solidFill>
-                          <a:latin typeface="Calibri" pitchFamily="34" charset="0"/>
-                          <a:ea typeface="Calibri" pitchFamily="34" charset="-122"/>
-                          <a:cs typeface="Calibri" pitchFamily="34" charset="-120"/>
-                        </a:rPr>
-                        <a:t>33.1%</a:t>
-                      </a:r>
-                      <a:endParaRPr lang="en-US" sz="900" dirty="0">
-                        <a:latin typeface="Calibri" charset="0"/>
-                        <a:ea typeface="Calibri" charset="0"/>
-                        <a:cs typeface="Calibri" charset="0"/>
-                      </a:endParaRPr>
-                    </a:p>
-                  </a:txBody>
-                  <a:tcPr marL="54864" marR="54864" marT="27432" marB="27432" anchor="ctr">
-                    <a:lnL w="0" cap="flat" cmpd="sng" algn="ctr">
-                      <a:noFill/>
-                    </a:lnL>
-                    <a:lnR w="0" cap="flat" cmpd="sng" algn="ctr">
-                      <a:noFill/>
-                    </a:lnR>
-                    <a:lnT w="6350" cap="flat" cmpd="sng" algn="ctr">
-                      <a:solidFill>
-                        <a:srgbClr val="E3E6EA"/>
-                      </a:solidFill>
-                      <a:prstDash val="solid"/>
-                      <a:round/>
-                      <a:headEnd type="none" w="med" len="med"/>
-                      <a:tailEnd type="none" w="med" len="med"/>
-                    </a:lnT>
-                    <a:lnB w="6350" cap="flat" cmpd="sng" algn="ctr">
-                      <a:solidFill>
-                        <a:srgbClr val="E3E6EA"/>
-                      </a:solidFill>
-                      <a:prstDash val="solid"/>
-                      <a:round/>
-                      <a:headEnd type="none" w="med" len="med"/>
-                      <a:tailEnd type="none" w="med" len="med"/>
-                    </a:lnB>
-                  </a:tcPr>
-                </a:tc>
-                <a:tc>
-                  <a:txBody>
-                    <a:bodyPr/>
-                    <a:lstStyle/>
-                    <a:p>
-                      <a:pPr marL="0" indent="0" algn="r">
-                        <a:buNone/>
-                      </a:pPr>
-                      <a:r>
-                        <a:rPr lang="en-US" sz="900" dirty="0">
-                          <a:solidFill>
-                            <a:srgbClr val="1A1A1A"/>
-                          </a:solidFill>
-                          <a:latin typeface="Calibri" pitchFamily="34" charset="0"/>
-                          <a:ea typeface="Calibri" pitchFamily="34" charset="-122"/>
-                          <a:cs typeface="Calibri" pitchFamily="34" charset="-120"/>
-                        </a:rPr>
-                        <a:t>40</a:t>
-                      </a:r>
-                      <a:endParaRPr lang="en-US" sz="900" dirty="0">
-                        <a:latin typeface="Calibri" charset="0"/>
-                        <a:ea typeface="Calibri" charset="0"/>
-                        <a:cs typeface="Calibri" charset="0"/>
-                      </a:endParaRPr>
-                    </a:p>
-                  </a:txBody>
-                  <a:tcPr marL="54864" marR="54864" marT="27432" marB="27432" anchor="ctr">
-                    <a:lnL w="0" cap="flat" cmpd="sng" algn="ctr">
-                      <a:noFill/>
-                    </a:lnL>
-                    <a:lnR w="0" cap="flat" cmpd="sng" algn="ctr">
-                      <a:noFill/>
-                    </a:lnR>
-                    <a:lnT w="6350" cap="flat" cmpd="sng" algn="ctr">
-                      <a:solidFill>
-                        <a:srgbClr val="E3E6EA"/>
-                      </a:solidFill>
-                      <a:prstDash val="solid"/>
-                      <a:round/>
-                      <a:headEnd type="none" w="med" len="med"/>
-                      <a:tailEnd type="none" w="med" len="med"/>
-                    </a:lnT>
-                    <a:lnB w="6350" cap="flat" cmpd="sng" algn="ctr">
-                      <a:solidFill>
-                        <a:srgbClr val="E3E6EA"/>
-                      </a:solidFill>
-                      <a:prstDash val="solid"/>
-                      <a:round/>
-                      <a:headEnd type="none" w="med" len="med"/>
-                      <a:tailEnd type="none" w="med" len="med"/>
-                    </a:lnB>
-                  </a:tcPr>
-                </a:tc>
-                <a:tc>
-                  <a:txBody>
-                    <a:bodyPr/>
-                    <a:lstStyle/>
-                    <a:p>
-                      <a:pPr marL="0" indent="0" algn="r">
-                        <a:buNone/>
-                      </a:pPr>
-                      <a:r>
-                        <a:rPr lang="en-US" sz="900" dirty="0">
-                          <a:solidFill>
-                            <a:srgbClr val="1A1A1A"/>
-                          </a:solidFill>
-                          <a:latin typeface="Calibri" pitchFamily="34" charset="0"/>
-                          <a:ea typeface="Calibri" pitchFamily="34" charset="-122"/>
-                          <a:cs typeface="Calibri" pitchFamily="34" charset="-120"/>
-                        </a:rPr>
-                        <a:t>$88</a:t>
-                      </a:r>
-                      <a:endParaRPr lang="en-US" sz="900" dirty="0">
-                        <a:latin typeface="Calibri" charset="0"/>
-                        <a:ea typeface="Calibri" charset="0"/>
-                        <a:cs typeface="Calibri" charset="0"/>
-                      </a:endParaRPr>
-                    </a:p>
-                  </a:txBody>
-                  <a:tcPr marL="54864" marR="54864" marT="27432" marB="27432" anchor="ctr">
-                    <a:lnL w="0" cap="flat" cmpd="sng" algn="ctr">
-                      <a:noFill/>
-                    </a:lnL>
-                    <a:lnR w="0" cap="flat" cmpd="sng" algn="ctr">
-                      <a:noFill/>
-                    </a:lnR>
-                    <a:lnT w="6350" cap="flat" cmpd="sng" algn="ctr">
-                      <a:solidFill>
-                        <a:srgbClr val="E3E6EA"/>
-                      </a:solidFill>
-                      <a:prstDash val="solid"/>
-                      <a:round/>
-                      <a:headEnd type="none" w="med" len="med"/>
-                      <a:tailEnd type="none" w="med" len="med"/>
-                    </a:lnT>
-                    <a:lnB w="6350" cap="flat" cmpd="sng" algn="ctr">
-                      <a:solidFill>
-                        <a:srgbClr val="E3E6EA"/>
-                      </a:solidFill>
-                      <a:prstDash val="solid"/>
-                      <a:round/>
-                      <a:headEnd type="none" w="med" len="med"/>
-                      <a:tailEnd type="none" w="med" len="med"/>
-                    </a:lnB>
-                  </a:tcPr>
-                </a:tc>
-                <a:tc>
-                  <a:txBody>
-                    <a:bodyPr/>
-                    <a:lstStyle/>
-                    <a:p>
-                      <a:pPr marL="0" indent="0" algn="r">
-                        <a:buNone/>
-                      </a:pPr>
-                      <a:r>
-                        <a:rPr lang="en-US" sz="900" dirty="0">
-                          <a:solidFill>
-                            <a:srgbClr val="1A1A1A"/>
-                          </a:solidFill>
-                          <a:latin typeface="Calibri" pitchFamily="34" charset="0"/>
-                          <a:ea typeface="Calibri" pitchFamily="34" charset="-122"/>
-                          <a:cs typeface="Calibri" pitchFamily="34" charset="-120"/>
-                        </a:rPr>
-                        <a:t>4</a:t>
-                      </a:r>
-                      <a:endParaRPr lang="en-US" sz="900" dirty="0">
-                        <a:latin typeface="Calibri" charset="0"/>
-                        <a:ea typeface="Calibri" charset="0"/>
-                        <a:cs typeface="Calibri" charset="0"/>
-                      </a:endParaRPr>
-                    </a:p>
-                  </a:txBody>
-                  <a:tcPr marL="54864" marR="54864" marT="27432" marB="27432" anchor="ctr">
-                    <a:lnL w="0" cap="flat" cmpd="sng" algn="ctr">
-                      <a:noFill/>
-                    </a:lnL>
-                    <a:lnR w="0" cap="flat" cmpd="sng" algn="ctr">
-                      <a:noFill/>
-                    </a:lnR>
-                    <a:lnT w="6350" cap="flat" cmpd="sng" algn="ctr">
-                      <a:solidFill>
-                        <a:srgbClr val="E3E6EA"/>
-                      </a:solidFill>
-                      <a:prstDash val="solid"/>
-                      <a:round/>
-                      <a:headEnd type="none" w="med" len="med"/>
-                      <a:tailEnd type="none" w="med" len="med"/>
-                    </a:lnT>
-                    <a:lnB w="6350" cap="flat" cmpd="sng" algn="ctr">
-                      <a:solidFill>
-                        <a:srgbClr val="E3E6EA"/>
-                      </a:solidFill>
-                      <a:prstDash val="solid"/>
-                      <a:round/>
-                      <a:headEnd type="none" w="med" len="med"/>
-                      <a:tailEnd type="none" w="med" len="med"/>
-                    </a:lnB>
-                  </a:tcPr>
-                </a:tc>
-                <a:tc>
-                  <a:txBody>
-                    <a:bodyPr/>
-                    <a:lstStyle/>
-                    <a:p>
-                      <a:pPr marL="0" indent="0" algn="r">
-                        <a:buNone/>
-                      </a:pPr>
-                      <a:r>
-                        <a:rPr lang="en-US" sz="900" dirty="0">
-                          <a:solidFill>
-                            <a:srgbClr val="1A1A1A"/>
-                          </a:solidFill>
-                          <a:latin typeface="Calibri" pitchFamily="34" charset="0"/>
-                          <a:ea typeface="Calibri" pitchFamily="34" charset="-122"/>
-                          <a:cs typeface="Calibri" pitchFamily="34" charset="-120"/>
-                        </a:rPr>
-                        <a:t>0</a:t>
-                      </a:r>
-                      <a:endParaRPr lang="en-US" sz="900" dirty="0">
-                        <a:latin typeface="Calibri" charset="0"/>
-                        <a:ea typeface="Calibri" charset="0"/>
-                        <a:cs typeface="Calibri" charset="0"/>
-                      </a:endParaRPr>
-                    </a:p>
-                  </a:txBody>
-                  <a:tcPr marL="54864" marR="54864" marT="27432" marB="27432" anchor="ctr">
-                    <a:lnL w="0" cap="flat" cmpd="sng" algn="ctr">
-                      <a:noFill/>
-                    </a:lnL>
-                    <a:lnR w="0" cap="flat" cmpd="sng" algn="ctr">
-                      <a:noFill/>
-                    </a:lnR>
-                    <a:lnT w="6350" cap="flat" cmpd="sng" algn="ctr">
-                      <a:solidFill>
-                        <a:srgbClr val="E3E6EA"/>
-                      </a:solidFill>
-                      <a:prstDash val="solid"/>
-                      <a:round/>
-                      <a:headEnd type="none" w="med" len="med"/>
-                      <a:tailEnd type="none" w="med" len="med"/>
-                    </a:lnT>
-                    <a:lnB w="6350" cap="flat" cmpd="sng" algn="ctr">
-                      <a:solidFill>
-                        <a:srgbClr val="E3E6EA"/>
-                      </a:solidFill>
-                      <a:prstDash val="solid"/>
-                      <a:round/>
-                      <a:headEnd type="none" w="med" len="med"/>
-                      <a:tailEnd type="none" w="med" len="med"/>
-                    </a:lnB>
-                  </a:tcPr>
-                </a:tc>
-                <a:tc>
-                  <a:txBody>
-                    <a:bodyPr/>
-                    <a:lstStyle/>
-                    <a:p>
-                      <a:pPr marL="0" indent="0" algn="r">
-                        <a:buNone/>
-                      </a:pPr>
-                      <a:r>
-                        <a:rPr lang="en-US" sz="900" b="1" dirty="0">
-                          <a:solidFill>
-                            <a:srgbClr val="1A1A1A"/>
-                          </a:solidFill>
-                          <a:latin typeface="Calibri" pitchFamily="34" charset="0"/>
-                          <a:ea typeface="Calibri" pitchFamily="34" charset="-122"/>
-                          <a:cs typeface="Calibri" pitchFamily="34" charset="-120"/>
-                        </a:rPr>
-                        <a:t>4</a:t>
-                      </a:r>
-                      <a:endParaRPr lang="en-US" sz="900" dirty="0">
-                        <a:latin typeface="Calibri" charset="0"/>
-                        <a:ea typeface="Calibri" charset="0"/>
-                        <a:cs typeface="Calibri" charset="0"/>
-                      </a:endParaRPr>
-                    </a:p>
-                  </a:txBody>
-                  <a:tcPr marL="54864" marR="54864" marT="27432" marB="27432" anchor="ctr">
-                    <a:lnL w="0" cap="flat" cmpd="sng" algn="ctr">
-                      <a:noFill/>
-                    </a:lnL>
-                    <a:lnR w="0" cap="flat" cmpd="sng" algn="ctr">
-                      <a:noFill/>
-                    </a:lnR>
-                    <a:lnT w="6350" cap="flat" cmpd="sng" algn="ctr">
-                      <a:solidFill>
-                        <a:srgbClr val="E3E6EA"/>
-                      </a:solidFill>
-                      <a:prstDash val="solid"/>
-                      <a:round/>
-                      <a:headEnd type="none" w="med" len="med"/>
-                      <a:tailEnd type="none" w="med" len="med"/>
-                    </a:lnT>
-                    <a:lnB w="6350" cap="flat" cmpd="sng" algn="ctr">
-                      <a:solidFill>
-                        <a:srgbClr val="E3E6EA"/>
-                      </a:solidFill>
-                      <a:prstDash val="solid"/>
-                      <a:round/>
-                      <a:headEnd type="none" w="med" len="med"/>
-                      <a:tailEnd type="none" w="med" len="med"/>
-                    </a:lnB>
-                  </a:tcPr>
-                </a:tc>
-                <a:tc>
-                  <a:txBody>
-                    <a:bodyPr/>
-                    <a:lstStyle/>
-                    <a:p>
-                      <a:pPr marL="0" indent="0" algn="r">
-                        <a:buNone/>
-                      </a:pPr>
-                      <a:r>
-                        <a:rPr lang="en-US" sz="900" dirty="0">
-                          <a:solidFill>
-                            <a:srgbClr val="1A1A1A"/>
-                          </a:solidFill>
-                          <a:latin typeface="Calibri" pitchFamily="34" charset="0"/>
-                          <a:ea typeface="Calibri" pitchFamily="34" charset="-122"/>
-                          <a:cs typeface="Calibri" pitchFamily="34" charset="-120"/>
-                        </a:rPr>
-                        <a:t>$89</a:t>
-                      </a:r>
-                      <a:endParaRPr lang="en-US" sz="900" dirty="0">
-                        <a:latin typeface="Calibri" charset="0"/>
-                        <a:ea typeface="Calibri" charset="0"/>
-                        <a:cs typeface="Calibri" charset="0"/>
-                      </a:endParaRPr>
-                    </a:p>
-                  </a:txBody>
-                  <a:tcPr marL="54864" marR="54864" marT="27432" marB="27432" anchor="ctr">
-                    <a:lnL w="0" cap="flat" cmpd="sng" algn="ctr">
-                      <a:noFill/>
-                    </a:lnL>
-                    <a:lnR w="0" cap="flat" cmpd="sng" algn="ctr">
-                      <a:noFill/>
-                    </a:lnR>
-                    <a:lnT w="6350" cap="flat" cmpd="sng" algn="ctr">
-                      <a:solidFill>
-                        <a:srgbClr val="E3E6EA"/>
-                      </a:solidFill>
-                      <a:prstDash val="solid"/>
-                      <a:round/>
-                      <a:headEnd type="none" w="med" len="med"/>
-                      <a:tailEnd type="none" w="med" len="med"/>
-                    </a:lnT>
-                    <a:lnB w="6350" cap="flat" cmpd="sng" algn="ctr">
-                      <a:solidFill>
-                        <a:srgbClr val="E3E6EA"/>
-                      </a:solidFill>
-                      <a:prstDash val="solid"/>
-                      <a:round/>
-                      <a:headEnd type="none" w="med" len="med"/>
-                      <a:tailEnd type="none" w="med" len="med"/>
-                    </a:lnB>
-                  </a:tcPr>
-                </a:tc>
-                <a:tc>
-                  <a:txBody>
-                    <a:bodyPr/>
-                    <a:lstStyle/>
-                    <a:p>
-                      <a:pPr marL="0" indent="0" algn="r">
-                        <a:buNone/>
-                      </a:pPr>
-                      <a:r>
-                        <a:rPr lang="en-US" sz="900" dirty="0">
-                          <a:solidFill>
-                            <a:srgbClr val="005358"/>
-                          </a:solidFill>
-                          <a:latin typeface="Calibri" pitchFamily="34" charset="0"/>
-                          <a:ea typeface="Calibri" pitchFamily="34" charset="-122"/>
-                          <a:cs typeface="Calibri" pitchFamily="34" charset="-120"/>
-                        </a:rPr>
-                        <a:t>+1</a:t>
-                      </a:r>
-                      <a:endParaRPr lang="en-US" sz="900" dirty="0">
-                        <a:latin typeface="Calibri" charset="0"/>
-                        <a:ea typeface="Calibri" charset="0"/>
-                        <a:cs typeface="Calibri" charset="0"/>
-                      </a:endParaRPr>
-                    </a:p>
-                  </a:txBody>
-                  <a:tcPr marL="54864" marR="54864" marT="27432" marB="27432" anchor="ctr">
-                    <a:lnL w="0" cap="flat" cmpd="sng" algn="ctr">
-                      <a:noFill/>
-                    </a:lnL>
-                    <a:lnR w="0" cap="flat" cmpd="sng" algn="ctr">
-                      <a:noFill/>
-                    </a:lnR>
-                    <a:lnT w="6350" cap="flat" cmpd="sng" algn="ctr">
-                      <a:solidFill>
-                        <a:srgbClr val="E3E6EA"/>
-                      </a:solidFill>
-                      <a:prstDash val="solid"/>
-                      <a:round/>
-                      <a:headEnd type="none" w="med" len="med"/>
-                      <a:tailEnd type="none" w="med" len="med"/>
-                    </a:lnT>
-                    <a:lnB w="6350" cap="flat" cmpd="sng" algn="ctr">
-                      <a:solidFill>
-                        <a:srgbClr val="E3E6EA"/>
-                      </a:solidFill>
-                      <a:prstDash val="solid"/>
-                      <a:round/>
-                      <a:headEnd type="none" w="med" len="med"/>
-                      <a:tailEnd type="none" w="med" len="med"/>
-                    </a:lnB>
-                  </a:tcPr>
-                </a:tc>
-                <a:extLst>
-                  <a:ext uri="{0D108BD9-81ED-4DB2-BD59-A6C34878D82A}">
-                    <a16:rowId xmlns:a16="http://schemas.microsoft.com/office/drawing/2014/main" val="10003"/>
-                  </a:ext>
-                </a:extLst>
-              </a:tr>
-              <a:tr h="237744">
+              <a:tr h="435102">
                 <a:tc>
                   <a:txBody>
                     <a:bodyPr/>
@@ -19223,7 +19601,7 @@
                           <a:ea typeface="Calibri" pitchFamily="34" charset="-122"/>
                           <a:cs typeface="Calibri" pitchFamily="34" charset="-120"/>
                         </a:rPr>
-                        <a:t>2,438</a:t>
+                        <a:t>2,437</a:t>
                       </a:r>
                       <a:endParaRPr lang="en-US" sz="900" dirty="0">
                         <a:latin typeface="Calibri" charset="0"/>
@@ -19662,7 +20040,7 @@
                 <a:ea typeface="Calibri" pitchFamily="34" charset="-122"/>
                 <a:cs typeface="Calibri" pitchFamily="34" charset="-120"/>
               </a:rPr>
-              <a:t>+$13k a month</a:t>
+              <a:t>+$20k a month</a:t>
             </a:r>
             <a:endParaRPr lang="en-US" sz="2200" dirty="0"/>
           </a:p>
@@ -19701,7 +20079,7 @@
                 <a:ea typeface="Calibri" pitchFamily="34" charset="-122"/>
                 <a:cs typeface="Calibri" pitchFamily="34" charset="-120"/>
               </a:rPr>
-              <a:t>Five more points of utilisation across the three departments that report hours, at the revenue per chargeable hour each already earns</a:t>
+              <a:t>Five more points of utilisation on Support and Events, at the revenue per chargeable hour each already earns, before any extra cost</a:t>
             </a:r>
             <a:endParaRPr lang="en-US" sz="900" dirty="0"/>
           </a:p>
@@ -19740,7 +20118,7 @@
                 <a:ea typeface="Calibri" pitchFamily="34" charset="-122"/>
                 <a:cs typeface="Calibri" pitchFamily="34" charset="-120"/>
               </a:rPr>
-              <a:t>Video and Integration are left out: they do not report hours. Revenue per hour is department revenue divided by chargeable hours. It is not a charge rate, it includes equipment, hire and freight, and the pack does not hold charge rates. Labour is wages, salaries, superannuation and workers compensation coded to the department.</a:t>
+              <a:t>Video and Integration are left out: 24 and 10 chargeable hours are too few for a rate to mean anything. Revenue per hour is department revenue divided by chargeable hours. It is not a charge rate, it includes equipment, hire and freight, and the pack does not hold charge rates. Labour is wages, salaries, superannuation and workers compensation coded to the department.</a:t>
             </a:r>
             <a:endParaRPr lang="en-US" sz="850" dirty="0"/>
           </a:p>
@@ -19875,7 +20253,7 @@
                 <a:ea typeface="Calibri" pitchFamily="34" charset="-122"/>
                 <a:cs typeface="Calibri" pitchFamily="34" charset="-120"/>
               </a:rPr>
-              <a:t>Events shows $276 an hour, but that is equipment, not a rate.</a:t>
+              <a:t>Events shows $305 an hour, but that is equipment, not a rate.</a:t>
             </a:r>
             <a:endParaRPr lang="en-US" sz="1050" dirty="0"/>
           </a:p>
@@ -19896,7 +20274,7 @@
                 <a:ea typeface="Calibri" pitchFamily="34" charset="-122"/>
                 <a:cs typeface="Calibri" pitchFamily="34" charset="-120"/>
               </a:rPr>
-              <a:t>Consulting is $88 an hour on only 40 hours. Too thin to read.</a:t>
+              <a:t>Integration is the outlier: 235k of revenue on 9.5 chargeable hours.</a:t>
             </a:r>
             <a:endParaRPr lang="en-US" sz="1050" dirty="0"/>
           </a:p>
@@ -19917,7 +20295,7 @@
                 <a:ea typeface="Calibri" pitchFamily="34" charset="-122"/>
                 <a:cs typeface="Calibri" pitchFamily="34" charset="-120"/>
               </a:rPr>
-              <a:t>Five points of utilisation is worth about 13k a month.</a:t>
+              <a:t>That confirms the Aware Super job was bought in, not delivered by us.</a:t>
             </a:r>
             <a:endParaRPr lang="en-US" sz="1050" dirty="0"/>
           </a:p>
@@ -19938,7 +20316,7 @@
                 <a:ea typeface="Calibri" pitchFamily="34" charset="-122"/>
                 <a:cs typeface="Calibri" pitchFamily="34" charset="-120"/>
               </a:rPr>
-              <a:t>This cannot be done properly until every department reports hours.</a:t>
+              <a:t>Five points on Support and Events is worth about 20k a month.</a:t>
             </a:r>
             <a:endParaRPr lang="en-US" sz="1050" dirty="0"/>
           </a:p>

--- a/deck/CTS Monthly Business Review - September 2026.pptx
+++ b/deck/CTS Monthly Business Review - September 2026.pptx
@@ -2605,7 +2605,7 @@
           <a:lstStyle/>
           <a:p>
             <a:r>
-              <a:t>September 2026 review. Every figure comes from the Financial Controller Pack v18, the Xero general ledger dump inside it, or a Xero report named on the slide.</a:t>
+              <a:t>September 2026. Every figure traces to the Financial Controller Pack v19, the Xero general ledger dump inside it, or a Xero report named on the slide.</a:t>
             </a:r>
           </a:p>
         </p:txBody>
@@ -2691,7 +2691,7 @@
           <a:lstStyle/>
           <a:p>
             <a:r>
-              <a:t>DSO 47 days against a 30 day target. Two invoices over 90 days need a decision this month, chase or provide. Aware Super is current but it is one 226k invoice.</a:t>
+              <a:t>This is the cash slide. 309k is sitting in debtors and net debt is 723k. That is the fastest lever available and it needs no trading improvement. Name the two old invoices and ask for a decision, chase or provide.</a:t>
             </a:r>
           </a:p>
         </p:txBody>
@@ -2777,7 +2777,7 @@
           <a:lstStyle/>
           <a:p>
             <a:r>
-              <a:t>Growth is three new customers, not the base. If they do not repeat, FY28 starts 368k behind.</a:t>
+              <a:t>Growth is three new names, not the base. If asked about ASX, it is down a third and that is a relationship question for sales, not a market one.</a:t>
             </a:r>
           </a:p>
         </p:txBody>
@@ -2947,7 +2947,7 @@
           <a:lstStyle/>
           <a:p>
             <a:r>
-              <a:t>Be straight that Support showing 100 per cent is a recording gap. Video and Integration do not report hours at all.</a:t>
+              <a:t>Be straight that Support recording 11 non-chargeable hours is not credible. Do not defend the 99.5 per cent. The fix is reporting, and it belongs to Ops.</a:t>
             </a:r>
           </a:p>
         </p:txBody>
@@ -3033,7 +3033,7 @@
           <a:lstStyle/>
           <a:p>
             <a:r>
-              <a:t>Revenue per hour is not a charge rate. The pack does not hold charge rates. Say that before anyone treats the Events figure as a rate.</a:t>
+              <a:t>Revenue per hour is not a charge rate, say so before anyone treats Events as one. The Integration line is the real finding: 235k billed on 9.5 hours means the job was bought in, which is why the margin is 10 per cent.</a:t>
             </a:r>
           </a:p>
         </p:txBody>
@@ -3203,7 +3203,7 @@
           <a:lstStyle/>
           <a:p>
             <a:r>
-              <a:t>Agree owner and date on each line before the meeting closes.</a:t>
+              <a:t>Four asks, each with an owner and a date. Do not leave the room without them agreed.</a:t>
             </a:r>
           </a:p>
         </p:txBody>
@@ -3482,7 +3482,7 @@
           <a:lstStyle/>
           <a:p>
             <a:r>
-              <a:t>Lead with the beat, then take it away: the month is ahead, the year is not. The 148k beat is one Integration project. Overheads are on budget so do not let the conversation go there.</a:t>
+              <a:t>Do not let the room celebrate the 148k beat. Lead with break even: we need 549k of revenue a month and we are running at 541k. The miss is margin, not cost, and overheads are 48k under budget. Expect the question on the full year: revenue lands, profit does not.</a:t>
             </a:r>
           </a:p>
         </p:txBody>
@@ -3568,7 +3568,7 @@
           <a:lstStyle/>
           <a:p>
             <a:r>
-              <a:t>Support is the only department covering its overhead. Expect a question on why Events carries 111k: it is the Office Dept key giving it 87.5 per cent of premises cost.</a:t>
+              <a:t>The point is the overhead key, not the departments. Events carries 87.5 per cent of premises on 13 per cent of revenue. Say clearly that the key is fixed for the financial year and must not be changed mid year, but it should be tested for FY28.</a:t>
             </a:r>
           </a:p>
         </p:txBody>
@@ -3654,7 +3654,7 @@
           <a:lstStyle/>
           <a:p>
             <a:r>
-              <a:t>Point at the two bars that clear zero. If asked about the Office Dept key, the answer is that it is fixed for the financial year and is reviewed at FY28.</a:t>
+              <a:t>Two bars clear zero. If pushed on Integration, be straight that its bar is one project and the underlying unit is about 60k a quarter.</a:t>
             </a:r>
           </a:p>
         </p:txBody>
@@ -3740,7 +3740,7 @@
           <a:lstStyle/>
           <a:p>
             <a:r>
-              <a:t>Half the book is non-contract. The two budget lines with no budget mapped are a pack fix, not a trading issue, but say so before someone finds it.</a:t>
+              <a:t>43 per cent contracted. The 487k shortfall on Integration and Consulting non-contract is not recoverable, so ask for a reforecast rather than defending the budget. Flag the two unmapped budget lines yourself before anyone finds them.</a:t>
             </a:r>
           </a:p>
         </p:txBody>
@@ -3910,7 +3910,7 @@
           <a:lstStyle/>
           <a:p>
             <a:r>
-              <a:t>Concentration is the message. Top three are 49 per cent. Aware Super is a project, not a customer relationship yet.</a:t>
+              <a:t>Concentration is the message, not the ranking. Deloitte is roughly the whole EBITDA base. Aware Super is a fit-out, not a relationship.</a:t>
             </a:r>
           </a:p>
         </p:txBody>
@@ -11554,7 +11554,7 @@
                 <a:ea typeface="Calibri" pitchFamily="34" charset="-122"/>
                 <a:cs typeface="Calibri" pitchFamily="34" charset="-120"/>
               </a:rPr>
-              <a:t>Deloitte and Aware Super alone are 42 per cent of the year.</a:t>
+              <a:t>The concentration is in project work, not in contracted revenue.</a:t>
             </a:r>
             <a:endParaRPr lang="en-US" sz="1050" dirty="0"/>
           </a:p>
@@ -11575,7 +11575,7 @@
                 <a:ea typeface="Calibri" pitchFamily="34" charset="-122"/>
                 <a:cs typeface="Calibri" pitchFamily="34" charset="-120"/>
               </a:rPr>
-              <a:t>Below the top five the book falls away fast.</a:t>
+              <a:t>Deloitte and Aware Super are 42 per cent of the year between them.</a:t>
             </a:r>
             <a:endParaRPr lang="en-US" sz="1050" dirty="0"/>
           </a:p>
@@ -11596,7 +11596,7 @@
                 <a:ea typeface="Calibri" pitchFamily="34" charset="-122"/>
                 <a:cs typeface="Calibri" pitchFamily="34" charset="-120"/>
               </a:rPr>
-              <a:t>Aware Super is one project. Treat it as one-off when forecasting.</a:t>
+              <a:t>Below the top five the book falls away fast. Number ten is 37k.</a:t>
             </a:r>
             <a:endParaRPr lang="en-US" sz="1050" dirty="0"/>
           </a:p>
@@ -11617,7 +11617,7 @@
                 <a:ea typeface="Calibri" pitchFamily="34" charset="-122"/>
                 <a:cs typeface="Calibri" pitchFamily="34" charset="-120"/>
               </a:rPr>
-              <a:t>No customer in the ten could replace Deloitte.</a:t>
+              <a:t>Everything outside the top ten is 384k, with no depth behind it.</a:t>
             </a:r>
             <a:endParaRPr lang="en-US" sz="1050" dirty="0"/>
           </a:p>
@@ -11638,7 +11638,7 @@
                 <a:ea typeface="Calibri" pitchFamily="34" charset="-122"/>
                 <a:cs typeface="Calibri" pitchFamily="34" charset="-120"/>
               </a:rPr>
-              <a:t>The other eighteen customers are worth 384k between them.</a:t>
+              <a:t>Put the business development target on the second tier, not the top.</a:t>
             </a:r>
             <a:endParaRPr lang="en-US" sz="1050" dirty="0"/>
           </a:p>
@@ -13593,7 +13593,7 @@
                 <a:ea typeface="Calibri" pitchFamily="34" charset="-122"/>
                 <a:cs typeface="Calibri" pitchFamily="34" charset="-120"/>
               </a:rPr>
-              <a:t>Receivables are 833k across 61 invoices and 28 customers.</a:t>
+              <a:t>DSO is 47.5 days against a 30 day target.</a:t>
             </a:r>
             <a:endParaRPr lang="en-US" sz="1050" dirty="0"/>
           </a:p>
@@ -13614,7 +13614,7 @@
                 <a:ea typeface="Calibri" pitchFamily="34" charset="-122"/>
                 <a:cs typeface="Calibri" pitchFamily="34" charset="-120"/>
               </a:rPr>
-              <a:t>DSO is 47 days against a 30 day target.</a:t>
+              <a:t>Every day of DSO is 17.7k of cash. Seventeen days is 309k.</a:t>
             </a:r>
             <a:endParaRPr lang="en-US" sz="1050" dirty="0"/>
           </a:p>
@@ -13635,7 +13635,7 @@
                 <a:ea typeface="Calibri" pitchFamily="34" charset="-122"/>
                 <a:cs typeface="Calibri" pitchFamily="34" charset="-120"/>
               </a:rPr>
-              <a:t>29 per cent of the book is overdue, 245k of it.</a:t>
+              <a:t>309k sits in debtors against net debt of 723k. Fastest cash lever we have.</a:t>
             </a:r>
             <a:endParaRPr lang="en-US" sz="1050" dirty="0"/>
           </a:p>
@@ -13656,7 +13656,7 @@
                 <a:ea typeface="Calibri" pitchFamily="34" charset="-122"/>
                 <a:cs typeface="Calibri" pitchFamily="34" charset="-120"/>
               </a:rPr>
-              <a:t>Aware Super is a third of the ledger, on one invoice of 226k.</a:t>
+              <a:t>Aware Super is 277k of the 833k, on one invoice due 9 October.</a:t>
             </a:r>
             <a:endParaRPr lang="en-US" sz="1050" dirty="0"/>
           </a:p>
@@ -13677,7 +13677,7 @@
                 <a:ea typeface="Calibri" pitchFamily="34" charset="-122"/>
                 <a:cs typeface="Calibri" pitchFamily="34" charset="-120"/>
               </a:rPr>
-              <a:t>Two invoices sit over 90 days. Property NSW 20k, Meet Magic 5k.</a:t>
+              <a:t>Two invoices over 90 days, 25k. Chase or provide this month.</a:t>
             </a:r>
             <a:endParaRPr lang="en-US" sz="1050" dirty="0"/>
           </a:p>
@@ -14013,7 +14013,7 @@
                 <a:ea typeface="Calibri" pitchFamily="34" charset="-122"/>
                 <a:cs typeface="Calibri" pitchFamily="34" charset="-120"/>
               </a:rPr>
-              <a:t>Revenue is up on last year, but the growth is three new customers.</a:t>
+              <a:t>All the growth is three new customers. The base we had is flat.</a:t>
             </a:r>
             <a:endParaRPr lang="en-US" sz="1050" dirty="0"/>
           </a:p>
@@ -14034,7 +14034,7 @@
                 <a:ea typeface="Calibri" pitchFamily="34" charset="-122"/>
                 <a:cs typeface="Calibri" pitchFamily="34" charset="-120"/>
               </a:rPr>
-              <a:t>Aware Super, Data#3 and Generation-e are 368k of new revenue.</a:t>
+              <a:t>Aware Super, Data#3 and Generation-e are 368k and none existed last year.</a:t>
             </a:r>
             <a:endParaRPr lang="en-US" sz="1050" dirty="0"/>
           </a:p>
@@ -14055,7 +14055,7 @@
                 <a:ea typeface="Calibri" pitchFamily="34" charset="-122"/>
                 <a:cs typeface="Calibri" pitchFamily="34" charset="-120"/>
               </a:rPr>
-              <a:t>On the customers we had last year the picture is flat.</a:t>
+              <a:t>On the existing base, gains of 146k against losses of 50k.</a:t>
             </a:r>
             <a:endParaRPr lang="en-US" sz="1050" dirty="0"/>
           </a:p>
@@ -14076,7 +14076,7 @@
                 <a:ea typeface="Calibri" pitchFamily="34" charset="-122"/>
                 <a:cs typeface="Calibri" pitchFamily="34" charset="-120"/>
               </a:rPr>
-              <a:t>ASX is down a third, from 90k to 61k, with no replacement.</a:t>
+              <a:t>ASX is down a third. That is a relationship to repair, not a market shift.</a:t>
             </a:r>
             <a:endParaRPr lang="en-US" sz="1050" dirty="0"/>
           </a:p>
@@ -14097,7 +14097,7 @@
                 <a:ea typeface="Calibri" pitchFamily="34" charset="-122"/>
                 <a:cs typeface="Calibri" pitchFamily="34" charset="-120"/>
               </a:rPr>
-              <a:t>If the three do not repeat, FY28 starts 368k behind.</a:t>
+              <a:t>If the three new names do not repeat, FY28 opens 368k behind.</a:t>
             </a:r>
             <a:endParaRPr lang="en-US" sz="1050" dirty="0"/>
           </a:p>
@@ -17686,7 +17686,7 @@
                 <a:ea typeface="Calibri" pitchFamily="34" charset="-122"/>
                 <a:cs typeface="Calibri" pitchFamily="34" charset="-120"/>
               </a:rPr>
-              <a:t>Every department reports hours now, off the raw timesheet in her report.</a:t>
+              <a:t>Support records 11 non-chargeable hours in a month. That is not credible.</a:t>
             </a:r>
             <a:endParaRPr lang="en-US" sz="1050" dirty="0"/>
           </a:p>
@@ -17707,7 +17707,7 @@
                 <a:ea typeface="Calibri" pitchFamily="34" charset="-122"/>
                 <a:cs typeface="Calibri" pitchFamily="34" charset="-120"/>
               </a:rPr>
-              <a:t>Support is at 99.5 per cent. It still records almost no non-chargeable time.</a:t>
+              <a:t>Until it is fixed the 99.5 per cent means nothing, and nor does the target.</a:t>
             </a:r>
             <a:endParaRPr lang="en-US" sz="1050" dirty="0"/>
           </a:p>
@@ -17728,7 +17728,7 @@
                 <a:ea typeface="Calibri" pitchFamily="34" charset="-122"/>
                 <a:cs typeface="Calibri" pitchFamily="34" charset="-120"/>
               </a:rPr>
-              <a:t>Events is at 49 per cent, with more leave than chargeable hours.</a:t>
+              <a:t>Events is at 49 per cent with 333 hours of leave. Capacity is sitting idle.</a:t>
             </a:r>
             <a:endParaRPr lang="en-US" sz="1050" dirty="0"/>
           </a:p>
@@ -17749,7 +17749,7 @@
                 <a:ea typeface="Calibri" pitchFamily="34" charset="-122"/>
                 <a:cs typeface="Calibri" pitchFamily="34" charset="-120"/>
               </a:rPr>
-              <a:t>Consulting is 27 per cent. Video 76 and Integration 100, on tiny volumes.</a:t>
+              <a:t>Consulting at 27 per cent confirms there is no fee base to utilise.</a:t>
             </a:r>
             <a:endParaRPr lang="en-US" sz="1050" dirty="0"/>
           </a:p>
@@ -17770,7 +17770,7 @@
                 <a:ea typeface="Calibri" pitchFamily="34" charset="-122"/>
                 <a:cs typeface="Calibri" pitchFamily="34" charset="-120"/>
               </a:rPr>
-              <a:t>Hours are split by the department the work was for, same as revenue.</a:t>
+              <a:t>Hours are split by the job, the same basis revenue is split on.</a:t>
             </a:r>
             <a:endParaRPr lang="en-US" sz="1050" dirty="0"/>
           </a:p>
@@ -20232,7 +20232,7 @@
                 <a:ea typeface="Calibri" pitchFamily="34" charset="-122"/>
                 <a:cs typeface="Calibri" pitchFamily="34" charset="-120"/>
               </a:rPr>
-              <a:t>Support earns $114 a chargeable hour and keeps $54 after labour.</a:t>
+              <a:t>Support returns $54 of margin an hour after direct labour. That is the engine.</a:t>
             </a:r>
             <a:endParaRPr lang="en-US" sz="1050" dirty="0"/>
           </a:p>
@@ -20253,7 +20253,7 @@
                 <a:ea typeface="Calibri" pitchFamily="34" charset="-122"/>
                 <a:cs typeface="Calibri" pitchFamily="34" charset="-120"/>
               </a:rPr>
-              <a:t>Events shows $305 an hour, but that is equipment, not a rate.</a:t>
+              <a:t>Events returns $258, but on equipment revenue. It is not a labour rate.</a:t>
             </a:r>
             <a:endParaRPr lang="en-US" sz="1050" dirty="0"/>
           </a:p>
@@ -20274,7 +20274,7 @@
                 <a:ea typeface="Calibri" pitchFamily="34" charset="-122"/>
                 <a:cs typeface="Calibri" pitchFamily="34" charset="-120"/>
               </a:rPr>
-              <a:t>Integration is the outlier: 235k of revenue on 9.5 chargeable hours.</a:t>
+              <a:t>Integration billed 235k on 9.5 chargeable hours. That work was bought in.</a:t>
             </a:r>
             <a:endParaRPr lang="en-US" sz="1050" dirty="0"/>
           </a:p>
@@ -20295,7 +20295,7 @@
                 <a:ea typeface="Calibri" pitchFamily="34" charset="-122"/>
                 <a:cs typeface="Calibri" pitchFamily="34" charset="-120"/>
               </a:rPr>
-              <a:t>That confirms the Aware Super job was bought in, not delivered by us.</a:t>
+              <a:t>That is why its margin is 10 per cent. We are reselling, not delivering.</a:t>
             </a:r>
             <a:endParaRPr lang="en-US" sz="1050" dirty="0"/>
           </a:p>
@@ -20316,7 +20316,7 @@
                 <a:ea typeface="Calibri" pitchFamily="34" charset="-122"/>
                 <a:cs typeface="Calibri" pitchFamily="34" charset="-120"/>
               </a:rPr>
-              <a:t>Five points on Support and Events is worth about 20k a month.</a:t>
+              <a:t>Five points on Support and Events is worth 20k a month at no extra cost.</a:t>
             </a:r>
             <a:endParaRPr lang="en-US" sz="1050" dirty="0"/>
           </a:p>
@@ -21013,7 +21013,7 @@
                           <a:ea typeface="Calibri" pitchFamily="34" charset="-122"/>
                           <a:cs typeface="Calibri" pitchFamily="34" charset="-120"/>
                         </a:rPr>
-                        <a:t>September beat budget on one Integration project. Reforecast the second half on the recurring base, not on this month.</a:t>
+                        <a:t>Reforecast FY27 on margin, not revenue. At the current run rate we meet the revenue budget and deliver an EBITDA loss of 37k against a 397k plan.</a:t>
                       </a:r>
                       <a:endParaRPr lang="en-US" sz="1000" dirty="0">
                         <a:latin typeface="Calibri" charset="0"/>
@@ -21179,7 +21179,7 @@
                           <a:ea typeface="Calibri" pitchFamily="34" charset="-122"/>
                           <a:cs typeface="Calibri" pitchFamily="34" charset="-120"/>
                         </a:rPr>
-                        <a:t>Risk revenue</a:t>
+                        <a:t>Overhead keys</a:t>
                       </a:r>
                       <a:endParaRPr lang="en-US" sz="1000" dirty="0">
                         <a:latin typeface="Calibri" charset="0"/>
@@ -21232,7 +21232,7 @@
                           <a:ea typeface="Calibri" pitchFamily="34" charset="-122"/>
                           <a:cs typeface="Calibri" pitchFamily="34" charset="-120"/>
                         </a:rPr>
-                        <a:t>Integration and Consulting non-contract budgets are 487k behind for the year. Agree a reforecast or a plan to close it.</a:t>
+                        <a:t>Events carries 87.5 per cent of premises on 13 per cent of revenue and cannot be profitable on that key. Test it for FY28, do not change it mid year.</a:t>
                       </a:r>
                       <a:endParaRPr lang="en-US" sz="1000" dirty="0">
                         <a:latin typeface="Calibri" charset="0"/>
@@ -21285,7 +21285,7 @@
                           <a:ea typeface="Calibri" pitchFamily="34" charset="-122"/>
                           <a:cs typeface="Calibri" pitchFamily="34" charset="-120"/>
                         </a:rPr>
-                        <a:t>Sales and GC</a:t>
+                        <a:t>GC and FC</a:t>
                       </a:r>
                       <a:endParaRPr lang="en-US" sz="1000" dirty="0">
                         <a:latin typeface="Calibri" charset="0"/>
@@ -21338,7 +21338,7 @@
                           <a:ea typeface="Calibri" pitchFamily="34" charset="-122"/>
                           <a:cs typeface="Calibri" pitchFamily="34" charset="-120"/>
                         </a:rPr>
-                        <a:t>31 Oct 26</a:t>
+                        <a:t>30 Nov 26</a:t>
                       </a:r>
                       <a:endParaRPr lang="en-US" sz="1000" dirty="0">
                         <a:latin typeface="Calibri" charset="0"/>
@@ -21398,7 +21398,7 @@
                           <a:ea typeface="Calibri" pitchFamily="34" charset="-122"/>
                           <a:cs typeface="Calibri" pitchFamily="34" charset="-120"/>
                         </a:rPr>
-                        <a:t>Customers and DSO</a:t>
+                        <a:t>Customers</a:t>
                       </a:r>
                       <a:endParaRPr lang="en-US" sz="1000" dirty="0">
                         <a:latin typeface="Calibri" charset="0"/>
@@ -21451,7 +21451,226 @@
                           <a:ea typeface="Calibri" pitchFamily="34" charset="-122"/>
                           <a:cs typeface="Calibri" pitchFamily="34" charset="-120"/>
                         </a:rPr>
-                        <a:t>DSO is 47 days against a 30 day target. Chase Property NSW 19.7k and Meet Magic 5.1k, both over 90 days.</a:t>
+                        <a:t>Top three are 49 per cent of revenue. Agree a retention plan for Deloitte and contract cover for Aware Super, Data#3 and Generation-e.</a:t>
+                      </a:r>
+                      <a:endParaRPr lang="en-US" sz="1000" dirty="0">
+                        <a:latin typeface="Calibri" charset="0"/>
+                        <a:ea typeface="Calibri" charset="0"/>
+                        <a:cs typeface="Calibri" charset="0"/>
+                      </a:endParaRPr>
+                    </a:p>
+                  </a:txBody>
+                  <a:tcPr marL="73152" marR="73152" marT="54864" marB="54864">
+                    <a:lnL w="0" cap="flat" cmpd="sng" algn="ctr">
+                      <a:noFill/>
+                    </a:lnL>
+                    <a:lnR w="0" cap="flat" cmpd="sng" algn="ctr">
+                      <a:noFill/>
+                    </a:lnR>
+                    <a:lnT w="6350" cap="flat" cmpd="sng" algn="ctr">
+                      <a:solidFill>
+                        <a:srgbClr val="E3E6EA"/>
+                      </a:solidFill>
+                      <a:prstDash val="solid"/>
+                      <a:round/>
+                      <a:headEnd type="none" w="med" len="med"/>
+                      <a:tailEnd type="none" w="med" len="med"/>
+                    </a:lnT>
+                    <a:lnB w="6350" cap="flat" cmpd="sng" algn="ctr">
+                      <a:solidFill>
+                        <a:srgbClr val="E3E6EA"/>
+                      </a:solidFill>
+                      <a:prstDash val="solid"/>
+                      <a:round/>
+                      <a:headEnd type="none" w="med" len="med"/>
+                      <a:tailEnd type="none" w="med" len="med"/>
+                    </a:lnB>
+                  </a:tcPr>
+                </a:tc>
+                <a:tc>
+                  <a:txBody>
+                    <a:bodyPr/>
+                    <a:lstStyle/>
+                    <a:p>
+                      <a:pPr marL="0" indent="0" algn="l">
+                        <a:buNone/>
+                      </a:pPr>
+                      <a:r>
+                        <a:rPr lang="en-US" sz="1000" dirty="0">
+                          <a:solidFill>
+                            <a:srgbClr val="5F6670"/>
+                          </a:solidFill>
+                          <a:latin typeface="Calibri" pitchFamily="34" charset="0"/>
+                          <a:ea typeface="Calibri" pitchFamily="34" charset="-122"/>
+                          <a:cs typeface="Calibri" pitchFamily="34" charset="-120"/>
+                        </a:rPr>
+                        <a:t>GC and Sales</a:t>
+                      </a:r>
+                      <a:endParaRPr lang="en-US" sz="1000" dirty="0">
+                        <a:latin typeface="Calibri" charset="0"/>
+                        <a:ea typeface="Calibri" charset="0"/>
+                        <a:cs typeface="Calibri" charset="0"/>
+                      </a:endParaRPr>
+                    </a:p>
+                  </a:txBody>
+                  <a:tcPr marL="73152" marR="73152" marT="54864" marB="54864">
+                    <a:lnL w="0" cap="flat" cmpd="sng" algn="ctr">
+                      <a:noFill/>
+                    </a:lnL>
+                    <a:lnR w="0" cap="flat" cmpd="sng" algn="ctr">
+                      <a:noFill/>
+                    </a:lnR>
+                    <a:lnT w="6350" cap="flat" cmpd="sng" algn="ctr">
+                      <a:solidFill>
+                        <a:srgbClr val="E3E6EA"/>
+                      </a:solidFill>
+                      <a:prstDash val="solid"/>
+                      <a:round/>
+                      <a:headEnd type="none" w="med" len="med"/>
+                      <a:tailEnd type="none" w="med" len="med"/>
+                    </a:lnT>
+                    <a:lnB w="6350" cap="flat" cmpd="sng" algn="ctr">
+                      <a:solidFill>
+                        <a:srgbClr val="E3E6EA"/>
+                      </a:solidFill>
+                      <a:prstDash val="solid"/>
+                      <a:round/>
+                      <a:headEnd type="none" w="med" len="med"/>
+                      <a:tailEnd type="none" w="med" len="med"/>
+                    </a:lnB>
+                  </a:tcPr>
+                </a:tc>
+                <a:tc>
+                  <a:txBody>
+                    <a:bodyPr/>
+                    <a:lstStyle/>
+                    <a:p>
+                      <a:pPr marL="0" indent="0" algn="l">
+                        <a:buNone/>
+                      </a:pPr>
+                      <a:r>
+                        <a:rPr lang="en-US" sz="1000" dirty="0">
+                          <a:solidFill>
+                            <a:srgbClr val="5F6670"/>
+                          </a:solidFill>
+                          <a:latin typeface="Calibri" pitchFamily="34" charset="0"/>
+                          <a:ea typeface="Calibri" pitchFamily="34" charset="-122"/>
+                          <a:cs typeface="Calibri" pitchFamily="34" charset="-120"/>
+                        </a:rPr>
+                        <a:t>14 Nov 26</a:t>
+                      </a:r>
+                      <a:endParaRPr lang="en-US" sz="1000" dirty="0">
+                        <a:latin typeface="Calibri" charset="0"/>
+                        <a:ea typeface="Calibri" charset="0"/>
+                        <a:cs typeface="Calibri" charset="0"/>
+                      </a:endParaRPr>
+                    </a:p>
+                  </a:txBody>
+                  <a:tcPr marL="73152" marR="73152" marT="54864" marB="54864">
+                    <a:lnL w="0" cap="flat" cmpd="sng" algn="ctr">
+                      <a:noFill/>
+                    </a:lnL>
+                    <a:lnR w="0" cap="flat" cmpd="sng" algn="ctr">
+                      <a:noFill/>
+                    </a:lnR>
+                    <a:lnT w="6350" cap="flat" cmpd="sng" algn="ctr">
+                      <a:solidFill>
+                        <a:srgbClr val="E3E6EA"/>
+                      </a:solidFill>
+                      <a:prstDash val="solid"/>
+                      <a:round/>
+                      <a:headEnd type="none" w="med" len="med"/>
+                      <a:tailEnd type="none" w="med" len="med"/>
+                    </a:lnT>
+                    <a:lnB w="6350" cap="flat" cmpd="sng" algn="ctr">
+                      <a:solidFill>
+                        <a:srgbClr val="E3E6EA"/>
+                      </a:solidFill>
+                      <a:prstDash val="solid"/>
+                      <a:round/>
+                      <a:headEnd type="none" w="med" len="med"/>
+                      <a:tailEnd type="none" w="med" len="med"/>
+                    </a:lnB>
+                  </a:tcPr>
+                </a:tc>
+                <a:extLst>
+                  <a:ext uri="{0D108BD9-81ED-4DB2-BD59-A6C34878D82A}">
+                    <a16:rowId xmlns:a16="http://schemas.microsoft.com/office/drawing/2014/main" val="10003"/>
+                  </a:ext>
+                </a:extLst>
+              </a:tr>
+              <a:tr h="685800">
+                <a:tc>
+                  <a:txBody>
+                    <a:bodyPr/>
+                    <a:lstStyle/>
+                    <a:p>
+                      <a:pPr marL="0" indent="0" algn="l">
+                        <a:buNone/>
+                      </a:pPr>
+                      <a:r>
+                        <a:rPr lang="en-US" sz="1000" b="1" dirty="0">
+                          <a:solidFill>
+                            <a:srgbClr val="1A1A1A"/>
+                          </a:solidFill>
+                          <a:latin typeface="Calibri" pitchFamily="34" charset="0"/>
+                          <a:ea typeface="Calibri" pitchFamily="34" charset="-122"/>
+                          <a:cs typeface="Calibri" pitchFamily="34" charset="-120"/>
+                        </a:rPr>
+                        <a:t>Cash</a:t>
+                      </a:r>
+                      <a:endParaRPr lang="en-US" sz="1000" dirty="0">
+                        <a:latin typeface="Calibri" charset="0"/>
+                        <a:ea typeface="Calibri" charset="0"/>
+                        <a:cs typeface="Calibri" charset="0"/>
+                      </a:endParaRPr>
+                    </a:p>
+                  </a:txBody>
+                  <a:tcPr marL="73152" marR="73152" marT="54864" marB="54864">
+                    <a:lnL w="0" cap="flat" cmpd="sng" algn="ctr">
+                      <a:noFill/>
+                    </a:lnL>
+                    <a:lnR w="0" cap="flat" cmpd="sng" algn="ctr">
+                      <a:noFill/>
+                    </a:lnR>
+                    <a:lnT w="6350" cap="flat" cmpd="sng" algn="ctr">
+                      <a:solidFill>
+                        <a:srgbClr val="E3E6EA"/>
+                      </a:solidFill>
+                      <a:prstDash val="solid"/>
+                      <a:round/>
+                      <a:headEnd type="none" w="med" len="med"/>
+                      <a:tailEnd type="none" w="med" len="med"/>
+                    </a:lnT>
+                    <a:lnB w="6350" cap="flat" cmpd="sng" algn="ctr">
+                      <a:solidFill>
+                        <a:srgbClr val="E3E6EA"/>
+                      </a:solidFill>
+                      <a:prstDash val="solid"/>
+                      <a:round/>
+                      <a:headEnd type="none" w="med" len="med"/>
+                      <a:tailEnd type="none" w="med" len="med"/>
+                    </a:lnB>
+                  </a:tcPr>
+                </a:tc>
+                <a:tc>
+                  <a:txBody>
+                    <a:bodyPr/>
+                    <a:lstStyle/>
+                    <a:p>
+                      <a:pPr marL="0" indent="0" algn="l">
+                        <a:buNone/>
+                      </a:pPr>
+                      <a:r>
+                        <a:rPr lang="en-US" sz="1000" dirty="0">
+                          <a:solidFill>
+                            <a:srgbClr val="5F6670"/>
+                          </a:solidFill>
+                          <a:latin typeface="Calibri" pitchFamily="34" charset="0"/>
+                          <a:ea typeface="Calibri" pitchFamily="34" charset="-122"/>
+                          <a:cs typeface="Calibri" pitchFamily="34" charset="-120"/>
+                        </a:rPr>
+                        <a:t>DSO 47.5 days. Getting to 30 releases 309k against net debt of 723k. Chase Property NSW 19.7k and Meet Magic 5.1k, both over 90 days.</a:t>
                       </a:r>
                       <a:endParaRPr lang="en-US" sz="1000" dirty="0">
                         <a:latin typeface="Calibri" charset="0"/>
@@ -21558,225 +21777,6 @@
                           <a:cs typeface="Calibri" pitchFamily="34" charset="-120"/>
                         </a:rPr>
                         <a:t>24 Oct 26</a:t>
-                      </a:r>
-                      <a:endParaRPr lang="en-US" sz="1000" dirty="0">
-                        <a:latin typeface="Calibri" charset="0"/>
-                        <a:ea typeface="Calibri" charset="0"/>
-                        <a:cs typeface="Calibri" charset="0"/>
-                      </a:endParaRPr>
-                    </a:p>
-                  </a:txBody>
-                  <a:tcPr marL="73152" marR="73152" marT="54864" marB="54864">
-                    <a:lnL w="0" cap="flat" cmpd="sng" algn="ctr">
-                      <a:noFill/>
-                    </a:lnL>
-                    <a:lnR w="0" cap="flat" cmpd="sng" algn="ctr">
-                      <a:noFill/>
-                    </a:lnR>
-                    <a:lnT w="6350" cap="flat" cmpd="sng" algn="ctr">
-                      <a:solidFill>
-                        <a:srgbClr val="E3E6EA"/>
-                      </a:solidFill>
-                      <a:prstDash val="solid"/>
-                      <a:round/>
-                      <a:headEnd type="none" w="med" len="med"/>
-                      <a:tailEnd type="none" w="med" len="med"/>
-                    </a:lnT>
-                    <a:lnB w="6350" cap="flat" cmpd="sng" algn="ctr">
-                      <a:solidFill>
-                        <a:srgbClr val="E3E6EA"/>
-                      </a:solidFill>
-                      <a:prstDash val="solid"/>
-                      <a:round/>
-                      <a:headEnd type="none" w="med" len="med"/>
-                      <a:tailEnd type="none" w="med" len="med"/>
-                    </a:lnB>
-                  </a:tcPr>
-                </a:tc>
-                <a:extLst>
-                  <a:ext uri="{0D108BD9-81ED-4DB2-BD59-A6C34878D82A}">
-                    <a16:rowId xmlns:a16="http://schemas.microsoft.com/office/drawing/2014/main" val="10003"/>
-                  </a:ext>
-                </a:extLst>
-              </a:tr>
-              <a:tr h="685800">
-                <a:tc>
-                  <a:txBody>
-                    <a:bodyPr/>
-                    <a:lstStyle/>
-                    <a:p>
-                      <a:pPr marL="0" indent="0" algn="l">
-                        <a:buNone/>
-                      </a:pPr>
-                      <a:r>
-                        <a:rPr lang="en-US" sz="1000" b="1" dirty="0">
-                          <a:solidFill>
-                            <a:srgbClr val="1A1A1A"/>
-                          </a:solidFill>
-                          <a:latin typeface="Calibri" pitchFamily="34" charset="0"/>
-                          <a:ea typeface="Calibri" pitchFamily="34" charset="-122"/>
-                          <a:cs typeface="Calibri" pitchFamily="34" charset="-120"/>
-                        </a:rPr>
-                        <a:t>Utilisation</a:t>
-                      </a:r>
-                      <a:endParaRPr lang="en-US" sz="1000" dirty="0">
-                        <a:latin typeface="Calibri" charset="0"/>
-                        <a:ea typeface="Calibri" charset="0"/>
-                        <a:cs typeface="Calibri" charset="0"/>
-                      </a:endParaRPr>
-                    </a:p>
-                  </a:txBody>
-                  <a:tcPr marL="73152" marR="73152" marT="54864" marB="54864">
-                    <a:lnL w="0" cap="flat" cmpd="sng" algn="ctr">
-                      <a:noFill/>
-                    </a:lnL>
-                    <a:lnR w="0" cap="flat" cmpd="sng" algn="ctr">
-                      <a:noFill/>
-                    </a:lnR>
-                    <a:lnT w="6350" cap="flat" cmpd="sng" algn="ctr">
-                      <a:solidFill>
-                        <a:srgbClr val="E3E6EA"/>
-                      </a:solidFill>
-                      <a:prstDash val="solid"/>
-                      <a:round/>
-                      <a:headEnd type="none" w="med" len="med"/>
-                      <a:tailEnd type="none" w="med" len="med"/>
-                    </a:lnT>
-                    <a:lnB w="6350" cap="flat" cmpd="sng" algn="ctr">
-                      <a:solidFill>
-                        <a:srgbClr val="E3E6EA"/>
-                      </a:solidFill>
-                      <a:prstDash val="solid"/>
-                      <a:round/>
-                      <a:headEnd type="none" w="med" len="med"/>
-                      <a:tailEnd type="none" w="med" len="med"/>
-                    </a:lnB>
-                  </a:tcPr>
-                </a:tc>
-                <a:tc>
-                  <a:txBody>
-                    <a:bodyPr/>
-                    <a:lstStyle/>
-                    <a:p>
-                      <a:pPr marL="0" indent="0" algn="l">
-                        <a:buNone/>
-                      </a:pPr>
-                      <a:r>
-                        <a:rPr lang="en-US" sz="1000" dirty="0">
-                          <a:solidFill>
-                            <a:srgbClr val="5F6670"/>
-                          </a:solidFill>
-                          <a:latin typeface="Calibri" pitchFamily="34" charset="0"/>
-                          <a:ea typeface="Calibri" pitchFamily="34" charset="-122"/>
-                          <a:cs typeface="Calibri" pitchFamily="34" charset="-120"/>
-                        </a:rPr>
-                        <a:t>Support is recording no non-chargeable hours and Video and Integration report none at all. Fix the reporting before the next review.</a:t>
-                      </a:r>
-                      <a:endParaRPr lang="en-US" sz="1000" dirty="0">
-                        <a:latin typeface="Calibri" charset="0"/>
-                        <a:ea typeface="Calibri" charset="0"/>
-                        <a:cs typeface="Calibri" charset="0"/>
-                      </a:endParaRPr>
-                    </a:p>
-                  </a:txBody>
-                  <a:tcPr marL="73152" marR="73152" marT="54864" marB="54864">
-                    <a:lnL w="0" cap="flat" cmpd="sng" algn="ctr">
-                      <a:noFill/>
-                    </a:lnL>
-                    <a:lnR w="0" cap="flat" cmpd="sng" algn="ctr">
-                      <a:noFill/>
-                    </a:lnR>
-                    <a:lnT w="6350" cap="flat" cmpd="sng" algn="ctr">
-                      <a:solidFill>
-                        <a:srgbClr val="E3E6EA"/>
-                      </a:solidFill>
-                      <a:prstDash val="solid"/>
-                      <a:round/>
-                      <a:headEnd type="none" w="med" len="med"/>
-                      <a:tailEnd type="none" w="med" len="med"/>
-                    </a:lnT>
-                    <a:lnB w="6350" cap="flat" cmpd="sng" algn="ctr">
-                      <a:solidFill>
-                        <a:srgbClr val="E3E6EA"/>
-                      </a:solidFill>
-                      <a:prstDash val="solid"/>
-                      <a:round/>
-                      <a:headEnd type="none" w="med" len="med"/>
-                      <a:tailEnd type="none" w="med" len="med"/>
-                    </a:lnB>
-                  </a:tcPr>
-                </a:tc>
-                <a:tc>
-                  <a:txBody>
-                    <a:bodyPr/>
-                    <a:lstStyle/>
-                    <a:p>
-                      <a:pPr marL="0" indent="0" algn="l">
-                        <a:buNone/>
-                      </a:pPr>
-                      <a:r>
-                        <a:rPr lang="en-US" sz="1000" dirty="0">
-                          <a:solidFill>
-                            <a:srgbClr val="5F6670"/>
-                          </a:solidFill>
-                          <a:latin typeface="Calibri" pitchFamily="34" charset="0"/>
-                          <a:ea typeface="Calibri" pitchFamily="34" charset="-122"/>
-                          <a:cs typeface="Calibri" pitchFamily="34" charset="-120"/>
-                        </a:rPr>
-                        <a:t>Ops</a:t>
-                      </a:r>
-                      <a:endParaRPr lang="en-US" sz="1000" dirty="0">
-                        <a:latin typeface="Calibri" charset="0"/>
-                        <a:ea typeface="Calibri" charset="0"/>
-                        <a:cs typeface="Calibri" charset="0"/>
-                      </a:endParaRPr>
-                    </a:p>
-                  </a:txBody>
-                  <a:tcPr marL="73152" marR="73152" marT="54864" marB="54864">
-                    <a:lnL w="0" cap="flat" cmpd="sng" algn="ctr">
-                      <a:noFill/>
-                    </a:lnL>
-                    <a:lnR w="0" cap="flat" cmpd="sng" algn="ctr">
-                      <a:noFill/>
-                    </a:lnR>
-                    <a:lnT w="6350" cap="flat" cmpd="sng" algn="ctr">
-                      <a:solidFill>
-                        <a:srgbClr val="E3E6EA"/>
-                      </a:solidFill>
-                      <a:prstDash val="solid"/>
-                      <a:round/>
-                      <a:headEnd type="none" w="med" len="med"/>
-                      <a:tailEnd type="none" w="med" len="med"/>
-                    </a:lnT>
-                    <a:lnB w="6350" cap="flat" cmpd="sng" algn="ctr">
-                      <a:solidFill>
-                        <a:srgbClr val="E3E6EA"/>
-                      </a:solidFill>
-                      <a:prstDash val="solid"/>
-                      <a:round/>
-                      <a:headEnd type="none" w="med" len="med"/>
-                      <a:tailEnd type="none" w="med" len="med"/>
-                    </a:lnB>
-                  </a:tcPr>
-                </a:tc>
-                <a:tc>
-                  <a:txBody>
-                    <a:bodyPr/>
-                    <a:lstStyle/>
-                    <a:p>
-                      <a:pPr marL="0" indent="0" algn="l">
-                        <a:buNone/>
-                      </a:pPr>
-                      <a:r>
-                        <a:rPr lang="en-US" sz="1000" dirty="0">
-                          <a:solidFill>
-                            <a:srgbClr val="5F6670"/>
-                          </a:solidFill>
-                          <a:latin typeface="Calibri" pitchFamily="34" charset="0"/>
-                          <a:ea typeface="Calibri" pitchFamily="34" charset="-122"/>
-                          <a:cs typeface="Calibri" pitchFamily="34" charset="-120"/>
-                        </a:rPr>
-                        <a:t>14 Nov 26</a:t>
                       </a:r>
                       <a:endParaRPr lang="en-US" sz="1000" dirty="0">
                         <a:latin typeface="Calibri" charset="0"/>
@@ -26243,7 +26243,7 @@
                 <a:ea typeface="Calibri" pitchFamily="34" charset="-122"/>
                 <a:cs typeface="Calibri" pitchFamily="34" charset="-120"/>
               </a:rPr>
-              <a:t>Revenue beat budget by 148k. The year is still 372k behind.</a:t>
+              <a:t>Break even needs 549k of revenue a month. We are running at 541k.</a:t>
             </a:r>
             <a:endParaRPr lang="en-US" sz="1050" dirty="0"/>
           </a:p>
@@ -26264,7 +26264,7 @@
                 <a:ea typeface="Calibri" pitchFamily="34" charset="-122"/>
                 <a:cs typeface="Calibri" pitchFamily="34" charset="-120"/>
               </a:rPr>
-              <a:t>The whole beat is one Integration project, Aware Super. It does not repeat.</a:t>
+              <a:t>The EBITDA miss is all margin. Overheads came in 48k under budget.</a:t>
             </a:r>
             <a:endParaRPr lang="en-US" sz="1050" dirty="0"/>
           </a:p>
@@ -26285,7 +26285,7 @@
                 <a:ea typeface="Calibri" pitchFamily="34" charset="-122"/>
                 <a:cs typeface="Calibri" pitchFamily="34" charset="-120"/>
               </a:rPr>
-              <a:t>Gross margin was 33.4 per cent, but that Integration work carries only 10.</a:t>
+              <a:t>Gross profit missed 280k: 170k on volume, 110k on a 6.8 point margin drop.</a:t>
             </a:r>
             <a:endParaRPr lang="en-US" sz="1050" dirty="0"/>
           </a:p>
@@ -26306,7 +26306,7 @@
                 <a:ea typeface="Calibri" pitchFamily="34" charset="-122"/>
                 <a:cs typeface="Calibri" pitchFamily="34" charset="-120"/>
               </a:rPr>
-              <a:t>Overheads 230k against 232k budget. Cost control is not the problem.</a:t>
+              <a:t>At this run rate we meet the revenue budget and still lose 37k.</a:t>
             </a:r>
             <a:endParaRPr lang="en-US" sz="1050" dirty="0"/>
           </a:p>
@@ -26327,7 +26327,7 @@
                 <a:ea typeface="Calibri" pitchFamily="34" charset="-122"/>
                 <a:cs typeface="Calibri" pitchFamily="34" charset="-120"/>
               </a:rPr>
-              <a:t>EBITDA negative 32k for the month, 6k YTD against a 223k budget.</a:t>
+              <a:t>Reforecast on margin, not revenue. Cost is not the lever here.</a:t>
             </a:r>
             <a:endParaRPr lang="en-US" sz="1050" dirty="0"/>
           </a:p>
@@ -30184,7 +30184,7 @@
                 <a:ea typeface="Calibri" pitchFamily="34" charset="-122"/>
                 <a:cs typeface="Calibri" pitchFamily="34" charset="-120"/>
               </a:rPr>
-              <a:t>Support is the only department covering its overhead. It made 29k.</a:t>
+              <a:t>Only Support covers its overhead. It returned 12 per cent on revenue.</a:t>
             </a:r>
             <a:endParaRPr lang="en-US" sz="1050" dirty="0"/>
           </a:p>
@@ -30205,7 +30205,7 @@
                 <a:ea typeface="Calibri" pitchFamily="34" charset="-122"/>
                 <a:cs typeface="Calibri" pitchFamily="34" charset="-120"/>
               </a:rPr>
-              <a:t>Events lost 54k. It earned 73k and was charged 111k of overhead.</a:t>
+              <a:t>Events is charged 87.5 per cent of premises on 13 per cent of revenue.</a:t>
             </a:r>
             <a:endParaRPr lang="en-US" sz="1050" dirty="0"/>
           </a:p>
@@ -30226,7 +30226,7 @@
                 <a:ea typeface="Calibri" pitchFamily="34" charset="-122"/>
                 <a:cs typeface="Calibri" pitchFamily="34" charset="-120"/>
               </a:rPr>
-              <a:t>Integration made 10k on 235k. A 10 per cent margin is thin.</a:t>
+              <a:t>On that key Events cannot be profitable, whatever it sells.</a:t>
             </a:r>
             <a:endParaRPr lang="en-US" sz="1050" dirty="0"/>
           </a:p>
@@ -30247,7 +30247,7 @@
                 <a:ea typeface="Calibri" pitchFamily="34" charset="-122"/>
                 <a:cs typeface="Calibri" pitchFamily="34" charset="-120"/>
               </a:rPr>
-              <a:t>Consulting lost 20k, carrying overhead with almost no fee base.</a:t>
+              <a:t>Integration made 10k on 235k. A fit-out at that margin carries risk for nothing.</a:t>
             </a:r>
             <a:endParaRPr lang="en-US" sz="1050" dirty="0"/>
           </a:p>
@@ -30268,7 +30268,7 @@
                 <a:ea typeface="Calibri" pitchFamily="34" charset="-122"/>
                 <a:cs typeface="Calibri" pitchFamily="34" charset="-120"/>
               </a:rPr>
-              <a:t>The five results add back to net profit exactly.</a:t>
+              <a:t>Consulting holds 20k of overhead on a 3.5k fee base. Its future needs a decision.</a:t>
             </a:r>
             <a:endParaRPr lang="en-US" sz="1050" dirty="0"/>
           </a:p>
@@ -30541,7 +30541,7 @@
                 <a:ea typeface="Calibri" pitchFamily="34" charset="-122"/>
                 <a:cs typeface="Calibri" pitchFamily="34" charset="-120"/>
               </a:rPr>
-              <a:t>Support and Integration were 85 per cent of September revenue.</a:t>
+              <a:t>Two of five departments clear their overhead. Three do not.</a:t>
             </a:r>
             <a:endParaRPr lang="en-US" sz="1050" dirty="0"/>
           </a:p>
@@ -30562,7 +30562,7 @@
                 <a:ea typeface="Calibri" pitchFamily="34" charset="-122"/>
                 <a:cs typeface="Calibri" pitchFamily="34" charset="-120"/>
               </a:rPr>
-              <a:t>Integration's bar is almost all Aware Super. Strip it out and it changes.</a:t>
+              <a:t>Integration's bar is one project. Underlying it is a 60k a quarter unit.</a:t>
             </a:r>
             <a:endParaRPr lang="en-US" sz="1050" dirty="0"/>
           </a:p>
@@ -30583,7 +30583,7 @@
                 <a:ea typeface="Calibri" pitchFamily="34" charset="-122"/>
                 <a:cs typeface="Calibri" pitchFamily="34" charset="-120"/>
               </a:rPr>
-              <a:t>Only those two clear their overhead charge. The other three do not.</a:t>
+              <a:t>Events is the structural problem: heavy overhead, thin and falling fee income.</a:t>
             </a:r>
             <a:endParaRPr lang="en-US" sz="1050" dirty="0"/>
           </a:p>
@@ -30604,7 +30604,7 @@
                 <a:ea typeface="Calibri" pitchFamily="34" charset="-122"/>
                 <a:cs typeface="Calibri" pitchFamily="34" charset="-120"/>
               </a:rPr>
-              <a:t>Events carries the biggest charge because of the Office Dept key.</a:t>
+              <a:t>The overhead keys were set for a different shape of business.</a:t>
             </a:r>
             <a:endParaRPr lang="en-US" sz="1050" dirty="0"/>
           </a:p>
@@ -30625,7 +30625,7 @@
                 <a:ea typeface="Calibri" pitchFamily="34" charset="-122"/>
                 <a:cs typeface="Calibri" pitchFamily="34" charset="-120"/>
               </a:rPr>
-              <a:t>That key is fixed for the year. Revisit it at FY28, not now.</a:t>
+              <a:t>Test the Office Dept key before the FY28 budget, not mid year.</a:t>
             </a:r>
             <a:endParaRPr lang="en-US" sz="1050" dirty="0"/>
           </a:p>
@@ -33254,7 +33254,7 @@
                 <a:ea typeface="Calibri" pitchFamily="34" charset="-122"/>
                 <a:cs typeface="Calibri" pitchFamily="34" charset="-120"/>
               </a:rPr>
-              <a:t>55 per cent of revenue is non-contract and must be won again.</a:t>
+              <a:t>Only 43 per cent of revenue is contracted. The rest is rebuilt every month.</a:t>
             </a:r>
             <a:endParaRPr lang="en-US" sz="1050" dirty="0"/>
           </a:p>
@@ -33275,7 +33275,7 @@
                 <a:ea typeface="Calibri" pitchFamily="34" charset="-122"/>
                 <a:cs typeface="Calibri" pitchFamily="34" charset="-120"/>
               </a:rPr>
-              <a:t>Integration non-contract is 254k behind budget for the year.</a:t>
+              <a:t>Integration and Consulting non-contract are 487k behind for the quarter.</a:t>
             </a:r>
             <a:endParaRPr lang="en-US" sz="1050" dirty="0"/>
           </a:p>
@@ -33296,7 +33296,7 @@
                 <a:ea typeface="Calibri" pitchFamily="34" charset="-122"/>
                 <a:cs typeface="Calibri" pitchFamily="34" charset="-120"/>
               </a:rPr>
-              <a:t>Consulting non-contract is 233k behind. That budget needs reforecasting.</a:t>
+              <a:t>That budget is not recoverable across the remaining nine months.</a:t>
             </a:r>
             <a:endParaRPr lang="en-US" sz="1050" dirty="0"/>
           </a:p>
@@ -33317,7 +33317,7 @@
                 <a:ea typeface="Calibri" pitchFamily="34" charset="-122"/>
                 <a:cs typeface="Calibri" pitchFamily="34" charset="-120"/>
               </a:rPr>
-              <a:t>Support contract income is 134k behind. Scope, or a renewal we lost.</a:t>
+              <a:t>Recommend a formal reforecast of both lines before the half year.</a:t>
             </a:r>
             <a:endParaRPr lang="en-US" sz="1050" dirty="0"/>
           </a:p>
@@ -33338,7 +33338,7 @@
                 <a:ea typeface="Calibri" pitchFamily="34" charset="-122"/>
                 <a:cs typeface="Calibri" pitchFamily="34" charset="-120"/>
               </a:rPr>
-              <a:t>Two lines earn with no budget mapped. A pack fix, not trading.</a:t>
+              <a:t>Two lines earn against no budget. A pack fix, not a trading issue.</a:t>
             </a:r>
             <a:endParaRPr lang="en-US" sz="1050" dirty="0"/>
           </a:p>
@@ -37846,7 +37846,7 @@
                 <a:ea typeface="Calibri" pitchFamily="34" charset="-122"/>
                 <a:cs typeface="Calibri" pitchFamily="34" charset="-120"/>
               </a:rPr>
-              <a:t>The top ten are 76 per cent of revenue. The top three, 49.</a:t>
+              <a:t>Top three customers are 49 per cent of revenue. That is the real exposure.</a:t>
             </a:r>
             <a:endParaRPr lang="en-US" sz="1050" dirty="0"/>
           </a:p>
@@ -37867,7 +37867,7 @@
                 <a:ea typeface="Calibri" pitchFamily="34" charset="-122"/>
                 <a:cs typeface="Calibri" pitchFamily="34" charset="-120"/>
               </a:rPr>
-              <a:t>Aware Super went from nil to 285k. All of it one fit-out.</a:t>
+              <a:t>Deloitte at 402k is close to the whole EBITDA base. Losing it ends the year.</a:t>
             </a:r>
             <a:endParaRPr lang="en-US" sz="1050" dirty="0"/>
           </a:p>
@@ -37888,7 +37888,7 @@
                 <a:ea typeface="Calibri" pitchFamily="34" charset="-122"/>
                 <a:cs typeface="Calibri" pitchFamily="34" charset="-120"/>
               </a:rPr>
-              <a:t>Deloitte is the only large recurring customer, steady at 402k.</a:t>
+              <a:t>Aware Super at 285k is one fit-out and will not be there next quarter.</a:t>
             </a:r>
             <a:endParaRPr lang="en-US" sz="1050" dirty="0"/>
           </a:p>
@@ -37909,7 +37909,7 @@
                 <a:ea typeface="Calibri" pitchFamily="34" charset="-122"/>
                 <a:cs typeface="Calibri" pitchFamily="34" charset="-120"/>
               </a:rPr>
-              <a:t>Three of the ten are new, worth 368k between them.</a:t>
+              <a:t>Three of the ten are new, 368k, none contracted beyond the current job.</a:t>
             </a:r>
             <a:endParaRPr lang="en-US" sz="1050" dirty="0"/>
           </a:p>
@@ -37930,7 +37930,7 @@
                 <a:ea typeface="Calibri" pitchFamily="34" charset="-122"/>
                 <a:cs typeface="Calibri" pitchFamily="34" charset="-120"/>
               </a:rPr>
-              <a:t>Lose Deloitte and a quarter of the book goes with it.</a:t>
+              <a:t>Recommend a retention plan on Deloitte and contract cover on the new three.</a:t>
             </a:r>
             <a:endParaRPr lang="en-US" sz="1050" dirty="0"/>
           </a:p>

--- a/deck/CTS Monthly Business Review - September 2026.pptx
+++ b/deck/CTS Monthly Business Review - September 2026.pptx
@@ -4151,7 +4151,7 @@
               <a:buNone/>
               <a:defRPr lang="en-US" sz="4800" b="1" dirty="0">
                 <a:solidFill>
-                  <a:srgbClr val="1A1A1A"/>
+                  <a:srgbClr val="242C39"/>
                 </a:solidFill>
                 <a:latin typeface="Calibri" pitchFamily="34" charset="0"/>
                 <a:ea typeface="Calibri" pitchFamily="34" charset="-122"/>
@@ -4166,7 +4166,7 @@
             <a:r>
               <a:rPr lang="en-US" sz="4800" b="1" dirty="0">
                 <a:solidFill>
-                  <a:srgbClr val="1A1A1A"/>
+                  <a:srgbClr val="242C39"/>
                 </a:solidFill>
                 <a:latin typeface="Calibri" pitchFamily="34" charset="0"/>
                 <a:ea typeface="Calibri" pitchFamily="34" charset="-122"/>
@@ -4553,7 +4553,7 @@
               <a:buNone/>
               <a:defRPr lang="en-US" sz="4800" b="1" dirty="0">
                 <a:solidFill>
-                  <a:srgbClr val="1A1A1A"/>
+                  <a:srgbClr val="242C39"/>
                 </a:solidFill>
                 <a:latin typeface="Calibri" pitchFamily="34" charset="0"/>
                 <a:ea typeface="Calibri" pitchFamily="34" charset="-122"/>
@@ -4568,7 +4568,7 @@
             <a:r>
               <a:rPr lang="en-US" sz="4800" b="1" dirty="0">
                 <a:solidFill>
-                  <a:srgbClr val="1A1A1A"/>
+                  <a:srgbClr val="242C39"/>
                 </a:solidFill>
                 <a:latin typeface="Calibri" pitchFamily="34" charset="0"/>
                 <a:ea typeface="Calibri" pitchFamily="34" charset="-122"/>
@@ -4955,7 +4955,7 @@
               <a:buNone/>
               <a:defRPr lang="en-US" sz="4800" b="1" dirty="0">
                 <a:solidFill>
-                  <a:srgbClr val="1A1A1A"/>
+                  <a:srgbClr val="242C39"/>
                 </a:solidFill>
                 <a:latin typeface="Calibri" pitchFamily="34" charset="0"/>
                 <a:ea typeface="Calibri" pitchFamily="34" charset="-122"/>
@@ -4970,7 +4970,7 @@
             <a:r>
               <a:rPr lang="en-US" sz="4800" b="1" dirty="0">
                 <a:solidFill>
-                  <a:srgbClr val="1A1A1A"/>
+                  <a:srgbClr val="242C39"/>
                 </a:solidFill>
                 <a:latin typeface="Calibri" pitchFamily="34" charset="0"/>
                 <a:ea typeface="Calibri" pitchFamily="34" charset="-122"/>
@@ -5295,7 +5295,7 @@
               <a:buNone/>
               <a:defRPr lang="en-US" sz="2800" b="1" dirty="0">
                 <a:solidFill>
-                  <a:srgbClr val="1A1A1A"/>
+                  <a:srgbClr val="242C39"/>
                 </a:solidFill>
                 <a:latin typeface="Calibri" pitchFamily="34" charset="0"/>
                 <a:ea typeface="Calibri" pitchFamily="34" charset="-122"/>
@@ -5310,7 +5310,7 @@
             <a:r>
               <a:rPr lang="en-US" sz="2800" b="1" dirty="0">
                 <a:solidFill>
-                  <a:srgbClr val="1A1A1A"/>
+                  <a:srgbClr val="242C39"/>
                 </a:solidFill>
                 <a:latin typeface="Calibri" pitchFamily="34" charset="0"/>
                 <a:ea typeface="Calibri" pitchFamily="34" charset="-122"/>
@@ -5373,7 +5373,7 @@
             <a:r>
               <a:rPr lang="en-US" sz="900" dirty="0">
                 <a:solidFill>
-                  <a:srgbClr val="5F6670"/>
+                  <a:srgbClr val="242C39"/>
                 </a:solidFill>
                 <a:latin typeface="Calibri" pitchFamily="34" charset="0"/>
                 <a:ea typeface="Calibri" pitchFamily="34" charset="-122"/>
@@ -5415,7 +5415,7 @@
             <a:lvl1pPr>
               <a:defRPr sz="900">
                 <a:solidFill>
-                  <a:srgbClr val="5F6670"/>
+                  <a:srgbClr val="242C39"/>
                 </a:solidFill>
                 <a:latin typeface="Calibri"/>
                 <a:ea typeface="Calibri"/>
@@ -5549,7 +5549,7 @@
               <a:buNone/>
               <a:defRPr lang="en-US" sz="2800" b="1" dirty="0">
                 <a:solidFill>
-                  <a:srgbClr val="1A1A1A"/>
+                  <a:srgbClr val="242C39"/>
                 </a:solidFill>
                 <a:latin typeface="Calibri" pitchFamily="34" charset="0"/>
                 <a:ea typeface="Calibri" pitchFamily="34" charset="-122"/>
@@ -5564,7 +5564,7 @@
             <a:r>
               <a:rPr lang="en-US" sz="2800" b="1" dirty="0">
                 <a:solidFill>
-                  <a:srgbClr val="1A1A1A"/>
+                  <a:srgbClr val="242C39"/>
                 </a:solidFill>
                 <a:latin typeface="Calibri" pitchFamily="34" charset="0"/>
                 <a:ea typeface="Calibri" pitchFamily="34" charset="-122"/>
@@ -5627,7 +5627,7 @@
             <a:r>
               <a:rPr lang="en-US" sz="900" dirty="0">
                 <a:solidFill>
-                  <a:srgbClr val="5F6670"/>
+                  <a:srgbClr val="242C39"/>
                 </a:solidFill>
                 <a:latin typeface="Calibri" pitchFamily="34" charset="0"/>
                 <a:ea typeface="Calibri" pitchFamily="34" charset="-122"/>
@@ -5671,7 +5671,7 @@
               <a:buChar char="•"/>
               <a:defRPr lang="en-US" sz="1600" dirty="0">
                 <a:solidFill>
-                  <a:srgbClr val="1A1A1A"/>
+                  <a:srgbClr val="242C39"/>
                 </a:solidFill>
                 <a:latin typeface="Calibri" pitchFamily="34" charset="0"/>
                 <a:ea typeface="Calibri" pitchFamily="34" charset="-122"/>
@@ -5690,7 +5690,7 @@
             <a:r>
               <a:rPr lang="en-US" sz="1600" dirty="0">
                 <a:solidFill>
-                  <a:srgbClr val="1A1A1A"/>
+                  <a:srgbClr val="242C39"/>
                 </a:solidFill>
                 <a:latin typeface="Calibri" pitchFamily="34" charset="0"/>
                 <a:ea typeface="Calibri" pitchFamily="34" charset="-122"/>
@@ -5732,7 +5732,7 @@
             <a:lvl1pPr>
               <a:defRPr sz="900">
                 <a:solidFill>
-                  <a:srgbClr val="5F6670"/>
+                  <a:srgbClr val="242C39"/>
                 </a:solidFill>
                 <a:latin typeface="Calibri"/>
                 <a:ea typeface="Calibri"/>
@@ -5866,7 +5866,7 @@
               <a:buNone/>
               <a:defRPr lang="en-US" sz="2800" b="1" dirty="0">
                 <a:solidFill>
-                  <a:srgbClr val="1A1A1A"/>
+                  <a:srgbClr val="242C39"/>
                 </a:solidFill>
                 <a:latin typeface="Calibri" pitchFamily="34" charset="0"/>
                 <a:ea typeface="Calibri" pitchFamily="34" charset="-122"/>
@@ -5881,7 +5881,7 @@
             <a:r>
               <a:rPr lang="en-US" sz="2800" b="1" dirty="0">
                 <a:solidFill>
-                  <a:srgbClr val="1A1A1A"/>
+                  <a:srgbClr val="242C39"/>
                 </a:solidFill>
                 <a:latin typeface="Calibri" pitchFamily="34" charset="0"/>
                 <a:ea typeface="Calibri" pitchFamily="34" charset="-122"/>
@@ -5944,7 +5944,7 @@
             <a:r>
               <a:rPr lang="en-US" sz="900" dirty="0">
                 <a:solidFill>
-                  <a:srgbClr val="5F6670"/>
+                  <a:srgbClr val="242C39"/>
                 </a:solidFill>
                 <a:latin typeface="Calibri" pitchFamily="34" charset="0"/>
                 <a:ea typeface="Calibri" pitchFamily="34" charset="-122"/>
@@ -5986,7 +5986,7 @@
             <a:lvl1pPr>
               <a:defRPr sz="900">
                 <a:solidFill>
-                  <a:srgbClr val="5F6670"/>
+                  <a:srgbClr val="242C39"/>
                 </a:solidFill>
                 <a:latin typeface="Calibri"/>
                 <a:ea typeface="Calibri"/>
@@ -6120,7 +6120,7 @@
               <a:buNone/>
               <a:defRPr lang="en-US" sz="2800" b="1" dirty="0">
                 <a:solidFill>
-                  <a:srgbClr val="1A1A1A"/>
+                  <a:srgbClr val="242C39"/>
                 </a:solidFill>
                 <a:latin typeface="Calibri" pitchFamily="34" charset="0"/>
                 <a:ea typeface="Calibri" pitchFamily="34" charset="-122"/>
@@ -6135,7 +6135,7 @@
             <a:r>
               <a:rPr lang="en-US" sz="2800" b="1" dirty="0">
                 <a:solidFill>
-                  <a:srgbClr val="1A1A1A"/>
+                  <a:srgbClr val="242C39"/>
                 </a:solidFill>
                 <a:latin typeface="Calibri" pitchFamily="34" charset="0"/>
                 <a:ea typeface="Calibri" pitchFamily="34" charset="-122"/>
@@ -6198,7 +6198,7 @@
             <a:r>
               <a:rPr lang="en-US" sz="900" dirty="0">
                 <a:solidFill>
-                  <a:srgbClr val="5F6670"/>
+                  <a:srgbClr val="242C39"/>
                 </a:solidFill>
                 <a:latin typeface="Calibri" pitchFamily="34" charset="0"/>
                 <a:ea typeface="Calibri" pitchFamily="34" charset="-122"/>
@@ -6242,7 +6242,7 @@
               <a:buChar char="•"/>
               <a:defRPr lang="en-US" sz="1600" dirty="0">
                 <a:solidFill>
-                  <a:srgbClr val="1A1A1A"/>
+                  <a:srgbClr val="242C39"/>
                 </a:solidFill>
                 <a:latin typeface="Calibri" pitchFamily="34" charset="0"/>
                 <a:ea typeface="Calibri" pitchFamily="34" charset="-122"/>
@@ -6261,7 +6261,7 @@
             <a:r>
               <a:rPr lang="en-US" sz="1600" dirty="0">
                 <a:solidFill>
-                  <a:srgbClr val="1A1A1A"/>
+                  <a:srgbClr val="242C39"/>
                 </a:solidFill>
                 <a:latin typeface="Calibri" pitchFamily="34" charset="0"/>
                 <a:ea typeface="Calibri" pitchFamily="34" charset="-122"/>
@@ -6303,7 +6303,7 @@
             <a:lvl1pPr>
               <a:defRPr sz="900">
                 <a:solidFill>
-                  <a:srgbClr val="5F6670"/>
+                  <a:srgbClr val="242C39"/>
                 </a:solidFill>
                 <a:latin typeface="Calibri"/>
                 <a:ea typeface="Calibri"/>
@@ -6437,7 +6437,7 @@
               <a:buNone/>
               <a:defRPr lang="en-US" sz="2800" b="1" dirty="0">
                 <a:solidFill>
-                  <a:srgbClr val="1A1A1A"/>
+                  <a:srgbClr val="242C39"/>
                 </a:solidFill>
                 <a:latin typeface="Calibri" pitchFamily="34" charset="0"/>
                 <a:ea typeface="Calibri" pitchFamily="34" charset="-122"/>
@@ -6452,7 +6452,7 @@
             <a:r>
               <a:rPr lang="en-US" sz="2800" b="1" dirty="0">
                 <a:solidFill>
-                  <a:srgbClr val="1A1A1A"/>
+                  <a:srgbClr val="242C39"/>
                 </a:solidFill>
                 <a:latin typeface="Calibri" pitchFamily="34" charset="0"/>
                 <a:ea typeface="Calibri" pitchFamily="34" charset="-122"/>
@@ -6515,7 +6515,7 @@
             <a:r>
               <a:rPr lang="en-US" sz="900" dirty="0">
                 <a:solidFill>
-                  <a:srgbClr val="5F6670"/>
+                  <a:srgbClr val="242C39"/>
                 </a:solidFill>
                 <a:latin typeface="Calibri" pitchFamily="34" charset="0"/>
                 <a:ea typeface="Calibri" pitchFamily="34" charset="-122"/>
@@ -6557,7 +6557,7 @@
             <a:lvl1pPr>
               <a:defRPr sz="900">
                 <a:solidFill>
-                  <a:srgbClr val="5F6670"/>
+                  <a:srgbClr val="242C39"/>
                 </a:solidFill>
                 <a:latin typeface="Calibri"/>
                 <a:ea typeface="Calibri"/>
@@ -6691,7 +6691,7 @@
               <a:buNone/>
               <a:defRPr lang="en-US" sz="2800" b="1" dirty="0">
                 <a:solidFill>
-                  <a:srgbClr val="1A1A1A"/>
+                  <a:srgbClr val="242C39"/>
                 </a:solidFill>
                 <a:latin typeface="Calibri" pitchFamily="34" charset="0"/>
                 <a:ea typeface="Calibri" pitchFamily="34" charset="-122"/>
@@ -6706,7 +6706,7 @@
             <a:r>
               <a:rPr lang="en-US" sz="2800" b="1" dirty="0">
                 <a:solidFill>
-                  <a:srgbClr val="1A1A1A"/>
+                  <a:srgbClr val="242C39"/>
                 </a:solidFill>
                 <a:latin typeface="Calibri" pitchFamily="34" charset="0"/>
                 <a:ea typeface="Calibri" pitchFamily="34" charset="-122"/>
@@ -6769,7 +6769,7 @@
             <a:r>
               <a:rPr lang="en-US" sz="900" dirty="0">
                 <a:solidFill>
-                  <a:srgbClr val="5F6670"/>
+                  <a:srgbClr val="242C39"/>
                 </a:solidFill>
                 <a:latin typeface="Calibri" pitchFamily="34" charset="0"/>
                 <a:ea typeface="Calibri" pitchFamily="34" charset="-122"/>
@@ -6813,7 +6813,7 @@
               <a:buChar char="•"/>
               <a:defRPr lang="en-US" sz="1600" dirty="0">
                 <a:solidFill>
-                  <a:srgbClr val="1A1A1A"/>
+                  <a:srgbClr val="242C39"/>
                 </a:solidFill>
                 <a:latin typeface="Calibri" pitchFamily="34" charset="0"/>
                 <a:ea typeface="Calibri" pitchFamily="34" charset="-122"/>
@@ -6832,7 +6832,7 @@
             <a:r>
               <a:rPr lang="en-US" sz="1600" dirty="0">
                 <a:solidFill>
-                  <a:srgbClr val="1A1A1A"/>
+                  <a:srgbClr val="242C39"/>
                 </a:solidFill>
                 <a:latin typeface="Calibri" pitchFamily="34" charset="0"/>
                 <a:ea typeface="Calibri" pitchFamily="34" charset="-122"/>
@@ -6874,7 +6874,7 @@
             <a:lvl1pPr>
               <a:defRPr sz="900">
                 <a:solidFill>
-                  <a:srgbClr val="5F6670"/>
+                  <a:srgbClr val="242C39"/>
                 </a:solidFill>
                 <a:latin typeface="Calibri"/>
                 <a:ea typeface="Calibri"/>
@@ -7008,7 +7008,7 @@
               <a:buNone/>
               <a:defRPr lang="en-US" sz="2800" b="1" dirty="0">
                 <a:solidFill>
-                  <a:srgbClr val="1A1A1A"/>
+                  <a:srgbClr val="242C39"/>
                 </a:solidFill>
                 <a:latin typeface="Calibri" pitchFamily="34" charset="0"/>
                 <a:ea typeface="Calibri" pitchFamily="34" charset="-122"/>
@@ -7023,7 +7023,7 @@
             <a:r>
               <a:rPr lang="en-US" sz="2800" b="1" dirty="0">
                 <a:solidFill>
-                  <a:srgbClr val="1A1A1A"/>
+                  <a:srgbClr val="242C39"/>
                 </a:solidFill>
                 <a:latin typeface="Calibri" pitchFamily="34" charset="0"/>
                 <a:ea typeface="Calibri" pitchFamily="34" charset="-122"/>
@@ -7086,7 +7086,7 @@
             <a:r>
               <a:rPr lang="en-US" sz="900" dirty="0">
                 <a:solidFill>
-                  <a:srgbClr val="5F6670"/>
+                  <a:srgbClr val="242C39"/>
                 </a:solidFill>
                 <a:latin typeface="Calibri" pitchFamily="34" charset="0"/>
                 <a:ea typeface="Calibri" pitchFamily="34" charset="-122"/>
@@ -7128,7 +7128,7 @@
             <a:lvl1pPr>
               <a:defRPr sz="900">
                 <a:solidFill>
-                  <a:srgbClr val="5F6670"/>
+                  <a:srgbClr val="242C39"/>
                 </a:solidFill>
                 <a:latin typeface="Calibri"/>
                 <a:ea typeface="Calibri"/>
@@ -7160,7 +7160,7 @@
     <p:bg>
       <p:bgPr>
         <a:solidFill>
-          <a:srgbClr val="1A1A1A"/>
+          <a:srgbClr val="242C39"/>
         </a:solidFill>
         <a:effectLst/>
       </p:bgPr>
@@ -7702,7 +7702,7 @@
               <a:buNone/>
               <a:defRPr lang="en-US" sz="2800" b="1" dirty="0">
                 <a:solidFill>
-                  <a:srgbClr val="1A1A1A"/>
+                  <a:srgbClr val="242C39"/>
                 </a:solidFill>
                 <a:latin typeface="Calibri" pitchFamily="34" charset="0"/>
                 <a:ea typeface="Calibri" pitchFamily="34" charset="-122"/>
@@ -7717,7 +7717,7 @@
             <a:r>
               <a:rPr lang="en-US" sz="2800" b="1" dirty="0">
                 <a:solidFill>
-                  <a:srgbClr val="1A1A1A"/>
+                  <a:srgbClr val="242C39"/>
                 </a:solidFill>
                 <a:latin typeface="Calibri" pitchFamily="34" charset="0"/>
                 <a:ea typeface="Calibri" pitchFamily="34" charset="-122"/>
@@ -7780,7 +7780,7 @@
             <a:r>
               <a:rPr lang="en-US" sz="900" dirty="0">
                 <a:solidFill>
-                  <a:srgbClr val="5F6670"/>
+                  <a:srgbClr val="242C39"/>
                 </a:solidFill>
                 <a:latin typeface="Calibri" pitchFamily="34" charset="0"/>
                 <a:ea typeface="Calibri" pitchFamily="34" charset="-122"/>
@@ -7824,7 +7824,7 @@
               <a:buChar char="•"/>
               <a:defRPr lang="en-US" sz="1600" dirty="0">
                 <a:solidFill>
-                  <a:srgbClr val="1A1A1A"/>
+                  <a:srgbClr val="242C39"/>
                 </a:solidFill>
                 <a:latin typeface="Calibri" pitchFamily="34" charset="0"/>
                 <a:ea typeface="Calibri" pitchFamily="34" charset="-122"/>
@@ -7843,7 +7843,7 @@
             <a:r>
               <a:rPr lang="en-US" sz="1600" dirty="0">
                 <a:solidFill>
-                  <a:srgbClr val="1A1A1A"/>
+                  <a:srgbClr val="242C39"/>
                 </a:solidFill>
                 <a:latin typeface="Calibri" pitchFamily="34" charset="0"/>
                 <a:ea typeface="Calibri" pitchFamily="34" charset="-122"/>
@@ -7885,7 +7885,7 @@
             <a:lvl1pPr>
               <a:defRPr sz="900">
                 <a:solidFill>
-                  <a:srgbClr val="5F6670"/>
+                  <a:srgbClr val="242C39"/>
                 </a:solidFill>
                 <a:latin typeface="Calibri"/>
                 <a:ea typeface="Calibri"/>
@@ -7951,11 +7951,11 @@
             <a:avLst/>
           </a:prstGeom>
           <a:solidFill>
-            <a:srgbClr val="1A1A1A"/>
+            <a:srgbClr val="242C39"/>
           </a:solidFill>
           <a:ln w="12700">
             <a:solidFill>
-              <a:srgbClr val="1A1A1A"/>
+              <a:srgbClr val="242C39"/>
             </a:solidFill>
             <a:prstDash val="solid"/>
           </a:ln>
@@ -8180,7 +8180,7 @@
               <a:buNone/>
               <a:defRPr lang="en-US" sz="3600" b="1" dirty="0">
                 <a:solidFill>
-                  <a:srgbClr val="1A1A1A"/>
+                  <a:srgbClr val="242C39"/>
                 </a:solidFill>
                 <a:latin typeface="Calibri" pitchFamily="34" charset="0"/>
                 <a:ea typeface="Calibri" pitchFamily="34" charset="-122"/>
@@ -8195,7 +8195,7 @@
             <a:r>
               <a:rPr lang="en-US" sz="3600" b="1" dirty="0">
                 <a:solidFill>
-                  <a:srgbClr val="1A1A1A"/>
+                  <a:srgbClr val="242C39"/>
                 </a:solidFill>
                 <a:latin typeface="Calibri" pitchFamily="34" charset="0"/>
                 <a:ea typeface="Calibri" pitchFamily="34" charset="-122"/>
@@ -8235,7 +8235,7 @@
               <a:buNone/>
               <a:defRPr lang="en-US" sz="1800" dirty="0">
                 <a:solidFill>
-                  <a:srgbClr val="5F6670"/>
+                  <a:srgbClr val="242C39"/>
                 </a:solidFill>
                 <a:latin typeface="Calibri" pitchFamily="34" charset="0"/>
                 <a:ea typeface="Calibri" pitchFamily="34" charset="-122"/>
@@ -8250,7 +8250,7 @@
             <a:r>
               <a:rPr lang="en-US" sz="1800" dirty="0">
                 <a:solidFill>
-                  <a:srgbClr val="5F6670"/>
+                  <a:srgbClr val="242C39"/>
                 </a:solidFill>
                 <a:latin typeface="Calibri" pitchFamily="34" charset="0"/>
                 <a:ea typeface="Calibri" pitchFamily="34" charset="-122"/>
@@ -8290,7 +8290,7 @@
               <a:buNone/>
               <a:defRPr lang="en-US" sz="1200" dirty="0">
                 <a:solidFill>
-                  <a:srgbClr val="5F6670"/>
+                  <a:srgbClr val="242C39"/>
                 </a:solidFill>
                 <a:latin typeface="Calibri" pitchFamily="34" charset="0"/>
                 <a:ea typeface="Calibri" pitchFamily="34" charset="-122"/>
@@ -8305,7 +8305,7 @@
             <a:r>
               <a:rPr lang="en-US" sz="1200" dirty="0">
                 <a:solidFill>
-                  <a:srgbClr val="5F6670"/>
+                  <a:srgbClr val="242C39"/>
                 </a:solidFill>
                 <a:latin typeface="Calibri" pitchFamily="34" charset="0"/>
                 <a:ea typeface="Calibri" pitchFamily="34" charset="-122"/>
@@ -8345,7 +8345,7 @@
               <a:buNone/>
               <a:defRPr lang="en-US" sz="1200" dirty="0">
                 <a:solidFill>
-                  <a:srgbClr val="5F6670"/>
+                  <a:srgbClr val="242C39"/>
                 </a:solidFill>
                 <a:latin typeface="Calibri" pitchFamily="34" charset="0"/>
                 <a:ea typeface="Calibri" pitchFamily="34" charset="-122"/>
@@ -8360,7 +8360,7 @@
             <a:r>
               <a:rPr lang="en-US" sz="1200" dirty="0">
                 <a:solidFill>
-                  <a:srgbClr val="5F6670"/>
+                  <a:srgbClr val="242C39"/>
                 </a:solidFill>
                 <a:latin typeface="Calibri" pitchFamily="34" charset="0"/>
                 <a:ea typeface="Calibri" pitchFamily="34" charset="-122"/>
@@ -8386,7 +8386,7 @@
     <p:bg>
       <p:bgPr>
         <a:solidFill>
-          <a:srgbClr val="1A1A1A"/>
+          <a:srgbClr val="242C39"/>
         </a:solidFill>
         <a:effectLst/>
       </p:bgPr>
@@ -8747,7 +8747,7 @@
     <p:bg>
       <p:bgPr>
         <a:solidFill>
-          <a:srgbClr val="1A1A1A"/>
+          <a:srgbClr val="242C39"/>
         </a:solidFill>
         <a:effectLst/>
       </p:bgPr>
@@ -9137,7 +9137,7 @@
     <p:bg>
       <p:bgPr>
         <a:solidFill>
-          <a:srgbClr val="1A1A1A"/>
+          <a:srgbClr val="242C39"/>
         </a:solidFill>
         <a:effectLst/>
       </p:bgPr>
@@ -9527,7 +9527,7 @@
     <p:bg>
       <p:bgPr>
         <a:solidFill>
-          <a:srgbClr val="1A1A1A"/>
+          <a:srgbClr val="242C39"/>
         </a:solidFill>
         <a:effectLst/>
       </p:bgPr>
@@ -10081,7 +10081,7 @@
               <a:buNone/>
               <a:defRPr lang="en-US" sz="4800" b="1" dirty="0">
                 <a:solidFill>
-                  <a:srgbClr val="1A1A1A"/>
+                  <a:srgbClr val="242C39"/>
                 </a:solidFill>
                 <a:latin typeface="Calibri" pitchFamily="34" charset="0"/>
                 <a:ea typeface="Calibri" pitchFamily="34" charset="-122"/>
@@ -10096,7 +10096,7 @@
             <a:r>
               <a:rPr lang="en-US" sz="4800" b="1" dirty="0">
                 <a:solidFill>
-                  <a:srgbClr val="1A1A1A"/>
+                  <a:srgbClr val="242C39"/>
                 </a:solidFill>
                 <a:latin typeface="Calibri" pitchFamily="34" charset="0"/>
                 <a:ea typeface="Calibri" pitchFamily="34" charset="-122"/>
@@ -10445,11 +10445,11 @@
             <a:avLst/>
           </a:prstGeom>
           <a:solidFill>
-            <a:srgbClr val="1A1A1A"/>
+            <a:srgbClr val="242C39"/>
           </a:solidFill>
           <a:ln w="12700">
             <a:solidFill>
-              <a:srgbClr val="1A1A1A"/>
+              <a:srgbClr val="242C39"/>
             </a:solidFill>
             <a:prstDash val="solid"/>
           </a:ln>
@@ -10538,7 +10538,7 @@
               <a:buNone/>
               <a:defRPr lang="en-US" sz="3600" b="1" dirty="0">
                 <a:solidFill>
-                  <a:srgbClr val="1A1A1A"/>
+                  <a:srgbClr val="242C39"/>
                 </a:solidFill>
                 <a:latin typeface="Calibri" pitchFamily="34" charset="0"/>
                 <a:ea typeface="Calibri" pitchFamily="34" charset="-122"/>
@@ -10553,7 +10553,7 @@
             <a:r>
               <a:rPr lang="en-US" sz="3600" b="1" dirty="0">
                 <a:solidFill>
-                  <a:srgbClr val="1A1A1A"/>
+                  <a:srgbClr val="242C39"/>
                 </a:solidFill>
                 <a:latin typeface="Calibri" pitchFamily="34" charset="0"/>
                 <a:ea typeface="Calibri" pitchFamily="34" charset="-122"/>
@@ -10593,7 +10593,7 @@
               <a:buNone/>
               <a:defRPr lang="en-US" sz="1600" dirty="0">
                 <a:solidFill>
-                  <a:srgbClr val="5F6670"/>
+                  <a:srgbClr val="242C39"/>
                 </a:solidFill>
                 <a:latin typeface="Calibri" pitchFamily="34" charset="0"/>
                 <a:ea typeface="Calibri" pitchFamily="34" charset="-122"/>
@@ -10608,7 +10608,7 @@
             <a:r>
               <a:rPr lang="en-US" sz="1600" dirty="0">
                 <a:solidFill>
-                  <a:srgbClr val="5F6670"/>
+                  <a:srgbClr val="242C39"/>
                 </a:solidFill>
                 <a:latin typeface="Calibri" pitchFamily="34" charset="0"/>
                 <a:ea typeface="Calibri" pitchFamily="34" charset="-122"/>
@@ -10647,7 +10647,7 @@
             <a:r>
               <a:rPr lang="en-US" sz="900" dirty="0">
                 <a:solidFill>
-                  <a:srgbClr val="5F6670"/>
+                  <a:srgbClr val="242C39"/>
                 </a:solidFill>
                 <a:latin typeface="Calibri" pitchFamily="34" charset="0"/>
                 <a:ea typeface="Calibri" pitchFamily="34" charset="-122"/>
@@ -10689,7 +10689,7 @@
             <a:lvl1pPr>
               <a:defRPr sz="900">
                 <a:solidFill>
-                  <a:srgbClr val="5F6670"/>
+                  <a:srgbClr val="242C39"/>
                 </a:solidFill>
                 <a:latin typeface="Calibri"/>
                 <a:ea typeface="Calibri"/>
@@ -11395,7 +11395,7 @@
             <a:r>
               <a:rPr lang="en-US" sz="2800" b="1" dirty="0">
                 <a:solidFill>
-                  <a:srgbClr val="1A1A1A"/>
+                  <a:srgbClr val="242C39"/>
                 </a:solidFill>
                 <a:latin typeface="Calibri" pitchFamily="34" charset="0"/>
                 <a:ea typeface="Calibri" pitchFamily="34" charset="-122"/>
@@ -11434,7 +11434,7 @@
             <a:r>
               <a:rPr lang="en-US" sz="800" dirty="0">
                 <a:solidFill>
-                  <a:srgbClr val="5F6670"/>
+                  <a:srgbClr val="242C39"/>
                 </a:solidFill>
                 <a:latin typeface="Calibri" pitchFamily="34" charset="0"/>
                 <a:ea typeface="Calibri" pitchFamily="34" charset="-122"/>
@@ -11548,7 +11548,7 @@
             <a:r>
               <a:rPr lang="en-US" sz="1050" dirty="0">
                 <a:solidFill>
-                  <a:srgbClr val="5F6670"/>
+                  <a:srgbClr val="242C39"/>
                 </a:solidFill>
                 <a:latin typeface="Calibri" pitchFamily="34" charset="0"/>
                 <a:ea typeface="Calibri" pitchFamily="34" charset="-122"/>
@@ -11569,7 +11569,7 @@
             <a:r>
               <a:rPr lang="en-US" sz="1050" dirty="0">
                 <a:solidFill>
-                  <a:srgbClr val="5F6670"/>
+                  <a:srgbClr val="242C39"/>
                 </a:solidFill>
                 <a:latin typeface="Calibri" pitchFamily="34" charset="0"/>
                 <a:ea typeface="Calibri" pitchFamily="34" charset="-122"/>
@@ -11590,7 +11590,7 @@
             <a:r>
               <a:rPr lang="en-US" sz="1050" dirty="0">
                 <a:solidFill>
-                  <a:srgbClr val="5F6670"/>
+                  <a:srgbClr val="242C39"/>
                 </a:solidFill>
                 <a:latin typeface="Calibri" pitchFamily="34" charset="0"/>
                 <a:ea typeface="Calibri" pitchFamily="34" charset="-122"/>
@@ -11611,7 +11611,7 @@
             <a:r>
               <a:rPr lang="en-US" sz="1050" dirty="0">
                 <a:solidFill>
-                  <a:srgbClr val="5F6670"/>
+                  <a:srgbClr val="242C39"/>
                 </a:solidFill>
                 <a:latin typeface="Calibri" pitchFamily="34" charset="0"/>
                 <a:ea typeface="Calibri" pitchFamily="34" charset="-122"/>
@@ -11632,7 +11632,7 @@
             <a:r>
               <a:rPr lang="en-US" sz="1050" dirty="0">
                 <a:solidFill>
-                  <a:srgbClr val="5F6670"/>
+                  <a:srgbClr val="242C39"/>
                 </a:solidFill>
                 <a:latin typeface="Calibri" pitchFamily="34" charset="0"/>
                 <a:ea typeface="Calibri" pitchFamily="34" charset="-122"/>
@@ -11674,7 +11674,7 @@
             <a:lvl1pPr>
               <a:defRPr sz="900">
                 <a:solidFill>
-                  <a:srgbClr val="5F6670"/>
+                  <a:srgbClr val="242C39"/>
                 </a:solidFill>
                 <a:latin typeface="Calibri"/>
                 <a:ea typeface="Calibri"/>
@@ -11815,7 +11815,7 @@
             <a:r>
               <a:rPr lang="en-US" sz="2800" b="1" dirty="0">
                 <a:solidFill>
-                  <a:srgbClr val="1A1A1A"/>
+                  <a:srgbClr val="242C39"/>
                 </a:solidFill>
                 <a:latin typeface="Calibri" pitchFamily="34" charset="0"/>
                 <a:ea typeface="Calibri" pitchFamily="34" charset="-122"/>
@@ -11925,7 +11925,7 @@
             <a:r>
               <a:rPr lang="en-US" sz="900" dirty="0">
                 <a:solidFill>
-                  <a:srgbClr val="5F6670"/>
+                  <a:srgbClr val="242C39"/>
                 </a:solidFill>
                 <a:latin typeface="Calibri" pitchFamily="34" charset="0"/>
                 <a:ea typeface="Calibri" pitchFamily="34" charset="-122"/>
@@ -11996,7 +11996,7 @@
             <a:r>
               <a:rPr lang="en-US" sz="2200" b="1" dirty="0">
                 <a:solidFill>
-                  <a:srgbClr val="1A1A1A"/>
+                  <a:srgbClr val="242C39"/>
                 </a:solidFill>
                 <a:latin typeface="Calibri" pitchFamily="34" charset="0"/>
                 <a:ea typeface="Calibri" pitchFamily="34" charset="-122"/>
@@ -12035,7 +12035,7 @@
             <a:r>
               <a:rPr lang="en-US" sz="900" dirty="0">
                 <a:solidFill>
-                  <a:srgbClr val="5F6670"/>
+                  <a:srgbClr val="242C39"/>
                 </a:solidFill>
                 <a:latin typeface="Calibri" pitchFamily="34" charset="0"/>
                 <a:ea typeface="Calibri" pitchFamily="34" charset="-122"/>
@@ -12145,7 +12145,7 @@
             <a:r>
               <a:rPr lang="en-US" sz="900" dirty="0">
                 <a:solidFill>
-                  <a:srgbClr val="5F6670"/>
+                  <a:srgbClr val="242C39"/>
                 </a:solidFill>
                 <a:latin typeface="Calibri" pitchFamily="34" charset="0"/>
                 <a:ea typeface="Calibri" pitchFamily="34" charset="-122"/>
@@ -12184,7 +12184,7 @@
             <a:r>
               <a:rPr lang="en-US" sz="900" b="1" dirty="0">
                 <a:solidFill>
-                  <a:srgbClr val="5F6670"/>
+                  <a:srgbClr val="242C39"/>
                 </a:solidFill>
                 <a:latin typeface="Calibri" pitchFamily="34" charset="0"/>
                 <a:ea typeface="Calibri" pitchFamily="34" charset="-122"/>
@@ -12223,7 +12223,7 @@
             <a:r>
               <a:rPr lang="en-US" sz="900" b="1" dirty="0">
                 <a:solidFill>
-                  <a:srgbClr val="5F6670"/>
+                  <a:srgbClr val="242C39"/>
                 </a:solidFill>
                 <a:latin typeface="Calibri" pitchFamily="34" charset="0"/>
                 <a:ea typeface="Calibri" pitchFamily="34" charset="-122"/>
@@ -12327,7 +12327,7 @@
                       <a:tailEnd type="none" w="med" len="med"/>
                     </a:lnB>
                     <a:solidFill>
-                      <a:srgbClr val="1A1A1A"/>
+                      <a:srgbClr val="242C39"/>
                     </a:solidFill>
                   </a:tcPr>
                 </a:tc>
@@ -12377,7 +12377,7 @@
                       <a:tailEnd type="none" w="med" len="med"/>
                     </a:lnB>
                     <a:solidFill>
-                      <a:srgbClr val="1A1A1A"/>
+                      <a:srgbClr val="242C39"/>
                     </a:solidFill>
                   </a:tcPr>
                 </a:tc>
@@ -12427,7 +12427,7 @@
                       <a:tailEnd type="none" w="med" len="med"/>
                     </a:lnB>
                     <a:solidFill>
-                      <a:srgbClr val="1A1A1A"/>
+                      <a:srgbClr val="242C39"/>
                     </a:solidFill>
                   </a:tcPr>
                 </a:tc>
@@ -12449,7 +12449,7 @@
                       <a:r>
                         <a:rPr lang="en-US" sz="900" dirty="0">
                           <a:solidFill>
-                            <a:srgbClr val="1A1A1A"/>
+                            <a:srgbClr val="242C39"/>
                           </a:solidFill>
                           <a:latin typeface="Calibri" pitchFamily="34" charset="0"/>
                           <a:ea typeface="Calibri" pitchFamily="34" charset="-122"/>
@@ -12502,7 +12502,7 @@
                       <a:r>
                         <a:rPr lang="en-US" sz="900" dirty="0">
                           <a:solidFill>
-                            <a:srgbClr val="1A1A1A"/>
+                            <a:srgbClr val="242C39"/>
                           </a:solidFill>
                           <a:latin typeface="Calibri" pitchFamily="34" charset="0"/>
                           <a:ea typeface="Calibri" pitchFamily="34" charset="-122"/>
@@ -12555,7 +12555,7 @@
                       <a:r>
                         <a:rPr lang="en-US" sz="900" dirty="0">
                           <a:solidFill>
-                            <a:srgbClr val="1A1A1A"/>
+                            <a:srgbClr val="242C39"/>
                           </a:solidFill>
                           <a:latin typeface="Calibri" pitchFamily="34" charset="0"/>
                           <a:ea typeface="Calibri" pitchFamily="34" charset="-122"/>
@@ -12615,7 +12615,7 @@
                       <a:r>
                         <a:rPr lang="en-US" sz="900" dirty="0">
                           <a:solidFill>
-                            <a:srgbClr val="1A1A1A"/>
+                            <a:srgbClr val="242C39"/>
                           </a:solidFill>
                           <a:latin typeface="Calibri" pitchFamily="34" charset="0"/>
                           <a:ea typeface="Calibri" pitchFamily="34" charset="-122"/>
@@ -12668,7 +12668,7 @@
                       <a:r>
                         <a:rPr lang="en-US" sz="900" dirty="0">
                           <a:solidFill>
-                            <a:srgbClr val="1A1A1A"/>
+                            <a:srgbClr val="242C39"/>
                           </a:solidFill>
                           <a:latin typeface="Calibri" pitchFamily="34" charset="0"/>
                           <a:ea typeface="Calibri" pitchFamily="34" charset="-122"/>
@@ -12721,7 +12721,7 @@
                       <a:r>
                         <a:rPr lang="en-US" sz="900" dirty="0">
                           <a:solidFill>
-                            <a:srgbClr val="1A1A1A"/>
+                            <a:srgbClr val="242C39"/>
                           </a:solidFill>
                           <a:latin typeface="Calibri" pitchFamily="34" charset="0"/>
                           <a:ea typeface="Calibri" pitchFamily="34" charset="-122"/>
@@ -12781,7 +12781,7 @@
                       <a:r>
                         <a:rPr lang="en-US" sz="900" dirty="0">
                           <a:solidFill>
-                            <a:srgbClr val="1A1A1A"/>
+                            <a:srgbClr val="242C39"/>
                           </a:solidFill>
                           <a:latin typeface="Calibri" pitchFamily="34" charset="0"/>
                           <a:ea typeface="Calibri" pitchFamily="34" charset="-122"/>
@@ -12834,7 +12834,7 @@
                       <a:r>
                         <a:rPr lang="en-US" sz="900" dirty="0">
                           <a:solidFill>
-                            <a:srgbClr val="1A1A1A"/>
+                            <a:srgbClr val="242C39"/>
                           </a:solidFill>
                           <a:latin typeface="Calibri" pitchFamily="34" charset="0"/>
                           <a:ea typeface="Calibri" pitchFamily="34" charset="-122"/>
@@ -12887,7 +12887,7 @@
                       <a:r>
                         <a:rPr lang="en-US" sz="900" dirty="0">
                           <a:solidFill>
-                            <a:srgbClr val="1A1A1A"/>
+                            <a:srgbClr val="242C39"/>
                           </a:solidFill>
                           <a:latin typeface="Calibri" pitchFamily="34" charset="0"/>
                           <a:ea typeface="Calibri" pitchFamily="34" charset="-122"/>
@@ -12947,7 +12947,7 @@
                       <a:r>
                         <a:rPr lang="en-US" sz="900" dirty="0">
                           <a:solidFill>
-                            <a:srgbClr val="1A1A1A"/>
+                            <a:srgbClr val="242C39"/>
                           </a:solidFill>
                           <a:latin typeface="Calibri" pitchFamily="34" charset="0"/>
                           <a:ea typeface="Calibri" pitchFamily="34" charset="-122"/>
@@ -13000,7 +13000,7 @@
                       <a:r>
                         <a:rPr lang="en-US" sz="900" dirty="0">
                           <a:solidFill>
-                            <a:srgbClr val="1A1A1A"/>
+                            <a:srgbClr val="242C39"/>
                           </a:solidFill>
                           <a:latin typeface="Calibri" pitchFamily="34" charset="0"/>
                           <a:ea typeface="Calibri" pitchFamily="34" charset="-122"/>
@@ -13053,7 +13053,7 @@
                       <a:r>
                         <a:rPr lang="en-US" sz="900" dirty="0">
                           <a:solidFill>
-                            <a:srgbClr val="1A1A1A"/>
+                            <a:srgbClr val="242C39"/>
                           </a:solidFill>
                           <a:latin typeface="Calibri" pitchFamily="34" charset="0"/>
                           <a:ea typeface="Calibri" pitchFamily="34" charset="-122"/>
@@ -13113,7 +13113,7 @@
                       <a:r>
                         <a:rPr lang="en-US" sz="900" dirty="0">
                           <a:solidFill>
-                            <a:srgbClr val="1A1A1A"/>
+                            <a:srgbClr val="242C39"/>
                           </a:solidFill>
                           <a:latin typeface="Calibri" pitchFamily="34" charset="0"/>
                           <a:ea typeface="Calibri" pitchFamily="34" charset="-122"/>
@@ -13166,7 +13166,7 @@
                       <a:r>
                         <a:rPr lang="en-US" sz="900" dirty="0">
                           <a:solidFill>
-                            <a:srgbClr val="1A1A1A"/>
+                            <a:srgbClr val="242C39"/>
                           </a:solidFill>
                           <a:latin typeface="Calibri" pitchFamily="34" charset="0"/>
                           <a:ea typeface="Calibri" pitchFamily="34" charset="-122"/>
@@ -13219,7 +13219,7 @@
                       <a:r>
                         <a:rPr lang="en-US" sz="900" dirty="0">
                           <a:solidFill>
-                            <a:srgbClr val="1A1A1A"/>
+                            <a:srgbClr val="242C39"/>
                           </a:solidFill>
                           <a:latin typeface="Calibri" pitchFamily="34" charset="0"/>
                           <a:ea typeface="Calibri" pitchFamily="34" charset="-122"/>
@@ -13279,7 +13279,7 @@
                       <a:r>
                         <a:rPr lang="en-US" sz="900" b="1" dirty="0">
                           <a:solidFill>
-                            <a:srgbClr val="1A1A1A"/>
+                            <a:srgbClr val="242C39"/>
                           </a:solidFill>
                           <a:latin typeface="Calibri" pitchFamily="34" charset="0"/>
                           <a:ea typeface="Calibri" pitchFamily="34" charset="-122"/>
@@ -13335,7 +13335,7 @@
                       <a:r>
                         <a:rPr lang="en-US" sz="900" b="1" dirty="0">
                           <a:solidFill>
-                            <a:srgbClr val="1A1A1A"/>
+                            <a:srgbClr val="242C39"/>
                           </a:solidFill>
                           <a:latin typeface="Calibri" pitchFamily="34" charset="0"/>
                           <a:ea typeface="Calibri" pitchFamily="34" charset="-122"/>
@@ -13391,7 +13391,7 @@
                       <a:r>
                         <a:rPr lang="en-US" sz="900" b="1" dirty="0">
                           <a:solidFill>
-                            <a:srgbClr val="1A1A1A"/>
+                            <a:srgbClr val="242C39"/>
                           </a:solidFill>
                           <a:latin typeface="Calibri" pitchFamily="34" charset="0"/>
                           <a:ea typeface="Calibri" pitchFamily="34" charset="-122"/>
@@ -13473,7 +13473,7 @@
             <a:r>
               <a:rPr lang="en-US" sz="800" dirty="0">
                 <a:solidFill>
-                  <a:srgbClr val="5F6670"/>
+                  <a:srgbClr val="242C39"/>
                 </a:solidFill>
                 <a:latin typeface="Calibri" pitchFamily="34" charset="0"/>
                 <a:ea typeface="Calibri" pitchFamily="34" charset="-122"/>
@@ -13587,7 +13587,7 @@
             <a:r>
               <a:rPr lang="en-US" sz="1050" dirty="0">
                 <a:solidFill>
-                  <a:srgbClr val="5F6670"/>
+                  <a:srgbClr val="242C39"/>
                 </a:solidFill>
                 <a:latin typeface="Calibri" pitchFamily="34" charset="0"/>
                 <a:ea typeface="Calibri" pitchFamily="34" charset="-122"/>
@@ -13608,7 +13608,7 @@
             <a:r>
               <a:rPr lang="en-US" sz="1050" dirty="0">
                 <a:solidFill>
-                  <a:srgbClr val="5F6670"/>
+                  <a:srgbClr val="242C39"/>
                 </a:solidFill>
                 <a:latin typeface="Calibri" pitchFamily="34" charset="0"/>
                 <a:ea typeface="Calibri" pitchFamily="34" charset="-122"/>
@@ -13629,7 +13629,7 @@
             <a:r>
               <a:rPr lang="en-US" sz="1050" dirty="0">
                 <a:solidFill>
-                  <a:srgbClr val="5F6670"/>
+                  <a:srgbClr val="242C39"/>
                 </a:solidFill>
                 <a:latin typeface="Calibri" pitchFamily="34" charset="0"/>
                 <a:ea typeface="Calibri" pitchFamily="34" charset="-122"/>
@@ -13650,7 +13650,7 @@
             <a:r>
               <a:rPr lang="en-US" sz="1050" dirty="0">
                 <a:solidFill>
-                  <a:srgbClr val="5F6670"/>
+                  <a:srgbClr val="242C39"/>
                 </a:solidFill>
                 <a:latin typeface="Calibri" pitchFamily="34" charset="0"/>
                 <a:ea typeface="Calibri" pitchFamily="34" charset="-122"/>
@@ -13671,7 +13671,7 @@
             <a:r>
               <a:rPr lang="en-US" sz="1050" dirty="0">
                 <a:solidFill>
-                  <a:srgbClr val="5F6670"/>
+                  <a:srgbClr val="242C39"/>
                 </a:solidFill>
                 <a:latin typeface="Calibri" pitchFamily="34" charset="0"/>
                 <a:ea typeface="Calibri" pitchFamily="34" charset="-122"/>
@@ -13713,7 +13713,7 @@
             <a:lvl1pPr>
               <a:defRPr sz="900">
                 <a:solidFill>
-                  <a:srgbClr val="5F6670"/>
+                  <a:srgbClr val="242C39"/>
                 </a:solidFill>
                 <a:latin typeface="Calibri"/>
                 <a:ea typeface="Calibri"/>
@@ -13854,7 +13854,7 @@
             <a:r>
               <a:rPr lang="en-US" sz="2800" b="1" dirty="0">
                 <a:solidFill>
-                  <a:srgbClr val="1A1A1A"/>
+                  <a:srgbClr val="242C39"/>
                 </a:solidFill>
                 <a:latin typeface="Calibri" pitchFamily="34" charset="0"/>
                 <a:ea typeface="Calibri" pitchFamily="34" charset="-122"/>
@@ -13893,7 +13893,7 @@
             <a:r>
               <a:rPr lang="en-US" sz="800" dirty="0">
                 <a:solidFill>
-                  <a:srgbClr val="5F6670"/>
+                  <a:srgbClr val="242C39"/>
                 </a:solidFill>
                 <a:latin typeface="Calibri" pitchFamily="34" charset="0"/>
                 <a:ea typeface="Calibri" pitchFamily="34" charset="-122"/>
@@ -14007,7 +14007,7 @@
             <a:r>
               <a:rPr lang="en-US" sz="1050" dirty="0">
                 <a:solidFill>
-                  <a:srgbClr val="5F6670"/>
+                  <a:srgbClr val="242C39"/>
                 </a:solidFill>
                 <a:latin typeface="Calibri" pitchFamily="34" charset="0"/>
                 <a:ea typeface="Calibri" pitchFamily="34" charset="-122"/>
@@ -14028,7 +14028,7 @@
             <a:r>
               <a:rPr lang="en-US" sz="1050" dirty="0">
                 <a:solidFill>
-                  <a:srgbClr val="5F6670"/>
+                  <a:srgbClr val="242C39"/>
                 </a:solidFill>
                 <a:latin typeface="Calibri" pitchFamily="34" charset="0"/>
                 <a:ea typeface="Calibri" pitchFamily="34" charset="-122"/>
@@ -14049,7 +14049,7 @@
             <a:r>
               <a:rPr lang="en-US" sz="1050" dirty="0">
                 <a:solidFill>
-                  <a:srgbClr val="5F6670"/>
+                  <a:srgbClr val="242C39"/>
                 </a:solidFill>
                 <a:latin typeface="Calibri" pitchFamily="34" charset="0"/>
                 <a:ea typeface="Calibri" pitchFamily="34" charset="-122"/>
@@ -14070,7 +14070,7 @@
             <a:r>
               <a:rPr lang="en-US" sz="1050" dirty="0">
                 <a:solidFill>
-                  <a:srgbClr val="5F6670"/>
+                  <a:srgbClr val="242C39"/>
                 </a:solidFill>
                 <a:latin typeface="Calibri" pitchFamily="34" charset="0"/>
                 <a:ea typeface="Calibri" pitchFamily="34" charset="-122"/>
@@ -14091,7 +14091,7 @@
             <a:r>
               <a:rPr lang="en-US" sz="1050" dirty="0">
                 <a:solidFill>
-                  <a:srgbClr val="5F6670"/>
+                  <a:srgbClr val="242C39"/>
                 </a:solidFill>
                 <a:latin typeface="Calibri" pitchFamily="34" charset="0"/>
                 <a:ea typeface="Calibri" pitchFamily="34" charset="-122"/>
@@ -14133,7 +14133,7 @@
             <a:lvl1pPr>
               <a:defRPr sz="900">
                 <a:solidFill>
-                  <a:srgbClr val="5F6670"/>
+                  <a:srgbClr val="242C39"/>
                 </a:solidFill>
                 <a:latin typeface="Calibri"/>
                 <a:ea typeface="Calibri"/>
@@ -14231,7 +14231,7 @@
             <a:r>
               <a:rPr lang="en-US" sz="4800" b="1" dirty="0">
                 <a:solidFill>
-                  <a:srgbClr val="1A1A1A"/>
+                  <a:srgbClr val="242C39"/>
                 </a:solidFill>
                 <a:latin typeface="Calibri" pitchFamily="34" charset="0"/>
                 <a:ea typeface="Calibri" pitchFamily="34" charset="-122"/>
@@ -14476,7 +14476,7 @@
             <a:r>
               <a:rPr lang="en-US" sz="2800" b="1" dirty="0">
                 <a:solidFill>
-                  <a:srgbClr val="1A1A1A"/>
+                  <a:srgbClr val="242C39"/>
                 </a:solidFill>
                 <a:latin typeface="Calibri" pitchFamily="34" charset="0"/>
                 <a:ea typeface="Calibri" pitchFamily="34" charset="-122"/>
@@ -14615,7 +14615,7 @@
                       <a:tailEnd type="none" w="med" len="med"/>
                     </a:lnB>
                     <a:solidFill>
-                      <a:srgbClr val="1A1A1A"/>
+                      <a:srgbClr val="242C39"/>
                     </a:solidFill>
                   </a:tcPr>
                 </a:tc>
@@ -14665,7 +14665,7 @@
                       <a:tailEnd type="none" w="med" len="med"/>
                     </a:lnB>
                     <a:solidFill>
-                      <a:srgbClr val="1A1A1A"/>
+                      <a:srgbClr val="242C39"/>
                     </a:solidFill>
                   </a:tcPr>
                 </a:tc>
@@ -14715,7 +14715,7 @@
                       <a:tailEnd type="none" w="med" len="med"/>
                     </a:lnB>
                     <a:solidFill>
-                      <a:srgbClr val="1A1A1A"/>
+                      <a:srgbClr val="242C39"/>
                     </a:solidFill>
                   </a:tcPr>
                 </a:tc>
@@ -14765,7 +14765,7 @@
                       <a:tailEnd type="none" w="med" len="med"/>
                     </a:lnB>
                     <a:solidFill>
-                      <a:srgbClr val="1A1A1A"/>
+                      <a:srgbClr val="242C39"/>
                     </a:solidFill>
                   </a:tcPr>
                 </a:tc>
@@ -14815,7 +14815,7 @@
                       <a:tailEnd type="none" w="med" len="med"/>
                     </a:lnB>
                     <a:solidFill>
-                      <a:srgbClr val="1A1A1A"/>
+                      <a:srgbClr val="242C39"/>
                     </a:solidFill>
                   </a:tcPr>
                 </a:tc>
@@ -14865,7 +14865,7 @@
                       <a:tailEnd type="none" w="med" len="med"/>
                     </a:lnB>
                     <a:solidFill>
-                      <a:srgbClr val="1A1A1A"/>
+                      <a:srgbClr val="242C39"/>
                     </a:solidFill>
                   </a:tcPr>
                 </a:tc>
@@ -14915,7 +14915,7 @@
                       <a:tailEnd type="none" w="med" len="med"/>
                     </a:lnB>
                     <a:solidFill>
-                      <a:srgbClr val="1A1A1A"/>
+                      <a:srgbClr val="242C39"/>
                     </a:solidFill>
                   </a:tcPr>
                 </a:tc>
@@ -14965,7 +14965,7 @@
                       <a:tailEnd type="none" w="med" len="med"/>
                     </a:lnB>
                     <a:solidFill>
-                      <a:srgbClr val="1A1A1A"/>
+                      <a:srgbClr val="242C39"/>
                     </a:solidFill>
                   </a:tcPr>
                 </a:tc>
@@ -14987,7 +14987,7 @@
                       <a:r>
                         <a:rPr lang="en-US" sz="950" dirty="0">
                           <a:solidFill>
-                            <a:srgbClr val="1A1A1A"/>
+                            <a:srgbClr val="242C39"/>
                           </a:solidFill>
                           <a:latin typeface="Calibri" pitchFamily="34" charset="0"/>
                           <a:ea typeface="Calibri" pitchFamily="34" charset="-122"/>
@@ -15040,7 +15040,7 @@
                       <a:r>
                         <a:rPr lang="en-US" sz="950" dirty="0">
                           <a:solidFill>
-                            <a:srgbClr val="1A1A1A"/>
+                            <a:srgbClr val="242C39"/>
                           </a:solidFill>
                           <a:latin typeface="Calibri" pitchFamily="34" charset="0"/>
                           <a:ea typeface="Calibri" pitchFamily="34" charset="-122"/>
@@ -15093,7 +15093,7 @@
                       <a:r>
                         <a:rPr lang="en-US" sz="950" dirty="0">
                           <a:solidFill>
-                            <a:srgbClr val="1A1A1A"/>
+                            <a:srgbClr val="242C39"/>
                           </a:solidFill>
                           <a:latin typeface="Calibri" pitchFamily="34" charset="0"/>
                           <a:ea typeface="Calibri" pitchFamily="34" charset="-122"/>
@@ -15146,7 +15146,7 @@
                       <a:r>
                         <a:rPr lang="en-US" sz="950" dirty="0">
                           <a:solidFill>
-                            <a:srgbClr val="1A1A1A"/>
+                            <a:srgbClr val="242C39"/>
                           </a:solidFill>
                           <a:latin typeface="Calibri" pitchFamily="34" charset="0"/>
                           <a:ea typeface="Calibri" pitchFamily="34" charset="-122"/>
@@ -15199,7 +15199,7 @@
                       <a:r>
                         <a:rPr lang="en-US" sz="950" dirty="0">
                           <a:solidFill>
-                            <a:srgbClr val="1A1A1A"/>
+                            <a:srgbClr val="242C39"/>
                           </a:solidFill>
                           <a:latin typeface="Calibri" pitchFamily="34" charset="0"/>
                           <a:ea typeface="Calibri" pitchFamily="34" charset="-122"/>
@@ -15305,7 +15305,7 @@
                       <a:r>
                         <a:rPr lang="en-US" sz="950" dirty="0">
                           <a:solidFill>
-                            <a:srgbClr val="1A1A1A"/>
+                            <a:srgbClr val="242C39"/>
                           </a:solidFill>
                           <a:latin typeface="Calibri" pitchFamily="34" charset="0"/>
                           <a:ea typeface="Calibri" pitchFamily="34" charset="-122"/>
@@ -15418,7 +15418,7 @@
                       <a:r>
                         <a:rPr lang="en-US" sz="950" dirty="0">
                           <a:solidFill>
-                            <a:srgbClr val="1A1A1A"/>
+                            <a:srgbClr val="242C39"/>
                           </a:solidFill>
                           <a:latin typeface="Calibri" pitchFamily="34" charset="0"/>
                           <a:ea typeface="Calibri" pitchFamily="34" charset="-122"/>
@@ -15471,7 +15471,7 @@
                       <a:r>
                         <a:rPr lang="en-US" sz="950" dirty="0">
                           <a:solidFill>
-                            <a:srgbClr val="1A1A1A"/>
+                            <a:srgbClr val="242C39"/>
                           </a:solidFill>
                           <a:latin typeface="Calibri" pitchFamily="34" charset="0"/>
                           <a:ea typeface="Calibri" pitchFamily="34" charset="-122"/>
@@ -15524,7 +15524,7 @@
                       <a:r>
                         <a:rPr lang="en-US" sz="950" dirty="0">
                           <a:solidFill>
-                            <a:srgbClr val="1A1A1A"/>
+                            <a:srgbClr val="242C39"/>
                           </a:solidFill>
                           <a:latin typeface="Calibri" pitchFamily="34" charset="0"/>
                           <a:ea typeface="Calibri" pitchFamily="34" charset="-122"/>
@@ -15577,7 +15577,7 @@
                       <a:r>
                         <a:rPr lang="en-US" sz="950" dirty="0">
                           <a:solidFill>
-                            <a:srgbClr val="1A1A1A"/>
+                            <a:srgbClr val="242C39"/>
                           </a:solidFill>
                           <a:latin typeface="Calibri" pitchFamily="34" charset="0"/>
                           <a:ea typeface="Calibri" pitchFamily="34" charset="-122"/>
@@ -15630,7 +15630,7 @@
                       <a:r>
                         <a:rPr lang="en-US" sz="950" dirty="0">
                           <a:solidFill>
-                            <a:srgbClr val="1A1A1A"/>
+                            <a:srgbClr val="242C39"/>
                           </a:solidFill>
                           <a:latin typeface="Calibri" pitchFamily="34" charset="0"/>
                           <a:ea typeface="Calibri" pitchFamily="34" charset="-122"/>
@@ -15736,7 +15736,7 @@
                       <a:r>
                         <a:rPr lang="en-US" sz="950" dirty="0">
                           <a:solidFill>
-                            <a:srgbClr val="1A1A1A"/>
+                            <a:srgbClr val="242C39"/>
                           </a:solidFill>
                           <a:latin typeface="Calibri" pitchFamily="34" charset="0"/>
                           <a:ea typeface="Calibri" pitchFamily="34" charset="-122"/>
@@ -15849,7 +15849,7 @@
                       <a:r>
                         <a:rPr lang="en-US" sz="950" dirty="0">
                           <a:solidFill>
-                            <a:srgbClr val="1A1A1A"/>
+                            <a:srgbClr val="242C39"/>
                           </a:solidFill>
                           <a:latin typeface="Calibri" pitchFamily="34" charset="0"/>
                           <a:ea typeface="Calibri" pitchFamily="34" charset="-122"/>
@@ -15902,7 +15902,7 @@
                       <a:r>
                         <a:rPr lang="en-US" sz="950" dirty="0">
                           <a:solidFill>
-                            <a:srgbClr val="1A1A1A"/>
+                            <a:srgbClr val="242C39"/>
                           </a:solidFill>
                           <a:latin typeface="Calibri" pitchFamily="34" charset="0"/>
                           <a:ea typeface="Calibri" pitchFamily="34" charset="-122"/>
@@ -15955,7 +15955,7 @@
                       <a:r>
                         <a:rPr lang="en-US" sz="950" dirty="0">
                           <a:solidFill>
-                            <a:srgbClr val="1A1A1A"/>
+                            <a:srgbClr val="242C39"/>
                           </a:solidFill>
                           <a:latin typeface="Calibri" pitchFamily="34" charset="0"/>
                           <a:ea typeface="Calibri" pitchFamily="34" charset="-122"/>
@@ -16008,7 +16008,7 @@
                       <a:r>
                         <a:rPr lang="en-US" sz="950" dirty="0">
                           <a:solidFill>
-                            <a:srgbClr val="1A1A1A"/>
+                            <a:srgbClr val="242C39"/>
                           </a:solidFill>
                           <a:latin typeface="Calibri" pitchFamily="34" charset="0"/>
                           <a:ea typeface="Calibri" pitchFamily="34" charset="-122"/>
@@ -16061,7 +16061,7 @@
                       <a:r>
                         <a:rPr lang="en-US" sz="950" dirty="0">
                           <a:solidFill>
-                            <a:srgbClr val="1A1A1A"/>
+                            <a:srgbClr val="242C39"/>
                           </a:solidFill>
                           <a:latin typeface="Calibri" pitchFamily="34" charset="0"/>
                           <a:ea typeface="Calibri" pitchFamily="34" charset="-122"/>
@@ -16167,7 +16167,7 @@
                       <a:r>
                         <a:rPr lang="en-US" sz="950" dirty="0">
                           <a:solidFill>
-                            <a:srgbClr val="1A1A1A"/>
+                            <a:srgbClr val="242C39"/>
                           </a:solidFill>
                           <a:latin typeface="Calibri" pitchFamily="34" charset="0"/>
                           <a:ea typeface="Calibri" pitchFamily="34" charset="-122"/>
@@ -16280,7 +16280,7 @@
                       <a:r>
                         <a:rPr lang="en-US" sz="950" dirty="0">
                           <a:solidFill>
-                            <a:srgbClr val="1A1A1A"/>
+                            <a:srgbClr val="242C39"/>
                           </a:solidFill>
                           <a:latin typeface="Calibri" pitchFamily="34" charset="0"/>
                           <a:ea typeface="Calibri" pitchFamily="34" charset="-122"/>
@@ -16333,7 +16333,7 @@
                       <a:r>
                         <a:rPr lang="en-US" sz="950" dirty="0">
                           <a:solidFill>
-                            <a:srgbClr val="1A1A1A"/>
+                            <a:srgbClr val="242C39"/>
                           </a:solidFill>
                           <a:latin typeface="Calibri" pitchFamily="34" charset="0"/>
                           <a:ea typeface="Calibri" pitchFamily="34" charset="-122"/>
@@ -16386,7 +16386,7 @@
                       <a:r>
                         <a:rPr lang="en-US" sz="950" dirty="0">
                           <a:solidFill>
-                            <a:srgbClr val="1A1A1A"/>
+                            <a:srgbClr val="242C39"/>
                           </a:solidFill>
                           <a:latin typeface="Calibri" pitchFamily="34" charset="0"/>
                           <a:ea typeface="Calibri" pitchFamily="34" charset="-122"/>
@@ -16439,7 +16439,7 @@
                       <a:r>
                         <a:rPr lang="en-US" sz="950" dirty="0">
                           <a:solidFill>
-                            <a:srgbClr val="1A1A1A"/>
+                            <a:srgbClr val="242C39"/>
                           </a:solidFill>
                           <a:latin typeface="Calibri" pitchFamily="34" charset="0"/>
                           <a:ea typeface="Calibri" pitchFamily="34" charset="-122"/>
@@ -16492,7 +16492,7 @@
                       <a:r>
                         <a:rPr lang="en-US" sz="950" dirty="0">
                           <a:solidFill>
-                            <a:srgbClr val="1A1A1A"/>
+                            <a:srgbClr val="242C39"/>
                           </a:solidFill>
                           <a:latin typeface="Calibri" pitchFamily="34" charset="0"/>
                           <a:ea typeface="Calibri" pitchFamily="34" charset="-122"/>
@@ -16598,7 +16598,7 @@
                       <a:r>
                         <a:rPr lang="en-US" sz="950" dirty="0">
                           <a:solidFill>
-                            <a:srgbClr val="1A1A1A"/>
+                            <a:srgbClr val="242C39"/>
                           </a:solidFill>
                           <a:latin typeface="Calibri" pitchFamily="34" charset="0"/>
                           <a:ea typeface="Calibri" pitchFamily="34" charset="-122"/>
@@ -16711,7 +16711,7 @@
                       <a:r>
                         <a:rPr lang="en-US" sz="950" dirty="0">
                           <a:solidFill>
-                            <a:srgbClr val="1A1A1A"/>
+                            <a:srgbClr val="242C39"/>
                           </a:solidFill>
                           <a:latin typeface="Calibri" pitchFamily="34" charset="0"/>
                           <a:ea typeface="Calibri" pitchFamily="34" charset="-122"/>
@@ -16764,7 +16764,7 @@
                       <a:r>
                         <a:rPr lang="en-US" sz="950" dirty="0">
                           <a:solidFill>
-                            <a:srgbClr val="1A1A1A"/>
+                            <a:srgbClr val="242C39"/>
                           </a:solidFill>
                           <a:latin typeface="Calibri" pitchFamily="34" charset="0"/>
                           <a:ea typeface="Calibri" pitchFamily="34" charset="-122"/>
@@ -16817,7 +16817,7 @@
                       <a:r>
                         <a:rPr lang="en-US" sz="950" dirty="0">
                           <a:solidFill>
-                            <a:srgbClr val="1A1A1A"/>
+                            <a:srgbClr val="242C39"/>
                           </a:solidFill>
                           <a:latin typeface="Calibri" pitchFamily="34" charset="0"/>
                           <a:ea typeface="Calibri" pitchFamily="34" charset="-122"/>
@@ -16870,7 +16870,7 @@
                       <a:r>
                         <a:rPr lang="en-US" sz="950" dirty="0">
                           <a:solidFill>
-                            <a:srgbClr val="1A1A1A"/>
+                            <a:srgbClr val="242C39"/>
                           </a:solidFill>
                           <a:latin typeface="Calibri" pitchFamily="34" charset="0"/>
                           <a:ea typeface="Calibri" pitchFamily="34" charset="-122"/>
@@ -16923,7 +16923,7 @@
                       <a:r>
                         <a:rPr lang="en-US" sz="950" dirty="0">
                           <a:solidFill>
-                            <a:srgbClr val="1A1A1A"/>
+                            <a:srgbClr val="242C39"/>
                           </a:solidFill>
                           <a:latin typeface="Calibri" pitchFamily="34" charset="0"/>
                           <a:ea typeface="Calibri" pitchFamily="34" charset="-122"/>
@@ -17029,7 +17029,7 @@
                       <a:r>
                         <a:rPr lang="en-US" sz="950" dirty="0">
                           <a:solidFill>
-                            <a:srgbClr val="1A1A1A"/>
+                            <a:srgbClr val="242C39"/>
                           </a:solidFill>
                           <a:latin typeface="Calibri" pitchFamily="34" charset="0"/>
                           <a:ea typeface="Calibri" pitchFamily="34" charset="-122"/>
@@ -17142,7 +17142,7 @@
                       <a:r>
                         <a:rPr lang="en-US" sz="950" b="1" dirty="0">
                           <a:solidFill>
-                            <a:srgbClr val="1A1A1A"/>
+                            <a:srgbClr val="242C39"/>
                           </a:solidFill>
                           <a:latin typeface="Calibri" pitchFamily="34" charset="0"/>
                           <a:ea typeface="Calibri" pitchFamily="34" charset="-122"/>
@@ -17198,7 +17198,7 @@
                       <a:r>
                         <a:rPr lang="en-US" sz="950" b="1" dirty="0">
                           <a:solidFill>
-                            <a:srgbClr val="1A1A1A"/>
+                            <a:srgbClr val="242C39"/>
                           </a:solidFill>
                           <a:latin typeface="Calibri" pitchFamily="34" charset="0"/>
                           <a:ea typeface="Calibri" pitchFamily="34" charset="-122"/>
@@ -17254,7 +17254,7 @@
                       <a:r>
                         <a:rPr lang="en-US" sz="950" b="1" dirty="0">
                           <a:solidFill>
-                            <a:srgbClr val="1A1A1A"/>
+                            <a:srgbClr val="242C39"/>
                           </a:solidFill>
                           <a:latin typeface="Calibri" pitchFamily="34" charset="0"/>
                           <a:ea typeface="Calibri" pitchFamily="34" charset="-122"/>
@@ -17310,7 +17310,7 @@
                       <a:r>
                         <a:rPr lang="en-US" sz="950" b="1" dirty="0">
                           <a:solidFill>
-                            <a:srgbClr val="1A1A1A"/>
+                            <a:srgbClr val="242C39"/>
                           </a:solidFill>
                           <a:latin typeface="Calibri" pitchFamily="34" charset="0"/>
                           <a:ea typeface="Calibri" pitchFamily="34" charset="-122"/>
@@ -17366,7 +17366,7 @@
                       <a:r>
                         <a:rPr lang="en-US" sz="950" b="1" dirty="0">
                           <a:solidFill>
-                            <a:srgbClr val="1A1A1A"/>
+                            <a:srgbClr val="242C39"/>
                           </a:solidFill>
                           <a:latin typeface="Calibri" pitchFamily="34" charset="0"/>
                           <a:ea typeface="Calibri" pitchFamily="34" charset="-122"/>
@@ -17680,7 +17680,7 @@
             <a:r>
               <a:rPr lang="en-US" sz="1050" dirty="0">
                 <a:solidFill>
-                  <a:srgbClr val="5F6670"/>
+                  <a:srgbClr val="242C39"/>
                 </a:solidFill>
                 <a:latin typeface="Calibri" pitchFamily="34" charset="0"/>
                 <a:ea typeface="Calibri" pitchFamily="34" charset="-122"/>
@@ -17701,7 +17701,7 @@
             <a:r>
               <a:rPr lang="en-US" sz="1050" dirty="0">
                 <a:solidFill>
-                  <a:srgbClr val="5F6670"/>
+                  <a:srgbClr val="242C39"/>
                 </a:solidFill>
                 <a:latin typeface="Calibri" pitchFamily="34" charset="0"/>
                 <a:ea typeface="Calibri" pitchFamily="34" charset="-122"/>
@@ -17722,7 +17722,7 @@
             <a:r>
               <a:rPr lang="en-US" sz="1050" dirty="0">
                 <a:solidFill>
-                  <a:srgbClr val="5F6670"/>
+                  <a:srgbClr val="242C39"/>
                 </a:solidFill>
                 <a:latin typeface="Calibri" pitchFamily="34" charset="0"/>
                 <a:ea typeface="Calibri" pitchFamily="34" charset="-122"/>
@@ -17743,7 +17743,7 @@
             <a:r>
               <a:rPr lang="en-US" sz="1050" dirty="0">
                 <a:solidFill>
-                  <a:srgbClr val="5F6670"/>
+                  <a:srgbClr val="242C39"/>
                 </a:solidFill>
                 <a:latin typeface="Calibri" pitchFamily="34" charset="0"/>
                 <a:ea typeface="Calibri" pitchFamily="34" charset="-122"/>
@@ -17764,7 +17764,7 @@
             <a:r>
               <a:rPr lang="en-US" sz="1050" dirty="0">
                 <a:solidFill>
-                  <a:srgbClr val="5F6670"/>
+                  <a:srgbClr val="242C39"/>
                 </a:solidFill>
                 <a:latin typeface="Calibri" pitchFamily="34" charset="0"/>
                 <a:ea typeface="Calibri" pitchFamily="34" charset="-122"/>
@@ -17806,7 +17806,7 @@
             <a:lvl1pPr>
               <a:defRPr sz="900">
                 <a:solidFill>
-                  <a:srgbClr val="5F6670"/>
+                  <a:srgbClr val="242C39"/>
                 </a:solidFill>
                 <a:latin typeface="Calibri"/>
                 <a:ea typeface="Calibri"/>
@@ -17947,7 +17947,7 @@
             <a:r>
               <a:rPr lang="en-US" sz="2800" b="1" dirty="0">
                 <a:solidFill>
-                  <a:srgbClr val="1A1A1A"/>
+                  <a:srgbClr val="242C39"/>
                 </a:solidFill>
                 <a:latin typeface="Calibri" pitchFamily="34" charset="0"/>
                 <a:ea typeface="Calibri" pitchFamily="34" charset="-122"/>
@@ -18093,7 +18093,7 @@
                       <a:tailEnd type="none" w="med" len="med"/>
                     </a:lnB>
                     <a:solidFill>
-                      <a:srgbClr val="1A1A1A"/>
+                      <a:srgbClr val="242C39"/>
                     </a:solidFill>
                   </a:tcPr>
                 </a:tc>
@@ -18143,7 +18143,7 @@
                       <a:tailEnd type="none" w="med" len="med"/>
                     </a:lnB>
                     <a:solidFill>
-                      <a:srgbClr val="1A1A1A"/>
+                      <a:srgbClr val="242C39"/>
                     </a:solidFill>
                   </a:tcPr>
                 </a:tc>
@@ -18193,7 +18193,7 @@
                       <a:tailEnd type="none" w="med" len="med"/>
                     </a:lnB>
                     <a:solidFill>
-                      <a:srgbClr val="1A1A1A"/>
+                      <a:srgbClr val="242C39"/>
                     </a:solidFill>
                   </a:tcPr>
                 </a:tc>
@@ -18243,7 +18243,7 @@
                       <a:tailEnd type="none" w="med" len="med"/>
                     </a:lnB>
                     <a:solidFill>
-                      <a:srgbClr val="1A1A1A"/>
+                      <a:srgbClr val="242C39"/>
                     </a:solidFill>
                   </a:tcPr>
                 </a:tc>
@@ -18293,7 +18293,7 @@
                       <a:tailEnd type="none" w="med" len="med"/>
                     </a:lnB>
                     <a:solidFill>
-                      <a:srgbClr val="1A1A1A"/>
+                      <a:srgbClr val="242C39"/>
                     </a:solidFill>
                   </a:tcPr>
                 </a:tc>
@@ -18343,7 +18343,7 @@
                       <a:tailEnd type="none" w="med" len="med"/>
                     </a:lnB>
                     <a:solidFill>
-                      <a:srgbClr val="1A1A1A"/>
+                      <a:srgbClr val="242C39"/>
                     </a:solidFill>
                   </a:tcPr>
                 </a:tc>
@@ -18393,7 +18393,7 @@
                       <a:tailEnd type="none" w="med" len="med"/>
                     </a:lnB>
                     <a:solidFill>
-                      <a:srgbClr val="1A1A1A"/>
+                      <a:srgbClr val="242C39"/>
                     </a:solidFill>
                   </a:tcPr>
                 </a:tc>
@@ -18443,7 +18443,7 @@
                       <a:tailEnd type="none" w="med" len="med"/>
                     </a:lnB>
                     <a:solidFill>
-                      <a:srgbClr val="1A1A1A"/>
+                      <a:srgbClr val="242C39"/>
                     </a:solidFill>
                   </a:tcPr>
                 </a:tc>
@@ -18493,7 +18493,7 @@
                       <a:tailEnd type="none" w="med" len="med"/>
                     </a:lnB>
                     <a:solidFill>
-                      <a:srgbClr val="1A1A1A"/>
+                      <a:srgbClr val="242C39"/>
                     </a:solidFill>
                   </a:tcPr>
                 </a:tc>
@@ -18515,7 +18515,7 @@
                       <a:r>
                         <a:rPr lang="en-US" sz="900" dirty="0">
                           <a:solidFill>
-                            <a:srgbClr val="1A1A1A"/>
+                            <a:srgbClr val="242C39"/>
                           </a:solidFill>
                           <a:latin typeface="Calibri" pitchFamily="34" charset="0"/>
                           <a:ea typeface="Calibri" pitchFamily="34" charset="-122"/>
@@ -18568,7 +18568,7 @@
                       <a:r>
                         <a:rPr lang="en-US" sz="900" dirty="0">
                           <a:solidFill>
-                            <a:srgbClr val="1A1A1A"/>
+                            <a:srgbClr val="242C39"/>
                           </a:solidFill>
                           <a:latin typeface="Calibri" pitchFamily="34" charset="0"/>
                           <a:ea typeface="Calibri" pitchFamily="34" charset="-122"/>
@@ -18621,7 +18621,7 @@
                       <a:r>
                         <a:rPr lang="en-US" sz="900" dirty="0">
                           <a:solidFill>
-                            <a:srgbClr val="1A1A1A"/>
+                            <a:srgbClr val="242C39"/>
                           </a:solidFill>
                           <a:latin typeface="Calibri" pitchFamily="34" charset="0"/>
                           <a:ea typeface="Calibri" pitchFamily="34" charset="-122"/>
@@ -18674,7 +18674,7 @@
                       <a:r>
                         <a:rPr lang="en-US" sz="900" dirty="0">
                           <a:solidFill>
-                            <a:srgbClr val="1A1A1A"/>
+                            <a:srgbClr val="242C39"/>
                           </a:solidFill>
                           <a:latin typeface="Calibri" pitchFamily="34" charset="0"/>
                           <a:ea typeface="Calibri" pitchFamily="34" charset="-122"/>
@@ -18727,7 +18727,7 @@
                       <a:r>
                         <a:rPr lang="en-US" sz="900" dirty="0">
                           <a:solidFill>
-                            <a:srgbClr val="1A1A1A"/>
+                            <a:srgbClr val="242C39"/>
                           </a:solidFill>
                           <a:latin typeface="Calibri" pitchFamily="34" charset="0"/>
                           <a:ea typeface="Calibri" pitchFamily="34" charset="-122"/>
@@ -18780,7 +18780,7 @@
                       <a:r>
                         <a:rPr lang="en-US" sz="900" dirty="0">
                           <a:solidFill>
-                            <a:srgbClr val="1A1A1A"/>
+                            <a:srgbClr val="242C39"/>
                           </a:solidFill>
                           <a:latin typeface="Calibri" pitchFamily="34" charset="0"/>
                           <a:ea typeface="Calibri" pitchFamily="34" charset="-122"/>
@@ -18833,7 +18833,7 @@
                       <a:r>
                         <a:rPr lang="en-US" sz="900" b="1" dirty="0">
                           <a:solidFill>
-                            <a:srgbClr val="1A1A1A"/>
+                            <a:srgbClr val="242C39"/>
                           </a:solidFill>
                           <a:latin typeface="Calibri" pitchFamily="34" charset="0"/>
                           <a:ea typeface="Calibri" pitchFamily="34" charset="-122"/>
@@ -18886,7 +18886,7 @@
                       <a:r>
                         <a:rPr lang="en-US" sz="900" dirty="0">
                           <a:solidFill>
-                            <a:srgbClr val="1A1A1A"/>
+                            <a:srgbClr val="242C39"/>
                           </a:solidFill>
                           <a:latin typeface="Calibri" pitchFamily="34" charset="0"/>
                           <a:ea typeface="Calibri" pitchFamily="34" charset="-122"/>
@@ -18999,7 +18999,7 @@
                       <a:r>
                         <a:rPr lang="en-US" sz="900" dirty="0">
                           <a:solidFill>
-                            <a:srgbClr val="1A1A1A"/>
+                            <a:srgbClr val="242C39"/>
                           </a:solidFill>
                           <a:latin typeface="Calibri" pitchFamily="34" charset="0"/>
                           <a:ea typeface="Calibri" pitchFamily="34" charset="-122"/>
@@ -19052,7 +19052,7 @@
                       <a:r>
                         <a:rPr lang="en-US" sz="900" dirty="0">
                           <a:solidFill>
-                            <a:srgbClr val="1A1A1A"/>
+                            <a:srgbClr val="242C39"/>
                           </a:solidFill>
                           <a:latin typeface="Calibri" pitchFamily="34" charset="0"/>
                           <a:ea typeface="Calibri" pitchFamily="34" charset="-122"/>
@@ -19105,7 +19105,7 @@
                       <a:r>
                         <a:rPr lang="en-US" sz="900" dirty="0">
                           <a:solidFill>
-                            <a:srgbClr val="1A1A1A"/>
+                            <a:srgbClr val="242C39"/>
                           </a:solidFill>
                           <a:latin typeface="Calibri" pitchFamily="34" charset="0"/>
                           <a:ea typeface="Calibri" pitchFamily="34" charset="-122"/>
@@ -19158,7 +19158,7 @@
                       <a:r>
                         <a:rPr lang="en-US" sz="900" dirty="0">
                           <a:solidFill>
-                            <a:srgbClr val="1A1A1A"/>
+                            <a:srgbClr val="242C39"/>
                           </a:solidFill>
                           <a:latin typeface="Calibri" pitchFamily="34" charset="0"/>
                           <a:ea typeface="Calibri" pitchFamily="34" charset="-122"/>
@@ -19211,7 +19211,7 @@
                       <a:r>
                         <a:rPr lang="en-US" sz="900" dirty="0">
                           <a:solidFill>
-                            <a:srgbClr val="1A1A1A"/>
+                            <a:srgbClr val="242C39"/>
                           </a:solidFill>
                           <a:latin typeface="Calibri" pitchFamily="34" charset="0"/>
                           <a:ea typeface="Calibri" pitchFamily="34" charset="-122"/>
@@ -19264,7 +19264,7 @@
                       <a:r>
                         <a:rPr lang="en-US" sz="900" dirty="0">
                           <a:solidFill>
-                            <a:srgbClr val="1A1A1A"/>
+                            <a:srgbClr val="242C39"/>
                           </a:solidFill>
                           <a:latin typeface="Calibri" pitchFamily="34" charset="0"/>
                           <a:ea typeface="Calibri" pitchFamily="34" charset="-122"/>
@@ -19317,7 +19317,7 @@
                       <a:r>
                         <a:rPr lang="en-US" sz="900" b="1" dirty="0">
                           <a:solidFill>
-                            <a:srgbClr val="1A1A1A"/>
+                            <a:srgbClr val="242C39"/>
                           </a:solidFill>
                           <a:latin typeface="Calibri" pitchFamily="34" charset="0"/>
                           <a:ea typeface="Calibri" pitchFamily="34" charset="-122"/>
@@ -19370,7 +19370,7 @@
                       <a:r>
                         <a:rPr lang="en-US" sz="900" dirty="0">
                           <a:solidFill>
-                            <a:srgbClr val="1A1A1A"/>
+                            <a:srgbClr val="242C39"/>
                           </a:solidFill>
                           <a:latin typeface="Calibri" pitchFamily="34" charset="0"/>
                           <a:ea typeface="Calibri" pitchFamily="34" charset="-122"/>
@@ -19483,7 +19483,7 @@
                       <a:r>
                         <a:rPr lang="en-US" sz="900" b="1" dirty="0">
                           <a:solidFill>
-                            <a:srgbClr val="1A1A1A"/>
+                            <a:srgbClr val="242C39"/>
                           </a:solidFill>
                           <a:latin typeface="Calibri" pitchFamily="34" charset="0"/>
                           <a:ea typeface="Calibri" pitchFamily="34" charset="-122"/>
@@ -19539,7 +19539,7 @@
                       <a:r>
                         <a:rPr lang="en-US" sz="900" b="1" dirty="0">
                           <a:solidFill>
-                            <a:srgbClr val="1A1A1A"/>
+                            <a:srgbClr val="242C39"/>
                           </a:solidFill>
                           <a:latin typeface="Calibri" pitchFamily="34" charset="0"/>
                           <a:ea typeface="Calibri" pitchFamily="34" charset="-122"/>
@@ -19595,7 +19595,7 @@
                       <a:r>
                         <a:rPr lang="en-US" sz="900" b="1" dirty="0">
                           <a:solidFill>
-                            <a:srgbClr val="1A1A1A"/>
+                            <a:srgbClr val="242C39"/>
                           </a:solidFill>
                           <a:latin typeface="Calibri" pitchFamily="34" charset="0"/>
                           <a:ea typeface="Calibri" pitchFamily="34" charset="-122"/>
@@ -19696,7 +19696,7 @@
                       <a:r>
                         <a:rPr lang="en-US" sz="900" b="1" dirty="0">
                           <a:solidFill>
-                            <a:srgbClr val="1A1A1A"/>
+                            <a:srgbClr val="242C39"/>
                           </a:solidFill>
                           <a:latin typeface="Calibri" pitchFamily="34" charset="0"/>
                           <a:ea typeface="Calibri" pitchFamily="34" charset="-122"/>
@@ -19752,7 +19752,7 @@
                       <a:r>
                         <a:rPr lang="en-US" sz="900" b="1" dirty="0">
                           <a:solidFill>
-                            <a:srgbClr val="1A1A1A"/>
+                            <a:srgbClr val="242C39"/>
                           </a:solidFill>
                           <a:latin typeface="Calibri" pitchFamily="34" charset="0"/>
                           <a:ea typeface="Calibri" pitchFamily="34" charset="-122"/>
@@ -19808,7 +19808,7 @@
                       <a:r>
                         <a:rPr lang="en-US" sz="900" b="1" dirty="0">
                           <a:solidFill>
-                            <a:srgbClr val="1A1A1A"/>
+                            <a:srgbClr val="242C39"/>
                           </a:solidFill>
                           <a:latin typeface="Calibri" pitchFamily="34" charset="0"/>
                           <a:ea typeface="Calibri" pitchFamily="34" charset="-122"/>
@@ -19864,7 +19864,7 @@
                       <a:r>
                         <a:rPr lang="en-US" sz="900" b="1" dirty="0">
                           <a:solidFill>
-                            <a:srgbClr val="1A1A1A"/>
+                            <a:srgbClr val="242C39"/>
                           </a:solidFill>
                           <a:latin typeface="Calibri" pitchFamily="34" charset="0"/>
                           <a:ea typeface="Calibri" pitchFamily="34" charset="-122"/>
@@ -20073,7 +20073,7 @@
             <a:r>
               <a:rPr lang="en-US" sz="900" dirty="0">
                 <a:solidFill>
-                  <a:srgbClr val="5F6670"/>
+                  <a:srgbClr val="242C39"/>
                 </a:solidFill>
                 <a:latin typeface="Calibri" pitchFamily="34" charset="0"/>
                 <a:ea typeface="Calibri" pitchFamily="34" charset="-122"/>
@@ -20112,7 +20112,7 @@
             <a:r>
               <a:rPr lang="en-US" sz="850" dirty="0">
                 <a:solidFill>
-                  <a:srgbClr val="5F6670"/>
+                  <a:srgbClr val="242C39"/>
                 </a:solidFill>
                 <a:latin typeface="Calibri" pitchFamily="34" charset="0"/>
                 <a:ea typeface="Calibri" pitchFamily="34" charset="-122"/>
@@ -20226,7 +20226,7 @@
             <a:r>
               <a:rPr lang="en-US" sz="1050" dirty="0">
                 <a:solidFill>
-                  <a:srgbClr val="5F6670"/>
+                  <a:srgbClr val="242C39"/>
                 </a:solidFill>
                 <a:latin typeface="Calibri" pitchFamily="34" charset="0"/>
                 <a:ea typeface="Calibri" pitchFamily="34" charset="-122"/>
@@ -20247,7 +20247,7 @@
             <a:r>
               <a:rPr lang="en-US" sz="1050" dirty="0">
                 <a:solidFill>
-                  <a:srgbClr val="5F6670"/>
+                  <a:srgbClr val="242C39"/>
                 </a:solidFill>
                 <a:latin typeface="Calibri" pitchFamily="34" charset="0"/>
                 <a:ea typeface="Calibri" pitchFamily="34" charset="-122"/>
@@ -20268,7 +20268,7 @@
             <a:r>
               <a:rPr lang="en-US" sz="1050" dirty="0">
                 <a:solidFill>
-                  <a:srgbClr val="5F6670"/>
+                  <a:srgbClr val="242C39"/>
                 </a:solidFill>
                 <a:latin typeface="Calibri" pitchFamily="34" charset="0"/>
                 <a:ea typeface="Calibri" pitchFamily="34" charset="-122"/>
@@ -20289,7 +20289,7 @@
             <a:r>
               <a:rPr lang="en-US" sz="1050" dirty="0">
                 <a:solidFill>
-                  <a:srgbClr val="5F6670"/>
+                  <a:srgbClr val="242C39"/>
                 </a:solidFill>
                 <a:latin typeface="Calibri" pitchFamily="34" charset="0"/>
                 <a:ea typeface="Calibri" pitchFamily="34" charset="-122"/>
@@ -20310,7 +20310,7 @@
             <a:r>
               <a:rPr lang="en-US" sz="1050" dirty="0">
                 <a:solidFill>
-                  <a:srgbClr val="5F6670"/>
+                  <a:srgbClr val="242C39"/>
                 </a:solidFill>
                 <a:latin typeface="Calibri" pitchFamily="34" charset="0"/>
                 <a:ea typeface="Calibri" pitchFamily="34" charset="-122"/>
@@ -20352,7 +20352,7 @@
             <a:lvl1pPr>
               <a:defRPr sz="900">
                 <a:solidFill>
-                  <a:srgbClr val="5F6670"/>
+                  <a:srgbClr val="242C39"/>
                 </a:solidFill>
                 <a:latin typeface="Calibri"/>
                 <a:ea typeface="Calibri"/>
@@ -20469,7 +20469,7 @@
             <a:r>
               <a:rPr lang="en-US" sz="3600" b="1" dirty="0">
                 <a:solidFill>
-                  <a:srgbClr val="1A1A1A"/>
+                  <a:srgbClr val="242C39"/>
                 </a:solidFill>
                 <a:latin typeface="Calibri" pitchFamily="34" charset="0"/>
                 <a:ea typeface="Calibri" pitchFamily="34" charset="-122"/>
@@ -20512,7 +20512,7 @@
             <a:r>
               <a:rPr lang="en-US" sz="1600" dirty="0">
                 <a:solidFill>
-                  <a:srgbClr val="5F6670"/>
+                  <a:srgbClr val="242C39"/>
                 </a:solidFill>
                 <a:latin typeface="Calibri" pitchFamily="34" charset="0"/>
                 <a:ea typeface="Calibri" pitchFamily="34" charset="-122"/>
@@ -20554,7 +20554,7 @@
             <a:lvl1pPr>
               <a:defRPr sz="900">
                 <a:solidFill>
-                  <a:srgbClr val="5F6670"/>
+                  <a:srgbClr val="242C39"/>
                 </a:solidFill>
                 <a:latin typeface="Calibri"/>
                 <a:ea typeface="Calibri"/>
@@ -20671,7 +20671,7 @@
             <a:r>
               <a:rPr lang="en-US" sz="2800" b="1" dirty="0">
                 <a:solidFill>
-                  <a:srgbClr val="1A1A1A"/>
+                  <a:srgbClr val="242C39"/>
                 </a:solidFill>
                 <a:latin typeface="Calibri" pitchFamily="34" charset="0"/>
                 <a:ea typeface="Calibri" pitchFamily="34" charset="-122"/>
@@ -20782,7 +20782,7 @@
                       <a:tailEnd type="none" w="med" len="med"/>
                     </a:lnB>
                     <a:solidFill>
-                      <a:srgbClr val="1A1A1A"/>
+                      <a:srgbClr val="242C39"/>
                     </a:solidFill>
                   </a:tcPr>
                 </a:tc>
@@ -20832,7 +20832,7 @@
                       <a:tailEnd type="none" w="med" len="med"/>
                     </a:lnB>
                     <a:solidFill>
-                      <a:srgbClr val="1A1A1A"/>
+                      <a:srgbClr val="242C39"/>
                     </a:solidFill>
                   </a:tcPr>
                 </a:tc>
@@ -20882,7 +20882,7 @@
                       <a:tailEnd type="none" w="med" len="med"/>
                     </a:lnB>
                     <a:solidFill>
-                      <a:srgbClr val="1A1A1A"/>
+                      <a:srgbClr val="242C39"/>
                     </a:solidFill>
                   </a:tcPr>
                 </a:tc>
@@ -20932,7 +20932,7 @@
                       <a:tailEnd type="none" w="med" len="med"/>
                     </a:lnB>
                     <a:solidFill>
-                      <a:srgbClr val="1A1A1A"/>
+                      <a:srgbClr val="242C39"/>
                     </a:solidFill>
                   </a:tcPr>
                 </a:tc>
@@ -20954,7 +20954,7 @@
                       <a:r>
                         <a:rPr lang="en-US" sz="1000" b="1" dirty="0">
                           <a:solidFill>
-                            <a:srgbClr val="1A1A1A"/>
+                            <a:srgbClr val="242C39"/>
                           </a:solidFill>
                           <a:latin typeface="Calibri" pitchFamily="34" charset="0"/>
                           <a:ea typeface="Calibri" pitchFamily="34" charset="-122"/>
@@ -21007,7 +21007,7 @@
                       <a:r>
                         <a:rPr lang="en-US" sz="1000" dirty="0">
                           <a:solidFill>
-                            <a:srgbClr val="5F6670"/>
+                            <a:srgbClr val="242C39"/>
                           </a:solidFill>
                           <a:latin typeface="Calibri" pitchFamily="34" charset="0"/>
                           <a:ea typeface="Calibri" pitchFamily="34" charset="-122"/>
@@ -21060,7 +21060,7 @@
                       <a:r>
                         <a:rPr lang="en-US" sz="1000" dirty="0">
                           <a:solidFill>
-                            <a:srgbClr val="5F6670"/>
+                            <a:srgbClr val="242C39"/>
                           </a:solidFill>
                           <a:latin typeface="Calibri" pitchFamily="34" charset="0"/>
                           <a:ea typeface="Calibri" pitchFamily="34" charset="-122"/>
@@ -21113,7 +21113,7 @@
                       <a:r>
                         <a:rPr lang="en-US" sz="1000" dirty="0">
                           <a:solidFill>
-                            <a:srgbClr val="5F6670"/>
+                            <a:srgbClr val="242C39"/>
                           </a:solidFill>
                           <a:latin typeface="Calibri" pitchFamily="34" charset="0"/>
                           <a:ea typeface="Calibri" pitchFamily="34" charset="-122"/>
@@ -21173,7 +21173,7 @@
                       <a:r>
                         <a:rPr lang="en-US" sz="1000" b="1" dirty="0">
                           <a:solidFill>
-                            <a:srgbClr val="1A1A1A"/>
+                            <a:srgbClr val="242C39"/>
                           </a:solidFill>
                           <a:latin typeface="Calibri" pitchFamily="34" charset="0"/>
                           <a:ea typeface="Calibri" pitchFamily="34" charset="-122"/>
@@ -21226,7 +21226,7 @@
                       <a:r>
                         <a:rPr lang="en-US" sz="1000" dirty="0">
                           <a:solidFill>
-                            <a:srgbClr val="5F6670"/>
+                            <a:srgbClr val="242C39"/>
                           </a:solidFill>
                           <a:latin typeface="Calibri" pitchFamily="34" charset="0"/>
                           <a:ea typeface="Calibri" pitchFamily="34" charset="-122"/>
@@ -21279,7 +21279,7 @@
                       <a:r>
                         <a:rPr lang="en-US" sz="1000" dirty="0">
                           <a:solidFill>
-                            <a:srgbClr val="5F6670"/>
+                            <a:srgbClr val="242C39"/>
                           </a:solidFill>
                           <a:latin typeface="Calibri" pitchFamily="34" charset="0"/>
                           <a:ea typeface="Calibri" pitchFamily="34" charset="-122"/>
@@ -21332,7 +21332,7 @@
                       <a:r>
                         <a:rPr lang="en-US" sz="1000" dirty="0">
                           <a:solidFill>
-                            <a:srgbClr val="5F6670"/>
+                            <a:srgbClr val="242C39"/>
                           </a:solidFill>
                           <a:latin typeface="Calibri" pitchFamily="34" charset="0"/>
                           <a:ea typeface="Calibri" pitchFamily="34" charset="-122"/>
@@ -21392,7 +21392,7 @@
                       <a:r>
                         <a:rPr lang="en-US" sz="1000" b="1" dirty="0">
                           <a:solidFill>
-                            <a:srgbClr val="1A1A1A"/>
+                            <a:srgbClr val="242C39"/>
                           </a:solidFill>
                           <a:latin typeface="Calibri" pitchFamily="34" charset="0"/>
                           <a:ea typeface="Calibri" pitchFamily="34" charset="-122"/>
@@ -21445,7 +21445,7 @@
                       <a:r>
                         <a:rPr lang="en-US" sz="1000" dirty="0">
                           <a:solidFill>
-                            <a:srgbClr val="5F6670"/>
+                            <a:srgbClr val="242C39"/>
                           </a:solidFill>
                           <a:latin typeface="Calibri" pitchFamily="34" charset="0"/>
                           <a:ea typeface="Calibri" pitchFamily="34" charset="-122"/>
@@ -21498,7 +21498,7 @@
                       <a:r>
                         <a:rPr lang="en-US" sz="1000" dirty="0">
                           <a:solidFill>
-                            <a:srgbClr val="5F6670"/>
+                            <a:srgbClr val="242C39"/>
                           </a:solidFill>
                           <a:latin typeface="Calibri" pitchFamily="34" charset="0"/>
                           <a:ea typeface="Calibri" pitchFamily="34" charset="-122"/>
@@ -21551,7 +21551,7 @@
                       <a:r>
                         <a:rPr lang="en-US" sz="1000" dirty="0">
                           <a:solidFill>
-                            <a:srgbClr val="5F6670"/>
+                            <a:srgbClr val="242C39"/>
                           </a:solidFill>
                           <a:latin typeface="Calibri" pitchFamily="34" charset="0"/>
                           <a:ea typeface="Calibri" pitchFamily="34" charset="-122"/>
@@ -21611,7 +21611,7 @@
                       <a:r>
                         <a:rPr lang="en-US" sz="1000" b="1" dirty="0">
                           <a:solidFill>
-                            <a:srgbClr val="1A1A1A"/>
+                            <a:srgbClr val="242C39"/>
                           </a:solidFill>
                           <a:latin typeface="Calibri" pitchFamily="34" charset="0"/>
                           <a:ea typeface="Calibri" pitchFamily="34" charset="-122"/>
@@ -21664,7 +21664,7 @@
                       <a:r>
                         <a:rPr lang="en-US" sz="1000" dirty="0">
                           <a:solidFill>
-                            <a:srgbClr val="5F6670"/>
+                            <a:srgbClr val="242C39"/>
                           </a:solidFill>
                           <a:latin typeface="Calibri" pitchFamily="34" charset="0"/>
                           <a:ea typeface="Calibri" pitchFamily="34" charset="-122"/>
@@ -21717,7 +21717,7 @@
                       <a:r>
                         <a:rPr lang="en-US" sz="1000" dirty="0">
                           <a:solidFill>
-                            <a:srgbClr val="5F6670"/>
+                            <a:srgbClr val="242C39"/>
                           </a:solidFill>
                           <a:latin typeface="Calibri" pitchFamily="34" charset="0"/>
                           <a:ea typeface="Calibri" pitchFamily="34" charset="-122"/>
@@ -21770,7 +21770,7 @@
                       <a:r>
                         <a:rPr lang="en-US" sz="1000" dirty="0">
                           <a:solidFill>
-                            <a:srgbClr val="5F6670"/>
+                            <a:srgbClr val="242C39"/>
                           </a:solidFill>
                           <a:latin typeface="Calibri" pitchFamily="34" charset="0"/>
                           <a:ea typeface="Calibri" pitchFamily="34" charset="-122"/>
@@ -21852,7 +21852,7 @@
             <a:lvl1pPr>
               <a:defRPr sz="900">
                 <a:solidFill>
-                  <a:srgbClr val="5F6670"/>
+                  <a:srgbClr val="242C39"/>
                 </a:solidFill>
                 <a:latin typeface="Calibri"/>
                 <a:ea typeface="Calibri"/>
@@ -22057,7 +22057,7 @@
             <a:r>
               <a:rPr lang="en-US" sz="2800" b="1" dirty="0">
                 <a:solidFill>
-                  <a:srgbClr val="1A1A1A"/>
+                  <a:srgbClr val="242C39"/>
                 </a:solidFill>
                 <a:latin typeface="Calibri" pitchFamily="34" charset="0"/>
                 <a:ea typeface="Calibri" pitchFamily="34" charset="-122"/>
@@ -22104,7 +22104,7 @@
             <a:r>
               <a:rPr lang="en-US" sz="1600" dirty="0">
                 <a:solidFill>
-                  <a:srgbClr val="1A1A1A"/>
+                  <a:srgbClr val="242C39"/>
                 </a:solidFill>
                 <a:latin typeface="Calibri" pitchFamily="34" charset="0"/>
                 <a:ea typeface="Calibri" pitchFamily="34" charset="-122"/>
@@ -22125,7 +22125,7 @@
             <a:r>
               <a:rPr lang="en-US" sz="1600" dirty="0">
                 <a:solidFill>
-                  <a:srgbClr val="1A1A1A"/>
+                  <a:srgbClr val="242C39"/>
                 </a:solidFill>
                 <a:latin typeface="Calibri" pitchFamily="34" charset="0"/>
                 <a:ea typeface="Calibri" pitchFamily="34" charset="-122"/>
@@ -22146,7 +22146,7 @@
             <a:r>
               <a:rPr lang="en-US" sz="1600" dirty="0">
                 <a:solidFill>
-                  <a:srgbClr val="1A1A1A"/>
+                  <a:srgbClr val="242C39"/>
                 </a:solidFill>
                 <a:latin typeface="Calibri" pitchFamily="34" charset="0"/>
                 <a:ea typeface="Calibri" pitchFamily="34" charset="-122"/>
@@ -22167,7 +22167,7 @@
             <a:r>
               <a:rPr lang="en-US" sz="1600" dirty="0">
                 <a:solidFill>
-                  <a:srgbClr val="1A1A1A"/>
+                  <a:srgbClr val="242C39"/>
                 </a:solidFill>
                 <a:latin typeface="Calibri" pitchFamily="34" charset="0"/>
                 <a:ea typeface="Calibri" pitchFamily="34" charset="-122"/>
@@ -22209,7 +22209,7 @@
             <a:lvl1pPr>
               <a:defRPr sz="900">
                 <a:solidFill>
-                  <a:srgbClr val="5F6670"/>
+                  <a:srgbClr val="242C39"/>
                 </a:solidFill>
                 <a:latin typeface="Calibri"/>
                 <a:ea typeface="Calibri"/>
@@ -22283,7 +22283,7 @@
             <a:r>
               <a:rPr lang="en-US" sz="4800" b="1" dirty="0">
                 <a:solidFill>
-                  <a:srgbClr val="1A1A1A"/>
+                  <a:srgbClr val="242C39"/>
                 </a:solidFill>
                 <a:latin typeface="Calibri" pitchFamily="34" charset="0"/>
                 <a:ea typeface="Calibri" pitchFamily="34" charset="-122"/>
@@ -22528,7 +22528,7 @@
             <a:r>
               <a:rPr lang="en-US" sz="2800" b="1" dirty="0">
                 <a:solidFill>
-                  <a:srgbClr val="1A1A1A"/>
+                  <a:srgbClr val="242C39"/>
                 </a:solidFill>
                 <a:latin typeface="Calibri" pitchFamily="34" charset="0"/>
                 <a:ea typeface="Calibri" pitchFamily="34" charset="-122"/>
@@ -22667,7 +22667,7 @@
                       <a:tailEnd type="none" w="med" len="med"/>
                     </a:lnB>
                     <a:solidFill>
-                      <a:srgbClr val="1A1A1A"/>
+                      <a:srgbClr val="242C39"/>
                     </a:solidFill>
                   </a:tcPr>
                 </a:tc>
@@ -22717,7 +22717,7 @@
                       <a:tailEnd type="none" w="med" len="med"/>
                     </a:lnB>
                     <a:solidFill>
-                      <a:srgbClr val="1A1A1A"/>
+                      <a:srgbClr val="242C39"/>
                     </a:solidFill>
                   </a:tcPr>
                 </a:tc>
@@ -22767,7 +22767,7 @@
                       <a:tailEnd type="none" w="med" len="med"/>
                     </a:lnB>
                     <a:solidFill>
-                      <a:srgbClr val="1A1A1A"/>
+                      <a:srgbClr val="242C39"/>
                     </a:solidFill>
                   </a:tcPr>
                 </a:tc>
@@ -22817,7 +22817,7 @@
                       <a:tailEnd type="none" w="med" len="med"/>
                     </a:lnB>
                     <a:solidFill>
-                      <a:srgbClr val="1A1A1A"/>
+                      <a:srgbClr val="242C39"/>
                     </a:solidFill>
                   </a:tcPr>
                 </a:tc>
@@ -22867,7 +22867,7 @@
                       <a:tailEnd type="none" w="med" len="med"/>
                     </a:lnB>
                     <a:solidFill>
-                      <a:srgbClr val="1A1A1A"/>
+                      <a:srgbClr val="242C39"/>
                     </a:solidFill>
                   </a:tcPr>
                 </a:tc>
@@ -22917,7 +22917,7 @@
                       <a:tailEnd type="none" w="med" len="med"/>
                     </a:lnB>
                     <a:solidFill>
-                      <a:srgbClr val="1A1A1A"/>
+                      <a:srgbClr val="242C39"/>
                     </a:solidFill>
                   </a:tcPr>
                 </a:tc>
@@ -22967,7 +22967,7 @@
                       <a:tailEnd type="none" w="med" len="med"/>
                     </a:lnB>
                     <a:solidFill>
-                      <a:srgbClr val="1A1A1A"/>
+                      <a:srgbClr val="242C39"/>
                     </a:solidFill>
                   </a:tcPr>
                 </a:tc>
@@ -23017,7 +23017,7 @@
                       <a:tailEnd type="none" w="med" len="med"/>
                     </a:lnB>
                     <a:solidFill>
-                      <a:srgbClr val="1A1A1A"/>
+                      <a:srgbClr val="242C39"/>
                     </a:solidFill>
                   </a:tcPr>
                 </a:tc>
@@ -23039,7 +23039,7 @@
                       <a:r>
                         <a:rPr lang="en-US" sz="950" dirty="0">
                           <a:solidFill>
-                            <a:srgbClr val="1A1A1A"/>
+                            <a:srgbClr val="242C39"/>
                           </a:solidFill>
                           <a:latin typeface="Calibri" pitchFamily="34" charset="0"/>
                           <a:ea typeface="Calibri" pitchFamily="34" charset="-122"/>
@@ -23092,7 +23092,7 @@
                       <a:r>
                         <a:rPr lang="en-US" sz="950" dirty="0">
                           <a:solidFill>
-                            <a:srgbClr val="1A1A1A"/>
+                            <a:srgbClr val="242C39"/>
                           </a:solidFill>
                           <a:latin typeface="Calibri" pitchFamily="34" charset="0"/>
                           <a:ea typeface="Calibri" pitchFamily="34" charset="-122"/>
@@ -23145,7 +23145,7 @@
                       <a:r>
                         <a:rPr lang="en-US" sz="950" dirty="0">
                           <a:solidFill>
-                            <a:srgbClr val="1A1A1A"/>
+                            <a:srgbClr val="242C39"/>
                           </a:solidFill>
                           <a:latin typeface="Calibri" pitchFamily="34" charset="0"/>
                           <a:ea typeface="Calibri" pitchFamily="34" charset="-122"/>
@@ -23251,7 +23251,7 @@
                       <a:r>
                         <a:rPr lang="en-US" sz="950" dirty="0">
                           <a:solidFill>
-                            <a:srgbClr val="1A1A1A"/>
+                            <a:srgbClr val="242C39"/>
                           </a:solidFill>
                           <a:latin typeface="Calibri" pitchFamily="34" charset="0"/>
                           <a:ea typeface="Calibri" pitchFamily="34" charset="-122"/>
@@ -23304,7 +23304,7 @@
                       <a:r>
                         <a:rPr lang="en-US" sz="950" dirty="0">
                           <a:solidFill>
-                            <a:srgbClr val="1A1A1A"/>
+                            <a:srgbClr val="242C39"/>
                           </a:solidFill>
                           <a:latin typeface="Calibri" pitchFamily="34" charset="0"/>
                           <a:ea typeface="Calibri" pitchFamily="34" charset="-122"/>
@@ -23410,7 +23410,7 @@
                       <a:r>
                         <a:rPr lang="en-US" sz="950" dirty="0">
                           <a:solidFill>
-                            <a:srgbClr val="1A1A1A"/>
+                            <a:srgbClr val="242C39"/>
                           </a:solidFill>
                           <a:latin typeface="Calibri" pitchFamily="34" charset="0"/>
                           <a:ea typeface="Calibri" pitchFamily="34" charset="-122"/>
@@ -23470,7 +23470,7 @@
                       <a:r>
                         <a:rPr lang="en-US" sz="950" dirty="0">
                           <a:solidFill>
-                            <a:srgbClr val="1A1A1A"/>
+                            <a:srgbClr val="242C39"/>
                           </a:solidFill>
                           <a:latin typeface="Calibri" pitchFamily="34" charset="0"/>
                           <a:ea typeface="Calibri" pitchFamily="34" charset="-122"/>
@@ -23523,7 +23523,7 @@
                       <a:r>
                         <a:rPr lang="en-US" sz="950" dirty="0">
                           <a:solidFill>
-                            <a:srgbClr val="1A1A1A"/>
+                            <a:srgbClr val="242C39"/>
                           </a:solidFill>
                           <a:latin typeface="Calibri" pitchFamily="34" charset="0"/>
                           <a:ea typeface="Calibri" pitchFamily="34" charset="-122"/>
@@ -23576,7 +23576,7 @@
                       <a:r>
                         <a:rPr lang="en-US" sz="950" dirty="0">
                           <a:solidFill>
-                            <a:srgbClr val="1A1A1A"/>
+                            <a:srgbClr val="242C39"/>
                           </a:solidFill>
                           <a:latin typeface="Calibri" pitchFamily="34" charset="0"/>
                           <a:ea typeface="Calibri" pitchFamily="34" charset="-122"/>
@@ -23682,7 +23682,7 @@
                       <a:r>
                         <a:rPr lang="en-US" sz="950" dirty="0">
                           <a:solidFill>
-                            <a:srgbClr val="1A1A1A"/>
+                            <a:srgbClr val="242C39"/>
                           </a:solidFill>
                           <a:latin typeface="Calibri" pitchFamily="34" charset="0"/>
                           <a:ea typeface="Calibri" pitchFamily="34" charset="-122"/>
@@ -23735,7 +23735,7 @@
                       <a:r>
                         <a:rPr lang="en-US" sz="950" dirty="0">
                           <a:solidFill>
-                            <a:srgbClr val="1A1A1A"/>
+                            <a:srgbClr val="242C39"/>
                           </a:solidFill>
                           <a:latin typeface="Calibri" pitchFamily="34" charset="0"/>
                           <a:ea typeface="Calibri" pitchFamily="34" charset="-122"/>
@@ -23841,7 +23841,7 @@
                       <a:r>
                         <a:rPr lang="en-US" sz="950" dirty="0">
                           <a:solidFill>
-                            <a:srgbClr val="1A1A1A"/>
+                            <a:srgbClr val="242C39"/>
                           </a:solidFill>
                           <a:latin typeface="Calibri" pitchFamily="34" charset="0"/>
                           <a:ea typeface="Calibri" pitchFamily="34" charset="-122"/>
@@ -23901,7 +23901,7 @@
                       <a:r>
                         <a:rPr lang="en-US" sz="950" b="1" dirty="0">
                           <a:solidFill>
-                            <a:srgbClr val="1A1A1A"/>
+                            <a:srgbClr val="242C39"/>
                           </a:solidFill>
                           <a:latin typeface="Calibri" pitchFamily="34" charset="0"/>
                           <a:ea typeface="Calibri" pitchFamily="34" charset="-122"/>
@@ -23957,7 +23957,7 @@
                       <a:r>
                         <a:rPr lang="en-US" sz="950" b="1" dirty="0">
                           <a:solidFill>
-                            <a:srgbClr val="1A1A1A"/>
+                            <a:srgbClr val="242C39"/>
                           </a:solidFill>
                           <a:latin typeface="Calibri" pitchFamily="34" charset="0"/>
                           <a:ea typeface="Calibri" pitchFamily="34" charset="-122"/>
@@ -24013,7 +24013,7 @@
                       <a:r>
                         <a:rPr lang="en-US" sz="950" b="1" dirty="0">
                           <a:solidFill>
-                            <a:srgbClr val="1A1A1A"/>
+                            <a:srgbClr val="242C39"/>
                           </a:solidFill>
                           <a:latin typeface="Calibri" pitchFamily="34" charset="0"/>
                           <a:ea typeface="Calibri" pitchFamily="34" charset="-122"/>
@@ -24125,7 +24125,7 @@
                       <a:r>
                         <a:rPr lang="en-US" sz="950" b="1" dirty="0">
                           <a:solidFill>
-                            <a:srgbClr val="1A1A1A"/>
+                            <a:srgbClr val="242C39"/>
                           </a:solidFill>
                           <a:latin typeface="Calibri" pitchFamily="34" charset="0"/>
                           <a:ea typeface="Calibri" pitchFamily="34" charset="-122"/>
@@ -24181,7 +24181,7 @@
                       <a:r>
                         <a:rPr lang="en-US" sz="950" b="1" dirty="0">
                           <a:solidFill>
-                            <a:srgbClr val="1A1A1A"/>
+                            <a:srgbClr val="242C39"/>
                           </a:solidFill>
                           <a:latin typeface="Calibri" pitchFamily="34" charset="0"/>
                           <a:ea typeface="Calibri" pitchFamily="34" charset="-122"/>
@@ -24293,7 +24293,7 @@
                       <a:r>
                         <a:rPr lang="en-US" sz="950" b="1" dirty="0">
                           <a:solidFill>
-                            <a:srgbClr val="1A1A1A"/>
+                            <a:srgbClr val="242C39"/>
                           </a:solidFill>
                           <a:latin typeface="Calibri" pitchFamily="34" charset="0"/>
                           <a:ea typeface="Calibri" pitchFamily="34" charset="-122"/>
@@ -24356,7 +24356,7 @@
                       <a:r>
                         <a:rPr lang="en-US" sz="850" dirty="0">
                           <a:solidFill>
-                            <a:srgbClr val="1A1A1A"/>
+                            <a:srgbClr val="242C39"/>
                           </a:solidFill>
                           <a:latin typeface="Calibri" pitchFamily="34" charset="0"/>
                           <a:ea typeface="Calibri" pitchFamily="34" charset="-122"/>
@@ -24409,7 +24409,7 @@
                       <a:r>
                         <a:rPr lang="en-US" sz="850" dirty="0">
                           <a:solidFill>
-                            <a:srgbClr val="1A1A1A"/>
+                            <a:srgbClr val="242C39"/>
                           </a:solidFill>
                           <a:latin typeface="Calibri" pitchFamily="34" charset="0"/>
                           <a:ea typeface="Calibri" pitchFamily="34" charset="-122"/>
@@ -24462,7 +24462,7 @@
                       <a:r>
                         <a:rPr lang="en-US" sz="850" dirty="0">
                           <a:solidFill>
-                            <a:srgbClr val="1A1A1A"/>
+                            <a:srgbClr val="242C39"/>
                           </a:solidFill>
                           <a:latin typeface="Calibri" pitchFamily="34" charset="0"/>
                           <a:ea typeface="Calibri" pitchFamily="34" charset="-122"/>
@@ -24568,7 +24568,7 @@
                       <a:r>
                         <a:rPr lang="en-US" sz="850" dirty="0">
                           <a:solidFill>
-                            <a:srgbClr val="1A1A1A"/>
+                            <a:srgbClr val="242C39"/>
                           </a:solidFill>
                           <a:latin typeface="Calibri" pitchFamily="34" charset="0"/>
                           <a:ea typeface="Calibri" pitchFamily="34" charset="-122"/>
@@ -24621,7 +24621,7 @@
                       <a:r>
                         <a:rPr lang="en-US" sz="850" dirty="0">
                           <a:solidFill>
-                            <a:srgbClr val="1A1A1A"/>
+                            <a:srgbClr val="242C39"/>
                           </a:solidFill>
                           <a:latin typeface="Calibri" pitchFamily="34" charset="0"/>
                           <a:ea typeface="Calibri" pitchFamily="34" charset="-122"/>
@@ -24727,7 +24727,7 @@
                       <a:r>
                         <a:rPr lang="en-US" sz="850" dirty="0">
                           <a:solidFill>
-                            <a:srgbClr val="1A1A1A"/>
+                            <a:srgbClr val="242C39"/>
                           </a:solidFill>
                           <a:latin typeface="Calibri" pitchFamily="34" charset="0"/>
                           <a:ea typeface="Calibri" pitchFamily="34" charset="-122"/>
@@ -24787,7 +24787,7 @@
                       <a:r>
                         <a:rPr lang="en-US" sz="950" dirty="0">
                           <a:solidFill>
-                            <a:srgbClr val="1A1A1A"/>
+                            <a:srgbClr val="242C39"/>
                           </a:solidFill>
                           <a:latin typeface="Calibri" pitchFamily="34" charset="0"/>
                           <a:ea typeface="Calibri" pitchFamily="34" charset="-122"/>
@@ -24840,7 +24840,7 @@
                       <a:r>
                         <a:rPr lang="en-US" sz="950" dirty="0">
                           <a:solidFill>
-                            <a:srgbClr val="1A1A1A"/>
+                            <a:srgbClr val="242C39"/>
                           </a:solidFill>
                           <a:latin typeface="Calibri" pitchFamily="34" charset="0"/>
                           <a:ea typeface="Calibri" pitchFamily="34" charset="-122"/>
@@ -24893,7 +24893,7 @@
                       <a:r>
                         <a:rPr lang="en-US" sz="950" dirty="0">
                           <a:solidFill>
-                            <a:srgbClr val="1A1A1A"/>
+                            <a:srgbClr val="242C39"/>
                           </a:solidFill>
                           <a:latin typeface="Calibri" pitchFamily="34" charset="0"/>
                           <a:ea typeface="Calibri" pitchFamily="34" charset="-122"/>
@@ -24999,7 +24999,7 @@
                       <a:r>
                         <a:rPr lang="en-US" sz="950" dirty="0">
                           <a:solidFill>
-                            <a:srgbClr val="1A1A1A"/>
+                            <a:srgbClr val="242C39"/>
                           </a:solidFill>
                           <a:latin typeface="Calibri" pitchFamily="34" charset="0"/>
                           <a:ea typeface="Calibri" pitchFamily="34" charset="-122"/>
@@ -25052,7 +25052,7 @@
                       <a:r>
                         <a:rPr lang="en-US" sz="950" dirty="0">
                           <a:solidFill>
-                            <a:srgbClr val="1A1A1A"/>
+                            <a:srgbClr val="242C39"/>
                           </a:solidFill>
                           <a:latin typeface="Calibri" pitchFamily="34" charset="0"/>
                           <a:ea typeface="Calibri" pitchFamily="34" charset="-122"/>
@@ -25158,7 +25158,7 @@
                       <a:r>
                         <a:rPr lang="en-US" sz="950" dirty="0">
                           <a:solidFill>
-                            <a:srgbClr val="1A1A1A"/>
+                            <a:srgbClr val="242C39"/>
                           </a:solidFill>
                           <a:latin typeface="Calibri" pitchFamily="34" charset="0"/>
                           <a:ea typeface="Calibri" pitchFamily="34" charset="-122"/>
@@ -25218,7 +25218,7 @@
                       <a:r>
                         <a:rPr lang="en-US" sz="950" b="1" dirty="0">
                           <a:solidFill>
-                            <a:srgbClr val="1A1A1A"/>
+                            <a:srgbClr val="242C39"/>
                           </a:solidFill>
                           <a:latin typeface="Calibri" pitchFamily="34" charset="0"/>
                           <a:ea typeface="Calibri" pitchFamily="34" charset="-122"/>
@@ -25274,7 +25274,7 @@
                       <a:r>
                         <a:rPr lang="en-US" sz="950" b="1" dirty="0">
                           <a:solidFill>
-                            <a:srgbClr val="1A1A1A"/>
+                            <a:srgbClr val="242C39"/>
                           </a:solidFill>
                           <a:latin typeface="Calibri" pitchFamily="34" charset="0"/>
                           <a:ea typeface="Calibri" pitchFamily="34" charset="-122"/>
@@ -25330,7 +25330,7 @@
                       <a:r>
                         <a:rPr lang="en-US" sz="950" b="1" dirty="0">
                           <a:solidFill>
-                            <a:srgbClr val="1A1A1A"/>
+                            <a:srgbClr val="242C39"/>
                           </a:solidFill>
                           <a:latin typeface="Calibri" pitchFamily="34" charset="0"/>
                           <a:ea typeface="Calibri" pitchFamily="34" charset="-122"/>
@@ -25442,7 +25442,7 @@
                       <a:r>
                         <a:rPr lang="en-US" sz="950" b="1" dirty="0">
                           <a:solidFill>
-                            <a:srgbClr val="1A1A1A"/>
+                            <a:srgbClr val="242C39"/>
                           </a:solidFill>
                           <a:latin typeface="Calibri" pitchFamily="34" charset="0"/>
                           <a:ea typeface="Calibri" pitchFamily="34" charset="-122"/>
@@ -25498,7 +25498,7 @@
                       <a:r>
                         <a:rPr lang="en-US" sz="950" b="1" dirty="0">
                           <a:solidFill>
-                            <a:srgbClr val="1A1A1A"/>
+                            <a:srgbClr val="242C39"/>
                           </a:solidFill>
                           <a:latin typeface="Calibri" pitchFamily="34" charset="0"/>
                           <a:ea typeface="Calibri" pitchFamily="34" charset="-122"/>
@@ -25610,7 +25610,7 @@
                       <a:r>
                         <a:rPr lang="en-US" sz="950" b="1" dirty="0">
                           <a:solidFill>
-                            <a:srgbClr val="1A1A1A"/>
+                            <a:srgbClr val="242C39"/>
                           </a:solidFill>
                           <a:latin typeface="Calibri" pitchFamily="34" charset="0"/>
                           <a:ea typeface="Calibri" pitchFamily="34" charset="-122"/>
@@ -25673,7 +25673,7 @@
                       <a:r>
                         <a:rPr lang="en-US" sz="850" dirty="0">
                           <a:solidFill>
-                            <a:srgbClr val="1A1A1A"/>
+                            <a:srgbClr val="242C39"/>
                           </a:solidFill>
                           <a:latin typeface="Calibri" pitchFamily="34" charset="0"/>
                           <a:ea typeface="Calibri" pitchFamily="34" charset="-122"/>
@@ -25726,7 +25726,7 @@
                       <a:r>
                         <a:rPr lang="en-US" sz="850" dirty="0">
                           <a:solidFill>
-                            <a:srgbClr val="1A1A1A"/>
+                            <a:srgbClr val="242C39"/>
                           </a:solidFill>
                           <a:latin typeface="Calibri" pitchFamily="34" charset="0"/>
                           <a:ea typeface="Calibri" pitchFamily="34" charset="-122"/>
@@ -25779,7 +25779,7 @@
                       <a:r>
                         <a:rPr lang="en-US" sz="850" dirty="0">
                           <a:solidFill>
-                            <a:srgbClr val="1A1A1A"/>
+                            <a:srgbClr val="242C39"/>
                           </a:solidFill>
                           <a:latin typeface="Calibri" pitchFamily="34" charset="0"/>
                           <a:ea typeface="Calibri" pitchFamily="34" charset="-122"/>
@@ -25885,7 +25885,7 @@
                       <a:r>
                         <a:rPr lang="en-US" sz="850" dirty="0">
                           <a:solidFill>
-                            <a:srgbClr val="1A1A1A"/>
+                            <a:srgbClr val="242C39"/>
                           </a:solidFill>
                           <a:latin typeface="Calibri" pitchFamily="34" charset="0"/>
                           <a:ea typeface="Calibri" pitchFamily="34" charset="-122"/>
@@ -25938,7 +25938,7 @@
                       <a:r>
                         <a:rPr lang="en-US" sz="850" dirty="0">
                           <a:solidFill>
-                            <a:srgbClr val="1A1A1A"/>
+                            <a:srgbClr val="242C39"/>
                           </a:solidFill>
                           <a:latin typeface="Calibri" pitchFamily="34" charset="0"/>
                           <a:ea typeface="Calibri" pitchFamily="34" charset="-122"/>
@@ -26044,7 +26044,7 @@
                       <a:r>
                         <a:rPr lang="en-US" sz="850" dirty="0">
                           <a:solidFill>
-                            <a:srgbClr val="1A1A1A"/>
+                            <a:srgbClr val="242C39"/>
                           </a:solidFill>
                           <a:latin typeface="Calibri" pitchFamily="34" charset="0"/>
                           <a:ea typeface="Calibri" pitchFamily="34" charset="-122"/>
@@ -26123,7 +26123,7 @@
             <a:r>
               <a:rPr lang="en-US" sz="900" b="1" dirty="0">
                 <a:solidFill>
-                  <a:srgbClr val="5F6670"/>
+                  <a:srgbClr val="242C39"/>
                 </a:solidFill>
                 <a:latin typeface="Calibri" pitchFamily="34" charset="0"/>
                 <a:ea typeface="Calibri" pitchFamily="34" charset="-122"/>
@@ -26237,7 +26237,7 @@
             <a:r>
               <a:rPr lang="en-US" sz="1050" dirty="0">
                 <a:solidFill>
-                  <a:srgbClr val="5F6670"/>
+                  <a:srgbClr val="242C39"/>
                 </a:solidFill>
                 <a:latin typeface="Calibri" pitchFamily="34" charset="0"/>
                 <a:ea typeface="Calibri" pitchFamily="34" charset="-122"/>
@@ -26258,7 +26258,7 @@
             <a:r>
               <a:rPr lang="en-US" sz="1050" dirty="0">
                 <a:solidFill>
-                  <a:srgbClr val="5F6670"/>
+                  <a:srgbClr val="242C39"/>
                 </a:solidFill>
                 <a:latin typeface="Calibri" pitchFamily="34" charset="0"/>
                 <a:ea typeface="Calibri" pitchFamily="34" charset="-122"/>
@@ -26279,7 +26279,7 @@
             <a:r>
               <a:rPr lang="en-US" sz="1050" dirty="0">
                 <a:solidFill>
-                  <a:srgbClr val="5F6670"/>
+                  <a:srgbClr val="242C39"/>
                 </a:solidFill>
                 <a:latin typeface="Calibri" pitchFamily="34" charset="0"/>
                 <a:ea typeface="Calibri" pitchFamily="34" charset="-122"/>
@@ -26300,7 +26300,7 @@
             <a:r>
               <a:rPr lang="en-US" sz="1050" dirty="0">
                 <a:solidFill>
-                  <a:srgbClr val="5F6670"/>
+                  <a:srgbClr val="242C39"/>
                 </a:solidFill>
                 <a:latin typeface="Calibri" pitchFamily="34" charset="0"/>
                 <a:ea typeface="Calibri" pitchFamily="34" charset="-122"/>
@@ -26321,7 +26321,7 @@
             <a:r>
               <a:rPr lang="en-US" sz="1050" dirty="0">
                 <a:solidFill>
-                  <a:srgbClr val="5F6670"/>
+                  <a:srgbClr val="242C39"/>
                 </a:solidFill>
                 <a:latin typeface="Calibri" pitchFamily="34" charset="0"/>
                 <a:ea typeface="Calibri" pitchFamily="34" charset="-122"/>
@@ -26363,7 +26363,7 @@
             <a:lvl1pPr>
               <a:defRPr sz="900">
                 <a:solidFill>
-                  <a:srgbClr val="5F6670"/>
+                  <a:srgbClr val="242C39"/>
                 </a:solidFill>
                 <a:latin typeface="Calibri"/>
                 <a:ea typeface="Calibri"/>
@@ -26504,7 +26504,7 @@
             <a:r>
               <a:rPr lang="en-US" sz="2800" b="1" dirty="0">
                 <a:solidFill>
-                  <a:srgbClr val="1A1A1A"/>
+                  <a:srgbClr val="242C39"/>
                 </a:solidFill>
                 <a:latin typeface="Calibri" pitchFamily="34" charset="0"/>
                 <a:ea typeface="Calibri" pitchFamily="34" charset="-122"/>
@@ -26643,7 +26643,7 @@
                       <a:tailEnd type="none" w="med" len="med"/>
                     </a:lnB>
                     <a:solidFill>
-                      <a:srgbClr val="1A1A1A"/>
+                      <a:srgbClr val="242C39"/>
                     </a:solidFill>
                   </a:tcPr>
                 </a:tc>
@@ -26693,7 +26693,7 @@
                       <a:tailEnd type="none" w="med" len="med"/>
                     </a:lnB>
                     <a:solidFill>
-                      <a:srgbClr val="1A1A1A"/>
+                      <a:srgbClr val="242C39"/>
                     </a:solidFill>
                   </a:tcPr>
                 </a:tc>
@@ -26743,7 +26743,7 @@
                       <a:tailEnd type="none" w="med" len="med"/>
                     </a:lnB>
                     <a:solidFill>
-                      <a:srgbClr val="1A1A1A"/>
+                      <a:srgbClr val="242C39"/>
                     </a:solidFill>
                   </a:tcPr>
                 </a:tc>
@@ -26793,7 +26793,7 @@
                       <a:tailEnd type="none" w="med" len="med"/>
                     </a:lnB>
                     <a:solidFill>
-                      <a:srgbClr val="1A1A1A"/>
+                      <a:srgbClr val="242C39"/>
                     </a:solidFill>
                   </a:tcPr>
                 </a:tc>
@@ -26843,7 +26843,7 @@
                       <a:tailEnd type="none" w="med" len="med"/>
                     </a:lnB>
                     <a:solidFill>
-                      <a:srgbClr val="1A1A1A"/>
+                      <a:srgbClr val="242C39"/>
                     </a:solidFill>
                   </a:tcPr>
                 </a:tc>
@@ -26893,7 +26893,7 @@
                       <a:tailEnd type="none" w="med" len="med"/>
                     </a:lnB>
                     <a:solidFill>
-                      <a:srgbClr val="1A1A1A"/>
+                      <a:srgbClr val="242C39"/>
                     </a:solidFill>
                   </a:tcPr>
                 </a:tc>
@@ -26943,7 +26943,7 @@
                       <a:tailEnd type="none" w="med" len="med"/>
                     </a:lnB>
                     <a:solidFill>
-                      <a:srgbClr val="1A1A1A"/>
+                      <a:srgbClr val="242C39"/>
                     </a:solidFill>
                   </a:tcPr>
                 </a:tc>
@@ -26993,7 +26993,7 @@
                       <a:tailEnd type="none" w="med" len="med"/>
                     </a:lnB>
                     <a:solidFill>
-                      <a:srgbClr val="1A1A1A"/>
+                      <a:srgbClr val="242C39"/>
                     </a:solidFill>
                   </a:tcPr>
                 </a:tc>
@@ -27015,7 +27015,7 @@
                       <a:r>
                         <a:rPr lang="en-US" sz="950" dirty="0">
                           <a:solidFill>
-                            <a:srgbClr val="1A1A1A"/>
+                            <a:srgbClr val="242C39"/>
                           </a:solidFill>
                           <a:latin typeface="Calibri" pitchFamily="34" charset="0"/>
                           <a:ea typeface="Calibri" pitchFamily="34" charset="-122"/>
@@ -27068,7 +27068,7 @@
                       <a:r>
                         <a:rPr lang="en-US" sz="950" dirty="0">
                           <a:solidFill>
-                            <a:srgbClr val="1A1A1A"/>
+                            <a:srgbClr val="242C39"/>
                           </a:solidFill>
                           <a:latin typeface="Calibri" pitchFamily="34" charset="0"/>
                           <a:ea typeface="Calibri" pitchFamily="34" charset="-122"/>
@@ -27121,7 +27121,7 @@
                       <a:r>
                         <a:rPr lang="en-US" sz="950" dirty="0">
                           <a:solidFill>
-                            <a:srgbClr val="1A1A1A"/>
+                            <a:srgbClr val="242C39"/>
                           </a:solidFill>
                           <a:latin typeface="Calibri" pitchFamily="34" charset="0"/>
                           <a:ea typeface="Calibri" pitchFamily="34" charset="-122"/>
@@ -27227,7 +27227,7 @@
                       <a:r>
                         <a:rPr lang="en-US" sz="950" dirty="0">
                           <a:solidFill>
-                            <a:srgbClr val="1A1A1A"/>
+                            <a:srgbClr val="242C39"/>
                           </a:solidFill>
                           <a:latin typeface="Calibri" pitchFamily="34" charset="0"/>
                           <a:ea typeface="Calibri" pitchFamily="34" charset="-122"/>
@@ -27280,7 +27280,7 @@
                       <a:r>
                         <a:rPr lang="en-US" sz="950" dirty="0">
                           <a:solidFill>
-                            <a:srgbClr val="1A1A1A"/>
+                            <a:srgbClr val="242C39"/>
                           </a:solidFill>
                           <a:latin typeface="Calibri" pitchFamily="34" charset="0"/>
                           <a:ea typeface="Calibri" pitchFamily="34" charset="-122"/>
@@ -27333,7 +27333,7 @@
                       <a:r>
                         <a:rPr lang="en-US" sz="950" dirty="0">
                           <a:solidFill>
-                            <a:srgbClr val="1A1A1A"/>
+                            <a:srgbClr val="242C39"/>
                           </a:solidFill>
                           <a:latin typeface="Calibri" pitchFamily="34" charset="0"/>
                           <a:ea typeface="Calibri" pitchFamily="34" charset="-122"/>
@@ -27386,7 +27386,7 @@
                       <a:r>
                         <a:rPr lang="en-US" sz="950" dirty="0">
                           <a:solidFill>
-                            <a:srgbClr val="1A1A1A"/>
+                            <a:srgbClr val="242C39"/>
                           </a:solidFill>
                           <a:latin typeface="Calibri" pitchFamily="34" charset="0"/>
                           <a:ea typeface="Calibri" pitchFamily="34" charset="-122"/>
@@ -27446,7 +27446,7 @@
                       <a:r>
                         <a:rPr lang="en-US" sz="950" dirty="0">
                           <a:solidFill>
-                            <a:srgbClr val="1A1A1A"/>
+                            <a:srgbClr val="242C39"/>
                           </a:solidFill>
                           <a:latin typeface="Calibri" pitchFamily="34" charset="0"/>
                           <a:ea typeface="Calibri" pitchFamily="34" charset="-122"/>
@@ -27499,7 +27499,7 @@
                       <a:r>
                         <a:rPr lang="en-US" sz="950" dirty="0">
                           <a:solidFill>
-                            <a:srgbClr val="1A1A1A"/>
+                            <a:srgbClr val="242C39"/>
                           </a:solidFill>
                           <a:latin typeface="Calibri" pitchFamily="34" charset="0"/>
                           <a:ea typeface="Calibri" pitchFamily="34" charset="-122"/>
@@ -27552,7 +27552,7 @@
                       <a:r>
                         <a:rPr lang="en-US" sz="950" dirty="0">
                           <a:solidFill>
-                            <a:srgbClr val="1A1A1A"/>
+                            <a:srgbClr val="242C39"/>
                           </a:solidFill>
                           <a:latin typeface="Calibri" pitchFamily="34" charset="0"/>
                           <a:ea typeface="Calibri" pitchFamily="34" charset="-122"/>
@@ -27658,7 +27658,7 @@
                       <a:r>
                         <a:rPr lang="en-US" sz="950" dirty="0">
                           <a:solidFill>
-                            <a:srgbClr val="1A1A1A"/>
+                            <a:srgbClr val="242C39"/>
                           </a:solidFill>
                           <a:latin typeface="Calibri" pitchFamily="34" charset="0"/>
                           <a:ea typeface="Calibri" pitchFamily="34" charset="-122"/>
@@ -27711,7 +27711,7 @@
                       <a:r>
                         <a:rPr lang="en-US" sz="950" dirty="0">
                           <a:solidFill>
-                            <a:srgbClr val="1A1A1A"/>
+                            <a:srgbClr val="242C39"/>
                           </a:solidFill>
                           <a:latin typeface="Calibri" pitchFamily="34" charset="0"/>
                           <a:ea typeface="Calibri" pitchFamily="34" charset="-122"/>
@@ -27764,7 +27764,7 @@
                       <a:r>
                         <a:rPr lang="en-US" sz="950" dirty="0">
                           <a:solidFill>
-                            <a:srgbClr val="1A1A1A"/>
+                            <a:srgbClr val="242C39"/>
                           </a:solidFill>
                           <a:latin typeface="Calibri" pitchFamily="34" charset="0"/>
                           <a:ea typeface="Calibri" pitchFamily="34" charset="-122"/>
@@ -27817,7 +27817,7 @@
                       <a:r>
                         <a:rPr lang="en-US" sz="950" dirty="0">
                           <a:solidFill>
-                            <a:srgbClr val="1A1A1A"/>
+                            <a:srgbClr val="242C39"/>
                           </a:solidFill>
                           <a:latin typeface="Calibri" pitchFamily="34" charset="0"/>
                           <a:ea typeface="Calibri" pitchFamily="34" charset="-122"/>
@@ -27877,7 +27877,7 @@
                       <a:r>
                         <a:rPr lang="en-US" sz="950" dirty="0">
                           <a:solidFill>
-                            <a:srgbClr val="1A1A1A"/>
+                            <a:srgbClr val="242C39"/>
                           </a:solidFill>
                           <a:latin typeface="Calibri" pitchFamily="34" charset="0"/>
                           <a:ea typeface="Calibri" pitchFamily="34" charset="-122"/>
@@ -27930,7 +27930,7 @@
                       <a:r>
                         <a:rPr lang="en-US" sz="950" dirty="0">
                           <a:solidFill>
-                            <a:srgbClr val="1A1A1A"/>
+                            <a:srgbClr val="242C39"/>
                           </a:solidFill>
                           <a:latin typeface="Calibri" pitchFamily="34" charset="0"/>
                           <a:ea typeface="Calibri" pitchFamily="34" charset="-122"/>
@@ -27983,7 +27983,7 @@
                       <a:r>
                         <a:rPr lang="en-US" sz="950" dirty="0">
                           <a:solidFill>
-                            <a:srgbClr val="1A1A1A"/>
+                            <a:srgbClr val="242C39"/>
                           </a:solidFill>
                           <a:latin typeface="Calibri" pitchFamily="34" charset="0"/>
                           <a:ea typeface="Calibri" pitchFamily="34" charset="-122"/>
@@ -28089,7 +28089,7 @@
                       <a:r>
                         <a:rPr lang="en-US" sz="950" dirty="0">
                           <a:solidFill>
-                            <a:srgbClr val="1A1A1A"/>
+                            <a:srgbClr val="242C39"/>
                           </a:solidFill>
                           <a:latin typeface="Calibri" pitchFamily="34" charset="0"/>
                           <a:ea typeface="Calibri" pitchFamily="34" charset="-122"/>
@@ -28142,7 +28142,7 @@
                       <a:r>
                         <a:rPr lang="en-US" sz="950" dirty="0">
                           <a:solidFill>
-                            <a:srgbClr val="1A1A1A"/>
+                            <a:srgbClr val="242C39"/>
                           </a:solidFill>
                           <a:latin typeface="Calibri" pitchFamily="34" charset="0"/>
                           <a:ea typeface="Calibri" pitchFamily="34" charset="-122"/>
@@ -28195,7 +28195,7 @@
                       <a:r>
                         <a:rPr lang="en-US" sz="950" dirty="0">
                           <a:solidFill>
-                            <a:srgbClr val="1A1A1A"/>
+                            <a:srgbClr val="242C39"/>
                           </a:solidFill>
                           <a:latin typeface="Calibri" pitchFamily="34" charset="0"/>
                           <a:ea typeface="Calibri" pitchFamily="34" charset="-122"/>
@@ -28248,7 +28248,7 @@
                       <a:r>
                         <a:rPr lang="en-US" sz="950" dirty="0">
                           <a:solidFill>
-                            <a:srgbClr val="1A1A1A"/>
+                            <a:srgbClr val="242C39"/>
                           </a:solidFill>
                           <a:latin typeface="Calibri" pitchFamily="34" charset="0"/>
                           <a:ea typeface="Calibri" pitchFamily="34" charset="-122"/>
@@ -28308,7 +28308,7 @@
                       <a:r>
                         <a:rPr lang="en-US" sz="950" dirty="0">
                           <a:solidFill>
-                            <a:srgbClr val="1A1A1A"/>
+                            <a:srgbClr val="242C39"/>
                           </a:solidFill>
                           <a:latin typeface="Calibri" pitchFamily="34" charset="0"/>
                           <a:ea typeface="Calibri" pitchFamily="34" charset="-122"/>
@@ -28361,7 +28361,7 @@
                       <a:r>
                         <a:rPr lang="en-US" sz="950" dirty="0">
                           <a:solidFill>
-                            <a:srgbClr val="1A1A1A"/>
+                            <a:srgbClr val="242C39"/>
                           </a:solidFill>
                           <a:latin typeface="Calibri" pitchFamily="34" charset="0"/>
                           <a:ea typeface="Calibri" pitchFamily="34" charset="-122"/>
@@ -28414,7 +28414,7 @@
                       <a:r>
                         <a:rPr lang="en-US" sz="950" dirty="0">
                           <a:solidFill>
-                            <a:srgbClr val="1A1A1A"/>
+                            <a:srgbClr val="242C39"/>
                           </a:solidFill>
                           <a:latin typeface="Calibri" pitchFamily="34" charset="0"/>
                           <a:ea typeface="Calibri" pitchFamily="34" charset="-122"/>
@@ -28520,7 +28520,7 @@
                       <a:r>
                         <a:rPr lang="en-US" sz="950" dirty="0">
                           <a:solidFill>
-                            <a:srgbClr val="1A1A1A"/>
+                            <a:srgbClr val="242C39"/>
                           </a:solidFill>
                           <a:latin typeface="Calibri" pitchFamily="34" charset="0"/>
                           <a:ea typeface="Calibri" pitchFamily="34" charset="-122"/>
@@ -28573,7 +28573,7 @@
                       <a:r>
                         <a:rPr lang="en-US" sz="950" dirty="0">
                           <a:solidFill>
-                            <a:srgbClr val="1A1A1A"/>
+                            <a:srgbClr val="242C39"/>
                           </a:solidFill>
                           <a:latin typeface="Calibri" pitchFamily="34" charset="0"/>
                           <a:ea typeface="Calibri" pitchFamily="34" charset="-122"/>
@@ -28626,7 +28626,7 @@
                       <a:r>
                         <a:rPr lang="en-US" sz="950" dirty="0">
                           <a:solidFill>
-                            <a:srgbClr val="1A1A1A"/>
+                            <a:srgbClr val="242C39"/>
                           </a:solidFill>
                           <a:latin typeface="Calibri" pitchFamily="34" charset="0"/>
                           <a:ea typeface="Calibri" pitchFamily="34" charset="-122"/>
@@ -28679,7 +28679,7 @@
                       <a:r>
                         <a:rPr lang="en-US" sz="950" dirty="0">
                           <a:solidFill>
-                            <a:srgbClr val="1A1A1A"/>
+                            <a:srgbClr val="242C39"/>
                           </a:solidFill>
                           <a:latin typeface="Calibri" pitchFamily="34" charset="0"/>
                           <a:ea typeface="Calibri" pitchFamily="34" charset="-122"/>
@@ -28739,7 +28739,7 @@
                       <a:r>
                         <a:rPr lang="en-US" sz="950" dirty="0">
                           <a:solidFill>
-                            <a:srgbClr val="1A1A1A"/>
+                            <a:srgbClr val="242C39"/>
                           </a:solidFill>
                           <a:latin typeface="Calibri" pitchFamily="34" charset="0"/>
                           <a:ea typeface="Calibri" pitchFamily="34" charset="-122"/>
@@ -28792,7 +28792,7 @@
                       <a:r>
                         <a:rPr lang="en-US" sz="950" dirty="0">
                           <a:solidFill>
-                            <a:srgbClr val="1A1A1A"/>
+                            <a:srgbClr val="242C39"/>
                           </a:solidFill>
                           <a:latin typeface="Calibri" pitchFamily="34" charset="0"/>
                           <a:ea typeface="Calibri" pitchFamily="34" charset="-122"/>
@@ -28845,7 +28845,7 @@
                       <a:r>
                         <a:rPr lang="en-US" sz="950" dirty="0">
                           <a:solidFill>
-                            <a:srgbClr val="1A1A1A"/>
+                            <a:srgbClr val="242C39"/>
                           </a:solidFill>
                           <a:latin typeface="Calibri" pitchFamily="34" charset="0"/>
                           <a:ea typeface="Calibri" pitchFamily="34" charset="-122"/>
@@ -28951,7 +28951,7 @@
                       <a:r>
                         <a:rPr lang="en-US" sz="950" dirty="0">
                           <a:solidFill>
-                            <a:srgbClr val="1A1A1A"/>
+                            <a:srgbClr val="242C39"/>
                           </a:solidFill>
                           <a:latin typeface="Calibri" pitchFamily="34" charset="0"/>
                           <a:ea typeface="Calibri" pitchFamily="34" charset="-122"/>
@@ -29004,7 +29004,7 @@
                       <a:r>
                         <a:rPr lang="en-US" sz="950" dirty="0">
                           <a:solidFill>
-                            <a:srgbClr val="1A1A1A"/>
+                            <a:srgbClr val="242C39"/>
                           </a:solidFill>
                           <a:latin typeface="Calibri" pitchFamily="34" charset="0"/>
                           <a:ea typeface="Calibri" pitchFamily="34" charset="-122"/>
@@ -29057,7 +29057,7 @@
                       <a:r>
                         <a:rPr lang="en-US" sz="950" dirty="0">
                           <a:solidFill>
-                            <a:srgbClr val="1A1A1A"/>
+                            <a:srgbClr val="242C39"/>
                           </a:solidFill>
                           <a:latin typeface="Calibri" pitchFamily="34" charset="0"/>
                           <a:ea typeface="Calibri" pitchFamily="34" charset="-122"/>
@@ -29110,7 +29110,7 @@
                       <a:r>
                         <a:rPr lang="en-US" sz="950" dirty="0">
                           <a:solidFill>
-                            <a:srgbClr val="1A1A1A"/>
+                            <a:srgbClr val="242C39"/>
                           </a:solidFill>
                           <a:latin typeface="Calibri" pitchFamily="34" charset="0"/>
                           <a:ea typeface="Calibri" pitchFamily="34" charset="-122"/>
@@ -29170,7 +29170,7 @@
                       <a:r>
                         <a:rPr lang="en-US" sz="950" dirty="0">
                           <a:solidFill>
-                            <a:srgbClr val="1A1A1A"/>
+                            <a:srgbClr val="242C39"/>
                           </a:solidFill>
                           <a:latin typeface="Calibri" pitchFamily="34" charset="0"/>
                           <a:ea typeface="Calibri" pitchFamily="34" charset="-122"/>
@@ -29223,7 +29223,7 @@
                       <a:r>
                         <a:rPr lang="en-US" sz="950" dirty="0">
                           <a:solidFill>
-                            <a:srgbClr val="1A1A1A"/>
+                            <a:srgbClr val="242C39"/>
                           </a:solidFill>
                           <a:latin typeface="Calibri" pitchFamily="34" charset="0"/>
                           <a:ea typeface="Calibri" pitchFamily="34" charset="-122"/>
@@ -29276,7 +29276,7 @@
                       <a:r>
                         <a:rPr lang="en-US" sz="950" dirty="0">
                           <a:solidFill>
-                            <a:srgbClr val="1A1A1A"/>
+                            <a:srgbClr val="242C39"/>
                           </a:solidFill>
                           <a:latin typeface="Calibri" pitchFamily="34" charset="0"/>
                           <a:ea typeface="Calibri" pitchFamily="34" charset="-122"/>
@@ -29382,7 +29382,7 @@
                       <a:r>
                         <a:rPr lang="en-US" sz="950" dirty="0">
                           <a:solidFill>
-                            <a:srgbClr val="1A1A1A"/>
+                            <a:srgbClr val="242C39"/>
                           </a:solidFill>
                           <a:latin typeface="Calibri" pitchFamily="34" charset="0"/>
                           <a:ea typeface="Calibri" pitchFamily="34" charset="-122"/>
@@ -29477,7 +29477,7 @@
                       <a:r>
                         <a:rPr lang="en-US" sz="950" dirty="0">
                           <a:solidFill>
-                            <a:srgbClr val="1A1A1A"/>
+                            <a:srgbClr val="242C39"/>
                           </a:solidFill>
                           <a:latin typeface="Calibri" pitchFamily="34" charset="0"/>
                           <a:ea typeface="Calibri" pitchFamily="34" charset="-122"/>
@@ -29590,7 +29590,7 @@
                       <a:r>
                         <a:rPr lang="en-US" sz="950" b="1" dirty="0">
                           <a:solidFill>
-                            <a:srgbClr val="1A1A1A"/>
+                            <a:srgbClr val="242C39"/>
                           </a:solidFill>
                           <a:latin typeface="Calibri" pitchFamily="34" charset="0"/>
                           <a:ea typeface="Calibri" pitchFamily="34" charset="-122"/>
@@ -29646,7 +29646,7 @@
                       <a:r>
                         <a:rPr lang="en-US" sz="950" b="1" dirty="0">
                           <a:solidFill>
-                            <a:srgbClr val="1A1A1A"/>
+                            <a:srgbClr val="242C39"/>
                           </a:solidFill>
                           <a:latin typeface="Calibri" pitchFamily="34" charset="0"/>
                           <a:ea typeface="Calibri" pitchFamily="34" charset="-122"/>
@@ -29702,7 +29702,7 @@
                       <a:r>
                         <a:rPr lang="en-US" sz="950" b="1" dirty="0">
                           <a:solidFill>
-                            <a:srgbClr val="1A1A1A"/>
+                            <a:srgbClr val="242C39"/>
                           </a:solidFill>
                           <a:latin typeface="Calibri" pitchFamily="34" charset="0"/>
                           <a:ea typeface="Calibri" pitchFamily="34" charset="-122"/>
@@ -29814,7 +29814,7 @@
                       <a:r>
                         <a:rPr lang="en-US" sz="950" b="1" dirty="0">
                           <a:solidFill>
-                            <a:srgbClr val="1A1A1A"/>
+                            <a:srgbClr val="242C39"/>
                           </a:solidFill>
                           <a:latin typeface="Calibri" pitchFamily="34" charset="0"/>
                           <a:ea typeface="Calibri" pitchFamily="34" charset="-122"/>
@@ -29870,7 +29870,7 @@
                       <a:r>
                         <a:rPr lang="en-US" sz="950" b="1" dirty="0">
                           <a:solidFill>
-                            <a:srgbClr val="1A1A1A"/>
+                            <a:srgbClr val="242C39"/>
                           </a:solidFill>
                           <a:latin typeface="Calibri" pitchFamily="34" charset="0"/>
                           <a:ea typeface="Calibri" pitchFamily="34" charset="-122"/>
@@ -29926,7 +29926,7 @@
                       <a:r>
                         <a:rPr lang="en-US" sz="950" b="1" dirty="0">
                           <a:solidFill>
-                            <a:srgbClr val="1A1A1A"/>
+                            <a:srgbClr val="242C39"/>
                           </a:solidFill>
                           <a:latin typeface="Calibri" pitchFamily="34" charset="0"/>
                           <a:ea typeface="Calibri" pitchFamily="34" charset="-122"/>
@@ -29982,7 +29982,7 @@
                       <a:r>
                         <a:rPr lang="en-US" sz="950" b="1" dirty="0">
                           <a:solidFill>
-                            <a:srgbClr val="1A1A1A"/>
+                            <a:srgbClr val="242C39"/>
                           </a:solidFill>
                           <a:latin typeface="Calibri" pitchFamily="34" charset="0"/>
                           <a:ea typeface="Calibri" pitchFamily="34" charset="-122"/>
@@ -30064,7 +30064,7 @@
             <a:r>
               <a:rPr lang="en-US" sz="900" dirty="0">
                 <a:solidFill>
-                  <a:srgbClr val="5F6670"/>
+                  <a:srgbClr val="242C39"/>
                 </a:solidFill>
                 <a:latin typeface="Calibri" pitchFamily="34" charset="0"/>
                 <a:ea typeface="Calibri" pitchFamily="34" charset="-122"/>
@@ -30178,7 +30178,7 @@
             <a:r>
               <a:rPr lang="en-US" sz="1050" dirty="0">
                 <a:solidFill>
-                  <a:srgbClr val="5F6670"/>
+                  <a:srgbClr val="242C39"/>
                 </a:solidFill>
                 <a:latin typeface="Calibri" pitchFamily="34" charset="0"/>
                 <a:ea typeface="Calibri" pitchFamily="34" charset="-122"/>
@@ -30199,7 +30199,7 @@
             <a:r>
               <a:rPr lang="en-US" sz="1050" dirty="0">
                 <a:solidFill>
-                  <a:srgbClr val="5F6670"/>
+                  <a:srgbClr val="242C39"/>
                 </a:solidFill>
                 <a:latin typeface="Calibri" pitchFamily="34" charset="0"/>
                 <a:ea typeface="Calibri" pitchFamily="34" charset="-122"/>
@@ -30220,7 +30220,7 @@
             <a:r>
               <a:rPr lang="en-US" sz="1050" dirty="0">
                 <a:solidFill>
-                  <a:srgbClr val="5F6670"/>
+                  <a:srgbClr val="242C39"/>
                 </a:solidFill>
                 <a:latin typeface="Calibri" pitchFamily="34" charset="0"/>
                 <a:ea typeface="Calibri" pitchFamily="34" charset="-122"/>
@@ -30241,7 +30241,7 @@
             <a:r>
               <a:rPr lang="en-US" sz="1050" dirty="0">
                 <a:solidFill>
-                  <a:srgbClr val="5F6670"/>
+                  <a:srgbClr val="242C39"/>
                 </a:solidFill>
                 <a:latin typeface="Calibri" pitchFamily="34" charset="0"/>
                 <a:ea typeface="Calibri" pitchFamily="34" charset="-122"/>
@@ -30262,7 +30262,7 @@
             <a:r>
               <a:rPr lang="en-US" sz="1050" dirty="0">
                 <a:solidFill>
-                  <a:srgbClr val="5F6670"/>
+                  <a:srgbClr val="242C39"/>
                 </a:solidFill>
                 <a:latin typeface="Calibri" pitchFamily="34" charset="0"/>
                 <a:ea typeface="Calibri" pitchFamily="34" charset="-122"/>
@@ -30304,7 +30304,7 @@
             <a:lvl1pPr>
               <a:defRPr sz="900">
                 <a:solidFill>
-                  <a:srgbClr val="5F6670"/>
+                  <a:srgbClr val="242C39"/>
                 </a:solidFill>
                 <a:latin typeface="Calibri"/>
                 <a:ea typeface="Calibri"/>
@@ -30421,7 +30421,7 @@
             <a:r>
               <a:rPr lang="en-US" sz="2800" b="1" dirty="0">
                 <a:solidFill>
-                  <a:srgbClr val="1A1A1A"/>
+                  <a:srgbClr val="242C39"/>
                 </a:solidFill>
                 <a:latin typeface="Calibri" pitchFamily="34" charset="0"/>
                 <a:ea typeface="Calibri" pitchFamily="34" charset="-122"/>
@@ -30535,7 +30535,7 @@
             <a:r>
               <a:rPr lang="en-US" sz="1050" dirty="0">
                 <a:solidFill>
-                  <a:srgbClr val="5F6670"/>
+                  <a:srgbClr val="242C39"/>
                 </a:solidFill>
                 <a:latin typeface="Calibri" pitchFamily="34" charset="0"/>
                 <a:ea typeface="Calibri" pitchFamily="34" charset="-122"/>
@@ -30556,7 +30556,7 @@
             <a:r>
               <a:rPr lang="en-US" sz="1050" dirty="0">
                 <a:solidFill>
-                  <a:srgbClr val="5F6670"/>
+                  <a:srgbClr val="242C39"/>
                 </a:solidFill>
                 <a:latin typeface="Calibri" pitchFamily="34" charset="0"/>
                 <a:ea typeface="Calibri" pitchFamily="34" charset="-122"/>
@@ -30577,7 +30577,7 @@
             <a:r>
               <a:rPr lang="en-US" sz="1050" dirty="0">
                 <a:solidFill>
-                  <a:srgbClr val="5F6670"/>
+                  <a:srgbClr val="242C39"/>
                 </a:solidFill>
                 <a:latin typeface="Calibri" pitchFamily="34" charset="0"/>
                 <a:ea typeface="Calibri" pitchFamily="34" charset="-122"/>
@@ -30598,7 +30598,7 @@
             <a:r>
               <a:rPr lang="en-US" sz="1050" dirty="0">
                 <a:solidFill>
-                  <a:srgbClr val="5F6670"/>
+                  <a:srgbClr val="242C39"/>
                 </a:solidFill>
                 <a:latin typeface="Calibri" pitchFamily="34" charset="0"/>
                 <a:ea typeface="Calibri" pitchFamily="34" charset="-122"/>
@@ -30619,7 +30619,7 @@
             <a:r>
               <a:rPr lang="en-US" sz="1050" dirty="0">
                 <a:solidFill>
-                  <a:srgbClr val="5F6670"/>
+                  <a:srgbClr val="242C39"/>
                 </a:solidFill>
                 <a:latin typeface="Calibri" pitchFamily="34" charset="0"/>
                 <a:ea typeface="Calibri" pitchFamily="34" charset="-122"/>
@@ -30661,7 +30661,7 @@
             <a:lvl1pPr>
               <a:defRPr sz="900">
                 <a:solidFill>
-                  <a:srgbClr val="5F6670"/>
+                  <a:srgbClr val="242C39"/>
                 </a:solidFill>
                 <a:latin typeface="Calibri"/>
                 <a:ea typeface="Calibri"/>
@@ -30802,7 +30802,7 @@
             <a:r>
               <a:rPr lang="en-US" sz="2800" b="1" dirty="0">
                 <a:solidFill>
-                  <a:srgbClr val="1A1A1A"/>
+                  <a:srgbClr val="242C39"/>
                 </a:solidFill>
                 <a:latin typeface="Calibri" pitchFamily="34" charset="0"/>
                 <a:ea typeface="Calibri" pitchFamily="34" charset="-122"/>
@@ -30912,7 +30912,7 @@
             <a:r>
               <a:rPr lang="en-US" sz="900" dirty="0">
                 <a:solidFill>
-                  <a:srgbClr val="5F6670"/>
+                  <a:srgbClr val="242C39"/>
                 </a:solidFill>
                 <a:latin typeface="Calibri" pitchFamily="34" charset="0"/>
                 <a:ea typeface="Calibri" pitchFamily="34" charset="-122"/>
@@ -31022,7 +31022,7 @@
             <a:r>
               <a:rPr lang="en-US" sz="900" dirty="0">
                 <a:solidFill>
-                  <a:srgbClr val="5F6670"/>
+                  <a:srgbClr val="242C39"/>
                 </a:solidFill>
                 <a:latin typeface="Calibri" pitchFamily="34" charset="0"/>
                 <a:ea typeface="Calibri" pitchFamily="34" charset="-122"/>
@@ -31093,7 +31093,7 @@
             <a:r>
               <a:rPr lang="en-US" sz="2200" b="1" dirty="0">
                 <a:solidFill>
-                  <a:srgbClr val="1A1A1A"/>
+                  <a:srgbClr val="242C39"/>
                 </a:solidFill>
                 <a:latin typeface="Calibri" pitchFamily="34" charset="0"/>
                 <a:ea typeface="Calibri" pitchFamily="34" charset="-122"/>
@@ -31132,7 +31132,7 @@
             <a:r>
               <a:rPr lang="en-US" sz="900" dirty="0">
                 <a:solidFill>
-                  <a:srgbClr val="5F6670"/>
+                  <a:srgbClr val="242C39"/>
                 </a:solidFill>
                 <a:latin typeface="Calibri" pitchFamily="34" charset="0"/>
                 <a:ea typeface="Calibri" pitchFamily="34" charset="-122"/>
@@ -31257,7 +31257,7 @@
                       <a:tailEnd type="none" w="med" len="med"/>
                     </a:lnB>
                     <a:solidFill>
-                      <a:srgbClr val="1A1A1A"/>
+                      <a:srgbClr val="242C39"/>
                     </a:solidFill>
                   </a:tcPr>
                 </a:tc>
@@ -31307,7 +31307,7 @@
                       <a:tailEnd type="none" w="med" len="med"/>
                     </a:lnB>
                     <a:solidFill>
-                      <a:srgbClr val="1A1A1A"/>
+                      <a:srgbClr val="242C39"/>
                     </a:solidFill>
                   </a:tcPr>
                 </a:tc>
@@ -31357,7 +31357,7 @@
                       <a:tailEnd type="none" w="med" len="med"/>
                     </a:lnB>
                     <a:solidFill>
-                      <a:srgbClr val="1A1A1A"/>
+                      <a:srgbClr val="242C39"/>
                     </a:solidFill>
                   </a:tcPr>
                 </a:tc>
@@ -31407,7 +31407,7 @@
                       <a:tailEnd type="none" w="med" len="med"/>
                     </a:lnB>
                     <a:solidFill>
-                      <a:srgbClr val="1A1A1A"/>
+                      <a:srgbClr val="242C39"/>
                     </a:solidFill>
                   </a:tcPr>
                 </a:tc>
@@ -31457,7 +31457,7 @@
                       <a:tailEnd type="none" w="med" len="med"/>
                     </a:lnB>
                     <a:solidFill>
-                      <a:srgbClr val="1A1A1A"/>
+                      <a:srgbClr val="242C39"/>
                     </a:solidFill>
                   </a:tcPr>
                 </a:tc>
@@ -31507,7 +31507,7 @@
                       <a:tailEnd type="none" w="med" len="med"/>
                     </a:lnB>
                     <a:solidFill>
-                      <a:srgbClr val="1A1A1A"/>
+                      <a:srgbClr val="242C39"/>
                     </a:solidFill>
                   </a:tcPr>
                 </a:tc>
@@ -31529,7 +31529,7 @@
                       <a:r>
                         <a:rPr lang="en-US" sz="850" dirty="0">
                           <a:solidFill>
-                            <a:srgbClr val="1A1A1A"/>
+                            <a:srgbClr val="242C39"/>
                           </a:solidFill>
                           <a:latin typeface="Calibri" pitchFamily="34" charset="0"/>
                           <a:ea typeface="Calibri" pitchFamily="34" charset="-122"/>
@@ -31582,7 +31582,7 @@
                       <a:r>
                         <a:rPr lang="en-US" sz="850" dirty="0">
                           <a:solidFill>
-                            <a:srgbClr val="1A1A1A"/>
+                            <a:srgbClr val="242C39"/>
                           </a:solidFill>
                           <a:latin typeface="Calibri" pitchFamily="34" charset="0"/>
                           <a:ea typeface="Calibri" pitchFamily="34" charset="-122"/>
@@ -31635,7 +31635,7 @@
                       <a:r>
                         <a:rPr lang="en-US" sz="850" dirty="0">
                           <a:solidFill>
-                            <a:srgbClr val="1A1A1A"/>
+                            <a:srgbClr val="242C39"/>
                           </a:solidFill>
                           <a:latin typeface="Calibri" pitchFamily="34" charset="0"/>
                           <a:ea typeface="Calibri" pitchFamily="34" charset="-122"/>
@@ -31854,7 +31854,7 @@
                       <a:r>
                         <a:rPr lang="en-US" sz="850" dirty="0">
                           <a:solidFill>
-                            <a:srgbClr val="1A1A1A"/>
+                            <a:srgbClr val="242C39"/>
                           </a:solidFill>
                           <a:latin typeface="Calibri" pitchFamily="34" charset="0"/>
                           <a:ea typeface="Calibri" pitchFamily="34" charset="-122"/>
@@ -31907,7 +31907,7 @@
                       <a:r>
                         <a:rPr lang="en-US" sz="850" dirty="0">
                           <a:solidFill>
-                            <a:srgbClr val="1A1A1A"/>
+                            <a:srgbClr val="242C39"/>
                           </a:solidFill>
                           <a:latin typeface="Calibri" pitchFamily="34" charset="0"/>
                           <a:ea typeface="Calibri" pitchFamily="34" charset="-122"/>
@@ -31960,7 +31960,7 @@
                       <a:r>
                         <a:rPr lang="en-US" sz="850" dirty="0">
                           <a:solidFill>
-                            <a:srgbClr val="1A1A1A"/>
+                            <a:srgbClr val="242C39"/>
                           </a:solidFill>
                           <a:latin typeface="Calibri" pitchFamily="34" charset="0"/>
                           <a:ea typeface="Calibri" pitchFamily="34" charset="-122"/>
@@ -32179,7 +32179,7 @@
                       <a:r>
                         <a:rPr lang="en-US" sz="850" dirty="0">
                           <a:solidFill>
-                            <a:srgbClr val="1A1A1A"/>
+                            <a:srgbClr val="242C39"/>
                           </a:solidFill>
                           <a:latin typeface="Calibri" pitchFamily="34" charset="0"/>
                           <a:ea typeface="Calibri" pitchFamily="34" charset="-122"/>
@@ -32232,7 +32232,7 @@
                       <a:r>
                         <a:rPr lang="en-US" sz="850" dirty="0">
                           <a:solidFill>
-                            <a:srgbClr val="1A1A1A"/>
+                            <a:srgbClr val="242C39"/>
                           </a:solidFill>
                           <a:latin typeface="Calibri" pitchFamily="34" charset="0"/>
                           <a:ea typeface="Calibri" pitchFamily="34" charset="-122"/>
@@ -32285,7 +32285,7 @@
                       <a:r>
                         <a:rPr lang="en-US" sz="850" dirty="0">
                           <a:solidFill>
-                            <a:srgbClr val="1A1A1A"/>
+                            <a:srgbClr val="242C39"/>
                           </a:solidFill>
                           <a:latin typeface="Calibri" pitchFamily="34" charset="0"/>
                           <a:ea typeface="Calibri" pitchFamily="34" charset="-122"/>
@@ -32504,7 +32504,7 @@
                       <a:r>
                         <a:rPr lang="en-US" sz="850" dirty="0">
                           <a:solidFill>
-                            <a:srgbClr val="1A1A1A"/>
+                            <a:srgbClr val="242C39"/>
                           </a:solidFill>
                           <a:latin typeface="Calibri" pitchFamily="34" charset="0"/>
                           <a:ea typeface="Calibri" pitchFamily="34" charset="-122"/>
@@ -32557,7 +32557,7 @@
                       <a:r>
                         <a:rPr lang="en-US" sz="850" dirty="0">
                           <a:solidFill>
-                            <a:srgbClr val="1A1A1A"/>
+                            <a:srgbClr val="242C39"/>
                           </a:solidFill>
                           <a:latin typeface="Calibri" pitchFamily="34" charset="0"/>
                           <a:ea typeface="Calibri" pitchFamily="34" charset="-122"/>
@@ -32610,7 +32610,7 @@
                       <a:r>
                         <a:rPr lang="en-US" sz="850" dirty="0">
                           <a:solidFill>
-                            <a:srgbClr val="1A1A1A"/>
+                            <a:srgbClr val="242C39"/>
                           </a:solidFill>
                           <a:latin typeface="Calibri" pitchFamily="34" charset="0"/>
                           <a:ea typeface="Calibri" pitchFamily="34" charset="-122"/>
@@ -32716,7 +32716,7 @@
                       <a:r>
                         <a:rPr lang="en-US" sz="850" dirty="0">
                           <a:solidFill>
-                            <a:srgbClr val="1A1A1A"/>
+                            <a:srgbClr val="242C39"/>
                           </a:solidFill>
                           <a:latin typeface="Calibri" pitchFamily="34" charset="0"/>
                           <a:ea typeface="Calibri" pitchFamily="34" charset="-122"/>
@@ -32769,7 +32769,7 @@
                       <a:r>
                         <a:rPr lang="en-US" sz="850" b="1" dirty="0">
                           <a:solidFill>
-                            <a:srgbClr val="5F6670"/>
+                            <a:srgbClr val="242C39"/>
                           </a:solidFill>
                           <a:latin typeface="Calibri" pitchFamily="34" charset="0"/>
                           <a:ea typeface="Calibri" pitchFamily="34" charset="-122"/>
@@ -32829,7 +32829,7 @@
                       <a:r>
                         <a:rPr lang="en-US" sz="850" dirty="0">
                           <a:solidFill>
-                            <a:srgbClr val="1A1A1A"/>
+                            <a:srgbClr val="242C39"/>
                           </a:solidFill>
                           <a:latin typeface="Calibri" pitchFamily="34" charset="0"/>
                           <a:ea typeface="Calibri" pitchFamily="34" charset="-122"/>
@@ -32882,7 +32882,7 @@
                       <a:r>
                         <a:rPr lang="en-US" sz="850" dirty="0">
                           <a:solidFill>
-                            <a:srgbClr val="1A1A1A"/>
+                            <a:srgbClr val="242C39"/>
                           </a:solidFill>
                           <a:latin typeface="Calibri" pitchFamily="34" charset="0"/>
                           <a:ea typeface="Calibri" pitchFamily="34" charset="-122"/>
@@ -32935,7 +32935,7 @@
                       <a:r>
                         <a:rPr lang="en-US" sz="850" dirty="0">
                           <a:solidFill>
-                            <a:srgbClr val="1A1A1A"/>
+                            <a:srgbClr val="242C39"/>
                           </a:solidFill>
                           <a:latin typeface="Calibri" pitchFamily="34" charset="0"/>
                           <a:ea typeface="Calibri" pitchFamily="34" charset="-122"/>
@@ -33041,7 +33041,7 @@
                       <a:r>
                         <a:rPr lang="en-US" sz="850" dirty="0">
                           <a:solidFill>
-                            <a:srgbClr val="1A1A1A"/>
+                            <a:srgbClr val="242C39"/>
                           </a:solidFill>
                           <a:latin typeface="Calibri" pitchFamily="34" charset="0"/>
                           <a:ea typeface="Calibri" pitchFamily="34" charset="-122"/>
@@ -33094,7 +33094,7 @@
                       <a:r>
                         <a:rPr lang="en-US" sz="850" b="1" dirty="0">
                           <a:solidFill>
-                            <a:srgbClr val="5F6670"/>
+                            <a:srgbClr val="242C39"/>
                           </a:solidFill>
                           <a:latin typeface="Calibri" pitchFamily="34" charset="0"/>
                           <a:ea typeface="Calibri" pitchFamily="34" charset="-122"/>
@@ -33248,7 +33248,7 @@
             <a:r>
               <a:rPr lang="en-US" sz="1050" dirty="0">
                 <a:solidFill>
-                  <a:srgbClr val="5F6670"/>
+                  <a:srgbClr val="242C39"/>
                 </a:solidFill>
                 <a:latin typeface="Calibri" pitchFamily="34" charset="0"/>
                 <a:ea typeface="Calibri" pitchFamily="34" charset="-122"/>
@@ -33269,7 +33269,7 @@
             <a:r>
               <a:rPr lang="en-US" sz="1050" dirty="0">
                 <a:solidFill>
-                  <a:srgbClr val="5F6670"/>
+                  <a:srgbClr val="242C39"/>
                 </a:solidFill>
                 <a:latin typeface="Calibri" pitchFamily="34" charset="0"/>
                 <a:ea typeface="Calibri" pitchFamily="34" charset="-122"/>
@@ -33290,7 +33290,7 @@
             <a:r>
               <a:rPr lang="en-US" sz="1050" dirty="0">
                 <a:solidFill>
-                  <a:srgbClr val="5F6670"/>
+                  <a:srgbClr val="242C39"/>
                 </a:solidFill>
                 <a:latin typeface="Calibri" pitchFamily="34" charset="0"/>
                 <a:ea typeface="Calibri" pitchFamily="34" charset="-122"/>
@@ -33311,7 +33311,7 @@
             <a:r>
               <a:rPr lang="en-US" sz="1050" dirty="0">
                 <a:solidFill>
-                  <a:srgbClr val="5F6670"/>
+                  <a:srgbClr val="242C39"/>
                 </a:solidFill>
                 <a:latin typeface="Calibri" pitchFamily="34" charset="0"/>
                 <a:ea typeface="Calibri" pitchFamily="34" charset="-122"/>
@@ -33332,7 +33332,7 @@
             <a:r>
               <a:rPr lang="en-US" sz="1050" dirty="0">
                 <a:solidFill>
-                  <a:srgbClr val="5F6670"/>
+                  <a:srgbClr val="242C39"/>
                 </a:solidFill>
                 <a:latin typeface="Calibri" pitchFamily="34" charset="0"/>
                 <a:ea typeface="Calibri" pitchFamily="34" charset="-122"/>
@@ -33374,7 +33374,7 @@
             <a:lvl1pPr>
               <a:defRPr sz="900">
                 <a:solidFill>
-                  <a:srgbClr val="5F6670"/>
+                  <a:srgbClr val="242C39"/>
                 </a:solidFill>
                 <a:latin typeface="Calibri"/>
                 <a:ea typeface="Calibri"/>
@@ -33472,7 +33472,7 @@
             <a:r>
               <a:rPr lang="en-US" sz="4800" b="1" dirty="0">
                 <a:solidFill>
-                  <a:srgbClr val="1A1A1A"/>
+                  <a:srgbClr val="242C39"/>
                 </a:solidFill>
                 <a:latin typeface="Calibri" pitchFamily="34" charset="0"/>
                 <a:ea typeface="Calibri" pitchFamily="34" charset="-122"/>
@@ -33717,7 +33717,7 @@
             <a:r>
               <a:rPr lang="en-US" sz="2800" b="1" dirty="0">
                 <a:solidFill>
-                  <a:srgbClr val="1A1A1A"/>
+                  <a:srgbClr val="242C39"/>
                 </a:solidFill>
                 <a:latin typeface="Calibri" pitchFamily="34" charset="0"/>
                 <a:ea typeface="Calibri" pitchFamily="34" charset="-122"/>
@@ -33842,7 +33842,7 @@
                       <a:tailEnd type="none" w="med" len="med"/>
                     </a:lnB>
                     <a:solidFill>
-                      <a:srgbClr val="1A1A1A"/>
+                      <a:srgbClr val="242C39"/>
                     </a:solidFill>
                   </a:tcPr>
                 </a:tc>
@@ -33892,7 +33892,7 @@
                       <a:tailEnd type="none" w="med" len="med"/>
                     </a:lnB>
                     <a:solidFill>
-                      <a:srgbClr val="1A1A1A"/>
+                      <a:srgbClr val="242C39"/>
                     </a:solidFill>
                   </a:tcPr>
                 </a:tc>
@@ -33942,7 +33942,7 @@
                       <a:tailEnd type="none" w="med" len="med"/>
                     </a:lnB>
                     <a:solidFill>
-                      <a:srgbClr val="1A1A1A"/>
+                      <a:srgbClr val="242C39"/>
                     </a:solidFill>
                   </a:tcPr>
                 </a:tc>
@@ -33992,7 +33992,7 @@
                       <a:tailEnd type="none" w="med" len="med"/>
                     </a:lnB>
                     <a:solidFill>
-                      <a:srgbClr val="1A1A1A"/>
+                      <a:srgbClr val="242C39"/>
                     </a:solidFill>
                   </a:tcPr>
                 </a:tc>
@@ -34042,7 +34042,7 @@
                       <a:tailEnd type="none" w="med" len="med"/>
                     </a:lnB>
                     <a:solidFill>
-                      <a:srgbClr val="1A1A1A"/>
+                      <a:srgbClr val="242C39"/>
                     </a:solidFill>
                   </a:tcPr>
                 </a:tc>
@@ -34092,7 +34092,7 @@
                       <a:tailEnd type="none" w="med" len="med"/>
                     </a:lnB>
                     <a:solidFill>
-                      <a:srgbClr val="1A1A1A"/>
+                      <a:srgbClr val="242C39"/>
                     </a:solidFill>
                   </a:tcPr>
                 </a:tc>
@@ -34114,7 +34114,7 @@
                       <a:r>
                         <a:rPr lang="en-US" sz="950" dirty="0">
                           <a:solidFill>
-                            <a:srgbClr val="1A1A1A"/>
+                            <a:srgbClr val="242C39"/>
                           </a:solidFill>
                           <a:latin typeface="Calibri" pitchFamily="34" charset="0"/>
                           <a:ea typeface="Calibri" pitchFamily="34" charset="-122"/>
@@ -34167,7 +34167,7 @@
                       <a:r>
                         <a:rPr lang="en-US" sz="950" dirty="0">
                           <a:solidFill>
-                            <a:srgbClr val="1A1A1A"/>
+                            <a:srgbClr val="242C39"/>
                           </a:solidFill>
                           <a:latin typeface="Calibri" pitchFamily="34" charset="0"/>
                           <a:ea typeface="Calibri" pitchFamily="34" charset="-122"/>
@@ -34220,7 +34220,7 @@
                       <a:r>
                         <a:rPr lang="en-US" sz="950" dirty="0">
                           <a:solidFill>
-                            <a:srgbClr val="1A1A1A"/>
+                            <a:srgbClr val="242C39"/>
                           </a:solidFill>
                           <a:latin typeface="Calibri" pitchFamily="34" charset="0"/>
                           <a:ea typeface="Calibri" pitchFamily="34" charset="-122"/>
@@ -34273,7 +34273,7 @@
                       <a:r>
                         <a:rPr lang="en-US" sz="950" dirty="0">
                           <a:solidFill>
-                            <a:srgbClr val="1A1A1A"/>
+                            <a:srgbClr val="242C39"/>
                           </a:solidFill>
                           <a:latin typeface="Calibri" pitchFamily="34" charset="0"/>
                           <a:ea typeface="Calibri" pitchFamily="34" charset="-122"/>
@@ -34439,7 +34439,7 @@
                       <a:r>
                         <a:rPr lang="en-US" sz="950" dirty="0">
                           <a:solidFill>
-                            <a:srgbClr val="1A1A1A"/>
+                            <a:srgbClr val="242C39"/>
                           </a:solidFill>
                           <a:latin typeface="Calibri" pitchFamily="34" charset="0"/>
                           <a:ea typeface="Calibri" pitchFamily="34" charset="-122"/>
@@ -34492,7 +34492,7 @@
                       <a:r>
                         <a:rPr lang="en-US" sz="950" dirty="0">
                           <a:solidFill>
-                            <a:srgbClr val="1A1A1A"/>
+                            <a:srgbClr val="242C39"/>
                           </a:solidFill>
                           <a:latin typeface="Calibri" pitchFamily="34" charset="0"/>
                           <a:ea typeface="Calibri" pitchFamily="34" charset="-122"/>
@@ -34545,7 +34545,7 @@
                       <a:r>
                         <a:rPr lang="en-US" sz="950" dirty="0">
                           <a:solidFill>
-                            <a:srgbClr val="1A1A1A"/>
+                            <a:srgbClr val="242C39"/>
                           </a:solidFill>
                           <a:latin typeface="Calibri" pitchFamily="34" charset="0"/>
                           <a:ea typeface="Calibri" pitchFamily="34" charset="-122"/>
@@ -34598,7 +34598,7 @@
                       <a:r>
                         <a:rPr lang="en-US" sz="950" dirty="0">
                           <a:solidFill>
-                            <a:srgbClr val="1A1A1A"/>
+                            <a:srgbClr val="242C39"/>
                           </a:solidFill>
                           <a:latin typeface="Calibri" pitchFamily="34" charset="0"/>
                           <a:ea typeface="Calibri" pitchFamily="34" charset="-122"/>
@@ -34651,7 +34651,7 @@
                       <a:r>
                         <a:rPr lang="en-US" sz="950" dirty="0">
                           <a:solidFill>
-                            <a:srgbClr val="1A1A1A"/>
+                            <a:srgbClr val="242C39"/>
                           </a:solidFill>
                           <a:latin typeface="Calibri" pitchFamily="34" charset="0"/>
                           <a:ea typeface="Calibri" pitchFamily="34" charset="-122"/>
@@ -34764,7 +34764,7 @@
                       <a:r>
                         <a:rPr lang="en-US" sz="950" dirty="0">
                           <a:solidFill>
-                            <a:srgbClr val="1A1A1A"/>
+                            <a:srgbClr val="242C39"/>
                           </a:solidFill>
                           <a:latin typeface="Calibri" pitchFamily="34" charset="0"/>
                           <a:ea typeface="Calibri" pitchFamily="34" charset="-122"/>
@@ -34817,7 +34817,7 @@
                       <a:r>
                         <a:rPr lang="en-US" sz="950" dirty="0">
                           <a:solidFill>
-                            <a:srgbClr val="1A1A1A"/>
+                            <a:srgbClr val="242C39"/>
                           </a:solidFill>
                           <a:latin typeface="Calibri" pitchFamily="34" charset="0"/>
                           <a:ea typeface="Calibri" pitchFamily="34" charset="-122"/>
@@ -34870,7 +34870,7 @@
                       <a:r>
                         <a:rPr lang="en-US" sz="950" dirty="0">
                           <a:solidFill>
-                            <a:srgbClr val="1A1A1A"/>
+                            <a:srgbClr val="242C39"/>
                           </a:solidFill>
                           <a:latin typeface="Calibri" pitchFamily="34" charset="0"/>
                           <a:ea typeface="Calibri" pitchFamily="34" charset="-122"/>
@@ -34923,7 +34923,7 @@
                       <a:r>
                         <a:rPr lang="en-US" sz="950" dirty="0">
                           <a:solidFill>
-                            <a:srgbClr val="1A1A1A"/>
+                            <a:srgbClr val="242C39"/>
                           </a:solidFill>
                           <a:latin typeface="Calibri" pitchFamily="34" charset="0"/>
                           <a:ea typeface="Calibri" pitchFamily="34" charset="-122"/>
@@ -35089,7 +35089,7 @@
                       <a:r>
                         <a:rPr lang="en-US" sz="950" dirty="0">
                           <a:solidFill>
-                            <a:srgbClr val="1A1A1A"/>
+                            <a:srgbClr val="242C39"/>
                           </a:solidFill>
                           <a:latin typeface="Calibri" pitchFamily="34" charset="0"/>
                           <a:ea typeface="Calibri" pitchFamily="34" charset="-122"/>
@@ -35142,7 +35142,7 @@
                       <a:r>
                         <a:rPr lang="en-US" sz="950" dirty="0">
                           <a:solidFill>
-                            <a:srgbClr val="1A1A1A"/>
+                            <a:srgbClr val="242C39"/>
                           </a:solidFill>
                           <a:latin typeface="Calibri" pitchFamily="34" charset="0"/>
                           <a:ea typeface="Calibri" pitchFamily="34" charset="-122"/>
@@ -35195,7 +35195,7 @@
                       <a:r>
                         <a:rPr lang="en-US" sz="950" dirty="0">
                           <a:solidFill>
-                            <a:srgbClr val="1A1A1A"/>
+                            <a:srgbClr val="242C39"/>
                           </a:solidFill>
                           <a:latin typeface="Calibri" pitchFamily="34" charset="0"/>
                           <a:ea typeface="Calibri" pitchFamily="34" charset="-122"/>
@@ -35248,7 +35248,7 @@
                       <a:r>
                         <a:rPr lang="en-US" sz="950" dirty="0">
                           <a:solidFill>
-                            <a:srgbClr val="1A1A1A"/>
+                            <a:srgbClr val="242C39"/>
                           </a:solidFill>
                           <a:latin typeface="Calibri" pitchFamily="34" charset="0"/>
                           <a:ea typeface="Calibri" pitchFamily="34" charset="-122"/>
@@ -35414,7 +35414,7 @@
                       <a:r>
                         <a:rPr lang="en-US" sz="950" dirty="0">
                           <a:solidFill>
-                            <a:srgbClr val="1A1A1A"/>
+                            <a:srgbClr val="242C39"/>
                           </a:solidFill>
                           <a:latin typeface="Calibri" pitchFamily="34" charset="0"/>
                           <a:ea typeface="Calibri" pitchFamily="34" charset="-122"/>
@@ -35467,7 +35467,7 @@
                       <a:r>
                         <a:rPr lang="en-US" sz="950" dirty="0">
                           <a:solidFill>
-                            <a:srgbClr val="1A1A1A"/>
+                            <a:srgbClr val="242C39"/>
                           </a:solidFill>
                           <a:latin typeface="Calibri" pitchFamily="34" charset="0"/>
                           <a:ea typeface="Calibri" pitchFamily="34" charset="-122"/>
@@ -35520,7 +35520,7 @@
                       <a:r>
                         <a:rPr lang="en-US" sz="950" dirty="0">
                           <a:solidFill>
-                            <a:srgbClr val="1A1A1A"/>
+                            <a:srgbClr val="242C39"/>
                           </a:solidFill>
                           <a:latin typeface="Calibri" pitchFamily="34" charset="0"/>
                           <a:ea typeface="Calibri" pitchFamily="34" charset="-122"/>
@@ -35573,7 +35573,7 @@
                       <a:r>
                         <a:rPr lang="en-US" sz="950" dirty="0">
                           <a:solidFill>
-                            <a:srgbClr val="1A1A1A"/>
+                            <a:srgbClr val="242C39"/>
                           </a:solidFill>
                           <a:latin typeface="Calibri" pitchFamily="34" charset="0"/>
                           <a:ea typeface="Calibri" pitchFamily="34" charset="-122"/>
@@ -35739,7 +35739,7 @@
                       <a:r>
                         <a:rPr lang="en-US" sz="950" dirty="0">
                           <a:solidFill>
-                            <a:srgbClr val="1A1A1A"/>
+                            <a:srgbClr val="242C39"/>
                           </a:solidFill>
                           <a:latin typeface="Calibri" pitchFamily="34" charset="0"/>
                           <a:ea typeface="Calibri" pitchFamily="34" charset="-122"/>
@@ -35792,7 +35792,7 @@
                       <a:r>
                         <a:rPr lang="en-US" sz="950" dirty="0">
                           <a:solidFill>
-                            <a:srgbClr val="1A1A1A"/>
+                            <a:srgbClr val="242C39"/>
                           </a:solidFill>
                           <a:latin typeface="Calibri" pitchFamily="34" charset="0"/>
                           <a:ea typeface="Calibri" pitchFamily="34" charset="-122"/>
@@ -35845,7 +35845,7 @@
                       <a:r>
                         <a:rPr lang="en-US" sz="950" dirty="0">
                           <a:solidFill>
-                            <a:srgbClr val="1A1A1A"/>
+                            <a:srgbClr val="242C39"/>
                           </a:solidFill>
                           <a:latin typeface="Calibri" pitchFamily="34" charset="0"/>
                           <a:ea typeface="Calibri" pitchFamily="34" charset="-122"/>
@@ -35898,7 +35898,7 @@
                       <a:r>
                         <a:rPr lang="en-US" sz="950" dirty="0">
                           <a:solidFill>
-                            <a:srgbClr val="1A1A1A"/>
+                            <a:srgbClr val="242C39"/>
                           </a:solidFill>
                           <a:latin typeface="Calibri" pitchFamily="34" charset="0"/>
                           <a:ea typeface="Calibri" pitchFamily="34" charset="-122"/>
@@ -36064,7 +36064,7 @@
                       <a:r>
                         <a:rPr lang="en-US" sz="950" dirty="0">
                           <a:solidFill>
-                            <a:srgbClr val="1A1A1A"/>
+                            <a:srgbClr val="242C39"/>
                           </a:solidFill>
                           <a:latin typeface="Calibri" pitchFamily="34" charset="0"/>
                           <a:ea typeface="Calibri" pitchFamily="34" charset="-122"/>
@@ -36117,7 +36117,7 @@
                       <a:r>
                         <a:rPr lang="en-US" sz="950" dirty="0">
                           <a:solidFill>
-                            <a:srgbClr val="1A1A1A"/>
+                            <a:srgbClr val="242C39"/>
                           </a:solidFill>
                           <a:latin typeface="Calibri" pitchFamily="34" charset="0"/>
                           <a:ea typeface="Calibri" pitchFamily="34" charset="-122"/>
@@ -36170,7 +36170,7 @@
                       <a:r>
                         <a:rPr lang="en-US" sz="950" dirty="0">
                           <a:solidFill>
-                            <a:srgbClr val="1A1A1A"/>
+                            <a:srgbClr val="242C39"/>
                           </a:solidFill>
                           <a:latin typeface="Calibri" pitchFamily="34" charset="0"/>
                           <a:ea typeface="Calibri" pitchFamily="34" charset="-122"/>
@@ -36223,7 +36223,7 @@
                       <a:r>
                         <a:rPr lang="en-US" sz="950" dirty="0">
                           <a:solidFill>
-                            <a:srgbClr val="1A1A1A"/>
+                            <a:srgbClr val="242C39"/>
                           </a:solidFill>
                           <a:latin typeface="Calibri" pitchFamily="34" charset="0"/>
                           <a:ea typeface="Calibri" pitchFamily="34" charset="-122"/>
@@ -36389,7 +36389,7 @@
                       <a:r>
                         <a:rPr lang="en-US" sz="950" dirty="0">
                           <a:solidFill>
-                            <a:srgbClr val="1A1A1A"/>
+                            <a:srgbClr val="242C39"/>
                           </a:solidFill>
                           <a:latin typeface="Calibri" pitchFamily="34" charset="0"/>
                           <a:ea typeface="Calibri" pitchFamily="34" charset="-122"/>
@@ -36442,7 +36442,7 @@
                       <a:r>
                         <a:rPr lang="en-US" sz="950" dirty="0">
                           <a:solidFill>
-                            <a:srgbClr val="1A1A1A"/>
+                            <a:srgbClr val="242C39"/>
                           </a:solidFill>
                           <a:latin typeface="Calibri" pitchFamily="34" charset="0"/>
                           <a:ea typeface="Calibri" pitchFamily="34" charset="-122"/>
@@ -36495,7 +36495,7 @@
                       <a:r>
                         <a:rPr lang="en-US" sz="950" dirty="0">
                           <a:solidFill>
-                            <a:srgbClr val="1A1A1A"/>
+                            <a:srgbClr val="242C39"/>
                           </a:solidFill>
                           <a:latin typeface="Calibri" pitchFamily="34" charset="0"/>
                           <a:ea typeface="Calibri" pitchFamily="34" charset="-122"/>
@@ -36548,7 +36548,7 @@
                       <a:r>
                         <a:rPr lang="en-US" sz="950" dirty="0">
                           <a:solidFill>
-                            <a:srgbClr val="1A1A1A"/>
+                            <a:srgbClr val="242C39"/>
                           </a:solidFill>
                           <a:latin typeface="Calibri" pitchFamily="34" charset="0"/>
                           <a:ea typeface="Calibri" pitchFamily="34" charset="-122"/>
@@ -36714,7 +36714,7 @@
                       <a:r>
                         <a:rPr lang="en-US" sz="950" dirty="0">
                           <a:solidFill>
-                            <a:srgbClr val="1A1A1A"/>
+                            <a:srgbClr val="242C39"/>
                           </a:solidFill>
                           <a:latin typeface="Calibri" pitchFamily="34" charset="0"/>
                           <a:ea typeface="Calibri" pitchFamily="34" charset="-122"/>
@@ -36767,7 +36767,7 @@
                       <a:r>
                         <a:rPr lang="en-US" sz="950" dirty="0">
                           <a:solidFill>
-                            <a:srgbClr val="1A1A1A"/>
+                            <a:srgbClr val="242C39"/>
                           </a:solidFill>
                           <a:latin typeface="Calibri" pitchFamily="34" charset="0"/>
                           <a:ea typeface="Calibri" pitchFamily="34" charset="-122"/>
@@ -36820,7 +36820,7 @@
                       <a:r>
                         <a:rPr lang="en-US" sz="950" dirty="0">
                           <a:solidFill>
-                            <a:srgbClr val="1A1A1A"/>
+                            <a:srgbClr val="242C39"/>
                           </a:solidFill>
                           <a:latin typeface="Calibri" pitchFamily="34" charset="0"/>
                           <a:ea typeface="Calibri" pitchFamily="34" charset="-122"/>
@@ -36873,7 +36873,7 @@
                       <a:r>
                         <a:rPr lang="en-US" sz="950" dirty="0">
                           <a:solidFill>
-                            <a:srgbClr val="1A1A1A"/>
+                            <a:srgbClr val="242C39"/>
                           </a:solidFill>
                           <a:latin typeface="Calibri" pitchFamily="34" charset="0"/>
                           <a:ea typeface="Calibri" pitchFamily="34" charset="-122"/>
@@ -36926,7 +36926,7 @@
                       <a:r>
                         <a:rPr lang="en-US" sz="950" dirty="0">
                           <a:solidFill>
-                            <a:srgbClr val="1A1A1A"/>
+                            <a:srgbClr val="242C39"/>
                           </a:solidFill>
                           <a:latin typeface="Calibri" pitchFamily="34" charset="0"/>
                           <a:ea typeface="Calibri" pitchFamily="34" charset="-122"/>
@@ -37039,7 +37039,7 @@
                       <a:r>
                         <a:rPr lang="en-US" sz="950" dirty="0">
                           <a:solidFill>
-                            <a:srgbClr val="1A1A1A"/>
+                            <a:srgbClr val="242C39"/>
                           </a:solidFill>
                           <a:latin typeface="Calibri" pitchFamily="34" charset="0"/>
                           <a:ea typeface="Calibri" pitchFamily="34" charset="-122"/>
@@ -37092,7 +37092,7 @@
                       <a:r>
                         <a:rPr lang="en-US" sz="950" dirty="0">
                           <a:solidFill>
-                            <a:srgbClr val="1A1A1A"/>
+                            <a:srgbClr val="242C39"/>
                           </a:solidFill>
                           <a:latin typeface="Calibri" pitchFamily="34" charset="0"/>
                           <a:ea typeface="Calibri" pitchFamily="34" charset="-122"/>
@@ -37145,7 +37145,7 @@
                       <a:r>
                         <a:rPr lang="en-US" sz="950" dirty="0">
                           <a:solidFill>
-                            <a:srgbClr val="1A1A1A"/>
+                            <a:srgbClr val="242C39"/>
                           </a:solidFill>
                           <a:latin typeface="Calibri" pitchFamily="34" charset="0"/>
                           <a:ea typeface="Calibri" pitchFamily="34" charset="-122"/>
@@ -37198,7 +37198,7 @@
                       <a:r>
                         <a:rPr lang="en-US" sz="950" dirty="0">
                           <a:solidFill>
-                            <a:srgbClr val="1A1A1A"/>
+                            <a:srgbClr val="242C39"/>
                           </a:solidFill>
                           <a:latin typeface="Calibri" pitchFamily="34" charset="0"/>
                           <a:ea typeface="Calibri" pitchFamily="34" charset="-122"/>
@@ -37251,7 +37251,7 @@
                       <a:r>
                         <a:rPr lang="en-US" sz="950" dirty="0">
                           <a:solidFill>
-                            <a:srgbClr val="1A1A1A"/>
+                            <a:srgbClr val="242C39"/>
                           </a:solidFill>
                           <a:latin typeface="Calibri" pitchFamily="34" charset="0"/>
                           <a:ea typeface="Calibri" pitchFamily="34" charset="-122"/>
@@ -37364,7 +37364,7 @@
                       <a:r>
                         <a:rPr lang="en-US" sz="950" b="1" dirty="0">
                           <a:solidFill>
-                            <a:srgbClr val="1A1A1A"/>
+                            <a:srgbClr val="242C39"/>
                           </a:solidFill>
                           <a:latin typeface="Calibri" pitchFamily="34" charset="0"/>
                           <a:ea typeface="Calibri" pitchFamily="34" charset="-122"/>
@@ -37420,7 +37420,7 @@
                       <a:r>
                         <a:rPr lang="en-US" sz="950" b="1" dirty="0">
                           <a:solidFill>
-                            <a:srgbClr val="1A1A1A"/>
+                            <a:srgbClr val="242C39"/>
                           </a:solidFill>
                           <a:latin typeface="Calibri" pitchFamily="34" charset="0"/>
                           <a:ea typeface="Calibri" pitchFamily="34" charset="-122"/>
@@ -37476,7 +37476,7 @@
                       <a:r>
                         <a:rPr lang="en-US" sz="950" b="1" dirty="0">
                           <a:solidFill>
-                            <a:srgbClr val="1A1A1A"/>
+                            <a:srgbClr val="242C39"/>
                           </a:solidFill>
                           <a:latin typeface="Calibri" pitchFamily="34" charset="0"/>
                           <a:ea typeface="Calibri" pitchFamily="34" charset="-122"/>
@@ -37532,7 +37532,7 @@
                       <a:r>
                         <a:rPr lang="en-US" sz="950" b="1" dirty="0">
                           <a:solidFill>
-                            <a:srgbClr val="1A1A1A"/>
+                            <a:srgbClr val="242C39"/>
                           </a:solidFill>
                           <a:latin typeface="Calibri" pitchFamily="34" charset="0"/>
                           <a:ea typeface="Calibri" pitchFamily="34" charset="-122"/>
@@ -37726,7 +37726,7 @@
             <a:r>
               <a:rPr lang="en-US" sz="900" dirty="0">
                 <a:solidFill>
-                  <a:srgbClr val="5F6670"/>
+                  <a:srgbClr val="242C39"/>
                 </a:solidFill>
                 <a:latin typeface="Calibri" pitchFamily="34" charset="0"/>
                 <a:ea typeface="Calibri" pitchFamily="34" charset="-122"/>
@@ -37840,7 +37840,7 @@
             <a:r>
               <a:rPr lang="en-US" sz="1050" dirty="0">
                 <a:solidFill>
-                  <a:srgbClr val="5F6670"/>
+                  <a:srgbClr val="242C39"/>
                 </a:solidFill>
                 <a:latin typeface="Calibri" pitchFamily="34" charset="0"/>
                 <a:ea typeface="Calibri" pitchFamily="34" charset="-122"/>
@@ -37861,7 +37861,7 @@
             <a:r>
               <a:rPr lang="en-US" sz="1050" dirty="0">
                 <a:solidFill>
-                  <a:srgbClr val="5F6670"/>
+                  <a:srgbClr val="242C39"/>
                 </a:solidFill>
                 <a:latin typeface="Calibri" pitchFamily="34" charset="0"/>
                 <a:ea typeface="Calibri" pitchFamily="34" charset="-122"/>
@@ -37882,7 +37882,7 @@
             <a:r>
               <a:rPr lang="en-US" sz="1050" dirty="0">
                 <a:solidFill>
-                  <a:srgbClr val="5F6670"/>
+                  <a:srgbClr val="242C39"/>
                 </a:solidFill>
                 <a:latin typeface="Calibri" pitchFamily="34" charset="0"/>
                 <a:ea typeface="Calibri" pitchFamily="34" charset="-122"/>
@@ -37903,7 +37903,7 @@
             <a:r>
               <a:rPr lang="en-US" sz="1050" dirty="0">
                 <a:solidFill>
-                  <a:srgbClr val="5F6670"/>
+                  <a:srgbClr val="242C39"/>
                 </a:solidFill>
                 <a:latin typeface="Calibri" pitchFamily="34" charset="0"/>
                 <a:ea typeface="Calibri" pitchFamily="34" charset="-122"/>
@@ -37924,7 +37924,7 @@
             <a:r>
               <a:rPr lang="en-US" sz="1050" dirty="0">
                 <a:solidFill>
-                  <a:srgbClr val="5F6670"/>
+                  <a:srgbClr val="242C39"/>
                 </a:solidFill>
                 <a:latin typeface="Calibri" pitchFamily="34" charset="0"/>
                 <a:ea typeface="Calibri" pitchFamily="34" charset="-122"/>
@@ -37966,7 +37966,7 @@
             <a:lvl1pPr>
               <a:defRPr sz="900">
                 <a:solidFill>
-                  <a:srgbClr val="5F6670"/>
+                  <a:srgbClr val="242C39"/>
                 </a:solidFill>
                 <a:latin typeface="Calibri"/>
                 <a:ea typeface="Calibri"/>
@@ -37995,42 +37995,42 @@
 <file path=ppt/theme/theme1.xml><?xml version="1.0" encoding="utf-8"?>
 <a:theme xmlns:a="http://schemas.openxmlformats.org/drawingml/2006/main" name="Office Theme">
   <a:themeElements>
-    <a:clrScheme name="Office">
+    <a:clrScheme name="CTS">
       <a:dk1>
-        <a:sysClr val="windowText" lastClr="000000"/>
+        <a:srgbClr val="242C39"/>
       </a:dk1>
       <a:lt1>
-        <a:sysClr val="window" lastClr="FFFFFF"/>
+        <a:srgbClr val="FFFFFF"/>
       </a:lt1>
       <a:dk2>
-        <a:srgbClr val="44546A"/>
+        <a:srgbClr val="122B82"/>
       </a:dk2>
       <a:lt2>
-        <a:srgbClr val="E7E6E6"/>
+        <a:srgbClr val="E3E6EA"/>
       </a:lt2>
       <a:accent1>
-        <a:srgbClr val="4472C4"/>
+        <a:srgbClr val="005358"/>
       </a:accent1>
       <a:accent2>
-        <a:srgbClr val="ED7D31"/>
+        <a:srgbClr val="3FD0C9"/>
       </a:accent2>
       <a:accent3>
-        <a:srgbClr val="A5A5A5"/>
+        <a:srgbClr val="6D71FF"/>
       </a:accent3>
       <a:accent4>
-        <a:srgbClr val="FFC000"/>
+        <a:srgbClr val="122B82"/>
       </a:accent4>
       <a:accent5>
-        <a:srgbClr val="5B9BD5"/>
+        <a:srgbClr val="F33844"/>
       </a:accent5>
       <a:accent6>
-        <a:srgbClr val="70AD47"/>
+        <a:srgbClr val="8F4AFA"/>
       </a:accent6>
       <a:hlink>
-        <a:srgbClr val="0563C1"/>
+        <a:srgbClr val="6D71FF"/>
       </a:hlink>
       <a:folHlink>
-        <a:srgbClr val="954F72"/>
+        <a:srgbClr val="8F4AFA"/>
       </a:folHlink>
     </a:clrScheme>
     <a:fontScheme name="Office">
@@ -38290,42 +38290,42 @@
 <file path=ppt/theme/theme2.xml><?xml version="1.0" encoding="utf-8"?>
 <a:theme xmlns:a="http://schemas.openxmlformats.org/drawingml/2006/main" name="Office Theme">
   <a:themeElements>
-    <a:clrScheme name="Office">
+    <a:clrScheme name="CTS">
       <a:dk1>
-        <a:sysClr val="windowText" lastClr="000000"/>
+        <a:srgbClr val="242C39"/>
       </a:dk1>
       <a:lt1>
-        <a:sysClr val="window" lastClr="FFFFFF"/>
+        <a:srgbClr val="FFFFFF"/>
       </a:lt1>
       <a:dk2>
-        <a:srgbClr val="0E2841"/>
+        <a:srgbClr val="122B82"/>
       </a:dk2>
       <a:lt2>
-        <a:srgbClr val="E8E8E8"/>
+        <a:srgbClr val="E3E6EA"/>
       </a:lt2>
       <a:accent1>
-        <a:srgbClr val="156082"/>
+        <a:srgbClr val="005358"/>
       </a:accent1>
       <a:accent2>
-        <a:srgbClr val="E97132"/>
+        <a:srgbClr val="3FD0C9"/>
       </a:accent2>
       <a:accent3>
-        <a:srgbClr val="196B24"/>
+        <a:srgbClr val="6D71FF"/>
       </a:accent3>
       <a:accent4>
-        <a:srgbClr val="0F9ED5"/>
+        <a:srgbClr val="122B82"/>
       </a:accent4>
       <a:accent5>
-        <a:srgbClr val="A02B93"/>
+        <a:srgbClr val="F33844"/>
       </a:accent5>
       <a:accent6>
-        <a:srgbClr val="4EA72E"/>
+        <a:srgbClr val="8F4AFA"/>
       </a:accent6>
       <a:hlink>
-        <a:srgbClr val="467886"/>
+        <a:srgbClr val="6D71FF"/>
       </a:hlink>
       <a:folHlink>
-        <a:srgbClr val="96607D"/>
+        <a:srgbClr val="8F4AFA"/>
       </a:folHlink>
     </a:clrScheme>
     <a:fontScheme name="Office">

--- a/deck/CTS Monthly Business Review - September 2026.pptx
+++ b/deck/CTS Monthly Business Review - September 2026.pptx
@@ -11296,6 +11296,516 @@
           </a:p>
         </p:txBody>
       </p:sp>
+      <p:sp>
+        <p:nvSpPr>
+          <p:cNvPr id="7" name="TextBox 6"/>
+          <p:cNvSpPr txBox="1"/>
+          <p:nvPr/>
+        </p:nvSpPr>
+        <p:spPr>
+          <a:xfrm>
+            <a:off x="9601200" y="365760"/>
+            <a:ext cx="2103120" cy="274320"/>
+          </a:xfrm>
+          <a:prstGeom prst="rect">
+            <a:avLst/>
+          </a:prstGeom>
+          <a:noFill/>
+        </p:spPr>
+        <p:txBody>
+          <a:bodyPr wrap="none">
+            <a:spAutoFit/>
+          </a:bodyPr>
+          <a:lstStyle/>
+          <a:p>
+            <a:r>
+              <a:rPr sz="900" b="1">
+                <a:solidFill>
+                  <a:srgbClr val="242C39"/>
+                </a:solidFill>
+              </a:rPr>
+              <a:t>CTS palette — not on the slide, eyedropper from here</a:t>
+            </a:r>
+          </a:p>
+        </p:txBody>
+      </p:sp>
+      <p:sp>
+        <p:nvSpPr>
+          <p:cNvPr id="8" name="Rounded Rectangle 7"/>
+          <p:cNvSpPr/>
+          <p:nvPr/>
+        </p:nvSpPr>
+        <p:spPr>
+          <a:xfrm>
+            <a:off x="9601200" y="676656"/>
+            <a:ext cx="2103120" cy="384048"/>
+          </a:xfrm>
+          <a:prstGeom prst="roundRect">
+            <a:avLst/>
+          </a:prstGeom>
+          <a:solidFill>
+            <a:srgbClr val="3FD0C9"/>
+          </a:solidFill>
+          <a:ln w="9525">
+            <a:solidFill>
+              <a:srgbClr val="E3E6EA"/>
+            </a:solidFill>
+          </a:ln>
+          <a:effectLst/>
+        </p:spPr>
+        <p:style>
+          <a:lnRef idx="1">
+            <a:schemeClr val="accent1"/>
+          </a:lnRef>
+          <a:fillRef idx="3">
+            <a:schemeClr val="accent1"/>
+          </a:fillRef>
+          <a:effectRef idx="2">
+            <a:schemeClr val="accent1"/>
+          </a:effectRef>
+          <a:fontRef idx="minor">
+            <a:schemeClr val="lt1"/>
+          </a:fontRef>
+        </p:style>
+        <p:txBody>
+          <a:bodyPr rtlCol="0" anchor="ctr" lIns="54864" rIns="54864" tIns="0" bIns="0"/>
+          <a:lstStyle/>
+          <a:p>
+            <a:r>
+              <a:rPr sz="900" b="1">
+                <a:solidFill>
+                  <a:srgbClr val="242C39"/>
+                </a:solidFill>
+              </a:rPr>
+              <a:t>Bright Teal   #3FD0C9   Logo green</a:t>
+            </a:r>
+          </a:p>
+        </p:txBody>
+      </p:sp>
+      <p:sp>
+        <p:nvSpPr>
+          <p:cNvPr id="9" name="Rounded Rectangle 8"/>
+          <p:cNvSpPr/>
+          <p:nvPr/>
+        </p:nvSpPr>
+        <p:spPr>
+          <a:xfrm>
+            <a:off x="9601200" y="1133856"/>
+            <a:ext cx="2103120" cy="384048"/>
+          </a:xfrm>
+          <a:prstGeom prst="roundRect">
+            <a:avLst/>
+          </a:prstGeom>
+          <a:solidFill>
+            <a:srgbClr val="005358"/>
+          </a:solidFill>
+          <a:ln w="9525">
+            <a:solidFill>
+              <a:srgbClr val="E3E6EA"/>
+            </a:solidFill>
+          </a:ln>
+          <a:effectLst/>
+        </p:spPr>
+        <p:style>
+          <a:lnRef idx="1">
+            <a:schemeClr val="accent1"/>
+          </a:lnRef>
+          <a:fillRef idx="3">
+            <a:schemeClr val="accent1"/>
+          </a:fillRef>
+          <a:effectRef idx="2">
+            <a:schemeClr val="accent1"/>
+          </a:effectRef>
+          <a:fontRef idx="minor">
+            <a:schemeClr val="lt1"/>
+          </a:fontRef>
+        </p:style>
+        <p:txBody>
+          <a:bodyPr rtlCol="0" anchor="ctr" lIns="54864" rIns="54864" tIns="0" bIns="0"/>
+          <a:lstStyle/>
+          <a:p>
+            <a:r>
+              <a:rPr sz="900" b="1">
+                <a:solidFill>
+                  <a:srgbClr val="FFFFFF"/>
+                </a:solidFill>
+              </a:rPr>
+              <a:t>Dark Teal   #005358   Production</a:t>
+            </a:r>
+          </a:p>
+        </p:txBody>
+      </p:sp>
+      <p:sp>
+        <p:nvSpPr>
+          <p:cNvPr id="10" name="Rounded Rectangle 9"/>
+          <p:cNvSpPr/>
+          <p:nvPr/>
+        </p:nvSpPr>
+        <p:spPr>
+          <a:xfrm>
+            <a:off x="9601200" y="1591056"/>
+            <a:ext cx="2103120" cy="384048"/>
+          </a:xfrm>
+          <a:prstGeom prst="roundRect">
+            <a:avLst/>
+          </a:prstGeom>
+          <a:solidFill>
+            <a:srgbClr val="6D71FF"/>
+          </a:solidFill>
+          <a:ln w="9525">
+            <a:solidFill>
+              <a:srgbClr val="E3E6EA"/>
+            </a:solidFill>
+          </a:ln>
+          <a:effectLst/>
+        </p:spPr>
+        <p:style>
+          <a:lnRef idx="1">
+            <a:schemeClr val="accent1"/>
+          </a:lnRef>
+          <a:fillRef idx="3">
+            <a:schemeClr val="accent1"/>
+          </a:fillRef>
+          <a:effectRef idx="2">
+            <a:schemeClr val="accent1"/>
+          </a:effectRef>
+          <a:fontRef idx="minor">
+            <a:schemeClr val="lt1"/>
+          </a:fontRef>
+        </p:style>
+        <p:txBody>
+          <a:bodyPr rtlCol="0" anchor="ctr" lIns="54864" rIns="54864" tIns="0" bIns="0"/>
+          <a:lstStyle/>
+          <a:p>
+            <a:r>
+              <a:rPr sz="900" b="1">
+                <a:solidFill>
+                  <a:srgbClr val="FFFFFF"/>
+                </a:solidFill>
+              </a:rPr>
+              <a:t>Primary Blue   #6D71FF   Logo blue</a:t>
+            </a:r>
+          </a:p>
+        </p:txBody>
+      </p:sp>
+      <p:sp>
+        <p:nvSpPr>
+          <p:cNvPr id="11" name="Rounded Rectangle 10"/>
+          <p:cNvSpPr/>
+          <p:nvPr/>
+        </p:nvSpPr>
+        <p:spPr>
+          <a:xfrm>
+            <a:off x="9601200" y="2048256"/>
+            <a:ext cx="2103120" cy="384048"/>
+          </a:xfrm>
+          <a:prstGeom prst="roundRect">
+            <a:avLst/>
+          </a:prstGeom>
+          <a:solidFill>
+            <a:srgbClr val="122B82"/>
+          </a:solidFill>
+          <a:ln w="9525">
+            <a:solidFill>
+              <a:srgbClr val="E3E6EA"/>
+            </a:solidFill>
+          </a:ln>
+          <a:effectLst/>
+        </p:spPr>
+        <p:style>
+          <a:lnRef idx="1">
+            <a:schemeClr val="accent1"/>
+          </a:lnRef>
+          <a:fillRef idx="3">
+            <a:schemeClr val="accent1"/>
+          </a:fillRef>
+          <a:effectRef idx="2">
+            <a:schemeClr val="accent1"/>
+          </a:effectRef>
+          <a:fontRef idx="minor">
+            <a:schemeClr val="lt1"/>
+          </a:fontRef>
+        </p:style>
+        <p:txBody>
+          <a:bodyPr rtlCol="0" anchor="ctr" lIns="54864" rIns="54864" tIns="0" bIns="0"/>
+          <a:lstStyle/>
+          <a:p>
+            <a:r>
+              <a:rPr sz="900" b="1">
+                <a:solidFill>
+                  <a:srgbClr val="FFFFFF"/>
+                </a:solidFill>
+              </a:rPr>
+              <a:t>Deep Blue   #122B82</a:t>
+            </a:r>
+          </a:p>
+        </p:txBody>
+      </p:sp>
+      <p:sp>
+        <p:nvSpPr>
+          <p:cNvPr id="12" name="Rounded Rectangle 11"/>
+          <p:cNvSpPr/>
+          <p:nvPr/>
+        </p:nvSpPr>
+        <p:spPr>
+          <a:xfrm>
+            <a:off x="9601200" y="2505456"/>
+            <a:ext cx="2103120" cy="384048"/>
+          </a:xfrm>
+          <a:prstGeom prst="roundRect">
+            <a:avLst/>
+          </a:prstGeom>
+          <a:solidFill>
+            <a:srgbClr val="F33844"/>
+          </a:solidFill>
+          <a:ln w="9525">
+            <a:solidFill>
+              <a:srgbClr val="E3E6EA"/>
+            </a:solidFill>
+          </a:ln>
+          <a:effectLst/>
+        </p:spPr>
+        <p:style>
+          <a:lnRef idx="1">
+            <a:schemeClr val="accent1"/>
+          </a:lnRef>
+          <a:fillRef idx="3">
+            <a:schemeClr val="accent1"/>
+          </a:fillRef>
+          <a:effectRef idx="2">
+            <a:schemeClr val="accent1"/>
+          </a:effectRef>
+          <a:fontRef idx="minor">
+            <a:schemeClr val="lt1"/>
+          </a:fontRef>
+        </p:style>
+        <p:txBody>
+          <a:bodyPr rtlCol="0" anchor="ctr" lIns="54864" rIns="54864" tIns="0" bIns="0"/>
+          <a:lstStyle/>
+          <a:p>
+            <a:r>
+              <a:rPr sz="900" b="1">
+                <a:solidFill>
+                  <a:srgbClr val="FFFFFF"/>
+                </a:solidFill>
+              </a:rPr>
+              <a:t>Accent Red   #F33844   Logo red, Support</a:t>
+            </a:r>
+          </a:p>
+        </p:txBody>
+      </p:sp>
+      <p:sp>
+        <p:nvSpPr>
+          <p:cNvPr id="13" name="Rounded Rectangle 12"/>
+          <p:cNvSpPr/>
+          <p:nvPr/>
+        </p:nvSpPr>
+        <p:spPr>
+          <a:xfrm>
+            <a:off x="9601200" y="2962656"/>
+            <a:ext cx="2103120" cy="384048"/>
+          </a:xfrm>
+          <a:prstGeom prst="roundRect">
+            <a:avLst/>
+          </a:prstGeom>
+          <a:solidFill>
+            <a:srgbClr val="A8052E"/>
+          </a:solidFill>
+          <a:ln w="9525">
+            <a:solidFill>
+              <a:srgbClr val="E3E6EA"/>
+            </a:solidFill>
+          </a:ln>
+          <a:effectLst/>
+        </p:spPr>
+        <p:style>
+          <a:lnRef idx="1">
+            <a:schemeClr val="accent1"/>
+          </a:lnRef>
+          <a:fillRef idx="3">
+            <a:schemeClr val="accent1"/>
+          </a:fillRef>
+          <a:effectRef idx="2">
+            <a:schemeClr val="accent1"/>
+          </a:effectRef>
+          <a:fontRef idx="minor">
+            <a:schemeClr val="lt1"/>
+          </a:fontRef>
+        </p:style>
+        <p:txBody>
+          <a:bodyPr rtlCol="0" anchor="ctr" lIns="54864" rIns="54864" tIns="0" bIns="0"/>
+          <a:lstStyle/>
+          <a:p>
+            <a:r>
+              <a:rPr sz="900" b="1">
+                <a:solidFill>
+                  <a:srgbClr val="FFFFFF"/>
+                </a:solidFill>
+              </a:rPr>
+              <a:t>Deep Red   #A8052E</a:t>
+            </a:r>
+          </a:p>
+        </p:txBody>
+      </p:sp>
+      <p:sp>
+        <p:nvSpPr>
+          <p:cNvPr id="14" name="Rounded Rectangle 13"/>
+          <p:cNvSpPr/>
+          <p:nvPr/>
+        </p:nvSpPr>
+        <p:spPr>
+          <a:xfrm>
+            <a:off x="9601200" y="3419856"/>
+            <a:ext cx="2103120" cy="384048"/>
+          </a:xfrm>
+          <a:prstGeom prst="roundRect">
+            <a:avLst/>
+          </a:prstGeom>
+          <a:solidFill>
+            <a:srgbClr val="8F4AFA"/>
+          </a:solidFill>
+          <a:ln w="9525">
+            <a:solidFill>
+              <a:srgbClr val="E3E6EA"/>
+            </a:solidFill>
+          </a:ln>
+          <a:effectLst/>
+        </p:spPr>
+        <p:style>
+          <a:lnRef idx="1">
+            <a:schemeClr val="accent1"/>
+          </a:lnRef>
+          <a:fillRef idx="3">
+            <a:schemeClr val="accent1"/>
+          </a:fillRef>
+          <a:effectRef idx="2">
+            <a:schemeClr val="accent1"/>
+          </a:effectRef>
+          <a:fontRef idx="minor">
+            <a:schemeClr val="lt1"/>
+          </a:fontRef>
+        </p:style>
+        <p:txBody>
+          <a:bodyPr rtlCol="0" anchor="ctr" lIns="54864" rIns="54864" tIns="0" bIns="0"/>
+          <a:lstStyle/>
+          <a:p>
+            <a:r>
+              <a:rPr sz="900" b="1">
+                <a:solidFill>
+                  <a:srgbClr val="FFFFFF"/>
+                </a:solidFill>
+              </a:rPr>
+              <a:t>Accent Purple   #8F4AFA   Consulting</a:t>
+            </a:r>
+          </a:p>
+        </p:txBody>
+      </p:sp>
+      <p:sp>
+        <p:nvSpPr>
+          <p:cNvPr id="15" name="Rounded Rectangle 14"/>
+          <p:cNvSpPr/>
+          <p:nvPr/>
+        </p:nvSpPr>
+        <p:spPr>
+          <a:xfrm>
+            <a:off x="9601200" y="3877056"/>
+            <a:ext cx="2103120" cy="384048"/>
+          </a:xfrm>
+          <a:prstGeom prst="roundRect">
+            <a:avLst/>
+          </a:prstGeom>
+          <a:solidFill>
+            <a:srgbClr val="242C39"/>
+          </a:solidFill>
+          <a:ln w="9525">
+            <a:solidFill>
+              <a:srgbClr val="E3E6EA"/>
+            </a:solidFill>
+          </a:ln>
+          <a:effectLst/>
+        </p:spPr>
+        <p:style>
+          <a:lnRef idx="1">
+            <a:schemeClr val="accent1"/>
+          </a:lnRef>
+          <a:fillRef idx="3">
+            <a:schemeClr val="accent1"/>
+          </a:fillRef>
+          <a:effectRef idx="2">
+            <a:schemeClr val="accent1"/>
+          </a:effectRef>
+          <a:fontRef idx="minor">
+            <a:schemeClr val="lt1"/>
+          </a:fontRef>
+        </p:style>
+        <p:txBody>
+          <a:bodyPr rtlCol="0" anchor="ctr" lIns="54864" rIns="54864" tIns="0" bIns="0"/>
+          <a:lstStyle/>
+          <a:p>
+            <a:r>
+              <a:rPr sz="900" b="1">
+                <a:solidFill>
+                  <a:srgbClr val="FFFFFF"/>
+                </a:solidFill>
+              </a:rPr>
+              <a:t>Charcoal   #242C39   Text</a:t>
+            </a:r>
+          </a:p>
+        </p:txBody>
+      </p:sp>
+      <p:sp>
+        <p:nvSpPr>
+          <p:cNvPr id="16" name="Rounded Rectangle 15"/>
+          <p:cNvSpPr/>
+          <p:nvPr/>
+        </p:nvSpPr>
+        <p:spPr>
+          <a:xfrm>
+            <a:off x="9601200" y="4334256"/>
+            <a:ext cx="2103120" cy="384048"/>
+          </a:xfrm>
+          <a:prstGeom prst="roundRect">
+            <a:avLst/>
+          </a:prstGeom>
+          <a:solidFill>
+            <a:srgbClr val="FFFFFF"/>
+          </a:solidFill>
+          <a:ln w="9525">
+            <a:solidFill>
+              <a:srgbClr val="E3E6EA"/>
+            </a:solidFill>
+          </a:ln>
+          <a:effectLst/>
+        </p:spPr>
+        <p:style>
+          <a:lnRef idx="1">
+            <a:schemeClr val="accent1"/>
+          </a:lnRef>
+          <a:fillRef idx="3">
+            <a:schemeClr val="accent1"/>
+          </a:fillRef>
+          <a:effectRef idx="2">
+            <a:schemeClr val="accent1"/>
+          </a:effectRef>
+          <a:fontRef idx="minor">
+            <a:schemeClr val="lt1"/>
+          </a:fontRef>
+        </p:style>
+        <p:txBody>
+          <a:bodyPr rtlCol="0" anchor="ctr" lIns="54864" rIns="54864" tIns="0" bIns="0"/>
+          <a:lstStyle/>
+          <a:p>
+            <a:r>
+              <a:rPr sz="900" b="1">
+                <a:solidFill>
+                  <a:srgbClr val="242C39"/>
+                </a:solidFill>
+              </a:rPr>
+              <a:t>White   #FFFFFF</a:t>
+            </a:r>
+          </a:p>
+        </p:txBody>
+      </p:sp>
     </p:spTree>
   </p:cSld>
   <p:clrMapOvr>
@@ -11716,6 +12226,516 @@
           </a:prstGeom>
         </p:spPr>
       </p:pic>
+      <p:sp>
+        <p:nvSpPr>
+          <p:cNvPr id="27" name="TextBox 26"/>
+          <p:cNvSpPr txBox="1"/>
+          <p:nvPr/>
+        </p:nvSpPr>
+        <p:spPr>
+          <a:xfrm>
+            <a:off x="9601200" y="365760"/>
+            <a:ext cx="2103120" cy="274320"/>
+          </a:xfrm>
+          <a:prstGeom prst="rect">
+            <a:avLst/>
+          </a:prstGeom>
+          <a:noFill/>
+        </p:spPr>
+        <p:txBody>
+          <a:bodyPr wrap="none">
+            <a:spAutoFit/>
+          </a:bodyPr>
+          <a:lstStyle/>
+          <a:p>
+            <a:r>
+              <a:rPr sz="900" b="1">
+                <a:solidFill>
+                  <a:srgbClr val="242C39"/>
+                </a:solidFill>
+              </a:rPr>
+              <a:t>CTS palette — not on the slide, eyedropper from here</a:t>
+            </a:r>
+          </a:p>
+        </p:txBody>
+      </p:sp>
+      <p:sp>
+        <p:nvSpPr>
+          <p:cNvPr id="28" name="Rounded Rectangle 27"/>
+          <p:cNvSpPr/>
+          <p:nvPr/>
+        </p:nvSpPr>
+        <p:spPr>
+          <a:xfrm>
+            <a:off x="9601200" y="676656"/>
+            <a:ext cx="2103120" cy="384048"/>
+          </a:xfrm>
+          <a:prstGeom prst="roundRect">
+            <a:avLst/>
+          </a:prstGeom>
+          <a:solidFill>
+            <a:srgbClr val="3FD0C9"/>
+          </a:solidFill>
+          <a:ln w="9525">
+            <a:solidFill>
+              <a:srgbClr val="E3E6EA"/>
+            </a:solidFill>
+          </a:ln>
+          <a:effectLst/>
+        </p:spPr>
+        <p:style>
+          <a:lnRef idx="1">
+            <a:schemeClr val="accent1"/>
+          </a:lnRef>
+          <a:fillRef idx="3">
+            <a:schemeClr val="accent1"/>
+          </a:fillRef>
+          <a:effectRef idx="2">
+            <a:schemeClr val="accent1"/>
+          </a:effectRef>
+          <a:fontRef idx="minor">
+            <a:schemeClr val="lt1"/>
+          </a:fontRef>
+        </p:style>
+        <p:txBody>
+          <a:bodyPr rtlCol="0" anchor="ctr" lIns="54864" rIns="54864" tIns="0" bIns="0"/>
+          <a:lstStyle/>
+          <a:p>
+            <a:r>
+              <a:rPr sz="900" b="1">
+                <a:solidFill>
+                  <a:srgbClr val="242C39"/>
+                </a:solidFill>
+              </a:rPr>
+              <a:t>Bright Teal   #3FD0C9   Logo green</a:t>
+            </a:r>
+          </a:p>
+        </p:txBody>
+      </p:sp>
+      <p:sp>
+        <p:nvSpPr>
+          <p:cNvPr id="29" name="Rounded Rectangle 28"/>
+          <p:cNvSpPr/>
+          <p:nvPr/>
+        </p:nvSpPr>
+        <p:spPr>
+          <a:xfrm>
+            <a:off x="9601200" y="1133856"/>
+            <a:ext cx="2103120" cy="384048"/>
+          </a:xfrm>
+          <a:prstGeom prst="roundRect">
+            <a:avLst/>
+          </a:prstGeom>
+          <a:solidFill>
+            <a:srgbClr val="005358"/>
+          </a:solidFill>
+          <a:ln w="9525">
+            <a:solidFill>
+              <a:srgbClr val="E3E6EA"/>
+            </a:solidFill>
+          </a:ln>
+          <a:effectLst/>
+        </p:spPr>
+        <p:style>
+          <a:lnRef idx="1">
+            <a:schemeClr val="accent1"/>
+          </a:lnRef>
+          <a:fillRef idx="3">
+            <a:schemeClr val="accent1"/>
+          </a:fillRef>
+          <a:effectRef idx="2">
+            <a:schemeClr val="accent1"/>
+          </a:effectRef>
+          <a:fontRef idx="minor">
+            <a:schemeClr val="lt1"/>
+          </a:fontRef>
+        </p:style>
+        <p:txBody>
+          <a:bodyPr rtlCol="0" anchor="ctr" lIns="54864" rIns="54864" tIns="0" bIns="0"/>
+          <a:lstStyle/>
+          <a:p>
+            <a:r>
+              <a:rPr sz="900" b="1">
+                <a:solidFill>
+                  <a:srgbClr val="FFFFFF"/>
+                </a:solidFill>
+              </a:rPr>
+              <a:t>Dark Teal   #005358   Production</a:t>
+            </a:r>
+          </a:p>
+        </p:txBody>
+      </p:sp>
+      <p:sp>
+        <p:nvSpPr>
+          <p:cNvPr id="30" name="Rounded Rectangle 29"/>
+          <p:cNvSpPr/>
+          <p:nvPr/>
+        </p:nvSpPr>
+        <p:spPr>
+          <a:xfrm>
+            <a:off x="9601200" y="1591056"/>
+            <a:ext cx="2103120" cy="384048"/>
+          </a:xfrm>
+          <a:prstGeom prst="roundRect">
+            <a:avLst/>
+          </a:prstGeom>
+          <a:solidFill>
+            <a:srgbClr val="6D71FF"/>
+          </a:solidFill>
+          <a:ln w="9525">
+            <a:solidFill>
+              <a:srgbClr val="E3E6EA"/>
+            </a:solidFill>
+          </a:ln>
+          <a:effectLst/>
+        </p:spPr>
+        <p:style>
+          <a:lnRef idx="1">
+            <a:schemeClr val="accent1"/>
+          </a:lnRef>
+          <a:fillRef idx="3">
+            <a:schemeClr val="accent1"/>
+          </a:fillRef>
+          <a:effectRef idx="2">
+            <a:schemeClr val="accent1"/>
+          </a:effectRef>
+          <a:fontRef idx="minor">
+            <a:schemeClr val="lt1"/>
+          </a:fontRef>
+        </p:style>
+        <p:txBody>
+          <a:bodyPr rtlCol="0" anchor="ctr" lIns="54864" rIns="54864" tIns="0" bIns="0"/>
+          <a:lstStyle/>
+          <a:p>
+            <a:r>
+              <a:rPr sz="900" b="1">
+                <a:solidFill>
+                  <a:srgbClr val="FFFFFF"/>
+                </a:solidFill>
+              </a:rPr>
+              <a:t>Primary Blue   #6D71FF   Logo blue</a:t>
+            </a:r>
+          </a:p>
+        </p:txBody>
+      </p:sp>
+      <p:sp>
+        <p:nvSpPr>
+          <p:cNvPr id="31" name="Rounded Rectangle 30"/>
+          <p:cNvSpPr/>
+          <p:nvPr/>
+        </p:nvSpPr>
+        <p:spPr>
+          <a:xfrm>
+            <a:off x="9601200" y="2048256"/>
+            <a:ext cx="2103120" cy="384048"/>
+          </a:xfrm>
+          <a:prstGeom prst="roundRect">
+            <a:avLst/>
+          </a:prstGeom>
+          <a:solidFill>
+            <a:srgbClr val="122B82"/>
+          </a:solidFill>
+          <a:ln w="9525">
+            <a:solidFill>
+              <a:srgbClr val="E3E6EA"/>
+            </a:solidFill>
+          </a:ln>
+          <a:effectLst/>
+        </p:spPr>
+        <p:style>
+          <a:lnRef idx="1">
+            <a:schemeClr val="accent1"/>
+          </a:lnRef>
+          <a:fillRef idx="3">
+            <a:schemeClr val="accent1"/>
+          </a:fillRef>
+          <a:effectRef idx="2">
+            <a:schemeClr val="accent1"/>
+          </a:effectRef>
+          <a:fontRef idx="minor">
+            <a:schemeClr val="lt1"/>
+          </a:fontRef>
+        </p:style>
+        <p:txBody>
+          <a:bodyPr rtlCol="0" anchor="ctr" lIns="54864" rIns="54864" tIns="0" bIns="0"/>
+          <a:lstStyle/>
+          <a:p>
+            <a:r>
+              <a:rPr sz="900" b="1">
+                <a:solidFill>
+                  <a:srgbClr val="FFFFFF"/>
+                </a:solidFill>
+              </a:rPr>
+              <a:t>Deep Blue   #122B82</a:t>
+            </a:r>
+          </a:p>
+        </p:txBody>
+      </p:sp>
+      <p:sp>
+        <p:nvSpPr>
+          <p:cNvPr id="32" name="Rounded Rectangle 31"/>
+          <p:cNvSpPr/>
+          <p:nvPr/>
+        </p:nvSpPr>
+        <p:spPr>
+          <a:xfrm>
+            <a:off x="9601200" y="2505456"/>
+            <a:ext cx="2103120" cy="384048"/>
+          </a:xfrm>
+          <a:prstGeom prst="roundRect">
+            <a:avLst/>
+          </a:prstGeom>
+          <a:solidFill>
+            <a:srgbClr val="F33844"/>
+          </a:solidFill>
+          <a:ln w="9525">
+            <a:solidFill>
+              <a:srgbClr val="E3E6EA"/>
+            </a:solidFill>
+          </a:ln>
+          <a:effectLst/>
+        </p:spPr>
+        <p:style>
+          <a:lnRef idx="1">
+            <a:schemeClr val="accent1"/>
+          </a:lnRef>
+          <a:fillRef idx="3">
+            <a:schemeClr val="accent1"/>
+          </a:fillRef>
+          <a:effectRef idx="2">
+            <a:schemeClr val="accent1"/>
+          </a:effectRef>
+          <a:fontRef idx="minor">
+            <a:schemeClr val="lt1"/>
+          </a:fontRef>
+        </p:style>
+        <p:txBody>
+          <a:bodyPr rtlCol="0" anchor="ctr" lIns="54864" rIns="54864" tIns="0" bIns="0"/>
+          <a:lstStyle/>
+          <a:p>
+            <a:r>
+              <a:rPr sz="900" b="1">
+                <a:solidFill>
+                  <a:srgbClr val="FFFFFF"/>
+                </a:solidFill>
+              </a:rPr>
+              <a:t>Accent Red   #F33844   Logo red, Support</a:t>
+            </a:r>
+          </a:p>
+        </p:txBody>
+      </p:sp>
+      <p:sp>
+        <p:nvSpPr>
+          <p:cNvPr id="33" name="Rounded Rectangle 32"/>
+          <p:cNvSpPr/>
+          <p:nvPr/>
+        </p:nvSpPr>
+        <p:spPr>
+          <a:xfrm>
+            <a:off x="9601200" y="2962656"/>
+            <a:ext cx="2103120" cy="384048"/>
+          </a:xfrm>
+          <a:prstGeom prst="roundRect">
+            <a:avLst/>
+          </a:prstGeom>
+          <a:solidFill>
+            <a:srgbClr val="A8052E"/>
+          </a:solidFill>
+          <a:ln w="9525">
+            <a:solidFill>
+              <a:srgbClr val="E3E6EA"/>
+            </a:solidFill>
+          </a:ln>
+          <a:effectLst/>
+        </p:spPr>
+        <p:style>
+          <a:lnRef idx="1">
+            <a:schemeClr val="accent1"/>
+          </a:lnRef>
+          <a:fillRef idx="3">
+            <a:schemeClr val="accent1"/>
+          </a:fillRef>
+          <a:effectRef idx="2">
+            <a:schemeClr val="accent1"/>
+          </a:effectRef>
+          <a:fontRef idx="minor">
+            <a:schemeClr val="lt1"/>
+          </a:fontRef>
+        </p:style>
+        <p:txBody>
+          <a:bodyPr rtlCol="0" anchor="ctr" lIns="54864" rIns="54864" tIns="0" bIns="0"/>
+          <a:lstStyle/>
+          <a:p>
+            <a:r>
+              <a:rPr sz="900" b="1">
+                <a:solidFill>
+                  <a:srgbClr val="FFFFFF"/>
+                </a:solidFill>
+              </a:rPr>
+              <a:t>Deep Red   #A8052E</a:t>
+            </a:r>
+          </a:p>
+        </p:txBody>
+      </p:sp>
+      <p:sp>
+        <p:nvSpPr>
+          <p:cNvPr id="34" name="Rounded Rectangle 33"/>
+          <p:cNvSpPr/>
+          <p:nvPr/>
+        </p:nvSpPr>
+        <p:spPr>
+          <a:xfrm>
+            <a:off x="9601200" y="3419856"/>
+            <a:ext cx="2103120" cy="384048"/>
+          </a:xfrm>
+          <a:prstGeom prst="roundRect">
+            <a:avLst/>
+          </a:prstGeom>
+          <a:solidFill>
+            <a:srgbClr val="8F4AFA"/>
+          </a:solidFill>
+          <a:ln w="9525">
+            <a:solidFill>
+              <a:srgbClr val="E3E6EA"/>
+            </a:solidFill>
+          </a:ln>
+          <a:effectLst/>
+        </p:spPr>
+        <p:style>
+          <a:lnRef idx="1">
+            <a:schemeClr val="accent1"/>
+          </a:lnRef>
+          <a:fillRef idx="3">
+            <a:schemeClr val="accent1"/>
+          </a:fillRef>
+          <a:effectRef idx="2">
+            <a:schemeClr val="accent1"/>
+          </a:effectRef>
+          <a:fontRef idx="minor">
+            <a:schemeClr val="lt1"/>
+          </a:fontRef>
+        </p:style>
+        <p:txBody>
+          <a:bodyPr rtlCol="0" anchor="ctr" lIns="54864" rIns="54864" tIns="0" bIns="0"/>
+          <a:lstStyle/>
+          <a:p>
+            <a:r>
+              <a:rPr sz="900" b="1">
+                <a:solidFill>
+                  <a:srgbClr val="FFFFFF"/>
+                </a:solidFill>
+              </a:rPr>
+              <a:t>Accent Purple   #8F4AFA   Consulting</a:t>
+            </a:r>
+          </a:p>
+        </p:txBody>
+      </p:sp>
+      <p:sp>
+        <p:nvSpPr>
+          <p:cNvPr id="35" name="Rounded Rectangle 34"/>
+          <p:cNvSpPr/>
+          <p:nvPr/>
+        </p:nvSpPr>
+        <p:spPr>
+          <a:xfrm>
+            <a:off x="9601200" y="3877056"/>
+            <a:ext cx="2103120" cy="384048"/>
+          </a:xfrm>
+          <a:prstGeom prst="roundRect">
+            <a:avLst/>
+          </a:prstGeom>
+          <a:solidFill>
+            <a:srgbClr val="242C39"/>
+          </a:solidFill>
+          <a:ln w="9525">
+            <a:solidFill>
+              <a:srgbClr val="E3E6EA"/>
+            </a:solidFill>
+          </a:ln>
+          <a:effectLst/>
+        </p:spPr>
+        <p:style>
+          <a:lnRef idx="1">
+            <a:schemeClr val="accent1"/>
+          </a:lnRef>
+          <a:fillRef idx="3">
+            <a:schemeClr val="accent1"/>
+          </a:fillRef>
+          <a:effectRef idx="2">
+            <a:schemeClr val="accent1"/>
+          </a:effectRef>
+          <a:fontRef idx="minor">
+            <a:schemeClr val="lt1"/>
+          </a:fontRef>
+        </p:style>
+        <p:txBody>
+          <a:bodyPr rtlCol="0" anchor="ctr" lIns="54864" rIns="54864" tIns="0" bIns="0"/>
+          <a:lstStyle/>
+          <a:p>
+            <a:r>
+              <a:rPr sz="900" b="1">
+                <a:solidFill>
+                  <a:srgbClr val="FFFFFF"/>
+                </a:solidFill>
+              </a:rPr>
+              <a:t>Charcoal   #242C39   Text</a:t>
+            </a:r>
+          </a:p>
+        </p:txBody>
+      </p:sp>
+      <p:sp>
+        <p:nvSpPr>
+          <p:cNvPr id="36" name="Rounded Rectangle 35"/>
+          <p:cNvSpPr/>
+          <p:nvPr/>
+        </p:nvSpPr>
+        <p:spPr>
+          <a:xfrm>
+            <a:off x="9601200" y="4334256"/>
+            <a:ext cx="2103120" cy="384048"/>
+          </a:xfrm>
+          <a:prstGeom prst="roundRect">
+            <a:avLst/>
+          </a:prstGeom>
+          <a:solidFill>
+            <a:srgbClr val="FFFFFF"/>
+          </a:solidFill>
+          <a:ln w="9525">
+            <a:solidFill>
+              <a:srgbClr val="E3E6EA"/>
+            </a:solidFill>
+          </a:ln>
+          <a:effectLst/>
+        </p:spPr>
+        <p:style>
+          <a:lnRef idx="1">
+            <a:schemeClr val="accent1"/>
+          </a:lnRef>
+          <a:fillRef idx="3">
+            <a:schemeClr val="accent1"/>
+          </a:fillRef>
+          <a:effectRef idx="2">
+            <a:schemeClr val="accent1"/>
+          </a:effectRef>
+          <a:fontRef idx="minor">
+            <a:schemeClr val="lt1"/>
+          </a:fontRef>
+        </p:style>
+        <p:txBody>
+          <a:bodyPr rtlCol="0" anchor="ctr" lIns="54864" rIns="54864" tIns="0" bIns="0"/>
+          <a:lstStyle/>
+          <a:p>
+            <a:r>
+              <a:rPr sz="900" b="1">
+                <a:solidFill>
+                  <a:srgbClr val="242C39"/>
+                </a:solidFill>
+              </a:rPr>
+              <a:t>White   #FFFFFF</a:t>
+            </a:r>
+          </a:p>
+        </p:txBody>
+      </p:sp>
     </p:spTree>
   </p:cSld>
   <p:clrMapOvr>
@@ -13755,6 +14775,516 @@
           </a:prstGeom>
         </p:spPr>
       </p:pic>
+      <p:sp>
+        <p:nvSpPr>
+          <p:cNvPr id="27" name="TextBox 26"/>
+          <p:cNvSpPr txBox="1"/>
+          <p:nvPr/>
+        </p:nvSpPr>
+        <p:spPr>
+          <a:xfrm>
+            <a:off x="9601200" y="365760"/>
+            <a:ext cx="2103120" cy="274320"/>
+          </a:xfrm>
+          <a:prstGeom prst="rect">
+            <a:avLst/>
+          </a:prstGeom>
+          <a:noFill/>
+        </p:spPr>
+        <p:txBody>
+          <a:bodyPr wrap="none">
+            <a:spAutoFit/>
+          </a:bodyPr>
+          <a:lstStyle/>
+          <a:p>
+            <a:r>
+              <a:rPr sz="900" b="1">
+                <a:solidFill>
+                  <a:srgbClr val="242C39"/>
+                </a:solidFill>
+              </a:rPr>
+              <a:t>CTS palette — not on the slide, eyedropper from here</a:t>
+            </a:r>
+          </a:p>
+        </p:txBody>
+      </p:sp>
+      <p:sp>
+        <p:nvSpPr>
+          <p:cNvPr id="28" name="Rounded Rectangle 27"/>
+          <p:cNvSpPr/>
+          <p:nvPr/>
+        </p:nvSpPr>
+        <p:spPr>
+          <a:xfrm>
+            <a:off x="9601200" y="676656"/>
+            <a:ext cx="2103120" cy="384048"/>
+          </a:xfrm>
+          <a:prstGeom prst="roundRect">
+            <a:avLst/>
+          </a:prstGeom>
+          <a:solidFill>
+            <a:srgbClr val="3FD0C9"/>
+          </a:solidFill>
+          <a:ln w="9525">
+            <a:solidFill>
+              <a:srgbClr val="E3E6EA"/>
+            </a:solidFill>
+          </a:ln>
+          <a:effectLst/>
+        </p:spPr>
+        <p:style>
+          <a:lnRef idx="1">
+            <a:schemeClr val="accent1"/>
+          </a:lnRef>
+          <a:fillRef idx="3">
+            <a:schemeClr val="accent1"/>
+          </a:fillRef>
+          <a:effectRef idx="2">
+            <a:schemeClr val="accent1"/>
+          </a:effectRef>
+          <a:fontRef idx="minor">
+            <a:schemeClr val="lt1"/>
+          </a:fontRef>
+        </p:style>
+        <p:txBody>
+          <a:bodyPr rtlCol="0" anchor="ctr" lIns="54864" rIns="54864" tIns="0" bIns="0"/>
+          <a:lstStyle/>
+          <a:p>
+            <a:r>
+              <a:rPr sz="900" b="1">
+                <a:solidFill>
+                  <a:srgbClr val="242C39"/>
+                </a:solidFill>
+              </a:rPr>
+              <a:t>Bright Teal   #3FD0C9   Logo green</a:t>
+            </a:r>
+          </a:p>
+        </p:txBody>
+      </p:sp>
+      <p:sp>
+        <p:nvSpPr>
+          <p:cNvPr id="29" name="Rounded Rectangle 28"/>
+          <p:cNvSpPr/>
+          <p:nvPr/>
+        </p:nvSpPr>
+        <p:spPr>
+          <a:xfrm>
+            <a:off x="9601200" y="1133856"/>
+            <a:ext cx="2103120" cy="384048"/>
+          </a:xfrm>
+          <a:prstGeom prst="roundRect">
+            <a:avLst/>
+          </a:prstGeom>
+          <a:solidFill>
+            <a:srgbClr val="005358"/>
+          </a:solidFill>
+          <a:ln w="9525">
+            <a:solidFill>
+              <a:srgbClr val="E3E6EA"/>
+            </a:solidFill>
+          </a:ln>
+          <a:effectLst/>
+        </p:spPr>
+        <p:style>
+          <a:lnRef idx="1">
+            <a:schemeClr val="accent1"/>
+          </a:lnRef>
+          <a:fillRef idx="3">
+            <a:schemeClr val="accent1"/>
+          </a:fillRef>
+          <a:effectRef idx="2">
+            <a:schemeClr val="accent1"/>
+          </a:effectRef>
+          <a:fontRef idx="minor">
+            <a:schemeClr val="lt1"/>
+          </a:fontRef>
+        </p:style>
+        <p:txBody>
+          <a:bodyPr rtlCol="0" anchor="ctr" lIns="54864" rIns="54864" tIns="0" bIns="0"/>
+          <a:lstStyle/>
+          <a:p>
+            <a:r>
+              <a:rPr sz="900" b="1">
+                <a:solidFill>
+                  <a:srgbClr val="FFFFFF"/>
+                </a:solidFill>
+              </a:rPr>
+              <a:t>Dark Teal   #005358   Production</a:t>
+            </a:r>
+          </a:p>
+        </p:txBody>
+      </p:sp>
+      <p:sp>
+        <p:nvSpPr>
+          <p:cNvPr id="30" name="Rounded Rectangle 29"/>
+          <p:cNvSpPr/>
+          <p:nvPr/>
+        </p:nvSpPr>
+        <p:spPr>
+          <a:xfrm>
+            <a:off x="9601200" y="1591056"/>
+            <a:ext cx="2103120" cy="384048"/>
+          </a:xfrm>
+          <a:prstGeom prst="roundRect">
+            <a:avLst/>
+          </a:prstGeom>
+          <a:solidFill>
+            <a:srgbClr val="6D71FF"/>
+          </a:solidFill>
+          <a:ln w="9525">
+            <a:solidFill>
+              <a:srgbClr val="E3E6EA"/>
+            </a:solidFill>
+          </a:ln>
+          <a:effectLst/>
+        </p:spPr>
+        <p:style>
+          <a:lnRef idx="1">
+            <a:schemeClr val="accent1"/>
+          </a:lnRef>
+          <a:fillRef idx="3">
+            <a:schemeClr val="accent1"/>
+          </a:fillRef>
+          <a:effectRef idx="2">
+            <a:schemeClr val="accent1"/>
+          </a:effectRef>
+          <a:fontRef idx="minor">
+            <a:schemeClr val="lt1"/>
+          </a:fontRef>
+        </p:style>
+        <p:txBody>
+          <a:bodyPr rtlCol="0" anchor="ctr" lIns="54864" rIns="54864" tIns="0" bIns="0"/>
+          <a:lstStyle/>
+          <a:p>
+            <a:r>
+              <a:rPr sz="900" b="1">
+                <a:solidFill>
+                  <a:srgbClr val="FFFFFF"/>
+                </a:solidFill>
+              </a:rPr>
+              <a:t>Primary Blue   #6D71FF   Logo blue</a:t>
+            </a:r>
+          </a:p>
+        </p:txBody>
+      </p:sp>
+      <p:sp>
+        <p:nvSpPr>
+          <p:cNvPr id="31" name="Rounded Rectangle 30"/>
+          <p:cNvSpPr/>
+          <p:nvPr/>
+        </p:nvSpPr>
+        <p:spPr>
+          <a:xfrm>
+            <a:off x="9601200" y="2048256"/>
+            <a:ext cx="2103120" cy="384048"/>
+          </a:xfrm>
+          <a:prstGeom prst="roundRect">
+            <a:avLst/>
+          </a:prstGeom>
+          <a:solidFill>
+            <a:srgbClr val="122B82"/>
+          </a:solidFill>
+          <a:ln w="9525">
+            <a:solidFill>
+              <a:srgbClr val="E3E6EA"/>
+            </a:solidFill>
+          </a:ln>
+          <a:effectLst/>
+        </p:spPr>
+        <p:style>
+          <a:lnRef idx="1">
+            <a:schemeClr val="accent1"/>
+          </a:lnRef>
+          <a:fillRef idx="3">
+            <a:schemeClr val="accent1"/>
+          </a:fillRef>
+          <a:effectRef idx="2">
+            <a:schemeClr val="accent1"/>
+          </a:effectRef>
+          <a:fontRef idx="minor">
+            <a:schemeClr val="lt1"/>
+          </a:fontRef>
+        </p:style>
+        <p:txBody>
+          <a:bodyPr rtlCol="0" anchor="ctr" lIns="54864" rIns="54864" tIns="0" bIns="0"/>
+          <a:lstStyle/>
+          <a:p>
+            <a:r>
+              <a:rPr sz="900" b="1">
+                <a:solidFill>
+                  <a:srgbClr val="FFFFFF"/>
+                </a:solidFill>
+              </a:rPr>
+              <a:t>Deep Blue   #122B82</a:t>
+            </a:r>
+          </a:p>
+        </p:txBody>
+      </p:sp>
+      <p:sp>
+        <p:nvSpPr>
+          <p:cNvPr id="32" name="Rounded Rectangle 31"/>
+          <p:cNvSpPr/>
+          <p:nvPr/>
+        </p:nvSpPr>
+        <p:spPr>
+          <a:xfrm>
+            <a:off x="9601200" y="2505456"/>
+            <a:ext cx="2103120" cy="384048"/>
+          </a:xfrm>
+          <a:prstGeom prst="roundRect">
+            <a:avLst/>
+          </a:prstGeom>
+          <a:solidFill>
+            <a:srgbClr val="F33844"/>
+          </a:solidFill>
+          <a:ln w="9525">
+            <a:solidFill>
+              <a:srgbClr val="E3E6EA"/>
+            </a:solidFill>
+          </a:ln>
+          <a:effectLst/>
+        </p:spPr>
+        <p:style>
+          <a:lnRef idx="1">
+            <a:schemeClr val="accent1"/>
+          </a:lnRef>
+          <a:fillRef idx="3">
+            <a:schemeClr val="accent1"/>
+          </a:fillRef>
+          <a:effectRef idx="2">
+            <a:schemeClr val="accent1"/>
+          </a:effectRef>
+          <a:fontRef idx="minor">
+            <a:schemeClr val="lt1"/>
+          </a:fontRef>
+        </p:style>
+        <p:txBody>
+          <a:bodyPr rtlCol="0" anchor="ctr" lIns="54864" rIns="54864" tIns="0" bIns="0"/>
+          <a:lstStyle/>
+          <a:p>
+            <a:r>
+              <a:rPr sz="900" b="1">
+                <a:solidFill>
+                  <a:srgbClr val="FFFFFF"/>
+                </a:solidFill>
+              </a:rPr>
+              <a:t>Accent Red   #F33844   Logo red, Support</a:t>
+            </a:r>
+          </a:p>
+        </p:txBody>
+      </p:sp>
+      <p:sp>
+        <p:nvSpPr>
+          <p:cNvPr id="33" name="Rounded Rectangle 32"/>
+          <p:cNvSpPr/>
+          <p:nvPr/>
+        </p:nvSpPr>
+        <p:spPr>
+          <a:xfrm>
+            <a:off x="9601200" y="2962656"/>
+            <a:ext cx="2103120" cy="384048"/>
+          </a:xfrm>
+          <a:prstGeom prst="roundRect">
+            <a:avLst/>
+          </a:prstGeom>
+          <a:solidFill>
+            <a:srgbClr val="A8052E"/>
+          </a:solidFill>
+          <a:ln w="9525">
+            <a:solidFill>
+              <a:srgbClr val="E3E6EA"/>
+            </a:solidFill>
+          </a:ln>
+          <a:effectLst/>
+        </p:spPr>
+        <p:style>
+          <a:lnRef idx="1">
+            <a:schemeClr val="accent1"/>
+          </a:lnRef>
+          <a:fillRef idx="3">
+            <a:schemeClr val="accent1"/>
+          </a:fillRef>
+          <a:effectRef idx="2">
+            <a:schemeClr val="accent1"/>
+          </a:effectRef>
+          <a:fontRef idx="minor">
+            <a:schemeClr val="lt1"/>
+          </a:fontRef>
+        </p:style>
+        <p:txBody>
+          <a:bodyPr rtlCol="0" anchor="ctr" lIns="54864" rIns="54864" tIns="0" bIns="0"/>
+          <a:lstStyle/>
+          <a:p>
+            <a:r>
+              <a:rPr sz="900" b="1">
+                <a:solidFill>
+                  <a:srgbClr val="FFFFFF"/>
+                </a:solidFill>
+              </a:rPr>
+              <a:t>Deep Red   #A8052E</a:t>
+            </a:r>
+          </a:p>
+        </p:txBody>
+      </p:sp>
+      <p:sp>
+        <p:nvSpPr>
+          <p:cNvPr id="34" name="Rounded Rectangle 33"/>
+          <p:cNvSpPr/>
+          <p:nvPr/>
+        </p:nvSpPr>
+        <p:spPr>
+          <a:xfrm>
+            <a:off x="9601200" y="3419856"/>
+            <a:ext cx="2103120" cy="384048"/>
+          </a:xfrm>
+          <a:prstGeom prst="roundRect">
+            <a:avLst/>
+          </a:prstGeom>
+          <a:solidFill>
+            <a:srgbClr val="8F4AFA"/>
+          </a:solidFill>
+          <a:ln w="9525">
+            <a:solidFill>
+              <a:srgbClr val="E3E6EA"/>
+            </a:solidFill>
+          </a:ln>
+          <a:effectLst/>
+        </p:spPr>
+        <p:style>
+          <a:lnRef idx="1">
+            <a:schemeClr val="accent1"/>
+          </a:lnRef>
+          <a:fillRef idx="3">
+            <a:schemeClr val="accent1"/>
+          </a:fillRef>
+          <a:effectRef idx="2">
+            <a:schemeClr val="accent1"/>
+          </a:effectRef>
+          <a:fontRef idx="minor">
+            <a:schemeClr val="lt1"/>
+          </a:fontRef>
+        </p:style>
+        <p:txBody>
+          <a:bodyPr rtlCol="0" anchor="ctr" lIns="54864" rIns="54864" tIns="0" bIns="0"/>
+          <a:lstStyle/>
+          <a:p>
+            <a:r>
+              <a:rPr sz="900" b="1">
+                <a:solidFill>
+                  <a:srgbClr val="FFFFFF"/>
+                </a:solidFill>
+              </a:rPr>
+              <a:t>Accent Purple   #8F4AFA   Consulting</a:t>
+            </a:r>
+          </a:p>
+        </p:txBody>
+      </p:sp>
+      <p:sp>
+        <p:nvSpPr>
+          <p:cNvPr id="35" name="Rounded Rectangle 34"/>
+          <p:cNvSpPr/>
+          <p:nvPr/>
+        </p:nvSpPr>
+        <p:spPr>
+          <a:xfrm>
+            <a:off x="9601200" y="3877056"/>
+            <a:ext cx="2103120" cy="384048"/>
+          </a:xfrm>
+          <a:prstGeom prst="roundRect">
+            <a:avLst/>
+          </a:prstGeom>
+          <a:solidFill>
+            <a:srgbClr val="242C39"/>
+          </a:solidFill>
+          <a:ln w="9525">
+            <a:solidFill>
+              <a:srgbClr val="E3E6EA"/>
+            </a:solidFill>
+          </a:ln>
+          <a:effectLst/>
+        </p:spPr>
+        <p:style>
+          <a:lnRef idx="1">
+            <a:schemeClr val="accent1"/>
+          </a:lnRef>
+          <a:fillRef idx="3">
+            <a:schemeClr val="accent1"/>
+          </a:fillRef>
+          <a:effectRef idx="2">
+            <a:schemeClr val="accent1"/>
+          </a:effectRef>
+          <a:fontRef idx="minor">
+            <a:schemeClr val="lt1"/>
+          </a:fontRef>
+        </p:style>
+        <p:txBody>
+          <a:bodyPr rtlCol="0" anchor="ctr" lIns="54864" rIns="54864" tIns="0" bIns="0"/>
+          <a:lstStyle/>
+          <a:p>
+            <a:r>
+              <a:rPr sz="900" b="1">
+                <a:solidFill>
+                  <a:srgbClr val="FFFFFF"/>
+                </a:solidFill>
+              </a:rPr>
+              <a:t>Charcoal   #242C39   Text</a:t>
+            </a:r>
+          </a:p>
+        </p:txBody>
+      </p:sp>
+      <p:sp>
+        <p:nvSpPr>
+          <p:cNvPr id="36" name="Rounded Rectangle 35"/>
+          <p:cNvSpPr/>
+          <p:nvPr/>
+        </p:nvSpPr>
+        <p:spPr>
+          <a:xfrm>
+            <a:off x="9601200" y="4334256"/>
+            <a:ext cx="2103120" cy="384048"/>
+          </a:xfrm>
+          <a:prstGeom prst="roundRect">
+            <a:avLst/>
+          </a:prstGeom>
+          <a:solidFill>
+            <a:srgbClr val="FFFFFF"/>
+          </a:solidFill>
+          <a:ln w="9525">
+            <a:solidFill>
+              <a:srgbClr val="E3E6EA"/>
+            </a:solidFill>
+          </a:ln>
+          <a:effectLst/>
+        </p:spPr>
+        <p:style>
+          <a:lnRef idx="1">
+            <a:schemeClr val="accent1"/>
+          </a:lnRef>
+          <a:fillRef idx="3">
+            <a:schemeClr val="accent1"/>
+          </a:fillRef>
+          <a:effectRef idx="2">
+            <a:schemeClr val="accent1"/>
+          </a:effectRef>
+          <a:fontRef idx="minor">
+            <a:schemeClr val="lt1"/>
+          </a:fontRef>
+        </p:style>
+        <p:txBody>
+          <a:bodyPr rtlCol="0" anchor="ctr" lIns="54864" rIns="54864" tIns="0" bIns="0"/>
+          <a:lstStyle/>
+          <a:p>
+            <a:r>
+              <a:rPr sz="900" b="1">
+                <a:solidFill>
+                  <a:srgbClr val="242C39"/>
+                </a:solidFill>
+              </a:rPr>
+              <a:t>White   #FFFFFF</a:t>
+            </a:r>
+          </a:p>
+        </p:txBody>
+      </p:sp>
     </p:spTree>
   </p:cSld>
   <p:clrMapOvr>
@@ -14175,6 +15705,516 @@
           </a:prstGeom>
         </p:spPr>
       </p:pic>
+      <p:sp>
+        <p:nvSpPr>
+          <p:cNvPr id="27" name="TextBox 26"/>
+          <p:cNvSpPr txBox="1"/>
+          <p:nvPr/>
+        </p:nvSpPr>
+        <p:spPr>
+          <a:xfrm>
+            <a:off x="9601200" y="365760"/>
+            <a:ext cx="2103120" cy="274320"/>
+          </a:xfrm>
+          <a:prstGeom prst="rect">
+            <a:avLst/>
+          </a:prstGeom>
+          <a:noFill/>
+        </p:spPr>
+        <p:txBody>
+          <a:bodyPr wrap="none">
+            <a:spAutoFit/>
+          </a:bodyPr>
+          <a:lstStyle/>
+          <a:p>
+            <a:r>
+              <a:rPr sz="900" b="1">
+                <a:solidFill>
+                  <a:srgbClr val="242C39"/>
+                </a:solidFill>
+              </a:rPr>
+              <a:t>CTS palette — not on the slide, eyedropper from here</a:t>
+            </a:r>
+          </a:p>
+        </p:txBody>
+      </p:sp>
+      <p:sp>
+        <p:nvSpPr>
+          <p:cNvPr id="28" name="Rounded Rectangle 27"/>
+          <p:cNvSpPr/>
+          <p:nvPr/>
+        </p:nvSpPr>
+        <p:spPr>
+          <a:xfrm>
+            <a:off x="9601200" y="676656"/>
+            <a:ext cx="2103120" cy="384048"/>
+          </a:xfrm>
+          <a:prstGeom prst="roundRect">
+            <a:avLst/>
+          </a:prstGeom>
+          <a:solidFill>
+            <a:srgbClr val="3FD0C9"/>
+          </a:solidFill>
+          <a:ln w="9525">
+            <a:solidFill>
+              <a:srgbClr val="E3E6EA"/>
+            </a:solidFill>
+          </a:ln>
+          <a:effectLst/>
+        </p:spPr>
+        <p:style>
+          <a:lnRef idx="1">
+            <a:schemeClr val="accent1"/>
+          </a:lnRef>
+          <a:fillRef idx="3">
+            <a:schemeClr val="accent1"/>
+          </a:fillRef>
+          <a:effectRef idx="2">
+            <a:schemeClr val="accent1"/>
+          </a:effectRef>
+          <a:fontRef idx="minor">
+            <a:schemeClr val="lt1"/>
+          </a:fontRef>
+        </p:style>
+        <p:txBody>
+          <a:bodyPr rtlCol="0" anchor="ctr" lIns="54864" rIns="54864" tIns="0" bIns="0"/>
+          <a:lstStyle/>
+          <a:p>
+            <a:r>
+              <a:rPr sz="900" b="1">
+                <a:solidFill>
+                  <a:srgbClr val="242C39"/>
+                </a:solidFill>
+              </a:rPr>
+              <a:t>Bright Teal   #3FD0C9   Logo green</a:t>
+            </a:r>
+          </a:p>
+        </p:txBody>
+      </p:sp>
+      <p:sp>
+        <p:nvSpPr>
+          <p:cNvPr id="29" name="Rounded Rectangle 28"/>
+          <p:cNvSpPr/>
+          <p:nvPr/>
+        </p:nvSpPr>
+        <p:spPr>
+          <a:xfrm>
+            <a:off x="9601200" y="1133856"/>
+            <a:ext cx="2103120" cy="384048"/>
+          </a:xfrm>
+          <a:prstGeom prst="roundRect">
+            <a:avLst/>
+          </a:prstGeom>
+          <a:solidFill>
+            <a:srgbClr val="005358"/>
+          </a:solidFill>
+          <a:ln w="9525">
+            <a:solidFill>
+              <a:srgbClr val="E3E6EA"/>
+            </a:solidFill>
+          </a:ln>
+          <a:effectLst/>
+        </p:spPr>
+        <p:style>
+          <a:lnRef idx="1">
+            <a:schemeClr val="accent1"/>
+          </a:lnRef>
+          <a:fillRef idx="3">
+            <a:schemeClr val="accent1"/>
+          </a:fillRef>
+          <a:effectRef idx="2">
+            <a:schemeClr val="accent1"/>
+          </a:effectRef>
+          <a:fontRef idx="minor">
+            <a:schemeClr val="lt1"/>
+          </a:fontRef>
+        </p:style>
+        <p:txBody>
+          <a:bodyPr rtlCol="0" anchor="ctr" lIns="54864" rIns="54864" tIns="0" bIns="0"/>
+          <a:lstStyle/>
+          <a:p>
+            <a:r>
+              <a:rPr sz="900" b="1">
+                <a:solidFill>
+                  <a:srgbClr val="FFFFFF"/>
+                </a:solidFill>
+              </a:rPr>
+              <a:t>Dark Teal   #005358   Production</a:t>
+            </a:r>
+          </a:p>
+        </p:txBody>
+      </p:sp>
+      <p:sp>
+        <p:nvSpPr>
+          <p:cNvPr id="30" name="Rounded Rectangle 29"/>
+          <p:cNvSpPr/>
+          <p:nvPr/>
+        </p:nvSpPr>
+        <p:spPr>
+          <a:xfrm>
+            <a:off x="9601200" y="1591056"/>
+            <a:ext cx="2103120" cy="384048"/>
+          </a:xfrm>
+          <a:prstGeom prst="roundRect">
+            <a:avLst/>
+          </a:prstGeom>
+          <a:solidFill>
+            <a:srgbClr val="6D71FF"/>
+          </a:solidFill>
+          <a:ln w="9525">
+            <a:solidFill>
+              <a:srgbClr val="E3E6EA"/>
+            </a:solidFill>
+          </a:ln>
+          <a:effectLst/>
+        </p:spPr>
+        <p:style>
+          <a:lnRef idx="1">
+            <a:schemeClr val="accent1"/>
+          </a:lnRef>
+          <a:fillRef idx="3">
+            <a:schemeClr val="accent1"/>
+          </a:fillRef>
+          <a:effectRef idx="2">
+            <a:schemeClr val="accent1"/>
+          </a:effectRef>
+          <a:fontRef idx="minor">
+            <a:schemeClr val="lt1"/>
+          </a:fontRef>
+        </p:style>
+        <p:txBody>
+          <a:bodyPr rtlCol="0" anchor="ctr" lIns="54864" rIns="54864" tIns="0" bIns="0"/>
+          <a:lstStyle/>
+          <a:p>
+            <a:r>
+              <a:rPr sz="900" b="1">
+                <a:solidFill>
+                  <a:srgbClr val="FFFFFF"/>
+                </a:solidFill>
+              </a:rPr>
+              <a:t>Primary Blue   #6D71FF   Logo blue</a:t>
+            </a:r>
+          </a:p>
+        </p:txBody>
+      </p:sp>
+      <p:sp>
+        <p:nvSpPr>
+          <p:cNvPr id="31" name="Rounded Rectangle 30"/>
+          <p:cNvSpPr/>
+          <p:nvPr/>
+        </p:nvSpPr>
+        <p:spPr>
+          <a:xfrm>
+            <a:off x="9601200" y="2048256"/>
+            <a:ext cx="2103120" cy="384048"/>
+          </a:xfrm>
+          <a:prstGeom prst="roundRect">
+            <a:avLst/>
+          </a:prstGeom>
+          <a:solidFill>
+            <a:srgbClr val="122B82"/>
+          </a:solidFill>
+          <a:ln w="9525">
+            <a:solidFill>
+              <a:srgbClr val="E3E6EA"/>
+            </a:solidFill>
+          </a:ln>
+          <a:effectLst/>
+        </p:spPr>
+        <p:style>
+          <a:lnRef idx="1">
+            <a:schemeClr val="accent1"/>
+          </a:lnRef>
+          <a:fillRef idx="3">
+            <a:schemeClr val="accent1"/>
+          </a:fillRef>
+          <a:effectRef idx="2">
+            <a:schemeClr val="accent1"/>
+          </a:effectRef>
+          <a:fontRef idx="minor">
+            <a:schemeClr val="lt1"/>
+          </a:fontRef>
+        </p:style>
+        <p:txBody>
+          <a:bodyPr rtlCol="0" anchor="ctr" lIns="54864" rIns="54864" tIns="0" bIns="0"/>
+          <a:lstStyle/>
+          <a:p>
+            <a:r>
+              <a:rPr sz="900" b="1">
+                <a:solidFill>
+                  <a:srgbClr val="FFFFFF"/>
+                </a:solidFill>
+              </a:rPr>
+              <a:t>Deep Blue   #122B82</a:t>
+            </a:r>
+          </a:p>
+        </p:txBody>
+      </p:sp>
+      <p:sp>
+        <p:nvSpPr>
+          <p:cNvPr id="32" name="Rounded Rectangle 31"/>
+          <p:cNvSpPr/>
+          <p:nvPr/>
+        </p:nvSpPr>
+        <p:spPr>
+          <a:xfrm>
+            <a:off x="9601200" y="2505456"/>
+            <a:ext cx="2103120" cy="384048"/>
+          </a:xfrm>
+          <a:prstGeom prst="roundRect">
+            <a:avLst/>
+          </a:prstGeom>
+          <a:solidFill>
+            <a:srgbClr val="F33844"/>
+          </a:solidFill>
+          <a:ln w="9525">
+            <a:solidFill>
+              <a:srgbClr val="E3E6EA"/>
+            </a:solidFill>
+          </a:ln>
+          <a:effectLst/>
+        </p:spPr>
+        <p:style>
+          <a:lnRef idx="1">
+            <a:schemeClr val="accent1"/>
+          </a:lnRef>
+          <a:fillRef idx="3">
+            <a:schemeClr val="accent1"/>
+          </a:fillRef>
+          <a:effectRef idx="2">
+            <a:schemeClr val="accent1"/>
+          </a:effectRef>
+          <a:fontRef idx="minor">
+            <a:schemeClr val="lt1"/>
+          </a:fontRef>
+        </p:style>
+        <p:txBody>
+          <a:bodyPr rtlCol="0" anchor="ctr" lIns="54864" rIns="54864" tIns="0" bIns="0"/>
+          <a:lstStyle/>
+          <a:p>
+            <a:r>
+              <a:rPr sz="900" b="1">
+                <a:solidFill>
+                  <a:srgbClr val="FFFFFF"/>
+                </a:solidFill>
+              </a:rPr>
+              <a:t>Accent Red   #F33844   Logo red, Support</a:t>
+            </a:r>
+          </a:p>
+        </p:txBody>
+      </p:sp>
+      <p:sp>
+        <p:nvSpPr>
+          <p:cNvPr id="33" name="Rounded Rectangle 32"/>
+          <p:cNvSpPr/>
+          <p:nvPr/>
+        </p:nvSpPr>
+        <p:spPr>
+          <a:xfrm>
+            <a:off x="9601200" y="2962656"/>
+            <a:ext cx="2103120" cy="384048"/>
+          </a:xfrm>
+          <a:prstGeom prst="roundRect">
+            <a:avLst/>
+          </a:prstGeom>
+          <a:solidFill>
+            <a:srgbClr val="A8052E"/>
+          </a:solidFill>
+          <a:ln w="9525">
+            <a:solidFill>
+              <a:srgbClr val="E3E6EA"/>
+            </a:solidFill>
+          </a:ln>
+          <a:effectLst/>
+        </p:spPr>
+        <p:style>
+          <a:lnRef idx="1">
+            <a:schemeClr val="accent1"/>
+          </a:lnRef>
+          <a:fillRef idx="3">
+            <a:schemeClr val="accent1"/>
+          </a:fillRef>
+          <a:effectRef idx="2">
+            <a:schemeClr val="accent1"/>
+          </a:effectRef>
+          <a:fontRef idx="minor">
+            <a:schemeClr val="lt1"/>
+          </a:fontRef>
+        </p:style>
+        <p:txBody>
+          <a:bodyPr rtlCol="0" anchor="ctr" lIns="54864" rIns="54864" tIns="0" bIns="0"/>
+          <a:lstStyle/>
+          <a:p>
+            <a:r>
+              <a:rPr sz="900" b="1">
+                <a:solidFill>
+                  <a:srgbClr val="FFFFFF"/>
+                </a:solidFill>
+              </a:rPr>
+              <a:t>Deep Red   #A8052E</a:t>
+            </a:r>
+          </a:p>
+        </p:txBody>
+      </p:sp>
+      <p:sp>
+        <p:nvSpPr>
+          <p:cNvPr id="34" name="Rounded Rectangle 33"/>
+          <p:cNvSpPr/>
+          <p:nvPr/>
+        </p:nvSpPr>
+        <p:spPr>
+          <a:xfrm>
+            <a:off x="9601200" y="3419856"/>
+            <a:ext cx="2103120" cy="384048"/>
+          </a:xfrm>
+          <a:prstGeom prst="roundRect">
+            <a:avLst/>
+          </a:prstGeom>
+          <a:solidFill>
+            <a:srgbClr val="8F4AFA"/>
+          </a:solidFill>
+          <a:ln w="9525">
+            <a:solidFill>
+              <a:srgbClr val="E3E6EA"/>
+            </a:solidFill>
+          </a:ln>
+          <a:effectLst/>
+        </p:spPr>
+        <p:style>
+          <a:lnRef idx="1">
+            <a:schemeClr val="accent1"/>
+          </a:lnRef>
+          <a:fillRef idx="3">
+            <a:schemeClr val="accent1"/>
+          </a:fillRef>
+          <a:effectRef idx="2">
+            <a:schemeClr val="accent1"/>
+          </a:effectRef>
+          <a:fontRef idx="minor">
+            <a:schemeClr val="lt1"/>
+          </a:fontRef>
+        </p:style>
+        <p:txBody>
+          <a:bodyPr rtlCol="0" anchor="ctr" lIns="54864" rIns="54864" tIns="0" bIns="0"/>
+          <a:lstStyle/>
+          <a:p>
+            <a:r>
+              <a:rPr sz="900" b="1">
+                <a:solidFill>
+                  <a:srgbClr val="FFFFFF"/>
+                </a:solidFill>
+              </a:rPr>
+              <a:t>Accent Purple   #8F4AFA   Consulting</a:t>
+            </a:r>
+          </a:p>
+        </p:txBody>
+      </p:sp>
+      <p:sp>
+        <p:nvSpPr>
+          <p:cNvPr id="35" name="Rounded Rectangle 34"/>
+          <p:cNvSpPr/>
+          <p:nvPr/>
+        </p:nvSpPr>
+        <p:spPr>
+          <a:xfrm>
+            <a:off x="9601200" y="3877056"/>
+            <a:ext cx="2103120" cy="384048"/>
+          </a:xfrm>
+          <a:prstGeom prst="roundRect">
+            <a:avLst/>
+          </a:prstGeom>
+          <a:solidFill>
+            <a:srgbClr val="242C39"/>
+          </a:solidFill>
+          <a:ln w="9525">
+            <a:solidFill>
+              <a:srgbClr val="E3E6EA"/>
+            </a:solidFill>
+          </a:ln>
+          <a:effectLst/>
+        </p:spPr>
+        <p:style>
+          <a:lnRef idx="1">
+            <a:schemeClr val="accent1"/>
+          </a:lnRef>
+          <a:fillRef idx="3">
+            <a:schemeClr val="accent1"/>
+          </a:fillRef>
+          <a:effectRef idx="2">
+            <a:schemeClr val="accent1"/>
+          </a:effectRef>
+          <a:fontRef idx="minor">
+            <a:schemeClr val="lt1"/>
+          </a:fontRef>
+        </p:style>
+        <p:txBody>
+          <a:bodyPr rtlCol="0" anchor="ctr" lIns="54864" rIns="54864" tIns="0" bIns="0"/>
+          <a:lstStyle/>
+          <a:p>
+            <a:r>
+              <a:rPr sz="900" b="1">
+                <a:solidFill>
+                  <a:srgbClr val="FFFFFF"/>
+                </a:solidFill>
+              </a:rPr>
+              <a:t>Charcoal   #242C39   Text</a:t>
+            </a:r>
+          </a:p>
+        </p:txBody>
+      </p:sp>
+      <p:sp>
+        <p:nvSpPr>
+          <p:cNvPr id="36" name="Rounded Rectangle 35"/>
+          <p:cNvSpPr/>
+          <p:nvPr/>
+        </p:nvSpPr>
+        <p:spPr>
+          <a:xfrm>
+            <a:off x="9601200" y="4334256"/>
+            <a:ext cx="2103120" cy="384048"/>
+          </a:xfrm>
+          <a:prstGeom prst="roundRect">
+            <a:avLst/>
+          </a:prstGeom>
+          <a:solidFill>
+            <a:srgbClr val="FFFFFF"/>
+          </a:solidFill>
+          <a:ln w="9525">
+            <a:solidFill>
+              <a:srgbClr val="E3E6EA"/>
+            </a:solidFill>
+          </a:ln>
+          <a:effectLst/>
+        </p:spPr>
+        <p:style>
+          <a:lnRef idx="1">
+            <a:schemeClr val="accent1"/>
+          </a:lnRef>
+          <a:fillRef idx="3">
+            <a:schemeClr val="accent1"/>
+          </a:fillRef>
+          <a:effectRef idx="2">
+            <a:schemeClr val="accent1"/>
+          </a:effectRef>
+          <a:fontRef idx="minor">
+            <a:schemeClr val="lt1"/>
+          </a:fontRef>
+        </p:style>
+        <p:txBody>
+          <a:bodyPr rtlCol="0" anchor="ctr" lIns="54864" rIns="54864" tIns="0" bIns="0"/>
+          <a:lstStyle/>
+          <a:p>
+            <a:r>
+              <a:rPr sz="900" b="1">
+                <a:solidFill>
+                  <a:srgbClr val="242C39"/>
+                </a:solidFill>
+              </a:rPr>
+              <a:t>White   #FFFFFF</a:t>
+            </a:r>
+          </a:p>
+        </p:txBody>
+      </p:sp>
     </p:spTree>
   </p:cSld>
   <p:clrMapOvr>
@@ -14374,6 +16414,516 @@
               <a:t>12</a:t>
             </a:fld>
             <a:endParaRPr lang="en-US"/>
+          </a:p>
+        </p:txBody>
+      </p:sp>
+      <p:sp>
+        <p:nvSpPr>
+          <p:cNvPr id="26" name="TextBox 25"/>
+          <p:cNvSpPr txBox="1"/>
+          <p:nvPr/>
+        </p:nvSpPr>
+        <p:spPr>
+          <a:xfrm>
+            <a:off x="9601200" y="365760"/>
+            <a:ext cx="2103120" cy="274320"/>
+          </a:xfrm>
+          <a:prstGeom prst="rect">
+            <a:avLst/>
+          </a:prstGeom>
+          <a:noFill/>
+        </p:spPr>
+        <p:txBody>
+          <a:bodyPr wrap="none">
+            <a:spAutoFit/>
+          </a:bodyPr>
+          <a:lstStyle/>
+          <a:p>
+            <a:r>
+              <a:rPr sz="900" b="1">
+                <a:solidFill>
+                  <a:srgbClr val="242C39"/>
+                </a:solidFill>
+              </a:rPr>
+              <a:t>CTS palette — not on the slide, eyedropper from here</a:t>
+            </a:r>
+          </a:p>
+        </p:txBody>
+      </p:sp>
+      <p:sp>
+        <p:nvSpPr>
+          <p:cNvPr id="27" name="Rounded Rectangle 26"/>
+          <p:cNvSpPr/>
+          <p:nvPr/>
+        </p:nvSpPr>
+        <p:spPr>
+          <a:xfrm>
+            <a:off x="9601200" y="676656"/>
+            <a:ext cx="2103120" cy="384048"/>
+          </a:xfrm>
+          <a:prstGeom prst="roundRect">
+            <a:avLst/>
+          </a:prstGeom>
+          <a:solidFill>
+            <a:srgbClr val="3FD0C9"/>
+          </a:solidFill>
+          <a:ln w="9525">
+            <a:solidFill>
+              <a:srgbClr val="E3E6EA"/>
+            </a:solidFill>
+          </a:ln>
+          <a:effectLst/>
+        </p:spPr>
+        <p:style>
+          <a:lnRef idx="1">
+            <a:schemeClr val="accent1"/>
+          </a:lnRef>
+          <a:fillRef idx="3">
+            <a:schemeClr val="accent1"/>
+          </a:fillRef>
+          <a:effectRef idx="2">
+            <a:schemeClr val="accent1"/>
+          </a:effectRef>
+          <a:fontRef idx="minor">
+            <a:schemeClr val="lt1"/>
+          </a:fontRef>
+        </p:style>
+        <p:txBody>
+          <a:bodyPr rtlCol="0" anchor="ctr" lIns="54864" rIns="54864" tIns="0" bIns="0"/>
+          <a:lstStyle/>
+          <a:p>
+            <a:r>
+              <a:rPr sz="900" b="1">
+                <a:solidFill>
+                  <a:srgbClr val="242C39"/>
+                </a:solidFill>
+              </a:rPr>
+              <a:t>Bright Teal   #3FD0C9   Logo green</a:t>
+            </a:r>
+          </a:p>
+        </p:txBody>
+      </p:sp>
+      <p:sp>
+        <p:nvSpPr>
+          <p:cNvPr id="28" name="Rounded Rectangle 27"/>
+          <p:cNvSpPr/>
+          <p:nvPr/>
+        </p:nvSpPr>
+        <p:spPr>
+          <a:xfrm>
+            <a:off x="9601200" y="1133856"/>
+            <a:ext cx="2103120" cy="384048"/>
+          </a:xfrm>
+          <a:prstGeom prst="roundRect">
+            <a:avLst/>
+          </a:prstGeom>
+          <a:solidFill>
+            <a:srgbClr val="005358"/>
+          </a:solidFill>
+          <a:ln w="9525">
+            <a:solidFill>
+              <a:srgbClr val="E3E6EA"/>
+            </a:solidFill>
+          </a:ln>
+          <a:effectLst/>
+        </p:spPr>
+        <p:style>
+          <a:lnRef idx="1">
+            <a:schemeClr val="accent1"/>
+          </a:lnRef>
+          <a:fillRef idx="3">
+            <a:schemeClr val="accent1"/>
+          </a:fillRef>
+          <a:effectRef idx="2">
+            <a:schemeClr val="accent1"/>
+          </a:effectRef>
+          <a:fontRef idx="minor">
+            <a:schemeClr val="lt1"/>
+          </a:fontRef>
+        </p:style>
+        <p:txBody>
+          <a:bodyPr rtlCol="0" anchor="ctr" lIns="54864" rIns="54864" tIns="0" bIns="0"/>
+          <a:lstStyle/>
+          <a:p>
+            <a:r>
+              <a:rPr sz="900" b="1">
+                <a:solidFill>
+                  <a:srgbClr val="FFFFFF"/>
+                </a:solidFill>
+              </a:rPr>
+              <a:t>Dark Teal   #005358   Production</a:t>
+            </a:r>
+          </a:p>
+        </p:txBody>
+      </p:sp>
+      <p:sp>
+        <p:nvSpPr>
+          <p:cNvPr id="29" name="Rounded Rectangle 28"/>
+          <p:cNvSpPr/>
+          <p:nvPr/>
+        </p:nvSpPr>
+        <p:spPr>
+          <a:xfrm>
+            <a:off x="9601200" y="1591056"/>
+            <a:ext cx="2103120" cy="384048"/>
+          </a:xfrm>
+          <a:prstGeom prst="roundRect">
+            <a:avLst/>
+          </a:prstGeom>
+          <a:solidFill>
+            <a:srgbClr val="6D71FF"/>
+          </a:solidFill>
+          <a:ln w="9525">
+            <a:solidFill>
+              <a:srgbClr val="E3E6EA"/>
+            </a:solidFill>
+          </a:ln>
+          <a:effectLst/>
+        </p:spPr>
+        <p:style>
+          <a:lnRef idx="1">
+            <a:schemeClr val="accent1"/>
+          </a:lnRef>
+          <a:fillRef idx="3">
+            <a:schemeClr val="accent1"/>
+          </a:fillRef>
+          <a:effectRef idx="2">
+            <a:schemeClr val="accent1"/>
+          </a:effectRef>
+          <a:fontRef idx="minor">
+            <a:schemeClr val="lt1"/>
+          </a:fontRef>
+        </p:style>
+        <p:txBody>
+          <a:bodyPr rtlCol="0" anchor="ctr" lIns="54864" rIns="54864" tIns="0" bIns="0"/>
+          <a:lstStyle/>
+          <a:p>
+            <a:r>
+              <a:rPr sz="900" b="1">
+                <a:solidFill>
+                  <a:srgbClr val="FFFFFF"/>
+                </a:solidFill>
+              </a:rPr>
+              <a:t>Primary Blue   #6D71FF   Logo blue</a:t>
+            </a:r>
+          </a:p>
+        </p:txBody>
+      </p:sp>
+      <p:sp>
+        <p:nvSpPr>
+          <p:cNvPr id="30" name="Rounded Rectangle 29"/>
+          <p:cNvSpPr/>
+          <p:nvPr/>
+        </p:nvSpPr>
+        <p:spPr>
+          <a:xfrm>
+            <a:off x="9601200" y="2048256"/>
+            <a:ext cx="2103120" cy="384048"/>
+          </a:xfrm>
+          <a:prstGeom prst="roundRect">
+            <a:avLst/>
+          </a:prstGeom>
+          <a:solidFill>
+            <a:srgbClr val="122B82"/>
+          </a:solidFill>
+          <a:ln w="9525">
+            <a:solidFill>
+              <a:srgbClr val="E3E6EA"/>
+            </a:solidFill>
+          </a:ln>
+          <a:effectLst/>
+        </p:spPr>
+        <p:style>
+          <a:lnRef idx="1">
+            <a:schemeClr val="accent1"/>
+          </a:lnRef>
+          <a:fillRef idx="3">
+            <a:schemeClr val="accent1"/>
+          </a:fillRef>
+          <a:effectRef idx="2">
+            <a:schemeClr val="accent1"/>
+          </a:effectRef>
+          <a:fontRef idx="minor">
+            <a:schemeClr val="lt1"/>
+          </a:fontRef>
+        </p:style>
+        <p:txBody>
+          <a:bodyPr rtlCol="0" anchor="ctr" lIns="54864" rIns="54864" tIns="0" bIns="0"/>
+          <a:lstStyle/>
+          <a:p>
+            <a:r>
+              <a:rPr sz="900" b="1">
+                <a:solidFill>
+                  <a:srgbClr val="FFFFFF"/>
+                </a:solidFill>
+              </a:rPr>
+              <a:t>Deep Blue   #122B82</a:t>
+            </a:r>
+          </a:p>
+        </p:txBody>
+      </p:sp>
+      <p:sp>
+        <p:nvSpPr>
+          <p:cNvPr id="31" name="Rounded Rectangle 30"/>
+          <p:cNvSpPr/>
+          <p:nvPr/>
+        </p:nvSpPr>
+        <p:spPr>
+          <a:xfrm>
+            <a:off x="9601200" y="2505456"/>
+            <a:ext cx="2103120" cy="384048"/>
+          </a:xfrm>
+          <a:prstGeom prst="roundRect">
+            <a:avLst/>
+          </a:prstGeom>
+          <a:solidFill>
+            <a:srgbClr val="F33844"/>
+          </a:solidFill>
+          <a:ln w="9525">
+            <a:solidFill>
+              <a:srgbClr val="E3E6EA"/>
+            </a:solidFill>
+          </a:ln>
+          <a:effectLst/>
+        </p:spPr>
+        <p:style>
+          <a:lnRef idx="1">
+            <a:schemeClr val="accent1"/>
+          </a:lnRef>
+          <a:fillRef idx="3">
+            <a:schemeClr val="accent1"/>
+          </a:fillRef>
+          <a:effectRef idx="2">
+            <a:schemeClr val="accent1"/>
+          </a:effectRef>
+          <a:fontRef idx="minor">
+            <a:schemeClr val="lt1"/>
+          </a:fontRef>
+        </p:style>
+        <p:txBody>
+          <a:bodyPr rtlCol="0" anchor="ctr" lIns="54864" rIns="54864" tIns="0" bIns="0"/>
+          <a:lstStyle/>
+          <a:p>
+            <a:r>
+              <a:rPr sz="900" b="1">
+                <a:solidFill>
+                  <a:srgbClr val="FFFFFF"/>
+                </a:solidFill>
+              </a:rPr>
+              <a:t>Accent Red   #F33844   Logo red, Support</a:t>
+            </a:r>
+          </a:p>
+        </p:txBody>
+      </p:sp>
+      <p:sp>
+        <p:nvSpPr>
+          <p:cNvPr id="32" name="Rounded Rectangle 31"/>
+          <p:cNvSpPr/>
+          <p:nvPr/>
+        </p:nvSpPr>
+        <p:spPr>
+          <a:xfrm>
+            <a:off x="9601200" y="2962656"/>
+            <a:ext cx="2103120" cy="384048"/>
+          </a:xfrm>
+          <a:prstGeom prst="roundRect">
+            <a:avLst/>
+          </a:prstGeom>
+          <a:solidFill>
+            <a:srgbClr val="A8052E"/>
+          </a:solidFill>
+          <a:ln w="9525">
+            <a:solidFill>
+              <a:srgbClr val="E3E6EA"/>
+            </a:solidFill>
+          </a:ln>
+          <a:effectLst/>
+        </p:spPr>
+        <p:style>
+          <a:lnRef idx="1">
+            <a:schemeClr val="accent1"/>
+          </a:lnRef>
+          <a:fillRef idx="3">
+            <a:schemeClr val="accent1"/>
+          </a:fillRef>
+          <a:effectRef idx="2">
+            <a:schemeClr val="accent1"/>
+          </a:effectRef>
+          <a:fontRef idx="minor">
+            <a:schemeClr val="lt1"/>
+          </a:fontRef>
+        </p:style>
+        <p:txBody>
+          <a:bodyPr rtlCol="0" anchor="ctr" lIns="54864" rIns="54864" tIns="0" bIns="0"/>
+          <a:lstStyle/>
+          <a:p>
+            <a:r>
+              <a:rPr sz="900" b="1">
+                <a:solidFill>
+                  <a:srgbClr val="FFFFFF"/>
+                </a:solidFill>
+              </a:rPr>
+              <a:t>Deep Red   #A8052E</a:t>
+            </a:r>
+          </a:p>
+        </p:txBody>
+      </p:sp>
+      <p:sp>
+        <p:nvSpPr>
+          <p:cNvPr id="33" name="Rounded Rectangle 32"/>
+          <p:cNvSpPr/>
+          <p:nvPr/>
+        </p:nvSpPr>
+        <p:spPr>
+          <a:xfrm>
+            <a:off x="9601200" y="3419856"/>
+            <a:ext cx="2103120" cy="384048"/>
+          </a:xfrm>
+          <a:prstGeom prst="roundRect">
+            <a:avLst/>
+          </a:prstGeom>
+          <a:solidFill>
+            <a:srgbClr val="8F4AFA"/>
+          </a:solidFill>
+          <a:ln w="9525">
+            <a:solidFill>
+              <a:srgbClr val="E3E6EA"/>
+            </a:solidFill>
+          </a:ln>
+          <a:effectLst/>
+        </p:spPr>
+        <p:style>
+          <a:lnRef idx="1">
+            <a:schemeClr val="accent1"/>
+          </a:lnRef>
+          <a:fillRef idx="3">
+            <a:schemeClr val="accent1"/>
+          </a:fillRef>
+          <a:effectRef idx="2">
+            <a:schemeClr val="accent1"/>
+          </a:effectRef>
+          <a:fontRef idx="minor">
+            <a:schemeClr val="lt1"/>
+          </a:fontRef>
+        </p:style>
+        <p:txBody>
+          <a:bodyPr rtlCol="0" anchor="ctr" lIns="54864" rIns="54864" tIns="0" bIns="0"/>
+          <a:lstStyle/>
+          <a:p>
+            <a:r>
+              <a:rPr sz="900" b="1">
+                <a:solidFill>
+                  <a:srgbClr val="FFFFFF"/>
+                </a:solidFill>
+              </a:rPr>
+              <a:t>Accent Purple   #8F4AFA   Consulting</a:t>
+            </a:r>
+          </a:p>
+        </p:txBody>
+      </p:sp>
+      <p:sp>
+        <p:nvSpPr>
+          <p:cNvPr id="34" name="Rounded Rectangle 33"/>
+          <p:cNvSpPr/>
+          <p:nvPr/>
+        </p:nvSpPr>
+        <p:spPr>
+          <a:xfrm>
+            <a:off x="9601200" y="3877056"/>
+            <a:ext cx="2103120" cy="384048"/>
+          </a:xfrm>
+          <a:prstGeom prst="roundRect">
+            <a:avLst/>
+          </a:prstGeom>
+          <a:solidFill>
+            <a:srgbClr val="242C39"/>
+          </a:solidFill>
+          <a:ln w="9525">
+            <a:solidFill>
+              <a:srgbClr val="E3E6EA"/>
+            </a:solidFill>
+          </a:ln>
+          <a:effectLst/>
+        </p:spPr>
+        <p:style>
+          <a:lnRef idx="1">
+            <a:schemeClr val="accent1"/>
+          </a:lnRef>
+          <a:fillRef idx="3">
+            <a:schemeClr val="accent1"/>
+          </a:fillRef>
+          <a:effectRef idx="2">
+            <a:schemeClr val="accent1"/>
+          </a:effectRef>
+          <a:fontRef idx="minor">
+            <a:schemeClr val="lt1"/>
+          </a:fontRef>
+        </p:style>
+        <p:txBody>
+          <a:bodyPr rtlCol="0" anchor="ctr" lIns="54864" rIns="54864" tIns="0" bIns="0"/>
+          <a:lstStyle/>
+          <a:p>
+            <a:r>
+              <a:rPr sz="900" b="1">
+                <a:solidFill>
+                  <a:srgbClr val="FFFFFF"/>
+                </a:solidFill>
+              </a:rPr>
+              <a:t>Charcoal   #242C39   Text</a:t>
+            </a:r>
+          </a:p>
+        </p:txBody>
+      </p:sp>
+      <p:sp>
+        <p:nvSpPr>
+          <p:cNvPr id="35" name="Rounded Rectangle 34"/>
+          <p:cNvSpPr/>
+          <p:nvPr/>
+        </p:nvSpPr>
+        <p:spPr>
+          <a:xfrm>
+            <a:off x="9601200" y="4334256"/>
+            <a:ext cx="2103120" cy="384048"/>
+          </a:xfrm>
+          <a:prstGeom prst="roundRect">
+            <a:avLst/>
+          </a:prstGeom>
+          <a:solidFill>
+            <a:srgbClr val="FFFFFF"/>
+          </a:solidFill>
+          <a:ln w="9525">
+            <a:solidFill>
+              <a:srgbClr val="E3E6EA"/>
+            </a:solidFill>
+          </a:ln>
+          <a:effectLst/>
+        </p:spPr>
+        <p:style>
+          <a:lnRef idx="1">
+            <a:schemeClr val="accent1"/>
+          </a:lnRef>
+          <a:fillRef idx="3">
+            <a:schemeClr val="accent1"/>
+          </a:fillRef>
+          <a:effectRef idx="2">
+            <a:schemeClr val="accent1"/>
+          </a:effectRef>
+          <a:fontRef idx="minor">
+            <a:schemeClr val="lt1"/>
+          </a:fontRef>
+        </p:style>
+        <p:txBody>
+          <a:bodyPr rtlCol="0" anchor="ctr" lIns="54864" rIns="54864" tIns="0" bIns="0"/>
+          <a:lstStyle/>
+          <a:p>
+            <a:r>
+              <a:rPr sz="900" b="1">
+                <a:solidFill>
+                  <a:srgbClr val="242C39"/>
+                </a:solidFill>
+              </a:rPr>
+              <a:t>White   #FFFFFF</a:t>
+            </a:r>
           </a:p>
         </p:txBody>
       </p:sp>
@@ -17848,6 +20398,516 @@
           </a:prstGeom>
         </p:spPr>
       </p:pic>
+      <p:sp>
+        <p:nvSpPr>
+          <p:cNvPr id="27" name="TextBox 26"/>
+          <p:cNvSpPr txBox="1"/>
+          <p:nvPr/>
+        </p:nvSpPr>
+        <p:spPr>
+          <a:xfrm>
+            <a:off x="9601200" y="365760"/>
+            <a:ext cx="2103120" cy="274320"/>
+          </a:xfrm>
+          <a:prstGeom prst="rect">
+            <a:avLst/>
+          </a:prstGeom>
+          <a:noFill/>
+        </p:spPr>
+        <p:txBody>
+          <a:bodyPr wrap="none">
+            <a:spAutoFit/>
+          </a:bodyPr>
+          <a:lstStyle/>
+          <a:p>
+            <a:r>
+              <a:rPr sz="900" b="1">
+                <a:solidFill>
+                  <a:srgbClr val="242C39"/>
+                </a:solidFill>
+              </a:rPr>
+              <a:t>CTS palette — not on the slide, eyedropper from here</a:t>
+            </a:r>
+          </a:p>
+        </p:txBody>
+      </p:sp>
+      <p:sp>
+        <p:nvSpPr>
+          <p:cNvPr id="28" name="Rounded Rectangle 27"/>
+          <p:cNvSpPr/>
+          <p:nvPr/>
+        </p:nvSpPr>
+        <p:spPr>
+          <a:xfrm>
+            <a:off x="9601200" y="676656"/>
+            <a:ext cx="2103120" cy="384048"/>
+          </a:xfrm>
+          <a:prstGeom prst="roundRect">
+            <a:avLst/>
+          </a:prstGeom>
+          <a:solidFill>
+            <a:srgbClr val="3FD0C9"/>
+          </a:solidFill>
+          <a:ln w="9525">
+            <a:solidFill>
+              <a:srgbClr val="E3E6EA"/>
+            </a:solidFill>
+          </a:ln>
+          <a:effectLst/>
+        </p:spPr>
+        <p:style>
+          <a:lnRef idx="1">
+            <a:schemeClr val="accent1"/>
+          </a:lnRef>
+          <a:fillRef idx="3">
+            <a:schemeClr val="accent1"/>
+          </a:fillRef>
+          <a:effectRef idx="2">
+            <a:schemeClr val="accent1"/>
+          </a:effectRef>
+          <a:fontRef idx="minor">
+            <a:schemeClr val="lt1"/>
+          </a:fontRef>
+        </p:style>
+        <p:txBody>
+          <a:bodyPr rtlCol="0" anchor="ctr" lIns="54864" rIns="54864" tIns="0" bIns="0"/>
+          <a:lstStyle/>
+          <a:p>
+            <a:r>
+              <a:rPr sz="900" b="1">
+                <a:solidFill>
+                  <a:srgbClr val="242C39"/>
+                </a:solidFill>
+              </a:rPr>
+              <a:t>Bright Teal   #3FD0C9   Logo green</a:t>
+            </a:r>
+          </a:p>
+        </p:txBody>
+      </p:sp>
+      <p:sp>
+        <p:nvSpPr>
+          <p:cNvPr id="29" name="Rounded Rectangle 28"/>
+          <p:cNvSpPr/>
+          <p:nvPr/>
+        </p:nvSpPr>
+        <p:spPr>
+          <a:xfrm>
+            <a:off x="9601200" y="1133856"/>
+            <a:ext cx="2103120" cy="384048"/>
+          </a:xfrm>
+          <a:prstGeom prst="roundRect">
+            <a:avLst/>
+          </a:prstGeom>
+          <a:solidFill>
+            <a:srgbClr val="005358"/>
+          </a:solidFill>
+          <a:ln w="9525">
+            <a:solidFill>
+              <a:srgbClr val="E3E6EA"/>
+            </a:solidFill>
+          </a:ln>
+          <a:effectLst/>
+        </p:spPr>
+        <p:style>
+          <a:lnRef idx="1">
+            <a:schemeClr val="accent1"/>
+          </a:lnRef>
+          <a:fillRef idx="3">
+            <a:schemeClr val="accent1"/>
+          </a:fillRef>
+          <a:effectRef idx="2">
+            <a:schemeClr val="accent1"/>
+          </a:effectRef>
+          <a:fontRef idx="minor">
+            <a:schemeClr val="lt1"/>
+          </a:fontRef>
+        </p:style>
+        <p:txBody>
+          <a:bodyPr rtlCol="0" anchor="ctr" lIns="54864" rIns="54864" tIns="0" bIns="0"/>
+          <a:lstStyle/>
+          <a:p>
+            <a:r>
+              <a:rPr sz="900" b="1">
+                <a:solidFill>
+                  <a:srgbClr val="FFFFFF"/>
+                </a:solidFill>
+              </a:rPr>
+              <a:t>Dark Teal   #005358   Production</a:t>
+            </a:r>
+          </a:p>
+        </p:txBody>
+      </p:sp>
+      <p:sp>
+        <p:nvSpPr>
+          <p:cNvPr id="30" name="Rounded Rectangle 29"/>
+          <p:cNvSpPr/>
+          <p:nvPr/>
+        </p:nvSpPr>
+        <p:spPr>
+          <a:xfrm>
+            <a:off x="9601200" y="1591056"/>
+            <a:ext cx="2103120" cy="384048"/>
+          </a:xfrm>
+          <a:prstGeom prst="roundRect">
+            <a:avLst/>
+          </a:prstGeom>
+          <a:solidFill>
+            <a:srgbClr val="6D71FF"/>
+          </a:solidFill>
+          <a:ln w="9525">
+            <a:solidFill>
+              <a:srgbClr val="E3E6EA"/>
+            </a:solidFill>
+          </a:ln>
+          <a:effectLst/>
+        </p:spPr>
+        <p:style>
+          <a:lnRef idx="1">
+            <a:schemeClr val="accent1"/>
+          </a:lnRef>
+          <a:fillRef idx="3">
+            <a:schemeClr val="accent1"/>
+          </a:fillRef>
+          <a:effectRef idx="2">
+            <a:schemeClr val="accent1"/>
+          </a:effectRef>
+          <a:fontRef idx="minor">
+            <a:schemeClr val="lt1"/>
+          </a:fontRef>
+        </p:style>
+        <p:txBody>
+          <a:bodyPr rtlCol="0" anchor="ctr" lIns="54864" rIns="54864" tIns="0" bIns="0"/>
+          <a:lstStyle/>
+          <a:p>
+            <a:r>
+              <a:rPr sz="900" b="1">
+                <a:solidFill>
+                  <a:srgbClr val="FFFFFF"/>
+                </a:solidFill>
+              </a:rPr>
+              <a:t>Primary Blue   #6D71FF   Logo blue</a:t>
+            </a:r>
+          </a:p>
+        </p:txBody>
+      </p:sp>
+      <p:sp>
+        <p:nvSpPr>
+          <p:cNvPr id="31" name="Rounded Rectangle 30"/>
+          <p:cNvSpPr/>
+          <p:nvPr/>
+        </p:nvSpPr>
+        <p:spPr>
+          <a:xfrm>
+            <a:off x="9601200" y="2048256"/>
+            <a:ext cx="2103120" cy="384048"/>
+          </a:xfrm>
+          <a:prstGeom prst="roundRect">
+            <a:avLst/>
+          </a:prstGeom>
+          <a:solidFill>
+            <a:srgbClr val="122B82"/>
+          </a:solidFill>
+          <a:ln w="9525">
+            <a:solidFill>
+              <a:srgbClr val="E3E6EA"/>
+            </a:solidFill>
+          </a:ln>
+          <a:effectLst/>
+        </p:spPr>
+        <p:style>
+          <a:lnRef idx="1">
+            <a:schemeClr val="accent1"/>
+          </a:lnRef>
+          <a:fillRef idx="3">
+            <a:schemeClr val="accent1"/>
+          </a:fillRef>
+          <a:effectRef idx="2">
+            <a:schemeClr val="accent1"/>
+          </a:effectRef>
+          <a:fontRef idx="minor">
+            <a:schemeClr val="lt1"/>
+          </a:fontRef>
+        </p:style>
+        <p:txBody>
+          <a:bodyPr rtlCol="0" anchor="ctr" lIns="54864" rIns="54864" tIns="0" bIns="0"/>
+          <a:lstStyle/>
+          <a:p>
+            <a:r>
+              <a:rPr sz="900" b="1">
+                <a:solidFill>
+                  <a:srgbClr val="FFFFFF"/>
+                </a:solidFill>
+              </a:rPr>
+              <a:t>Deep Blue   #122B82</a:t>
+            </a:r>
+          </a:p>
+        </p:txBody>
+      </p:sp>
+      <p:sp>
+        <p:nvSpPr>
+          <p:cNvPr id="32" name="Rounded Rectangle 31"/>
+          <p:cNvSpPr/>
+          <p:nvPr/>
+        </p:nvSpPr>
+        <p:spPr>
+          <a:xfrm>
+            <a:off x="9601200" y="2505456"/>
+            <a:ext cx="2103120" cy="384048"/>
+          </a:xfrm>
+          <a:prstGeom prst="roundRect">
+            <a:avLst/>
+          </a:prstGeom>
+          <a:solidFill>
+            <a:srgbClr val="F33844"/>
+          </a:solidFill>
+          <a:ln w="9525">
+            <a:solidFill>
+              <a:srgbClr val="E3E6EA"/>
+            </a:solidFill>
+          </a:ln>
+          <a:effectLst/>
+        </p:spPr>
+        <p:style>
+          <a:lnRef idx="1">
+            <a:schemeClr val="accent1"/>
+          </a:lnRef>
+          <a:fillRef idx="3">
+            <a:schemeClr val="accent1"/>
+          </a:fillRef>
+          <a:effectRef idx="2">
+            <a:schemeClr val="accent1"/>
+          </a:effectRef>
+          <a:fontRef idx="minor">
+            <a:schemeClr val="lt1"/>
+          </a:fontRef>
+        </p:style>
+        <p:txBody>
+          <a:bodyPr rtlCol="0" anchor="ctr" lIns="54864" rIns="54864" tIns="0" bIns="0"/>
+          <a:lstStyle/>
+          <a:p>
+            <a:r>
+              <a:rPr sz="900" b="1">
+                <a:solidFill>
+                  <a:srgbClr val="FFFFFF"/>
+                </a:solidFill>
+              </a:rPr>
+              <a:t>Accent Red   #F33844   Logo red, Support</a:t>
+            </a:r>
+          </a:p>
+        </p:txBody>
+      </p:sp>
+      <p:sp>
+        <p:nvSpPr>
+          <p:cNvPr id="33" name="Rounded Rectangle 32"/>
+          <p:cNvSpPr/>
+          <p:nvPr/>
+        </p:nvSpPr>
+        <p:spPr>
+          <a:xfrm>
+            <a:off x="9601200" y="2962656"/>
+            <a:ext cx="2103120" cy="384048"/>
+          </a:xfrm>
+          <a:prstGeom prst="roundRect">
+            <a:avLst/>
+          </a:prstGeom>
+          <a:solidFill>
+            <a:srgbClr val="A8052E"/>
+          </a:solidFill>
+          <a:ln w="9525">
+            <a:solidFill>
+              <a:srgbClr val="E3E6EA"/>
+            </a:solidFill>
+          </a:ln>
+          <a:effectLst/>
+        </p:spPr>
+        <p:style>
+          <a:lnRef idx="1">
+            <a:schemeClr val="accent1"/>
+          </a:lnRef>
+          <a:fillRef idx="3">
+            <a:schemeClr val="accent1"/>
+          </a:fillRef>
+          <a:effectRef idx="2">
+            <a:schemeClr val="accent1"/>
+          </a:effectRef>
+          <a:fontRef idx="minor">
+            <a:schemeClr val="lt1"/>
+          </a:fontRef>
+        </p:style>
+        <p:txBody>
+          <a:bodyPr rtlCol="0" anchor="ctr" lIns="54864" rIns="54864" tIns="0" bIns="0"/>
+          <a:lstStyle/>
+          <a:p>
+            <a:r>
+              <a:rPr sz="900" b="1">
+                <a:solidFill>
+                  <a:srgbClr val="FFFFFF"/>
+                </a:solidFill>
+              </a:rPr>
+              <a:t>Deep Red   #A8052E</a:t>
+            </a:r>
+          </a:p>
+        </p:txBody>
+      </p:sp>
+      <p:sp>
+        <p:nvSpPr>
+          <p:cNvPr id="34" name="Rounded Rectangle 33"/>
+          <p:cNvSpPr/>
+          <p:nvPr/>
+        </p:nvSpPr>
+        <p:spPr>
+          <a:xfrm>
+            <a:off x="9601200" y="3419856"/>
+            <a:ext cx="2103120" cy="384048"/>
+          </a:xfrm>
+          <a:prstGeom prst="roundRect">
+            <a:avLst/>
+          </a:prstGeom>
+          <a:solidFill>
+            <a:srgbClr val="8F4AFA"/>
+          </a:solidFill>
+          <a:ln w="9525">
+            <a:solidFill>
+              <a:srgbClr val="E3E6EA"/>
+            </a:solidFill>
+          </a:ln>
+          <a:effectLst/>
+        </p:spPr>
+        <p:style>
+          <a:lnRef idx="1">
+            <a:schemeClr val="accent1"/>
+          </a:lnRef>
+          <a:fillRef idx="3">
+            <a:schemeClr val="accent1"/>
+          </a:fillRef>
+          <a:effectRef idx="2">
+            <a:schemeClr val="accent1"/>
+          </a:effectRef>
+          <a:fontRef idx="minor">
+            <a:schemeClr val="lt1"/>
+          </a:fontRef>
+        </p:style>
+        <p:txBody>
+          <a:bodyPr rtlCol="0" anchor="ctr" lIns="54864" rIns="54864" tIns="0" bIns="0"/>
+          <a:lstStyle/>
+          <a:p>
+            <a:r>
+              <a:rPr sz="900" b="1">
+                <a:solidFill>
+                  <a:srgbClr val="FFFFFF"/>
+                </a:solidFill>
+              </a:rPr>
+              <a:t>Accent Purple   #8F4AFA   Consulting</a:t>
+            </a:r>
+          </a:p>
+        </p:txBody>
+      </p:sp>
+      <p:sp>
+        <p:nvSpPr>
+          <p:cNvPr id="35" name="Rounded Rectangle 34"/>
+          <p:cNvSpPr/>
+          <p:nvPr/>
+        </p:nvSpPr>
+        <p:spPr>
+          <a:xfrm>
+            <a:off x="9601200" y="3877056"/>
+            <a:ext cx="2103120" cy="384048"/>
+          </a:xfrm>
+          <a:prstGeom prst="roundRect">
+            <a:avLst/>
+          </a:prstGeom>
+          <a:solidFill>
+            <a:srgbClr val="242C39"/>
+          </a:solidFill>
+          <a:ln w="9525">
+            <a:solidFill>
+              <a:srgbClr val="E3E6EA"/>
+            </a:solidFill>
+          </a:ln>
+          <a:effectLst/>
+        </p:spPr>
+        <p:style>
+          <a:lnRef idx="1">
+            <a:schemeClr val="accent1"/>
+          </a:lnRef>
+          <a:fillRef idx="3">
+            <a:schemeClr val="accent1"/>
+          </a:fillRef>
+          <a:effectRef idx="2">
+            <a:schemeClr val="accent1"/>
+          </a:effectRef>
+          <a:fontRef idx="minor">
+            <a:schemeClr val="lt1"/>
+          </a:fontRef>
+        </p:style>
+        <p:txBody>
+          <a:bodyPr rtlCol="0" anchor="ctr" lIns="54864" rIns="54864" tIns="0" bIns="0"/>
+          <a:lstStyle/>
+          <a:p>
+            <a:r>
+              <a:rPr sz="900" b="1">
+                <a:solidFill>
+                  <a:srgbClr val="FFFFFF"/>
+                </a:solidFill>
+              </a:rPr>
+              <a:t>Charcoal   #242C39   Text</a:t>
+            </a:r>
+          </a:p>
+        </p:txBody>
+      </p:sp>
+      <p:sp>
+        <p:nvSpPr>
+          <p:cNvPr id="36" name="Rounded Rectangle 35"/>
+          <p:cNvSpPr/>
+          <p:nvPr/>
+        </p:nvSpPr>
+        <p:spPr>
+          <a:xfrm>
+            <a:off x="9601200" y="4334256"/>
+            <a:ext cx="2103120" cy="384048"/>
+          </a:xfrm>
+          <a:prstGeom prst="roundRect">
+            <a:avLst/>
+          </a:prstGeom>
+          <a:solidFill>
+            <a:srgbClr val="FFFFFF"/>
+          </a:solidFill>
+          <a:ln w="9525">
+            <a:solidFill>
+              <a:srgbClr val="E3E6EA"/>
+            </a:solidFill>
+          </a:ln>
+          <a:effectLst/>
+        </p:spPr>
+        <p:style>
+          <a:lnRef idx="1">
+            <a:schemeClr val="accent1"/>
+          </a:lnRef>
+          <a:fillRef idx="3">
+            <a:schemeClr val="accent1"/>
+          </a:fillRef>
+          <a:effectRef idx="2">
+            <a:schemeClr val="accent1"/>
+          </a:effectRef>
+          <a:fontRef idx="minor">
+            <a:schemeClr val="lt1"/>
+          </a:fontRef>
+        </p:style>
+        <p:txBody>
+          <a:bodyPr rtlCol="0" anchor="ctr" lIns="54864" rIns="54864" tIns="0" bIns="0"/>
+          <a:lstStyle/>
+          <a:p>
+            <a:r>
+              <a:rPr sz="900" b="1">
+                <a:solidFill>
+                  <a:srgbClr val="242C39"/>
+                </a:solidFill>
+              </a:rPr>
+              <a:t>White   #FFFFFF</a:t>
+            </a:r>
+          </a:p>
+        </p:txBody>
+      </p:sp>
     </p:spTree>
   </p:cSld>
   <p:clrMapOvr>
@@ -20370,6 +23430,516 @@
           </a:p>
         </p:txBody>
       </p:sp>
+      <p:sp>
+        <p:nvSpPr>
+          <p:cNvPr id="26" name="TextBox 25"/>
+          <p:cNvSpPr txBox="1"/>
+          <p:nvPr/>
+        </p:nvSpPr>
+        <p:spPr>
+          <a:xfrm>
+            <a:off x="9601200" y="365760"/>
+            <a:ext cx="2103120" cy="274320"/>
+          </a:xfrm>
+          <a:prstGeom prst="rect">
+            <a:avLst/>
+          </a:prstGeom>
+          <a:noFill/>
+        </p:spPr>
+        <p:txBody>
+          <a:bodyPr wrap="none">
+            <a:spAutoFit/>
+          </a:bodyPr>
+          <a:lstStyle/>
+          <a:p>
+            <a:r>
+              <a:rPr sz="900" b="1">
+                <a:solidFill>
+                  <a:srgbClr val="242C39"/>
+                </a:solidFill>
+              </a:rPr>
+              <a:t>CTS palette — not on the slide, eyedropper from here</a:t>
+            </a:r>
+          </a:p>
+        </p:txBody>
+      </p:sp>
+      <p:sp>
+        <p:nvSpPr>
+          <p:cNvPr id="27" name="Rounded Rectangle 26"/>
+          <p:cNvSpPr/>
+          <p:nvPr/>
+        </p:nvSpPr>
+        <p:spPr>
+          <a:xfrm>
+            <a:off x="9601200" y="676656"/>
+            <a:ext cx="2103120" cy="384048"/>
+          </a:xfrm>
+          <a:prstGeom prst="roundRect">
+            <a:avLst/>
+          </a:prstGeom>
+          <a:solidFill>
+            <a:srgbClr val="3FD0C9"/>
+          </a:solidFill>
+          <a:ln w="9525">
+            <a:solidFill>
+              <a:srgbClr val="E3E6EA"/>
+            </a:solidFill>
+          </a:ln>
+          <a:effectLst/>
+        </p:spPr>
+        <p:style>
+          <a:lnRef idx="1">
+            <a:schemeClr val="accent1"/>
+          </a:lnRef>
+          <a:fillRef idx="3">
+            <a:schemeClr val="accent1"/>
+          </a:fillRef>
+          <a:effectRef idx="2">
+            <a:schemeClr val="accent1"/>
+          </a:effectRef>
+          <a:fontRef idx="minor">
+            <a:schemeClr val="lt1"/>
+          </a:fontRef>
+        </p:style>
+        <p:txBody>
+          <a:bodyPr rtlCol="0" anchor="ctr" lIns="54864" rIns="54864" tIns="0" bIns="0"/>
+          <a:lstStyle/>
+          <a:p>
+            <a:r>
+              <a:rPr sz="900" b="1">
+                <a:solidFill>
+                  <a:srgbClr val="242C39"/>
+                </a:solidFill>
+              </a:rPr>
+              <a:t>Bright Teal   #3FD0C9   Logo green</a:t>
+            </a:r>
+          </a:p>
+        </p:txBody>
+      </p:sp>
+      <p:sp>
+        <p:nvSpPr>
+          <p:cNvPr id="28" name="Rounded Rectangle 27"/>
+          <p:cNvSpPr/>
+          <p:nvPr/>
+        </p:nvSpPr>
+        <p:spPr>
+          <a:xfrm>
+            <a:off x="9601200" y="1133856"/>
+            <a:ext cx="2103120" cy="384048"/>
+          </a:xfrm>
+          <a:prstGeom prst="roundRect">
+            <a:avLst/>
+          </a:prstGeom>
+          <a:solidFill>
+            <a:srgbClr val="005358"/>
+          </a:solidFill>
+          <a:ln w="9525">
+            <a:solidFill>
+              <a:srgbClr val="E3E6EA"/>
+            </a:solidFill>
+          </a:ln>
+          <a:effectLst/>
+        </p:spPr>
+        <p:style>
+          <a:lnRef idx="1">
+            <a:schemeClr val="accent1"/>
+          </a:lnRef>
+          <a:fillRef idx="3">
+            <a:schemeClr val="accent1"/>
+          </a:fillRef>
+          <a:effectRef idx="2">
+            <a:schemeClr val="accent1"/>
+          </a:effectRef>
+          <a:fontRef idx="minor">
+            <a:schemeClr val="lt1"/>
+          </a:fontRef>
+        </p:style>
+        <p:txBody>
+          <a:bodyPr rtlCol="0" anchor="ctr" lIns="54864" rIns="54864" tIns="0" bIns="0"/>
+          <a:lstStyle/>
+          <a:p>
+            <a:r>
+              <a:rPr sz="900" b="1">
+                <a:solidFill>
+                  <a:srgbClr val="FFFFFF"/>
+                </a:solidFill>
+              </a:rPr>
+              <a:t>Dark Teal   #005358   Production</a:t>
+            </a:r>
+          </a:p>
+        </p:txBody>
+      </p:sp>
+      <p:sp>
+        <p:nvSpPr>
+          <p:cNvPr id="29" name="Rounded Rectangle 28"/>
+          <p:cNvSpPr/>
+          <p:nvPr/>
+        </p:nvSpPr>
+        <p:spPr>
+          <a:xfrm>
+            <a:off x="9601200" y="1591056"/>
+            <a:ext cx="2103120" cy="384048"/>
+          </a:xfrm>
+          <a:prstGeom prst="roundRect">
+            <a:avLst/>
+          </a:prstGeom>
+          <a:solidFill>
+            <a:srgbClr val="6D71FF"/>
+          </a:solidFill>
+          <a:ln w="9525">
+            <a:solidFill>
+              <a:srgbClr val="E3E6EA"/>
+            </a:solidFill>
+          </a:ln>
+          <a:effectLst/>
+        </p:spPr>
+        <p:style>
+          <a:lnRef idx="1">
+            <a:schemeClr val="accent1"/>
+          </a:lnRef>
+          <a:fillRef idx="3">
+            <a:schemeClr val="accent1"/>
+          </a:fillRef>
+          <a:effectRef idx="2">
+            <a:schemeClr val="accent1"/>
+          </a:effectRef>
+          <a:fontRef idx="minor">
+            <a:schemeClr val="lt1"/>
+          </a:fontRef>
+        </p:style>
+        <p:txBody>
+          <a:bodyPr rtlCol="0" anchor="ctr" lIns="54864" rIns="54864" tIns="0" bIns="0"/>
+          <a:lstStyle/>
+          <a:p>
+            <a:r>
+              <a:rPr sz="900" b="1">
+                <a:solidFill>
+                  <a:srgbClr val="FFFFFF"/>
+                </a:solidFill>
+              </a:rPr>
+              <a:t>Primary Blue   #6D71FF   Logo blue</a:t>
+            </a:r>
+          </a:p>
+        </p:txBody>
+      </p:sp>
+      <p:sp>
+        <p:nvSpPr>
+          <p:cNvPr id="30" name="Rounded Rectangle 29"/>
+          <p:cNvSpPr/>
+          <p:nvPr/>
+        </p:nvSpPr>
+        <p:spPr>
+          <a:xfrm>
+            <a:off x="9601200" y="2048256"/>
+            <a:ext cx="2103120" cy="384048"/>
+          </a:xfrm>
+          <a:prstGeom prst="roundRect">
+            <a:avLst/>
+          </a:prstGeom>
+          <a:solidFill>
+            <a:srgbClr val="122B82"/>
+          </a:solidFill>
+          <a:ln w="9525">
+            <a:solidFill>
+              <a:srgbClr val="E3E6EA"/>
+            </a:solidFill>
+          </a:ln>
+          <a:effectLst/>
+        </p:spPr>
+        <p:style>
+          <a:lnRef idx="1">
+            <a:schemeClr val="accent1"/>
+          </a:lnRef>
+          <a:fillRef idx="3">
+            <a:schemeClr val="accent1"/>
+          </a:fillRef>
+          <a:effectRef idx="2">
+            <a:schemeClr val="accent1"/>
+          </a:effectRef>
+          <a:fontRef idx="minor">
+            <a:schemeClr val="lt1"/>
+          </a:fontRef>
+        </p:style>
+        <p:txBody>
+          <a:bodyPr rtlCol="0" anchor="ctr" lIns="54864" rIns="54864" tIns="0" bIns="0"/>
+          <a:lstStyle/>
+          <a:p>
+            <a:r>
+              <a:rPr sz="900" b="1">
+                <a:solidFill>
+                  <a:srgbClr val="FFFFFF"/>
+                </a:solidFill>
+              </a:rPr>
+              <a:t>Deep Blue   #122B82</a:t>
+            </a:r>
+          </a:p>
+        </p:txBody>
+      </p:sp>
+      <p:sp>
+        <p:nvSpPr>
+          <p:cNvPr id="31" name="Rounded Rectangle 30"/>
+          <p:cNvSpPr/>
+          <p:nvPr/>
+        </p:nvSpPr>
+        <p:spPr>
+          <a:xfrm>
+            <a:off x="9601200" y="2505456"/>
+            <a:ext cx="2103120" cy="384048"/>
+          </a:xfrm>
+          <a:prstGeom prst="roundRect">
+            <a:avLst/>
+          </a:prstGeom>
+          <a:solidFill>
+            <a:srgbClr val="F33844"/>
+          </a:solidFill>
+          <a:ln w="9525">
+            <a:solidFill>
+              <a:srgbClr val="E3E6EA"/>
+            </a:solidFill>
+          </a:ln>
+          <a:effectLst/>
+        </p:spPr>
+        <p:style>
+          <a:lnRef idx="1">
+            <a:schemeClr val="accent1"/>
+          </a:lnRef>
+          <a:fillRef idx="3">
+            <a:schemeClr val="accent1"/>
+          </a:fillRef>
+          <a:effectRef idx="2">
+            <a:schemeClr val="accent1"/>
+          </a:effectRef>
+          <a:fontRef idx="minor">
+            <a:schemeClr val="lt1"/>
+          </a:fontRef>
+        </p:style>
+        <p:txBody>
+          <a:bodyPr rtlCol="0" anchor="ctr" lIns="54864" rIns="54864" tIns="0" bIns="0"/>
+          <a:lstStyle/>
+          <a:p>
+            <a:r>
+              <a:rPr sz="900" b="1">
+                <a:solidFill>
+                  <a:srgbClr val="FFFFFF"/>
+                </a:solidFill>
+              </a:rPr>
+              <a:t>Accent Red   #F33844   Logo red, Support</a:t>
+            </a:r>
+          </a:p>
+        </p:txBody>
+      </p:sp>
+      <p:sp>
+        <p:nvSpPr>
+          <p:cNvPr id="32" name="Rounded Rectangle 31"/>
+          <p:cNvSpPr/>
+          <p:nvPr/>
+        </p:nvSpPr>
+        <p:spPr>
+          <a:xfrm>
+            <a:off x="9601200" y="2962656"/>
+            <a:ext cx="2103120" cy="384048"/>
+          </a:xfrm>
+          <a:prstGeom prst="roundRect">
+            <a:avLst/>
+          </a:prstGeom>
+          <a:solidFill>
+            <a:srgbClr val="A8052E"/>
+          </a:solidFill>
+          <a:ln w="9525">
+            <a:solidFill>
+              <a:srgbClr val="E3E6EA"/>
+            </a:solidFill>
+          </a:ln>
+          <a:effectLst/>
+        </p:spPr>
+        <p:style>
+          <a:lnRef idx="1">
+            <a:schemeClr val="accent1"/>
+          </a:lnRef>
+          <a:fillRef idx="3">
+            <a:schemeClr val="accent1"/>
+          </a:fillRef>
+          <a:effectRef idx="2">
+            <a:schemeClr val="accent1"/>
+          </a:effectRef>
+          <a:fontRef idx="minor">
+            <a:schemeClr val="lt1"/>
+          </a:fontRef>
+        </p:style>
+        <p:txBody>
+          <a:bodyPr rtlCol="0" anchor="ctr" lIns="54864" rIns="54864" tIns="0" bIns="0"/>
+          <a:lstStyle/>
+          <a:p>
+            <a:r>
+              <a:rPr sz="900" b="1">
+                <a:solidFill>
+                  <a:srgbClr val="FFFFFF"/>
+                </a:solidFill>
+              </a:rPr>
+              <a:t>Deep Red   #A8052E</a:t>
+            </a:r>
+          </a:p>
+        </p:txBody>
+      </p:sp>
+      <p:sp>
+        <p:nvSpPr>
+          <p:cNvPr id="33" name="Rounded Rectangle 32"/>
+          <p:cNvSpPr/>
+          <p:nvPr/>
+        </p:nvSpPr>
+        <p:spPr>
+          <a:xfrm>
+            <a:off x="9601200" y="3419856"/>
+            <a:ext cx="2103120" cy="384048"/>
+          </a:xfrm>
+          <a:prstGeom prst="roundRect">
+            <a:avLst/>
+          </a:prstGeom>
+          <a:solidFill>
+            <a:srgbClr val="8F4AFA"/>
+          </a:solidFill>
+          <a:ln w="9525">
+            <a:solidFill>
+              <a:srgbClr val="E3E6EA"/>
+            </a:solidFill>
+          </a:ln>
+          <a:effectLst/>
+        </p:spPr>
+        <p:style>
+          <a:lnRef idx="1">
+            <a:schemeClr val="accent1"/>
+          </a:lnRef>
+          <a:fillRef idx="3">
+            <a:schemeClr val="accent1"/>
+          </a:fillRef>
+          <a:effectRef idx="2">
+            <a:schemeClr val="accent1"/>
+          </a:effectRef>
+          <a:fontRef idx="minor">
+            <a:schemeClr val="lt1"/>
+          </a:fontRef>
+        </p:style>
+        <p:txBody>
+          <a:bodyPr rtlCol="0" anchor="ctr" lIns="54864" rIns="54864" tIns="0" bIns="0"/>
+          <a:lstStyle/>
+          <a:p>
+            <a:r>
+              <a:rPr sz="900" b="1">
+                <a:solidFill>
+                  <a:srgbClr val="FFFFFF"/>
+                </a:solidFill>
+              </a:rPr>
+              <a:t>Accent Purple   #8F4AFA   Consulting</a:t>
+            </a:r>
+          </a:p>
+        </p:txBody>
+      </p:sp>
+      <p:sp>
+        <p:nvSpPr>
+          <p:cNvPr id="34" name="Rounded Rectangle 33"/>
+          <p:cNvSpPr/>
+          <p:nvPr/>
+        </p:nvSpPr>
+        <p:spPr>
+          <a:xfrm>
+            <a:off x="9601200" y="3877056"/>
+            <a:ext cx="2103120" cy="384048"/>
+          </a:xfrm>
+          <a:prstGeom prst="roundRect">
+            <a:avLst/>
+          </a:prstGeom>
+          <a:solidFill>
+            <a:srgbClr val="242C39"/>
+          </a:solidFill>
+          <a:ln w="9525">
+            <a:solidFill>
+              <a:srgbClr val="E3E6EA"/>
+            </a:solidFill>
+          </a:ln>
+          <a:effectLst/>
+        </p:spPr>
+        <p:style>
+          <a:lnRef idx="1">
+            <a:schemeClr val="accent1"/>
+          </a:lnRef>
+          <a:fillRef idx="3">
+            <a:schemeClr val="accent1"/>
+          </a:fillRef>
+          <a:effectRef idx="2">
+            <a:schemeClr val="accent1"/>
+          </a:effectRef>
+          <a:fontRef idx="minor">
+            <a:schemeClr val="lt1"/>
+          </a:fontRef>
+        </p:style>
+        <p:txBody>
+          <a:bodyPr rtlCol="0" anchor="ctr" lIns="54864" rIns="54864" tIns="0" bIns="0"/>
+          <a:lstStyle/>
+          <a:p>
+            <a:r>
+              <a:rPr sz="900" b="1">
+                <a:solidFill>
+                  <a:srgbClr val="FFFFFF"/>
+                </a:solidFill>
+              </a:rPr>
+              <a:t>Charcoal   #242C39   Text</a:t>
+            </a:r>
+          </a:p>
+        </p:txBody>
+      </p:sp>
+      <p:sp>
+        <p:nvSpPr>
+          <p:cNvPr id="35" name="Rounded Rectangle 34"/>
+          <p:cNvSpPr/>
+          <p:nvPr/>
+        </p:nvSpPr>
+        <p:spPr>
+          <a:xfrm>
+            <a:off x="9601200" y="4334256"/>
+            <a:ext cx="2103120" cy="384048"/>
+          </a:xfrm>
+          <a:prstGeom prst="roundRect">
+            <a:avLst/>
+          </a:prstGeom>
+          <a:solidFill>
+            <a:srgbClr val="FFFFFF"/>
+          </a:solidFill>
+          <a:ln w="9525">
+            <a:solidFill>
+              <a:srgbClr val="E3E6EA"/>
+            </a:solidFill>
+          </a:ln>
+          <a:effectLst/>
+        </p:spPr>
+        <p:style>
+          <a:lnRef idx="1">
+            <a:schemeClr val="accent1"/>
+          </a:lnRef>
+          <a:fillRef idx="3">
+            <a:schemeClr val="accent1"/>
+          </a:fillRef>
+          <a:effectRef idx="2">
+            <a:schemeClr val="accent1"/>
+          </a:effectRef>
+          <a:fontRef idx="minor">
+            <a:schemeClr val="lt1"/>
+          </a:fontRef>
+        </p:style>
+        <p:txBody>
+          <a:bodyPr rtlCol="0" anchor="ctr" lIns="54864" rIns="54864" tIns="0" bIns="0"/>
+          <a:lstStyle/>
+          <a:p>
+            <a:r>
+              <a:rPr sz="900" b="1">
+                <a:solidFill>
+                  <a:srgbClr val="242C39"/>
+                </a:solidFill>
+              </a:rPr>
+              <a:t>White   #FFFFFF</a:t>
+            </a:r>
+          </a:p>
+        </p:txBody>
+      </p:sp>
     </p:spTree>
   </p:cSld>
   <p:clrMapOvr>
@@ -20569,6 +24139,516 @@
               <a:t>15</a:t>
             </a:fld>
             <a:endParaRPr lang="en-US"/>
+          </a:p>
+        </p:txBody>
+      </p:sp>
+      <p:sp>
+        <p:nvSpPr>
+          <p:cNvPr id="26" name="TextBox 25"/>
+          <p:cNvSpPr txBox="1"/>
+          <p:nvPr/>
+        </p:nvSpPr>
+        <p:spPr>
+          <a:xfrm>
+            <a:off x="9601200" y="365760"/>
+            <a:ext cx="2103120" cy="274320"/>
+          </a:xfrm>
+          <a:prstGeom prst="rect">
+            <a:avLst/>
+          </a:prstGeom>
+          <a:noFill/>
+        </p:spPr>
+        <p:txBody>
+          <a:bodyPr wrap="none">
+            <a:spAutoFit/>
+          </a:bodyPr>
+          <a:lstStyle/>
+          <a:p>
+            <a:r>
+              <a:rPr sz="900" b="1">
+                <a:solidFill>
+                  <a:srgbClr val="242C39"/>
+                </a:solidFill>
+              </a:rPr>
+              <a:t>CTS palette — not on the slide, eyedropper from here</a:t>
+            </a:r>
+          </a:p>
+        </p:txBody>
+      </p:sp>
+      <p:sp>
+        <p:nvSpPr>
+          <p:cNvPr id="27" name="Rounded Rectangle 26"/>
+          <p:cNvSpPr/>
+          <p:nvPr/>
+        </p:nvSpPr>
+        <p:spPr>
+          <a:xfrm>
+            <a:off x="9601200" y="676656"/>
+            <a:ext cx="2103120" cy="384048"/>
+          </a:xfrm>
+          <a:prstGeom prst="roundRect">
+            <a:avLst/>
+          </a:prstGeom>
+          <a:solidFill>
+            <a:srgbClr val="3FD0C9"/>
+          </a:solidFill>
+          <a:ln w="9525">
+            <a:solidFill>
+              <a:srgbClr val="E3E6EA"/>
+            </a:solidFill>
+          </a:ln>
+          <a:effectLst/>
+        </p:spPr>
+        <p:style>
+          <a:lnRef idx="1">
+            <a:schemeClr val="accent1"/>
+          </a:lnRef>
+          <a:fillRef idx="3">
+            <a:schemeClr val="accent1"/>
+          </a:fillRef>
+          <a:effectRef idx="2">
+            <a:schemeClr val="accent1"/>
+          </a:effectRef>
+          <a:fontRef idx="minor">
+            <a:schemeClr val="lt1"/>
+          </a:fontRef>
+        </p:style>
+        <p:txBody>
+          <a:bodyPr rtlCol="0" anchor="ctr" lIns="54864" rIns="54864" tIns="0" bIns="0"/>
+          <a:lstStyle/>
+          <a:p>
+            <a:r>
+              <a:rPr sz="900" b="1">
+                <a:solidFill>
+                  <a:srgbClr val="242C39"/>
+                </a:solidFill>
+              </a:rPr>
+              <a:t>Bright Teal   #3FD0C9   Logo green</a:t>
+            </a:r>
+          </a:p>
+        </p:txBody>
+      </p:sp>
+      <p:sp>
+        <p:nvSpPr>
+          <p:cNvPr id="28" name="Rounded Rectangle 27"/>
+          <p:cNvSpPr/>
+          <p:nvPr/>
+        </p:nvSpPr>
+        <p:spPr>
+          <a:xfrm>
+            <a:off x="9601200" y="1133856"/>
+            <a:ext cx="2103120" cy="384048"/>
+          </a:xfrm>
+          <a:prstGeom prst="roundRect">
+            <a:avLst/>
+          </a:prstGeom>
+          <a:solidFill>
+            <a:srgbClr val="005358"/>
+          </a:solidFill>
+          <a:ln w="9525">
+            <a:solidFill>
+              <a:srgbClr val="E3E6EA"/>
+            </a:solidFill>
+          </a:ln>
+          <a:effectLst/>
+        </p:spPr>
+        <p:style>
+          <a:lnRef idx="1">
+            <a:schemeClr val="accent1"/>
+          </a:lnRef>
+          <a:fillRef idx="3">
+            <a:schemeClr val="accent1"/>
+          </a:fillRef>
+          <a:effectRef idx="2">
+            <a:schemeClr val="accent1"/>
+          </a:effectRef>
+          <a:fontRef idx="minor">
+            <a:schemeClr val="lt1"/>
+          </a:fontRef>
+        </p:style>
+        <p:txBody>
+          <a:bodyPr rtlCol="0" anchor="ctr" lIns="54864" rIns="54864" tIns="0" bIns="0"/>
+          <a:lstStyle/>
+          <a:p>
+            <a:r>
+              <a:rPr sz="900" b="1">
+                <a:solidFill>
+                  <a:srgbClr val="FFFFFF"/>
+                </a:solidFill>
+              </a:rPr>
+              <a:t>Dark Teal   #005358   Production</a:t>
+            </a:r>
+          </a:p>
+        </p:txBody>
+      </p:sp>
+      <p:sp>
+        <p:nvSpPr>
+          <p:cNvPr id="29" name="Rounded Rectangle 28"/>
+          <p:cNvSpPr/>
+          <p:nvPr/>
+        </p:nvSpPr>
+        <p:spPr>
+          <a:xfrm>
+            <a:off x="9601200" y="1591056"/>
+            <a:ext cx="2103120" cy="384048"/>
+          </a:xfrm>
+          <a:prstGeom prst="roundRect">
+            <a:avLst/>
+          </a:prstGeom>
+          <a:solidFill>
+            <a:srgbClr val="6D71FF"/>
+          </a:solidFill>
+          <a:ln w="9525">
+            <a:solidFill>
+              <a:srgbClr val="E3E6EA"/>
+            </a:solidFill>
+          </a:ln>
+          <a:effectLst/>
+        </p:spPr>
+        <p:style>
+          <a:lnRef idx="1">
+            <a:schemeClr val="accent1"/>
+          </a:lnRef>
+          <a:fillRef idx="3">
+            <a:schemeClr val="accent1"/>
+          </a:fillRef>
+          <a:effectRef idx="2">
+            <a:schemeClr val="accent1"/>
+          </a:effectRef>
+          <a:fontRef idx="minor">
+            <a:schemeClr val="lt1"/>
+          </a:fontRef>
+        </p:style>
+        <p:txBody>
+          <a:bodyPr rtlCol="0" anchor="ctr" lIns="54864" rIns="54864" tIns="0" bIns="0"/>
+          <a:lstStyle/>
+          <a:p>
+            <a:r>
+              <a:rPr sz="900" b="1">
+                <a:solidFill>
+                  <a:srgbClr val="FFFFFF"/>
+                </a:solidFill>
+              </a:rPr>
+              <a:t>Primary Blue   #6D71FF   Logo blue</a:t>
+            </a:r>
+          </a:p>
+        </p:txBody>
+      </p:sp>
+      <p:sp>
+        <p:nvSpPr>
+          <p:cNvPr id="30" name="Rounded Rectangle 29"/>
+          <p:cNvSpPr/>
+          <p:nvPr/>
+        </p:nvSpPr>
+        <p:spPr>
+          <a:xfrm>
+            <a:off x="9601200" y="2048256"/>
+            <a:ext cx="2103120" cy="384048"/>
+          </a:xfrm>
+          <a:prstGeom prst="roundRect">
+            <a:avLst/>
+          </a:prstGeom>
+          <a:solidFill>
+            <a:srgbClr val="122B82"/>
+          </a:solidFill>
+          <a:ln w="9525">
+            <a:solidFill>
+              <a:srgbClr val="E3E6EA"/>
+            </a:solidFill>
+          </a:ln>
+          <a:effectLst/>
+        </p:spPr>
+        <p:style>
+          <a:lnRef idx="1">
+            <a:schemeClr val="accent1"/>
+          </a:lnRef>
+          <a:fillRef idx="3">
+            <a:schemeClr val="accent1"/>
+          </a:fillRef>
+          <a:effectRef idx="2">
+            <a:schemeClr val="accent1"/>
+          </a:effectRef>
+          <a:fontRef idx="minor">
+            <a:schemeClr val="lt1"/>
+          </a:fontRef>
+        </p:style>
+        <p:txBody>
+          <a:bodyPr rtlCol="0" anchor="ctr" lIns="54864" rIns="54864" tIns="0" bIns="0"/>
+          <a:lstStyle/>
+          <a:p>
+            <a:r>
+              <a:rPr sz="900" b="1">
+                <a:solidFill>
+                  <a:srgbClr val="FFFFFF"/>
+                </a:solidFill>
+              </a:rPr>
+              <a:t>Deep Blue   #122B82</a:t>
+            </a:r>
+          </a:p>
+        </p:txBody>
+      </p:sp>
+      <p:sp>
+        <p:nvSpPr>
+          <p:cNvPr id="31" name="Rounded Rectangle 30"/>
+          <p:cNvSpPr/>
+          <p:nvPr/>
+        </p:nvSpPr>
+        <p:spPr>
+          <a:xfrm>
+            <a:off x="9601200" y="2505456"/>
+            <a:ext cx="2103120" cy="384048"/>
+          </a:xfrm>
+          <a:prstGeom prst="roundRect">
+            <a:avLst/>
+          </a:prstGeom>
+          <a:solidFill>
+            <a:srgbClr val="F33844"/>
+          </a:solidFill>
+          <a:ln w="9525">
+            <a:solidFill>
+              <a:srgbClr val="E3E6EA"/>
+            </a:solidFill>
+          </a:ln>
+          <a:effectLst/>
+        </p:spPr>
+        <p:style>
+          <a:lnRef idx="1">
+            <a:schemeClr val="accent1"/>
+          </a:lnRef>
+          <a:fillRef idx="3">
+            <a:schemeClr val="accent1"/>
+          </a:fillRef>
+          <a:effectRef idx="2">
+            <a:schemeClr val="accent1"/>
+          </a:effectRef>
+          <a:fontRef idx="minor">
+            <a:schemeClr val="lt1"/>
+          </a:fontRef>
+        </p:style>
+        <p:txBody>
+          <a:bodyPr rtlCol="0" anchor="ctr" lIns="54864" rIns="54864" tIns="0" bIns="0"/>
+          <a:lstStyle/>
+          <a:p>
+            <a:r>
+              <a:rPr sz="900" b="1">
+                <a:solidFill>
+                  <a:srgbClr val="FFFFFF"/>
+                </a:solidFill>
+              </a:rPr>
+              <a:t>Accent Red   #F33844   Logo red, Support</a:t>
+            </a:r>
+          </a:p>
+        </p:txBody>
+      </p:sp>
+      <p:sp>
+        <p:nvSpPr>
+          <p:cNvPr id="32" name="Rounded Rectangle 31"/>
+          <p:cNvSpPr/>
+          <p:nvPr/>
+        </p:nvSpPr>
+        <p:spPr>
+          <a:xfrm>
+            <a:off x="9601200" y="2962656"/>
+            <a:ext cx="2103120" cy="384048"/>
+          </a:xfrm>
+          <a:prstGeom prst="roundRect">
+            <a:avLst/>
+          </a:prstGeom>
+          <a:solidFill>
+            <a:srgbClr val="A8052E"/>
+          </a:solidFill>
+          <a:ln w="9525">
+            <a:solidFill>
+              <a:srgbClr val="E3E6EA"/>
+            </a:solidFill>
+          </a:ln>
+          <a:effectLst/>
+        </p:spPr>
+        <p:style>
+          <a:lnRef idx="1">
+            <a:schemeClr val="accent1"/>
+          </a:lnRef>
+          <a:fillRef idx="3">
+            <a:schemeClr val="accent1"/>
+          </a:fillRef>
+          <a:effectRef idx="2">
+            <a:schemeClr val="accent1"/>
+          </a:effectRef>
+          <a:fontRef idx="minor">
+            <a:schemeClr val="lt1"/>
+          </a:fontRef>
+        </p:style>
+        <p:txBody>
+          <a:bodyPr rtlCol="0" anchor="ctr" lIns="54864" rIns="54864" tIns="0" bIns="0"/>
+          <a:lstStyle/>
+          <a:p>
+            <a:r>
+              <a:rPr sz="900" b="1">
+                <a:solidFill>
+                  <a:srgbClr val="FFFFFF"/>
+                </a:solidFill>
+              </a:rPr>
+              <a:t>Deep Red   #A8052E</a:t>
+            </a:r>
+          </a:p>
+        </p:txBody>
+      </p:sp>
+      <p:sp>
+        <p:nvSpPr>
+          <p:cNvPr id="33" name="Rounded Rectangle 32"/>
+          <p:cNvSpPr/>
+          <p:nvPr/>
+        </p:nvSpPr>
+        <p:spPr>
+          <a:xfrm>
+            <a:off x="9601200" y="3419856"/>
+            <a:ext cx="2103120" cy="384048"/>
+          </a:xfrm>
+          <a:prstGeom prst="roundRect">
+            <a:avLst/>
+          </a:prstGeom>
+          <a:solidFill>
+            <a:srgbClr val="8F4AFA"/>
+          </a:solidFill>
+          <a:ln w="9525">
+            <a:solidFill>
+              <a:srgbClr val="E3E6EA"/>
+            </a:solidFill>
+          </a:ln>
+          <a:effectLst/>
+        </p:spPr>
+        <p:style>
+          <a:lnRef idx="1">
+            <a:schemeClr val="accent1"/>
+          </a:lnRef>
+          <a:fillRef idx="3">
+            <a:schemeClr val="accent1"/>
+          </a:fillRef>
+          <a:effectRef idx="2">
+            <a:schemeClr val="accent1"/>
+          </a:effectRef>
+          <a:fontRef idx="minor">
+            <a:schemeClr val="lt1"/>
+          </a:fontRef>
+        </p:style>
+        <p:txBody>
+          <a:bodyPr rtlCol="0" anchor="ctr" lIns="54864" rIns="54864" tIns="0" bIns="0"/>
+          <a:lstStyle/>
+          <a:p>
+            <a:r>
+              <a:rPr sz="900" b="1">
+                <a:solidFill>
+                  <a:srgbClr val="FFFFFF"/>
+                </a:solidFill>
+              </a:rPr>
+              <a:t>Accent Purple   #8F4AFA   Consulting</a:t>
+            </a:r>
+          </a:p>
+        </p:txBody>
+      </p:sp>
+      <p:sp>
+        <p:nvSpPr>
+          <p:cNvPr id="34" name="Rounded Rectangle 33"/>
+          <p:cNvSpPr/>
+          <p:nvPr/>
+        </p:nvSpPr>
+        <p:spPr>
+          <a:xfrm>
+            <a:off x="9601200" y="3877056"/>
+            <a:ext cx="2103120" cy="384048"/>
+          </a:xfrm>
+          <a:prstGeom prst="roundRect">
+            <a:avLst/>
+          </a:prstGeom>
+          <a:solidFill>
+            <a:srgbClr val="242C39"/>
+          </a:solidFill>
+          <a:ln w="9525">
+            <a:solidFill>
+              <a:srgbClr val="E3E6EA"/>
+            </a:solidFill>
+          </a:ln>
+          <a:effectLst/>
+        </p:spPr>
+        <p:style>
+          <a:lnRef idx="1">
+            <a:schemeClr val="accent1"/>
+          </a:lnRef>
+          <a:fillRef idx="3">
+            <a:schemeClr val="accent1"/>
+          </a:fillRef>
+          <a:effectRef idx="2">
+            <a:schemeClr val="accent1"/>
+          </a:effectRef>
+          <a:fontRef idx="minor">
+            <a:schemeClr val="lt1"/>
+          </a:fontRef>
+        </p:style>
+        <p:txBody>
+          <a:bodyPr rtlCol="0" anchor="ctr" lIns="54864" rIns="54864" tIns="0" bIns="0"/>
+          <a:lstStyle/>
+          <a:p>
+            <a:r>
+              <a:rPr sz="900" b="1">
+                <a:solidFill>
+                  <a:srgbClr val="FFFFFF"/>
+                </a:solidFill>
+              </a:rPr>
+              <a:t>Charcoal   #242C39   Text</a:t>
+            </a:r>
+          </a:p>
+        </p:txBody>
+      </p:sp>
+      <p:sp>
+        <p:nvSpPr>
+          <p:cNvPr id="35" name="Rounded Rectangle 34"/>
+          <p:cNvSpPr/>
+          <p:nvPr/>
+        </p:nvSpPr>
+        <p:spPr>
+          <a:xfrm>
+            <a:off x="9601200" y="4334256"/>
+            <a:ext cx="2103120" cy="384048"/>
+          </a:xfrm>
+          <a:prstGeom prst="roundRect">
+            <a:avLst/>
+          </a:prstGeom>
+          <a:solidFill>
+            <a:srgbClr val="FFFFFF"/>
+          </a:solidFill>
+          <a:ln w="9525">
+            <a:solidFill>
+              <a:srgbClr val="E3E6EA"/>
+            </a:solidFill>
+          </a:ln>
+          <a:effectLst/>
+        </p:spPr>
+        <p:style>
+          <a:lnRef idx="1">
+            <a:schemeClr val="accent1"/>
+          </a:lnRef>
+          <a:fillRef idx="3">
+            <a:schemeClr val="accent1"/>
+          </a:fillRef>
+          <a:effectRef idx="2">
+            <a:schemeClr val="accent1"/>
+          </a:effectRef>
+          <a:fontRef idx="minor">
+            <a:schemeClr val="lt1"/>
+          </a:fontRef>
+        </p:style>
+        <p:txBody>
+          <a:bodyPr rtlCol="0" anchor="ctr" lIns="54864" rIns="54864" tIns="0" bIns="0"/>
+          <a:lstStyle/>
+          <a:p>
+            <a:r>
+              <a:rPr sz="900" b="1">
+                <a:solidFill>
+                  <a:srgbClr val="242C39"/>
+                </a:solidFill>
+              </a:rPr>
+              <a:t>White   #FFFFFF</a:t>
+            </a:r>
           </a:p>
         </p:txBody>
       </p:sp>
@@ -21870,6 +25950,516 @@
           </a:p>
         </p:txBody>
       </p:sp>
+      <p:sp>
+        <p:nvSpPr>
+          <p:cNvPr id="26" name="TextBox 25"/>
+          <p:cNvSpPr txBox="1"/>
+          <p:nvPr/>
+        </p:nvSpPr>
+        <p:spPr>
+          <a:xfrm>
+            <a:off x="9601200" y="365760"/>
+            <a:ext cx="2103120" cy="274320"/>
+          </a:xfrm>
+          <a:prstGeom prst="rect">
+            <a:avLst/>
+          </a:prstGeom>
+          <a:noFill/>
+        </p:spPr>
+        <p:txBody>
+          <a:bodyPr wrap="none">
+            <a:spAutoFit/>
+          </a:bodyPr>
+          <a:lstStyle/>
+          <a:p>
+            <a:r>
+              <a:rPr sz="900" b="1">
+                <a:solidFill>
+                  <a:srgbClr val="242C39"/>
+                </a:solidFill>
+              </a:rPr>
+              <a:t>CTS palette — not on the slide, eyedropper from here</a:t>
+            </a:r>
+          </a:p>
+        </p:txBody>
+      </p:sp>
+      <p:sp>
+        <p:nvSpPr>
+          <p:cNvPr id="27" name="Rounded Rectangle 26"/>
+          <p:cNvSpPr/>
+          <p:nvPr/>
+        </p:nvSpPr>
+        <p:spPr>
+          <a:xfrm>
+            <a:off x="9601200" y="676656"/>
+            <a:ext cx="2103120" cy="384048"/>
+          </a:xfrm>
+          <a:prstGeom prst="roundRect">
+            <a:avLst/>
+          </a:prstGeom>
+          <a:solidFill>
+            <a:srgbClr val="3FD0C9"/>
+          </a:solidFill>
+          <a:ln w="9525">
+            <a:solidFill>
+              <a:srgbClr val="E3E6EA"/>
+            </a:solidFill>
+          </a:ln>
+          <a:effectLst/>
+        </p:spPr>
+        <p:style>
+          <a:lnRef idx="1">
+            <a:schemeClr val="accent1"/>
+          </a:lnRef>
+          <a:fillRef idx="3">
+            <a:schemeClr val="accent1"/>
+          </a:fillRef>
+          <a:effectRef idx="2">
+            <a:schemeClr val="accent1"/>
+          </a:effectRef>
+          <a:fontRef idx="minor">
+            <a:schemeClr val="lt1"/>
+          </a:fontRef>
+        </p:style>
+        <p:txBody>
+          <a:bodyPr rtlCol="0" anchor="ctr" lIns="54864" rIns="54864" tIns="0" bIns="0"/>
+          <a:lstStyle/>
+          <a:p>
+            <a:r>
+              <a:rPr sz="900" b="1">
+                <a:solidFill>
+                  <a:srgbClr val="242C39"/>
+                </a:solidFill>
+              </a:rPr>
+              <a:t>Bright Teal   #3FD0C9   Logo green</a:t>
+            </a:r>
+          </a:p>
+        </p:txBody>
+      </p:sp>
+      <p:sp>
+        <p:nvSpPr>
+          <p:cNvPr id="28" name="Rounded Rectangle 27"/>
+          <p:cNvSpPr/>
+          <p:nvPr/>
+        </p:nvSpPr>
+        <p:spPr>
+          <a:xfrm>
+            <a:off x="9601200" y="1133856"/>
+            <a:ext cx="2103120" cy="384048"/>
+          </a:xfrm>
+          <a:prstGeom prst="roundRect">
+            <a:avLst/>
+          </a:prstGeom>
+          <a:solidFill>
+            <a:srgbClr val="005358"/>
+          </a:solidFill>
+          <a:ln w="9525">
+            <a:solidFill>
+              <a:srgbClr val="E3E6EA"/>
+            </a:solidFill>
+          </a:ln>
+          <a:effectLst/>
+        </p:spPr>
+        <p:style>
+          <a:lnRef idx="1">
+            <a:schemeClr val="accent1"/>
+          </a:lnRef>
+          <a:fillRef idx="3">
+            <a:schemeClr val="accent1"/>
+          </a:fillRef>
+          <a:effectRef idx="2">
+            <a:schemeClr val="accent1"/>
+          </a:effectRef>
+          <a:fontRef idx="minor">
+            <a:schemeClr val="lt1"/>
+          </a:fontRef>
+        </p:style>
+        <p:txBody>
+          <a:bodyPr rtlCol="0" anchor="ctr" lIns="54864" rIns="54864" tIns="0" bIns="0"/>
+          <a:lstStyle/>
+          <a:p>
+            <a:r>
+              <a:rPr sz="900" b="1">
+                <a:solidFill>
+                  <a:srgbClr val="FFFFFF"/>
+                </a:solidFill>
+              </a:rPr>
+              <a:t>Dark Teal   #005358   Production</a:t>
+            </a:r>
+          </a:p>
+        </p:txBody>
+      </p:sp>
+      <p:sp>
+        <p:nvSpPr>
+          <p:cNvPr id="29" name="Rounded Rectangle 28"/>
+          <p:cNvSpPr/>
+          <p:nvPr/>
+        </p:nvSpPr>
+        <p:spPr>
+          <a:xfrm>
+            <a:off x="9601200" y="1591056"/>
+            <a:ext cx="2103120" cy="384048"/>
+          </a:xfrm>
+          <a:prstGeom prst="roundRect">
+            <a:avLst/>
+          </a:prstGeom>
+          <a:solidFill>
+            <a:srgbClr val="6D71FF"/>
+          </a:solidFill>
+          <a:ln w="9525">
+            <a:solidFill>
+              <a:srgbClr val="E3E6EA"/>
+            </a:solidFill>
+          </a:ln>
+          <a:effectLst/>
+        </p:spPr>
+        <p:style>
+          <a:lnRef idx="1">
+            <a:schemeClr val="accent1"/>
+          </a:lnRef>
+          <a:fillRef idx="3">
+            <a:schemeClr val="accent1"/>
+          </a:fillRef>
+          <a:effectRef idx="2">
+            <a:schemeClr val="accent1"/>
+          </a:effectRef>
+          <a:fontRef idx="minor">
+            <a:schemeClr val="lt1"/>
+          </a:fontRef>
+        </p:style>
+        <p:txBody>
+          <a:bodyPr rtlCol="0" anchor="ctr" lIns="54864" rIns="54864" tIns="0" bIns="0"/>
+          <a:lstStyle/>
+          <a:p>
+            <a:r>
+              <a:rPr sz="900" b="1">
+                <a:solidFill>
+                  <a:srgbClr val="FFFFFF"/>
+                </a:solidFill>
+              </a:rPr>
+              <a:t>Primary Blue   #6D71FF   Logo blue</a:t>
+            </a:r>
+          </a:p>
+        </p:txBody>
+      </p:sp>
+      <p:sp>
+        <p:nvSpPr>
+          <p:cNvPr id="30" name="Rounded Rectangle 29"/>
+          <p:cNvSpPr/>
+          <p:nvPr/>
+        </p:nvSpPr>
+        <p:spPr>
+          <a:xfrm>
+            <a:off x="9601200" y="2048256"/>
+            <a:ext cx="2103120" cy="384048"/>
+          </a:xfrm>
+          <a:prstGeom prst="roundRect">
+            <a:avLst/>
+          </a:prstGeom>
+          <a:solidFill>
+            <a:srgbClr val="122B82"/>
+          </a:solidFill>
+          <a:ln w="9525">
+            <a:solidFill>
+              <a:srgbClr val="E3E6EA"/>
+            </a:solidFill>
+          </a:ln>
+          <a:effectLst/>
+        </p:spPr>
+        <p:style>
+          <a:lnRef idx="1">
+            <a:schemeClr val="accent1"/>
+          </a:lnRef>
+          <a:fillRef idx="3">
+            <a:schemeClr val="accent1"/>
+          </a:fillRef>
+          <a:effectRef idx="2">
+            <a:schemeClr val="accent1"/>
+          </a:effectRef>
+          <a:fontRef idx="minor">
+            <a:schemeClr val="lt1"/>
+          </a:fontRef>
+        </p:style>
+        <p:txBody>
+          <a:bodyPr rtlCol="0" anchor="ctr" lIns="54864" rIns="54864" tIns="0" bIns="0"/>
+          <a:lstStyle/>
+          <a:p>
+            <a:r>
+              <a:rPr sz="900" b="1">
+                <a:solidFill>
+                  <a:srgbClr val="FFFFFF"/>
+                </a:solidFill>
+              </a:rPr>
+              <a:t>Deep Blue   #122B82</a:t>
+            </a:r>
+          </a:p>
+        </p:txBody>
+      </p:sp>
+      <p:sp>
+        <p:nvSpPr>
+          <p:cNvPr id="31" name="Rounded Rectangle 30"/>
+          <p:cNvSpPr/>
+          <p:nvPr/>
+        </p:nvSpPr>
+        <p:spPr>
+          <a:xfrm>
+            <a:off x="9601200" y="2505456"/>
+            <a:ext cx="2103120" cy="384048"/>
+          </a:xfrm>
+          <a:prstGeom prst="roundRect">
+            <a:avLst/>
+          </a:prstGeom>
+          <a:solidFill>
+            <a:srgbClr val="F33844"/>
+          </a:solidFill>
+          <a:ln w="9525">
+            <a:solidFill>
+              <a:srgbClr val="E3E6EA"/>
+            </a:solidFill>
+          </a:ln>
+          <a:effectLst/>
+        </p:spPr>
+        <p:style>
+          <a:lnRef idx="1">
+            <a:schemeClr val="accent1"/>
+          </a:lnRef>
+          <a:fillRef idx="3">
+            <a:schemeClr val="accent1"/>
+          </a:fillRef>
+          <a:effectRef idx="2">
+            <a:schemeClr val="accent1"/>
+          </a:effectRef>
+          <a:fontRef idx="minor">
+            <a:schemeClr val="lt1"/>
+          </a:fontRef>
+        </p:style>
+        <p:txBody>
+          <a:bodyPr rtlCol="0" anchor="ctr" lIns="54864" rIns="54864" tIns="0" bIns="0"/>
+          <a:lstStyle/>
+          <a:p>
+            <a:r>
+              <a:rPr sz="900" b="1">
+                <a:solidFill>
+                  <a:srgbClr val="FFFFFF"/>
+                </a:solidFill>
+              </a:rPr>
+              <a:t>Accent Red   #F33844   Logo red, Support</a:t>
+            </a:r>
+          </a:p>
+        </p:txBody>
+      </p:sp>
+      <p:sp>
+        <p:nvSpPr>
+          <p:cNvPr id="32" name="Rounded Rectangle 31"/>
+          <p:cNvSpPr/>
+          <p:nvPr/>
+        </p:nvSpPr>
+        <p:spPr>
+          <a:xfrm>
+            <a:off x="9601200" y="2962656"/>
+            <a:ext cx="2103120" cy="384048"/>
+          </a:xfrm>
+          <a:prstGeom prst="roundRect">
+            <a:avLst/>
+          </a:prstGeom>
+          <a:solidFill>
+            <a:srgbClr val="A8052E"/>
+          </a:solidFill>
+          <a:ln w="9525">
+            <a:solidFill>
+              <a:srgbClr val="E3E6EA"/>
+            </a:solidFill>
+          </a:ln>
+          <a:effectLst/>
+        </p:spPr>
+        <p:style>
+          <a:lnRef idx="1">
+            <a:schemeClr val="accent1"/>
+          </a:lnRef>
+          <a:fillRef idx="3">
+            <a:schemeClr val="accent1"/>
+          </a:fillRef>
+          <a:effectRef idx="2">
+            <a:schemeClr val="accent1"/>
+          </a:effectRef>
+          <a:fontRef idx="minor">
+            <a:schemeClr val="lt1"/>
+          </a:fontRef>
+        </p:style>
+        <p:txBody>
+          <a:bodyPr rtlCol="0" anchor="ctr" lIns="54864" rIns="54864" tIns="0" bIns="0"/>
+          <a:lstStyle/>
+          <a:p>
+            <a:r>
+              <a:rPr sz="900" b="1">
+                <a:solidFill>
+                  <a:srgbClr val="FFFFFF"/>
+                </a:solidFill>
+              </a:rPr>
+              <a:t>Deep Red   #A8052E</a:t>
+            </a:r>
+          </a:p>
+        </p:txBody>
+      </p:sp>
+      <p:sp>
+        <p:nvSpPr>
+          <p:cNvPr id="33" name="Rounded Rectangle 32"/>
+          <p:cNvSpPr/>
+          <p:nvPr/>
+        </p:nvSpPr>
+        <p:spPr>
+          <a:xfrm>
+            <a:off x="9601200" y="3419856"/>
+            <a:ext cx="2103120" cy="384048"/>
+          </a:xfrm>
+          <a:prstGeom prst="roundRect">
+            <a:avLst/>
+          </a:prstGeom>
+          <a:solidFill>
+            <a:srgbClr val="8F4AFA"/>
+          </a:solidFill>
+          <a:ln w="9525">
+            <a:solidFill>
+              <a:srgbClr val="E3E6EA"/>
+            </a:solidFill>
+          </a:ln>
+          <a:effectLst/>
+        </p:spPr>
+        <p:style>
+          <a:lnRef idx="1">
+            <a:schemeClr val="accent1"/>
+          </a:lnRef>
+          <a:fillRef idx="3">
+            <a:schemeClr val="accent1"/>
+          </a:fillRef>
+          <a:effectRef idx="2">
+            <a:schemeClr val="accent1"/>
+          </a:effectRef>
+          <a:fontRef idx="minor">
+            <a:schemeClr val="lt1"/>
+          </a:fontRef>
+        </p:style>
+        <p:txBody>
+          <a:bodyPr rtlCol="0" anchor="ctr" lIns="54864" rIns="54864" tIns="0" bIns="0"/>
+          <a:lstStyle/>
+          <a:p>
+            <a:r>
+              <a:rPr sz="900" b="1">
+                <a:solidFill>
+                  <a:srgbClr val="FFFFFF"/>
+                </a:solidFill>
+              </a:rPr>
+              <a:t>Accent Purple   #8F4AFA   Consulting</a:t>
+            </a:r>
+          </a:p>
+        </p:txBody>
+      </p:sp>
+      <p:sp>
+        <p:nvSpPr>
+          <p:cNvPr id="34" name="Rounded Rectangle 33"/>
+          <p:cNvSpPr/>
+          <p:nvPr/>
+        </p:nvSpPr>
+        <p:spPr>
+          <a:xfrm>
+            <a:off x="9601200" y="3877056"/>
+            <a:ext cx="2103120" cy="384048"/>
+          </a:xfrm>
+          <a:prstGeom prst="roundRect">
+            <a:avLst/>
+          </a:prstGeom>
+          <a:solidFill>
+            <a:srgbClr val="242C39"/>
+          </a:solidFill>
+          <a:ln w="9525">
+            <a:solidFill>
+              <a:srgbClr val="E3E6EA"/>
+            </a:solidFill>
+          </a:ln>
+          <a:effectLst/>
+        </p:spPr>
+        <p:style>
+          <a:lnRef idx="1">
+            <a:schemeClr val="accent1"/>
+          </a:lnRef>
+          <a:fillRef idx="3">
+            <a:schemeClr val="accent1"/>
+          </a:fillRef>
+          <a:effectRef idx="2">
+            <a:schemeClr val="accent1"/>
+          </a:effectRef>
+          <a:fontRef idx="minor">
+            <a:schemeClr val="lt1"/>
+          </a:fontRef>
+        </p:style>
+        <p:txBody>
+          <a:bodyPr rtlCol="0" anchor="ctr" lIns="54864" rIns="54864" tIns="0" bIns="0"/>
+          <a:lstStyle/>
+          <a:p>
+            <a:r>
+              <a:rPr sz="900" b="1">
+                <a:solidFill>
+                  <a:srgbClr val="FFFFFF"/>
+                </a:solidFill>
+              </a:rPr>
+              <a:t>Charcoal   #242C39   Text</a:t>
+            </a:r>
+          </a:p>
+        </p:txBody>
+      </p:sp>
+      <p:sp>
+        <p:nvSpPr>
+          <p:cNvPr id="35" name="Rounded Rectangle 34"/>
+          <p:cNvSpPr/>
+          <p:nvPr/>
+        </p:nvSpPr>
+        <p:spPr>
+          <a:xfrm>
+            <a:off x="9601200" y="4334256"/>
+            <a:ext cx="2103120" cy="384048"/>
+          </a:xfrm>
+          <a:prstGeom prst="roundRect">
+            <a:avLst/>
+          </a:prstGeom>
+          <a:solidFill>
+            <a:srgbClr val="FFFFFF"/>
+          </a:solidFill>
+          <a:ln w="9525">
+            <a:solidFill>
+              <a:srgbClr val="E3E6EA"/>
+            </a:solidFill>
+          </a:ln>
+          <a:effectLst/>
+        </p:spPr>
+        <p:style>
+          <a:lnRef idx="1">
+            <a:schemeClr val="accent1"/>
+          </a:lnRef>
+          <a:fillRef idx="3">
+            <a:schemeClr val="accent1"/>
+          </a:fillRef>
+          <a:effectRef idx="2">
+            <a:schemeClr val="accent1"/>
+          </a:effectRef>
+          <a:fontRef idx="minor">
+            <a:schemeClr val="lt1"/>
+          </a:fontRef>
+        </p:style>
+        <p:txBody>
+          <a:bodyPr rtlCol="0" anchor="ctr" lIns="54864" rIns="54864" tIns="0" bIns="0"/>
+          <a:lstStyle/>
+          <a:p>
+            <a:r>
+              <a:rPr sz="900" b="1">
+                <a:solidFill>
+                  <a:srgbClr val="242C39"/>
+                </a:solidFill>
+              </a:rPr>
+              <a:t>White   #FFFFFF</a:t>
+            </a:r>
+          </a:p>
+        </p:txBody>
+      </p:sp>
     </p:spTree>
   </p:cSld>
   <p:clrMapOvr>
@@ -21953,6 +26543,516 @@
           </a:prstGeom>
         </p:spPr>
       </p:pic>
+      <p:sp>
+        <p:nvSpPr>
+          <p:cNvPr id="5" name="TextBox 4"/>
+          <p:cNvSpPr txBox="1"/>
+          <p:nvPr/>
+        </p:nvSpPr>
+        <p:spPr>
+          <a:xfrm>
+            <a:off x="9601200" y="365760"/>
+            <a:ext cx="2103120" cy="274320"/>
+          </a:xfrm>
+          <a:prstGeom prst="rect">
+            <a:avLst/>
+          </a:prstGeom>
+          <a:noFill/>
+        </p:spPr>
+        <p:txBody>
+          <a:bodyPr wrap="none">
+            <a:spAutoFit/>
+          </a:bodyPr>
+          <a:lstStyle/>
+          <a:p>
+            <a:r>
+              <a:rPr sz="900" b="1">
+                <a:solidFill>
+                  <a:srgbClr val="242C39"/>
+                </a:solidFill>
+              </a:rPr>
+              <a:t>CTS palette — not on the slide, eyedropper from here</a:t>
+            </a:r>
+          </a:p>
+        </p:txBody>
+      </p:sp>
+      <p:sp>
+        <p:nvSpPr>
+          <p:cNvPr id="6" name="Rounded Rectangle 5"/>
+          <p:cNvSpPr/>
+          <p:nvPr/>
+        </p:nvSpPr>
+        <p:spPr>
+          <a:xfrm>
+            <a:off x="9601200" y="676656"/>
+            <a:ext cx="2103120" cy="384048"/>
+          </a:xfrm>
+          <a:prstGeom prst="roundRect">
+            <a:avLst/>
+          </a:prstGeom>
+          <a:solidFill>
+            <a:srgbClr val="3FD0C9"/>
+          </a:solidFill>
+          <a:ln w="9525">
+            <a:solidFill>
+              <a:srgbClr val="E3E6EA"/>
+            </a:solidFill>
+          </a:ln>
+          <a:effectLst/>
+        </p:spPr>
+        <p:style>
+          <a:lnRef idx="1">
+            <a:schemeClr val="accent1"/>
+          </a:lnRef>
+          <a:fillRef idx="3">
+            <a:schemeClr val="accent1"/>
+          </a:fillRef>
+          <a:effectRef idx="2">
+            <a:schemeClr val="accent1"/>
+          </a:effectRef>
+          <a:fontRef idx="minor">
+            <a:schemeClr val="lt1"/>
+          </a:fontRef>
+        </p:style>
+        <p:txBody>
+          <a:bodyPr rtlCol="0" anchor="ctr" lIns="54864" rIns="54864" tIns="0" bIns="0"/>
+          <a:lstStyle/>
+          <a:p>
+            <a:r>
+              <a:rPr sz="900" b="1">
+                <a:solidFill>
+                  <a:srgbClr val="242C39"/>
+                </a:solidFill>
+              </a:rPr>
+              <a:t>Bright Teal   #3FD0C9   Logo green</a:t>
+            </a:r>
+          </a:p>
+        </p:txBody>
+      </p:sp>
+      <p:sp>
+        <p:nvSpPr>
+          <p:cNvPr id="7" name="Rounded Rectangle 6"/>
+          <p:cNvSpPr/>
+          <p:nvPr/>
+        </p:nvSpPr>
+        <p:spPr>
+          <a:xfrm>
+            <a:off x="9601200" y="1133856"/>
+            <a:ext cx="2103120" cy="384048"/>
+          </a:xfrm>
+          <a:prstGeom prst="roundRect">
+            <a:avLst/>
+          </a:prstGeom>
+          <a:solidFill>
+            <a:srgbClr val="005358"/>
+          </a:solidFill>
+          <a:ln w="9525">
+            <a:solidFill>
+              <a:srgbClr val="E3E6EA"/>
+            </a:solidFill>
+          </a:ln>
+          <a:effectLst/>
+        </p:spPr>
+        <p:style>
+          <a:lnRef idx="1">
+            <a:schemeClr val="accent1"/>
+          </a:lnRef>
+          <a:fillRef idx="3">
+            <a:schemeClr val="accent1"/>
+          </a:fillRef>
+          <a:effectRef idx="2">
+            <a:schemeClr val="accent1"/>
+          </a:effectRef>
+          <a:fontRef idx="minor">
+            <a:schemeClr val="lt1"/>
+          </a:fontRef>
+        </p:style>
+        <p:txBody>
+          <a:bodyPr rtlCol="0" anchor="ctr" lIns="54864" rIns="54864" tIns="0" bIns="0"/>
+          <a:lstStyle/>
+          <a:p>
+            <a:r>
+              <a:rPr sz="900" b="1">
+                <a:solidFill>
+                  <a:srgbClr val="FFFFFF"/>
+                </a:solidFill>
+              </a:rPr>
+              <a:t>Dark Teal   #005358   Production</a:t>
+            </a:r>
+          </a:p>
+        </p:txBody>
+      </p:sp>
+      <p:sp>
+        <p:nvSpPr>
+          <p:cNvPr id="8" name="Rounded Rectangle 7"/>
+          <p:cNvSpPr/>
+          <p:nvPr/>
+        </p:nvSpPr>
+        <p:spPr>
+          <a:xfrm>
+            <a:off x="9601200" y="1591056"/>
+            <a:ext cx="2103120" cy="384048"/>
+          </a:xfrm>
+          <a:prstGeom prst="roundRect">
+            <a:avLst/>
+          </a:prstGeom>
+          <a:solidFill>
+            <a:srgbClr val="6D71FF"/>
+          </a:solidFill>
+          <a:ln w="9525">
+            <a:solidFill>
+              <a:srgbClr val="E3E6EA"/>
+            </a:solidFill>
+          </a:ln>
+          <a:effectLst/>
+        </p:spPr>
+        <p:style>
+          <a:lnRef idx="1">
+            <a:schemeClr val="accent1"/>
+          </a:lnRef>
+          <a:fillRef idx="3">
+            <a:schemeClr val="accent1"/>
+          </a:fillRef>
+          <a:effectRef idx="2">
+            <a:schemeClr val="accent1"/>
+          </a:effectRef>
+          <a:fontRef idx="minor">
+            <a:schemeClr val="lt1"/>
+          </a:fontRef>
+        </p:style>
+        <p:txBody>
+          <a:bodyPr rtlCol="0" anchor="ctr" lIns="54864" rIns="54864" tIns="0" bIns="0"/>
+          <a:lstStyle/>
+          <a:p>
+            <a:r>
+              <a:rPr sz="900" b="1">
+                <a:solidFill>
+                  <a:srgbClr val="FFFFFF"/>
+                </a:solidFill>
+              </a:rPr>
+              <a:t>Primary Blue   #6D71FF   Logo blue</a:t>
+            </a:r>
+          </a:p>
+        </p:txBody>
+      </p:sp>
+      <p:sp>
+        <p:nvSpPr>
+          <p:cNvPr id="9" name="Rounded Rectangle 8"/>
+          <p:cNvSpPr/>
+          <p:nvPr/>
+        </p:nvSpPr>
+        <p:spPr>
+          <a:xfrm>
+            <a:off x="9601200" y="2048256"/>
+            <a:ext cx="2103120" cy="384048"/>
+          </a:xfrm>
+          <a:prstGeom prst="roundRect">
+            <a:avLst/>
+          </a:prstGeom>
+          <a:solidFill>
+            <a:srgbClr val="122B82"/>
+          </a:solidFill>
+          <a:ln w="9525">
+            <a:solidFill>
+              <a:srgbClr val="E3E6EA"/>
+            </a:solidFill>
+          </a:ln>
+          <a:effectLst/>
+        </p:spPr>
+        <p:style>
+          <a:lnRef idx="1">
+            <a:schemeClr val="accent1"/>
+          </a:lnRef>
+          <a:fillRef idx="3">
+            <a:schemeClr val="accent1"/>
+          </a:fillRef>
+          <a:effectRef idx="2">
+            <a:schemeClr val="accent1"/>
+          </a:effectRef>
+          <a:fontRef idx="minor">
+            <a:schemeClr val="lt1"/>
+          </a:fontRef>
+        </p:style>
+        <p:txBody>
+          <a:bodyPr rtlCol="0" anchor="ctr" lIns="54864" rIns="54864" tIns="0" bIns="0"/>
+          <a:lstStyle/>
+          <a:p>
+            <a:r>
+              <a:rPr sz="900" b="1">
+                <a:solidFill>
+                  <a:srgbClr val="FFFFFF"/>
+                </a:solidFill>
+              </a:rPr>
+              <a:t>Deep Blue   #122B82</a:t>
+            </a:r>
+          </a:p>
+        </p:txBody>
+      </p:sp>
+      <p:sp>
+        <p:nvSpPr>
+          <p:cNvPr id="10" name="Rounded Rectangle 9"/>
+          <p:cNvSpPr/>
+          <p:nvPr/>
+        </p:nvSpPr>
+        <p:spPr>
+          <a:xfrm>
+            <a:off x="9601200" y="2505456"/>
+            <a:ext cx="2103120" cy="384048"/>
+          </a:xfrm>
+          <a:prstGeom prst="roundRect">
+            <a:avLst/>
+          </a:prstGeom>
+          <a:solidFill>
+            <a:srgbClr val="F33844"/>
+          </a:solidFill>
+          <a:ln w="9525">
+            <a:solidFill>
+              <a:srgbClr val="E3E6EA"/>
+            </a:solidFill>
+          </a:ln>
+          <a:effectLst/>
+        </p:spPr>
+        <p:style>
+          <a:lnRef idx="1">
+            <a:schemeClr val="accent1"/>
+          </a:lnRef>
+          <a:fillRef idx="3">
+            <a:schemeClr val="accent1"/>
+          </a:fillRef>
+          <a:effectRef idx="2">
+            <a:schemeClr val="accent1"/>
+          </a:effectRef>
+          <a:fontRef idx="minor">
+            <a:schemeClr val="lt1"/>
+          </a:fontRef>
+        </p:style>
+        <p:txBody>
+          <a:bodyPr rtlCol="0" anchor="ctr" lIns="54864" rIns="54864" tIns="0" bIns="0"/>
+          <a:lstStyle/>
+          <a:p>
+            <a:r>
+              <a:rPr sz="900" b="1">
+                <a:solidFill>
+                  <a:srgbClr val="FFFFFF"/>
+                </a:solidFill>
+              </a:rPr>
+              <a:t>Accent Red   #F33844   Logo red, Support</a:t>
+            </a:r>
+          </a:p>
+        </p:txBody>
+      </p:sp>
+      <p:sp>
+        <p:nvSpPr>
+          <p:cNvPr id="11" name="Rounded Rectangle 10"/>
+          <p:cNvSpPr/>
+          <p:nvPr/>
+        </p:nvSpPr>
+        <p:spPr>
+          <a:xfrm>
+            <a:off x="9601200" y="2962656"/>
+            <a:ext cx="2103120" cy="384048"/>
+          </a:xfrm>
+          <a:prstGeom prst="roundRect">
+            <a:avLst/>
+          </a:prstGeom>
+          <a:solidFill>
+            <a:srgbClr val="A8052E"/>
+          </a:solidFill>
+          <a:ln w="9525">
+            <a:solidFill>
+              <a:srgbClr val="E3E6EA"/>
+            </a:solidFill>
+          </a:ln>
+          <a:effectLst/>
+        </p:spPr>
+        <p:style>
+          <a:lnRef idx="1">
+            <a:schemeClr val="accent1"/>
+          </a:lnRef>
+          <a:fillRef idx="3">
+            <a:schemeClr val="accent1"/>
+          </a:fillRef>
+          <a:effectRef idx="2">
+            <a:schemeClr val="accent1"/>
+          </a:effectRef>
+          <a:fontRef idx="minor">
+            <a:schemeClr val="lt1"/>
+          </a:fontRef>
+        </p:style>
+        <p:txBody>
+          <a:bodyPr rtlCol="0" anchor="ctr" lIns="54864" rIns="54864" tIns="0" bIns="0"/>
+          <a:lstStyle/>
+          <a:p>
+            <a:r>
+              <a:rPr sz="900" b="1">
+                <a:solidFill>
+                  <a:srgbClr val="FFFFFF"/>
+                </a:solidFill>
+              </a:rPr>
+              <a:t>Deep Red   #A8052E</a:t>
+            </a:r>
+          </a:p>
+        </p:txBody>
+      </p:sp>
+      <p:sp>
+        <p:nvSpPr>
+          <p:cNvPr id="12" name="Rounded Rectangle 11"/>
+          <p:cNvSpPr/>
+          <p:nvPr/>
+        </p:nvSpPr>
+        <p:spPr>
+          <a:xfrm>
+            <a:off x="9601200" y="3419856"/>
+            <a:ext cx="2103120" cy="384048"/>
+          </a:xfrm>
+          <a:prstGeom prst="roundRect">
+            <a:avLst/>
+          </a:prstGeom>
+          <a:solidFill>
+            <a:srgbClr val="8F4AFA"/>
+          </a:solidFill>
+          <a:ln w="9525">
+            <a:solidFill>
+              <a:srgbClr val="E3E6EA"/>
+            </a:solidFill>
+          </a:ln>
+          <a:effectLst/>
+        </p:spPr>
+        <p:style>
+          <a:lnRef idx="1">
+            <a:schemeClr val="accent1"/>
+          </a:lnRef>
+          <a:fillRef idx="3">
+            <a:schemeClr val="accent1"/>
+          </a:fillRef>
+          <a:effectRef idx="2">
+            <a:schemeClr val="accent1"/>
+          </a:effectRef>
+          <a:fontRef idx="minor">
+            <a:schemeClr val="lt1"/>
+          </a:fontRef>
+        </p:style>
+        <p:txBody>
+          <a:bodyPr rtlCol="0" anchor="ctr" lIns="54864" rIns="54864" tIns="0" bIns="0"/>
+          <a:lstStyle/>
+          <a:p>
+            <a:r>
+              <a:rPr sz="900" b="1">
+                <a:solidFill>
+                  <a:srgbClr val="FFFFFF"/>
+                </a:solidFill>
+              </a:rPr>
+              <a:t>Accent Purple   #8F4AFA   Consulting</a:t>
+            </a:r>
+          </a:p>
+        </p:txBody>
+      </p:sp>
+      <p:sp>
+        <p:nvSpPr>
+          <p:cNvPr id="13" name="Rounded Rectangle 12"/>
+          <p:cNvSpPr/>
+          <p:nvPr/>
+        </p:nvSpPr>
+        <p:spPr>
+          <a:xfrm>
+            <a:off x="9601200" y="3877056"/>
+            <a:ext cx="2103120" cy="384048"/>
+          </a:xfrm>
+          <a:prstGeom prst="roundRect">
+            <a:avLst/>
+          </a:prstGeom>
+          <a:solidFill>
+            <a:srgbClr val="242C39"/>
+          </a:solidFill>
+          <a:ln w="9525">
+            <a:solidFill>
+              <a:srgbClr val="E3E6EA"/>
+            </a:solidFill>
+          </a:ln>
+          <a:effectLst/>
+        </p:spPr>
+        <p:style>
+          <a:lnRef idx="1">
+            <a:schemeClr val="accent1"/>
+          </a:lnRef>
+          <a:fillRef idx="3">
+            <a:schemeClr val="accent1"/>
+          </a:fillRef>
+          <a:effectRef idx="2">
+            <a:schemeClr val="accent1"/>
+          </a:effectRef>
+          <a:fontRef idx="minor">
+            <a:schemeClr val="lt1"/>
+          </a:fontRef>
+        </p:style>
+        <p:txBody>
+          <a:bodyPr rtlCol="0" anchor="ctr" lIns="54864" rIns="54864" tIns="0" bIns="0"/>
+          <a:lstStyle/>
+          <a:p>
+            <a:r>
+              <a:rPr sz="900" b="1">
+                <a:solidFill>
+                  <a:srgbClr val="FFFFFF"/>
+                </a:solidFill>
+              </a:rPr>
+              <a:t>Charcoal   #242C39   Text</a:t>
+            </a:r>
+          </a:p>
+        </p:txBody>
+      </p:sp>
+      <p:sp>
+        <p:nvSpPr>
+          <p:cNvPr id="14" name="Rounded Rectangle 13"/>
+          <p:cNvSpPr/>
+          <p:nvPr/>
+        </p:nvSpPr>
+        <p:spPr>
+          <a:xfrm>
+            <a:off x="9601200" y="4334256"/>
+            <a:ext cx="2103120" cy="384048"/>
+          </a:xfrm>
+          <a:prstGeom prst="roundRect">
+            <a:avLst/>
+          </a:prstGeom>
+          <a:solidFill>
+            <a:srgbClr val="FFFFFF"/>
+          </a:solidFill>
+          <a:ln w="9525">
+            <a:solidFill>
+              <a:srgbClr val="E3E6EA"/>
+            </a:solidFill>
+          </a:ln>
+          <a:effectLst/>
+        </p:spPr>
+        <p:style>
+          <a:lnRef idx="1">
+            <a:schemeClr val="accent1"/>
+          </a:lnRef>
+          <a:fillRef idx="3">
+            <a:schemeClr val="accent1"/>
+          </a:fillRef>
+          <a:effectRef idx="2">
+            <a:schemeClr val="accent1"/>
+          </a:effectRef>
+          <a:fontRef idx="minor">
+            <a:schemeClr val="lt1"/>
+          </a:fontRef>
+        </p:style>
+        <p:txBody>
+          <a:bodyPr rtlCol="0" anchor="ctr" lIns="54864" rIns="54864" tIns="0" bIns="0"/>
+          <a:lstStyle/>
+          <a:p>
+            <a:r>
+              <a:rPr sz="900" b="1">
+                <a:solidFill>
+                  <a:srgbClr val="242C39"/>
+                </a:solidFill>
+              </a:rPr>
+              <a:t>White   #FFFFFF</a:t>
+            </a:r>
+          </a:p>
+        </p:txBody>
+      </p:sp>
     </p:spTree>
     <p:extLst>
       <p:ext uri="{BB962C8B-B14F-4D97-AF65-F5344CB8AC3E}">
@@ -22227,6 +27327,516 @@
           </a:p>
         </p:txBody>
       </p:sp>
+      <p:sp>
+        <p:nvSpPr>
+          <p:cNvPr id="26" name="TextBox 25"/>
+          <p:cNvSpPr txBox="1"/>
+          <p:nvPr/>
+        </p:nvSpPr>
+        <p:spPr>
+          <a:xfrm>
+            <a:off x="9601200" y="365760"/>
+            <a:ext cx="2103120" cy="274320"/>
+          </a:xfrm>
+          <a:prstGeom prst="rect">
+            <a:avLst/>
+          </a:prstGeom>
+          <a:noFill/>
+        </p:spPr>
+        <p:txBody>
+          <a:bodyPr wrap="none">
+            <a:spAutoFit/>
+          </a:bodyPr>
+          <a:lstStyle/>
+          <a:p>
+            <a:r>
+              <a:rPr sz="900" b="1">
+                <a:solidFill>
+                  <a:srgbClr val="242C39"/>
+                </a:solidFill>
+              </a:rPr>
+              <a:t>CTS palette — not on the slide, eyedropper from here</a:t>
+            </a:r>
+          </a:p>
+        </p:txBody>
+      </p:sp>
+      <p:sp>
+        <p:nvSpPr>
+          <p:cNvPr id="27" name="Rounded Rectangle 26"/>
+          <p:cNvSpPr/>
+          <p:nvPr/>
+        </p:nvSpPr>
+        <p:spPr>
+          <a:xfrm>
+            <a:off x="9601200" y="676656"/>
+            <a:ext cx="2103120" cy="384048"/>
+          </a:xfrm>
+          <a:prstGeom prst="roundRect">
+            <a:avLst/>
+          </a:prstGeom>
+          <a:solidFill>
+            <a:srgbClr val="3FD0C9"/>
+          </a:solidFill>
+          <a:ln w="9525">
+            <a:solidFill>
+              <a:srgbClr val="E3E6EA"/>
+            </a:solidFill>
+          </a:ln>
+          <a:effectLst/>
+        </p:spPr>
+        <p:style>
+          <a:lnRef idx="1">
+            <a:schemeClr val="accent1"/>
+          </a:lnRef>
+          <a:fillRef idx="3">
+            <a:schemeClr val="accent1"/>
+          </a:fillRef>
+          <a:effectRef idx="2">
+            <a:schemeClr val="accent1"/>
+          </a:effectRef>
+          <a:fontRef idx="minor">
+            <a:schemeClr val="lt1"/>
+          </a:fontRef>
+        </p:style>
+        <p:txBody>
+          <a:bodyPr rtlCol="0" anchor="ctr" lIns="54864" rIns="54864" tIns="0" bIns="0"/>
+          <a:lstStyle/>
+          <a:p>
+            <a:r>
+              <a:rPr sz="900" b="1">
+                <a:solidFill>
+                  <a:srgbClr val="242C39"/>
+                </a:solidFill>
+              </a:rPr>
+              <a:t>Bright Teal   #3FD0C9   Logo green</a:t>
+            </a:r>
+          </a:p>
+        </p:txBody>
+      </p:sp>
+      <p:sp>
+        <p:nvSpPr>
+          <p:cNvPr id="28" name="Rounded Rectangle 27"/>
+          <p:cNvSpPr/>
+          <p:nvPr/>
+        </p:nvSpPr>
+        <p:spPr>
+          <a:xfrm>
+            <a:off x="9601200" y="1133856"/>
+            <a:ext cx="2103120" cy="384048"/>
+          </a:xfrm>
+          <a:prstGeom prst="roundRect">
+            <a:avLst/>
+          </a:prstGeom>
+          <a:solidFill>
+            <a:srgbClr val="005358"/>
+          </a:solidFill>
+          <a:ln w="9525">
+            <a:solidFill>
+              <a:srgbClr val="E3E6EA"/>
+            </a:solidFill>
+          </a:ln>
+          <a:effectLst/>
+        </p:spPr>
+        <p:style>
+          <a:lnRef idx="1">
+            <a:schemeClr val="accent1"/>
+          </a:lnRef>
+          <a:fillRef idx="3">
+            <a:schemeClr val="accent1"/>
+          </a:fillRef>
+          <a:effectRef idx="2">
+            <a:schemeClr val="accent1"/>
+          </a:effectRef>
+          <a:fontRef idx="minor">
+            <a:schemeClr val="lt1"/>
+          </a:fontRef>
+        </p:style>
+        <p:txBody>
+          <a:bodyPr rtlCol="0" anchor="ctr" lIns="54864" rIns="54864" tIns="0" bIns="0"/>
+          <a:lstStyle/>
+          <a:p>
+            <a:r>
+              <a:rPr sz="900" b="1">
+                <a:solidFill>
+                  <a:srgbClr val="FFFFFF"/>
+                </a:solidFill>
+              </a:rPr>
+              <a:t>Dark Teal   #005358   Production</a:t>
+            </a:r>
+          </a:p>
+        </p:txBody>
+      </p:sp>
+      <p:sp>
+        <p:nvSpPr>
+          <p:cNvPr id="29" name="Rounded Rectangle 28"/>
+          <p:cNvSpPr/>
+          <p:nvPr/>
+        </p:nvSpPr>
+        <p:spPr>
+          <a:xfrm>
+            <a:off x="9601200" y="1591056"/>
+            <a:ext cx="2103120" cy="384048"/>
+          </a:xfrm>
+          <a:prstGeom prst="roundRect">
+            <a:avLst/>
+          </a:prstGeom>
+          <a:solidFill>
+            <a:srgbClr val="6D71FF"/>
+          </a:solidFill>
+          <a:ln w="9525">
+            <a:solidFill>
+              <a:srgbClr val="E3E6EA"/>
+            </a:solidFill>
+          </a:ln>
+          <a:effectLst/>
+        </p:spPr>
+        <p:style>
+          <a:lnRef idx="1">
+            <a:schemeClr val="accent1"/>
+          </a:lnRef>
+          <a:fillRef idx="3">
+            <a:schemeClr val="accent1"/>
+          </a:fillRef>
+          <a:effectRef idx="2">
+            <a:schemeClr val="accent1"/>
+          </a:effectRef>
+          <a:fontRef idx="minor">
+            <a:schemeClr val="lt1"/>
+          </a:fontRef>
+        </p:style>
+        <p:txBody>
+          <a:bodyPr rtlCol="0" anchor="ctr" lIns="54864" rIns="54864" tIns="0" bIns="0"/>
+          <a:lstStyle/>
+          <a:p>
+            <a:r>
+              <a:rPr sz="900" b="1">
+                <a:solidFill>
+                  <a:srgbClr val="FFFFFF"/>
+                </a:solidFill>
+              </a:rPr>
+              <a:t>Primary Blue   #6D71FF   Logo blue</a:t>
+            </a:r>
+          </a:p>
+        </p:txBody>
+      </p:sp>
+      <p:sp>
+        <p:nvSpPr>
+          <p:cNvPr id="30" name="Rounded Rectangle 29"/>
+          <p:cNvSpPr/>
+          <p:nvPr/>
+        </p:nvSpPr>
+        <p:spPr>
+          <a:xfrm>
+            <a:off x="9601200" y="2048256"/>
+            <a:ext cx="2103120" cy="384048"/>
+          </a:xfrm>
+          <a:prstGeom prst="roundRect">
+            <a:avLst/>
+          </a:prstGeom>
+          <a:solidFill>
+            <a:srgbClr val="122B82"/>
+          </a:solidFill>
+          <a:ln w="9525">
+            <a:solidFill>
+              <a:srgbClr val="E3E6EA"/>
+            </a:solidFill>
+          </a:ln>
+          <a:effectLst/>
+        </p:spPr>
+        <p:style>
+          <a:lnRef idx="1">
+            <a:schemeClr val="accent1"/>
+          </a:lnRef>
+          <a:fillRef idx="3">
+            <a:schemeClr val="accent1"/>
+          </a:fillRef>
+          <a:effectRef idx="2">
+            <a:schemeClr val="accent1"/>
+          </a:effectRef>
+          <a:fontRef idx="minor">
+            <a:schemeClr val="lt1"/>
+          </a:fontRef>
+        </p:style>
+        <p:txBody>
+          <a:bodyPr rtlCol="0" anchor="ctr" lIns="54864" rIns="54864" tIns="0" bIns="0"/>
+          <a:lstStyle/>
+          <a:p>
+            <a:r>
+              <a:rPr sz="900" b="1">
+                <a:solidFill>
+                  <a:srgbClr val="FFFFFF"/>
+                </a:solidFill>
+              </a:rPr>
+              <a:t>Deep Blue   #122B82</a:t>
+            </a:r>
+          </a:p>
+        </p:txBody>
+      </p:sp>
+      <p:sp>
+        <p:nvSpPr>
+          <p:cNvPr id="31" name="Rounded Rectangle 30"/>
+          <p:cNvSpPr/>
+          <p:nvPr/>
+        </p:nvSpPr>
+        <p:spPr>
+          <a:xfrm>
+            <a:off x="9601200" y="2505456"/>
+            <a:ext cx="2103120" cy="384048"/>
+          </a:xfrm>
+          <a:prstGeom prst="roundRect">
+            <a:avLst/>
+          </a:prstGeom>
+          <a:solidFill>
+            <a:srgbClr val="F33844"/>
+          </a:solidFill>
+          <a:ln w="9525">
+            <a:solidFill>
+              <a:srgbClr val="E3E6EA"/>
+            </a:solidFill>
+          </a:ln>
+          <a:effectLst/>
+        </p:spPr>
+        <p:style>
+          <a:lnRef idx="1">
+            <a:schemeClr val="accent1"/>
+          </a:lnRef>
+          <a:fillRef idx="3">
+            <a:schemeClr val="accent1"/>
+          </a:fillRef>
+          <a:effectRef idx="2">
+            <a:schemeClr val="accent1"/>
+          </a:effectRef>
+          <a:fontRef idx="minor">
+            <a:schemeClr val="lt1"/>
+          </a:fontRef>
+        </p:style>
+        <p:txBody>
+          <a:bodyPr rtlCol="0" anchor="ctr" lIns="54864" rIns="54864" tIns="0" bIns="0"/>
+          <a:lstStyle/>
+          <a:p>
+            <a:r>
+              <a:rPr sz="900" b="1">
+                <a:solidFill>
+                  <a:srgbClr val="FFFFFF"/>
+                </a:solidFill>
+              </a:rPr>
+              <a:t>Accent Red   #F33844   Logo red, Support</a:t>
+            </a:r>
+          </a:p>
+        </p:txBody>
+      </p:sp>
+      <p:sp>
+        <p:nvSpPr>
+          <p:cNvPr id="32" name="Rounded Rectangle 31"/>
+          <p:cNvSpPr/>
+          <p:nvPr/>
+        </p:nvSpPr>
+        <p:spPr>
+          <a:xfrm>
+            <a:off x="9601200" y="2962656"/>
+            <a:ext cx="2103120" cy="384048"/>
+          </a:xfrm>
+          <a:prstGeom prst="roundRect">
+            <a:avLst/>
+          </a:prstGeom>
+          <a:solidFill>
+            <a:srgbClr val="A8052E"/>
+          </a:solidFill>
+          <a:ln w="9525">
+            <a:solidFill>
+              <a:srgbClr val="E3E6EA"/>
+            </a:solidFill>
+          </a:ln>
+          <a:effectLst/>
+        </p:spPr>
+        <p:style>
+          <a:lnRef idx="1">
+            <a:schemeClr val="accent1"/>
+          </a:lnRef>
+          <a:fillRef idx="3">
+            <a:schemeClr val="accent1"/>
+          </a:fillRef>
+          <a:effectRef idx="2">
+            <a:schemeClr val="accent1"/>
+          </a:effectRef>
+          <a:fontRef idx="minor">
+            <a:schemeClr val="lt1"/>
+          </a:fontRef>
+        </p:style>
+        <p:txBody>
+          <a:bodyPr rtlCol="0" anchor="ctr" lIns="54864" rIns="54864" tIns="0" bIns="0"/>
+          <a:lstStyle/>
+          <a:p>
+            <a:r>
+              <a:rPr sz="900" b="1">
+                <a:solidFill>
+                  <a:srgbClr val="FFFFFF"/>
+                </a:solidFill>
+              </a:rPr>
+              <a:t>Deep Red   #A8052E</a:t>
+            </a:r>
+          </a:p>
+        </p:txBody>
+      </p:sp>
+      <p:sp>
+        <p:nvSpPr>
+          <p:cNvPr id="33" name="Rounded Rectangle 32"/>
+          <p:cNvSpPr/>
+          <p:nvPr/>
+        </p:nvSpPr>
+        <p:spPr>
+          <a:xfrm>
+            <a:off x="9601200" y="3419856"/>
+            <a:ext cx="2103120" cy="384048"/>
+          </a:xfrm>
+          <a:prstGeom prst="roundRect">
+            <a:avLst/>
+          </a:prstGeom>
+          <a:solidFill>
+            <a:srgbClr val="8F4AFA"/>
+          </a:solidFill>
+          <a:ln w="9525">
+            <a:solidFill>
+              <a:srgbClr val="E3E6EA"/>
+            </a:solidFill>
+          </a:ln>
+          <a:effectLst/>
+        </p:spPr>
+        <p:style>
+          <a:lnRef idx="1">
+            <a:schemeClr val="accent1"/>
+          </a:lnRef>
+          <a:fillRef idx="3">
+            <a:schemeClr val="accent1"/>
+          </a:fillRef>
+          <a:effectRef idx="2">
+            <a:schemeClr val="accent1"/>
+          </a:effectRef>
+          <a:fontRef idx="minor">
+            <a:schemeClr val="lt1"/>
+          </a:fontRef>
+        </p:style>
+        <p:txBody>
+          <a:bodyPr rtlCol="0" anchor="ctr" lIns="54864" rIns="54864" tIns="0" bIns="0"/>
+          <a:lstStyle/>
+          <a:p>
+            <a:r>
+              <a:rPr sz="900" b="1">
+                <a:solidFill>
+                  <a:srgbClr val="FFFFFF"/>
+                </a:solidFill>
+              </a:rPr>
+              <a:t>Accent Purple   #8F4AFA   Consulting</a:t>
+            </a:r>
+          </a:p>
+        </p:txBody>
+      </p:sp>
+      <p:sp>
+        <p:nvSpPr>
+          <p:cNvPr id="34" name="Rounded Rectangle 33"/>
+          <p:cNvSpPr/>
+          <p:nvPr/>
+        </p:nvSpPr>
+        <p:spPr>
+          <a:xfrm>
+            <a:off x="9601200" y="3877056"/>
+            <a:ext cx="2103120" cy="384048"/>
+          </a:xfrm>
+          <a:prstGeom prst="roundRect">
+            <a:avLst/>
+          </a:prstGeom>
+          <a:solidFill>
+            <a:srgbClr val="242C39"/>
+          </a:solidFill>
+          <a:ln w="9525">
+            <a:solidFill>
+              <a:srgbClr val="E3E6EA"/>
+            </a:solidFill>
+          </a:ln>
+          <a:effectLst/>
+        </p:spPr>
+        <p:style>
+          <a:lnRef idx="1">
+            <a:schemeClr val="accent1"/>
+          </a:lnRef>
+          <a:fillRef idx="3">
+            <a:schemeClr val="accent1"/>
+          </a:fillRef>
+          <a:effectRef idx="2">
+            <a:schemeClr val="accent1"/>
+          </a:effectRef>
+          <a:fontRef idx="minor">
+            <a:schemeClr val="lt1"/>
+          </a:fontRef>
+        </p:style>
+        <p:txBody>
+          <a:bodyPr rtlCol="0" anchor="ctr" lIns="54864" rIns="54864" tIns="0" bIns="0"/>
+          <a:lstStyle/>
+          <a:p>
+            <a:r>
+              <a:rPr sz="900" b="1">
+                <a:solidFill>
+                  <a:srgbClr val="FFFFFF"/>
+                </a:solidFill>
+              </a:rPr>
+              <a:t>Charcoal   #242C39   Text</a:t>
+            </a:r>
+          </a:p>
+        </p:txBody>
+      </p:sp>
+      <p:sp>
+        <p:nvSpPr>
+          <p:cNvPr id="35" name="Rounded Rectangle 34"/>
+          <p:cNvSpPr/>
+          <p:nvPr/>
+        </p:nvSpPr>
+        <p:spPr>
+          <a:xfrm>
+            <a:off x="9601200" y="4334256"/>
+            <a:ext cx="2103120" cy="384048"/>
+          </a:xfrm>
+          <a:prstGeom prst="roundRect">
+            <a:avLst/>
+          </a:prstGeom>
+          <a:solidFill>
+            <a:srgbClr val="FFFFFF"/>
+          </a:solidFill>
+          <a:ln w="9525">
+            <a:solidFill>
+              <a:srgbClr val="E3E6EA"/>
+            </a:solidFill>
+          </a:ln>
+          <a:effectLst/>
+        </p:spPr>
+        <p:style>
+          <a:lnRef idx="1">
+            <a:schemeClr val="accent1"/>
+          </a:lnRef>
+          <a:fillRef idx="3">
+            <a:schemeClr val="accent1"/>
+          </a:fillRef>
+          <a:effectRef idx="2">
+            <a:schemeClr val="accent1"/>
+          </a:effectRef>
+          <a:fontRef idx="minor">
+            <a:schemeClr val="lt1"/>
+          </a:fontRef>
+        </p:style>
+        <p:txBody>
+          <a:bodyPr rtlCol="0" anchor="ctr" lIns="54864" rIns="54864" tIns="0" bIns="0"/>
+          <a:lstStyle/>
+          <a:p>
+            <a:r>
+              <a:rPr sz="900" b="1">
+                <a:solidFill>
+                  <a:srgbClr val="242C39"/>
+                </a:solidFill>
+              </a:rPr>
+              <a:t>White   #FFFFFF</a:t>
+            </a:r>
+          </a:p>
+        </p:txBody>
+      </p:sp>
     </p:spTree>
   </p:cSld>
   <p:clrMapOvr>
@@ -22426,6 +28036,516 @@
               <a:t>3</a:t>
             </a:fld>
             <a:endParaRPr lang="en-US"/>
+          </a:p>
+        </p:txBody>
+      </p:sp>
+      <p:sp>
+        <p:nvSpPr>
+          <p:cNvPr id="26" name="TextBox 25"/>
+          <p:cNvSpPr txBox="1"/>
+          <p:nvPr/>
+        </p:nvSpPr>
+        <p:spPr>
+          <a:xfrm>
+            <a:off x="9601200" y="365760"/>
+            <a:ext cx="2103120" cy="274320"/>
+          </a:xfrm>
+          <a:prstGeom prst="rect">
+            <a:avLst/>
+          </a:prstGeom>
+          <a:noFill/>
+        </p:spPr>
+        <p:txBody>
+          <a:bodyPr wrap="none">
+            <a:spAutoFit/>
+          </a:bodyPr>
+          <a:lstStyle/>
+          <a:p>
+            <a:r>
+              <a:rPr sz="900" b="1">
+                <a:solidFill>
+                  <a:srgbClr val="242C39"/>
+                </a:solidFill>
+              </a:rPr>
+              <a:t>CTS palette — not on the slide, eyedropper from here</a:t>
+            </a:r>
+          </a:p>
+        </p:txBody>
+      </p:sp>
+      <p:sp>
+        <p:nvSpPr>
+          <p:cNvPr id="27" name="Rounded Rectangle 26"/>
+          <p:cNvSpPr/>
+          <p:nvPr/>
+        </p:nvSpPr>
+        <p:spPr>
+          <a:xfrm>
+            <a:off x="9601200" y="676656"/>
+            <a:ext cx="2103120" cy="384048"/>
+          </a:xfrm>
+          <a:prstGeom prst="roundRect">
+            <a:avLst/>
+          </a:prstGeom>
+          <a:solidFill>
+            <a:srgbClr val="3FD0C9"/>
+          </a:solidFill>
+          <a:ln w="9525">
+            <a:solidFill>
+              <a:srgbClr val="E3E6EA"/>
+            </a:solidFill>
+          </a:ln>
+          <a:effectLst/>
+        </p:spPr>
+        <p:style>
+          <a:lnRef idx="1">
+            <a:schemeClr val="accent1"/>
+          </a:lnRef>
+          <a:fillRef idx="3">
+            <a:schemeClr val="accent1"/>
+          </a:fillRef>
+          <a:effectRef idx="2">
+            <a:schemeClr val="accent1"/>
+          </a:effectRef>
+          <a:fontRef idx="minor">
+            <a:schemeClr val="lt1"/>
+          </a:fontRef>
+        </p:style>
+        <p:txBody>
+          <a:bodyPr rtlCol="0" anchor="ctr" lIns="54864" rIns="54864" tIns="0" bIns="0"/>
+          <a:lstStyle/>
+          <a:p>
+            <a:r>
+              <a:rPr sz="900" b="1">
+                <a:solidFill>
+                  <a:srgbClr val="242C39"/>
+                </a:solidFill>
+              </a:rPr>
+              <a:t>Bright Teal   #3FD0C9   Logo green</a:t>
+            </a:r>
+          </a:p>
+        </p:txBody>
+      </p:sp>
+      <p:sp>
+        <p:nvSpPr>
+          <p:cNvPr id="28" name="Rounded Rectangle 27"/>
+          <p:cNvSpPr/>
+          <p:nvPr/>
+        </p:nvSpPr>
+        <p:spPr>
+          <a:xfrm>
+            <a:off x="9601200" y="1133856"/>
+            <a:ext cx="2103120" cy="384048"/>
+          </a:xfrm>
+          <a:prstGeom prst="roundRect">
+            <a:avLst/>
+          </a:prstGeom>
+          <a:solidFill>
+            <a:srgbClr val="005358"/>
+          </a:solidFill>
+          <a:ln w="9525">
+            <a:solidFill>
+              <a:srgbClr val="E3E6EA"/>
+            </a:solidFill>
+          </a:ln>
+          <a:effectLst/>
+        </p:spPr>
+        <p:style>
+          <a:lnRef idx="1">
+            <a:schemeClr val="accent1"/>
+          </a:lnRef>
+          <a:fillRef idx="3">
+            <a:schemeClr val="accent1"/>
+          </a:fillRef>
+          <a:effectRef idx="2">
+            <a:schemeClr val="accent1"/>
+          </a:effectRef>
+          <a:fontRef idx="minor">
+            <a:schemeClr val="lt1"/>
+          </a:fontRef>
+        </p:style>
+        <p:txBody>
+          <a:bodyPr rtlCol="0" anchor="ctr" lIns="54864" rIns="54864" tIns="0" bIns="0"/>
+          <a:lstStyle/>
+          <a:p>
+            <a:r>
+              <a:rPr sz="900" b="1">
+                <a:solidFill>
+                  <a:srgbClr val="FFFFFF"/>
+                </a:solidFill>
+              </a:rPr>
+              <a:t>Dark Teal   #005358   Production</a:t>
+            </a:r>
+          </a:p>
+        </p:txBody>
+      </p:sp>
+      <p:sp>
+        <p:nvSpPr>
+          <p:cNvPr id="29" name="Rounded Rectangle 28"/>
+          <p:cNvSpPr/>
+          <p:nvPr/>
+        </p:nvSpPr>
+        <p:spPr>
+          <a:xfrm>
+            <a:off x="9601200" y="1591056"/>
+            <a:ext cx="2103120" cy="384048"/>
+          </a:xfrm>
+          <a:prstGeom prst="roundRect">
+            <a:avLst/>
+          </a:prstGeom>
+          <a:solidFill>
+            <a:srgbClr val="6D71FF"/>
+          </a:solidFill>
+          <a:ln w="9525">
+            <a:solidFill>
+              <a:srgbClr val="E3E6EA"/>
+            </a:solidFill>
+          </a:ln>
+          <a:effectLst/>
+        </p:spPr>
+        <p:style>
+          <a:lnRef idx="1">
+            <a:schemeClr val="accent1"/>
+          </a:lnRef>
+          <a:fillRef idx="3">
+            <a:schemeClr val="accent1"/>
+          </a:fillRef>
+          <a:effectRef idx="2">
+            <a:schemeClr val="accent1"/>
+          </a:effectRef>
+          <a:fontRef idx="minor">
+            <a:schemeClr val="lt1"/>
+          </a:fontRef>
+        </p:style>
+        <p:txBody>
+          <a:bodyPr rtlCol="0" anchor="ctr" lIns="54864" rIns="54864" tIns="0" bIns="0"/>
+          <a:lstStyle/>
+          <a:p>
+            <a:r>
+              <a:rPr sz="900" b="1">
+                <a:solidFill>
+                  <a:srgbClr val="FFFFFF"/>
+                </a:solidFill>
+              </a:rPr>
+              <a:t>Primary Blue   #6D71FF   Logo blue</a:t>
+            </a:r>
+          </a:p>
+        </p:txBody>
+      </p:sp>
+      <p:sp>
+        <p:nvSpPr>
+          <p:cNvPr id="30" name="Rounded Rectangle 29"/>
+          <p:cNvSpPr/>
+          <p:nvPr/>
+        </p:nvSpPr>
+        <p:spPr>
+          <a:xfrm>
+            <a:off x="9601200" y="2048256"/>
+            <a:ext cx="2103120" cy="384048"/>
+          </a:xfrm>
+          <a:prstGeom prst="roundRect">
+            <a:avLst/>
+          </a:prstGeom>
+          <a:solidFill>
+            <a:srgbClr val="122B82"/>
+          </a:solidFill>
+          <a:ln w="9525">
+            <a:solidFill>
+              <a:srgbClr val="E3E6EA"/>
+            </a:solidFill>
+          </a:ln>
+          <a:effectLst/>
+        </p:spPr>
+        <p:style>
+          <a:lnRef idx="1">
+            <a:schemeClr val="accent1"/>
+          </a:lnRef>
+          <a:fillRef idx="3">
+            <a:schemeClr val="accent1"/>
+          </a:fillRef>
+          <a:effectRef idx="2">
+            <a:schemeClr val="accent1"/>
+          </a:effectRef>
+          <a:fontRef idx="minor">
+            <a:schemeClr val="lt1"/>
+          </a:fontRef>
+        </p:style>
+        <p:txBody>
+          <a:bodyPr rtlCol="0" anchor="ctr" lIns="54864" rIns="54864" tIns="0" bIns="0"/>
+          <a:lstStyle/>
+          <a:p>
+            <a:r>
+              <a:rPr sz="900" b="1">
+                <a:solidFill>
+                  <a:srgbClr val="FFFFFF"/>
+                </a:solidFill>
+              </a:rPr>
+              <a:t>Deep Blue   #122B82</a:t>
+            </a:r>
+          </a:p>
+        </p:txBody>
+      </p:sp>
+      <p:sp>
+        <p:nvSpPr>
+          <p:cNvPr id="31" name="Rounded Rectangle 30"/>
+          <p:cNvSpPr/>
+          <p:nvPr/>
+        </p:nvSpPr>
+        <p:spPr>
+          <a:xfrm>
+            <a:off x="9601200" y="2505456"/>
+            <a:ext cx="2103120" cy="384048"/>
+          </a:xfrm>
+          <a:prstGeom prst="roundRect">
+            <a:avLst/>
+          </a:prstGeom>
+          <a:solidFill>
+            <a:srgbClr val="F33844"/>
+          </a:solidFill>
+          <a:ln w="9525">
+            <a:solidFill>
+              <a:srgbClr val="E3E6EA"/>
+            </a:solidFill>
+          </a:ln>
+          <a:effectLst/>
+        </p:spPr>
+        <p:style>
+          <a:lnRef idx="1">
+            <a:schemeClr val="accent1"/>
+          </a:lnRef>
+          <a:fillRef idx="3">
+            <a:schemeClr val="accent1"/>
+          </a:fillRef>
+          <a:effectRef idx="2">
+            <a:schemeClr val="accent1"/>
+          </a:effectRef>
+          <a:fontRef idx="minor">
+            <a:schemeClr val="lt1"/>
+          </a:fontRef>
+        </p:style>
+        <p:txBody>
+          <a:bodyPr rtlCol="0" anchor="ctr" lIns="54864" rIns="54864" tIns="0" bIns="0"/>
+          <a:lstStyle/>
+          <a:p>
+            <a:r>
+              <a:rPr sz="900" b="1">
+                <a:solidFill>
+                  <a:srgbClr val="FFFFFF"/>
+                </a:solidFill>
+              </a:rPr>
+              <a:t>Accent Red   #F33844   Logo red, Support</a:t>
+            </a:r>
+          </a:p>
+        </p:txBody>
+      </p:sp>
+      <p:sp>
+        <p:nvSpPr>
+          <p:cNvPr id="32" name="Rounded Rectangle 31"/>
+          <p:cNvSpPr/>
+          <p:nvPr/>
+        </p:nvSpPr>
+        <p:spPr>
+          <a:xfrm>
+            <a:off x="9601200" y="2962656"/>
+            <a:ext cx="2103120" cy="384048"/>
+          </a:xfrm>
+          <a:prstGeom prst="roundRect">
+            <a:avLst/>
+          </a:prstGeom>
+          <a:solidFill>
+            <a:srgbClr val="A8052E"/>
+          </a:solidFill>
+          <a:ln w="9525">
+            <a:solidFill>
+              <a:srgbClr val="E3E6EA"/>
+            </a:solidFill>
+          </a:ln>
+          <a:effectLst/>
+        </p:spPr>
+        <p:style>
+          <a:lnRef idx="1">
+            <a:schemeClr val="accent1"/>
+          </a:lnRef>
+          <a:fillRef idx="3">
+            <a:schemeClr val="accent1"/>
+          </a:fillRef>
+          <a:effectRef idx="2">
+            <a:schemeClr val="accent1"/>
+          </a:effectRef>
+          <a:fontRef idx="minor">
+            <a:schemeClr val="lt1"/>
+          </a:fontRef>
+        </p:style>
+        <p:txBody>
+          <a:bodyPr rtlCol="0" anchor="ctr" lIns="54864" rIns="54864" tIns="0" bIns="0"/>
+          <a:lstStyle/>
+          <a:p>
+            <a:r>
+              <a:rPr sz="900" b="1">
+                <a:solidFill>
+                  <a:srgbClr val="FFFFFF"/>
+                </a:solidFill>
+              </a:rPr>
+              <a:t>Deep Red   #A8052E</a:t>
+            </a:r>
+          </a:p>
+        </p:txBody>
+      </p:sp>
+      <p:sp>
+        <p:nvSpPr>
+          <p:cNvPr id="33" name="Rounded Rectangle 32"/>
+          <p:cNvSpPr/>
+          <p:nvPr/>
+        </p:nvSpPr>
+        <p:spPr>
+          <a:xfrm>
+            <a:off x="9601200" y="3419856"/>
+            <a:ext cx="2103120" cy="384048"/>
+          </a:xfrm>
+          <a:prstGeom prst="roundRect">
+            <a:avLst/>
+          </a:prstGeom>
+          <a:solidFill>
+            <a:srgbClr val="8F4AFA"/>
+          </a:solidFill>
+          <a:ln w="9525">
+            <a:solidFill>
+              <a:srgbClr val="E3E6EA"/>
+            </a:solidFill>
+          </a:ln>
+          <a:effectLst/>
+        </p:spPr>
+        <p:style>
+          <a:lnRef idx="1">
+            <a:schemeClr val="accent1"/>
+          </a:lnRef>
+          <a:fillRef idx="3">
+            <a:schemeClr val="accent1"/>
+          </a:fillRef>
+          <a:effectRef idx="2">
+            <a:schemeClr val="accent1"/>
+          </a:effectRef>
+          <a:fontRef idx="minor">
+            <a:schemeClr val="lt1"/>
+          </a:fontRef>
+        </p:style>
+        <p:txBody>
+          <a:bodyPr rtlCol="0" anchor="ctr" lIns="54864" rIns="54864" tIns="0" bIns="0"/>
+          <a:lstStyle/>
+          <a:p>
+            <a:r>
+              <a:rPr sz="900" b="1">
+                <a:solidFill>
+                  <a:srgbClr val="FFFFFF"/>
+                </a:solidFill>
+              </a:rPr>
+              <a:t>Accent Purple   #8F4AFA   Consulting</a:t>
+            </a:r>
+          </a:p>
+        </p:txBody>
+      </p:sp>
+      <p:sp>
+        <p:nvSpPr>
+          <p:cNvPr id="34" name="Rounded Rectangle 33"/>
+          <p:cNvSpPr/>
+          <p:nvPr/>
+        </p:nvSpPr>
+        <p:spPr>
+          <a:xfrm>
+            <a:off x="9601200" y="3877056"/>
+            <a:ext cx="2103120" cy="384048"/>
+          </a:xfrm>
+          <a:prstGeom prst="roundRect">
+            <a:avLst/>
+          </a:prstGeom>
+          <a:solidFill>
+            <a:srgbClr val="242C39"/>
+          </a:solidFill>
+          <a:ln w="9525">
+            <a:solidFill>
+              <a:srgbClr val="E3E6EA"/>
+            </a:solidFill>
+          </a:ln>
+          <a:effectLst/>
+        </p:spPr>
+        <p:style>
+          <a:lnRef idx="1">
+            <a:schemeClr val="accent1"/>
+          </a:lnRef>
+          <a:fillRef idx="3">
+            <a:schemeClr val="accent1"/>
+          </a:fillRef>
+          <a:effectRef idx="2">
+            <a:schemeClr val="accent1"/>
+          </a:effectRef>
+          <a:fontRef idx="minor">
+            <a:schemeClr val="lt1"/>
+          </a:fontRef>
+        </p:style>
+        <p:txBody>
+          <a:bodyPr rtlCol="0" anchor="ctr" lIns="54864" rIns="54864" tIns="0" bIns="0"/>
+          <a:lstStyle/>
+          <a:p>
+            <a:r>
+              <a:rPr sz="900" b="1">
+                <a:solidFill>
+                  <a:srgbClr val="FFFFFF"/>
+                </a:solidFill>
+              </a:rPr>
+              <a:t>Charcoal   #242C39   Text</a:t>
+            </a:r>
+          </a:p>
+        </p:txBody>
+      </p:sp>
+      <p:sp>
+        <p:nvSpPr>
+          <p:cNvPr id="35" name="Rounded Rectangle 34"/>
+          <p:cNvSpPr/>
+          <p:nvPr/>
+        </p:nvSpPr>
+        <p:spPr>
+          <a:xfrm>
+            <a:off x="9601200" y="4334256"/>
+            <a:ext cx="2103120" cy="384048"/>
+          </a:xfrm>
+          <a:prstGeom prst="roundRect">
+            <a:avLst/>
+          </a:prstGeom>
+          <a:solidFill>
+            <a:srgbClr val="FFFFFF"/>
+          </a:solidFill>
+          <a:ln w="9525">
+            <a:solidFill>
+              <a:srgbClr val="E3E6EA"/>
+            </a:solidFill>
+          </a:ln>
+          <a:effectLst/>
+        </p:spPr>
+        <p:style>
+          <a:lnRef idx="1">
+            <a:schemeClr val="accent1"/>
+          </a:lnRef>
+          <a:fillRef idx="3">
+            <a:schemeClr val="accent1"/>
+          </a:fillRef>
+          <a:effectRef idx="2">
+            <a:schemeClr val="accent1"/>
+          </a:effectRef>
+          <a:fontRef idx="minor">
+            <a:schemeClr val="lt1"/>
+          </a:fontRef>
+        </p:style>
+        <p:txBody>
+          <a:bodyPr rtlCol="0" anchor="ctr" lIns="54864" rIns="54864" tIns="0" bIns="0"/>
+          <a:lstStyle/>
+          <a:p>
+            <a:r>
+              <a:rPr sz="900" b="1">
+                <a:solidFill>
+                  <a:srgbClr val="242C39"/>
+                </a:solidFill>
+              </a:rPr>
+              <a:t>White   #FFFFFF</a:t>
+            </a:r>
           </a:p>
         </p:txBody>
       </p:sp>
@@ -26405,6 +32525,516 @@
           </a:prstGeom>
         </p:spPr>
       </p:pic>
+      <p:sp>
+        <p:nvSpPr>
+          <p:cNvPr id="27" name="TextBox 26"/>
+          <p:cNvSpPr txBox="1"/>
+          <p:nvPr/>
+        </p:nvSpPr>
+        <p:spPr>
+          <a:xfrm>
+            <a:off x="9601200" y="365760"/>
+            <a:ext cx="2103120" cy="274320"/>
+          </a:xfrm>
+          <a:prstGeom prst="rect">
+            <a:avLst/>
+          </a:prstGeom>
+          <a:noFill/>
+        </p:spPr>
+        <p:txBody>
+          <a:bodyPr wrap="none">
+            <a:spAutoFit/>
+          </a:bodyPr>
+          <a:lstStyle/>
+          <a:p>
+            <a:r>
+              <a:rPr sz="900" b="1">
+                <a:solidFill>
+                  <a:srgbClr val="242C39"/>
+                </a:solidFill>
+              </a:rPr>
+              <a:t>CTS palette — not on the slide, eyedropper from here</a:t>
+            </a:r>
+          </a:p>
+        </p:txBody>
+      </p:sp>
+      <p:sp>
+        <p:nvSpPr>
+          <p:cNvPr id="28" name="Rounded Rectangle 27"/>
+          <p:cNvSpPr/>
+          <p:nvPr/>
+        </p:nvSpPr>
+        <p:spPr>
+          <a:xfrm>
+            <a:off x="9601200" y="676656"/>
+            <a:ext cx="2103120" cy="384048"/>
+          </a:xfrm>
+          <a:prstGeom prst="roundRect">
+            <a:avLst/>
+          </a:prstGeom>
+          <a:solidFill>
+            <a:srgbClr val="3FD0C9"/>
+          </a:solidFill>
+          <a:ln w="9525">
+            <a:solidFill>
+              <a:srgbClr val="E3E6EA"/>
+            </a:solidFill>
+          </a:ln>
+          <a:effectLst/>
+        </p:spPr>
+        <p:style>
+          <a:lnRef idx="1">
+            <a:schemeClr val="accent1"/>
+          </a:lnRef>
+          <a:fillRef idx="3">
+            <a:schemeClr val="accent1"/>
+          </a:fillRef>
+          <a:effectRef idx="2">
+            <a:schemeClr val="accent1"/>
+          </a:effectRef>
+          <a:fontRef idx="minor">
+            <a:schemeClr val="lt1"/>
+          </a:fontRef>
+        </p:style>
+        <p:txBody>
+          <a:bodyPr rtlCol="0" anchor="ctr" lIns="54864" rIns="54864" tIns="0" bIns="0"/>
+          <a:lstStyle/>
+          <a:p>
+            <a:r>
+              <a:rPr sz="900" b="1">
+                <a:solidFill>
+                  <a:srgbClr val="242C39"/>
+                </a:solidFill>
+              </a:rPr>
+              <a:t>Bright Teal   #3FD0C9   Logo green</a:t>
+            </a:r>
+          </a:p>
+        </p:txBody>
+      </p:sp>
+      <p:sp>
+        <p:nvSpPr>
+          <p:cNvPr id="29" name="Rounded Rectangle 28"/>
+          <p:cNvSpPr/>
+          <p:nvPr/>
+        </p:nvSpPr>
+        <p:spPr>
+          <a:xfrm>
+            <a:off x="9601200" y="1133856"/>
+            <a:ext cx="2103120" cy="384048"/>
+          </a:xfrm>
+          <a:prstGeom prst="roundRect">
+            <a:avLst/>
+          </a:prstGeom>
+          <a:solidFill>
+            <a:srgbClr val="005358"/>
+          </a:solidFill>
+          <a:ln w="9525">
+            <a:solidFill>
+              <a:srgbClr val="E3E6EA"/>
+            </a:solidFill>
+          </a:ln>
+          <a:effectLst/>
+        </p:spPr>
+        <p:style>
+          <a:lnRef idx="1">
+            <a:schemeClr val="accent1"/>
+          </a:lnRef>
+          <a:fillRef idx="3">
+            <a:schemeClr val="accent1"/>
+          </a:fillRef>
+          <a:effectRef idx="2">
+            <a:schemeClr val="accent1"/>
+          </a:effectRef>
+          <a:fontRef idx="minor">
+            <a:schemeClr val="lt1"/>
+          </a:fontRef>
+        </p:style>
+        <p:txBody>
+          <a:bodyPr rtlCol="0" anchor="ctr" lIns="54864" rIns="54864" tIns="0" bIns="0"/>
+          <a:lstStyle/>
+          <a:p>
+            <a:r>
+              <a:rPr sz="900" b="1">
+                <a:solidFill>
+                  <a:srgbClr val="FFFFFF"/>
+                </a:solidFill>
+              </a:rPr>
+              <a:t>Dark Teal   #005358   Production</a:t>
+            </a:r>
+          </a:p>
+        </p:txBody>
+      </p:sp>
+      <p:sp>
+        <p:nvSpPr>
+          <p:cNvPr id="30" name="Rounded Rectangle 29"/>
+          <p:cNvSpPr/>
+          <p:nvPr/>
+        </p:nvSpPr>
+        <p:spPr>
+          <a:xfrm>
+            <a:off x="9601200" y="1591056"/>
+            <a:ext cx="2103120" cy="384048"/>
+          </a:xfrm>
+          <a:prstGeom prst="roundRect">
+            <a:avLst/>
+          </a:prstGeom>
+          <a:solidFill>
+            <a:srgbClr val="6D71FF"/>
+          </a:solidFill>
+          <a:ln w="9525">
+            <a:solidFill>
+              <a:srgbClr val="E3E6EA"/>
+            </a:solidFill>
+          </a:ln>
+          <a:effectLst/>
+        </p:spPr>
+        <p:style>
+          <a:lnRef idx="1">
+            <a:schemeClr val="accent1"/>
+          </a:lnRef>
+          <a:fillRef idx="3">
+            <a:schemeClr val="accent1"/>
+          </a:fillRef>
+          <a:effectRef idx="2">
+            <a:schemeClr val="accent1"/>
+          </a:effectRef>
+          <a:fontRef idx="minor">
+            <a:schemeClr val="lt1"/>
+          </a:fontRef>
+        </p:style>
+        <p:txBody>
+          <a:bodyPr rtlCol="0" anchor="ctr" lIns="54864" rIns="54864" tIns="0" bIns="0"/>
+          <a:lstStyle/>
+          <a:p>
+            <a:r>
+              <a:rPr sz="900" b="1">
+                <a:solidFill>
+                  <a:srgbClr val="FFFFFF"/>
+                </a:solidFill>
+              </a:rPr>
+              <a:t>Primary Blue   #6D71FF   Logo blue</a:t>
+            </a:r>
+          </a:p>
+        </p:txBody>
+      </p:sp>
+      <p:sp>
+        <p:nvSpPr>
+          <p:cNvPr id="31" name="Rounded Rectangle 30"/>
+          <p:cNvSpPr/>
+          <p:nvPr/>
+        </p:nvSpPr>
+        <p:spPr>
+          <a:xfrm>
+            <a:off x="9601200" y="2048256"/>
+            <a:ext cx="2103120" cy="384048"/>
+          </a:xfrm>
+          <a:prstGeom prst="roundRect">
+            <a:avLst/>
+          </a:prstGeom>
+          <a:solidFill>
+            <a:srgbClr val="122B82"/>
+          </a:solidFill>
+          <a:ln w="9525">
+            <a:solidFill>
+              <a:srgbClr val="E3E6EA"/>
+            </a:solidFill>
+          </a:ln>
+          <a:effectLst/>
+        </p:spPr>
+        <p:style>
+          <a:lnRef idx="1">
+            <a:schemeClr val="accent1"/>
+          </a:lnRef>
+          <a:fillRef idx="3">
+            <a:schemeClr val="accent1"/>
+          </a:fillRef>
+          <a:effectRef idx="2">
+            <a:schemeClr val="accent1"/>
+          </a:effectRef>
+          <a:fontRef idx="minor">
+            <a:schemeClr val="lt1"/>
+          </a:fontRef>
+        </p:style>
+        <p:txBody>
+          <a:bodyPr rtlCol="0" anchor="ctr" lIns="54864" rIns="54864" tIns="0" bIns="0"/>
+          <a:lstStyle/>
+          <a:p>
+            <a:r>
+              <a:rPr sz="900" b="1">
+                <a:solidFill>
+                  <a:srgbClr val="FFFFFF"/>
+                </a:solidFill>
+              </a:rPr>
+              <a:t>Deep Blue   #122B82</a:t>
+            </a:r>
+          </a:p>
+        </p:txBody>
+      </p:sp>
+      <p:sp>
+        <p:nvSpPr>
+          <p:cNvPr id="32" name="Rounded Rectangle 31"/>
+          <p:cNvSpPr/>
+          <p:nvPr/>
+        </p:nvSpPr>
+        <p:spPr>
+          <a:xfrm>
+            <a:off x="9601200" y="2505456"/>
+            <a:ext cx="2103120" cy="384048"/>
+          </a:xfrm>
+          <a:prstGeom prst="roundRect">
+            <a:avLst/>
+          </a:prstGeom>
+          <a:solidFill>
+            <a:srgbClr val="F33844"/>
+          </a:solidFill>
+          <a:ln w="9525">
+            <a:solidFill>
+              <a:srgbClr val="E3E6EA"/>
+            </a:solidFill>
+          </a:ln>
+          <a:effectLst/>
+        </p:spPr>
+        <p:style>
+          <a:lnRef idx="1">
+            <a:schemeClr val="accent1"/>
+          </a:lnRef>
+          <a:fillRef idx="3">
+            <a:schemeClr val="accent1"/>
+          </a:fillRef>
+          <a:effectRef idx="2">
+            <a:schemeClr val="accent1"/>
+          </a:effectRef>
+          <a:fontRef idx="minor">
+            <a:schemeClr val="lt1"/>
+          </a:fontRef>
+        </p:style>
+        <p:txBody>
+          <a:bodyPr rtlCol="0" anchor="ctr" lIns="54864" rIns="54864" tIns="0" bIns="0"/>
+          <a:lstStyle/>
+          <a:p>
+            <a:r>
+              <a:rPr sz="900" b="1">
+                <a:solidFill>
+                  <a:srgbClr val="FFFFFF"/>
+                </a:solidFill>
+              </a:rPr>
+              <a:t>Accent Red   #F33844   Logo red, Support</a:t>
+            </a:r>
+          </a:p>
+        </p:txBody>
+      </p:sp>
+      <p:sp>
+        <p:nvSpPr>
+          <p:cNvPr id="33" name="Rounded Rectangle 32"/>
+          <p:cNvSpPr/>
+          <p:nvPr/>
+        </p:nvSpPr>
+        <p:spPr>
+          <a:xfrm>
+            <a:off x="9601200" y="2962656"/>
+            <a:ext cx="2103120" cy="384048"/>
+          </a:xfrm>
+          <a:prstGeom prst="roundRect">
+            <a:avLst/>
+          </a:prstGeom>
+          <a:solidFill>
+            <a:srgbClr val="A8052E"/>
+          </a:solidFill>
+          <a:ln w="9525">
+            <a:solidFill>
+              <a:srgbClr val="E3E6EA"/>
+            </a:solidFill>
+          </a:ln>
+          <a:effectLst/>
+        </p:spPr>
+        <p:style>
+          <a:lnRef idx="1">
+            <a:schemeClr val="accent1"/>
+          </a:lnRef>
+          <a:fillRef idx="3">
+            <a:schemeClr val="accent1"/>
+          </a:fillRef>
+          <a:effectRef idx="2">
+            <a:schemeClr val="accent1"/>
+          </a:effectRef>
+          <a:fontRef idx="minor">
+            <a:schemeClr val="lt1"/>
+          </a:fontRef>
+        </p:style>
+        <p:txBody>
+          <a:bodyPr rtlCol="0" anchor="ctr" lIns="54864" rIns="54864" tIns="0" bIns="0"/>
+          <a:lstStyle/>
+          <a:p>
+            <a:r>
+              <a:rPr sz="900" b="1">
+                <a:solidFill>
+                  <a:srgbClr val="FFFFFF"/>
+                </a:solidFill>
+              </a:rPr>
+              <a:t>Deep Red   #A8052E</a:t>
+            </a:r>
+          </a:p>
+        </p:txBody>
+      </p:sp>
+      <p:sp>
+        <p:nvSpPr>
+          <p:cNvPr id="34" name="Rounded Rectangle 33"/>
+          <p:cNvSpPr/>
+          <p:nvPr/>
+        </p:nvSpPr>
+        <p:spPr>
+          <a:xfrm>
+            <a:off x="9601200" y="3419856"/>
+            <a:ext cx="2103120" cy="384048"/>
+          </a:xfrm>
+          <a:prstGeom prst="roundRect">
+            <a:avLst/>
+          </a:prstGeom>
+          <a:solidFill>
+            <a:srgbClr val="8F4AFA"/>
+          </a:solidFill>
+          <a:ln w="9525">
+            <a:solidFill>
+              <a:srgbClr val="E3E6EA"/>
+            </a:solidFill>
+          </a:ln>
+          <a:effectLst/>
+        </p:spPr>
+        <p:style>
+          <a:lnRef idx="1">
+            <a:schemeClr val="accent1"/>
+          </a:lnRef>
+          <a:fillRef idx="3">
+            <a:schemeClr val="accent1"/>
+          </a:fillRef>
+          <a:effectRef idx="2">
+            <a:schemeClr val="accent1"/>
+          </a:effectRef>
+          <a:fontRef idx="minor">
+            <a:schemeClr val="lt1"/>
+          </a:fontRef>
+        </p:style>
+        <p:txBody>
+          <a:bodyPr rtlCol="0" anchor="ctr" lIns="54864" rIns="54864" tIns="0" bIns="0"/>
+          <a:lstStyle/>
+          <a:p>
+            <a:r>
+              <a:rPr sz="900" b="1">
+                <a:solidFill>
+                  <a:srgbClr val="FFFFFF"/>
+                </a:solidFill>
+              </a:rPr>
+              <a:t>Accent Purple   #8F4AFA   Consulting</a:t>
+            </a:r>
+          </a:p>
+        </p:txBody>
+      </p:sp>
+      <p:sp>
+        <p:nvSpPr>
+          <p:cNvPr id="35" name="Rounded Rectangle 34"/>
+          <p:cNvSpPr/>
+          <p:nvPr/>
+        </p:nvSpPr>
+        <p:spPr>
+          <a:xfrm>
+            <a:off x="9601200" y="3877056"/>
+            <a:ext cx="2103120" cy="384048"/>
+          </a:xfrm>
+          <a:prstGeom prst="roundRect">
+            <a:avLst/>
+          </a:prstGeom>
+          <a:solidFill>
+            <a:srgbClr val="242C39"/>
+          </a:solidFill>
+          <a:ln w="9525">
+            <a:solidFill>
+              <a:srgbClr val="E3E6EA"/>
+            </a:solidFill>
+          </a:ln>
+          <a:effectLst/>
+        </p:spPr>
+        <p:style>
+          <a:lnRef idx="1">
+            <a:schemeClr val="accent1"/>
+          </a:lnRef>
+          <a:fillRef idx="3">
+            <a:schemeClr val="accent1"/>
+          </a:fillRef>
+          <a:effectRef idx="2">
+            <a:schemeClr val="accent1"/>
+          </a:effectRef>
+          <a:fontRef idx="minor">
+            <a:schemeClr val="lt1"/>
+          </a:fontRef>
+        </p:style>
+        <p:txBody>
+          <a:bodyPr rtlCol="0" anchor="ctr" lIns="54864" rIns="54864" tIns="0" bIns="0"/>
+          <a:lstStyle/>
+          <a:p>
+            <a:r>
+              <a:rPr sz="900" b="1">
+                <a:solidFill>
+                  <a:srgbClr val="FFFFFF"/>
+                </a:solidFill>
+              </a:rPr>
+              <a:t>Charcoal   #242C39   Text</a:t>
+            </a:r>
+          </a:p>
+        </p:txBody>
+      </p:sp>
+      <p:sp>
+        <p:nvSpPr>
+          <p:cNvPr id="36" name="Rounded Rectangle 35"/>
+          <p:cNvSpPr/>
+          <p:nvPr/>
+        </p:nvSpPr>
+        <p:spPr>
+          <a:xfrm>
+            <a:off x="9601200" y="4334256"/>
+            <a:ext cx="2103120" cy="384048"/>
+          </a:xfrm>
+          <a:prstGeom prst="roundRect">
+            <a:avLst/>
+          </a:prstGeom>
+          <a:solidFill>
+            <a:srgbClr val="FFFFFF"/>
+          </a:solidFill>
+          <a:ln w="9525">
+            <a:solidFill>
+              <a:srgbClr val="E3E6EA"/>
+            </a:solidFill>
+          </a:ln>
+          <a:effectLst/>
+        </p:spPr>
+        <p:style>
+          <a:lnRef idx="1">
+            <a:schemeClr val="accent1"/>
+          </a:lnRef>
+          <a:fillRef idx="3">
+            <a:schemeClr val="accent1"/>
+          </a:fillRef>
+          <a:effectRef idx="2">
+            <a:schemeClr val="accent1"/>
+          </a:effectRef>
+          <a:fontRef idx="minor">
+            <a:schemeClr val="lt1"/>
+          </a:fontRef>
+        </p:style>
+        <p:txBody>
+          <a:bodyPr rtlCol="0" anchor="ctr" lIns="54864" rIns="54864" tIns="0" bIns="0"/>
+          <a:lstStyle/>
+          <a:p>
+            <a:r>
+              <a:rPr sz="900" b="1">
+                <a:solidFill>
+                  <a:srgbClr val="242C39"/>
+                </a:solidFill>
+              </a:rPr>
+              <a:t>White   #FFFFFF</a:t>
+            </a:r>
+          </a:p>
+        </p:txBody>
+      </p:sp>
     </p:spTree>
   </p:cSld>
   <p:clrMapOvr>
@@ -30322,6 +36952,516 @@
           </a:p>
         </p:txBody>
       </p:sp>
+      <p:sp>
+        <p:nvSpPr>
+          <p:cNvPr id="26" name="TextBox 25"/>
+          <p:cNvSpPr txBox="1"/>
+          <p:nvPr/>
+        </p:nvSpPr>
+        <p:spPr>
+          <a:xfrm>
+            <a:off x="9601200" y="365760"/>
+            <a:ext cx="2103120" cy="274320"/>
+          </a:xfrm>
+          <a:prstGeom prst="rect">
+            <a:avLst/>
+          </a:prstGeom>
+          <a:noFill/>
+        </p:spPr>
+        <p:txBody>
+          <a:bodyPr wrap="none">
+            <a:spAutoFit/>
+          </a:bodyPr>
+          <a:lstStyle/>
+          <a:p>
+            <a:r>
+              <a:rPr sz="900" b="1">
+                <a:solidFill>
+                  <a:srgbClr val="242C39"/>
+                </a:solidFill>
+              </a:rPr>
+              <a:t>CTS palette — not on the slide, eyedropper from here</a:t>
+            </a:r>
+          </a:p>
+        </p:txBody>
+      </p:sp>
+      <p:sp>
+        <p:nvSpPr>
+          <p:cNvPr id="27" name="Rounded Rectangle 26"/>
+          <p:cNvSpPr/>
+          <p:nvPr/>
+        </p:nvSpPr>
+        <p:spPr>
+          <a:xfrm>
+            <a:off x="9601200" y="676656"/>
+            <a:ext cx="2103120" cy="384048"/>
+          </a:xfrm>
+          <a:prstGeom prst="roundRect">
+            <a:avLst/>
+          </a:prstGeom>
+          <a:solidFill>
+            <a:srgbClr val="3FD0C9"/>
+          </a:solidFill>
+          <a:ln w="9525">
+            <a:solidFill>
+              <a:srgbClr val="E3E6EA"/>
+            </a:solidFill>
+          </a:ln>
+          <a:effectLst/>
+        </p:spPr>
+        <p:style>
+          <a:lnRef idx="1">
+            <a:schemeClr val="accent1"/>
+          </a:lnRef>
+          <a:fillRef idx="3">
+            <a:schemeClr val="accent1"/>
+          </a:fillRef>
+          <a:effectRef idx="2">
+            <a:schemeClr val="accent1"/>
+          </a:effectRef>
+          <a:fontRef idx="minor">
+            <a:schemeClr val="lt1"/>
+          </a:fontRef>
+        </p:style>
+        <p:txBody>
+          <a:bodyPr rtlCol="0" anchor="ctr" lIns="54864" rIns="54864" tIns="0" bIns="0"/>
+          <a:lstStyle/>
+          <a:p>
+            <a:r>
+              <a:rPr sz="900" b="1">
+                <a:solidFill>
+                  <a:srgbClr val="242C39"/>
+                </a:solidFill>
+              </a:rPr>
+              <a:t>Bright Teal   #3FD0C9   Logo green</a:t>
+            </a:r>
+          </a:p>
+        </p:txBody>
+      </p:sp>
+      <p:sp>
+        <p:nvSpPr>
+          <p:cNvPr id="28" name="Rounded Rectangle 27"/>
+          <p:cNvSpPr/>
+          <p:nvPr/>
+        </p:nvSpPr>
+        <p:spPr>
+          <a:xfrm>
+            <a:off x="9601200" y="1133856"/>
+            <a:ext cx="2103120" cy="384048"/>
+          </a:xfrm>
+          <a:prstGeom prst="roundRect">
+            <a:avLst/>
+          </a:prstGeom>
+          <a:solidFill>
+            <a:srgbClr val="005358"/>
+          </a:solidFill>
+          <a:ln w="9525">
+            <a:solidFill>
+              <a:srgbClr val="E3E6EA"/>
+            </a:solidFill>
+          </a:ln>
+          <a:effectLst/>
+        </p:spPr>
+        <p:style>
+          <a:lnRef idx="1">
+            <a:schemeClr val="accent1"/>
+          </a:lnRef>
+          <a:fillRef idx="3">
+            <a:schemeClr val="accent1"/>
+          </a:fillRef>
+          <a:effectRef idx="2">
+            <a:schemeClr val="accent1"/>
+          </a:effectRef>
+          <a:fontRef idx="minor">
+            <a:schemeClr val="lt1"/>
+          </a:fontRef>
+        </p:style>
+        <p:txBody>
+          <a:bodyPr rtlCol="0" anchor="ctr" lIns="54864" rIns="54864" tIns="0" bIns="0"/>
+          <a:lstStyle/>
+          <a:p>
+            <a:r>
+              <a:rPr sz="900" b="1">
+                <a:solidFill>
+                  <a:srgbClr val="FFFFFF"/>
+                </a:solidFill>
+              </a:rPr>
+              <a:t>Dark Teal   #005358   Production</a:t>
+            </a:r>
+          </a:p>
+        </p:txBody>
+      </p:sp>
+      <p:sp>
+        <p:nvSpPr>
+          <p:cNvPr id="29" name="Rounded Rectangle 28"/>
+          <p:cNvSpPr/>
+          <p:nvPr/>
+        </p:nvSpPr>
+        <p:spPr>
+          <a:xfrm>
+            <a:off x="9601200" y="1591056"/>
+            <a:ext cx="2103120" cy="384048"/>
+          </a:xfrm>
+          <a:prstGeom prst="roundRect">
+            <a:avLst/>
+          </a:prstGeom>
+          <a:solidFill>
+            <a:srgbClr val="6D71FF"/>
+          </a:solidFill>
+          <a:ln w="9525">
+            <a:solidFill>
+              <a:srgbClr val="E3E6EA"/>
+            </a:solidFill>
+          </a:ln>
+          <a:effectLst/>
+        </p:spPr>
+        <p:style>
+          <a:lnRef idx="1">
+            <a:schemeClr val="accent1"/>
+          </a:lnRef>
+          <a:fillRef idx="3">
+            <a:schemeClr val="accent1"/>
+          </a:fillRef>
+          <a:effectRef idx="2">
+            <a:schemeClr val="accent1"/>
+          </a:effectRef>
+          <a:fontRef idx="minor">
+            <a:schemeClr val="lt1"/>
+          </a:fontRef>
+        </p:style>
+        <p:txBody>
+          <a:bodyPr rtlCol="0" anchor="ctr" lIns="54864" rIns="54864" tIns="0" bIns="0"/>
+          <a:lstStyle/>
+          <a:p>
+            <a:r>
+              <a:rPr sz="900" b="1">
+                <a:solidFill>
+                  <a:srgbClr val="FFFFFF"/>
+                </a:solidFill>
+              </a:rPr>
+              <a:t>Primary Blue   #6D71FF   Logo blue</a:t>
+            </a:r>
+          </a:p>
+        </p:txBody>
+      </p:sp>
+      <p:sp>
+        <p:nvSpPr>
+          <p:cNvPr id="30" name="Rounded Rectangle 29"/>
+          <p:cNvSpPr/>
+          <p:nvPr/>
+        </p:nvSpPr>
+        <p:spPr>
+          <a:xfrm>
+            <a:off x="9601200" y="2048256"/>
+            <a:ext cx="2103120" cy="384048"/>
+          </a:xfrm>
+          <a:prstGeom prst="roundRect">
+            <a:avLst/>
+          </a:prstGeom>
+          <a:solidFill>
+            <a:srgbClr val="122B82"/>
+          </a:solidFill>
+          <a:ln w="9525">
+            <a:solidFill>
+              <a:srgbClr val="E3E6EA"/>
+            </a:solidFill>
+          </a:ln>
+          <a:effectLst/>
+        </p:spPr>
+        <p:style>
+          <a:lnRef idx="1">
+            <a:schemeClr val="accent1"/>
+          </a:lnRef>
+          <a:fillRef idx="3">
+            <a:schemeClr val="accent1"/>
+          </a:fillRef>
+          <a:effectRef idx="2">
+            <a:schemeClr val="accent1"/>
+          </a:effectRef>
+          <a:fontRef idx="minor">
+            <a:schemeClr val="lt1"/>
+          </a:fontRef>
+        </p:style>
+        <p:txBody>
+          <a:bodyPr rtlCol="0" anchor="ctr" lIns="54864" rIns="54864" tIns="0" bIns="0"/>
+          <a:lstStyle/>
+          <a:p>
+            <a:r>
+              <a:rPr sz="900" b="1">
+                <a:solidFill>
+                  <a:srgbClr val="FFFFFF"/>
+                </a:solidFill>
+              </a:rPr>
+              <a:t>Deep Blue   #122B82</a:t>
+            </a:r>
+          </a:p>
+        </p:txBody>
+      </p:sp>
+      <p:sp>
+        <p:nvSpPr>
+          <p:cNvPr id="31" name="Rounded Rectangle 30"/>
+          <p:cNvSpPr/>
+          <p:nvPr/>
+        </p:nvSpPr>
+        <p:spPr>
+          <a:xfrm>
+            <a:off x="9601200" y="2505456"/>
+            <a:ext cx="2103120" cy="384048"/>
+          </a:xfrm>
+          <a:prstGeom prst="roundRect">
+            <a:avLst/>
+          </a:prstGeom>
+          <a:solidFill>
+            <a:srgbClr val="F33844"/>
+          </a:solidFill>
+          <a:ln w="9525">
+            <a:solidFill>
+              <a:srgbClr val="E3E6EA"/>
+            </a:solidFill>
+          </a:ln>
+          <a:effectLst/>
+        </p:spPr>
+        <p:style>
+          <a:lnRef idx="1">
+            <a:schemeClr val="accent1"/>
+          </a:lnRef>
+          <a:fillRef idx="3">
+            <a:schemeClr val="accent1"/>
+          </a:fillRef>
+          <a:effectRef idx="2">
+            <a:schemeClr val="accent1"/>
+          </a:effectRef>
+          <a:fontRef idx="minor">
+            <a:schemeClr val="lt1"/>
+          </a:fontRef>
+        </p:style>
+        <p:txBody>
+          <a:bodyPr rtlCol="0" anchor="ctr" lIns="54864" rIns="54864" tIns="0" bIns="0"/>
+          <a:lstStyle/>
+          <a:p>
+            <a:r>
+              <a:rPr sz="900" b="1">
+                <a:solidFill>
+                  <a:srgbClr val="FFFFFF"/>
+                </a:solidFill>
+              </a:rPr>
+              <a:t>Accent Red   #F33844   Logo red, Support</a:t>
+            </a:r>
+          </a:p>
+        </p:txBody>
+      </p:sp>
+      <p:sp>
+        <p:nvSpPr>
+          <p:cNvPr id="32" name="Rounded Rectangle 31"/>
+          <p:cNvSpPr/>
+          <p:nvPr/>
+        </p:nvSpPr>
+        <p:spPr>
+          <a:xfrm>
+            <a:off x="9601200" y="2962656"/>
+            <a:ext cx="2103120" cy="384048"/>
+          </a:xfrm>
+          <a:prstGeom prst="roundRect">
+            <a:avLst/>
+          </a:prstGeom>
+          <a:solidFill>
+            <a:srgbClr val="A8052E"/>
+          </a:solidFill>
+          <a:ln w="9525">
+            <a:solidFill>
+              <a:srgbClr val="E3E6EA"/>
+            </a:solidFill>
+          </a:ln>
+          <a:effectLst/>
+        </p:spPr>
+        <p:style>
+          <a:lnRef idx="1">
+            <a:schemeClr val="accent1"/>
+          </a:lnRef>
+          <a:fillRef idx="3">
+            <a:schemeClr val="accent1"/>
+          </a:fillRef>
+          <a:effectRef idx="2">
+            <a:schemeClr val="accent1"/>
+          </a:effectRef>
+          <a:fontRef idx="minor">
+            <a:schemeClr val="lt1"/>
+          </a:fontRef>
+        </p:style>
+        <p:txBody>
+          <a:bodyPr rtlCol="0" anchor="ctr" lIns="54864" rIns="54864" tIns="0" bIns="0"/>
+          <a:lstStyle/>
+          <a:p>
+            <a:r>
+              <a:rPr sz="900" b="1">
+                <a:solidFill>
+                  <a:srgbClr val="FFFFFF"/>
+                </a:solidFill>
+              </a:rPr>
+              <a:t>Deep Red   #A8052E</a:t>
+            </a:r>
+          </a:p>
+        </p:txBody>
+      </p:sp>
+      <p:sp>
+        <p:nvSpPr>
+          <p:cNvPr id="33" name="Rounded Rectangle 32"/>
+          <p:cNvSpPr/>
+          <p:nvPr/>
+        </p:nvSpPr>
+        <p:spPr>
+          <a:xfrm>
+            <a:off x="9601200" y="3419856"/>
+            <a:ext cx="2103120" cy="384048"/>
+          </a:xfrm>
+          <a:prstGeom prst="roundRect">
+            <a:avLst/>
+          </a:prstGeom>
+          <a:solidFill>
+            <a:srgbClr val="8F4AFA"/>
+          </a:solidFill>
+          <a:ln w="9525">
+            <a:solidFill>
+              <a:srgbClr val="E3E6EA"/>
+            </a:solidFill>
+          </a:ln>
+          <a:effectLst/>
+        </p:spPr>
+        <p:style>
+          <a:lnRef idx="1">
+            <a:schemeClr val="accent1"/>
+          </a:lnRef>
+          <a:fillRef idx="3">
+            <a:schemeClr val="accent1"/>
+          </a:fillRef>
+          <a:effectRef idx="2">
+            <a:schemeClr val="accent1"/>
+          </a:effectRef>
+          <a:fontRef idx="minor">
+            <a:schemeClr val="lt1"/>
+          </a:fontRef>
+        </p:style>
+        <p:txBody>
+          <a:bodyPr rtlCol="0" anchor="ctr" lIns="54864" rIns="54864" tIns="0" bIns="0"/>
+          <a:lstStyle/>
+          <a:p>
+            <a:r>
+              <a:rPr sz="900" b="1">
+                <a:solidFill>
+                  <a:srgbClr val="FFFFFF"/>
+                </a:solidFill>
+              </a:rPr>
+              <a:t>Accent Purple   #8F4AFA   Consulting</a:t>
+            </a:r>
+          </a:p>
+        </p:txBody>
+      </p:sp>
+      <p:sp>
+        <p:nvSpPr>
+          <p:cNvPr id="34" name="Rounded Rectangle 33"/>
+          <p:cNvSpPr/>
+          <p:nvPr/>
+        </p:nvSpPr>
+        <p:spPr>
+          <a:xfrm>
+            <a:off x="9601200" y="3877056"/>
+            <a:ext cx="2103120" cy="384048"/>
+          </a:xfrm>
+          <a:prstGeom prst="roundRect">
+            <a:avLst/>
+          </a:prstGeom>
+          <a:solidFill>
+            <a:srgbClr val="242C39"/>
+          </a:solidFill>
+          <a:ln w="9525">
+            <a:solidFill>
+              <a:srgbClr val="E3E6EA"/>
+            </a:solidFill>
+          </a:ln>
+          <a:effectLst/>
+        </p:spPr>
+        <p:style>
+          <a:lnRef idx="1">
+            <a:schemeClr val="accent1"/>
+          </a:lnRef>
+          <a:fillRef idx="3">
+            <a:schemeClr val="accent1"/>
+          </a:fillRef>
+          <a:effectRef idx="2">
+            <a:schemeClr val="accent1"/>
+          </a:effectRef>
+          <a:fontRef idx="minor">
+            <a:schemeClr val="lt1"/>
+          </a:fontRef>
+        </p:style>
+        <p:txBody>
+          <a:bodyPr rtlCol="0" anchor="ctr" lIns="54864" rIns="54864" tIns="0" bIns="0"/>
+          <a:lstStyle/>
+          <a:p>
+            <a:r>
+              <a:rPr sz="900" b="1">
+                <a:solidFill>
+                  <a:srgbClr val="FFFFFF"/>
+                </a:solidFill>
+              </a:rPr>
+              <a:t>Charcoal   #242C39   Text</a:t>
+            </a:r>
+          </a:p>
+        </p:txBody>
+      </p:sp>
+      <p:sp>
+        <p:nvSpPr>
+          <p:cNvPr id="35" name="Rounded Rectangle 34"/>
+          <p:cNvSpPr/>
+          <p:nvPr/>
+        </p:nvSpPr>
+        <p:spPr>
+          <a:xfrm>
+            <a:off x="9601200" y="4334256"/>
+            <a:ext cx="2103120" cy="384048"/>
+          </a:xfrm>
+          <a:prstGeom prst="roundRect">
+            <a:avLst/>
+          </a:prstGeom>
+          <a:solidFill>
+            <a:srgbClr val="FFFFFF"/>
+          </a:solidFill>
+          <a:ln w="9525">
+            <a:solidFill>
+              <a:srgbClr val="E3E6EA"/>
+            </a:solidFill>
+          </a:ln>
+          <a:effectLst/>
+        </p:spPr>
+        <p:style>
+          <a:lnRef idx="1">
+            <a:schemeClr val="accent1"/>
+          </a:lnRef>
+          <a:fillRef idx="3">
+            <a:schemeClr val="accent1"/>
+          </a:fillRef>
+          <a:effectRef idx="2">
+            <a:schemeClr val="accent1"/>
+          </a:effectRef>
+          <a:fontRef idx="minor">
+            <a:schemeClr val="lt1"/>
+          </a:fontRef>
+        </p:style>
+        <p:txBody>
+          <a:bodyPr rtlCol="0" anchor="ctr" lIns="54864" rIns="54864" tIns="0" bIns="0"/>
+          <a:lstStyle/>
+          <a:p>
+            <a:r>
+              <a:rPr sz="900" b="1">
+                <a:solidFill>
+                  <a:srgbClr val="242C39"/>
+                </a:solidFill>
+              </a:rPr>
+              <a:t>White   #FFFFFF</a:t>
+            </a:r>
+          </a:p>
+        </p:txBody>
+      </p:sp>
     </p:spTree>
   </p:cSld>
   <p:clrMapOvr>
@@ -30703,6 +37843,516 @@
           </a:prstGeom>
         </p:spPr>
       </p:pic>
+      <p:sp>
+        <p:nvSpPr>
+          <p:cNvPr id="27" name="TextBox 26"/>
+          <p:cNvSpPr txBox="1"/>
+          <p:nvPr/>
+        </p:nvSpPr>
+        <p:spPr>
+          <a:xfrm>
+            <a:off x="9601200" y="365760"/>
+            <a:ext cx="2103120" cy="274320"/>
+          </a:xfrm>
+          <a:prstGeom prst="rect">
+            <a:avLst/>
+          </a:prstGeom>
+          <a:noFill/>
+        </p:spPr>
+        <p:txBody>
+          <a:bodyPr wrap="none">
+            <a:spAutoFit/>
+          </a:bodyPr>
+          <a:lstStyle/>
+          <a:p>
+            <a:r>
+              <a:rPr sz="900" b="1">
+                <a:solidFill>
+                  <a:srgbClr val="242C39"/>
+                </a:solidFill>
+              </a:rPr>
+              <a:t>CTS palette — not on the slide, eyedropper from here</a:t>
+            </a:r>
+          </a:p>
+        </p:txBody>
+      </p:sp>
+      <p:sp>
+        <p:nvSpPr>
+          <p:cNvPr id="28" name="Rounded Rectangle 27"/>
+          <p:cNvSpPr/>
+          <p:nvPr/>
+        </p:nvSpPr>
+        <p:spPr>
+          <a:xfrm>
+            <a:off x="9601200" y="676656"/>
+            <a:ext cx="2103120" cy="384048"/>
+          </a:xfrm>
+          <a:prstGeom prst="roundRect">
+            <a:avLst/>
+          </a:prstGeom>
+          <a:solidFill>
+            <a:srgbClr val="3FD0C9"/>
+          </a:solidFill>
+          <a:ln w="9525">
+            <a:solidFill>
+              <a:srgbClr val="E3E6EA"/>
+            </a:solidFill>
+          </a:ln>
+          <a:effectLst/>
+        </p:spPr>
+        <p:style>
+          <a:lnRef idx="1">
+            <a:schemeClr val="accent1"/>
+          </a:lnRef>
+          <a:fillRef idx="3">
+            <a:schemeClr val="accent1"/>
+          </a:fillRef>
+          <a:effectRef idx="2">
+            <a:schemeClr val="accent1"/>
+          </a:effectRef>
+          <a:fontRef idx="minor">
+            <a:schemeClr val="lt1"/>
+          </a:fontRef>
+        </p:style>
+        <p:txBody>
+          <a:bodyPr rtlCol="0" anchor="ctr" lIns="54864" rIns="54864" tIns="0" bIns="0"/>
+          <a:lstStyle/>
+          <a:p>
+            <a:r>
+              <a:rPr sz="900" b="1">
+                <a:solidFill>
+                  <a:srgbClr val="242C39"/>
+                </a:solidFill>
+              </a:rPr>
+              <a:t>Bright Teal   #3FD0C9   Logo green</a:t>
+            </a:r>
+          </a:p>
+        </p:txBody>
+      </p:sp>
+      <p:sp>
+        <p:nvSpPr>
+          <p:cNvPr id="29" name="Rounded Rectangle 28"/>
+          <p:cNvSpPr/>
+          <p:nvPr/>
+        </p:nvSpPr>
+        <p:spPr>
+          <a:xfrm>
+            <a:off x="9601200" y="1133856"/>
+            <a:ext cx="2103120" cy="384048"/>
+          </a:xfrm>
+          <a:prstGeom prst="roundRect">
+            <a:avLst/>
+          </a:prstGeom>
+          <a:solidFill>
+            <a:srgbClr val="005358"/>
+          </a:solidFill>
+          <a:ln w="9525">
+            <a:solidFill>
+              <a:srgbClr val="E3E6EA"/>
+            </a:solidFill>
+          </a:ln>
+          <a:effectLst/>
+        </p:spPr>
+        <p:style>
+          <a:lnRef idx="1">
+            <a:schemeClr val="accent1"/>
+          </a:lnRef>
+          <a:fillRef idx="3">
+            <a:schemeClr val="accent1"/>
+          </a:fillRef>
+          <a:effectRef idx="2">
+            <a:schemeClr val="accent1"/>
+          </a:effectRef>
+          <a:fontRef idx="minor">
+            <a:schemeClr val="lt1"/>
+          </a:fontRef>
+        </p:style>
+        <p:txBody>
+          <a:bodyPr rtlCol="0" anchor="ctr" lIns="54864" rIns="54864" tIns="0" bIns="0"/>
+          <a:lstStyle/>
+          <a:p>
+            <a:r>
+              <a:rPr sz="900" b="1">
+                <a:solidFill>
+                  <a:srgbClr val="FFFFFF"/>
+                </a:solidFill>
+              </a:rPr>
+              <a:t>Dark Teal   #005358   Production</a:t>
+            </a:r>
+          </a:p>
+        </p:txBody>
+      </p:sp>
+      <p:sp>
+        <p:nvSpPr>
+          <p:cNvPr id="30" name="Rounded Rectangle 29"/>
+          <p:cNvSpPr/>
+          <p:nvPr/>
+        </p:nvSpPr>
+        <p:spPr>
+          <a:xfrm>
+            <a:off x="9601200" y="1591056"/>
+            <a:ext cx="2103120" cy="384048"/>
+          </a:xfrm>
+          <a:prstGeom prst="roundRect">
+            <a:avLst/>
+          </a:prstGeom>
+          <a:solidFill>
+            <a:srgbClr val="6D71FF"/>
+          </a:solidFill>
+          <a:ln w="9525">
+            <a:solidFill>
+              <a:srgbClr val="E3E6EA"/>
+            </a:solidFill>
+          </a:ln>
+          <a:effectLst/>
+        </p:spPr>
+        <p:style>
+          <a:lnRef idx="1">
+            <a:schemeClr val="accent1"/>
+          </a:lnRef>
+          <a:fillRef idx="3">
+            <a:schemeClr val="accent1"/>
+          </a:fillRef>
+          <a:effectRef idx="2">
+            <a:schemeClr val="accent1"/>
+          </a:effectRef>
+          <a:fontRef idx="minor">
+            <a:schemeClr val="lt1"/>
+          </a:fontRef>
+        </p:style>
+        <p:txBody>
+          <a:bodyPr rtlCol="0" anchor="ctr" lIns="54864" rIns="54864" tIns="0" bIns="0"/>
+          <a:lstStyle/>
+          <a:p>
+            <a:r>
+              <a:rPr sz="900" b="1">
+                <a:solidFill>
+                  <a:srgbClr val="FFFFFF"/>
+                </a:solidFill>
+              </a:rPr>
+              <a:t>Primary Blue   #6D71FF   Logo blue</a:t>
+            </a:r>
+          </a:p>
+        </p:txBody>
+      </p:sp>
+      <p:sp>
+        <p:nvSpPr>
+          <p:cNvPr id="31" name="Rounded Rectangle 30"/>
+          <p:cNvSpPr/>
+          <p:nvPr/>
+        </p:nvSpPr>
+        <p:spPr>
+          <a:xfrm>
+            <a:off x="9601200" y="2048256"/>
+            <a:ext cx="2103120" cy="384048"/>
+          </a:xfrm>
+          <a:prstGeom prst="roundRect">
+            <a:avLst/>
+          </a:prstGeom>
+          <a:solidFill>
+            <a:srgbClr val="122B82"/>
+          </a:solidFill>
+          <a:ln w="9525">
+            <a:solidFill>
+              <a:srgbClr val="E3E6EA"/>
+            </a:solidFill>
+          </a:ln>
+          <a:effectLst/>
+        </p:spPr>
+        <p:style>
+          <a:lnRef idx="1">
+            <a:schemeClr val="accent1"/>
+          </a:lnRef>
+          <a:fillRef idx="3">
+            <a:schemeClr val="accent1"/>
+          </a:fillRef>
+          <a:effectRef idx="2">
+            <a:schemeClr val="accent1"/>
+          </a:effectRef>
+          <a:fontRef idx="minor">
+            <a:schemeClr val="lt1"/>
+          </a:fontRef>
+        </p:style>
+        <p:txBody>
+          <a:bodyPr rtlCol="0" anchor="ctr" lIns="54864" rIns="54864" tIns="0" bIns="0"/>
+          <a:lstStyle/>
+          <a:p>
+            <a:r>
+              <a:rPr sz="900" b="1">
+                <a:solidFill>
+                  <a:srgbClr val="FFFFFF"/>
+                </a:solidFill>
+              </a:rPr>
+              <a:t>Deep Blue   #122B82</a:t>
+            </a:r>
+          </a:p>
+        </p:txBody>
+      </p:sp>
+      <p:sp>
+        <p:nvSpPr>
+          <p:cNvPr id="32" name="Rounded Rectangle 31"/>
+          <p:cNvSpPr/>
+          <p:nvPr/>
+        </p:nvSpPr>
+        <p:spPr>
+          <a:xfrm>
+            <a:off x="9601200" y="2505456"/>
+            <a:ext cx="2103120" cy="384048"/>
+          </a:xfrm>
+          <a:prstGeom prst="roundRect">
+            <a:avLst/>
+          </a:prstGeom>
+          <a:solidFill>
+            <a:srgbClr val="F33844"/>
+          </a:solidFill>
+          <a:ln w="9525">
+            <a:solidFill>
+              <a:srgbClr val="E3E6EA"/>
+            </a:solidFill>
+          </a:ln>
+          <a:effectLst/>
+        </p:spPr>
+        <p:style>
+          <a:lnRef idx="1">
+            <a:schemeClr val="accent1"/>
+          </a:lnRef>
+          <a:fillRef idx="3">
+            <a:schemeClr val="accent1"/>
+          </a:fillRef>
+          <a:effectRef idx="2">
+            <a:schemeClr val="accent1"/>
+          </a:effectRef>
+          <a:fontRef idx="minor">
+            <a:schemeClr val="lt1"/>
+          </a:fontRef>
+        </p:style>
+        <p:txBody>
+          <a:bodyPr rtlCol="0" anchor="ctr" lIns="54864" rIns="54864" tIns="0" bIns="0"/>
+          <a:lstStyle/>
+          <a:p>
+            <a:r>
+              <a:rPr sz="900" b="1">
+                <a:solidFill>
+                  <a:srgbClr val="FFFFFF"/>
+                </a:solidFill>
+              </a:rPr>
+              <a:t>Accent Red   #F33844   Logo red, Support</a:t>
+            </a:r>
+          </a:p>
+        </p:txBody>
+      </p:sp>
+      <p:sp>
+        <p:nvSpPr>
+          <p:cNvPr id="33" name="Rounded Rectangle 32"/>
+          <p:cNvSpPr/>
+          <p:nvPr/>
+        </p:nvSpPr>
+        <p:spPr>
+          <a:xfrm>
+            <a:off x="9601200" y="2962656"/>
+            <a:ext cx="2103120" cy="384048"/>
+          </a:xfrm>
+          <a:prstGeom prst="roundRect">
+            <a:avLst/>
+          </a:prstGeom>
+          <a:solidFill>
+            <a:srgbClr val="A8052E"/>
+          </a:solidFill>
+          <a:ln w="9525">
+            <a:solidFill>
+              <a:srgbClr val="E3E6EA"/>
+            </a:solidFill>
+          </a:ln>
+          <a:effectLst/>
+        </p:spPr>
+        <p:style>
+          <a:lnRef idx="1">
+            <a:schemeClr val="accent1"/>
+          </a:lnRef>
+          <a:fillRef idx="3">
+            <a:schemeClr val="accent1"/>
+          </a:fillRef>
+          <a:effectRef idx="2">
+            <a:schemeClr val="accent1"/>
+          </a:effectRef>
+          <a:fontRef idx="minor">
+            <a:schemeClr val="lt1"/>
+          </a:fontRef>
+        </p:style>
+        <p:txBody>
+          <a:bodyPr rtlCol="0" anchor="ctr" lIns="54864" rIns="54864" tIns="0" bIns="0"/>
+          <a:lstStyle/>
+          <a:p>
+            <a:r>
+              <a:rPr sz="900" b="1">
+                <a:solidFill>
+                  <a:srgbClr val="FFFFFF"/>
+                </a:solidFill>
+              </a:rPr>
+              <a:t>Deep Red   #A8052E</a:t>
+            </a:r>
+          </a:p>
+        </p:txBody>
+      </p:sp>
+      <p:sp>
+        <p:nvSpPr>
+          <p:cNvPr id="34" name="Rounded Rectangle 33"/>
+          <p:cNvSpPr/>
+          <p:nvPr/>
+        </p:nvSpPr>
+        <p:spPr>
+          <a:xfrm>
+            <a:off x="9601200" y="3419856"/>
+            <a:ext cx="2103120" cy="384048"/>
+          </a:xfrm>
+          <a:prstGeom prst="roundRect">
+            <a:avLst/>
+          </a:prstGeom>
+          <a:solidFill>
+            <a:srgbClr val="8F4AFA"/>
+          </a:solidFill>
+          <a:ln w="9525">
+            <a:solidFill>
+              <a:srgbClr val="E3E6EA"/>
+            </a:solidFill>
+          </a:ln>
+          <a:effectLst/>
+        </p:spPr>
+        <p:style>
+          <a:lnRef idx="1">
+            <a:schemeClr val="accent1"/>
+          </a:lnRef>
+          <a:fillRef idx="3">
+            <a:schemeClr val="accent1"/>
+          </a:fillRef>
+          <a:effectRef idx="2">
+            <a:schemeClr val="accent1"/>
+          </a:effectRef>
+          <a:fontRef idx="minor">
+            <a:schemeClr val="lt1"/>
+          </a:fontRef>
+        </p:style>
+        <p:txBody>
+          <a:bodyPr rtlCol="0" anchor="ctr" lIns="54864" rIns="54864" tIns="0" bIns="0"/>
+          <a:lstStyle/>
+          <a:p>
+            <a:r>
+              <a:rPr sz="900" b="1">
+                <a:solidFill>
+                  <a:srgbClr val="FFFFFF"/>
+                </a:solidFill>
+              </a:rPr>
+              <a:t>Accent Purple   #8F4AFA   Consulting</a:t>
+            </a:r>
+          </a:p>
+        </p:txBody>
+      </p:sp>
+      <p:sp>
+        <p:nvSpPr>
+          <p:cNvPr id="35" name="Rounded Rectangle 34"/>
+          <p:cNvSpPr/>
+          <p:nvPr/>
+        </p:nvSpPr>
+        <p:spPr>
+          <a:xfrm>
+            <a:off x="9601200" y="3877056"/>
+            <a:ext cx="2103120" cy="384048"/>
+          </a:xfrm>
+          <a:prstGeom prst="roundRect">
+            <a:avLst/>
+          </a:prstGeom>
+          <a:solidFill>
+            <a:srgbClr val="242C39"/>
+          </a:solidFill>
+          <a:ln w="9525">
+            <a:solidFill>
+              <a:srgbClr val="E3E6EA"/>
+            </a:solidFill>
+          </a:ln>
+          <a:effectLst/>
+        </p:spPr>
+        <p:style>
+          <a:lnRef idx="1">
+            <a:schemeClr val="accent1"/>
+          </a:lnRef>
+          <a:fillRef idx="3">
+            <a:schemeClr val="accent1"/>
+          </a:fillRef>
+          <a:effectRef idx="2">
+            <a:schemeClr val="accent1"/>
+          </a:effectRef>
+          <a:fontRef idx="minor">
+            <a:schemeClr val="lt1"/>
+          </a:fontRef>
+        </p:style>
+        <p:txBody>
+          <a:bodyPr rtlCol="0" anchor="ctr" lIns="54864" rIns="54864" tIns="0" bIns="0"/>
+          <a:lstStyle/>
+          <a:p>
+            <a:r>
+              <a:rPr sz="900" b="1">
+                <a:solidFill>
+                  <a:srgbClr val="FFFFFF"/>
+                </a:solidFill>
+              </a:rPr>
+              <a:t>Charcoal   #242C39   Text</a:t>
+            </a:r>
+          </a:p>
+        </p:txBody>
+      </p:sp>
+      <p:sp>
+        <p:nvSpPr>
+          <p:cNvPr id="36" name="Rounded Rectangle 35"/>
+          <p:cNvSpPr/>
+          <p:nvPr/>
+        </p:nvSpPr>
+        <p:spPr>
+          <a:xfrm>
+            <a:off x="9601200" y="4334256"/>
+            <a:ext cx="2103120" cy="384048"/>
+          </a:xfrm>
+          <a:prstGeom prst="roundRect">
+            <a:avLst/>
+          </a:prstGeom>
+          <a:solidFill>
+            <a:srgbClr val="FFFFFF"/>
+          </a:solidFill>
+          <a:ln w="9525">
+            <a:solidFill>
+              <a:srgbClr val="E3E6EA"/>
+            </a:solidFill>
+          </a:ln>
+          <a:effectLst/>
+        </p:spPr>
+        <p:style>
+          <a:lnRef idx="1">
+            <a:schemeClr val="accent1"/>
+          </a:lnRef>
+          <a:fillRef idx="3">
+            <a:schemeClr val="accent1"/>
+          </a:fillRef>
+          <a:effectRef idx="2">
+            <a:schemeClr val="accent1"/>
+          </a:effectRef>
+          <a:fontRef idx="minor">
+            <a:schemeClr val="lt1"/>
+          </a:fontRef>
+        </p:style>
+        <p:txBody>
+          <a:bodyPr rtlCol="0" anchor="ctr" lIns="54864" rIns="54864" tIns="0" bIns="0"/>
+          <a:lstStyle/>
+          <a:p>
+            <a:r>
+              <a:rPr sz="900" b="1">
+                <a:solidFill>
+                  <a:srgbClr val="242C39"/>
+                </a:solidFill>
+              </a:rPr>
+              <a:t>White   #FFFFFF</a:t>
+            </a:r>
+          </a:p>
+        </p:txBody>
+      </p:sp>
     </p:spTree>
   </p:cSld>
   <p:clrMapOvr>
@@ -33416,6 +41066,516 @@
           </a:prstGeom>
         </p:spPr>
       </p:pic>
+      <p:sp>
+        <p:nvSpPr>
+          <p:cNvPr id="27" name="TextBox 26"/>
+          <p:cNvSpPr txBox="1"/>
+          <p:nvPr/>
+        </p:nvSpPr>
+        <p:spPr>
+          <a:xfrm>
+            <a:off x="9601200" y="365760"/>
+            <a:ext cx="2103120" cy="274320"/>
+          </a:xfrm>
+          <a:prstGeom prst="rect">
+            <a:avLst/>
+          </a:prstGeom>
+          <a:noFill/>
+        </p:spPr>
+        <p:txBody>
+          <a:bodyPr wrap="none">
+            <a:spAutoFit/>
+          </a:bodyPr>
+          <a:lstStyle/>
+          <a:p>
+            <a:r>
+              <a:rPr sz="900" b="1">
+                <a:solidFill>
+                  <a:srgbClr val="242C39"/>
+                </a:solidFill>
+              </a:rPr>
+              <a:t>CTS palette — not on the slide, eyedropper from here</a:t>
+            </a:r>
+          </a:p>
+        </p:txBody>
+      </p:sp>
+      <p:sp>
+        <p:nvSpPr>
+          <p:cNvPr id="28" name="Rounded Rectangle 27"/>
+          <p:cNvSpPr/>
+          <p:nvPr/>
+        </p:nvSpPr>
+        <p:spPr>
+          <a:xfrm>
+            <a:off x="9601200" y="676656"/>
+            <a:ext cx="2103120" cy="384048"/>
+          </a:xfrm>
+          <a:prstGeom prst="roundRect">
+            <a:avLst/>
+          </a:prstGeom>
+          <a:solidFill>
+            <a:srgbClr val="3FD0C9"/>
+          </a:solidFill>
+          <a:ln w="9525">
+            <a:solidFill>
+              <a:srgbClr val="E3E6EA"/>
+            </a:solidFill>
+          </a:ln>
+          <a:effectLst/>
+        </p:spPr>
+        <p:style>
+          <a:lnRef idx="1">
+            <a:schemeClr val="accent1"/>
+          </a:lnRef>
+          <a:fillRef idx="3">
+            <a:schemeClr val="accent1"/>
+          </a:fillRef>
+          <a:effectRef idx="2">
+            <a:schemeClr val="accent1"/>
+          </a:effectRef>
+          <a:fontRef idx="minor">
+            <a:schemeClr val="lt1"/>
+          </a:fontRef>
+        </p:style>
+        <p:txBody>
+          <a:bodyPr rtlCol="0" anchor="ctr" lIns="54864" rIns="54864" tIns="0" bIns="0"/>
+          <a:lstStyle/>
+          <a:p>
+            <a:r>
+              <a:rPr sz="900" b="1">
+                <a:solidFill>
+                  <a:srgbClr val="242C39"/>
+                </a:solidFill>
+              </a:rPr>
+              <a:t>Bright Teal   #3FD0C9   Logo green</a:t>
+            </a:r>
+          </a:p>
+        </p:txBody>
+      </p:sp>
+      <p:sp>
+        <p:nvSpPr>
+          <p:cNvPr id="29" name="Rounded Rectangle 28"/>
+          <p:cNvSpPr/>
+          <p:nvPr/>
+        </p:nvSpPr>
+        <p:spPr>
+          <a:xfrm>
+            <a:off x="9601200" y="1133856"/>
+            <a:ext cx="2103120" cy="384048"/>
+          </a:xfrm>
+          <a:prstGeom prst="roundRect">
+            <a:avLst/>
+          </a:prstGeom>
+          <a:solidFill>
+            <a:srgbClr val="005358"/>
+          </a:solidFill>
+          <a:ln w="9525">
+            <a:solidFill>
+              <a:srgbClr val="E3E6EA"/>
+            </a:solidFill>
+          </a:ln>
+          <a:effectLst/>
+        </p:spPr>
+        <p:style>
+          <a:lnRef idx="1">
+            <a:schemeClr val="accent1"/>
+          </a:lnRef>
+          <a:fillRef idx="3">
+            <a:schemeClr val="accent1"/>
+          </a:fillRef>
+          <a:effectRef idx="2">
+            <a:schemeClr val="accent1"/>
+          </a:effectRef>
+          <a:fontRef idx="minor">
+            <a:schemeClr val="lt1"/>
+          </a:fontRef>
+        </p:style>
+        <p:txBody>
+          <a:bodyPr rtlCol="0" anchor="ctr" lIns="54864" rIns="54864" tIns="0" bIns="0"/>
+          <a:lstStyle/>
+          <a:p>
+            <a:r>
+              <a:rPr sz="900" b="1">
+                <a:solidFill>
+                  <a:srgbClr val="FFFFFF"/>
+                </a:solidFill>
+              </a:rPr>
+              <a:t>Dark Teal   #005358   Production</a:t>
+            </a:r>
+          </a:p>
+        </p:txBody>
+      </p:sp>
+      <p:sp>
+        <p:nvSpPr>
+          <p:cNvPr id="30" name="Rounded Rectangle 29"/>
+          <p:cNvSpPr/>
+          <p:nvPr/>
+        </p:nvSpPr>
+        <p:spPr>
+          <a:xfrm>
+            <a:off x="9601200" y="1591056"/>
+            <a:ext cx="2103120" cy="384048"/>
+          </a:xfrm>
+          <a:prstGeom prst="roundRect">
+            <a:avLst/>
+          </a:prstGeom>
+          <a:solidFill>
+            <a:srgbClr val="6D71FF"/>
+          </a:solidFill>
+          <a:ln w="9525">
+            <a:solidFill>
+              <a:srgbClr val="E3E6EA"/>
+            </a:solidFill>
+          </a:ln>
+          <a:effectLst/>
+        </p:spPr>
+        <p:style>
+          <a:lnRef idx="1">
+            <a:schemeClr val="accent1"/>
+          </a:lnRef>
+          <a:fillRef idx="3">
+            <a:schemeClr val="accent1"/>
+          </a:fillRef>
+          <a:effectRef idx="2">
+            <a:schemeClr val="accent1"/>
+          </a:effectRef>
+          <a:fontRef idx="minor">
+            <a:schemeClr val="lt1"/>
+          </a:fontRef>
+        </p:style>
+        <p:txBody>
+          <a:bodyPr rtlCol="0" anchor="ctr" lIns="54864" rIns="54864" tIns="0" bIns="0"/>
+          <a:lstStyle/>
+          <a:p>
+            <a:r>
+              <a:rPr sz="900" b="1">
+                <a:solidFill>
+                  <a:srgbClr val="FFFFFF"/>
+                </a:solidFill>
+              </a:rPr>
+              <a:t>Primary Blue   #6D71FF   Logo blue</a:t>
+            </a:r>
+          </a:p>
+        </p:txBody>
+      </p:sp>
+      <p:sp>
+        <p:nvSpPr>
+          <p:cNvPr id="31" name="Rounded Rectangle 30"/>
+          <p:cNvSpPr/>
+          <p:nvPr/>
+        </p:nvSpPr>
+        <p:spPr>
+          <a:xfrm>
+            <a:off x="9601200" y="2048256"/>
+            <a:ext cx="2103120" cy="384048"/>
+          </a:xfrm>
+          <a:prstGeom prst="roundRect">
+            <a:avLst/>
+          </a:prstGeom>
+          <a:solidFill>
+            <a:srgbClr val="122B82"/>
+          </a:solidFill>
+          <a:ln w="9525">
+            <a:solidFill>
+              <a:srgbClr val="E3E6EA"/>
+            </a:solidFill>
+          </a:ln>
+          <a:effectLst/>
+        </p:spPr>
+        <p:style>
+          <a:lnRef idx="1">
+            <a:schemeClr val="accent1"/>
+          </a:lnRef>
+          <a:fillRef idx="3">
+            <a:schemeClr val="accent1"/>
+          </a:fillRef>
+          <a:effectRef idx="2">
+            <a:schemeClr val="accent1"/>
+          </a:effectRef>
+          <a:fontRef idx="minor">
+            <a:schemeClr val="lt1"/>
+          </a:fontRef>
+        </p:style>
+        <p:txBody>
+          <a:bodyPr rtlCol="0" anchor="ctr" lIns="54864" rIns="54864" tIns="0" bIns="0"/>
+          <a:lstStyle/>
+          <a:p>
+            <a:r>
+              <a:rPr sz="900" b="1">
+                <a:solidFill>
+                  <a:srgbClr val="FFFFFF"/>
+                </a:solidFill>
+              </a:rPr>
+              <a:t>Deep Blue   #122B82</a:t>
+            </a:r>
+          </a:p>
+        </p:txBody>
+      </p:sp>
+      <p:sp>
+        <p:nvSpPr>
+          <p:cNvPr id="32" name="Rounded Rectangle 31"/>
+          <p:cNvSpPr/>
+          <p:nvPr/>
+        </p:nvSpPr>
+        <p:spPr>
+          <a:xfrm>
+            <a:off x="9601200" y="2505456"/>
+            <a:ext cx="2103120" cy="384048"/>
+          </a:xfrm>
+          <a:prstGeom prst="roundRect">
+            <a:avLst/>
+          </a:prstGeom>
+          <a:solidFill>
+            <a:srgbClr val="F33844"/>
+          </a:solidFill>
+          <a:ln w="9525">
+            <a:solidFill>
+              <a:srgbClr val="E3E6EA"/>
+            </a:solidFill>
+          </a:ln>
+          <a:effectLst/>
+        </p:spPr>
+        <p:style>
+          <a:lnRef idx="1">
+            <a:schemeClr val="accent1"/>
+          </a:lnRef>
+          <a:fillRef idx="3">
+            <a:schemeClr val="accent1"/>
+          </a:fillRef>
+          <a:effectRef idx="2">
+            <a:schemeClr val="accent1"/>
+          </a:effectRef>
+          <a:fontRef idx="minor">
+            <a:schemeClr val="lt1"/>
+          </a:fontRef>
+        </p:style>
+        <p:txBody>
+          <a:bodyPr rtlCol="0" anchor="ctr" lIns="54864" rIns="54864" tIns="0" bIns="0"/>
+          <a:lstStyle/>
+          <a:p>
+            <a:r>
+              <a:rPr sz="900" b="1">
+                <a:solidFill>
+                  <a:srgbClr val="FFFFFF"/>
+                </a:solidFill>
+              </a:rPr>
+              <a:t>Accent Red   #F33844   Logo red, Support</a:t>
+            </a:r>
+          </a:p>
+        </p:txBody>
+      </p:sp>
+      <p:sp>
+        <p:nvSpPr>
+          <p:cNvPr id="33" name="Rounded Rectangle 32"/>
+          <p:cNvSpPr/>
+          <p:nvPr/>
+        </p:nvSpPr>
+        <p:spPr>
+          <a:xfrm>
+            <a:off x="9601200" y="2962656"/>
+            <a:ext cx="2103120" cy="384048"/>
+          </a:xfrm>
+          <a:prstGeom prst="roundRect">
+            <a:avLst/>
+          </a:prstGeom>
+          <a:solidFill>
+            <a:srgbClr val="A8052E"/>
+          </a:solidFill>
+          <a:ln w="9525">
+            <a:solidFill>
+              <a:srgbClr val="E3E6EA"/>
+            </a:solidFill>
+          </a:ln>
+          <a:effectLst/>
+        </p:spPr>
+        <p:style>
+          <a:lnRef idx="1">
+            <a:schemeClr val="accent1"/>
+          </a:lnRef>
+          <a:fillRef idx="3">
+            <a:schemeClr val="accent1"/>
+          </a:fillRef>
+          <a:effectRef idx="2">
+            <a:schemeClr val="accent1"/>
+          </a:effectRef>
+          <a:fontRef idx="minor">
+            <a:schemeClr val="lt1"/>
+          </a:fontRef>
+        </p:style>
+        <p:txBody>
+          <a:bodyPr rtlCol="0" anchor="ctr" lIns="54864" rIns="54864" tIns="0" bIns="0"/>
+          <a:lstStyle/>
+          <a:p>
+            <a:r>
+              <a:rPr sz="900" b="1">
+                <a:solidFill>
+                  <a:srgbClr val="FFFFFF"/>
+                </a:solidFill>
+              </a:rPr>
+              <a:t>Deep Red   #A8052E</a:t>
+            </a:r>
+          </a:p>
+        </p:txBody>
+      </p:sp>
+      <p:sp>
+        <p:nvSpPr>
+          <p:cNvPr id="34" name="Rounded Rectangle 33"/>
+          <p:cNvSpPr/>
+          <p:nvPr/>
+        </p:nvSpPr>
+        <p:spPr>
+          <a:xfrm>
+            <a:off x="9601200" y="3419856"/>
+            <a:ext cx="2103120" cy="384048"/>
+          </a:xfrm>
+          <a:prstGeom prst="roundRect">
+            <a:avLst/>
+          </a:prstGeom>
+          <a:solidFill>
+            <a:srgbClr val="8F4AFA"/>
+          </a:solidFill>
+          <a:ln w="9525">
+            <a:solidFill>
+              <a:srgbClr val="E3E6EA"/>
+            </a:solidFill>
+          </a:ln>
+          <a:effectLst/>
+        </p:spPr>
+        <p:style>
+          <a:lnRef idx="1">
+            <a:schemeClr val="accent1"/>
+          </a:lnRef>
+          <a:fillRef idx="3">
+            <a:schemeClr val="accent1"/>
+          </a:fillRef>
+          <a:effectRef idx="2">
+            <a:schemeClr val="accent1"/>
+          </a:effectRef>
+          <a:fontRef idx="minor">
+            <a:schemeClr val="lt1"/>
+          </a:fontRef>
+        </p:style>
+        <p:txBody>
+          <a:bodyPr rtlCol="0" anchor="ctr" lIns="54864" rIns="54864" tIns="0" bIns="0"/>
+          <a:lstStyle/>
+          <a:p>
+            <a:r>
+              <a:rPr sz="900" b="1">
+                <a:solidFill>
+                  <a:srgbClr val="FFFFFF"/>
+                </a:solidFill>
+              </a:rPr>
+              <a:t>Accent Purple   #8F4AFA   Consulting</a:t>
+            </a:r>
+          </a:p>
+        </p:txBody>
+      </p:sp>
+      <p:sp>
+        <p:nvSpPr>
+          <p:cNvPr id="35" name="Rounded Rectangle 34"/>
+          <p:cNvSpPr/>
+          <p:nvPr/>
+        </p:nvSpPr>
+        <p:spPr>
+          <a:xfrm>
+            <a:off x="9601200" y="3877056"/>
+            <a:ext cx="2103120" cy="384048"/>
+          </a:xfrm>
+          <a:prstGeom prst="roundRect">
+            <a:avLst/>
+          </a:prstGeom>
+          <a:solidFill>
+            <a:srgbClr val="242C39"/>
+          </a:solidFill>
+          <a:ln w="9525">
+            <a:solidFill>
+              <a:srgbClr val="E3E6EA"/>
+            </a:solidFill>
+          </a:ln>
+          <a:effectLst/>
+        </p:spPr>
+        <p:style>
+          <a:lnRef idx="1">
+            <a:schemeClr val="accent1"/>
+          </a:lnRef>
+          <a:fillRef idx="3">
+            <a:schemeClr val="accent1"/>
+          </a:fillRef>
+          <a:effectRef idx="2">
+            <a:schemeClr val="accent1"/>
+          </a:effectRef>
+          <a:fontRef idx="minor">
+            <a:schemeClr val="lt1"/>
+          </a:fontRef>
+        </p:style>
+        <p:txBody>
+          <a:bodyPr rtlCol="0" anchor="ctr" lIns="54864" rIns="54864" tIns="0" bIns="0"/>
+          <a:lstStyle/>
+          <a:p>
+            <a:r>
+              <a:rPr sz="900" b="1">
+                <a:solidFill>
+                  <a:srgbClr val="FFFFFF"/>
+                </a:solidFill>
+              </a:rPr>
+              <a:t>Charcoal   #242C39   Text</a:t>
+            </a:r>
+          </a:p>
+        </p:txBody>
+      </p:sp>
+      <p:sp>
+        <p:nvSpPr>
+          <p:cNvPr id="36" name="Rounded Rectangle 35"/>
+          <p:cNvSpPr/>
+          <p:nvPr/>
+        </p:nvSpPr>
+        <p:spPr>
+          <a:xfrm>
+            <a:off x="9601200" y="4334256"/>
+            <a:ext cx="2103120" cy="384048"/>
+          </a:xfrm>
+          <a:prstGeom prst="roundRect">
+            <a:avLst/>
+          </a:prstGeom>
+          <a:solidFill>
+            <a:srgbClr val="FFFFFF"/>
+          </a:solidFill>
+          <a:ln w="9525">
+            <a:solidFill>
+              <a:srgbClr val="E3E6EA"/>
+            </a:solidFill>
+          </a:ln>
+          <a:effectLst/>
+        </p:spPr>
+        <p:style>
+          <a:lnRef idx="1">
+            <a:schemeClr val="accent1"/>
+          </a:lnRef>
+          <a:fillRef idx="3">
+            <a:schemeClr val="accent1"/>
+          </a:fillRef>
+          <a:effectRef idx="2">
+            <a:schemeClr val="accent1"/>
+          </a:effectRef>
+          <a:fontRef idx="minor">
+            <a:schemeClr val="lt1"/>
+          </a:fontRef>
+        </p:style>
+        <p:txBody>
+          <a:bodyPr rtlCol="0" anchor="ctr" lIns="54864" rIns="54864" tIns="0" bIns="0"/>
+          <a:lstStyle/>
+          <a:p>
+            <a:r>
+              <a:rPr sz="900" b="1">
+                <a:solidFill>
+                  <a:srgbClr val="242C39"/>
+                </a:solidFill>
+              </a:rPr>
+              <a:t>White   #FFFFFF</a:t>
+            </a:r>
+          </a:p>
+        </p:txBody>
+      </p:sp>
     </p:spTree>
   </p:cSld>
   <p:clrMapOvr>
@@ -33615,6 +41775,516 @@
               <a:t>8</a:t>
             </a:fld>
             <a:endParaRPr lang="en-US"/>
+          </a:p>
+        </p:txBody>
+      </p:sp>
+      <p:sp>
+        <p:nvSpPr>
+          <p:cNvPr id="26" name="TextBox 25"/>
+          <p:cNvSpPr txBox="1"/>
+          <p:nvPr/>
+        </p:nvSpPr>
+        <p:spPr>
+          <a:xfrm>
+            <a:off x="9601200" y="365760"/>
+            <a:ext cx="2103120" cy="274320"/>
+          </a:xfrm>
+          <a:prstGeom prst="rect">
+            <a:avLst/>
+          </a:prstGeom>
+          <a:noFill/>
+        </p:spPr>
+        <p:txBody>
+          <a:bodyPr wrap="none">
+            <a:spAutoFit/>
+          </a:bodyPr>
+          <a:lstStyle/>
+          <a:p>
+            <a:r>
+              <a:rPr sz="900" b="1">
+                <a:solidFill>
+                  <a:srgbClr val="242C39"/>
+                </a:solidFill>
+              </a:rPr>
+              <a:t>CTS palette — not on the slide, eyedropper from here</a:t>
+            </a:r>
+          </a:p>
+        </p:txBody>
+      </p:sp>
+      <p:sp>
+        <p:nvSpPr>
+          <p:cNvPr id="27" name="Rounded Rectangle 26"/>
+          <p:cNvSpPr/>
+          <p:nvPr/>
+        </p:nvSpPr>
+        <p:spPr>
+          <a:xfrm>
+            <a:off x="9601200" y="676656"/>
+            <a:ext cx="2103120" cy="384048"/>
+          </a:xfrm>
+          <a:prstGeom prst="roundRect">
+            <a:avLst/>
+          </a:prstGeom>
+          <a:solidFill>
+            <a:srgbClr val="3FD0C9"/>
+          </a:solidFill>
+          <a:ln w="9525">
+            <a:solidFill>
+              <a:srgbClr val="E3E6EA"/>
+            </a:solidFill>
+          </a:ln>
+          <a:effectLst/>
+        </p:spPr>
+        <p:style>
+          <a:lnRef idx="1">
+            <a:schemeClr val="accent1"/>
+          </a:lnRef>
+          <a:fillRef idx="3">
+            <a:schemeClr val="accent1"/>
+          </a:fillRef>
+          <a:effectRef idx="2">
+            <a:schemeClr val="accent1"/>
+          </a:effectRef>
+          <a:fontRef idx="minor">
+            <a:schemeClr val="lt1"/>
+          </a:fontRef>
+        </p:style>
+        <p:txBody>
+          <a:bodyPr rtlCol="0" anchor="ctr" lIns="54864" rIns="54864" tIns="0" bIns="0"/>
+          <a:lstStyle/>
+          <a:p>
+            <a:r>
+              <a:rPr sz="900" b="1">
+                <a:solidFill>
+                  <a:srgbClr val="242C39"/>
+                </a:solidFill>
+              </a:rPr>
+              <a:t>Bright Teal   #3FD0C9   Logo green</a:t>
+            </a:r>
+          </a:p>
+        </p:txBody>
+      </p:sp>
+      <p:sp>
+        <p:nvSpPr>
+          <p:cNvPr id="28" name="Rounded Rectangle 27"/>
+          <p:cNvSpPr/>
+          <p:nvPr/>
+        </p:nvSpPr>
+        <p:spPr>
+          <a:xfrm>
+            <a:off x="9601200" y="1133856"/>
+            <a:ext cx="2103120" cy="384048"/>
+          </a:xfrm>
+          <a:prstGeom prst="roundRect">
+            <a:avLst/>
+          </a:prstGeom>
+          <a:solidFill>
+            <a:srgbClr val="005358"/>
+          </a:solidFill>
+          <a:ln w="9525">
+            <a:solidFill>
+              <a:srgbClr val="E3E6EA"/>
+            </a:solidFill>
+          </a:ln>
+          <a:effectLst/>
+        </p:spPr>
+        <p:style>
+          <a:lnRef idx="1">
+            <a:schemeClr val="accent1"/>
+          </a:lnRef>
+          <a:fillRef idx="3">
+            <a:schemeClr val="accent1"/>
+          </a:fillRef>
+          <a:effectRef idx="2">
+            <a:schemeClr val="accent1"/>
+          </a:effectRef>
+          <a:fontRef idx="minor">
+            <a:schemeClr val="lt1"/>
+          </a:fontRef>
+        </p:style>
+        <p:txBody>
+          <a:bodyPr rtlCol="0" anchor="ctr" lIns="54864" rIns="54864" tIns="0" bIns="0"/>
+          <a:lstStyle/>
+          <a:p>
+            <a:r>
+              <a:rPr sz="900" b="1">
+                <a:solidFill>
+                  <a:srgbClr val="FFFFFF"/>
+                </a:solidFill>
+              </a:rPr>
+              <a:t>Dark Teal   #005358   Production</a:t>
+            </a:r>
+          </a:p>
+        </p:txBody>
+      </p:sp>
+      <p:sp>
+        <p:nvSpPr>
+          <p:cNvPr id="29" name="Rounded Rectangle 28"/>
+          <p:cNvSpPr/>
+          <p:nvPr/>
+        </p:nvSpPr>
+        <p:spPr>
+          <a:xfrm>
+            <a:off x="9601200" y="1591056"/>
+            <a:ext cx="2103120" cy="384048"/>
+          </a:xfrm>
+          <a:prstGeom prst="roundRect">
+            <a:avLst/>
+          </a:prstGeom>
+          <a:solidFill>
+            <a:srgbClr val="6D71FF"/>
+          </a:solidFill>
+          <a:ln w="9525">
+            <a:solidFill>
+              <a:srgbClr val="E3E6EA"/>
+            </a:solidFill>
+          </a:ln>
+          <a:effectLst/>
+        </p:spPr>
+        <p:style>
+          <a:lnRef idx="1">
+            <a:schemeClr val="accent1"/>
+          </a:lnRef>
+          <a:fillRef idx="3">
+            <a:schemeClr val="accent1"/>
+          </a:fillRef>
+          <a:effectRef idx="2">
+            <a:schemeClr val="accent1"/>
+          </a:effectRef>
+          <a:fontRef idx="minor">
+            <a:schemeClr val="lt1"/>
+          </a:fontRef>
+        </p:style>
+        <p:txBody>
+          <a:bodyPr rtlCol="0" anchor="ctr" lIns="54864" rIns="54864" tIns="0" bIns="0"/>
+          <a:lstStyle/>
+          <a:p>
+            <a:r>
+              <a:rPr sz="900" b="1">
+                <a:solidFill>
+                  <a:srgbClr val="FFFFFF"/>
+                </a:solidFill>
+              </a:rPr>
+              <a:t>Primary Blue   #6D71FF   Logo blue</a:t>
+            </a:r>
+          </a:p>
+        </p:txBody>
+      </p:sp>
+      <p:sp>
+        <p:nvSpPr>
+          <p:cNvPr id="30" name="Rounded Rectangle 29"/>
+          <p:cNvSpPr/>
+          <p:nvPr/>
+        </p:nvSpPr>
+        <p:spPr>
+          <a:xfrm>
+            <a:off x="9601200" y="2048256"/>
+            <a:ext cx="2103120" cy="384048"/>
+          </a:xfrm>
+          <a:prstGeom prst="roundRect">
+            <a:avLst/>
+          </a:prstGeom>
+          <a:solidFill>
+            <a:srgbClr val="122B82"/>
+          </a:solidFill>
+          <a:ln w="9525">
+            <a:solidFill>
+              <a:srgbClr val="E3E6EA"/>
+            </a:solidFill>
+          </a:ln>
+          <a:effectLst/>
+        </p:spPr>
+        <p:style>
+          <a:lnRef idx="1">
+            <a:schemeClr val="accent1"/>
+          </a:lnRef>
+          <a:fillRef idx="3">
+            <a:schemeClr val="accent1"/>
+          </a:fillRef>
+          <a:effectRef idx="2">
+            <a:schemeClr val="accent1"/>
+          </a:effectRef>
+          <a:fontRef idx="minor">
+            <a:schemeClr val="lt1"/>
+          </a:fontRef>
+        </p:style>
+        <p:txBody>
+          <a:bodyPr rtlCol="0" anchor="ctr" lIns="54864" rIns="54864" tIns="0" bIns="0"/>
+          <a:lstStyle/>
+          <a:p>
+            <a:r>
+              <a:rPr sz="900" b="1">
+                <a:solidFill>
+                  <a:srgbClr val="FFFFFF"/>
+                </a:solidFill>
+              </a:rPr>
+              <a:t>Deep Blue   #122B82</a:t>
+            </a:r>
+          </a:p>
+        </p:txBody>
+      </p:sp>
+      <p:sp>
+        <p:nvSpPr>
+          <p:cNvPr id="31" name="Rounded Rectangle 30"/>
+          <p:cNvSpPr/>
+          <p:nvPr/>
+        </p:nvSpPr>
+        <p:spPr>
+          <a:xfrm>
+            <a:off x="9601200" y="2505456"/>
+            <a:ext cx="2103120" cy="384048"/>
+          </a:xfrm>
+          <a:prstGeom prst="roundRect">
+            <a:avLst/>
+          </a:prstGeom>
+          <a:solidFill>
+            <a:srgbClr val="F33844"/>
+          </a:solidFill>
+          <a:ln w="9525">
+            <a:solidFill>
+              <a:srgbClr val="E3E6EA"/>
+            </a:solidFill>
+          </a:ln>
+          <a:effectLst/>
+        </p:spPr>
+        <p:style>
+          <a:lnRef idx="1">
+            <a:schemeClr val="accent1"/>
+          </a:lnRef>
+          <a:fillRef idx="3">
+            <a:schemeClr val="accent1"/>
+          </a:fillRef>
+          <a:effectRef idx="2">
+            <a:schemeClr val="accent1"/>
+          </a:effectRef>
+          <a:fontRef idx="minor">
+            <a:schemeClr val="lt1"/>
+          </a:fontRef>
+        </p:style>
+        <p:txBody>
+          <a:bodyPr rtlCol="0" anchor="ctr" lIns="54864" rIns="54864" tIns="0" bIns="0"/>
+          <a:lstStyle/>
+          <a:p>
+            <a:r>
+              <a:rPr sz="900" b="1">
+                <a:solidFill>
+                  <a:srgbClr val="FFFFFF"/>
+                </a:solidFill>
+              </a:rPr>
+              <a:t>Accent Red   #F33844   Logo red, Support</a:t>
+            </a:r>
+          </a:p>
+        </p:txBody>
+      </p:sp>
+      <p:sp>
+        <p:nvSpPr>
+          <p:cNvPr id="32" name="Rounded Rectangle 31"/>
+          <p:cNvSpPr/>
+          <p:nvPr/>
+        </p:nvSpPr>
+        <p:spPr>
+          <a:xfrm>
+            <a:off x="9601200" y="2962656"/>
+            <a:ext cx="2103120" cy="384048"/>
+          </a:xfrm>
+          <a:prstGeom prst="roundRect">
+            <a:avLst/>
+          </a:prstGeom>
+          <a:solidFill>
+            <a:srgbClr val="A8052E"/>
+          </a:solidFill>
+          <a:ln w="9525">
+            <a:solidFill>
+              <a:srgbClr val="E3E6EA"/>
+            </a:solidFill>
+          </a:ln>
+          <a:effectLst/>
+        </p:spPr>
+        <p:style>
+          <a:lnRef idx="1">
+            <a:schemeClr val="accent1"/>
+          </a:lnRef>
+          <a:fillRef idx="3">
+            <a:schemeClr val="accent1"/>
+          </a:fillRef>
+          <a:effectRef idx="2">
+            <a:schemeClr val="accent1"/>
+          </a:effectRef>
+          <a:fontRef idx="minor">
+            <a:schemeClr val="lt1"/>
+          </a:fontRef>
+        </p:style>
+        <p:txBody>
+          <a:bodyPr rtlCol="0" anchor="ctr" lIns="54864" rIns="54864" tIns="0" bIns="0"/>
+          <a:lstStyle/>
+          <a:p>
+            <a:r>
+              <a:rPr sz="900" b="1">
+                <a:solidFill>
+                  <a:srgbClr val="FFFFFF"/>
+                </a:solidFill>
+              </a:rPr>
+              <a:t>Deep Red   #A8052E</a:t>
+            </a:r>
+          </a:p>
+        </p:txBody>
+      </p:sp>
+      <p:sp>
+        <p:nvSpPr>
+          <p:cNvPr id="33" name="Rounded Rectangle 32"/>
+          <p:cNvSpPr/>
+          <p:nvPr/>
+        </p:nvSpPr>
+        <p:spPr>
+          <a:xfrm>
+            <a:off x="9601200" y="3419856"/>
+            <a:ext cx="2103120" cy="384048"/>
+          </a:xfrm>
+          <a:prstGeom prst="roundRect">
+            <a:avLst/>
+          </a:prstGeom>
+          <a:solidFill>
+            <a:srgbClr val="8F4AFA"/>
+          </a:solidFill>
+          <a:ln w="9525">
+            <a:solidFill>
+              <a:srgbClr val="E3E6EA"/>
+            </a:solidFill>
+          </a:ln>
+          <a:effectLst/>
+        </p:spPr>
+        <p:style>
+          <a:lnRef idx="1">
+            <a:schemeClr val="accent1"/>
+          </a:lnRef>
+          <a:fillRef idx="3">
+            <a:schemeClr val="accent1"/>
+          </a:fillRef>
+          <a:effectRef idx="2">
+            <a:schemeClr val="accent1"/>
+          </a:effectRef>
+          <a:fontRef idx="minor">
+            <a:schemeClr val="lt1"/>
+          </a:fontRef>
+        </p:style>
+        <p:txBody>
+          <a:bodyPr rtlCol="0" anchor="ctr" lIns="54864" rIns="54864" tIns="0" bIns="0"/>
+          <a:lstStyle/>
+          <a:p>
+            <a:r>
+              <a:rPr sz="900" b="1">
+                <a:solidFill>
+                  <a:srgbClr val="FFFFFF"/>
+                </a:solidFill>
+              </a:rPr>
+              <a:t>Accent Purple   #8F4AFA   Consulting</a:t>
+            </a:r>
+          </a:p>
+        </p:txBody>
+      </p:sp>
+      <p:sp>
+        <p:nvSpPr>
+          <p:cNvPr id="34" name="Rounded Rectangle 33"/>
+          <p:cNvSpPr/>
+          <p:nvPr/>
+        </p:nvSpPr>
+        <p:spPr>
+          <a:xfrm>
+            <a:off x="9601200" y="3877056"/>
+            <a:ext cx="2103120" cy="384048"/>
+          </a:xfrm>
+          <a:prstGeom prst="roundRect">
+            <a:avLst/>
+          </a:prstGeom>
+          <a:solidFill>
+            <a:srgbClr val="242C39"/>
+          </a:solidFill>
+          <a:ln w="9525">
+            <a:solidFill>
+              <a:srgbClr val="E3E6EA"/>
+            </a:solidFill>
+          </a:ln>
+          <a:effectLst/>
+        </p:spPr>
+        <p:style>
+          <a:lnRef idx="1">
+            <a:schemeClr val="accent1"/>
+          </a:lnRef>
+          <a:fillRef idx="3">
+            <a:schemeClr val="accent1"/>
+          </a:fillRef>
+          <a:effectRef idx="2">
+            <a:schemeClr val="accent1"/>
+          </a:effectRef>
+          <a:fontRef idx="minor">
+            <a:schemeClr val="lt1"/>
+          </a:fontRef>
+        </p:style>
+        <p:txBody>
+          <a:bodyPr rtlCol="0" anchor="ctr" lIns="54864" rIns="54864" tIns="0" bIns="0"/>
+          <a:lstStyle/>
+          <a:p>
+            <a:r>
+              <a:rPr sz="900" b="1">
+                <a:solidFill>
+                  <a:srgbClr val="FFFFFF"/>
+                </a:solidFill>
+              </a:rPr>
+              <a:t>Charcoal   #242C39   Text</a:t>
+            </a:r>
+          </a:p>
+        </p:txBody>
+      </p:sp>
+      <p:sp>
+        <p:nvSpPr>
+          <p:cNvPr id="35" name="Rounded Rectangle 34"/>
+          <p:cNvSpPr/>
+          <p:nvPr/>
+        </p:nvSpPr>
+        <p:spPr>
+          <a:xfrm>
+            <a:off x="9601200" y="4334256"/>
+            <a:ext cx="2103120" cy="384048"/>
+          </a:xfrm>
+          <a:prstGeom prst="roundRect">
+            <a:avLst/>
+          </a:prstGeom>
+          <a:solidFill>
+            <a:srgbClr val="FFFFFF"/>
+          </a:solidFill>
+          <a:ln w="9525">
+            <a:solidFill>
+              <a:srgbClr val="E3E6EA"/>
+            </a:solidFill>
+          </a:ln>
+          <a:effectLst/>
+        </p:spPr>
+        <p:style>
+          <a:lnRef idx="1">
+            <a:schemeClr val="accent1"/>
+          </a:lnRef>
+          <a:fillRef idx="3">
+            <a:schemeClr val="accent1"/>
+          </a:fillRef>
+          <a:effectRef idx="2">
+            <a:schemeClr val="accent1"/>
+          </a:effectRef>
+          <a:fontRef idx="minor">
+            <a:schemeClr val="lt1"/>
+          </a:fontRef>
+        </p:style>
+        <p:txBody>
+          <a:bodyPr rtlCol="0" anchor="ctr" lIns="54864" rIns="54864" tIns="0" bIns="0"/>
+          <a:lstStyle/>
+          <a:p>
+            <a:r>
+              <a:rPr sz="900" b="1">
+                <a:solidFill>
+                  <a:srgbClr val="242C39"/>
+                </a:solidFill>
+              </a:rPr>
+              <a:t>White   #FFFFFF</a:t>
+            </a:r>
           </a:p>
         </p:txBody>
       </p:sp>
@@ -37981,6 +46651,516 @@
               <a:t>9</a:t>
             </a:fld>
             <a:endParaRPr lang="en-US"/>
+          </a:p>
+        </p:txBody>
+      </p:sp>
+      <p:sp>
+        <p:nvSpPr>
+          <p:cNvPr id="26" name="TextBox 25"/>
+          <p:cNvSpPr txBox="1"/>
+          <p:nvPr/>
+        </p:nvSpPr>
+        <p:spPr>
+          <a:xfrm>
+            <a:off x="9601200" y="365760"/>
+            <a:ext cx="2103120" cy="274320"/>
+          </a:xfrm>
+          <a:prstGeom prst="rect">
+            <a:avLst/>
+          </a:prstGeom>
+          <a:noFill/>
+        </p:spPr>
+        <p:txBody>
+          <a:bodyPr wrap="none">
+            <a:spAutoFit/>
+          </a:bodyPr>
+          <a:lstStyle/>
+          <a:p>
+            <a:r>
+              <a:rPr sz="900" b="1">
+                <a:solidFill>
+                  <a:srgbClr val="242C39"/>
+                </a:solidFill>
+              </a:rPr>
+              <a:t>CTS palette — not on the slide, eyedropper from here</a:t>
+            </a:r>
+          </a:p>
+        </p:txBody>
+      </p:sp>
+      <p:sp>
+        <p:nvSpPr>
+          <p:cNvPr id="27" name="Rounded Rectangle 26"/>
+          <p:cNvSpPr/>
+          <p:nvPr/>
+        </p:nvSpPr>
+        <p:spPr>
+          <a:xfrm>
+            <a:off x="9601200" y="676656"/>
+            <a:ext cx="2103120" cy="384048"/>
+          </a:xfrm>
+          <a:prstGeom prst="roundRect">
+            <a:avLst/>
+          </a:prstGeom>
+          <a:solidFill>
+            <a:srgbClr val="3FD0C9"/>
+          </a:solidFill>
+          <a:ln w="9525">
+            <a:solidFill>
+              <a:srgbClr val="E3E6EA"/>
+            </a:solidFill>
+          </a:ln>
+          <a:effectLst/>
+        </p:spPr>
+        <p:style>
+          <a:lnRef idx="1">
+            <a:schemeClr val="accent1"/>
+          </a:lnRef>
+          <a:fillRef idx="3">
+            <a:schemeClr val="accent1"/>
+          </a:fillRef>
+          <a:effectRef idx="2">
+            <a:schemeClr val="accent1"/>
+          </a:effectRef>
+          <a:fontRef idx="minor">
+            <a:schemeClr val="lt1"/>
+          </a:fontRef>
+        </p:style>
+        <p:txBody>
+          <a:bodyPr rtlCol="0" anchor="ctr" lIns="54864" rIns="54864" tIns="0" bIns="0"/>
+          <a:lstStyle/>
+          <a:p>
+            <a:r>
+              <a:rPr sz="900" b="1">
+                <a:solidFill>
+                  <a:srgbClr val="242C39"/>
+                </a:solidFill>
+              </a:rPr>
+              <a:t>Bright Teal   #3FD0C9   Logo green</a:t>
+            </a:r>
+          </a:p>
+        </p:txBody>
+      </p:sp>
+      <p:sp>
+        <p:nvSpPr>
+          <p:cNvPr id="28" name="Rounded Rectangle 27"/>
+          <p:cNvSpPr/>
+          <p:nvPr/>
+        </p:nvSpPr>
+        <p:spPr>
+          <a:xfrm>
+            <a:off x="9601200" y="1133856"/>
+            <a:ext cx="2103120" cy="384048"/>
+          </a:xfrm>
+          <a:prstGeom prst="roundRect">
+            <a:avLst/>
+          </a:prstGeom>
+          <a:solidFill>
+            <a:srgbClr val="005358"/>
+          </a:solidFill>
+          <a:ln w="9525">
+            <a:solidFill>
+              <a:srgbClr val="E3E6EA"/>
+            </a:solidFill>
+          </a:ln>
+          <a:effectLst/>
+        </p:spPr>
+        <p:style>
+          <a:lnRef idx="1">
+            <a:schemeClr val="accent1"/>
+          </a:lnRef>
+          <a:fillRef idx="3">
+            <a:schemeClr val="accent1"/>
+          </a:fillRef>
+          <a:effectRef idx="2">
+            <a:schemeClr val="accent1"/>
+          </a:effectRef>
+          <a:fontRef idx="minor">
+            <a:schemeClr val="lt1"/>
+          </a:fontRef>
+        </p:style>
+        <p:txBody>
+          <a:bodyPr rtlCol="0" anchor="ctr" lIns="54864" rIns="54864" tIns="0" bIns="0"/>
+          <a:lstStyle/>
+          <a:p>
+            <a:r>
+              <a:rPr sz="900" b="1">
+                <a:solidFill>
+                  <a:srgbClr val="FFFFFF"/>
+                </a:solidFill>
+              </a:rPr>
+              <a:t>Dark Teal   #005358   Production</a:t>
+            </a:r>
+          </a:p>
+        </p:txBody>
+      </p:sp>
+      <p:sp>
+        <p:nvSpPr>
+          <p:cNvPr id="29" name="Rounded Rectangle 28"/>
+          <p:cNvSpPr/>
+          <p:nvPr/>
+        </p:nvSpPr>
+        <p:spPr>
+          <a:xfrm>
+            <a:off x="9601200" y="1591056"/>
+            <a:ext cx="2103120" cy="384048"/>
+          </a:xfrm>
+          <a:prstGeom prst="roundRect">
+            <a:avLst/>
+          </a:prstGeom>
+          <a:solidFill>
+            <a:srgbClr val="6D71FF"/>
+          </a:solidFill>
+          <a:ln w="9525">
+            <a:solidFill>
+              <a:srgbClr val="E3E6EA"/>
+            </a:solidFill>
+          </a:ln>
+          <a:effectLst/>
+        </p:spPr>
+        <p:style>
+          <a:lnRef idx="1">
+            <a:schemeClr val="accent1"/>
+          </a:lnRef>
+          <a:fillRef idx="3">
+            <a:schemeClr val="accent1"/>
+          </a:fillRef>
+          <a:effectRef idx="2">
+            <a:schemeClr val="accent1"/>
+          </a:effectRef>
+          <a:fontRef idx="minor">
+            <a:schemeClr val="lt1"/>
+          </a:fontRef>
+        </p:style>
+        <p:txBody>
+          <a:bodyPr rtlCol="0" anchor="ctr" lIns="54864" rIns="54864" tIns="0" bIns="0"/>
+          <a:lstStyle/>
+          <a:p>
+            <a:r>
+              <a:rPr sz="900" b="1">
+                <a:solidFill>
+                  <a:srgbClr val="FFFFFF"/>
+                </a:solidFill>
+              </a:rPr>
+              <a:t>Primary Blue   #6D71FF   Logo blue</a:t>
+            </a:r>
+          </a:p>
+        </p:txBody>
+      </p:sp>
+      <p:sp>
+        <p:nvSpPr>
+          <p:cNvPr id="30" name="Rounded Rectangle 29"/>
+          <p:cNvSpPr/>
+          <p:nvPr/>
+        </p:nvSpPr>
+        <p:spPr>
+          <a:xfrm>
+            <a:off x="9601200" y="2048256"/>
+            <a:ext cx="2103120" cy="384048"/>
+          </a:xfrm>
+          <a:prstGeom prst="roundRect">
+            <a:avLst/>
+          </a:prstGeom>
+          <a:solidFill>
+            <a:srgbClr val="122B82"/>
+          </a:solidFill>
+          <a:ln w="9525">
+            <a:solidFill>
+              <a:srgbClr val="E3E6EA"/>
+            </a:solidFill>
+          </a:ln>
+          <a:effectLst/>
+        </p:spPr>
+        <p:style>
+          <a:lnRef idx="1">
+            <a:schemeClr val="accent1"/>
+          </a:lnRef>
+          <a:fillRef idx="3">
+            <a:schemeClr val="accent1"/>
+          </a:fillRef>
+          <a:effectRef idx="2">
+            <a:schemeClr val="accent1"/>
+          </a:effectRef>
+          <a:fontRef idx="minor">
+            <a:schemeClr val="lt1"/>
+          </a:fontRef>
+        </p:style>
+        <p:txBody>
+          <a:bodyPr rtlCol="0" anchor="ctr" lIns="54864" rIns="54864" tIns="0" bIns="0"/>
+          <a:lstStyle/>
+          <a:p>
+            <a:r>
+              <a:rPr sz="900" b="1">
+                <a:solidFill>
+                  <a:srgbClr val="FFFFFF"/>
+                </a:solidFill>
+              </a:rPr>
+              <a:t>Deep Blue   #122B82</a:t>
+            </a:r>
+          </a:p>
+        </p:txBody>
+      </p:sp>
+      <p:sp>
+        <p:nvSpPr>
+          <p:cNvPr id="31" name="Rounded Rectangle 30"/>
+          <p:cNvSpPr/>
+          <p:nvPr/>
+        </p:nvSpPr>
+        <p:spPr>
+          <a:xfrm>
+            <a:off x="9601200" y="2505456"/>
+            <a:ext cx="2103120" cy="384048"/>
+          </a:xfrm>
+          <a:prstGeom prst="roundRect">
+            <a:avLst/>
+          </a:prstGeom>
+          <a:solidFill>
+            <a:srgbClr val="F33844"/>
+          </a:solidFill>
+          <a:ln w="9525">
+            <a:solidFill>
+              <a:srgbClr val="E3E6EA"/>
+            </a:solidFill>
+          </a:ln>
+          <a:effectLst/>
+        </p:spPr>
+        <p:style>
+          <a:lnRef idx="1">
+            <a:schemeClr val="accent1"/>
+          </a:lnRef>
+          <a:fillRef idx="3">
+            <a:schemeClr val="accent1"/>
+          </a:fillRef>
+          <a:effectRef idx="2">
+            <a:schemeClr val="accent1"/>
+          </a:effectRef>
+          <a:fontRef idx="minor">
+            <a:schemeClr val="lt1"/>
+          </a:fontRef>
+        </p:style>
+        <p:txBody>
+          <a:bodyPr rtlCol="0" anchor="ctr" lIns="54864" rIns="54864" tIns="0" bIns="0"/>
+          <a:lstStyle/>
+          <a:p>
+            <a:r>
+              <a:rPr sz="900" b="1">
+                <a:solidFill>
+                  <a:srgbClr val="FFFFFF"/>
+                </a:solidFill>
+              </a:rPr>
+              <a:t>Accent Red   #F33844   Logo red, Support</a:t>
+            </a:r>
+          </a:p>
+        </p:txBody>
+      </p:sp>
+      <p:sp>
+        <p:nvSpPr>
+          <p:cNvPr id="32" name="Rounded Rectangle 31"/>
+          <p:cNvSpPr/>
+          <p:nvPr/>
+        </p:nvSpPr>
+        <p:spPr>
+          <a:xfrm>
+            <a:off x="9601200" y="2962656"/>
+            <a:ext cx="2103120" cy="384048"/>
+          </a:xfrm>
+          <a:prstGeom prst="roundRect">
+            <a:avLst/>
+          </a:prstGeom>
+          <a:solidFill>
+            <a:srgbClr val="A8052E"/>
+          </a:solidFill>
+          <a:ln w="9525">
+            <a:solidFill>
+              <a:srgbClr val="E3E6EA"/>
+            </a:solidFill>
+          </a:ln>
+          <a:effectLst/>
+        </p:spPr>
+        <p:style>
+          <a:lnRef idx="1">
+            <a:schemeClr val="accent1"/>
+          </a:lnRef>
+          <a:fillRef idx="3">
+            <a:schemeClr val="accent1"/>
+          </a:fillRef>
+          <a:effectRef idx="2">
+            <a:schemeClr val="accent1"/>
+          </a:effectRef>
+          <a:fontRef idx="minor">
+            <a:schemeClr val="lt1"/>
+          </a:fontRef>
+        </p:style>
+        <p:txBody>
+          <a:bodyPr rtlCol="0" anchor="ctr" lIns="54864" rIns="54864" tIns="0" bIns="0"/>
+          <a:lstStyle/>
+          <a:p>
+            <a:r>
+              <a:rPr sz="900" b="1">
+                <a:solidFill>
+                  <a:srgbClr val="FFFFFF"/>
+                </a:solidFill>
+              </a:rPr>
+              <a:t>Deep Red   #A8052E</a:t>
+            </a:r>
+          </a:p>
+        </p:txBody>
+      </p:sp>
+      <p:sp>
+        <p:nvSpPr>
+          <p:cNvPr id="33" name="Rounded Rectangle 32"/>
+          <p:cNvSpPr/>
+          <p:nvPr/>
+        </p:nvSpPr>
+        <p:spPr>
+          <a:xfrm>
+            <a:off x="9601200" y="3419856"/>
+            <a:ext cx="2103120" cy="384048"/>
+          </a:xfrm>
+          <a:prstGeom prst="roundRect">
+            <a:avLst/>
+          </a:prstGeom>
+          <a:solidFill>
+            <a:srgbClr val="8F4AFA"/>
+          </a:solidFill>
+          <a:ln w="9525">
+            <a:solidFill>
+              <a:srgbClr val="E3E6EA"/>
+            </a:solidFill>
+          </a:ln>
+          <a:effectLst/>
+        </p:spPr>
+        <p:style>
+          <a:lnRef idx="1">
+            <a:schemeClr val="accent1"/>
+          </a:lnRef>
+          <a:fillRef idx="3">
+            <a:schemeClr val="accent1"/>
+          </a:fillRef>
+          <a:effectRef idx="2">
+            <a:schemeClr val="accent1"/>
+          </a:effectRef>
+          <a:fontRef idx="minor">
+            <a:schemeClr val="lt1"/>
+          </a:fontRef>
+        </p:style>
+        <p:txBody>
+          <a:bodyPr rtlCol="0" anchor="ctr" lIns="54864" rIns="54864" tIns="0" bIns="0"/>
+          <a:lstStyle/>
+          <a:p>
+            <a:r>
+              <a:rPr sz="900" b="1">
+                <a:solidFill>
+                  <a:srgbClr val="FFFFFF"/>
+                </a:solidFill>
+              </a:rPr>
+              <a:t>Accent Purple   #8F4AFA   Consulting</a:t>
+            </a:r>
+          </a:p>
+        </p:txBody>
+      </p:sp>
+      <p:sp>
+        <p:nvSpPr>
+          <p:cNvPr id="34" name="Rounded Rectangle 33"/>
+          <p:cNvSpPr/>
+          <p:nvPr/>
+        </p:nvSpPr>
+        <p:spPr>
+          <a:xfrm>
+            <a:off x="9601200" y="3877056"/>
+            <a:ext cx="2103120" cy="384048"/>
+          </a:xfrm>
+          <a:prstGeom prst="roundRect">
+            <a:avLst/>
+          </a:prstGeom>
+          <a:solidFill>
+            <a:srgbClr val="242C39"/>
+          </a:solidFill>
+          <a:ln w="9525">
+            <a:solidFill>
+              <a:srgbClr val="E3E6EA"/>
+            </a:solidFill>
+          </a:ln>
+          <a:effectLst/>
+        </p:spPr>
+        <p:style>
+          <a:lnRef idx="1">
+            <a:schemeClr val="accent1"/>
+          </a:lnRef>
+          <a:fillRef idx="3">
+            <a:schemeClr val="accent1"/>
+          </a:fillRef>
+          <a:effectRef idx="2">
+            <a:schemeClr val="accent1"/>
+          </a:effectRef>
+          <a:fontRef idx="minor">
+            <a:schemeClr val="lt1"/>
+          </a:fontRef>
+        </p:style>
+        <p:txBody>
+          <a:bodyPr rtlCol="0" anchor="ctr" lIns="54864" rIns="54864" tIns="0" bIns="0"/>
+          <a:lstStyle/>
+          <a:p>
+            <a:r>
+              <a:rPr sz="900" b="1">
+                <a:solidFill>
+                  <a:srgbClr val="FFFFFF"/>
+                </a:solidFill>
+              </a:rPr>
+              <a:t>Charcoal   #242C39   Text</a:t>
+            </a:r>
+          </a:p>
+        </p:txBody>
+      </p:sp>
+      <p:sp>
+        <p:nvSpPr>
+          <p:cNvPr id="35" name="Rounded Rectangle 34"/>
+          <p:cNvSpPr/>
+          <p:nvPr/>
+        </p:nvSpPr>
+        <p:spPr>
+          <a:xfrm>
+            <a:off x="9601200" y="4334256"/>
+            <a:ext cx="2103120" cy="384048"/>
+          </a:xfrm>
+          <a:prstGeom prst="roundRect">
+            <a:avLst/>
+          </a:prstGeom>
+          <a:solidFill>
+            <a:srgbClr val="FFFFFF"/>
+          </a:solidFill>
+          <a:ln w="9525">
+            <a:solidFill>
+              <a:srgbClr val="E3E6EA"/>
+            </a:solidFill>
+          </a:ln>
+          <a:effectLst/>
+        </p:spPr>
+        <p:style>
+          <a:lnRef idx="1">
+            <a:schemeClr val="accent1"/>
+          </a:lnRef>
+          <a:fillRef idx="3">
+            <a:schemeClr val="accent1"/>
+          </a:fillRef>
+          <a:effectRef idx="2">
+            <a:schemeClr val="accent1"/>
+          </a:effectRef>
+          <a:fontRef idx="minor">
+            <a:schemeClr val="lt1"/>
+          </a:fontRef>
+        </p:style>
+        <p:txBody>
+          <a:bodyPr rtlCol="0" anchor="ctr" lIns="54864" rIns="54864" tIns="0" bIns="0"/>
+          <a:lstStyle/>
+          <a:p>
+            <a:r>
+              <a:rPr sz="900" b="1">
+                <a:solidFill>
+                  <a:srgbClr val="242C39"/>
+                </a:solidFill>
+              </a:rPr>
+              <a:t>White   #FFFFFF</a:t>
+            </a:r>
           </a:p>
         </p:txBody>
       </p:sp>

--- a/deck/CTS Monthly Business Review - September 2026.pptx
+++ b/deck/CTS Monthly Business Review - September 2026.pptx
@@ -2168,12 +2168,17 @@
           <a:p>
             <a:r>
               <a:rPr lang="en-US" dirty="0"/>
-              <a:t>The cost and profit half of the Summary tab.
-Cost of sales 374,130 against a budget of 289,192. The revenue beat came in at a margin the plan did not assume, and that is the whole variance story for the month.
-Gross profit 187,814 at 33.4%. Year to date 632,300 at 38.9% against a planned 45.7%.
-Overheads 230,233 against 231,573 budget, and flat across all three months at roughly 213,836. That is the number revenue has to clear.
-EBITDA (32,437) against (107,100) budgeted. Net profit (41,464) after depreciation and amortisation of 9,982.
-Year to date EBITDA 5,774 against 222,700. A full quarter of trading has produced roughly break even.</a:t>
+              <a:t>The risk in one slide: EBITDA against what was budgeted.
+The quarter produced 5,774 of EBITDA against a budget of 222,700. That is a miss of 216,927, or 97.4%.
+Why it matters more than the number suggests. The FY27 budget is 397,251 of EBITDA for the year, and it put 222,700 of that, 56%, into the first quarter. The year was planned to be earned early. It was not, so the remaining nine months now have to carry the whole thing.
+To still land on 397,251 the nine months from October must produce 391,477, which is 43,497 a month. The budget itself only asked those nine months for 174,551, or 19,395 a month. We would need 2.2 times the run rate the plan assumed, in the months the plan already treated as the quiet ones.
+Put it against last year and it is clearer. The whole of FY26 delivered 235,273 of EBITDA. The next nine months would need 391,477, which is 1.7 times a full year of last year's earnings. My view is that the full year EBITDA budget is not recoverable and the board should be told that now rather than at the half year.
+The cause is margin, not sales. Revenue for the quarter came in at 81.4% of budget, which is a respectable miss. Gross profit came in at 69.3% of budget. The gap between those two percentages is the whole problem: we sold reasonably well and converted it badly. September is the clearest example, where revenue beat budget by 148,280 and the month still lost 32,437 of EBITDA.
+Nothing in the cost base absorbs it. Overheads ran at 641,508 for the quarter, 213,836 a month, and came in 48,184 under budget. Cost control is not the problem and there is no further saving of any size: employment and premises are the cost base and both are fixed inside the year. So a margin miss drops straight to EBITDA.
+Where that leaves break even. At the 38.9% gross margin we actually deliver, the business needs 549,372 of revenue a month to cover overhead. We are running at 541,487. The business is trading at break even, not at a profit, and it is doing so in the quarter the budget expected to be the strongest.
+Two things make the next two quarters harder, not easier. December is budgeted at a loss because the business closes for two weeks, so Q2 cannot make the gap up. And with EBITDA at break even there is no earnings buffer, while 303,605 of cash sits in debtors above the 30 day target.
+The one piece of genuine good news: last year's first quarter was a loss of 85,404. This quarter is 91,178 better than that. The business is improving year on year. It is the budget that was set above what the business can deliver, and that is the distinction to draw in the room.
+What I am recommending. Reforecast now, on margin rather than revenue. Rebuild Consulting around the capacity that actually exists. Reset the gross margin assumption to the rate delivered over two years rather than the rate in the plan. Hold December as budgeted. And give the board a revised full year EBITDA they can rely on, because the one in front of them cannot be met.</a:t>
             </a:r>
             <a:endParaRPr lang="en-US" dirty="0"/>
           </a:p>
@@ -12909,7 +12914,7 @@
           <a:p>
             <a:pPr marL="342900" indent="-342900">
               <a:lnSpc>
-                <a:spcPts val="1300"/>
+                <a:spcPts val="1150"/>
               </a:lnSpc>
               <a:spcAft>
                 <a:spcPts val="500"/>
@@ -12918,19 +12923,19 @@
               <a:buChar char="•"/>
             </a:pPr>
             <a:r>
-              <a:rPr lang="en-US" sz="950" dirty="0">
+              <a:rPr lang="en-US" sz="900" dirty="0">
                 <a:solidFill>
                   <a:srgbClr val="3A4453"/>
                 </a:solidFill>
               </a:rPr>
-              <a:t>Cost of sales 374k against 289k budget. That is where the revenue beat went.</a:t>
-            </a:r>
-            <a:endParaRPr lang="en-US" sz="950" dirty="0"/>
+              <a:t>EBITDA is 6k for the quarter against 223k budgeted. A miss of 217k, or 97%.</a:t>
+            </a:r>
+            <a:endParaRPr lang="en-US" sz="900" dirty="0"/>
           </a:p>
           <a:p>
             <a:pPr marL="342900" indent="-342900">
               <a:lnSpc>
-                <a:spcPts val="1300"/>
+                <a:spcPts val="1150"/>
               </a:lnSpc>
               <a:spcAft>
                 <a:spcPts val="500"/>
@@ -12939,19 +12944,19 @@
               <a:buChar char="•"/>
             </a:pPr>
             <a:r>
-              <a:rPr lang="en-US" sz="950" dirty="0">
+              <a:rPr lang="en-US" sz="900" dirty="0">
                 <a:solidFill>
                   <a:srgbClr val="3A4453"/>
                 </a:solidFill>
               </a:rPr>
-              <a:t>Gross margin 33.4% for the month, 38.9% year to date, against a plan of 45.7%.</a:t>
-            </a:r>
-            <a:endParaRPr lang="en-US" sz="950" dirty="0"/>
+              <a:t>The plan put 56% of the year's profit in Q1. It was not earned, so the whole year now rests on the nine months left.</a:t>
+            </a:r>
+            <a:endParaRPr lang="en-US" sz="900" dirty="0"/>
           </a:p>
           <a:p>
             <a:pPr marL="342900" indent="-342900">
               <a:lnSpc>
-                <a:spcPts val="1300"/>
+                <a:spcPts val="1150"/>
               </a:lnSpc>
               <a:spcAft>
                 <a:spcPts val="500"/>
@@ -12960,19 +12965,19 @@
               <a:buChar char="•"/>
             </a:pPr>
             <a:r>
-              <a:rPr lang="en-US" sz="950" dirty="0">
+              <a:rPr lang="en-US" sz="900" dirty="0">
                 <a:solidFill>
                   <a:srgbClr val="3A4453"/>
                 </a:solidFill>
               </a:rPr>
-              <a:t>Overheads 230k, flat across the quarter at about 214k a month.</a:t>
-            </a:r>
-            <a:endParaRPr lang="en-US" sz="950" dirty="0"/>
+              <a:t>Those nine months must produce 391k to reach the 397k budget. The budget only ever asked them for 175k.</a:t>
+            </a:r>
+            <a:endParaRPr lang="en-US" sz="900" dirty="0"/>
           </a:p>
           <a:p>
             <a:pPr marL="342900" indent="-342900">
               <a:lnSpc>
-                <a:spcPts val="1300"/>
+                <a:spcPts val="1150"/>
               </a:lnSpc>
               <a:spcAft>
                 <a:spcPts val="500"/>
@@ -12981,19 +12986,19 @@
               <a:buChar char="•"/>
             </a:pPr>
             <a:r>
-              <a:rPr lang="en-US" sz="950" dirty="0">
+              <a:rPr lang="en-US" sz="900" dirty="0">
                 <a:solidFill>
                   <a:srgbClr val="3A4453"/>
                 </a:solidFill>
               </a:rPr>
-              <a:t>EBITDA (32)k. Net profit (41)k after 10k of depreciation and amortisation.</a:t>
-            </a:r>
-            <a:endParaRPr lang="en-US" sz="950" dirty="0"/>
+              <a:t>391k is 1.7 times the whole of last year, which delivered 235k. The full year number is not recoverable.</a:t>
+            </a:r>
+            <a:endParaRPr lang="en-US" sz="900" dirty="0"/>
           </a:p>
           <a:p>
             <a:pPr marL="342900" indent="-342900">
               <a:lnSpc>
-                <a:spcPts val="1300"/>
+                <a:spcPts val="1150"/>
               </a:lnSpc>
               <a:spcAft>
                 <a:spcPts val="500"/>
@@ -13002,14 +13007,14 @@
               <a:buChar char="•"/>
             </a:pPr>
             <a:r>
-              <a:rPr lang="en-US" sz="950" dirty="0">
+              <a:rPr lang="en-US" sz="900" dirty="0">
                 <a:solidFill>
                   <a:srgbClr val="3A4453"/>
                 </a:solidFill>
               </a:rPr>
-              <a:t>Year to date the business has traded a quarter and produced 6k of EBITDA against 223k planned.</a:t>
-            </a:r>
-            <a:endParaRPr lang="en-US" sz="950" dirty="0"/>
+              <a:t>The cause is margin, not sales. Revenue came in at 81% of budget and gross profit at only 69%.</a:t>
+            </a:r>
+            <a:endParaRPr lang="en-US" sz="900" dirty="0"/>
           </a:p>
         </p:txBody>
       </p:sp>

--- a/deck/CTS Monthly Business Review - September 2026.pptx
+++ b/deck/CTS Monthly Business Review - September 2026.pptx
@@ -3584,7 +3584,7 @@
                   <a:srgbClr val="3A4453"/>
                 </a:solidFill>
               </a:rPr>
-              <a:t>Direct labour (621)k and employment overhead (369)k together are the clear majority of cost.</a:t>
+              <a:t>Wages on jobs (621)k and wages off jobs (369)k are most of what we spend.</a:t>
             </a:r>
             <a:endParaRPr lang="en-US" sz="950" dirty="0"/>
           </a:p>
@@ -3626,7 +3626,7 @@
                   <a:srgbClr val="3A4453"/>
                 </a:solidFill>
               </a:rPr>
-              <a:t>Employment overhead at (369)k is fixed within the year. It does not flex when a month comes in short.</a:t>
+              <a:t>The (369)k of wages off jobs is fixed for the year. It does not drop when a month comes in short.</a:t>
             </a:r>
             <a:endParaRPr lang="en-US" sz="950" dirty="0"/>
           </a:p>
@@ -3647,7 +3647,7 @@
                   <a:srgbClr val="3A4453"/>
                 </a:solidFill>
               </a:rPr>
-              <a:t>Equipment and services (347)k is the only genuinely variable block.</a:t>
+              <a:t>Equipment and services at (347)k is the only cost that rises and falls with the work.</a:t>
             </a:r>
             <a:endParaRPr lang="en-US" sz="950" dirty="0"/>
           </a:p>
@@ -3668,7 +3668,7 @@
                   <a:srgbClr val="3A4453"/>
                 </a:solidFill>
               </a:rPr>
-              <a:t>Cost reduction means headcount or premises. There is no third lever of any size.</a:t>
+              <a:t>If we have to cut cost it is people or the office. Nothing else is big enough to matter.</a:t>
             </a:r>
             <a:endParaRPr lang="en-US" sz="950" dirty="0"/>
           </a:p>
@@ -4034,7 +4034,7 @@
                   <a:srgbClr val="3A4453"/>
                 </a:solidFill>
               </a:rPr>
-              <a:t>There is no saving of consequence in the tail. Do not spend management time there.</a:t>
+              <a:t>There is nothing worth saving further down the list. Do not spend management time there.</a:t>
             </a:r>
             <a:endParaRPr lang="en-US" sz="950" dirty="0"/>
           </a:p>
@@ -4055,7 +4055,7 @@
                   <a:srgbClr val="3A4453"/>
                 </a:solidFill>
               </a:rPr>
-              <a:t>Premises is the lever, and it is a lease decision, not a budget decision.</a:t>
+              <a:t>The office is the only real saving here, and that is a lease decision, not a budget one.</a:t>
             </a:r>
             <a:endParaRPr lang="en-US" sz="950" dirty="0"/>
           </a:p>
@@ -4400,7 +4400,7 @@
                   <a:srgbClr val="3A4453"/>
                 </a:solidFill>
               </a:rPr>
-              <a:t>Sub contract labour is the only line that flexes with volume.</a:t>
+              <a:t>Contractors are the only labour cost that goes up and down with the work.</a:t>
             </a:r>
             <a:endParaRPr lang="en-US" sz="950" dirty="0"/>
           </a:p>
@@ -4421,7 +4421,7 @@
                   <a:srgbClr val="3A4453"/>
                 </a:solidFill>
               </a:rPr>
-              <a:t>It rises when the permanent team runs out of capacity, so watch it against utilisation.</a:t>
+              <a:t>It rises when our own team runs out of hours, so watch it against the utilisation page.</a:t>
             </a:r>
             <a:endParaRPr lang="en-US" sz="950" dirty="0"/>
           </a:p>
@@ -5361,7 +5361,7 @@
                   <a:srgbClr val="3A4453"/>
                 </a:solidFill>
               </a:rPr>
-              <a:t>Deloitte Services at 401,755 is 24.7% of the year. Losing it costs more than the whole EBITDA plan.</a:t>
+              <a:t>Deloitte Services at 401,755 is 24.7% of the year. Losing them would wipe out more than the whole year's profit plan.</a:t>
             </a:r>
             <a:endParaRPr lang="en-US" sz="800" dirty="0"/>
           </a:p>
@@ -5425,7 +5425,7 @@
                   <a:srgbClr val="3A4453"/>
                 </a:solidFill>
               </a:rPr>
-              <a:t>Below the top five the book drops away fast. Number ten is 37,166.</a:t>
+              <a:t>After the top five the amounts fall away quickly. Number ten is only 37,166.</a:t>
             </a:r>
             <a:endParaRPr lang="en-US" sz="800" dirty="0"/>
           </a:p>
@@ -5723,14 +5723,14 @@
               <a:buChar char="•"/>
             </a:pPr>
             <a:r>
-              <a:rPr lang="en-US" sz="1000" dirty="0">
+              <a:rPr lang="en-US" sz="950" dirty="0">
                 <a:solidFill>
                   <a:srgbClr val="3A4453"/>
                 </a:solidFill>
               </a:rPr>
-              <a:t>DSO is 47.2 days against a 30 day target. That is 17.2 days of cash we are not holding.</a:t>
-            </a:r>
-            <a:endParaRPr lang="en-US" sz="1000" dirty="0"/>
+              <a:t>Customers take 47 days to pay us. The target is 30. That is 17 days of cash we are not holding.</a:t>
+            </a:r>
+            <a:endParaRPr lang="en-US" sz="950" dirty="0"/>
           </a:p>
           <a:p>
             <a:pPr marL="342900" indent="-342900">
@@ -5744,14 +5744,14 @@
               <a:buChar char="•"/>
             </a:pPr>
             <a:r>
-              <a:rPr lang="en-US" sz="1000" dirty="0">
+              <a:rPr lang="en-US" sz="950" dirty="0">
                 <a:solidFill>
                   <a:srgbClr val="3A4453"/>
                 </a:solidFill>
               </a:rPr>
-              <a:t>Every day of DSO is 17,657. Getting to target releases 303,605.</a:t>
-            </a:r>
-            <a:endParaRPr lang="en-US" sz="1000" dirty="0"/>
+              <a:t>Every day we shave off brings in 17,657. Getting to target frees up 303,605.</a:t>
+            </a:r>
+            <a:endParaRPr lang="en-US" sz="950" dirty="0"/>
           </a:p>
           <a:p>
             <a:pPr marL="342900" indent="-342900">
@@ -5765,14 +5765,14 @@
               <a:buChar char="•"/>
             </a:pPr>
             <a:r>
-              <a:rPr lang="en-US" sz="1000" dirty="0">
+              <a:rPr lang="en-US" sz="950" dirty="0">
                 <a:solidFill>
                   <a:srgbClr val="3A4453"/>
                 </a:solidFill>
               </a:rPr>
-              <a:t>29.3% of the book is overdue, 244,538.</a:t>
-            </a:r>
-            <a:endParaRPr lang="en-US" sz="1000" dirty="0"/>
+              <a:t>29% of what we are owed is already late, 244,538.</a:t>
+            </a:r>
+            <a:endParaRPr lang="en-US" sz="950" dirty="0"/>
           </a:p>
           <a:p>
             <a:pPr marL="342900" indent="-342900">
@@ -5786,14 +5786,14 @@
               <a:buChar char="•"/>
             </a:pPr>
             <a:r>
-              <a:rPr lang="en-US" sz="1000" dirty="0">
+              <a:rPr lang="en-US" sz="950" dirty="0">
                 <a:solidFill>
                   <a:srgbClr val="3A4453"/>
                 </a:solidFill>
               </a:rPr>
-              <a:t>Aware Super alone is 33.3% of receivables at 277,395.</a:t>
-            </a:r>
-            <a:endParaRPr lang="en-US" sz="1000" dirty="0"/>
+              <a:t>Aware Super alone owes 277,395, which is 33% of the total.</a:t>
+            </a:r>
+            <a:endParaRPr lang="en-US" sz="950" dirty="0"/>
           </a:p>
           <a:p>
             <a:pPr marL="342900" indent="-342900">
@@ -5807,14 +5807,14 @@
               <a:buChar char="•"/>
             </a:pPr>
             <a:r>
-              <a:rPr lang="en-US" sz="1000" dirty="0">
+              <a:rPr lang="en-US" sz="950" dirty="0">
                 <a:solidFill>
                   <a:srgbClr val="3A4453"/>
                 </a:solidFill>
               </a:rPr>
               <a:t>Chase the top two. Nothing else on this page moves the number.</a:t>
             </a:r>
-            <a:endParaRPr lang="en-US" sz="1000" dirty="0"/>
+            <a:endParaRPr lang="en-US" sz="950" dirty="0"/>
           </a:p>
         </p:txBody>
       </p:sp>
@@ -12527,7 +12527,7 @@
           <a:p>
             <a:pPr marL="342900" indent="-342900">
               <a:lnSpc>
-                <a:spcPts val="1300"/>
+                <a:spcPts val="1150"/>
               </a:lnSpc>
               <a:spcAft>
                 <a:spcPts val="500"/>
@@ -12536,19 +12536,19 @@
               <a:buChar char="•"/>
             </a:pPr>
             <a:r>
-              <a:rPr lang="en-US" sz="950" dirty="0">
+              <a:rPr lang="en-US" sz="900" dirty="0">
                 <a:solidFill>
                   <a:srgbClr val="3A4453"/>
                 </a:solidFill>
               </a:rPr>
-              <a:t>Break even needs 549k of revenue a month at our real margin of 38.9%. We are running at 541k.</a:t>
-            </a:r>
-            <a:endParaRPr lang="en-US" sz="950" dirty="0"/>
+              <a:t>We need 549k of sales a month just to cover our costs. We are averaging 541k.</a:t>
+            </a:r>
+            <a:endParaRPr lang="en-US" sz="900" dirty="0"/>
           </a:p>
           <a:p>
             <a:pPr marL="342900" indent="-342900">
               <a:lnSpc>
-                <a:spcPts val="1300"/>
+                <a:spcPts val="1150"/>
               </a:lnSpc>
               <a:spcAft>
                 <a:spcPts val="500"/>
@@ -12557,19 +12557,19 @@
               <a:buChar char="•"/>
             </a:pPr>
             <a:r>
-              <a:rPr lang="en-US" sz="950" dirty="0">
+              <a:rPr lang="en-US" sz="900" dirty="0">
                 <a:solidFill>
                   <a:srgbClr val="3A4453"/>
                 </a:solidFill>
               </a:rPr>
-              <a:t>Sep 26 beat revenue budget by 148k and still lost 32k of EBITDA. The miss is margin, not sales.</a:t>
-            </a:r>
-            <a:endParaRPr lang="en-US" sz="950" dirty="0"/>
+              <a:t>Sep 26 sold 148k more than planned and still lost 32k. We sold enough. We did not keep enough of it.</a:t>
+            </a:r>
+            <a:endParaRPr lang="en-US" sz="900" dirty="0"/>
           </a:p>
           <a:p>
             <a:pPr marL="342900" indent="-342900">
               <a:lnSpc>
-                <a:spcPts val="1300"/>
+                <a:spcPts val="1150"/>
               </a:lnSpc>
               <a:spcAft>
                 <a:spcPts val="500"/>
@@ -12578,19 +12578,19 @@
               <a:buChar char="•"/>
             </a:pPr>
             <a:r>
-              <a:rPr lang="en-US" sz="950" dirty="0">
+              <a:rPr lang="en-US" sz="900" dirty="0">
                 <a:solidFill>
                   <a:srgbClr val="3A4453"/>
                 </a:solidFill>
               </a:rPr>
-              <a:t>Gross margin 33.4% looks fine against a 30.1% budget, but last September was 45.5%.</a:t>
-            </a:r>
-            <a:endParaRPr lang="en-US" sz="950" dirty="0"/>
+              <a:t>We kept 33% of every dollar sold. The plan said 30%, but last September we kept 46%.</a:t>
+            </a:r>
+            <a:endParaRPr lang="en-US" sz="900" dirty="0"/>
           </a:p>
           <a:p>
             <a:pPr marL="342900" indent="-342900">
               <a:lnSpc>
-                <a:spcPts val="1300"/>
+                <a:spcPts val="1150"/>
               </a:lnSpc>
               <a:spcAft>
                 <a:spcPts val="500"/>
@@ -12599,19 +12599,19 @@
               <a:buChar char="•"/>
             </a:pPr>
             <a:r>
-              <a:rPr lang="en-US" sz="950" dirty="0">
+              <a:rPr lang="en-US" sz="900" dirty="0">
                 <a:solidFill>
                   <a:srgbClr val="3A4453"/>
                 </a:solidFill>
               </a:rPr>
-              <a:t>Overheads held at 230k against 232k budget. Cost control is not the issue.</a:t>
-            </a:r>
-            <a:endParaRPr lang="en-US" sz="950" dirty="0"/>
+              <a:t>Running costs came in at 230k against 232k planned. Spending is not the problem.</a:t>
+            </a:r>
+            <a:endParaRPr lang="en-US" sz="900" dirty="0"/>
           </a:p>
           <a:p>
             <a:pPr marL="342900" indent="-342900">
               <a:lnSpc>
-                <a:spcPts val="1300"/>
+                <a:spcPts val="1150"/>
               </a:lnSpc>
               <a:spcAft>
                 <a:spcPts val="500"/>
@@ -12620,14 +12620,14 @@
               <a:buChar char="•"/>
             </a:pPr>
             <a:r>
-              <a:rPr lang="en-US" sz="950" dirty="0">
+              <a:rPr lang="en-US" sz="900" dirty="0">
                 <a:solidFill>
                   <a:srgbClr val="3A4453"/>
                 </a:solidFill>
               </a:rPr>
-              <a:t>Year to date EBITDA is 6k against 223k planned. Reforecast on margin.</a:t>
-            </a:r>
-            <a:endParaRPr lang="en-US" sz="950" dirty="0"/>
+              <a:t>Profit for the quarter is 6k against 223k planned. The plan needs redoing around what we keep, not what we sell.</a:t>
+            </a:r>
+            <a:endParaRPr lang="en-US" sz="900" dirty="0"/>
           </a:p>
         </p:txBody>
       </p:sp>
@@ -12914,7 +12914,7 @@
           <a:p>
             <a:pPr marL="342900" indent="-342900">
               <a:lnSpc>
-                <a:spcPts val="1150"/>
+                <a:spcPts val="1100"/>
               </a:lnSpc>
               <a:spcAft>
                 <a:spcPts val="500"/>
@@ -12923,19 +12923,19 @@
               <a:buChar char="•"/>
             </a:pPr>
             <a:r>
-              <a:rPr lang="en-US" sz="900" dirty="0">
+              <a:rPr lang="en-US" sz="850" dirty="0">
                 <a:solidFill>
                   <a:srgbClr val="3A4453"/>
                 </a:solidFill>
               </a:rPr>
-              <a:t>EBITDA is 6k for the quarter against 223k budgeted. A miss of 217k, or 97%.</a:t>
-            </a:r>
-            <a:endParaRPr lang="en-US" sz="900" dirty="0"/>
+              <a:t>Operating profit, or EBITDA, is 6k for the quarter against 223k planned. We are 217k short, which is 97% of it.</a:t>
+            </a:r>
+            <a:endParaRPr lang="en-US" sz="850" dirty="0"/>
           </a:p>
           <a:p>
             <a:pPr marL="342900" indent="-342900">
               <a:lnSpc>
-                <a:spcPts val="1150"/>
+                <a:spcPts val="1100"/>
               </a:lnSpc>
               <a:spcAft>
                 <a:spcPts val="500"/>
@@ -12944,19 +12944,19 @@
               <a:buChar char="•"/>
             </a:pPr>
             <a:r>
-              <a:rPr lang="en-US" sz="900" dirty="0">
+              <a:rPr lang="en-US" sz="850" dirty="0">
                 <a:solidFill>
                   <a:srgbClr val="3A4453"/>
                 </a:solidFill>
               </a:rPr>
-              <a:t>The plan put 56% of the year's profit in Q1. It was not earned, so the whole year now rests on the nine months left.</a:t>
-            </a:r>
-            <a:endParaRPr lang="en-US" sz="900" dirty="0"/>
+              <a:t>The plan expected 56% of the year's profit in these first three months. It did not happen, so the whole year now rides on the nine months left.</a:t>
+            </a:r>
+            <a:endParaRPr lang="en-US" sz="850" dirty="0"/>
           </a:p>
           <a:p>
             <a:pPr marL="342900" indent="-342900">
               <a:lnSpc>
-                <a:spcPts val="1150"/>
+                <a:spcPts val="1100"/>
               </a:lnSpc>
               <a:spcAft>
                 <a:spcPts val="500"/>
@@ -12965,19 +12965,19 @@
               <a:buChar char="•"/>
             </a:pPr>
             <a:r>
-              <a:rPr lang="en-US" sz="900" dirty="0">
+              <a:rPr lang="en-US" sz="850" dirty="0">
                 <a:solidFill>
                   <a:srgbClr val="3A4453"/>
                 </a:solidFill>
               </a:rPr>
-              <a:t>Those nine months must produce 391k to reach the 397k budget. The budget only ever asked them for 175k.</a:t>
-            </a:r>
-            <a:endParaRPr lang="en-US" sz="900" dirty="0"/>
+              <a:t>To still hit the 397k target those nine months have to make 391k. The plan only ever asked them for 175k.</a:t>
+            </a:r>
+            <a:endParaRPr lang="en-US" sz="850" dirty="0"/>
           </a:p>
           <a:p>
             <a:pPr marL="342900" indent="-342900">
               <a:lnSpc>
-                <a:spcPts val="1150"/>
+                <a:spcPts val="1100"/>
               </a:lnSpc>
               <a:spcAft>
                 <a:spcPts val="500"/>
@@ -12986,19 +12986,19 @@
               <a:buChar char="•"/>
             </a:pPr>
             <a:r>
-              <a:rPr lang="en-US" sz="900" dirty="0">
+              <a:rPr lang="en-US" sz="850" dirty="0">
                 <a:solidFill>
                   <a:srgbClr val="3A4453"/>
                 </a:solidFill>
               </a:rPr>
-              <a:t>391k is 1.7 times the whole of last year, which delivered 235k. The full year number is not recoverable.</a:t>
-            </a:r>
-            <a:endParaRPr lang="en-US" sz="900" dirty="0"/>
+              <a:t>391k is 1.7 times what the whole of last year made, which was 235k. We will not get the year back.</a:t>
+            </a:r>
+            <a:endParaRPr lang="en-US" sz="850" dirty="0"/>
           </a:p>
           <a:p>
             <a:pPr marL="342900" indent="-342900">
               <a:lnSpc>
-                <a:spcPts val="1150"/>
+                <a:spcPts val="1100"/>
               </a:lnSpc>
               <a:spcAft>
                 <a:spcPts val="500"/>
@@ -13007,14 +13007,14 @@
               <a:buChar char="•"/>
             </a:pPr>
             <a:r>
-              <a:rPr lang="en-US" sz="900" dirty="0">
+              <a:rPr lang="en-US" sz="850" dirty="0">
                 <a:solidFill>
                   <a:srgbClr val="3A4453"/>
                 </a:solidFill>
               </a:rPr>
-              <a:t>The cause is margin, not sales. Revenue came in at 81% of budget and gross profit at only 69%.</a:t>
-            </a:r>
-            <a:endParaRPr lang="en-US" sz="900" dirty="0"/>
+              <a:t>The problem is what we keep, not what we sell. Sales hit 81% of plan. What was left after direct costs hit only 69%.</a:t>
+            </a:r>
+            <a:endParaRPr lang="en-US" sz="850" dirty="0"/>
           </a:p>
         </p:txBody>
       </p:sp>
@@ -13313,7 +13313,7 @@
                   <a:srgbClr val="3A4453"/>
                 </a:solidFill>
               </a:rPr>
-              <a:t>Only Support covers its overhead. It returned 29k on 243k of revenue.</a:t>
+              <a:t>Support is the only department earning enough to cover its share of running costs. It made 29k on 243k of sales.</a:t>
             </a:r>
             <a:endParaRPr lang="en-US" sz="800" dirty="0"/>
           </a:p>
@@ -13334,7 +13334,7 @@
                   <a:srgbClr val="3A4453"/>
                 </a:solidFill>
               </a:rPr>
-              <a:t>Events carries 111k of overhead on 73k of revenue, so 77.6% margin still loses 54k.</a:t>
+              <a:t>Events is charged 111k of running costs and only billed 73k. It keeps 78% of what it sells and still loses 54k.</a:t>
             </a:r>
             <a:endParaRPr lang="en-US" sz="800" dirty="0"/>
           </a:p>
@@ -13377,7 +13377,7 @@
                   <a:srgbClr val="3A4453"/>
                 </a:solidFill>
               </a:rPr>
-              <a:t>Integration booked 235k against 59k budget, but at 10.1% margin returned only 10k.</a:t>
+              <a:t>Integration billed 235k against a 59k plan but keeps only 10% of it, so it made just 10k.</a:t>
             </a:r>
             <a:endParaRPr lang="en-US" sz="800" dirty="0"/>
           </a:p>
@@ -13398,7 +13398,7 @@
                   <a:srgbClr val="3A4453"/>
                 </a:solidFill>
               </a:rPr>
-              <a:t>Consulting holds 20k of overhead on a 4k fee base. That needs a decision, not a forecast.</a:t>
+              <a:t>Consulting is charged 20k of running costs and billed 4k. That needs a decision, not a forecast.</a:t>
             </a:r>
             <a:endParaRPr lang="en-US" sz="800" dirty="0"/>
           </a:p>
@@ -13687,7 +13687,7 @@
           <a:p>
             <a:pPr marL="342900" indent="-342900">
               <a:lnSpc>
-                <a:spcPts val="1300"/>
+                <a:spcPts val="1150"/>
               </a:lnSpc>
               <a:spcAft>
                 <a:spcPts val="500"/>
@@ -13696,19 +13696,19 @@
               <a:buChar char="•"/>
             </a:pPr>
             <a:r>
-              <a:rPr lang="en-US" sz="950" dirty="0">
+              <a:rPr lang="en-US" sz="900" dirty="0">
                 <a:solidFill>
                   <a:srgbClr val="3A4453"/>
                 </a:solidFill>
               </a:rPr>
-              <a:t>Integration booked 235k against a 59k budget. One fit-out, not a run rate.</a:t>
-            </a:r>
-            <a:endParaRPr lang="en-US" sz="950" dirty="0"/>
+              <a:t>Integration billed 235k against a 59k plan. Nearly all of it was one big installation job, now finished, so next month drops back.</a:t>
+            </a:r>
+            <a:endParaRPr lang="en-US" sz="900" dirty="0"/>
           </a:p>
           <a:p>
             <a:pPr marL="342900" indent="-342900">
               <a:lnSpc>
-                <a:spcPts val="1300"/>
+                <a:spcPts val="1150"/>
               </a:lnSpc>
               <a:spcAft>
                 <a:spcPts val="500"/>
@@ -13717,19 +13717,19 @@
               <a:buChar char="•"/>
             </a:pPr>
             <a:r>
-              <a:rPr lang="en-US" sz="950" dirty="0">
+              <a:rPr lang="en-US" sz="900" dirty="0">
                 <a:solidFill>
                   <a:srgbClr val="3A4453"/>
                 </a:solidFill>
               </a:rPr>
-              <a:t>Support delivered 243k against 248k. On plan, as contract income should be.</a:t>
-            </a:r>
-            <a:endParaRPr lang="en-US" sz="950" dirty="0"/>
+              <a:t>Support billed 243k against 248k. On plan, which is what fixed monthly contracts should do.</a:t>
+            </a:r>
+            <a:endParaRPr lang="en-US" sz="900" dirty="0"/>
           </a:p>
           <a:p>
             <a:pPr marL="342900" indent="-342900">
               <a:lnSpc>
-                <a:spcPts val="1300"/>
+                <a:spcPts val="1150"/>
               </a:lnSpc>
               <a:spcAft>
                 <a:spcPts val="500"/>
@@ -13738,19 +13738,19 @@
               <a:buChar char="•"/>
             </a:pPr>
             <a:r>
-              <a:rPr lang="en-US" sz="950" dirty="0">
+              <a:rPr lang="en-US" sz="900" dirty="0">
                 <a:solidFill>
                   <a:srgbClr val="3A4453"/>
                 </a:solidFill>
               </a:rPr>
-              <a:t>Events at 73k beat a 66k budget, in a quiet month either side of results season.</a:t>
-            </a:r>
-            <a:endParaRPr lang="en-US" sz="950" dirty="0"/>
+              <a:t>Events billed 73k against 66k, in a month that sits between the busy results periods.</a:t>
+            </a:r>
+            <a:endParaRPr lang="en-US" sz="900" dirty="0"/>
           </a:p>
           <a:p>
             <a:pPr marL="342900" indent="-342900">
               <a:lnSpc>
-                <a:spcPts val="1300"/>
+                <a:spcPts val="1150"/>
               </a:lnSpc>
               <a:spcAft>
                 <a:spcPts val="500"/>
@@ -13759,19 +13759,19 @@
               <a:buChar char="•"/>
             </a:pPr>
             <a:r>
-              <a:rPr lang="en-US" sz="950" dirty="0">
+              <a:rPr lang="en-US" sz="900" dirty="0">
                 <a:solidFill>
                   <a:srgbClr val="3A4453"/>
                 </a:solidFill>
               </a:rPr>
-              <a:t>Video 7k against 17k and Consulting 4k against 23k. Both structurally short.</a:t>
-            </a:r>
-            <a:endParaRPr lang="en-US" sz="950" dirty="0"/>
+              <a:t>Video billed 7k against 17k and Consulting 4k against 23k. Both have been short every month this year.</a:t>
+            </a:r>
+            <a:endParaRPr lang="en-US" sz="900" dirty="0"/>
           </a:p>
           <a:p>
             <a:pPr marL="342900" indent="-342900">
               <a:lnSpc>
-                <a:spcPts val="1300"/>
+                <a:spcPts val="1150"/>
               </a:lnSpc>
               <a:spcAft>
                 <a:spcPts val="500"/>
@@ -13780,14 +13780,14 @@
               <a:buChar char="•"/>
             </a:pPr>
             <a:r>
-              <a:rPr lang="en-US" sz="950" dirty="0">
+              <a:rPr lang="en-US" sz="900" dirty="0">
                 <a:solidFill>
                   <a:srgbClr val="3A4453"/>
                 </a:solidFill>
               </a:rPr>
-              <a:t>Company revenue is 58% up on last September. The growth is real, the margin on it is not.</a:t>
-            </a:r>
-            <a:endParaRPr lang="en-US" sz="950" dirty="0"/>
+              <a:t>Company sales are 58% up on last September. We are selling more than last year and keeping less of it.</a:t>
+            </a:r>
+            <a:endParaRPr lang="en-US" sz="900" dirty="0"/>
           </a:p>
         </p:txBody>
       </p:sp>

--- a/deck/CTS Monthly Business Review - September 2026.pptx
+++ b/deck/CTS Monthly Business Review - September 2026.pptx
@@ -615,8 +615,8 @@
               <a:rPr lang="en-US" dirty="0"/>
               <a:t>Operating cost distribution for the year to date, cost of sales and overhead on one scale.
 Cost of sales, labour 620,737 at 38.0%. Cost of sales, equipment &amp; services 347,307 at 21.3%. Cost of sales, other direct 24,117 at 1.5%. Overhead, General &amp; Administrative Exp 75,700 at 4.6%. Overhead, Business Insurances 25,227 at 1.5%. Overhead, Advertising &amp; Promotion Exp 34,119 at 2.1%. Overhead, Operating Expenses 136,752 at 8.4%. Overhead, Employment Expenses 369,466 at 22.6%.
-The message is concentration. Direct labour and employment overhead dominate, and employment overhead is fixed inside the year, which is why a short revenue month drops straight to the bottom line.
-When the board asks what we can cut, the honest answer is people or premises. Trimming subscriptions and travel will not change the shape of this.</a:t>
+The message is how concentrated it is. Wages for people on jobs and wages for everyone else are the bulk of it, and the second group is fixed for the year, which is why a quiet month drops straight off the profit.
+When the board asks what we can cut, the honest answer is staff numbers or the office. Trimming subscriptions and travel will not change this.</a:t>
             </a:r>
             <a:endParaRPr lang="en-US" dirty="0"/>
           </a:p>
@@ -706,8 +706,8 @@
               <a:rPr lang="en-US" dirty="0"/>
               <a:t>Other operating expenses, year to date.
 Rent 62,043 at 45.4%. IT Network Service &amp; Support 39,570 at 28.9%. Rental Outgoings 14,684 at 10.7%. Travel &amp; Per Diems 5,627 at 4.1%. Stamp Duty (Indirect) 3,455 at 2.5%. Repairs &amp; Maintenance 2,079 at 1.5%. Office Cleaning 2,079 at 1.5%. Mobile Phones 1,825 at 1.3%. Everything else 5,390 at 3.9%.
-Rent and rental outgoings are fixed by lease. IT network service and support is the second line and the only one that moves.
-The practical conclusion is that this block is not where cost comes out. Reducing operating expense materially is a premises conversation.</a:t>
+Rent and outgoings are fixed by the lease. IT support is the next largest and the only one that moves.
+The practical conclusion is that savings do not come from here. Cutting this meaningfully means talking about the office lease.</a:t>
             </a:r>
             <a:endParaRPr lang="en-US" dirty="0"/>
           </a:p>
@@ -797,7 +797,7 @@
               <a:rPr lang="en-US" dirty="0"/>
               <a:t>Labour mix for the year to date, direct labour charged to cost of sales split by type.
 Sub-Contract Labour 117,012. Service - hires 23,704. Direct Salaries 314,763. Direct Wages 111,018. Direct Superannuation 54,240.
-The great majority is permanent payroll. Sub contract labour is the only line that flexes with volume.
+The great majority is permanent payroll. Contractors are the only labour cost that rises and falls with the work.
 This is the link to the utilisation section. We pay for hours worked and we bill for hours that are chargeable. Where those two diverge, margin goes with it.</a:t>
             </a:r>
             <a:endParaRPr lang="en-US" dirty="0"/>
@@ -1078,7 +1078,7 @@
 9. Data#3: 45,909 year to date at 2.8%, 0 in September 2026.
 10. Generation-e Productivity…: 37,166 year to date at 2.3%, 12,389 in September 2026.
 The top ten are 1,240,100 or 76.3% of revenue. Everyone else is 384,360.
-The concentration is getting worse, not better, and the distinction that matters is contract against project. Deloitte Services is contracted support income that renews. Aware Super is a fit-out that completes. Treating them as the same kind of revenue is how a forecast goes wrong.
+The reliance on a handful of customers is getting worse, not better, and the difference that matters is contract work against one-off projects. Deloitte Services is contracted support income that renews. Aware Super is a fit-out that completes. Treating them as the same kind of revenue is how a forecast goes wrong.
 The recommendation is a retention plan with a named owner for the top three, and a growth target set on the second ten rather than the first.</a:t>
             </a:r>
             <a:endParaRPr lang="en-US" dirty="0"/>
@@ -1168,7 +1168,7 @@
             <a:r>
               <a:rPr lang="en-US" dirty="0"/>
               <a:t>Receivables and days sales outstanding at 30 September 2026.
-Trade receivables 833,320. DSO 47.2 days against a target of 30. At target the book would be 529,715, so 303,605 of cash is tied up above where it should be.
+Trade receivables 833,320. DSO 47.2 days against a target of 30. At target we would be owed 529,715, so 303,605 of cash is sitting in the debtor book that should be in the bank.
 Ageing: Current 588,782 at 70.7%, Under 1 month 133,177 at 16.0%, 1 month 86,553 at 10.4%, 3 months 24,809 at 3.0%. Overdue in total 244,538 or 29.3%.
 Largest debtors: Aware Super at 277,395, Deloitte Services P/L for Deloitte Services Trust at 131,575, Ventia at 94,701.
 The action is narrow. Two customers hold the majority of the overdue balance, so a targeted chase on those two is worth more than a general collections push, and it is the fastest cash available this quarter.</a:t>
@@ -1532,7 +1532,7 @@
           <a:p>
             <a:r>
               <a:rPr lang="en-US" dirty="0"/>
-              <a:t>Five sections. Financial performance first, because that is what the numbers say. Cost base second, because that is where the answer is this month. Then customers and cash, then people, then what we do about the budget.</a:t>
+              <a:t>Five sections. Financial performance first, because that is what the numbers say. What we spend second, because that is where the answer is this month. Then customers and cash, then people, then what we do about the budget.</a:t>
             </a:r>
             <a:endParaRPr lang="en-US" dirty="0"/>
           </a:p>
@@ -1714,7 +1714,7 @@
               <a:rPr lang="en-US" dirty="0"/>
               <a:t>Seven actions, each with an owner and a date.
 The first two matter most: reforecasting on margin rather than revenue, and testing the overhead keys. Everything else in this pack follows from those two numbers.
-The Consulting decision cannot keep being deferred; it has carried overhead against no fee base for three months.
+The Consulting decision cannot keep being deferred; it has carried running costs against almost no fees for three months.
 The cash action is the only one that produces money this quarter, and the utilisation action is the largest controllable item.</a:t>
             </a:r>
             <a:endParaRPr lang="en-US" dirty="0"/>
@@ -2077,7 +2077,7 @@
               <a:t>P&amp;L summary, straight off the Summary tab with the outline shut, so this is the view on screen.
 Revenue 561,945 against a budget of 413,665, ahead by 148,280. Against last September at 356,323 we are up 58%.
 Gross profit 187,814 at 33.4%, against a budget of 30.1% and last September at 45.5%. The budget margin for this month was unusually low, so beating it is not the achievement it looks like.
-Overheads 230,233 against 231,573 budget. The cost base is behaving.
+Overheads 230,233 against 231,573 budget. Spending is behaving.
 EBITDA (32,437) against a budgeted (107,100). Net profit (41,464) after depreciation and amortisation of 9,982.
 Year to date revenue 1,624,460 against 1,996,110, behind by 371,650. EBITDA 5,774 against 222,700.
 The line to leave in the room: at 38.9% gross margin we need 549,372 of revenue every month to cover overhead. We are averaging 541,487. That gap is structural and selling more at this margin will not close it.</a:t>
@@ -2171,10 +2171,10 @@
               <a:t>The risk in one slide: EBITDA against what was budgeted.
 The quarter produced 5,774 of EBITDA against a budget of 222,700. That is a miss of 216,927, or 97.4%.
 Why it matters more than the number suggests. The FY27 budget is 397,251 of EBITDA for the year, and it put 222,700 of that, 56%, into the first quarter. The year was planned to be earned early. It was not, so the remaining nine months now have to carry the whole thing.
-To still land on 397,251 the nine months from October must produce 391,477, which is 43,497 a month. The budget itself only asked those nine months for 174,551, or 19,395 a month. We would need 2.2 times the run rate the plan assumed, in the months the plan already treated as the quiet ones.
+To still land on 397,251 the nine months from October must produce 391,477, which is 43,497 a month. The budget itself only asked those nine months for 174,551, or 19,395 a month. We would need 2.2 times the monthly profit the plan assumed, in the months the plan already treated as the quiet ones.
 Put it against last year and it is clearer. The whole of FY26 delivered 235,273 of EBITDA. The next nine months would need 391,477, which is 1.7 times a full year of last year's earnings. My view is that the full year EBITDA budget is not recoverable and the board should be told that now rather than at the half year.
-The cause is margin, not sales. Revenue for the quarter came in at 81.4% of budget, which is a respectable miss. Gross profit came in at 69.3% of budget. The gap between those two percentages is the whole problem: we sold reasonably well and converted it badly. September is the clearest example, where revenue beat budget by 148,280 and the month still lost 32,437 of EBITDA.
-Nothing in the cost base absorbs it. Overheads ran at 641,508 for the quarter, 213,836 a month, and came in 48,184 under budget. Cost control is not the problem and there is no further saving of any size: employment and premises are the cost base and both are fixed inside the year. So a margin miss drops straight to EBITDA.
+The cause is margin, not sales. Revenue for the quarter came in at 81.4% of budget, which is not a bad result on its own. Gross profit came in at 69.3% of budget. The gap between those two percentages is the whole problem: we sold reasonably well and kept very little of it. September is the clearest example, where revenue beat budget by 148,280 and the month still lost 32,437 of EBITDA.
+Nothing in what we spend can soak that up. Overheads ran at 641,508 for the quarter, 213,836 a month, and came in 48,184 under budget. Spending is not the problem and there is nothing more to cut that would matter. Wages and the office are what we spend, and both are locked in for the year. So when we keep less of each sale it goes straight off the profit.
 Where that leaves break even. At the 38.9% gross margin we actually deliver, the business needs 549,372 of revenue a month to cover overhead. We are running at 541,487. The business is trading at break even, not at a profit, and it is doing so in the quarter the budget expected to be the strongest.
 Two things make the next two quarters harder, not easier. December is budgeted at a loss because the business closes for two weeks, so Q2 cannot make the gap up. And with EBITDA at break even there is no earnings buffer, while 303,605 of cash sits in debtors above the 30 day target.
 The one piece of genuine good news: last year's first quarter was a loss of 85,404. This quarter is 91,178 better than that. The business is improving year on year. It is the budget that was set above what the business can deliver, and that is the distinction to draw in the room.
@@ -2273,7 +2273,7 @@
 Integration: revenue 234,858 against 59,272 budget. Gross profit 23,756 at 10.1%. Overhead 13,285, of which 4,148 is allocated admin. Result 10,471.
 Consulting: revenue 3,531 against 23,050 budget. Gross profit 74 at 2.1%. Overhead 19,944, of which 13,979 is allocated admin. Result (19,870).
 The five departments total (41,464), which is net profit for the month.
-Two things to flag. Integration's 175,586 beat on revenue converted to almost nothing, because the margin was 10.1% on equipment resale. And Events absorbs 71,672 of allocated admin on 73,304 of revenue, charged on the premises key, when Events is not the department consuming the premises.</a:t>
+Two things to flag. Integration sold 175,586 more than planned and it turned into almost no profit, because we keep only 10.1% on reselling equipment. And Events is charged 71,672 of office costs on 73,304 of sales. That charge is split on who uses the office, and Events is not the department sitting in it.</a:t>
             </a:r>
             <a:endParaRPr lang="en-US" dirty="0"/>
           </a:p>
@@ -2456,7 +2456,7 @@
           <a:p>
             <a:r>
               <a:rPr lang="en-US" dirty="0"/>
-              <a:t>Overheads are steady at about 214 thousand a month. The cost base is not the problem this month, but it is the number revenue has to clear.</a:t>
+              <a:t>Running costs are steady at about 214 thousand a month. Spending is not the problem, but that is the number sales have to beat.</a:t>
             </a:r>
             <a:endParaRPr lang="en-US" dirty="0"/>
           </a:p>
@@ -3290,7 +3290,7 @@
                   <a:srgbClr val="E3E6EA"/>
                 </a:solidFill>
               </a:rPr>
-              <a:t>Results, departments, cost base, customers, cash and utilisation</a:t>
+              <a:t>Results, departments, spending, customers, cash and utilisation</a:t>
             </a:r>
             <a:endParaRPr lang="en-US" sz="1300" dirty="0"/>
           </a:p>
@@ -3387,7 +3387,7 @@
                   <a:srgbClr val="122B82"/>
                 </a:solidFill>
               </a:rPr>
-              <a:t>COST BASE</a:t>
+              <a:t>WHAT WE SPEND</a:t>
             </a:r>
             <a:endParaRPr lang="en-US" sz="950" dirty="0"/>
           </a:p>
@@ -3570,7 +3570,7 @@
           <a:p>
             <a:pPr marL="342900" indent="-342900">
               <a:lnSpc>
-                <a:spcPts val="1300"/>
+                <a:spcPts val="1150"/>
               </a:lnSpc>
               <a:spcAft>
                 <a:spcPts val="500"/>
@@ -3579,19 +3579,19 @@
               <a:buChar char="•"/>
             </a:pPr>
             <a:r>
-              <a:rPr lang="en-US" sz="950" dirty="0">
+              <a:rPr lang="en-US" sz="900" dirty="0">
                 <a:solidFill>
                   <a:srgbClr val="3A4453"/>
                 </a:solidFill>
               </a:rPr>
-              <a:t>Wages on jobs (621)k and wages off jobs (369)k are most of what we spend.</a:t>
-            </a:r>
-            <a:endParaRPr lang="en-US" sz="950" dirty="0"/>
+              <a:t>Wages for people on jobs (621)k, and wages for everyone else (369)k. Together that is most of what we spend.</a:t>
+            </a:r>
+            <a:endParaRPr lang="en-US" sz="900" dirty="0"/>
           </a:p>
           <a:p>
             <a:pPr marL="342900" indent="-342900">
               <a:lnSpc>
-                <a:spcPts val="1300"/>
+                <a:spcPts val="1150"/>
               </a:lnSpc>
               <a:spcAft>
                 <a:spcPts val="500"/>
@@ -3600,19 +3600,19 @@
               <a:buChar char="•"/>
             </a:pPr>
             <a:r>
-              <a:rPr lang="en-US" sz="950" dirty="0">
+              <a:rPr lang="en-US" sz="900" dirty="0">
                 <a:solidFill>
                   <a:srgbClr val="3A4453"/>
                 </a:solidFill>
               </a:rPr>
-              <a:t>People are the cost base. Everything else is rounding by comparison.</a:t>
-            </a:r>
-            <a:endParaRPr lang="en-US" sz="950" dirty="0"/>
+              <a:t>Wages are what this business spends its money on. Everything else is small next to them.</a:t>
+            </a:r>
+            <a:endParaRPr lang="en-US" sz="900" dirty="0"/>
           </a:p>
           <a:p>
             <a:pPr marL="342900" indent="-342900">
               <a:lnSpc>
-                <a:spcPts val="1300"/>
+                <a:spcPts val="1150"/>
               </a:lnSpc>
               <a:spcAft>
                 <a:spcPts val="500"/>
@@ -3621,19 +3621,19 @@
               <a:buChar char="•"/>
             </a:pPr>
             <a:r>
-              <a:rPr lang="en-US" sz="950" dirty="0">
+              <a:rPr lang="en-US" sz="900" dirty="0">
                 <a:solidFill>
                   <a:srgbClr val="3A4453"/>
                 </a:solidFill>
               </a:rPr>
-              <a:t>The (369)k of wages off jobs is fixed for the year. It does not drop when a month comes in short.</a:t>
-            </a:r>
-            <a:endParaRPr lang="en-US" sz="950" dirty="0"/>
+              <a:t>The (369)k of wages for people not on jobs is the same every month. When sales drop this does not, so a bad month lands straight on the profit.</a:t>
+            </a:r>
+            <a:endParaRPr lang="en-US" sz="900" dirty="0"/>
           </a:p>
           <a:p>
             <a:pPr marL="342900" indent="-342900">
               <a:lnSpc>
-                <a:spcPts val="1300"/>
+                <a:spcPts val="1150"/>
               </a:lnSpc>
               <a:spcAft>
                 <a:spcPts val="500"/>
@@ -3642,19 +3642,19 @@
               <a:buChar char="•"/>
             </a:pPr>
             <a:r>
-              <a:rPr lang="en-US" sz="950" dirty="0">
+              <a:rPr lang="en-US" sz="900" dirty="0">
                 <a:solidFill>
                   <a:srgbClr val="3A4453"/>
                 </a:solidFill>
               </a:rPr>
               <a:t>Equipment and services at (347)k is the only cost that rises and falls with the work.</a:t>
             </a:r>
-            <a:endParaRPr lang="en-US" sz="950" dirty="0"/>
+            <a:endParaRPr lang="en-US" sz="900" dirty="0"/>
           </a:p>
           <a:p>
             <a:pPr marL="342900" indent="-342900">
               <a:lnSpc>
-                <a:spcPts val="1300"/>
+                <a:spcPts val="1150"/>
               </a:lnSpc>
               <a:spcAft>
                 <a:spcPts val="500"/>
@@ -3663,14 +3663,14 @@
               <a:buChar char="•"/>
             </a:pPr>
             <a:r>
-              <a:rPr lang="en-US" sz="950" dirty="0">
+              <a:rPr lang="en-US" sz="900" dirty="0">
                 <a:solidFill>
                   <a:srgbClr val="3A4453"/>
                 </a:solidFill>
               </a:rPr>
               <a:t>If we have to cut cost it is people or the office. Nothing else is big enough to matter.</a:t>
             </a:r>
-            <a:endParaRPr lang="en-US" sz="950" dirty="0"/>
+            <a:endParaRPr lang="en-US" sz="900" dirty="0"/>
           </a:p>
         </p:txBody>
       </p:sp>
@@ -3774,7 +3774,7 @@
                   <a:srgbClr val="122B82"/>
                 </a:solidFill>
               </a:rPr>
-              <a:t>COST BASE</a:t>
+              <a:t>WHAT WE SPEND</a:t>
             </a:r>
             <a:endParaRPr lang="en-US" sz="950" dirty="0"/>
           </a:p>
@@ -3971,7 +3971,7 @@
                   <a:srgbClr val="3A4453"/>
                 </a:solidFill>
               </a:rPr>
-              <a:t>Premises are the block: rent (62)k plus outgoings (15)k, 77k together.</a:t>
+              <a:t>The office is the big one: rent (62)k plus outgoings (15)k, 77k together.</a:t>
             </a:r>
             <a:endParaRPr lang="en-US" sz="950" dirty="0"/>
           </a:p>
@@ -3992,7 +3992,7 @@
                   <a:srgbClr val="3A4453"/>
                 </a:solidFill>
               </a:rPr>
-              <a:t>IT network at (40)k is the second line and the only one with real variability.</a:t>
+              <a:t>IT support at (40)k is next, and the only one that moves much month to month.</a:t>
             </a:r>
             <a:endParaRPr lang="en-US" sz="950" dirty="0"/>
           </a:p>
@@ -4161,7 +4161,7 @@
                   <a:srgbClr val="122B82"/>
                 </a:solidFill>
               </a:rPr>
-              <a:t>COST BASE</a:t>
+              <a:t>WHAT WE SPEND</a:t>
             </a:r>
             <a:endParaRPr lang="en-US" sz="950" dirty="0"/>
           </a:p>
@@ -4358,7 +4358,7 @@
                   <a:srgbClr val="3A4453"/>
                 </a:solidFill>
               </a:rPr>
-              <a:t>Direct labour splits into permanent payroll and sub contract labour.</a:t>
+              <a:t>Labour on jobs splits two ways: our own staff, and contractors we bring in.</a:t>
             </a:r>
             <a:endParaRPr lang="en-US" sz="950" dirty="0"/>
           </a:p>
@@ -4379,7 +4379,7 @@
                   <a:srgbClr val="3A4453"/>
                 </a:solidFill>
               </a:rPr>
-              <a:t>Salaries, wages and superannuation are the bulk of it and they are committed cost.</a:t>
+              <a:t>Salaries, wages and super are most of it, and we are committed to paying them.</a:t>
             </a:r>
             <a:endParaRPr lang="en-US" sz="950" dirty="0"/>
           </a:p>
@@ -4442,7 +4442,7 @@
                   <a:srgbClr val="3A4453"/>
                 </a:solidFill>
               </a:rPr>
-              <a:t>We pay for hours worked. We bill for hours that are chargeable. The gap is margin.</a:t>
+              <a:t>We pay for every hour worked. We only bill the hours spent on jobs. The difference is profit we never make.</a:t>
             </a:r>
             <a:endParaRPr lang="en-US" sz="950" dirty="0"/>
           </a:p>
@@ -4548,7 +4548,7 @@
                   <a:srgbClr val="122B82"/>
                 </a:solidFill>
               </a:rPr>
-              <a:t>COST BASE</a:t>
+              <a:t>WHAT WE SPEND</a:t>
             </a:r>
             <a:endParaRPr lang="en-US" sz="950" dirty="0"/>
           </a:p>
@@ -4743,7 +4743,7 @@
                   <a:srgbClr val="3A4453"/>
                 </a:solidFill>
               </a:rPr>
-              <a:t>The admin employment pot is 63,077 for the month and it is charged out in full.</a:t>
+              <a:t>63,077 of office wages this month, and all of it is charged out to the departments.</a:t>
             </a:r>
             <a:endParaRPr lang="en-US" sz="800" dirty="0"/>
           </a:p>
@@ -4764,7 +4764,7 @@
                   <a:srgbClr val="3A4453"/>
                 </a:solidFill>
               </a:rPr>
-              <a:t>Support carries 67.0% of it, on its share of rolling twelve month hours.</a:t>
+              <a:t>Support picks up 67% of it, based on its share of hours worked over the last twelve months.</a:t>
             </a:r>
             <a:endParaRPr lang="en-US" sz="800" dirty="0"/>
           </a:p>
@@ -4828,7 +4828,7 @@
                   <a:srgbClr val="3A4453"/>
                 </a:solidFill>
               </a:rPr>
-              <a:t>Integration takes almost no office cost because almost nothing is clocked to it.</a:t>
+              <a:t>Integration picks up almost no office wages, because almost no hours were booked to it.</a:t>
             </a:r>
             <a:endParaRPr lang="en-US" sz="800" dirty="0"/>
           </a:p>
@@ -6409,7 +6409,7 @@
                   <a:srgbClr val="3A4453"/>
                 </a:solidFill>
               </a:rPr>
-              <a:t>Consulting at 26.8% confirms there is no fee base to utilise.</a:t>
+              <a:t>Consulting at 26.8% confirms there is almost no work there to bill.</a:t>
             </a:r>
             <a:endParaRPr lang="en-US" sz="800" dirty="0"/>
           </a:p>
@@ -6982,7 +6982,7 @@
                   <a:srgbClr val="242C39"/>
                 </a:solidFill>
               </a:rPr>
-              <a:t>Cost base</a:t>
+              <a:t>What we spend</a:t>
             </a:r>
             <a:endParaRPr lang="en-US" sz="1300" dirty="0"/>
           </a:p>
@@ -8752,7 +8752,7 @@
                             <a:srgbClr val="3A4453"/>
                           </a:solidFill>
                         </a:rPr>
-                        <a:t>20k of overhead on a 4k fee base. Decide whether the department is rebuilt, merged into Integration, or closed.</a:t>
+                        <a:t>20k of running costs against 4k of fees. Decide whether the department is rebuilt, merged into Integration, or closed.</a:t>
                       </a:r>
                       <a:endParaRPr lang="en-US" sz="800" dirty="0"/>
                     </a:p>
@@ -14005,7 +14005,7 @@
                   <a:srgbClr val="FFFFFF"/>
                 </a:solidFill>
               </a:rPr>
-              <a:t>Cost base</a:t>
+              <a:t>What we spend</a:t>
             </a:r>
             <a:endParaRPr lang="en-US" sz="2800" dirty="0"/>
           </a:p>

--- a/deck/CTS Monthly Business Review - September 2026.pptx
+++ b/deck/CTS Monthly Business Review - September 2026.pptx
@@ -27,9 +27,10 @@
     <p:sldId id="275" r:id="rId21"/>
     <p:sldId id="276" r:id="rId22"/>
     <p:sldId id="277" r:id="rId23"/>
+    <p:sldId id="278" r:id="rId24"/>
   </p:sldIdLst>
   <p:notesMasterIdLst>
-    <p:notesMasterId r:id="rId24"/>
+    <p:notesMasterId r:id="rId25"/>
   </p:notesMasterIdLst>
   <p:sldSz cx="9144000" cy="5143500"/>
   <p:notesSz cx="5143500" cy="9144000"/>
@@ -1066,20 +1067,21 @@
           <a:p>
             <a:r>
               <a:rPr lang="en-US" dirty="0"/>
-              <a:t>Top ten customers, year to date, with the chart beside the table.
-1. Deloitte Services: 401,755 year to date at 24.7%, 119,614 in September 2026.
-2. Aware Super: 285,075 year to date at 17.5%, 241,178 in September 2026.
-3. CBA Place South: 105,040 year to date at 6.5%, 30,409 in September 2026.
-4. Ventia: 97,662 year to date at 6.0%, 9,105 in September 2026.
-5. PwC Services: 88,051 year to date at 5.4%, 26,707 in September 2026.
-6. APT Management Services: 63,613 year to date at 3.9%, 4,527 in September 2026.
-7. ASX Operations: 60,858 year to date at 3.7%, 17,167 in September 2026.
-8. Bankwest: 54,971 year to date at 3.4%, 17,230 in September 2026.
-9. Data#3: 45,909 year to date at 2.8%, 0 in September 2026.
-10. Generation-e Productivity…: 37,166 year to date at 2.3%, 12,389 in September 2026.
-The top ten are 1,240,100 or 76.3% of revenue. Everyone else is 384,360.
-The reliance on a handful of customers is getting worse, not better, and the difference that matters is contract work against one-off projects. Deloitte Services is contracted support income that renews. Aware Super is a fit-out that completes. Treating them as the same kind of revenue is how a forecast goes wrong.
-The recommendation is a retention plan with a named owner for the top three, and a growth target set on the second ten rather than the first.</a:t>
+              <a:t>Top ten customers by revenue, year to date, with the top three called out in red.
+1. Deloitte Services: 401,755 for the year, 24.7% of the total, 119,614 of it in September 2026.
+2. Aware Super: 285,075 for the year, 17.5% of the total, 241,178 of it in September 2026.
+3. CBA Place South: 105,040 for the year, 6.5% of the total, 30,409 of it in September 2026.
+4. Ventia: 97,662 for the year, 6.0% of the total, 9,105 of it in September 2026.
+5. PwC Services: 88,051 for the year, 5.4% of the total, 26,707 of it in September 2026.
+6. APT Management Services: 63,613 for the year, 3.9% of the total, 4,527 of it in September 2026.
+7. ASX Operations: 60,858 for the year, 3.7% of the total, 17,167 of it in September 2026.
+8. Bankwest: 54,971 for the year, 3.4% of the total, 17,230 of it in September 2026.
+9. Data#3: 45,909 for the year, 2.8% of the total, 0 of it in September 2026.
+10. Generation-e Productivity…: 37,166 for the year, 2.3% of the total, 12,389 of it in September 2026.
+The ten together are 1,240,100, or 76.3% of everything we sold. Every other customer on the books makes up the remaining 384,360.
+The three red bars are the point of the slide. They are 48.7% of the year between them.
+The difference that matters is contract work against one-off projects. Deloitte Services is contracted support that renews every month. Aware Super is a fit-out that has finished. Counting them as the same kind of income is how a forecast goes wrong.
+What I am recommending: a named owner for each of the top three before the half year, and the new business target set on customers four to twenty rather than on the ones we already have.</a:t>
             </a:r>
             <a:endParaRPr lang="en-US" dirty="0"/>
           </a:p>
@@ -1167,11 +1169,11 @@
           <a:p>
             <a:r>
               <a:rPr lang="en-US" dirty="0"/>
-              <a:t>Receivables and days sales outstanding at 30 September 2026.
-Trade receivables 833,320. DSO 47.2 days against a target of 30. At target we would be owed 529,715, so 303,605 of cash is sitting in the debtor book that should be in the bank.
-Ageing: Current 588,782 at 70.7%, Under 1 month 133,177 at 16.0%, 1 month 86,553 at 10.4%, 3 months 24,809 at 3.0%. Overdue in total 244,538 or 29.3%.
-Largest debtors: Aware Super at 277,395, Deloitte Services P/L for Deloitte Services Trust at 131,575, Ventia at 94,701.
-The action is narrow. Two customers hold the majority of the overdue balance, so a targeted chase on those two is worth more than a general collections push, and it is the fastest cash available this quarter.</a:t>
+              <a:t>How long customers take to pay, at 30 September 2026.
+We are owed 833,320. Across the last three months we sold 1,624,460, which over 92 days is 17,657 of sales a day. Divide what we are owed by that and it takes customers 47.2 days to pay us.
+The target is 30 days. We are 17.2 days over it. If we collected on time we would be owed 529,715 instead of 833,320, so 303,605 of cash that should already be ours is sitting in the debtor book.
+Put that next to the profit position. The quarter made 5,774. There is 303,605 of our own money uncollected. Collecting it is worth many times more than anything we can trade our way to between now and Christmas, and it costs nothing but phone calls.
+Every day we take off the number brings in 17,657.</a:t>
             </a:r>
             <a:endParaRPr lang="en-US" dirty="0"/>
           </a:p>
@@ -1259,7 +1261,14 @@
           <a:p>
             <a:r>
               <a:rPr lang="en-US" dirty="0"/>
-              <a:t>The company billed 2,437 chargeable hours in September 2026 out of 2,789 worked. Where chargeable hours fall short, margin follows.</a:t>
+              <a:t>The ten largest amounts owed at 30 September 2026.
+Aware Super: 277,395, 33.3% of the total.
+Deloitte Services P/L for Deloitte Services Trust: 131,575, 15.8% of the total.
+Ventia: 94,701, 11.4% of the total.
+Downer EDI Limited: 39,664, 4.8% of the total.
+Generation-e Productivity Solutions: 39,106, 4.7% of the total.
+The ageing: Current 588,782 at 70.7%, Under 1 month 133,177 at 16.0%, 1 month 86,553 at 10.4%, 3 months 24,809 at 3.0%. Late in total 244,538, or 29.3% of the book.
+The action here is narrow and that is the point. Two customers hold most of the balance. A targeted chase on those two is worth more than a general collections exercise across everyone, and it is the fastest money available to us this quarter.</a:t>
             </a:r>
             <a:endParaRPr lang="en-US" dirty="0"/>
           </a:p>
@@ -1347,16 +1356,7 @@
           <a:p>
             <a:r>
               <a:rPr lang="en-US" dirty="0"/>
-              <a:t>Utilisation by department for September 2026.
-Support: 2,132 chargeable, 11 non-chargeable, 218 leave, 99.5% chargeable.
-Events: 241 chargeable, 249 non-chargeable, 333 leave, 49.1% chargeable.
-Video: 25 chargeable, 8 non-chargeable, 0 leave, 76.0% chargeable.
-Integration: 10 chargeable, 0 non-chargeable, 0 leave, 100.0% chargeable.
-Consulting: 31 chargeable, 84 non-chargeable, 53 leave, 26.8% chargeable.
-Five departments together, 2,437 chargeable out of 2,789 worked, 87.4%.
-I need to be straight about the Support figure. 99.5% chargeable on only 11 non-chargeable hours in a whole month is not believable for a team of that size. Non-chargeable time is being booked to chargeable cost centres. The hours total is right, the split is not, and the Support utilisation figure is unusable until timesheet coding is corrected.
-Events at 49.1% is the real operational issue: 333 hours of leave on a small team takes out most of the capacity.
-The prize is in the last bullet. Five more points of utilisation on Support and Events, at the revenue per chargeable hour each already earns, is the largest controllable item in this pack and costs nothing extra.</a:t>
+              <a:t>The company billed 2,437 chargeable hours in September 2026 out of 2,789 worked. Where chargeable hours fall short, margin follows.</a:t>
             </a:r>
             <a:endParaRPr lang="en-US" dirty="0"/>
           </a:p>
@@ -1444,7 +1444,17 @@
           <a:p>
             <a:r>
               <a:rPr lang="en-US" dirty="0"/>
-              <a:t>Three months are closed and the remaining nine are still at original budget. That is the decision in front of the board.</a:t>
+              <a:t>How each department spent its hours in September 2026.
+Read the bars as a mix, not as a size. Each one is scaled to that department's own total, because Support works around a hundred times the hours Integration does and on a straight scale four of the five departments disappear. The number on each segment is the real hours.
+Support: 2,132 hours on jobs, 11 not on jobs, 218 leave. 99.5% of worked hours were billable.
+Events: 241 hours on jobs, 249 not on jobs, 333 leave. 49.1% of worked hours were billable.
+Video: 25 hours on jobs, 8 not on jobs, 0 leave. 76.0% of worked hours were billable.
+Integration: 10 hours on jobs, 0 not on jobs, 0 leave. 100.0% of worked hours were billable.
+Consulting: 31 hours on jobs, 84 not on jobs, 53 leave. 26.8% of worked hours were billable.
+Across the five departments, 2,437 hours on jobs out of 2,789 worked.
+I need to be straight about the Support bar. 11 hours not on jobs, in a whole month, for a team that size, is not believable. Non-billable time is being booked to billable jobs. The total hours are right, the split is not, and until timesheet coding is corrected the Support percentage cannot be used to manage anybody.
+Events is the real operational issue: 333 hours of leave on a small team takes out most of the month's capacity.
+And the prize. Support earns about 48 of margin on every hour it bills. Five more points of billable time across Support and Events, at the rate each already earns, is worth roughly 15,813 a month and costs nothing extra. It is the largest controllable item in this pack.</a:t>
             </a:r>
             <a:endParaRPr lang="en-US" dirty="0"/>
           </a:p>
@@ -1620,11 +1630,7 @@
           <a:p>
             <a:r>
               <a:rPr lang="en-US" dirty="0"/>
-              <a:t>Revenue by month, actual for the three closed months and original budget for the rest.
-Q1 actual 1,624,460 against a budget of 1,996,110, behind by 371,650.
-The nine months from October are still at the budget set before the year started. October is budgeted at 950,416, higher than any month we have delivered.
-Two things for the board. The Q1 variance is concentrated in Consulting and Video, which were budgeted on a resourcing level that does not exist. And the margin assumption in the budget is above what the business has delivered for two years, so even a month that hits the revenue number will miss the profit number.
-My recommendation is a rolling forecast from Q2, rebuilding Consulting around actual capacity and resetting gross margin to delivered rates. December should stay as budgeted: the business closes for two weeks and the loss is real.</a:t>
+              <a:t>Three months are closed and the remaining nine are still at original budget. That is the decision in front of the board.</a:t>
             </a:r>
             <a:endParaRPr lang="en-US" dirty="0"/>
           </a:p>
@@ -1712,10 +1718,11 @@
           <a:p>
             <a:r>
               <a:rPr lang="en-US" dirty="0"/>
-              <a:t>Seven actions, each with an owner and a date.
-The first two matter most: reforecasting on margin rather than revenue, and testing the overhead keys. Everything else in this pack follows from those two numbers.
-The Consulting decision cannot keep being deferred; it has carried running costs against almost no fees for three months.
-The cash action is the only one that produces money this quarter, and the utilisation action is the largest controllable item.</a:t>
+              <a:t>Revenue by month, actual for the three closed months and original budget for the rest.
+Q1 actual 1,624,460 against a budget of 1,996,110, behind by 371,650.
+The nine months from October are still at the budget set before the year started. October is budgeted at 950,416, higher than any month we have delivered.
+Two things for the board. The Q1 variance is concentrated in Consulting and Video, which were budgeted on a resourcing level that does not exist. And the margin assumption in the budget is above what the business has delivered for two years, so even a month that hits the revenue number will miss the profit number.
+My recommendation is a rolling forecast from Q2, rebuilding Consulting around actual capacity and resetting gross margin to delivered rates. December should stay as budgeted: the business closes for two weeks and the loss is real.</a:t>
             </a:r>
             <a:endParaRPr lang="en-US" dirty="0"/>
           </a:p>
@@ -1803,7 +1810,10 @@
           <a:p>
             <a:r>
               <a:rPr lang="en-US" dirty="0"/>
-              <a:t>Close on the two numbers that matter: break even needs 549,372 a month at our real margin, and we are running at 541,487. Everything else in the pack is detail underneath that.</a:t>
+              <a:t>Seven actions, each with an owner and a date.
+The first two matter most: reforecasting on margin rather than revenue, and testing the overhead keys. Everything else in this pack follows from those two numbers.
+The Consulting decision cannot keep being deferred; it has carried running costs against almost no fees for three months.
+The cash action is the only one that produces money this quarter, and the utilisation action is the largest controllable item.</a:t>
             </a:r>
             <a:endParaRPr lang="en-US" dirty="0"/>
           </a:p>
@@ -1827,6 +1837,94 @@
             <a:fld id="{F7021451-1387-4CA6-816F-3879F97B5CBC}" type="slidenum">
               <a:rPr lang="en-US"/>
               <a:t>22</a:t>
+            </a:fld>
+            <a:endParaRPr lang="en-US"/>
+          </a:p>
+        </p:txBody>
+      </p:sp>
+    </p:spTree>
+    <p:extLst>
+      <p:ext uri="{BB962C8B-B14F-4D97-AF65-F5344CB8AC3E}">
+        <p14:creationId xmlns:p14="http://schemas.microsoft.com/office/powerpoint/2010/main" val="1024086991"/>
+      </p:ext>
+    </p:extLst>
+  </p:cSld>
+  <p:clrMapOvr>
+    <a:masterClrMapping/>
+  </p:clrMapOvr>
+</p:notes>
+</file>
+
+<file path=ppt/notesSlides/notesSlide23.xml><?xml version="1.0" encoding="utf-8"?>
+<p:notes xmlns:a="http://schemas.openxmlformats.org/drawingml/2006/main" xmlns:r="http://schemas.openxmlformats.org/officeDocument/2006/relationships" xmlns:p="http://schemas.openxmlformats.org/presentationml/2006/main">
+  <p:cSld>
+    <p:spTree>
+      <p:nvGrpSpPr>
+        <p:cNvPr id="1" name=""/>
+        <p:cNvGrpSpPr/>
+        <p:nvPr/>
+      </p:nvGrpSpPr>
+      <p:grpSpPr>
+        <a:xfrm>
+          <a:off x="0" y="0"/>
+          <a:ext cx="0" cy="0"/>
+          <a:chOff x="0" y="0"/>
+          <a:chExt cx="0" cy="0"/>
+        </a:xfrm>
+      </p:grpSpPr>
+      <p:sp>
+        <p:nvSpPr>
+          <p:cNvPr id="2" name="Slide Image Placeholder 1"/>
+          <p:cNvSpPr>
+            <a:spLocks noGrp="1" noRot="1" noChangeAspect="1"/>
+          </p:cNvSpPr>
+          <p:nvPr>
+            <p:ph type="sldImg"/>
+          </p:nvPr>
+        </p:nvSpPr>
+        <p:spPr/>
+      </p:sp>
+      <p:sp>
+        <p:nvSpPr>
+          <p:cNvPr id="3" name="Notes Placeholder 2"/>
+          <p:cNvSpPr>
+            <a:spLocks noGrp="1"/>
+          </p:cNvSpPr>
+          <p:nvPr>
+            <p:ph type="body" idx="1"/>
+          </p:nvPr>
+        </p:nvSpPr>
+        <p:spPr/>
+        <p:txBody>
+          <a:bodyPr/>
+          <a:lstStyle/>
+          <a:p>
+            <a:r>
+              <a:rPr lang="en-US" dirty="0"/>
+              <a:t>Close on the two numbers that matter: break even needs 549,372 a month at our real margin, and we are running at 541,487. Everything else in the pack is detail underneath that.</a:t>
+            </a:r>
+            <a:endParaRPr lang="en-US" dirty="0"/>
+          </a:p>
+        </p:txBody>
+      </p:sp>
+      <p:sp>
+        <p:nvSpPr>
+          <p:cNvPr id="4" name="Slide Number Placeholder 3"/>
+          <p:cNvSpPr>
+            <a:spLocks noGrp="1"/>
+          </p:cNvSpPr>
+          <p:nvPr>
+            <p:ph type="sldNum" sz="quarter" idx="10"/>
+          </p:nvPr>
+        </p:nvSpPr>
+        <p:spPr/>
+        <p:txBody>
+          <a:bodyPr/>
+          <a:lstStyle/>
+          <a:p>
+            <a:fld id="{F7021451-1387-4CA6-816F-3879F97B5CBC}" type="slidenum">
+              <a:rPr lang="en-US"/>
+              <a:t>23</a:t>
             </a:fld>
             <a:endParaRPr lang="en-US"/>
           </a:p>
@@ -4606,8 +4704,8 @@
         </p:blipFill>
         <p:spPr>
           <a:xfrm>
-            <a:off x="948192" y="1444752"/>
-            <a:ext cx="7247617" cy="1938528"/>
+            <a:off x="502920" y="1389888"/>
+            <a:ext cx="8138160" cy="2176723"/>
           </a:xfrm>
           <a:prstGeom prst="rect">
             <a:avLst/>
@@ -4622,7 +4720,7 @@
         </p:nvSpPr>
         <p:spPr>
           <a:xfrm>
-            <a:off x="502920" y="3456432"/>
+            <a:off x="502920" y="3639763"/>
             <a:ext cx="8138160" cy="237744"/>
           </a:xfrm>
           <a:prstGeom prst="rect">
@@ -5203,8 +5301,8 @@
         </p:blipFill>
         <p:spPr>
           <a:xfrm>
-            <a:off x="896874" y="1444752"/>
-            <a:ext cx="7350252" cy="1938528"/>
+            <a:off x="502920" y="1444752"/>
+            <a:ext cx="5577840" cy="2815203"/>
           </a:xfrm>
           <a:prstGeom prst="rect">
             <a:avLst/>
@@ -5219,8 +5317,8 @@
         </p:nvSpPr>
         <p:spPr>
           <a:xfrm>
-            <a:off x="502920" y="3456432"/>
-            <a:ext cx="8138160" cy="237744"/>
+            <a:off x="502920" y="4333107"/>
+            <a:ext cx="5577840" cy="237744"/>
           </a:xfrm>
           <a:prstGeom prst="rect">
             <a:avLst/>
@@ -5241,7 +5339,7 @@
                   <a:srgbClr val="6B7585"/>
                 </a:solidFill>
               </a:rPr>
-              <a:t>Snipped from the Financial Controller Pack, Top 10 Clients tab, the top ten, year to date.</a:t>
+              <a:t>Snipped from the Financial Controller Pack, Top 10 Clients tab, top ten customers by revenue, the top three in red.</a:t>
             </a:r>
             <a:endParaRPr lang="en-US" sz="800" dirty="0"/>
           </a:p>
@@ -5255,8 +5353,8 @@
         </p:nvSpPr>
         <p:spPr>
           <a:xfrm>
-            <a:off x="502920" y="3675888"/>
-            <a:ext cx="8138160" cy="950976"/>
+            <a:off x="6263640" y="1463040"/>
+            <a:ext cx="2377440" cy="3154680"/>
           </a:xfrm>
           <a:prstGeom prst="rect">
             <a:avLst/>
@@ -5275,8 +5373,8 @@
         </p:nvSpPr>
         <p:spPr>
           <a:xfrm>
-            <a:off x="685800" y="3758184"/>
-            <a:ext cx="2743200" cy="164592"/>
+            <a:off x="6446520" y="1627632"/>
+            <a:ext cx="2011680" cy="228600"/>
           </a:xfrm>
           <a:prstGeom prst="rect">
             <a:avLst/>
@@ -5292,14 +5390,14 @@
               <a:buNone/>
             </a:pPr>
             <a:r>
-              <a:rPr lang="en-US" sz="850" b="1" spc="180" kern="0" dirty="0">
+              <a:rPr lang="en-US" sz="900" b="1" spc="180" kern="0" dirty="0">
                 <a:solidFill>
                   <a:srgbClr val="005358"/>
                 </a:solidFill>
               </a:rPr>
               <a:t>COMMENTARY</a:t>
             </a:r>
-            <a:endParaRPr lang="en-US" sz="850" dirty="0"/>
+            <a:endParaRPr lang="en-US" sz="900" dirty="0"/>
           </a:p>
         </p:txBody>
       </p:sp>
@@ -5311,123 +5409,124 @@
         </p:nvSpPr>
         <p:spPr>
           <a:xfrm>
-            <a:off x="685800" y="3941064"/>
-            <a:ext cx="3703320" cy="621792"/>
-          </a:xfrm>
-          <a:prstGeom prst="rect">
-            <a:avLst/>
-          </a:prstGeom>
-          <a:noFill/>
-          <a:ln/>
-        </p:spPr>
-        <p:txBody>
-          <a:bodyPr wrap="square" lIns="0" tIns="0" rIns="0" bIns="0" rtlCol="0" anchor="t"/>
+            <a:off x="6446520" y="1901952"/>
+            <a:ext cx="2011680" cy="2551176"/>
+          </a:xfrm>
+          <a:prstGeom prst="rect">
+            <a:avLst/>
+          </a:prstGeom>
+          <a:noFill/>
+          <a:ln/>
+        </p:spPr>
+        <p:txBody>
+          <a:bodyPr wrap="square" lIns="0" tIns="0" rIns="0" bIns="0" rtlCol="0" anchor="t">
+            <a:normAutofit/>
+          </a:bodyPr>
           <a:lstStyle/>
           <a:p>
             <a:pPr marL="342900" indent="-342900">
               <a:lnSpc>
-                <a:spcPts val="1000"/>
+                <a:spcPts val="1300"/>
               </a:lnSpc>
               <a:spcAft>
-                <a:spcPts val="300"/>
+                <a:spcPts val="500"/>
               </a:spcAft>
               <a:buSzPct val="100000"/>
               <a:buChar char="•"/>
             </a:pPr>
             <a:r>
-              <a:rPr lang="en-US" sz="800" dirty="0">
+              <a:rPr lang="en-US" sz="950" dirty="0">
                 <a:solidFill>
                   <a:srgbClr val="3A4453"/>
                 </a:solidFill>
               </a:rPr>
-              <a:t>The top ten are 76.3% of revenue. The top three alone are 48.7%.</a:t>
-            </a:r>
-            <a:endParaRPr lang="en-US" sz="800" dirty="0"/>
+              <a:t>The three red bars are 49% of everything we sold this year.</a:t>
+            </a:r>
+            <a:endParaRPr lang="en-US" sz="950" dirty="0"/>
           </a:p>
           <a:p>
             <a:pPr marL="342900" indent="-342900">
               <a:lnSpc>
-                <a:spcPts val="1000"/>
+                <a:spcPts val="1300"/>
               </a:lnSpc>
               <a:spcAft>
-                <a:spcPts val="300"/>
+                <a:spcPts val="500"/>
               </a:spcAft>
               <a:buSzPct val="100000"/>
               <a:buChar char="•"/>
             </a:pPr>
             <a:r>
-              <a:rPr lang="en-US" sz="800" dirty="0">
+              <a:rPr lang="en-US" sz="950" dirty="0">
                 <a:solidFill>
                   <a:srgbClr val="3A4453"/>
                 </a:solidFill>
               </a:rPr>
-              <a:t>Deloitte Services at 401,755 is 24.7% of the year. Losing them would wipe out more than the whole year's profit plan.</a:t>
-            </a:r>
-            <a:endParaRPr lang="en-US" sz="800" dirty="0"/>
-          </a:p>
-        </p:txBody>
-      </p:sp>
-      <p:sp>
-        <p:nvSpPr>
-          <p:cNvPr id="9" name="Text 6"/>
-          <p:cNvSpPr txBox="1"/>
-          <p:nvPr/>
-        </p:nvSpPr>
-        <p:spPr>
-          <a:xfrm>
-            <a:off x="4663440" y="3941064"/>
-            <a:ext cx="3703320" cy="621792"/>
-          </a:xfrm>
-          <a:prstGeom prst="rect">
-            <a:avLst/>
-          </a:prstGeom>
-          <a:noFill/>
-          <a:ln/>
-        </p:spPr>
-        <p:txBody>
-          <a:bodyPr wrap="square" lIns="0" tIns="0" rIns="0" bIns="0" rtlCol="0" anchor="t"/>
-          <a:lstStyle/>
+              <a:t>All ten together are 76%. Every other customer we have is the remaining 24%.</a:t>
+            </a:r>
+            <a:endParaRPr lang="en-US" sz="950" dirty="0"/>
+          </a:p>
           <a:p>
             <a:pPr marL="342900" indent="-342900">
               <a:lnSpc>
-                <a:spcPts val="1000"/>
+                <a:spcPts val="1300"/>
               </a:lnSpc>
               <a:spcAft>
-                <a:spcPts val="300"/>
+                <a:spcPts val="500"/>
               </a:spcAft>
               <a:buSzPct val="100000"/>
               <a:buChar char="•"/>
             </a:pPr>
             <a:r>
-              <a:rPr lang="en-US" sz="800" dirty="0">
+              <a:rPr lang="en-US" sz="950" dirty="0">
                 <a:solidFill>
                   <a:srgbClr val="3A4453"/>
                 </a:solidFill>
               </a:rPr>
-              <a:t>Aware Super came from nothing to 285,075 in a quarter, almost all of it in September.</a:t>
-            </a:r>
-            <a:endParaRPr lang="en-US" sz="800" dirty="0"/>
+              <a:t>Deloitte Services at 401,755 is 25% on its own. Losing them would wipe out more than the whole year's profit plan.</a:t>
+            </a:r>
+            <a:endParaRPr lang="en-US" sz="950" dirty="0"/>
           </a:p>
           <a:p>
             <a:pPr marL="342900" indent="-342900">
               <a:lnSpc>
-                <a:spcPts val="1000"/>
+                <a:spcPts val="1300"/>
               </a:lnSpc>
               <a:spcAft>
-                <a:spcPts val="300"/>
+                <a:spcPts val="500"/>
               </a:spcAft>
               <a:buSzPct val="100000"/>
               <a:buChar char="•"/>
             </a:pPr>
             <a:r>
-              <a:rPr lang="en-US" sz="800" dirty="0">
+              <a:rPr lang="en-US" sz="950" dirty="0">
                 <a:solidFill>
                   <a:srgbClr val="3A4453"/>
                 </a:solidFill>
               </a:rPr>
-              <a:t>After the top five the amounts fall away quickly. Number ten is only 37,166.</a:t>
-            </a:r>
-            <a:endParaRPr lang="en-US" sz="800" dirty="0"/>
+              <a:t>Aware Super came from nothing to 285,075 in a quarter, and nearly all of it was one job in September.</a:t>
+            </a:r>
+            <a:endParaRPr lang="en-US" sz="950" dirty="0"/>
+          </a:p>
+          <a:p>
+            <a:pPr marL="342900" indent="-342900">
+              <a:lnSpc>
+                <a:spcPts val="1300"/>
+              </a:lnSpc>
+              <a:spcAft>
+                <a:spcPts val="500"/>
+              </a:spcAft>
+              <a:buSzPct val="100000"/>
+              <a:buChar char="•"/>
+            </a:pPr>
+            <a:r>
+              <a:rPr lang="en-US" sz="950" dirty="0">
+                <a:solidFill>
+                  <a:srgbClr val="3A4453"/>
+                </a:solidFill>
+              </a:rPr>
+              <a:t>After the top five it falls away fast. Number ten is only 37,166.</a:t>
+            </a:r>
+            <a:endParaRPr lang="en-US" sz="950" dirty="0"/>
           </a:p>
         </p:txBody>
       </p:sp>
@@ -5567,7 +5666,7 @@
                   <a:srgbClr val="242C39"/>
                 </a:solidFill>
               </a:rPr>
-              <a:t>Receivables and days sales outstanding</a:t>
+              <a:t>How long customers take to pay</a:t>
             </a:r>
             <a:endParaRPr lang="en-US" sz="2700" dirty="0"/>
           </a:p>
@@ -5575,7 +5674,7 @@
       </p:sp>
       <p:pic>
         <p:nvPicPr>
-          <p:cNvPr id="4" name="snip dso" descr="/home/user/Claude/deck/snips/dso.png">    </p:cNvPr>
+          <p:cNvPr id="4" name="snip dso_calc" descr="/home/user/Claude/deck/snips/dso_calc.png">    </p:cNvPr>
           <p:cNvPicPr>
             <a:picLocks noChangeAspect="1"/>
           </p:cNvPicPr>
@@ -5589,8 +5688,8 @@
         </p:blipFill>
         <p:spPr>
           <a:xfrm>
-            <a:off x="984420" y="1444752"/>
-            <a:ext cx="4614839" cy="3090672"/>
+            <a:off x="502920" y="1444752"/>
+            <a:ext cx="5577840" cy="2900215"/>
           </a:xfrm>
           <a:prstGeom prst="rect">
             <a:avLst/>
@@ -5605,7 +5704,7 @@
         </p:nvSpPr>
         <p:spPr>
           <a:xfrm>
-            <a:off x="502920" y="4608576"/>
+            <a:off x="502920" y="4418119"/>
             <a:ext cx="5577840" cy="237744"/>
           </a:xfrm>
           <a:prstGeom prst="rect">
@@ -5627,7 +5726,7 @@
                   <a:srgbClr val="6B7585"/>
                 </a:solidFill>
               </a:rPr>
-              <a:t>Snipped from the Financial Controller Pack, DSO tab, the calculation, the ageing and who owes the most.</a:t>
+              <a:t>Snipped from the Financial Controller Pack, DSO tab, the calculation, built off the Xero age analysis.</a:t>
             </a:r>
             <a:endParaRPr lang="en-US" sz="800" dirty="0"/>
           </a:p>
@@ -5723,14 +5822,14 @@
               <a:buChar char="•"/>
             </a:pPr>
             <a:r>
-              <a:rPr lang="en-US" sz="950" dirty="0">
+              <a:rPr lang="en-US" sz="1000" dirty="0">
                 <a:solidFill>
                   <a:srgbClr val="3A4453"/>
                 </a:solidFill>
               </a:rPr>
-              <a:t>Customers take 47 days to pay us. The target is 30. That is 17 days of cash we are not holding.</a:t>
-            </a:r>
-            <a:endParaRPr lang="en-US" sz="950" dirty="0"/>
+              <a:t>Customers take 47 days to pay us. We want 30.</a:t>
+            </a:r>
+            <a:endParaRPr lang="en-US" sz="1000" dirty="0"/>
           </a:p>
           <a:p>
             <a:pPr marL="342900" indent="-342900">
@@ -5744,14 +5843,14 @@
               <a:buChar char="•"/>
             </a:pPr>
             <a:r>
-              <a:rPr lang="en-US" sz="950" dirty="0">
+              <a:rPr lang="en-US" sz="1000" dirty="0">
                 <a:solidFill>
                   <a:srgbClr val="3A4453"/>
                 </a:solidFill>
               </a:rPr>
-              <a:t>Every day we shave off brings in 17,657. Getting to target frees up 303,605.</a:t>
-            </a:r>
-            <a:endParaRPr lang="en-US" sz="950" dirty="0"/>
+              <a:t>That is 17 days of sales sitting in the debtor book instead of the bank.</a:t>
+            </a:r>
+            <a:endParaRPr lang="en-US" sz="1000" dirty="0"/>
           </a:p>
           <a:p>
             <a:pPr marL="342900" indent="-342900">
@@ -5765,14 +5864,14 @@
               <a:buChar char="•"/>
             </a:pPr>
             <a:r>
-              <a:rPr lang="en-US" sz="950" dirty="0">
+              <a:rPr lang="en-US" sz="1000" dirty="0">
                 <a:solidFill>
                   <a:srgbClr val="3A4453"/>
                 </a:solidFill>
               </a:rPr>
-              <a:t>29% of what we are owed is already late, 244,538.</a:t>
-            </a:r>
-            <a:endParaRPr lang="en-US" sz="950" dirty="0"/>
+              <a:t>In money, 303,605 that should be ours already.</a:t>
+            </a:r>
+            <a:endParaRPr lang="en-US" sz="1000" dirty="0"/>
           </a:p>
           <a:p>
             <a:pPr marL="342900" indent="-342900">
@@ -5786,14 +5885,14 @@
               <a:buChar char="•"/>
             </a:pPr>
             <a:r>
-              <a:rPr lang="en-US" sz="950" dirty="0">
+              <a:rPr lang="en-US" sz="1000" dirty="0">
                 <a:solidFill>
                   <a:srgbClr val="3A4453"/>
                 </a:solidFill>
               </a:rPr>
-              <a:t>Aware Super alone owes 277,395, which is 33% of the total.</a:t>
-            </a:r>
-            <a:endParaRPr lang="en-US" sz="950" dirty="0"/>
+              <a:t>Every single day we pull that back brings in 17,657.</a:t>
+            </a:r>
+            <a:endParaRPr lang="en-US" sz="1000" dirty="0"/>
           </a:p>
           <a:p>
             <a:pPr marL="342900" indent="-342900">
@@ -5807,14 +5906,14 @@
               <a:buChar char="•"/>
             </a:pPr>
             <a:r>
-              <a:rPr lang="en-US" sz="950" dirty="0">
+              <a:rPr lang="en-US" sz="1000" dirty="0">
                 <a:solidFill>
                   <a:srgbClr val="3A4453"/>
                 </a:solidFill>
               </a:rPr>
-              <a:t>Chase the top two. Nothing else on this page moves the number.</a:t>
-            </a:r>
-            <a:endParaRPr lang="en-US" sz="950" dirty="0"/>
+              <a:t>This is the fastest cash available to the business this quarter. Nothing else comes close.</a:t>
+            </a:r>
+            <a:endParaRPr lang="en-US" sz="1000" dirty="0"/>
           </a:p>
         </p:txBody>
       </p:sp>
@@ -5890,56 +5989,166 @@
       </p:grpSpPr>
       <p:sp>
         <p:nvSpPr>
-          <p:cNvPr id="2" name="divider circle"/>
+          <p:cNvPr id="2" name="Text 0"/>
+          <p:cNvSpPr txBox="1"/>
+          <p:nvPr/>
+        </p:nvSpPr>
+        <p:spPr>
+          <a:xfrm>
+            <a:off x="502920" y="365760"/>
+            <a:ext cx="6400800" cy="274320"/>
+          </a:xfrm>
+          <a:prstGeom prst="rect">
+            <a:avLst/>
+          </a:prstGeom>
+          <a:noFill/>
+          <a:ln/>
+        </p:spPr>
+        <p:txBody>
+          <a:bodyPr wrap="square" lIns="0" tIns="0" rIns="0" bIns="0" rtlCol="0" anchor="ctr"/>
+          <a:lstStyle/>
+          <a:p>
+            <a:pPr indent="0" marL="0">
+              <a:buNone/>
+            </a:pPr>
+            <a:r>
+              <a:rPr lang="en-US" sz="950" b="1" spc="220" kern="0" dirty="0">
+                <a:solidFill>
+                  <a:srgbClr val="122B82"/>
+                </a:solidFill>
+              </a:rPr>
+              <a:t>CUSTOMERS AND CASH</a:t>
+            </a:r>
+            <a:endParaRPr lang="en-US" sz="950" dirty="0"/>
+          </a:p>
+        </p:txBody>
+      </p:sp>
+      <p:sp>
+        <p:nvSpPr>
+          <p:cNvPr id="3" name="Text 1"/>
+          <p:cNvSpPr txBox="1"/>
+          <p:nvPr/>
+        </p:nvSpPr>
+        <p:spPr>
+          <a:xfrm>
+            <a:off x="502920" y="640080"/>
+            <a:ext cx="7315200" cy="685800"/>
+          </a:xfrm>
+          <a:prstGeom prst="rect">
+            <a:avLst/>
+          </a:prstGeom>
+          <a:noFill/>
+          <a:ln/>
+        </p:spPr>
+        <p:txBody>
+          <a:bodyPr wrap="square" lIns="0" tIns="0" rIns="0" bIns="0" rtlCol="0" anchor="ctr"/>
+          <a:lstStyle/>
+          <a:p>
+            <a:pPr indent="0" marL="0">
+              <a:buNone/>
+            </a:pPr>
+            <a:r>
+              <a:rPr lang="en-US" sz="2700" b="1" dirty="0">
+                <a:solidFill>
+                  <a:srgbClr val="242C39"/>
+                </a:solidFill>
+              </a:rPr>
+              <a:t>Who owes us the most</a:t>
+            </a:r>
+            <a:endParaRPr lang="en-US" sz="2700" dirty="0"/>
+          </a:p>
+        </p:txBody>
+      </p:sp>
+      <p:pic>
+        <p:nvPicPr>
+          <p:cNvPr id="4" name="snip dso_who" descr="/home/user/Claude/deck/snips/dso_who.png">    </p:cNvPr>
+          <p:cNvPicPr>
+            <a:picLocks noChangeAspect="1"/>
+          </p:cNvPicPr>
+          <p:nvPr/>
+        </p:nvPicPr>
+        <p:blipFill>
+          <a:blip r:embed="rId1"/>
+          <a:stretch>
+            <a:fillRect/>
+          </a:stretch>
+        </p:blipFill>
+        <p:spPr>
+          <a:xfrm>
+            <a:off x="988263" y="1444752"/>
+            <a:ext cx="4607153" cy="3090672"/>
+          </a:xfrm>
+          <a:prstGeom prst="rect">
+            <a:avLst/>
+          </a:prstGeom>
+        </p:spPr>
+      </p:pic>
+      <p:sp>
+        <p:nvSpPr>
+          <p:cNvPr id="5" name="Text 2"/>
+          <p:cNvSpPr txBox="1"/>
+          <p:nvPr/>
+        </p:nvSpPr>
+        <p:spPr>
+          <a:xfrm>
+            <a:off x="502920" y="4608576"/>
+            <a:ext cx="5577840" cy="237744"/>
+          </a:xfrm>
+          <a:prstGeom prst="rect">
+            <a:avLst/>
+          </a:prstGeom>
+          <a:noFill/>
+          <a:ln/>
+        </p:spPr>
+        <p:txBody>
+          <a:bodyPr wrap="square" lIns="0" tIns="0" rIns="0" bIns="0" rtlCol="0" anchor="t"/>
+          <a:lstStyle/>
+          <a:p>
+            <a:pPr indent="0" marL="0">
+              <a:buNone/>
+            </a:pPr>
+            <a:r>
+              <a:rPr lang="en-US" sz="800" i="1" dirty="0">
+                <a:solidFill>
+                  <a:srgbClr val="6B7585"/>
+                </a:solidFill>
+              </a:rPr>
+              <a:t>Snipped from the Financial Controller Pack, DSO tab, the ten largest amounts owed at month end.</a:t>
+            </a:r>
+            <a:endParaRPr lang="en-US" sz="800" dirty="0"/>
+          </a:p>
+        </p:txBody>
+      </p:sp>
+      <p:sp>
+        <p:nvSpPr>
+          <p:cNvPr id="6" name="commentary panel"/>
           <p:cNvSpPr/>
           <p:nvPr/>
         </p:nvSpPr>
         <p:spPr>
           <a:xfrm>
-            <a:off x="6446520" y="1600200"/>
-            <a:ext cx="2651760" cy="2651760"/>
-          </a:xfrm>
-          <a:prstGeom prst="ellipse">
+            <a:off x="6263640" y="1463040"/>
+            <a:ext cx="2377440" cy="3154680"/>
+          </a:xfrm>
+          <a:prstGeom prst="rect">
             <a:avLst/>
           </a:prstGeom>
           <a:solidFill>
-            <a:srgbClr val="6D71FF">
-              <a:alpha val="55000"/>
-            </a:srgbClr>
+            <a:srgbClr val="E8F9F8"/>
           </a:solidFill>
           <a:ln/>
         </p:spPr>
       </p:sp>
       <p:sp>
         <p:nvSpPr>
-          <p:cNvPr id="3" name="Shape 1"/>
-          <p:cNvSpPr/>
-          <p:nvPr/>
-        </p:nvSpPr>
-        <p:spPr>
-          <a:xfrm>
-            <a:off x="502920" y="1874520"/>
-            <a:ext cx="868680" cy="868680"/>
-          </a:xfrm>
-          <a:prstGeom prst="rect">
-            <a:avLst/>
-          </a:prstGeom>
-          <a:solidFill>
-            <a:srgbClr val="3FD0C9"/>
-          </a:solidFill>
-          <a:ln/>
-        </p:spPr>
-      </p:sp>
-      <p:sp>
-        <p:nvSpPr>
-          <p:cNvPr id="4" name="Text 2"/>
-          <p:cNvSpPr txBox="1"/>
-          <p:nvPr/>
-        </p:nvSpPr>
-        <p:spPr>
-          <a:xfrm>
-            <a:off x="502920" y="1874520"/>
-            <a:ext cx="868680" cy="868680"/>
+          <p:cNvPr id="7" name="Text 4"/>
+          <p:cNvSpPr txBox="1"/>
+          <p:nvPr/>
+        </p:nvSpPr>
+        <p:spPr>
+          <a:xfrm>
+            <a:off x="6446520" y="1627632"/>
+            <a:ext cx="2011680" cy="228600"/>
           </a:xfrm>
           <a:prstGeom prst="rect">
             <a:avLst/>
@@ -5951,126 +6160,192 @@
           <a:bodyPr wrap="square" lIns="0" tIns="0" rIns="0" bIns="0" rtlCol="0" anchor="ctr"/>
           <a:lstStyle/>
           <a:p>
-            <a:pPr algn="ctr" indent="0" marL="0">
-              <a:buNone/>
-            </a:pPr>
-            <a:r>
-              <a:rPr lang="en-US" sz="2600" b="1" dirty="0">
-                <a:solidFill>
-                  <a:srgbClr val="242C39"/>
-                </a:solidFill>
-              </a:rPr>
-              <a:t>04</a:t>
-            </a:r>
-            <a:endParaRPr lang="en-US" sz="2600" dirty="0"/>
-          </a:p>
-        </p:txBody>
-      </p:sp>
-      <p:sp>
-        <p:nvSpPr>
-          <p:cNvPr id="5" name="Text 3"/>
-          <p:cNvSpPr txBox="1"/>
-          <p:nvPr/>
-        </p:nvSpPr>
-        <p:spPr>
-          <a:xfrm>
-            <a:off x="502920" y="411480"/>
-            <a:ext cx="3657600" cy="274320"/>
-          </a:xfrm>
-          <a:prstGeom prst="rect">
-            <a:avLst/>
-          </a:prstGeom>
-          <a:noFill/>
-          <a:ln/>
-        </p:spPr>
-        <p:txBody>
-          <a:bodyPr wrap="square" lIns="0" tIns="0" rIns="0" bIns="0" rtlCol="0" anchor="ctr"/>
-          <a:lstStyle/>
-          <a:p>
             <a:pPr indent="0" marL="0">
               <a:buNone/>
             </a:pPr>
             <a:r>
-              <a:rPr lang="en-US" sz="950" b="1" spc="220" kern="0" dirty="0">
-                <a:solidFill>
-                  <a:srgbClr val="3FD0C9"/>
-                </a:solidFill>
-              </a:rPr>
-              <a:t>SECTION</a:t>
+              <a:rPr lang="en-US" sz="900" b="1" spc="180" kern="0" dirty="0">
+                <a:solidFill>
+                  <a:srgbClr val="005358"/>
+                </a:solidFill>
+              </a:rPr>
+              <a:t>COMMENTARY</a:t>
+            </a:r>
+            <a:endParaRPr lang="en-US" sz="900" dirty="0"/>
+          </a:p>
+        </p:txBody>
+      </p:sp>
+      <p:sp>
+        <p:nvSpPr>
+          <p:cNvPr id="8" name="Text 5"/>
+          <p:cNvSpPr txBox="1"/>
+          <p:nvPr/>
+        </p:nvSpPr>
+        <p:spPr>
+          <a:xfrm>
+            <a:off x="6446520" y="1901952"/>
+            <a:ext cx="2011680" cy="2551176"/>
+          </a:xfrm>
+          <a:prstGeom prst="rect">
+            <a:avLst/>
+          </a:prstGeom>
+          <a:noFill/>
+          <a:ln/>
+        </p:spPr>
+        <p:txBody>
+          <a:bodyPr wrap="square" lIns="0" tIns="0" rIns="0" bIns="0" rtlCol="0" anchor="t">
+            <a:normAutofit/>
+          </a:bodyPr>
+          <a:lstStyle/>
+          <a:p>
+            <a:pPr marL="342900" indent="-342900">
+              <a:lnSpc>
+                <a:spcPts val="1300"/>
+              </a:lnSpc>
+              <a:spcAft>
+                <a:spcPts val="500"/>
+              </a:spcAft>
+              <a:buSzPct val="100000"/>
+              <a:buChar char="•"/>
+            </a:pPr>
+            <a:r>
+              <a:rPr lang="en-US" sz="950" dirty="0">
+                <a:solidFill>
+                  <a:srgbClr val="3A4453"/>
+                </a:solidFill>
+              </a:rPr>
+              <a:t>Aware Super owes 277,395 on its own, 33% of everything owed to us.</a:t>
             </a:r>
             <a:endParaRPr lang="en-US" sz="950" dirty="0"/>
           </a:p>
-        </p:txBody>
-      </p:sp>
-      <p:sp>
-        <p:nvSpPr>
-          <p:cNvPr id="6" name="Text 4"/>
-          <p:cNvSpPr txBox="1"/>
-          <p:nvPr/>
-        </p:nvSpPr>
-        <p:spPr>
-          <a:xfrm>
-            <a:off x="1600200" y="1874520"/>
-            <a:ext cx="5943600" cy="502920"/>
-          </a:xfrm>
-          <a:prstGeom prst="rect">
-            <a:avLst/>
-          </a:prstGeom>
-          <a:noFill/>
-          <a:ln/>
-        </p:spPr>
-        <p:txBody>
-          <a:bodyPr wrap="square" lIns="0" tIns="0" rIns="0" bIns="0" rtlCol="0" anchor="ctr"/>
-          <a:lstStyle/>
-          <a:p>
-            <a:pPr indent="0" marL="0">
-              <a:buNone/>
-            </a:pPr>
-            <a:r>
-              <a:rPr lang="en-US" sz="2800" b="1" dirty="0">
-                <a:solidFill>
-                  <a:srgbClr val="FFFFFF"/>
-                </a:solidFill>
-              </a:rPr>
-              <a:t>People and utilisation</a:t>
-            </a:r>
-            <a:endParaRPr lang="en-US" sz="2800" dirty="0"/>
-          </a:p>
-        </p:txBody>
-      </p:sp>
-      <p:sp>
-        <p:nvSpPr>
-          <p:cNvPr id="7" name="Text 5"/>
-          <p:cNvSpPr txBox="1"/>
-          <p:nvPr/>
-        </p:nvSpPr>
-        <p:spPr>
-          <a:xfrm>
-            <a:off x="1600200" y="2395728"/>
-            <a:ext cx="5943600" cy="347472"/>
-          </a:xfrm>
-          <a:prstGeom prst="rect">
-            <a:avLst/>
-          </a:prstGeom>
-          <a:noFill/>
-          <a:ln/>
-        </p:spPr>
-        <p:txBody>
-          <a:bodyPr wrap="square" lIns="0" tIns="0" rIns="0" bIns="0" rtlCol="0" anchor="ctr"/>
-          <a:lstStyle/>
-          <a:p>
-            <a:pPr indent="0" marL="0">
-              <a:buNone/>
-            </a:pPr>
-            <a:r>
-              <a:rPr lang="en-US" sz="1200" dirty="0">
-                <a:solidFill>
-                  <a:srgbClr val="C9CED6"/>
-                </a:solidFill>
-              </a:rPr>
-              <a:t>Chargeable hours and the profit they produce</a:t>
-            </a:r>
-            <a:endParaRPr lang="en-US" sz="1200" dirty="0"/>
+          <a:p>
+            <a:pPr marL="342900" indent="-342900">
+              <a:lnSpc>
+                <a:spcPts val="1300"/>
+              </a:lnSpc>
+              <a:spcAft>
+                <a:spcPts val="500"/>
+              </a:spcAft>
+              <a:buSzPct val="100000"/>
+              <a:buChar char="•"/>
+            </a:pPr>
+            <a:r>
+              <a:rPr lang="en-US" sz="950" dirty="0">
+                <a:solidFill>
+                  <a:srgbClr val="3A4453"/>
+                </a:solidFill>
+              </a:rPr>
+              <a:t>With Deloitte Services P/L for Deloitte Services Trust at 131,575, two customers hold 49% of the book.</a:t>
+            </a:r>
+            <a:endParaRPr lang="en-US" sz="950" dirty="0"/>
+          </a:p>
+          <a:p>
+            <a:pPr marL="342900" indent="-342900">
+              <a:lnSpc>
+                <a:spcPts val="1300"/>
+              </a:lnSpc>
+              <a:spcAft>
+                <a:spcPts val="500"/>
+              </a:spcAft>
+              <a:buSzPct val="100000"/>
+              <a:buChar char="•"/>
+            </a:pPr>
+            <a:r>
+              <a:rPr lang="en-US" sz="950" dirty="0">
+                <a:solidFill>
+                  <a:srgbClr val="3A4453"/>
+                </a:solidFill>
+              </a:rPr>
+              <a:t>29% of what we are owed is already late, 244,538.</a:t>
+            </a:r>
+            <a:endParaRPr lang="en-US" sz="950" dirty="0"/>
+          </a:p>
+          <a:p>
+            <a:pPr marL="342900" indent="-342900">
+              <a:lnSpc>
+                <a:spcPts val="1300"/>
+              </a:lnSpc>
+              <a:spcAft>
+                <a:spcPts val="500"/>
+              </a:spcAft>
+              <a:buSzPct val="100000"/>
+              <a:buChar char="•"/>
+            </a:pPr>
+            <a:r>
+              <a:rPr lang="en-US" sz="950" dirty="0">
+                <a:solidFill>
+                  <a:srgbClr val="3A4453"/>
+                </a:solidFill>
+              </a:rPr>
+              <a:t>Chase those two first. Everything below them is small by comparison.</a:t>
+            </a:r>
+            <a:endParaRPr lang="en-US" sz="950" dirty="0"/>
+          </a:p>
+          <a:p>
+            <a:pPr marL="342900" indent="-342900">
+              <a:lnSpc>
+                <a:spcPts val="1300"/>
+              </a:lnSpc>
+              <a:spcAft>
+                <a:spcPts val="500"/>
+              </a:spcAft>
+              <a:buSzPct val="100000"/>
+              <a:buChar char="•"/>
+            </a:pPr>
+            <a:r>
+              <a:rPr lang="en-US" sz="950" dirty="0">
+                <a:solidFill>
+                  <a:srgbClr val="3A4453"/>
+                </a:solidFill>
+              </a:rPr>
+              <a:t>A general collections push is not the answer. Two phone calls are.</a:t>
+            </a:r>
+            <a:endParaRPr lang="en-US" sz="950" dirty="0"/>
+          </a:p>
+        </p:txBody>
+      </p:sp>
+      <p:sp>
+        <p:nvSpPr>
+          <p:cNvPr id="25" name="Slide Number Placeholder 0"/>
+          <p:cNvSpPr>
+            <a:spLocks noGrp="1"/>
+          </p:cNvSpPr>
+          <p:nvPr>
+            <p:ph type="sldNum" sz="quarter" idx="4294967295"/>
+          </p:nvPr>
+        </p:nvSpPr>
+        <p:spPr>
+          <a:xfrm>
+            <a:off x="8092440" y="4736592"/>
+            <a:ext cx="548640" cy="228600"/>
+          </a:xfrm>
+          <a:prstGeom prst="rect">
+            <a:avLst/>
+          </a:prstGeom>
+          <a:extLst>
+            <a:ext uri="{C572A759-6A51-4108-AA02-DFA0A04FC94B}">
+              <ma14:wrappingTextBoxFlag xmlns:ma14="http://schemas.microsoft.com/office/mac/drawingml/2011/main" val="0"/>
+            </a:ext>
+          </a:extLst>
+        </p:spPr>
+        <p:txBody>
+          <a:bodyPr/>
+          <a:lstStyle>
+            <a:lvl1pPr>
+              <a:defRPr sz="800">
+                <a:solidFill>
+                  <a:srgbClr val="6B7585"/>
+                </a:solidFill>
+              </a:defRPr>
+            </a:lvl1pPr>
+          </a:lstStyle>
+          <a:p>
+            <a:pPr algn="r"/>
+            <a:fld id="{F7021451-1387-4CA6-816F-3879F97B5CBC}" type="slidenum">
+              <a:rPr b="0" lang="en-US"/>
+              <a:t>17</a:t>
+            </a:fld>
+            <a:endParaRPr lang="en-US"/>
           </a:p>
         </p:txBody>
       </p:sp>
@@ -6101,14 +6376,56 @@
       </p:grpSpPr>
       <p:sp>
         <p:nvSpPr>
-          <p:cNvPr id="2" name="Text 0"/>
-          <p:cNvSpPr txBox="1"/>
-          <p:nvPr/>
-        </p:nvSpPr>
-        <p:spPr>
-          <a:xfrm>
-            <a:off x="502920" y="365760"/>
-            <a:ext cx="6400800" cy="274320"/>
+          <p:cNvPr id="2" name="divider circle"/>
+          <p:cNvSpPr/>
+          <p:nvPr/>
+        </p:nvSpPr>
+        <p:spPr>
+          <a:xfrm>
+            <a:off x="6446520" y="1600200"/>
+            <a:ext cx="2651760" cy="2651760"/>
+          </a:xfrm>
+          <a:prstGeom prst="ellipse">
+            <a:avLst/>
+          </a:prstGeom>
+          <a:solidFill>
+            <a:srgbClr val="6D71FF">
+              <a:alpha val="55000"/>
+            </a:srgbClr>
+          </a:solidFill>
+          <a:ln/>
+        </p:spPr>
+      </p:sp>
+      <p:sp>
+        <p:nvSpPr>
+          <p:cNvPr id="3" name="Shape 1"/>
+          <p:cNvSpPr/>
+          <p:nvPr/>
+        </p:nvSpPr>
+        <p:spPr>
+          <a:xfrm>
+            <a:off x="502920" y="1874520"/>
+            <a:ext cx="868680" cy="868680"/>
+          </a:xfrm>
+          <a:prstGeom prst="rect">
+            <a:avLst/>
+          </a:prstGeom>
+          <a:solidFill>
+            <a:srgbClr val="3FD0C9"/>
+          </a:solidFill>
+          <a:ln/>
+        </p:spPr>
+      </p:sp>
+      <p:sp>
+        <p:nvSpPr>
+          <p:cNvPr id="4" name="Text 2"/>
+          <p:cNvSpPr txBox="1"/>
+          <p:nvPr/>
+        </p:nvSpPr>
+        <p:spPr>
+          <a:xfrm>
+            <a:off x="502920" y="1874520"/>
+            <a:ext cx="868680" cy="868680"/>
           </a:xfrm>
           <a:prstGeom prst="rect">
             <a:avLst/>
@@ -6120,16 +6437,52 @@
           <a:bodyPr wrap="square" lIns="0" tIns="0" rIns="0" bIns="0" rtlCol="0" anchor="ctr"/>
           <a:lstStyle/>
           <a:p>
+            <a:pPr algn="ctr" indent="0" marL="0">
+              <a:buNone/>
+            </a:pPr>
+            <a:r>
+              <a:rPr lang="en-US" sz="2600" b="1" dirty="0">
+                <a:solidFill>
+                  <a:srgbClr val="242C39"/>
+                </a:solidFill>
+              </a:rPr>
+              <a:t>04</a:t>
+            </a:r>
+            <a:endParaRPr lang="en-US" sz="2600" dirty="0"/>
+          </a:p>
+        </p:txBody>
+      </p:sp>
+      <p:sp>
+        <p:nvSpPr>
+          <p:cNvPr id="5" name="Text 3"/>
+          <p:cNvSpPr txBox="1"/>
+          <p:nvPr/>
+        </p:nvSpPr>
+        <p:spPr>
+          <a:xfrm>
+            <a:off x="502920" y="411480"/>
+            <a:ext cx="3657600" cy="274320"/>
+          </a:xfrm>
+          <a:prstGeom prst="rect">
+            <a:avLst/>
+          </a:prstGeom>
+          <a:noFill/>
+          <a:ln/>
+        </p:spPr>
+        <p:txBody>
+          <a:bodyPr wrap="square" lIns="0" tIns="0" rIns="0" bIns="0" rtlCol="0" anchor="ctr"/>
+          <a:lstStyle/>
+          <a:p>
             <a:pPr indent="0" marL="0">
               <a:buNone/>
             </a:pPr>
             <a:r>
               <a:rPr lang="en-US" sz="950" b="1" spc="220" kern="0" dirty="0">
                 <a:solidFill>
-                  <a:srgbClr val="122B82"/>
-                </a:solidFill>
-              </a:rPr>
-              <a:t>PEOPLE AND UTILISATION</a:t>
+                  <a:srgbClr val="3FD0C9"/>
+                </a:solidFill>
+              </a:rPr>
+              <a:t>SECTION</a:t>
             </a:r>
             <a:endParaRPr lang="en-US" sz="950" dirty="0"/>
           </a:p>
@@ -6137,14 +6490,14 @@
       </p:sp>
       <p:sp>
         <p:nvSpPr>
-          <p:cNvPr id="3" name="Text 1"/>
-          <p:cNvSpPr txBox="1"/>
-          <p:nvPr/>
-        </p:nvSpPr>
-        <p:spPr>
-          <a:xfrm>
-            <a:off x="502920" y="640080"/>
-            <a:ext cx="7315200" cy="685800"/>
+          <p:cNvPr id="6" name="Text 4"/>
+          <p:cNvSpPr txBox="1"/>
+          <p:nvPr/>
+        </p:nvSpPr>
+        <p:spPr>
+          <a:xfrm>
+            <a:off x="1600200" y="1874520"/>
+            <a:ext cx="5943600" cy="502920"/>
           </a:xfrm>
           <a:prstGeom prst="rect">
             <a:avLst/>
@@ -6160,303 +6513,50 @@
               <a:buNone/>
             </a:pPr>
             <a:r>
-              <a:rPr lang="en-US" sz="2700" b="1" dirty="0">
-                <a:solidFill>
-                  <a:srgbClr val="242C39"/>
-                </a:solidFill>
-              </a:rPr>
-              <a:t>Utilisation by department, Sep 26</a:t>
-            </a:r>
-            <a:endParaRPr lang="en-US" sz="2700" dirty="0"/>
-          </a:p>
-        </p:txBody>
-      </p:sp>
-      <p:pic>
-        <p:nvPicPr>
-          <p:cNvPr id="4" name="snip util" descr="/home/user/Claude/deck/snips/util.png">    </p:cNvPr>
-          <p:cNvPicPr>
-            <a:picLocks noChangeAspect="1"/>
-          </p:cNvPicPr>
-          <p:nvPr/>
-        </p:nvPicPr>
-        <p:blipFill>
-          <a:blip r:embed="rId1"/>
-          <a:stretch>
-            <a:fillRect/>
-          </a:stretch>
-        </p:blipFill>
-        <p:spPr>
-          <a:xfrm>
-            <a:off x="942821" y="1444752"/>
-            <a:ext cx="7258357" cy="1938528"/>
-          </a:xfrm>
-          <a:prstGeom prst="rect">
-            <a:avLst/>
-          </a:prstGeom>
-        </p:spPr>
-      </p:pic>
-      <p:sp>
-        <p:nvSpPr>
-          <p:cNvPr id="5" name="Text 2"/>
-          <p:cNvSpPr txBox="1"/>
-          <p:nvPr/>
-        </p:nvSpPr>
-        <p:spPr>
-          <a:xfrm>
-            <a:off x="502920" y="3456432"/>
-            <a:ext cx="8138160" cy="237744"/>
-          </a:xfrm>
-          <a:prstGeom prst="rect">
-            <a:avLst/>
-          </a:prstGeom>
-          <a:noFill/>
-          <a:ln/>
-        </p:spPr>
-        <p:txBody>
-          <a:bodyPr wrap="square" lIns="0" tIns="0" rIns="0" bIns="0" rtlCol="0" anchor="t"/>
+              <a:rPr lang="en-US" sz="2800" b="1" dirty="0">
+                <a:solidFill>
+                  <a:srgbClr val="FFFFFF"/>
+                </a:solidFill>
+              </a:rPr>
+              <a:t>People and utilisation</a:t>
+            </a:r>
+            <a:endParaRPr lang="en-US" sz="2800" dirty="0"/>
+          </a:p>
+        </p:txBody>
+      </p:sp>
+      <p:sp>
+        <p:nvSpPr>
+          <p:cNvPr id="7" name="Text 5"/>
+          <p:cNvSpPr txBox="1"/>
+          <p:nvPr/>
+        </p:nvSpPr>
+        <p:spPr>
+          <a:xfrm>
+            <a:off x="1600200" y="2395728"/>
+            <a:ext cx="5943600" cy="347472"/>
+          </a:xfrm>
+          <a:prstGeom prst="rect">
+            <a:avLst/>
+          </a:prstGeom>
+          <a:noFill/>
+          <a:ln/>
+        </p:spPr>
+        <p:txBody>
+          <a:bodyPr wrap="square" lIns="0" tIns="0" rIns="0" bIns="0" rtlCol="0" anchor="ctr"/>
           <a:lstStyle/>
           <a:p>
             <a:pPr indent="0" marL="0">
               <a:buNone/>
             </a:pPr>
             <a:r>
-              <a:rPr lang="en-US" sz="800" i="1" dirty="0">
-                <a:solidFill>
-                  <a:srgbClr val="6B7585"/>
-                </a:solidFill>
-              </a:rPr>
-              <a:t>Snipped from the Financial Controller Pack, Utilisation tab, hours by department, the month.</a:t>
-            </a:r>
-            <a:endParaRPr lang="en-US" sz="800" dirty="0"/>
-          </a:p>
-        </p:txBody>
-      </p:sp>
-      <p:sp>
-        <p:nvSpPr>
-          <p:cNvPr id="6" name="commentary panel"/>
-          <p:cNvSpPr/>
-          <p:nvPr/>
-        </p:nvSpPr>
-        <p:spPr>
-          <a:xfrm>
-            <a:off x="502920" y="3675888"/>
-            <a:ext cx="8138160" cy="950976"/>
-          </a:xfrm>
-          <a:prstGeom prst="rect">
-            <a:avLst/>
-          </a:prstGeom>
-          <a:solidFill>
-            <a:srgbClr val="E8F9F8"/>
-          </a:solidFill>
-          <a:ln/>
-        </p:spPr>
-      </p:sp>
-      <p:sp>
-        <p:nvSpPr>
-          <p:cNvPr id="7" name="Text 4"/>
-          <p:cNvSpPr txBox="1"/>
-          <p:nvPr/>
-        </p:nvSpPr>
-        <p:spPr>
-          <a:xfrm>
-            <a:off x="685800" y="3758184"/>
-            <a:ext cx="2743200" cy="164592"/>
-          </a:xfrm>
-          <a:prstGeom prst="rect">
-            <a:avLst/>
-          </a:prstGeom>
-          <a:noFill/>
-          <a:ln/>
-        </p:spPr>
-        <p:txBody>
-          <a:bodyPr wrap="square" lIns="0" tIns="0" rIns="0" bIns="0" rtlCol="0" anchor="ctr"/>
-          <a:lstStyle/>
-          <a:p>
-            <a:pPr indent="0" marL="0">
-              <a:buNone/>
-            </a:pPr>
-            <a:r>
-              <a:rPr lang="en-US" sz="850" b="1" spc="180" kern="0" dirty="0">
-                <a:solidFill>
-                  <a:srgbClr val="005358"/>
-                </a:solidFill>
-              </a:rPr>
-              <a:t>COMMENTARY</a:t>
-            </a:r>
-            <a:endParaRPr lang="en-US" sz="850" dirty="0"/>
-          </a:p>
-        </p:txBody>
-      </p:sp>
-      <p:sp>
-        <p:nvSpPr>
-          <p:cNvPr id="8" name="Text 5"/>
-          <p:cNvSpPr txBox="1"/>
-          <p:nvPr/>
-        </p:nvSpPr>
-        <p:spPr>
-          <a:xfrm>
-            <a:off x="685800" y="3941064"/>
-            <a:ext cx="3703320" cy="621792"/>
-          </a:xfrm>
-          <a:prstGeom prst="rect">
-            <a:avLst/>
-          </a:prstGeom>
-          <a:noFill/>
-          <a:ln/>
-        </p:spPr>
-        <p:txBody>
-          <a:bodyPr wrap="square" lIns="0" tIns="0" rIns="0" bIns="0" rtlCol="0" anchor="t"/>
-          <a:lstStyle/>
-          <a:p>
-            <a:pPr marL="342900" indent="-342900">
-              <a:lnSpc>
-                <a:spcPts val="1000"/>
-              </a:lnSpc>
-              <a:spcAft>
-                <a:spcPts val="300"/>
-              </a:spcAft>
-              <a:buSzPct val="100000"/>
-              <a:buChar char="•"/>
-            </a:pPr>
-            <a:r>
-              <a:rPr lang="en-US" sz="800" dirty="0">
-                <a:solidFill>
-                  <a:srgbClr val="3A4453"/>
-                </a:solidFill>
-              </a:rPr>
-              <a:t>Support shows 11 non-chargeable hours on 2,132 chargeable. That is not credible.</a:t>
-            </a:r>
-            <a:endParaRPr lang="en-US" sz="800" dirty="0"/>
-          </a:p>
-          <a:p>
-            <a:pPr marL="342900" indent="-342900">
-              <a:lnSpc>
-                <a:spcPts val="1000"/>
-              </a:lnSpc>
-              <a:spcAft>
-                <a:spcPts val="300"/>
-              </a:spcAft>
-              <a:buSzPct val="100000"/>
-              <a:buChar char="•"/>
-            </a:pPr>
-            <a:r>
-              <a:rPr lang="en-US" sz="800" dirty="0">
-                <a:solidFill>
-                  <a:srgbClr val="3A4453"/>
-                </a:solidFill>
-              </a:rPr>
-              <a:t>Until that coding is fixed the 99.5% means nothing, and nor does the target.</a:t>
-            </a:r>
-            <a:endParaRPr lang="en-US" sz="800" dirty="0"/>
-          </a:p>
-        </p:txBody>
-      </p:sp>
-      <p:sp>
-        <p:nvSpPr>
-          <p:cNvPr id="9" name="Text 6"/>
-          <p:cNvSpPr txBox="1"/>
-          <p:nvPr/>
-        </p:nvSpPr>
-        <p:spPr>
-          <a:xfrm>
-            <a:off x="4663440" y="3941064"/>
-            <a:ext cx="3703320" cy="621792"/>
-          </a:xfrm>
-          <a:prstGeom prst="rect">
-            <a:avLst/>
-          </a:prstGeom>
-          <a:noFill/>
-          <a:ln/>
-        </p:spPr>
-        <p:txBody>
-          <a:bodyPr wrap="square" lIns="0" tIns="0" rIns="0" bIns="0" rtlCol="0" anchor="t"/>
-          <a:lstStyle/>
-          <a:p>
-            <a:pPr marL="342900" indent="-342900">
-              <a:lnSpc>
-                <a:spcPts val="1000"/>
-              </a:lnSpc>
-              <a:spcAft>
-                <a:spcPts val="300"/>
-              </a:spcAft>
-              <a:buSzPct val="100000"/>
-              <a:buChar char="•"/>
-            </a:pPr>
-            <a:r>
-              <a:rPr lang="en-US" sz="800" dirty="0">
-                <a:solidFill>
-                  <a:srgbClr val="3A4453"/>
-                </a:solidFill>
-              </a:rPr>
-              <a:t>Events is at 49.1% with 333 hours of leave. Real capacity is sitting idle.</a:t>
-            </a:r>
-            <a:endParaRPr lang="en-US" sz="800" dirty="0"/>
-          </a:p>
-          <a:p>
-            <a:pPr marL="342900" indent="-342900">
-              <a:lnSpc>
-                <a:spcPts val="1000"/>
-              </a:lnSpc>
-              <a:spcAft>
-                <a:spcPts val="300"/>
-              </a:spcAft>
-              <a:buSzPct val="100000"/>
-              <a:buChar char="•"/>
-            </a:pPr>
-            <a:r>
-              <a:rPr lang="en-US" sz="800" dirty="0">
-                <a:solidFill>
-                  <a:srgbClr val="3A4453"/>
-                </a:solidFill>
-              </a:rPr>
-              <a:t>Consulting at 26.8% confirms there is almost no work there to bill.</a:t>
-            </a:r>
-            <a:endParaRPr lang="en-US" sz="800" dirty="0"/>
-          </a:p>
-        </p:txBody>
-      </p:sp>
-      <p:sp>
-        <p:nvSpPr>
-          <p:cNvPr id="25" name="Slide Number Placeholder 0"/>
-          <p:cNvSpPr>
-            <a:spLocks noGrp="1"/>
-          </p:cNvSpPr>
-          <p:nvPr>
-            <p:ph type="sldNum" sz="quarter" idx="4294967295"/>
-          </p:nvPr>
-        </p:nvSpPr>
-        <p:spPr>
-          <a:xfrm>
-            <a:off x="8092440" y="4736592"/>
-            <a:ext cx="548640" cy="228600"/>
-          </a:xfrm>
-          <a:prstGeom prst="rect">
-            <a:avLst/>
-          </a:prstGeom>
-          <a:extLst>
-            <a:ext uri="{C572A759-6A51-4108-AA02-DFA0A04FC94B}">
-              <ma14:wrappingTextBoxFlag xmlns:ma14="http://schemas.microsoft.com/office/mac/drawingml/2011/main" val="0"/>
-            </a:ext>
-          </a:extLst>
-        </p:spPr>
-        <p:txBody>
-          <a:bodyPr/>
-          <a:lstStyle>
-            <a:lvl1pPr>
-              <a:defRPr sz="800">
-                <a:solidFill>
-                  <a:srgbClr val="6B7585"/>
-                </a:solidFill>
-              </a:defRPr>
-            </a:lvl1pPr>
-          </a:lstStyle>
-          <a:p>
-            <a:pPr algn="r"/>
-            <a:fld id="{F7021451-1387-4CA6-816F-3879F97B5CBC}" type="slidenum">
-              <a:rPr b="0" lang="en-US"/>
-              <a:t>18</a:t>
-            </a:fld>
-            <a:endParaRPr lang="en-US"/>
+              <a:rPr lang="en-US" sz="1200" dirty="0">
+                <a:solidFill>
+                  <a:srgbClr val="C9CED6"/>
+                </a:solidFill>
+              </a:rPr>
+              <a:t>Chargeable hours and the profit they produce</a:t>
+            </a:r>
+            <a:endParaRPr lang="en-US" sz="1200" dirty="0"/>
           </a:p>
         </p:txBody>
       </p:sp>
@@ -6487,56 +6587,166 @@
       </p:grpSpPr>
       <p:sp>
         <p:nvSpPr>
-          <p:cNvPr id="2" name="divider circle"/>
+          <p:cNvPr id="2" name="Text 0"/>
+          <p:cNvSpPr txBox="1"/>
+          <p:nvPr/>
+        </p:nvSpPr>
+        <p:spPr>
+          <a:xfrm>
+            <a:off x="502920" y="365760"/>
+            <a:ext cx="6400800" cy="274320"/>
+          </a:xfrm>
+          <a:prstGeom prst="rect">
+            <a:avLst/>
+          </a:prstGeom>
+          <a:noFill/>
+          <a:ln/>
+        </p:spPr>
+        <p:txBody>
+          <a:bodyPr wrap="square" lIns="0" tIns="0" rIns="0" bIns="0" rtlCol="0" anchor="ctr"/>
+          <a:lstStyle/>
+          <a:p>
+            <a:pPr indent="0" marL="0">
+              <a:buNone/>
+            </a:pPr>
+            <a:r>
+              <a:rPr lang="en-US" sz="950" b="1" spc="220" kern="0" dirty="0">
+                <a:solidFill>
+                  <a:srgbClr val="122B82"/>
+                </a:solidFill>
+              </a:rPr>
+              <a:t>PEOPLE AND UTILISATION</a:t>
+            </a:r>
+            <a:endParaRPr lang="en-US" sz="950" dirty="0"/>
+          </a:p>
+        </p:txBody>
+      </p:sp>
+      <p:sp>
+        <p:nvSpPr>
+          <p:cNvPr id="3" name="Text 1"/>
+          <p:cNvSpPr txBox="1"/>
+          <p:nvPr/>
+        </p:nvSpPr>
+        <p:spPr>
+          <a:xfrm>
+            <a:off x="502920" y="640080"/>
+            <a:ext cx="7315200" cy="685800"/>
+          </a:xfrm>
+          <a:prstGeom prst="rect">
+            <a:avLst/>
+          </a:prstGeom>
+          <a:noFill/>
+          <a:ln/>
+        </p:spPr>
+        <p:txBody>
+          <a:bodyPr wrap="square" lIns="0" tIns="0" rIns="0" bIns="0" rtlCol="0" anchor="ctr"/>
+          <a:lstStyle/>
+          <a:p>
+            <a:pPr indent="0" marL="0">
+              <a:buNone/>
+            </a:pPr>
+            <a:r>
+              <a:rPr lang="en-US" sz="2700" b="1" dirty="0">
+                <a:solidFill>
+                  <a:srgbClr val="242C39"/>
+                </a:solidFill>
+              </a:rPr>
+              <a:t>How each department spent its hours, Sep 26</a:t>
+            </a:r>
+            <a:endParaRPr lang="en-US" sz="2700" dirty="0"/>
+          </a:p>
+        </p:txBody>
+      </p:sp>
+      <p:pic>
+        <p:nvPicPr>
+          <p:cNvPr id="4" name="snip util_chart" descr="/home/user/Claude/deck/snips/util_chart.png">    </p:cNvPr>
+          <p:cNvPicPr>
+            <a:picLocks noChangeAspect="1"/>
+          </p:cNvPicPr>
+          <p:nvPr/>
+        </p:nvPicPr>
+        <p:blipFill>
+          <a:blip r:embed="rId1"/>
+          <a:stretch>
+            <a:fillRect/>
+          </a:stretch>
+        </p:blipFill>
+        <p:spPr>
+          <a:xfrm>
+            <a:off x="502920" y="1444752"/>
+            <a:ext cx="5577840" cy="2613700"/>
+          </a:xfrm>
+          <a:prstGeom prst="rect">
+            <a:avLst/>
+          </a:prstGeom>
+        </p:spPr>
+      </p:pic>
+      <p:sp>
+        <p:nvSpPr>
+          <p:cNvPr id="5" name="Text 2"/>
+          <p:cNvSpPr txBox="1"/>
+          <p:nvPr/>
+        </p:nvSpPr>
+        <p:spPr>
+          <a:xfrm>
+            <a:off x="502920" y="4131604"/>
+            <a:ext cx="5577840" cy="237744"/>
+          </a:xfrm>
+          <a:prstGeom prst="rect">
+            <a:avLst/>
+          </a:prstGeom>
+          <a:noFill/>
+          <a:ln/>
+        </p:spPr>
+        <p:txBody>
+          <a:bodyPr wrap="square" lIns="0" tIns="0" rIns="0" bIns="0" rtlCol="0" anchor="t"/>
+          <a:lstStyle/>
+          <a:p>
+            <a:pPr indent="0" marL="0">
+              <a:buNone/>
+            </a:pPr>
+            <a:r>
+              <a:rPr lang="en-US" sz="800" i="1" dirty="0">
+                <a:solidFill>
+                  <a:srgbClr val="6B7585"/>
+                </a:solidFill>
+              </a:rPr>
+              <a:t>Snipped from the Financial Controller Pack, Utilisation tab, hours by department, each bar scaled to its own total.</a:t>
+            </a:r>
+            <a:endParaRPr lang="en-US" sz="800" dirty="0"/>
+          </a:p>
+        </p:txBody>
+      </p:sp>
+      <p:sp>
+        <p:nvSpPr>
+          <p:cNvPr id="6" name="commentary panel"/>
           <p:cNvSpPr/>
           <p:nvPr/>
         </p:nvSpPr>
         <p:spPr>
           <a:xfrm>
-            <a:off x="6446520" y="1600200"/>
-            <a:ext cx="2651760" cy="2651760"/>
-          </a:xfrm>
-          <a:prstGeom prst="ellipse">
+            <a:off x="6263640" y="1463040"/>
+            <a:ext cx="2377440" cy="3154680"/>
+          </a:xfrm>
+          <a:prstGeom prst="rect">
             <a:avLst/>
           </a:prstGeom>
           <a:solidFill>
-            <a:srgbClr val="6D71FF">
-              <a:alpha val="55000"/>
-            </a:srgbClr>
+            <a:srgbClr val="E8F9F8"/>
           </a:solidFill>
           <a:ln/>
         </p:spPr>
       </p:sp>
       <p:sp>
         <p:nvSpPr>
-          <p:cNvPr id="3" name="Shape 1"/>
-          <p:cNvSpPr/>
-          <p:nvPr/>
-        </p:nvSpPr>
-        <p:spPr>
-          <a:xfrm>
-            <a:off x="502920" y="1874520"/>
-            <a:ext cx="868680" cy="868680"/>
-          </a:xfrm>
-          <a:prstGeom prst="rect">
-            <a:avLst/>
-          </a:prstGeom>
-          <a:solidFill>
-            <a:srgbClr val="3FD0C9"/>
-          </a:solidFill>
-          <a:ln/>
-        </p:spPr>
-      </p:sp>
-      <p:sp>
-        <p:nvSpPr>
-          <p:cNvPr id="4" name="Text 2"/>
-          <p:cNvSpPr txBox="1"/>
-          <p:nvPr/>
-        </p:nvSpPr>
-        <p:spPr>
-          <a:xfrm>
-            <a:off x="502920" y="1874520"/>
-            <a:ext cx="868680" cy="868680"/>
+          <p:cNvPr id="7" name="Text 4"/>
+          <p:cNvSpPr txBox="1"/>
+          <p:nvPr/>
+        </p:nvSpPr>
+        <p:spPr>
+          <a:xfrm>
+            <a:off x="6446520" y="1627632"/>
+            <a:ext cx="2011680" cy="228600"/>
           </a:xfrm>
           <a:prstGeom prst="rect">
             <a:avLst/>
@@ -6548,126 +6758,192 @@
           <a:bodyPr wrap="square" lIns="0" tIns="0" rIns="0" bIns="0" rtlCol="0" anchor="ctr"/>
           <a:lstStyle/>
           <a:p>
-            <a:pPr algn="ctr" indent="0" marL="0">
-              <a:buNone/>
-            </a:pPr>
-            <a:r>
-              <a:rPr lang="en-US" sz="2600" b="1" dirty="0">
-                <a:solidFill>
-                  <a:srgbClr val="242C39"/>
-                </a:solidFill>
-              </a:rPr>
-              <a:t>05</a:t>
-            </a:r>
-            <a:endParaRPr lang="en-US" sz="2600" dirty="0"/>
-          </a:p>
-        </p:txBody>
-      </p:sp>
-      <p:sp>
-        <p:nvSpPr>
-          <p:cNvPr id="5" name="Text 3"/>
-          <p:cNvSpPr txBox="1"/>
-          <p:nvPr/>
-        </p:nvSpPr>
-        <p:spPr>
-          <a:xfrm>
-            <a:off x="502920" y="411480"/>
-            <a:ext cx="3657600" cy="274320"/>
-          </a:xfrm>
-          <a:prstGeom prst="rect">
-            <a:avLst/>
-          </a:prstGeom>
-          <a:noFill/>
-          <a:ln/>
-        </p:spPr>
-        <p:txBody>
-          <a:bodyPr wrap="square" lIns="0" tIns="0" rIns="0" bIns="0" rtlCol="0" anchor="ctr"/>
-          <a:lstStyle/>
-          <a:p>
             <a:pPr indent="0" marL="0">
               <a:buNone/>
             </a:pPr>
             <a:r>
-              <a:rPr lang="en-US" sz="950" b="1" spc="220" kern="0" dirty="0">
-                <a:solidFill>
-                  <a:srgbClr val="3FD0C9"/>
-                </a:solidFill>
-              </a:rPr>
-              <a:t>SECTION</a:t>
-            </a:r>
-            <a:endParaRPr lang="en-US" sz="950" dirty="0"/>
-          </a:p>
-        </p:txBody>
-      </p:sp>
-      <p:sp>
-        <p:nvSpPr>
-          <p:cNvPr id="6" name="Text 4"/>
-          <p:cNvSpPr txBox="1"/>
-          <p:nvPr/>
-        </p:nvSpPr>
-        <p:spPr>
-          <a:xfrm>
-            <a:off x="1600200" y="1874520"/>
-            <a:ext cx="5943600" cy="502920"/>
-          </a:xfrm>
-          <a:prstGeom prst="rect">
-            <a:avLst/>
-          </a:prstGeom>
-          <a:noFill/>
-          <a:ln/>
-        </p:spPr>
-        <p:txBody>
-          <a:bodyPr wrap="square" lIns="0" tIns="0" rIns="0" bIns="0" rtlCol="0" anchor="ctr"/>
-          <a:lstStyle/>
-          <a:p>
-            <a:pPr indent="0" marL="0">
-              <a:buNone/>
-            </a:pPr>
-            <a:r>
-              <a:rPr lang="en-US" sz="2800" b="1" dirty="0">
-                <a:solidFill>
-                  <a:srgbClr val="FFFFFF"/>
-                </a:solidFill>
-              </a:rPr>
-              <a:t>Budget and outlook</a:t>
-            </a:r>
-            <a:endParaRPr lang="en-US" sz="2800" dirty="0"/>
-          </a:p>
-        </p:txBody>
-      </p:sp>
-      <p:sp>
-        <p:nvSpPr>
-          <p:cNvPr id="7" name="Text 5"/>
-          <p:cNvSpPr txBox="1"/>
-          <p:nvPr/>
-        </p:nvSpPr>
-        <p:spPr>
-          <a:xfrm>
-            <a:off x="1600200" y="2395728"/>
-            <a:ext cx="5943600" cy="347472"/>
-          </a:xfrm>
-          <a:prstGeom prst="rect">
-            <a:avLst/>
-          </a:prstGeom>
-          <a:noFill/>
-          <a:ln/>
-        </p:spPr>
-        <p:txBody>
-          <a:bodyPr wrap="square" lIns="0" tIns="0" rIns="0" bIns="0" rtlCol="0" anchor="ctr"/>
-          <a:lstStyle/>
-          <a:p>
-            <a:pPr indent="0" marL="0">
-              <a:buNone/>
-            </a:pPr>
-            <a:r>
-              <a:rPr lang="en-US" sz="1200" dirty="0">
-                <a:solidFill>
-                  <a:srgbClr val="C9CED6"/>
-                </a:solidFill>
-              </a:rPr>
-              <a:t>What the rest of the year looks like and what we change</a:t>
-            </a:r>
-            <a:endParaRPr lang="en-US" sz="1200" dirty="0"/>
+              <a:rPr lang="en-US" sz="900" b="1" spc="180" kern="0" dirty="0">
+                <a:solidFill>
+                  <a:srgbClr val="005358"/>
+                </a:solidFill>
+              </a:rPr>
+              <a:t>COMMENTARY</a:t>
+            </a:r>
+            <a:endParaRPr lang="en-US" sz="900" dirty="0"/>
+          </a:p>
+        </p:txBody>
+      </p:sp>
+      <p:sp>
+        <p:nvSpPr>
+          <p:cNvPr id="8" name="Text 5"/>
+          <p:cNvSpPr txBox="1"/>
+          <p:nvPr/>
+        </p:nvSpPr>
+        <p:spPr>
+          <a:xfrm>
+            <a:off x="6446520" y="1901952"/>
+            <a:ext cx="2011680" cy="2551176"/>
+          </a:xfrm>
+          <a:prstGeom prst="rect">
+            <a:avLst/>
+          </a:prstGeom>
+          <a:noFill/>
+          <a:ln/>
+        </p:spPr>
+        <p:txBody>
+          <a:bodyPr wrap="square" lIns="0" tIns="0" rIns="0" bIns="0" rtlCol="0" anchor="t">
+            <a:normAutofit/>
+          </a:bodyPr>
+          <a:lstStyle/>
+          <a:p>
+            <a:pPr marL="342900" indent="-342900">
+              <a:lnSpc>
+                <a:spcPts val="1150"/>
+              </a:lnSpc>
+              <a:spcAft>
+                <a:spcPts val="500"/>
+              </a:spcAft>
+              <a:buSzPct val="100000"/>
+              <a:buChar char="•"/>
+            </a:pPr>
+            <a:r>
+              <a:rPr lang="en-US" sz="900" dirty="0">
+                <a:solidFill>
+                  <a:srgbClr val="3A4453"/>
+                </a:solidFill>
+              </a:rPr>
+              <a:t>Each bar is scaled to that department's own hours, so you can compare the mix. Support works about a hundred times the hours Integration does.</a:t>
+            </a:r>
+            <a:endParaRPr lang="en-US" sz="900" dirty="0"/>
+          </a:p>
+          <a:p>
+            <a:pPr marL="342900" indent="-342900">
+              <a:lnSpc>
+                <a:spcPts val="1150"/>
+              </a:lnSpc>
+              <a:spcAft>
+                <a:spcPts val="500"/>
+              </a:spcAft>
+              <a:buSzPct val="100000"/>
+              <a:buChar char="•"/>
+            </a:pPr>
+            <a:r>
+              <a:rPr lang="en-US" sz="900" dirty="0">
+                <a:solidFill>
+                  <a:srgbClr val="3A4453"/>
+                </a:solidFill>
+              </a:rPr>
+              <a:t>Support shows 11 hours not on jobs out of 2,143 worked. That is not credible.</a:t>
+            </a:r>
+            <a:endParaRPr lang="en-US" sz="900" dirty="0"/>
+          </a:p>
+          <a:p>
+            <a:pPr marL="342900" indent="-342900">
+              <a:lnSpc>
+                <a:spcPts val="1150"/>
+              </a:lnSpc>
+              <a:spcAft>
+                <a:spcPts val="500"/>
+              </a:spcAft>
+              <a:buSzPct val="100000"/>
+              <a:buChar char="•"/>
+            </a:pPr>
+            <a:r>
+              <a:rPr lang="en-US" sz="900" dirty="0">
+                <a:solidFill>
+                  <a:srgbClr val="3A4453"/>
+                </a:solidFill>
+              </a:rPr>
+              <a:t>Events put 333 hours into leave and only 241 onto jobs. The people are there, the work is not.</a:t>
+            </a:r>
+            <a:endParaRPr lang="en-US" sz="900" dirty="0"/>
+          </a:p>
+          <a:p>
+            <a:pPr marL="342900" indent="-342900">
+              <a:lnSpc>
+                <a:spcPts val="1150"/>
+              </a:lnSpc>
+              <a:spcAft>
+                <a:spcPts val="500"/>
+              </a:spcAft>
+              <a:buSzPct val="100000"/>
+              <a:buChar char="•"/>
+            </a:pPr>
+            <a:r>
+              <a:rPr lang="en-US" sz="900" dirty="0">
+                <a:solidFill>
+                  <a:srgbClr val="3A4453"/>
+                </a:solidFill>
+              </a:rPr>
+              <a:t>Consulting put 84 hours into work we cannot bill against 31 we can.</a:t>
+            </a:r>
+            <a:endParaRPr lang="en-US" sz="900" dirty="0"/>
+          </a:p>
+          <a:p>
+            <a:pPr marL="342900" indent="-342900">
+              <a:lnSpc>
+                <a:spcPts val="1150"/>
+              </a:lnSpc>
+              <a:spcAft>
+                <a:spcPts val="500"/>
+              </a:spcAft>
+              <a:buSzPct val="100000"/>
+              <a:buChar char="•"/>
+            </a:pPr>
+            <a:r>
+              <a:rPr lang="en-US" sz="900" dirty="0">
+                <a:solidFill>
+                  <a:srgbClr val="3A4453"/>
+                </a:solidFill>
+              </a:rPr>
+              <a:t>We pay for every hour. We only bill the ones on jobs. The grey and light teal are the gap.</a:t>
+            </a:r>
+            <a:endParaRPr lang="en-US" sz="900" dirty="0"/>
+          </a:p>
+        </p:txBody>
+      </p:sp>
+      <p:sp>
+        <p:nvSpPr>
+          <p:cNvPr id="25" name="Slide Number Placeholder 0"/>
+          <p:cNvSpPr>
+            <a:spLocks noGrp="1"/>
+          </p:cNvSpPr>
+          <p:nvPr>
+            <p:ph type="sldNum" sz="quarter" idx="4294967295"/>
+          </p:nvPr>
+        </p:nvSpPr>
+        <p:spPr>
+          <a:xfrm>
+            <a:off x="8092440" y="4736592"/>
+            <a:ext cx="548640" cy="228600"/>
+          </a:xfrm>
+          <a:prstGeom prst="rect">
+            <a:avLst/>
+          </a:prstGeom>
+          <a:extLst>
+            <a:ext uri="{C572A759-6A51-4108-AA02-DFA0A04FC94B}">
+              <ma14:wrappingTextBoxFlag xmlns:ma14="http://schemas.microsoft.com/office/mac/drawingml/2011/main" val="0"/>
+            </a:ext>
+          </a:extLst>
+        </p:spPr>
+        <p:txBody>
+          <a:bodyPr/>
+          <a:lstStyle>
+            <a:lvl1pPr>
+              <a:defRPr sz="800">
+                <a:solidFill>
+                  <a:srgbClr val="6B7585"/>
+                </a:solidFill>
+              </a:defRPr>
+            </a:lvl1pPr>
+          </a:lstStyle>
+          <a:p>
+            <a:pPr algn="r"/>
+            <a:fld id="{F7021451-1387-4CA6-816F-3879F97B5CBC}" type="slidenum">
+              <a:rPr b="0" lang="en-US"/>
+              <a:t>19</a:t>
+            </a:fld>
+            <a:endParaRPr lang="en-US"/>
           </a:p>
         </p:txBody>
       </p:sp>
@@ -7480,14 +7756,56 @@
       </p:grpSpPr>
       <p:sp>
         <p:nvSpPr>
-          <p:cNvPr id="2" name="Text 0"/>
-          <p:cNvSpPr txBox="1"/>
-          <p:nvPr/>
-        </p:nvSpPr>
-        <p:spPr>
-          <a:xfrm>
-            <a:off x="502920" y="365760"/>
-            <a:ext cx="6400800" cy="274320"/>
+          <p:cNvPr id="2" name="divider circle"/>
+          <p:cNvSpPr/>
+          <p:nvPr/>
+        </p:nvSpPr>
+        <p:spPr>
+          <a:xfrm>
+            <a:off x="6446520" y="1600200"/>
+            <a:ext cx="2651760" cy="2651760"/>
+          </a:xfrm>
+          <a:prstGeom prst="ellipse">
+            <a:avLst/>
+          </a:prstGeom>
+          <a:solidFill>
+            <a:srgbClr val="6D71FF">
+              <a:alpha val="55000"/>
+            </a:srgbClr>
+          </a:solidFill>
+          <a:ln/>
+        </p:spPr>
+      </p:sp>
+      <p:sp>
+        <p:nvSpPr>
+          <p:cNvPr id="3" name="Shape 1"/>
+          <p:cNvSpPr/>
+          <p:nvPr/>
+        </p:nvSpPr>
+        <p:spPr>
+          <a:xfrm>
+            <a:off x="502920" y="1874520"/>
+            <a:ext cx="868680" cy="868680"/>
+          </a:xfrm>
+          <a:prstGeom prst="rect">
+            <a:avLst/>
+          </a:prstGeom>
+          <a:solidFill>
+            <a:srgbClr val="3FD0C9"/>
+          </a:solidFill>
+          <a:ln/>
+        </p:spPr>
+      </p:sp>
+      <p:sp>
+        <p:nvSpPr>
+          <p:cNvPr id="4" name="Text 2"/>
+          <p:cNvSpPr txBox="1"/>
+          <p:nvPr/>
+        </p:nvSpPr>
+        <p:spPr>
+          <a:xfrm>
+            <a:off x="502920" y="1874520"/>
+            <a:ext cx="868680" cy="868680"/>
           </a:xfrm>
           <a:prstGeom prst="rect">
             <a:avLst/>
@@ -7499,16 +7817,52 @@
           <a:bodyPr wrap="square" lIns="0" tIns="0" rIns="0" bIns="0" rtlCol="0" anchor="ctr"/>
           <a:lstStyle/>
           <a:p>
+            <a:pPr algn="ctr" indent="0" marL="0">
+              <a:buNone/>
+            </a:pPr>
+            <a:r>
+              <a:rPr lang="en-US" sz="2600" b="1" dirty="0">
+                <a:solidFill>
+                  <a:srgbClr val="242C39"/>
+                </a:solidFill>
+              </a:rPr>
+              <a:t>05</a:t>
+            </a:r>
+            <a:endParaRPr lang="en-US" sz="2600" dirty="0"/>
+          </a:p>
+        </p:txBody>
+      </p:sp>
+      <p:sp>
+        <p:nvSpPr>
+          <p:cNvPr id="5" name="Text 3"/>
+          <p:cNvSpPr txBox="1"/>
+          <p:nvPr/>
+        </p:nvSpPr>
+        <p:spPr>
+          <a:xfrm>
+            <a:off x="502920" y="411480"/>
+            <a:ext cx="3657600" cy="274320"/>
+          </a:xfrm>
+          <a:prstGeom prst="rect">
+            <a:avLst/>
+          </a:prstGeom>
+          <a:noFill/>
+          <a:ln/>
+        </p:spPr>
+        <p:txBody>
+          <a:bodyPr wrap="square" lIns="0" tIns="0" rIns="0" bIns="0" rtlCol="0" anchor="ctr"/>
+          <a:lstStyle/>
+          <a:p>
             <a:pPr indent="0" marL="0">
               <a:buNone/>
             </a:pPr>
             <a:r>
               <a:rPr lang="en-US" sz="950" b="1" spc="220" kern="0" dirty="0">
                 <a:solidFill>
-                  <a:srgbClr val="122B82"/>
-                </a:solidFill>
-              </a:rPr>
-              <a:t>BUDGET AND OUTLOOK</a:t>
+                  <a:srgbClr val="3FD0C9"/>
+                </a:solidFill>
+              </a:rPr>
+              <a:t>SECTION</a:t>
             </a:r>
             <a:endParaRPr lang="en-US" sz="950" dirty="0"/>
           </a:p>
@@ -7516,14 +7870,14 @@
       </p:sp>
       <p:sp>
         <p:nvSpPr>
-          <p:cNvPr id="3" name="Text 1"/>
-          <p:cNvSpPr txBox="1"/>
-          <p:nvPr/>
-        </p:nvSpPr>
-        <p:spPr>
-          <a:xfrm>
-            <a:off x="502920" y="640080"/>
-            <a:ext cx="7315200" cy="685800"/>
+          <p:cNvPr id="6" name="Text 4"/>
+          <p:cNvSpPr txBox="1"/>
+          <p:nvPr/>
+        </p:nvSpPr>
+        <p:spPr>
+          <a:xfrm>
+            <a:off x="1600200" y="1874520"/>
+            <a:ext cx="5943600" cy="502920"/>
           </a:xfrm>
           <a:prstGeom prst="rect">
             <a:avLst/>
@@ -7539,304 +7893,50 @@
               <a:buNone/>
             </a:pPr>
             <a:r>
-              <a:rPr lang="en-US" sz="2700" b="1" dirty="0">
-                <a:solidFill>
-                  <a:srgbClr val="242C39"/>
-                </a:solidFill>
-              </a:rPr>
-              <a:t>Revenue by month against budget</a:t>
-            </a:r>
-            <a:endParaRPr lang="en-US" sz="2700" dirty="0"/>
-          </a:p>
-        </p:txBody>
-      </p:sp>
-      <p:pic>
-        <p:nvPicPr>
-          <p:cNvPr id="4" name="snip income_month" descr="/home/user/Claude/deck/snips/income_month.png">    </p:cNvPr>
-          <p:cNvPicPr>
-            <a:picLocks noChangeAspect="1"/>
-          </p:cNvPicPr>
-          <p:nvPr/>
-        </p:nvPicPr>
-        <p:blipFill>
-          <a:blip r:embed="rId1"/>
-          <a:stretch>
-            <a:fillRect/>
-          </a:stretch>
-        </p:blipFill>
-        <p:spPr>
-          <a:xfrm>
-            <a:off x="502920" y="1444752"/>
-            <a:ext cx="5577840" cy="2390888"/>
-          </a:xfrm>
-          <a:prstGeom prst="rect">
-            <a:avLst/>
-          </a:prstGeom>
-        </p:spPr>
-      </p:pic>
-      <p:sp>
-        <p:nvSpPr>
-          <p:cNvPr id="5" name="Text 2"/>
-          <p:cNvSpPr txBox="1"/>
-          <p:nvPr/>
-        </p:nvSpPr>
-        <p:spPr>
-          <a:xfrm>
-            <a:off x="502920" y="3908792"/>
-            <a:ext cx="5577840" cy="237744"/>
-          </a:xfrm>
-          <a:prstGeom prst="rect">
-            <a:avLst/>
-          </a:prstGeom>
-          <a:noFill/>
-          <a:ln/>
-        </p:spPr>
-        <p:txBody>
-          <a:bodyPr wrap="square" lIns="0" tIns="0" rIns="0" bIns="0" rtlCol="0" anchor="t"/>
+              <a:rPr lang="en-US" sz="2800" b="1" dirty="0">
+                <a:solidFill>
+                  <a:srgbClr val="FFFFFF"/>
+                </a:solidFill>
+              </a:rPr>
+              <a:t>Budget and outlook</a:t>
+            </a:r>
+            <a:endParaRPr lang="en-US" sz="2800" dirty="0"/>
+          </a:p>
+        </p:txBody>
+      </p:sp>
+      <p:sp>
+        <p:nvSpPr>
+          <p:cNvPr id="7" name="Text 5"/>
+          <p:cNvSpPr txBox="1"/>
+          <p:nvPr/>
+        </p:nvSpPr>
+        <p:spPr>
+          <a:xfrm>
+            <a:off x="1600200" y="2395728"/>
+            <a:ext cx="5943600" cy="347472"/>
+          </a:xfrm>
+          <a:prstGeom prst="rect">
+            <a:avLst/>
+          </a:prstGeom>
+          <a:noFill/>
+          <a:ln/>
+        </p:spPr>
+        <p:txBody>
+          <a:bodyPr wrap="square" lIns="0" tIns="0" rIns="0" bIns="0" rtlCol="0" anchor="ctr"/>
           <a:lstStyle/>
           <a:p>
             <a:pPr indent="0" marL="0">
               <a:buNone/>
             </a:pPr>
             <a:r>
-              <a:rPr lang="en-US" sz="800" i="1" dirty="0">
-                <a:solidFill>
-                  <a:srgbClr val="6B7585"/>
-                </a:solidFill>
-              </a:rPr>
-              <a:t>Snipped from the Financial Controller Pack, Cost Analysis tab, total income by month, actual to date then budget.</a:t>
-            </a:r>
-            <a:endParaRPr lang="en-US" sz="800" dirty="0"/>
-          </a:p>
-        </p:txBody>
-      </p:sp>
-      <p:sp>
-        <p:nvSpPr>
-          <p:cNvPr id="6" name="commentary panel"/>
-          <p:cNvSpPr/>
-          <p:nvPr/>
-        </p:nvSpPr>
-        <p:spPr>
-          <a:xfrm>
-            <a:off x="6263640" y="1463040"/>
-            <a:ext cx="2377440" cy="3154680"/>
-          </a:xfrm>
-          <a:prstGeom prst="rect">
-            <a:avLst/>
-          </a:prstGeom>
-          <a:solidFill>
-            <a:srgbClr val="E8F9F8"/>
-          </a:solidFill>
-          <a:ln/>
-        </p:spPr>
-      </p:sp>
-      <p:sp>
-        <p:nvSpPr>
-          <p:cNvPr id="7" name="Text 4"/>
-          <p:cNvSpPr txBox="1"/>
-          <p:nvPr/>
-        </p:nvSpPr>
-        <p:spPr>
-          <a:xfrm>
-            <a:off x="6446520" y="1627632"/>
-            <a:ext cx="2011680" cy="228600"/>
-          </a:xfrm>
-          <a:prstGeom prst="rect">
-            <a:avLst/>
-          </a:prstGeom>
-          <a:noFill/>
-          <a:ln/>
-        </p:spPr>
-        <p:txBody>
-          <a:bodyPr wrap="square" lIns="0" tIns="0" rIns="0" bIns="0" rtlCol="0" anchor="ctr"/>
-          <a:lstStyle/>
-          <a:p>
-            <a:pPr indent="0" marL="0">
-              <a:buNone/>
-            </a:pPr>
-            <a:r>
-              <a:rPr lang="en-US" sz="900" b="1" spc="180" kern="0" dirty="0">
-                <a:solidFill>
-                  <a:srgbClr val="005358"/>
-                </a:solidFill>
-              </a:rPr>
-              <a:t>COMMENTARY</a:t>
-            </a:r>
-            <a:endParaRPr lang="en-US" sz="900" dirty="0"/>
-          </a:p>
-        </p:txBody>
-      </p:sp>
-      <p:sp>
-        <p:nvSpPr>
-          <p:cNvPr id="8" name="Text 5"/>
-          <p:cNvSpPr txBox="1"/>
-          <p:nvPr/>
-        </p:nvSpPr>
-        <p:spPr>
-          <a:xfrm>
-            <a:off x="6446520" y="1901952"/>
-            <a:ext cx="2011680" cy="2551176"/>
-          </a:xfrm>
-          <a:prstGeom prst="rect">
-            <a:avLst/>
-          </a:prstGeom>
-          <a:noFill/>
-          <a:ln/>
-        </p:spPr>
-        <p:txBody>
-          <a:bodyPr wrap="square" lIns="0" tIns="0" rIns="0" bIns="0" rtlCol="0" anchor="t">
-            <a:normAutofit/>
-          </a:bodyPr>
-          <a:lstStyle/>
-          <a:p>
-            <a:pPr marL="342900" indent="-342900">
-              <a:lnSpc>
-                <a:spcPts val="1150"/>
-              </a:lnSpc>
-              <a:spcAft>
-                <a:spcPts val="500"/>
-              </a:spcAft>
-              <a:buSzPct val="100000"/>
-              <a:buChar char="•"/>
-            </a:pPr>
-            <a:r>
-              <a:rPr lang="en-US" sz="900" dirty="0">
-                <a:solidFill>
-                  <a:srgbClr val="3A4453"/>
-                </a:solidFill>
-              </a:rPr>
-              <a:t>Q1 came in (372)k behind on revenue, and almost all of it is Consulting and Video.</a:t>
-            </a:r>
-            <a:endParaRPr lang="en-US" sz="900" dirty="0"/>
-          </a:p>
-          <a:p>
-            <a:pPr marL="342900" indent="-342900">
-              <a:lnSpc>
-                <a:spcPts val="1150"/>
-              </a:lnSpc>
-              <a:spcAft>
-                <a:spcPts val="500"/>
-              </a:spcAft>
-              <a:buSzPct val="100000"/>
-              <a:buChar char="•"/>
-            </a:pPr>
-            <a:r>
-              <a:rPr lang="en-US" sz="900" dirty="0">
-                <a:solidFill>
-                  <a:srgbClr val="3A4453"/>
-                </a:solidFill>
-              </a:rPr>
-              <a:t>The remaining nine months are untouched original budget. They are not a forecast.</a:t>
-            </a:r>
-            <a:endParaRPr lang="en-US" sz="900" dirty="0"/>
-          </a:p>
-          <a:p>
-            <a:pPr marL="342900" indent="-342900">
-              <a:lnSpc>
-                <a:spcPts val="1150"/>
-              </a:lnSpc>
-              <a:spcAft>
-                <a:spcPts val="500"/>
-              </a:spcAft>
-              <a:buSzPct val="100000"/>
-              <a:buChar char="•"/>
-            </a:pPr>
-            <a:r>
-              <a:rPr lang="en-US" sz="900" dirty="0">
-                <a:solidFill>
-                  <a:srgbClr val="3A4453"/>
-                </a:solidFill>
-              </a:rPr>
-              <a:t>October alone is budgeted at 950k, nearly double our best month so far.</a:t>
-            </a:r>
-            <a:endParaRPr lang="en-US" sz="900" dirty="0"/>
-          </a:p>
-          <a:p>
-            <a:pPr marL="342900" indent="-342900">
-              <a:lnSpc>
-                <a:spcPts val="1150"/>
-              </a:lnSpc>
-              <a:spcAft>
-                <a:spcPts val="500"/>
-              </a:spcAft>
-              <a:buSzPct val="100000"/>
-              <a:buChar char="•"/>
-            </a:pPr>
-            <a:r>
-              <a:rPr lang="en-US" sz="900" dirty="0">
-                <a:solidFill>
-                  <a:srgbClr val="3A4453"/>
-                </a:solidFill>
-              </a:rPr>
-              <a:t>December carries a planned loss. The business closes for two weeks, so that is correct and should stay.</a:t>
-            </a:r>
-            <a:endParaRPr lang="en-US" sz="900" dirty="0"/>
-          </a:p>
-          <a:p>
-            <a:pPr marL="342900" indent="-342900">
-              <a:lnSpc>
-                <a:spcPts val="1150"/>
-              </a:lnSpc>
-              <a:spcAft>
-                <a:spcPts val="500"/>
-              </a:spcAft>
-              <a:buSzPct val="100000"/>
-              <a:buChar char="•"/>
-            </a:pPr>
-            <a:r>
-              <a:rPr lang="en-US" sz="900" dirty="0">
-                <a:solidFill>
-                  <a:srgbClr val="3A4453"/>
-                </a:solidFill>
-              </a:rPr>
-              <a:t>Recommend a Q1 rolling forecast: rebuild Consulting on real capacity and reset the margin assumptions.</a:t>
-            </a:r>
-            <a:endParaRPr lang="en-US" sz="900" dirty="0"/>
-          </a:p>
-        </p:txBody>
-      </p:sp>
-      <p:sp>
-        <p:nvSpPr>
-          <p:cNvPr id="25" name="Slide Number Placeholder 0"/>
-          <p:cNvSpPr>
-            <a:spLocks noGrp="1"/>
-          </p:cNvSpPr>
-          <p:nvPr>
-            <p:ph type="sldNum" sz="quarter" idx="4294967295"/>
-          </p:nvPr>
-        </p:nvSpPr>
-        <p:spPr>
-          <a:xfrm>
-            <a:off x="8092440" y="4736592"/>
-            <a:ext cx="548640" cy="228600"/>
-          </a:xfrm>
-          <a:prstGeom prst="rect">
-            <a:avLst/>
-          </a:prstGeom>
-          <a:extLst>
-            <a:ext uri="{C572A759-6A51-4108-AA02-DFA0A04FC94B}">
-              <ma14:wrappingTextBoxFlag xmlns:ma14="http://schemas.microsoft.com/office/mac/drawingml/2011/main" val="0"/>
-            </a:ext>
-          </a:extLst>
-        </p:spPr>
-        <p:txBody>
-          <a:bodyPr/>
-          <a:lstStyle>
-            <a:lvl1pPr>
-              <a:defRPr sz="800">
-                <a:solidFill>
-                  <a:srgbClr val="6B7585"/>
-                </a:solidFill>
-              </a:defRPr>
-            </a:lvl1pPr>
-          </a:lstStyle>
-          <a:p>
-            <a:pPr algn="r"/>
-            <a:fld id="{F7021451-1387-4CA6-816F-3879F97B5CBC}" type="slidenum">
-              <a:rPr b="0" lang="en-US"/>
-              <a:t>20</a:t>
-            </a:fld>
-            <a:endParaRPr lang="en-US"/>
+              <a:rPr lang="en-US" sz="1200" dirty="0">
+                <a:solidFill>
+                  <a:srgbClr val="C9CED6"/>
+                </a:solidFill>
+              </a:rPr>
+              <a:t>What the rest of the year looks like and what we change</a:t>
+            </a:r>
+            <a:endParaRPr lang="en-US" sz="1200" dirty="0"/>
           </a:p>
         </p:txBody>
       </p:sp>
@@ -7895,7 +7995,7 @@
                   <a:srgbClr val="122B82"/>
                 </a:solidFill>
               </a:rPr>
-              <a:t>SUMMARY AND ACTIONS</a:t>
+              <a:t>BUDGET AND OUTLOOK</a:t>
             </a:r>
             <a:endParaRPr lang="en-US" sz="950" dirty="0"/>
           </a:p>
@@ -7931,6 +8031,393 @@
                   <a:srgbClr val="242C39"/>
                 </a:solidFill>
               </a:rPr>
+              <a:t>Revenue by month against budget</a:t>
+            </a:r>
+            <a:endParaRPr lang="en-US" sz="2700" dirty="0"/>
+          </a:p>
+        </p:txBody>
+      </p:sp>
+      <p:pic>
+        <p:nvPicPr>
+          <p:cNvPr id="4" name="snip income_month" descr="/home/user/Claude/deck/snips/income_month.png">    </p:cNvPr>
+          <p:cNvPicPr>
+            <a:picLocks noChangeAspect="1"/>
+          </p:cNvPicPr>
+          <p:nvPr/>
+        </p:nvPicPr>
+        <p:blipFill>
+          <a:blip r:embed="rId1"/>
+          <a:stretch>
+            <a:fillRect/>
+          </a:stretch>
+        </p:blipFill>
+        <p:spPr>
+          <a:xfrm>
+            <a:off x="502920" y="1444752"/>
+            <a:ext cx="5577840" cy="2390888"/>
+          </a:xfrm>
+          <a:prstGeom prst="rect">
+            <a:avLst/>
+          </a:prstGeom>
+        </p:spPr>
+      </p:pic>
+      <p:sp>
+        <p:nvSpPr>
+          <p:cNvPr id="5" name="Text 2"/>
+          <p:cNvSpPr txBox="1"/>
+          <p:nvPr/>
+        </p:nvSpPr>
+        <p:spPr>
+          <a:xfrm>
+            <a:off x="502920" y="3908792"/>
+            <a:ext cx="5577840" cy="237744"/>
+          </a:xfrm>
+          <a:prstGeom prst="rect">
+            <a:avLst/>
+          </a:prstGeom>
+          <a:noFill/>
+          <a:ln/>
+        </p:spPr>
+        <p:txBody>
+          <a:bodyPr wrap="square" lIns="0" tIns="0" rIns="0" bIns="0" rtlCol="0" anchor="t"/>
+          <a:lstStyle/>
+          <a:p>
+            <a:pPr indent="0" marL="0">
+              <a:buNone/>
+            </a:pPr>
+            <a:r>
+              <a:rPr lang="en-US" sz="800" i="1" dirty="0">
+                <a:solidFill>
+                  <a:srgbClr val="6B7585"/>
+                </a:solidFill>
+              </a:rPr>
+              <a:t>Snipped from the Financial Controller Pack, Cost Analysis tab, total income by month, actual to date then budget.</a:t>
+            </a:r>
+            <a:endParaRPr lang="en-US" sz="800" dirty="0"/>
+          </a:p>
+        </p:txBody>
+      </p:sp>
+      <p:sp>
+        <p:nvSpPr>
+          <p:cNvPr id="6" name="commentary panel"/>
+          <p:cNvSpPr/>
+          <p:nvPr/>
+        </p:nvSpPr>
+        <p:spPr>
+          <a:xfrm>
+            <a:off x="6263640" y="1463040"/>
+            <a:ext cx="2377440" cy="3154680"/>
+          </a:xfrm>
+          <a:prstGeom prst="rect">
+            <a:avLst/>
+          </a:prstGeom>
+          <a:solidFill>
+            <a:srgbClr val="E8F9F8"/>
+          </a:solidFill>
+          <a:ln/>
+        </p:spPr>
+      </p:sp>
+      <p:sp>
+        <p:nvSpPr>
+          <p:cNvPr id="7" name="Text 4"/>
+          <p:cNvSpPr txBox="1"/>
+          <p:nvPr/>
+        </p:nvSpPr>
+        <p:spPr>
+          <a:xfrm>
+            <a:off x="6446520" y="1627632"/>
+            <a:ext cx="2011680" cy="228600"/>
+          </a:xfrm>
+          <a:prstGeom prst="rect">
+            <a:avLst/>
+          </a:prstGeom>
+          <a:noFill/>
+          <a:ln/>
+        </p:spPr>
+        <p:txBody>
+          <a:bodyPr wrap="square" lIns="0" tIns="0" rIns="0" bIns="0" rtlCol="0" anchor="ctr"/>
+          <a:lstStyle/>
+          <a:p>
+            <a:pPr indent="0" marL="0">
+              <a:buNone/>
+            </a:pPr>
+            <a:r>
+              <a:rPr lang="en-US" sz="900" b="1" spc="180" kern="0" dirty="0">
+                <a:solidFill>
+                  <a:srgbClr val="005358"/>
+                </a:solidFill>
+              </a:rPr>
+              <a:t>COMMENTARY</a:t>
+            </a:r>
+            <a:endParaRPr lang="en-US" sz="900" dirty="0"/>
+          </a:p>
+        </p:txBody>
+      </p:sp>
+      <p:sp>
+        <p:nvSpPr>
+          <p:cNvPr id="8" name="Text 5"/>
+          <p:cNvSpPr txBox="1"/>
+          <p:nvPr/>
+        </p:nvSpPr>
+        <p:spPr>
+          <a:xfrm>
+            <a:off x="6446520" y="1901952"/>
+            <a:ext cx="2011680" cy="2551176"/>
+          </a:xfrm>
+          <a:prstGeom prst="rect">
+            <a:avLst/>
+          </a:prstGeom>
+          <a:noFill/>
+          <a:ln/>
+        </p:spPr>
+        <p:txBody>
+          <a:bodyPr wrap="square" lIns="0" tIns="0" rIns="0" bIns="0" rtlCol="0" anchor="t">
+            <a:normAutofit/>
+          </a:bodyPr>
+          <a:lstStyle/>
+          <a:p>
+            <a:pPr marL="342900" indent="-342900">
+              <a:lnSpc>
+                <a:spcPts val="1150"/>
+              </a:lnSpc>
+              <a:spcAft>
+                <a:spcPts val="500"/>
+              </a:spcAft>
+              <a:buSzPct val="100000"/>
+              <a:buChar char="•"/>
+            </a:pPr>
+            <a:r>
+              <a:rPr lang="en-US" sz="900" dirty="0">
+                <a:solidFill>
+                  <a:srgbClr val="3A4453"/>
+                </a:solidFill>
+              </a:rPr>
+              <a:t>Q1 came in (372)k behind on revenue, and almost all of it is Consulting and Video.</a:t>
+            </a:r>
+            <a:endParaRPr lang="en-US" sz="900" dirty="0"/>
+          </a:p>
+          <a:p>
+            <a:pPr marL="342900" indent="-342900">
+              <a:lnSpc>
+                <a:spcPts val="1150"/>
+              </a:lnSpc>
+              <a:spcAft>
+                <a:spcPts val="500"/>
+              </a:spcAft>
+              <a:buSzPct val="100000"/>
+              <a:buChar char="•"/>
+            </a:pPr>
+            <a:r>
+              <a:rPr lang="en-US" sz="900" dirty="0">
+                <a:solidFill>
+                  <a:srgbClr val="3A4453"/>
+                </a:solidFill>
+              </a:rPr>
+              <a:t>The remaining nine months are untouched original budget. They are not a forecast.</a:t>
+            </a:r>
+            <a:endParaRPr lang="en-US" sz="900" dirty="0"/>
+          </a:p>
+          <a:p>
+            <a:pPr marL="342900" indent="-342900">
+              <a:lnSpc>
+                <a:spcPts val="1150"/>
+              </a:lnSpc>
+              <a:spcAft>
+                <a:spcPts val="500"/>
+              </a:spcAft>
+              <a:buSzPct val="100000"/>
+              <a:buChar char="•"/>
+            </a:pPr>
+            <a:r>
+              <a:rPr lang="en-US" sz="900" dirty="0">
+                <a:solidFill>
+                  <a:srgbClr val="3A4453"/>
+                </a:solidFill>
+              </a:rPr>
+              <a:t>October alone is budgeted at 950k, nearly double our best month so far.</a:t>
+            </a:r>
+            <a:endParaRPr lang="en-US" sz="900" dirty="0"/>
+          </a:p>
+          <a:p>
+            <a:pPr marL="342900" indent="-342900">
+              <a:lnSpc>
+                <a:spcPts val="1150"/>
+              </a:lnSpc>
+              <a:spcAft>
+                <a:spcPts val="500"/>
+              </a:spcAft>
+              <a:buSzPct val="100000"/>
+              <a:buChar char="•"/>
+            </a:pPr>
+            <a:r>
+              <a:rPr lang="en-US" sz="900" dirty="0">
+                <a:solidFill>
+                  <a:srgbClr val="3A4453"/>
+                </a:solidFill>
+              </a:rPr>
+              <a:t>December carries a planned loss. The business closes for two weeks, so that is correct and should stay.</a:t>
+            </a:r>
+            <a:endParaRPr lang="en-US" sz="900" dirty="0"/>
+          </a:p>
+          <a:p>
+            <a:pPr marL="342900" indent="-342900">
+              <a:lnSpc>
+                <a:spcPts val="1150"/>
+              </a:lnSpc>
+              <a:spcAft>
+                <a:spcPts val="500"/>
+              </a:spcAft>
+              <a:buSzPct val="100000"/>
+              <a:buChar char="•"/>
+            </a:pPr>
+            <a:r>
+              <a:rPr lang="en-US" sz="900" dirty="0">
+                <a:solidFill>
+                  <a:srgbClr val="3A4453"/>
+                </a:solidFill>
+              </a:rPr>
+              <a:t>Recommend a Q1 rolling forecast: rebuild Consulting on real capacity and reset the margin assumptions.</a:t>
+            </a:r>
+            <a:endParaRPr lang="en-US" sz="900" dirty="0"/>
+          </a:p>
+        </p:txBody>
+      </p:sp>
+      <p:sp>
+        <p:nvSpPr>
+          <p:cNvPr id="25" name="Slide Number Placeholder 0"/>
+          <p:cNvSpPr>
+            <a:spLocks noGrp="1"/>
+          </p:cNvSpPr>
+          <p:nvPr>
+            <p:ph type="sldNum" sz="quarter" idx="4294967295"/>
+          </p:nvPr>
+        </p:nvSpPr>
+        <p:spPr>
+          <a:xfrm>
+            <a:off x="8092440" y="4736592"/>
+            <a:ext cx="548640" cy="228600"/>
+          </a:xfrm>
+          <a:prstGeom prst="rect">
+            <a:avLst/>
+          </a:prstGeom>
+          <a:extLst>
+            <a:ext uri="{C572A759-6A51-4108-AA02-DFA0A04FC94B}">
+              <ma14:wrappingTextBoxFlag xmlns:ma14="http://schemas.microsoft.com/office/mac/drawingml/2011/main" val="0"/>
+            </a:ext>
+          </a:extLst>
+        </p:spPr>
+        <p:txBody>
+          <a:bodyPr/>
+          <a:lstStyle>
+            <a:lvl1pPr>
+              <a:defRPr sz="800">
+                <a:solidFill>
+                  <a:srgbClr val="6B7585"/>
+                </a:solidFill>
+              </a:defRPr>
+            </a:lvl1pPr>
+          </a:lstStyle>
+          <a:p>
+            <a:pPr algn="r"/>
+            <a:fld id="{F7021451-1387-4CA6-816F-3879F97B5CBC}" type="slidenum">
+              <a:rPr b="0" lang="en-US"/>
+              <a:t>21</a:t>
+            </a:fld>
+            <a:endParaRPr lang="en-US"/>
+          </a:p>
+        </p:txBody>
+      </p:sp>
+    </p:spTree>
+  </p:cSld>
+  <p:clrMapOvr>
+    <a:masterClrMapping/>
+  </p:clrMapOvr>
+</p:sld>
+</file>
+
+<file path=ppt/slides/slide22.xml><?xml version="1.0" encoding="utf-8"?>
+<p:sld xmlns:a="http://schemas.openxmlformats.org/drawingml/2006/main" xmlns:r="http://schemas.openxmlformats.org/officeDocument/2006/relationships" xmlns:p="http://schemas.openxmlformats.org/presentationml/2006/main">
+  <p:cSld name="Slide 22">
+    <p:spTree>
+      <p:nvGrpSpPr>
+        <p:cNvPr id="1" name=""/>
+        <p:cNvGrpSpPr/>
+        <p:nvPr/>
+      </p:nvGrpSpPr>
+      <p:grpSpPr>
+        <a:xfrm>
+          <a:off x="0" y="0"/>
+          <a:ext cx="0" cy="0"/>
+          <a:chOff x="0" y="0"/>
+          <a:chExt cx="0" cy="0"/>
+        </a:xfrm>
+      </p:grpSpPr>
+      <p:sp>
+        <p:nvSpPr>
+          <p:cNvPr id="2" name="Text 0"/>
+          <p:cNvSpPr txBox="1"/>
+          <p:nvPr/>
+        </p:nvSpPr>
+        <p:spPr>
+          <a:xfrm>
+            <a:off x="502920" y="365760"/>
+            <a:ext cx="6400800" cy="274320"/>
+          </a:xfrm>
+          <a:prstGeom prst="rect">
+            <a:avLst/>
+          </a:prstGeom>
+          <a:noFill/>
+          <a:ln/>
+        </p:spPr>
+        <p:txBody>
+          <a:bodyPr wrap="square" lIns="0" tIns="0" rIns="0" bIns="0" rtlCol="0" anchor="ctr"/>
+          <a:lstStyle/>
+          <a:p>
+            <a:pPr indent="0" marL="0">
+              <a:buNone/>
+            </a:pPr>
+            <a:r>
+              <a:rPr lang="en-US" sz="950" b="1" spc="220" kern="0" dirty="0">
+                <a:solidFill>
+                  <a:srgbClr val="122B82"/>
+                </a:solidFill>
+              </a:rPr>
+              <a:t>SUMMARY AND ACTIONS</a:t>
+            </a:r>
+            <a:endParaRPr lang="en-US" sz="950" dirty="0"/>
+          </a:p>
+        </p:txBody>
+      </p:sp>
+      <p:sp>
+        <p:nvSpPr>
+          <p:cNvPr id="3" name="Text 1"/>
+          <p:cNvSpPr txBox="1"/>
+          <p:nvPr/>
+        </p:nvSpPr>
+        <p:spPr>
+          <a:xfrm>
+            <a:off x="502920" y="640080"/>
+            <a:ext cx="7315200" cy="685800"/>
+          </a:xfrm>
+          <a:prstGeom prst="rect">
+            <a:avLst/>
+          </a:prstGeom>
+          <a:noFill/>
+          <a:ln/>
+        </p:spPr>
+        <p:txBody>
+          <a:bodyPr wrap="square" lIns="0" tIns="0" rIns="0" bIns="0" rtlCol="0" anchor="ctr"/>
+          <a:lstStyle/>
+          <a:p>
+            <a:pPr indent="0" marL="0">
+              <a:buNone/>
+            </a:pPr>
+            <a:r>
+              <a:rPr lang="en-US" sz="2700" b="1" dirty="0">
+                <a:solidFill>
+                  <a:srgbClr val="242C39"/>
+                </a:solidFill>
+              </a:rPr>
               <a:t>What we agreed</a:t>
             </a:r>
             <a:endParaRPr lang="en-US" sz="2700" dirty="0"/>
@@ -7939,7 +8426,7 @@
       </p:sp>
       <p:graphicFrame>
         <p:nvGraphicFramePr>
-          <p:cNvPr id="22" name="Table 0"/>
+          <p:cNvPr id="23" name="Table 0"/>
           <p:cNvGraphicFramePr>
             <a:graphicFrameLocks noGrp="1"/>
           </p:cNvGraphicFramePr>
@@ -9892,7 +10379,7 @@
             <a:pPr algn="r"/>
             <a:fld id="{F7021451-1387-4CA6-816F-3879F97B5CBC}" type="slidenum">
               <a:rPr b="0" lang="en-US"/>
-              <a:t>21</a:t>
+              <a:t>22</a:t>
             </a:fld>
             <a:endParaRPr lang="en-US"/>
           </a:p>
@@ -9906,9 +10393,9 @@
 </p:sld>
 </file>
 
-<file path=ppt/slides/slide22.xml><?xml version="1.0" encoding="utf-8"?>
+<file path=ppt/slides/slide23.xml><?xml version="1.0" encoding="utf-8"?>
 <p:sld xmlns:a="http://schemas.openxmlformats.org/drawingml/2006/main" xmlns:r="http://schemas.openxmlformats.org/officeDocument/2006/relationships" xmlns:p="http://schemas.openxmlformats.org/presentationml/2006/main">
-  <p:cSld name="Slide 22">
+  <p:cSld name="Slide 23">
     <p:spTree>
       <p:nvGrpSpPr>
         <p:cNvPr id="1" name=""/>
@@ -13176,7 +13663,7 @@
         </p:blipFill>
         <p:spPr>
           <a:xfrm>
-            <a:off x="502920" y="1444752"/>
+            <a:off x="502920" y="1389888"/>
             <a:ext cx="8138160" cy="1637160"/>
           </a:xfrm>
           <a:prstGeom prst="rect">
@@ -13192,7 +13679,7 @@
         </p:nvSpPr>
         <p:spPr>
           <a:xfrm>
-            <a:off x="502920" y="3155064"/>
+            <a:off x="502920" y="3100200"/>
             <a:ext cx="8138160" cy="237744"/>
           </a:xfrm>
           <a:prstGeom prst="rect">

--- a/deck/CTS Monthly Business Review - September 2026.pptx
+++ b/deck/CTS Monthly Business Review - September 2026.pptx
@@ -28,9 +28,14 @@
     <p:sldId id="276" r:id="rId22"/>
     <p:sldId id="277" r:id="rId23"/>
     <p:sldId id="278" r:id="rId24"/>
+    <p:sldId id="279" r:id="rId25"/>
+    <p:sldId id="280" r:id="rId26"/>
+    <p:sldId id="281" r:id="rId27"/>
+    <p:sldId id="282" r:id="rId28"/>
+    <p:sldId id="283" r:id="rId29"/>
   </p:sldIdLst>
   <p:notesMasterIdLst>
-    <p:notesMasterId r:id="rId25"/>
+    <p:notesMasterId r:id="rId30"/>
   </p:notesMasterIdLst>
   <p:sldSz cx="9144000" cy="5143500"/>
   <p:notesSz cx="5143500" cy="9144000"/>
@@ -614,10 +619,13 @@
           <a:p>
             <a:r>
               <a:rPr lang="en-US" dirty="0"/>
-              <a:t>Operating cost distribution for the year to date, cost of sales and overhead on one scale.
-Cost of sales, labour 620,737 at 38.0%. Cost of sales, equipment &amp; services 347,307 at 21.3%. Cost of sales, other direct 24,117 at 1.5%. Overhead, General &amp; Administrative Exp 75,700 at 4.6%. Overhead, Business Insurances 25,227 at 1.5%. Overhead, Advertising &amp; Promotion Exp 34,119 at 2.1%. Overhead, Operating Expenses 136,752 at 8.4%. Overhead, Employment Expenses 369,466 at 22.6%.
-The message is how concentrated it is. Wages for people on jobs and wages for everyone else are the bulk of it, and the second group is fixed for the year, which is why a quiet month drops straight off the profit.
-When the board asks what we can cut, the honest answer is staff numbers or the office. Trimming subscriptions and travel will not change this.</a:t>
+              <a:t>Video for September 2026, read off the Dept P&amp;L tab.
+Sales 7,303 against a budget of 17,498, behind by 10,196. Last September it billed 20,025.
+After direct costs of 1,489 it kept 5,813, which is 79.6% of what it sold.
+Running costs charged to it were 12,659. 2,878 of that is its own spending and 9,782 is its share of the office, charged on the keys set in the pack.
+That leaves (6,846) for the month.
+Year to date it has billed 40,270 against a budget of 85,584.
+On people: employment expense of 3,961, of which 2,660 is its own staff and 1,301 is its share of office wages. It put 25 hours onto jobs and 8 onto work we cannot bill, with 0 hours of leave.</a:t>
             </a:r>
             <a:endParaRPr lang="en-US" dirty="0"/>
           </a:p>
@@ -705,10 +713,13 @@
           <a:p>
             <a:r>
               <a:rPr lang="en-US" dirty="0"/>
-              <a:t>Other operating expenses, year to date.
-Rent 62,043 at 45.4%. IT Network Service &amp; Support 39,570 at 28.9%. Rental Outgoings 14,684 at 10.7%. Travel &amp; Per Diems 5,627 at 4.1%. Stamp Duty (Indirect) 3,455 at 2.5%. Repairs &amp; Maintenance 2,079 at 1.5%. Office Cleaning 2,079 at 1.5%. Mobile Phones 1,825 at 1.3%. Everything else 5,390 at 3.9%.
-Rent and outgoings are fixed by the lease. IT support is the next largest and the only one that moves.
-The practical conclusion is that savings do not come from here. Cutting this meaningfully means talking about the office lease.</a:t>
+              <a:t>Integration for September 2026, read off the Dept P&amp;L tab.
+Sales 234,858 against a budget of 59,272, ahead by 175,586. Last September it billed 21,421.
+After direct costs of 211,102 it kept 23,756, which is 10.1% of what it sold.
+Running costs charged to it were 13,285. 9,136 of that is its own spending and 4,148 is its share of the office, charged on the keys set in the pack.
+That leaves 10,471 for the month.
+Year to date it has billed 441,414 against a budget of 608,676.
+On people: employment expense of 8,832, of which 8,563 is its own staff and 269 is its share of office wages. It put 10 hours onto jobs and 0 onto work we cannot bill, with 0 hours of leave.</a:t>
             </a:r>
             <a:endParaRPr lang="en-US" dirty="0"/>
           </a:p>
@@ -796,10 +807,13 @@
           <a:p>
             <a:r>
               <a:rPr lang="en-US" dirty="0"/>
-              <a:t>Labour mix for the year to date, direct labour charged to cost of sales split by type.
-Sub-Contract Labour 117,012. Service - hires 23,704. Direct Salaries 314,763. Direct Wages 111,018. Direct Superannuation 54,240.
-The great majority is permanent payroll. Contractors are the only labour cost that rises and falls with the work.
-This is the link to the utilisation section. We pay for hours worked and we bill for hours that are chargeable. Where those two diverge, margin goes with it.</a:t>
+              <a:t>Consulting for September 2026, read off the Dept P&amp;L tab.
+Sales 3,531 against a budget of 23,050, behind by 19,519. Last September it billed 8,330.
+After direct costs of 3,457 it kept 74, which is 2.1% of what it sold.
+Running costs charged to it were 19,944. 5,965 of that is its own spending and 13,979 is its share of the office, charged on the keys set in the pack.
+That leaves (19,870) for the month.
+Year to date it has billed 4,068 against a budget of 236,707.
+On people: employment expense of 9,496, of which 5,545 is its own staff and 3,951 is its share of office wages. It put 31 hours onto jobs and 84 onto work we cannot bill, with 53 hours of leave.</a:t>
             </a:r>
             <a:endParaRPr lang="en-US" dirty="0"/>
           </a:p>
@@ -887,11 +901,14 @@
           <a:p>
             <a:r>
               <a:rPr lang="en-US" dirty="0"/>
-              <a:t>Employment expense split between office staff and departmental staff for September 2026.
-Departmental staff is the employment expense on each department's own cost centre: Support 8,980, Events 35,665, Video 2,660, Integration 8,563, Consulting 5,545.
-Office staff is the admin employment pot of 63,077, charged across the departments on their share of full time equivalent: Support 42,262, Events 15,294, Video 1,301, Integration 269, Consulting 3,951.
-FTE is rolling twelve month worked hours on that cost centre divided by 2,024 hours, being 253 working days at eight. That is the method in the training recording.
-The change worth noting is that this no longer relies on a typed figure. The pack calculates it from the Labour Hours Report, so it reproduces every month without anyone deciding it.</a:t>
+              <a:t>Revenue by department for September 2026, actual against budget and against the same month last year.
+Support: 242,948 against a budget of 248,017 and 231,214 last year.
+Integration: 234,858 against a budget of 59,272 and 21,421 last year.
+Events: 73,304 against a budget of 65,828 and 75,333 last year.
+Video: 7,303 against a budget of 17,498 and 20,025 last year.
+Consulting: 3,531 against a budget of 23,050 and 8,330 last year.
+Company revenue 561,945 against 413,665 budget and 356,323 last September.
+The beat is Integration, and it is one large fit-out at 10.1% gross margin. Read it as timing, not growth. Video and Consulting are short of budget for the third month running.</a:t>
             </a:r>
             <a:endParaRPr lang="en-US" dirty="0"/>
           </a:p>
@@ -979,7 +996,7 @@
           <a:p>
             <a:r>
               <a:rPr lang="en-US" dirty="0"/>
-              <a:t>Revenue is concentrated and cash is slow. Days sales outstanding is 47.2 against a 30 day target, which is 303,605 of cash sitting in the debtor book above where it should be.</a:t>
+              <a:t>Running costs are steady at about 214 thousand a month. Spending is not the problem, but that is the number sales have to beat.</a:t>
             </a:r>
             <a:endParaRPr lang="en-US" dirty="0"/>
           </a:p>
@@ -1067,21 +1084,10 @@
           <a:p>
             <a:r>
               <a:rPr lang="en-US" dirty="0"/>
-              <a:t>Top ten customers by revenue, year to date, with the top three called out in red.
-1. Deloitte Services: 401,755 for the year, 24.7% of the total, 119,614 of it in September 2026.
-2. Aware Super: 285,075 for the year, 17.5% of the total, 241,178 of it in September 2026.
-3. CBA Place South: 105,040 for the year, 6.5% of the total, 30,409 of it in September 2026.
-4. Ventia: 97,662 for the year, 6.0% of the total, 9,105 of it in September 2026.
-5. PwC Services: 88,051 for the year, 5.4% of the total, 26,707 of it in September 2026.
-6. APT Management Services: 63,613 for the year, 3.9% of the total, 4,527 of it in September 2026.
-7. ASX Operations: 60,858 for the year, 3.7% of the total, 17,167 of it in September 2026.
-8. Bankwest: 54,971 for the year, 3.4% of the total, 17,230 of it in September 2026.
-9. Data#3: 45,909 for the year, 2.8% of the total, 0 of it in September 2026.
-10. Generation-e Productivity…: 37,166 for the year, 2.3% of the total, 12,389 of it in September 2026.
-The ten together are 1,240,100, or 76.3% of everything we sold. Every other customer on the books makes up the remaining 384,360.
-The three red bars are the point of the slide. They are 48.7% of the year between them.
-The difference that matters is contract work against one-off projects. Deloitte Services is contracted support that renews every month. Aware Super is a fit-out that has finished. Counting them as the same kind of income is how a forecast goes wrong.
-What I am recommending: a named owner for each of the top three before the half year, and the new business target set on customers four to twenty rather than on the ones we already have.</a:t>
+              <a:t>Operating cost distribution for the year to date, cost of sales and overhead on one scale.
+Cost of sales, labour 620,737 at 38.0%. Cost of sales, equipment &amp; services 347,307 at 21.3%. Cost of sales, other direct 24,117 at 1.5%. Overhead, General &amp; Administrative Exp 75,700 at 4.6%. Overhead, Business Insurances 25,227 at 1.5%. Overhead, Advertising &amp; Promotion Exp 34,119 at 2.1%. Overhead, Operating Expenses 136,752 at 8.4%. Overhead, Employment Expenses 369,466 at 22.6%.
+The message is how concentrated it is. Wages for people on jobs and wages for everyone else are the bulk of it, and the second group is fixed for the year, which is why a quiet month drops straight off the profit.
+When the board asks what we can cut, the honest answer is staff numbers or the office. Trimming subscriptions and travel will not change this.</a:t>
             </a:r>
             <a:endParaRPr lang="en-US" dirty="0"/>
           </a:p>
@@ -1169,11 +1175,10 @@
           <a:p>
             <a:r>
               <a:rPr lang="en-US" dirty="0"/>
-              <a:t>How long customers take to pay, at 30 September 2026.
-We are owed 833,320. Across the last three months we sold 1,624,460, which over 92 days is 17,657 of sales a day. Divide what we are owed by that and it takes customers 47.2 days to pay us.
-The target is 30 days. We are 17.2 days over it. If we collected on time we would be owed 529,715 instead of 833,320, so 303,605 of cash that should already be ours is sitting in the debtor book.
-Put that next to the profit position. The quarter made 5,774. There is 303,605 of our own money uncollected. Collecting it is worth many times more than anything we can trade our way to between now and Christmas, and it costs nothing but phone calls.
-Every day we take off the number brings in 17,657.</a:t>
+              <a:t>Other operating expenses, year to date.
+Rent 62,043 at 45.4%. IT Network Service &amp; Support 39,570 at 28.9%. Rental Outgoings 14,684 at 10.7%. Travel &amp; Per Diems 5,627 at 4.1%. Stamp Duty (Indirect) 3,455 at 2.5%. Repairs &amp; Maintenance 2,079 at 1.5%. Office Cleaning 2,079 at 1.5%. Mobile Phones 1,825 at 1.3%. Everything else 5,390 at 3.9%.
+Rent and outgoings are fixed by the lease. IT support is the next largest and the only one that moves.
+The practical conclusion is that savings do not come from here. Cutting this meaningfully means talking about the office lease.</a:t>
             </a:r>
             <a:endParaRPr lang="en-US" dirty="0"/>
           </a:p>
@@ -1261,14 +1266,10 @@
           <a:p>
             <a:r>
               <a:rPr lang="en-US" dirty="0"/>
-              <a:t>The ten largest amounts owed at 30 September 2026.
-Aware Super: 277,395, 33.3% of the total.
-Deloitte Services P/L for Deloitte Services Trust: 131,575, 15.8% of the total.
-Ventia: 94,701, 11.4% of the total.
-Downer EDI Limited: 39,664, 4.8% of the total.
-Generation-e Productivity Solutions: 39,106, 4.7% of the total.
-The ageing: Current 588,782 at 70.7%, Under 1 month 133,177 at 16.0%, 1 month 86,553 at 10.4%, 3 months 24,809 at 3.0%. Late in total 244,538, or 29.3% of the book.
-The action here is narrow and that is the point. Two customers hold most of the balance. A targeted chase on those two is worth more than a general collections exercise across everyone, and it is the fastest money available to us this quarter.</a:t>
+              <a:t>Labour mix for the year to date, direct labour charged to cost of sales split by type.
+Sub-Contract Labour 117,012. Service - hires 23,704. Direct Salaries 314,763. Direct Wages 111,018. Direct Superannuation 54,240.
+The great majority is permanent payroll. Contractors are the only labour cost that rises and falls with the work.
+This is the link to the utilisation section. We pay for hours worked and we bill for hours that are chargeable. Where those two diverge, margin goes with it.</a:t>
             </a:r>
             <a:endParaRPr lang="en-US" dirty="0"/>
           </a:p>
@@ -1356,7 +1357,11 @@
           <a:p>
             <a:r>
               <a:rPr lang="en-US" dirty="0"/>
-              <a:t>The company billed 2,437 chargeable hours in September 2026 out of 2,789 worked. Where chargeable hours fall short, margin follows.</a:t>
+              <a:t>Employment expense split between office staff and departmental staff for September 2026.
+Departmental staff is the employment expense on each department's own cost centre: Support 8,980, Events 35,665, Video 2,660, Integration 8,563, Consulting 5,545.
+Office staff is the admin employment pot of 63,077, charged across the departments on their share of full time equivalent: Support 42,262, Events 15,294, Video 1,301, Integration 269, Consulting 3,951.
+FTE is rolling twelve month worked hours on that cost centre divided by 2,024 hours, being 253 working days at eight. That is the method in the training recording.
+The change worth noting is that this no longer relies on a typed figure. The pack calculates it from the Labour Hours Report, so it reproduces every month without anyone deciding it.</a:t>
             </a:r>
             <a:endParaRPr lang="en-US" dirty="0"/>
           </a:p>
@@ -1444,17 +1449,7 @@
           <a:p>
             <a:r>
               <a:rPr lang="en-US" dirty="0"/>
-              <a:t>How each department spent its hours in September 2026.
-Read the bars as a mix, not as a size. Each one is scaled to that department's own total, because Support works around a hundred times the hours Integration does and on a straight scale four of the five departments disappear. The number on each segment is the real hours.
-Support: 2,132 hours on jobs, 11 not on jobs, 218 leave. 99.5% of worked hours were billable.
-Events: 241 hours on jobs, 249 not on jobs, 333 leave. 49.1% of worked hours were billable.
-Video: 25 hours on jobs, 8 not on jobs, 0 leave. 76.0% of worked hours were billable.
-Integration: 10 hours on jobs, 0 not on jobs, 0 leave. 100.0% of worked hours were billable.
-Consulting: 31 hours on jobs, 84 not on jobs, 53 leave. 26.8% of worked hours were billable.
-Across the five departments, 2,437 hours on jobs out of 2,789 worked.
-I need to be straight about the Support bar. 11 hours not on jobs, in a whole month, for a team that size, is not believable. Non-billable time is being booked to billable jobs. The total hours are right, the split is not, and until timesheet coding is corrected the Support percentage cannot be used to manage anybody.
-Events is the real operational issue: 333 hours of leave on a small team takes out most of the month's capacity.
-And the prize. Support earns about 48 of margin on every hour it bills. Five more points of billable time across Support and Events, at the rate each already earns, is worth roughly 15,813 a month and costs nothing extra. It is the largest controllable item in this pack.</a:t>
+              <a:t>Revenue is concentrated and cash is slow. Days sales outstanding is 47.2 against a 30 day target, which is 303,605 of cash sitting in the debtor book above where it should be.</a:t>
             </a:r>
             <a:endParaRPr lang="en-US" dirty="0"/>
           </a:p>
@@ -1630,7 +1625,21 @@
           <a:p>
             <a:r>
               <a:rPr lang="en-US" dirty="0"/>
-              <a:t>Three months are closed and the remaining nine are still at original budget. That is the decision in front of the board.</a:t>
+              <a:t>Top ten customers by revenue, year to date, with the top three called out in red.
+1. Deloitte Services: 401,755 for the year, 24.7% of the total, 119,614 of it in September 2026.
+2. Aware Super: 285,075 for the year, 17.5% of the total, 241,178 of it in September 2026.
+3. CBA Place South: 105,040 for the year, 6.5% of the total, 30,409 of it in September 2026.
+4. Ventia: 97,662 for the year, 6.0% of the total, 9,105 of it in September 2026.
+5. PwC Services: 88,051 for the year, 5.4% of the total, 26,707 of it in September 2026.
+6. APT Management Services: 63,613 for the year, 3.9% of the total, 4,527 of it in September 2026.
+7. ASX Operations: 60,858 for the year, 3.7% of the total, 17,167 of it in September 2026.
+8. Bankwest: 54,971 for the year, 3.4% of the total, 17,230 of it in September 2026.
+9. Data#3: 45,909 for the year, 2.8% of the total, 0 of it in September 2026.
+10. Generation-e Productivity…: 37,166 for the year, 2.3% of the total, 12,389 of it in September 2026.
+The ten together are 1,240,100, or 76.3% of everything we sold. Every other customer on the books makes up the remaining 384,360.
+The three red bars are the point of the slide. They are 48.7% of the year between them.
+The difference that matters is contract work against one-off projects. Deloitte Services is contracted support that renews every month. Aware Super is a fit-out that has finished. Counting them as the same kind of income is how a forecast goes wrong.
+What I am recommending: a named owner for each of the top three before the half year, and the new business target set on customers four to twenty rather than on the ones we already have.</a:t>
             </a:r>
             <a:endParaRPr lang="en-US" dirty="0"/>
           </a:p>
@@ -1718,11 +1727,11 @@
           <a:p>
             <a:r>
               <a:rPr lang="en-US" dirty="0"/>
-              <a:t>Revenue by month, actual for the three closed months and original budget for the rest.
-Q1 actual 1,624,460 against a budget of 1,996,110, behind by 371,650.
-The nine months from October are still at the budget set before the year started. October is budgeted at 950,416, higher than any month we have delivered.
-Two things for the board. The Q1 variance is concentrated in Consulting and Video, which were budgeted on a resourcing level that does not exist. And the margin assumption in the budget is above what the business has delivered for two years, so even a month that hits the revenue number will miss the profit number.
-My recommendation is a rolling forecast from Q2, rebuilding Consulting around actual capacity and resetting gross margin to delivered rates. December should stay as budgeted: the business closes for two weeks and the loss is real.</a:t>
+              <a:t>How long customers take to pay, at 30 September 2026.
+We are owed 833,320. Across the last three months we sold 1,624,460, which over 92 days is 17,657 of sales a day. Divide what we are owed by that and it takes customers 47.2 days to pay us.
+The target is 30 days. We are 17.2 days over it. If we collected on time we would be owed 529,715 instead of 833,320, so 303,605 of cash that should already be ours is sitting in the debtor book.
+Put that next to the profit position. The quarter made 5,774. There is 303,605 of our own money uncollected. Collecting it is worth many times more than anything we can trade our way to between now and Christmas, and it costs nothing but phone calls.
+Every day we take off the number brings in 17,657.</a:t>
             </a:r>
             <a:endParaRPr lang="en-US" dirty="0"/>
           </a:p>
@@ -1810,10 +1819,14 @@
           <a:p>
             <a:r>
               <a:rPr lang="en-US" dirty="0"/>
-              <a:t>Seven actions, each with an owner and a date.
-The first two matter most: reforecasting on margin rather than revenue, and testing the overhead keys. Everything else in this pack follows from those two numbers.
-The Consulting decision cannot keep being deferred; it has carried running costs against almost no fees for three months.
-The cash action is the only one that produces money this quarter, and the utilisation action is the largest controllable item.</a:t>
+              <a:t>The ten largest amounts owed at 30 September 2026.
+Aware Super: 277,395, 33.3% of the total.
+Deloitte Services P/L for Deloitte Services Trust: 131,575, 15.8% of the total.
+Ventia: 94,701, 11.4% of the total.
+Downer EDI Limited: 39,664, 4.8% of the total.
+Generation-e Productivity Solutions: 39,106, 4.7% of the total.
+The ageing: Current 588,782 at 70.7%, Under 1 month 133,177 at 16.0%, 1 month 86,553 at 10.4%, 3 months 24,809 at 3.0%. Late in total 244,538, or 29.3% of the book.
+The action here is narrow and that is the point. Two customers hold most of the balance. A targeted chase on those two is worth more than a general collections exercise across everyone, and it is the fastest money available to us this quarter.</a:t>
             </a:r>
             <a:endParaRPr lang="en-US" dirty="0"/>
           </a:p>
@@ -1901,7 +1914,7 @@
           <a:p>
             <a:r>
               <a:rPr lang="en-US" dirty="0"/>
-              <a:t>Close on the two numbers that matter: break even needs 549,372 a month at our real margin, and we are running at 541,487. Everything else in the pack is detail underneath that.</a:t>
+              <a:t>The company billed 2,437 chargeable hours in September 2026 out of 2,789 worked. Where chargeable hours fall short, margin follows.</a:t>
             </a:r>
             <a:endParaRPr lang="en-US" dirty="0"/>
           </a:p>
@@ -1925,6 +1938,463 @@
             <a:fld id="{F7021451-1387-4CA6-816F-3879F97B5CBC}" type="slidenum">
               <a:rPr lang="en-US"/>
               <a:t>23</a:t>
+            </a:fld>
+            <a:endParaRPr lang="en-US"/>
+          </a:p>
+        </p:txBody>
+      </p:sp>
+    </p:spTree>
+    <p:extLst>
+      <p:ext uri="{BB962C8B-B14F-4D97-AF65-F5344CB8AC3E}">
+        <p14:creationId xmlns:p14="http://schemas.microsoft.com/office/powerpoint/2010/main" val="1024086991"/>
+      </p:ext>
+    </p:extLst>
+  </p:cSld>
+  <p:clrMapOvr>
+    <a:masterClrMapping/>
+  </p:clrMapOvr>
+</p:notes>
+</file>
+
+<file path=ppt/notesSlides/notesSlide24.xml><?xml version="1.0" encoding="utf-8"?>
+<p:notes xmlns:a="http://schemas.openxmlformats.org/drawingml/2006/main" xmlns:r="http://schemas.openxmlformats.org/officeDocument/2006/relationships" xmlns:p="http://schemas.openxmlformats.org/presentationml/2006/main">
+  <p:cSld>
+    <p:spTree>
+      <p:nvGrpSpPr>
+        <p:cNvPr id="1" name=""/>
+        <p:cNvGrpSpPr/>
+        <p:nvPr/>
+      </p:nvGrpSpPr>
+      <p:grpSpPr>
+        <a:xfrm>
+          <a:off x="0" y="0"/>
+          <a:ext cx="0" cy="0"/>
+          <a:chOff x="0" y="0"/>
+          <a:chExt cx="0" cy="0"/>
+        </a:xfrm>
+      </p:grpSpPr>
+      <p:sp>
+        <p:nvSpPr>
+          <p:cNvPr id="2" name="Slide Image Placeholder 1"/>
+          <p:cNvSpPr>
+            <a:spLocks noGrp="1" noRot="1" noChangeAspect="1"/>
+          </p:cNvSpPr>
+          <p:nvPr>
+            <p:ph type="sldImg"/>
+          </p:nvPr>
+        </p:nvSpPr>
+        <p:spPr/>
+      </p:sp>
+      <p:sp>
+        <p:nvSpPr>
+          <p:cNvPr id="3" name="Notes Placeholder 2"/>
+          <p:cNvSpPr>
+            <a:spLocks noGrp="1"/>
+          </p:cNvSpPr>
+          <p:nvPr>
+            <p:ph type="body" idx="1"/>
+          </p:nvPr>
+        </p:nvSpPr>
+        <p:spPr/>
+        <p:txBody>
+          <a:bodyPr/>
+          <a:lstStyle/>
+          <a:p>
+            <a:r>
+              <a:rPr lang="en-US" dirty="0"/>
+              <a:t>How each department spent its hours in September 2026.
+Read the bars as a mix, not as a size. Each one is scaled to that department's own total, because Support works around a hundred times the hours Integration does and on a straight scale four of the five departments disappear. The number on each segment is the real hours.
+Support: 2,132 hours on jobs, 11 not on jobs, 218 leave. 99.5% of worked hours were billable.
+Events: 241 hours on jobs, 249 not on jobs, 333 leave. 49.1% of worked hours were billable.
+Video: 25 hours on jobs, 8 not on jobs, 0 leave. 76.0% of worked hours were billable.
+Integration: 10 hours on jobs, 0 not on jobs, 0 leave. 100.0% of worked hours were billable.
+Consulting: 31 hours on jobs, 84 not on jobs, 53 leave. 26.8% of worked hours were billable.
+Across the five departments, 2,437 hours on jobs out of 2,789 worked.
+I need to be straight about the Support bar. 11 hours not on jobs, in a whole month, for a team that size, is not believable. Non-billable time is being booked to billable jobs. The total hours are right, the split is not, and until timesheet coding is corrected the Support percentage cannot be used to manage anybody.
+Events is the real operational issue: 333 hours of leave on a small team takes out most of the month's capacity.
+And the prize. Support earns about 48 of margin on every hour it bills. Five more points of billable time across Support and Events, at the rate each already earns, is worth roughly 15,813 a month and costs nothing extra. It is the largest controllable item in this pack.</a:t>
+            </a:r>
+            <a:endParaRPr lang="en-US" dirty="0"/>
+          </a:p>
+        </p:txBody>
+      </p:sp>
+      <p:sp>
+        <p:nvSpPr>
+          <p:cNvPr id="4" name="Slide Number Placeholder 3"/>
+          <p:cNvSpPr>
+            <a:spLocks noGrp="1"/>
+          </p:cNvSpPr>
+          <p:nvPr>
+            <p:ph type="sldNum" sz="quarter" idx="10"/>
+          </p:nvPr>
+        </p:nvSpPr>
+        <p:spPr/>
+        <p:txBody>
+          <a:bodyPr/>
+          <a:lstStyle/>
+          <a:p>
+            <a:fld id="{F7021451-1387-4CA6-816F-3879F97B5CBC}" type="slidenum">
+              <a:rPr lang="en-US"/>
+              <a:t>24</a:t>
+            </a:fld>
+            <a:endParaRPr lang="en-US"/>
+          </a:p>
+        </p:txBody>
+      </p:sp>
+    </p:spTree>
+    <p:extLst>
+      <p:ext uri="{BB962C8B-B14F-4D97-AF65-F5344CB8AC3E}">
+        <p14:creationId xmlns:p14="http://schemas.microsoft.com/office/powerpoint/2010/main" val="1024086991"/>
+      </p:ext>
+    </p:extLst>
+  </p:cSld>
+  <p:clrMapOvr>
+    <a:masterClrMapping/>
+  </p:clrMapOvr>
+</p:notes>
+</file>
+
+<file path=ppt/notesSlides/notesSlide25.xml><?xml version="1.0" encoding="utf-8"?>
+<p:notes xmlns:a="http://schemas.openxmlformats.org/drawingml/2006/main" xmlns:r="http://schemas.openxmlformats.org/officeDocument/2006/relationships" xmlns:p="http://schemas.openxmlformats.org/presentationml/2006/main">
+  <p:cSld>
+    <p:spTree>
+      <p:nvGrpSpPr>
+        <p:cNvPr id="1" name=""/>
+        <p:cNvGrpSpPr/>
+        <p:nvPr/>
+      </p:nvGrpSpPr>
+      <p:grpSpPr>
+        <a:xfrm>
+          <a:off x="0" y="0"/>
+          <a:ext cx="0" cy="0"/>
+          <a:chOff x="0" y="0"/>
+          <a:chExt cx="0" cy="0"/>
+        </a:xfrm>
+      </p:grpSpPr>
+      <p:sp>
+        <p:nvSpPr>
+          <p:cNvPr id="2" name="Slide Image Placeholder 1"/>
+          <p:cNvSpPr>
+            <a:spLocks noGrp="1" noRot="1" noChangeAspect="1"/>
+          </p:cNvSpPr>
+          <p:nvPr>
+            <p:ph type="sldImg"/>
+          </p:nvPr>
+        </p:nvSpPr>
+        <p:spPr/>
+      </p:sp>
+      <p:sp>
+        <p:nvSpPr>
+          <p:cNvPr id="3" name="Notes Placeholder 2"/>
+          <p:cNvSpPr>
+            <a:spLocks noGrp="1"/>
+          </p:cNvSpPr>
+          <p:nvPr>
+            <p:ph type="body" idx="1"/>
+          </p:nvPr>
+        </p:nvSpPr>
+        <p:spPr/>
+        <p:txBody>
+          <a:bodyPr/>
+          <a:lstStyle/>
+          <a:p>
+            <a:r>
+              <a:rPr lang="en-US" dirty="0"/>
+              <a:t>Three months are closed and the remaining nine are still at original budget. That is the decision in front of the board.</a:t>
+            </a:r>
+            <a:endParaRPr lang="en-US" dirty="0"/>
+          </a:p>
+        </p:txBody>
+      </p:sp>
+      <p:sp>
+        <p:nvSpPr>
+          <p:cNvPr id="4" name="Slide Number Placeholder 3"/>
+          <p:cNvSpPr>
+            <a:spLocks noGrp="1"/>
+          </p:cNvSpPr>
+          <p:nvPr>
+            <p:ph type="sldNum" sz="quarter" idx="10"/>
+          </p:nvPr>
+        </p:nvSpPr>
+        <p:spPr/>
+        <p:txBody>
+          <a:bodyPr/>
+          <a:lstStyle/>
+          <a:p>
+            <a:fld id="{F7021451-1387-4CA6-816F-3879F97B5CBC}" type="slidenum">
+              <a:rPr lang="en-US"/>
+              <a:t>25</a:t>
+            </a:fld>
+            <a:endParaRPr lang="en-US"/>
+          </a:p>
+        </p:txBody>
+      </p:sp>
+    </p:spTree>
+    <p:extLst>
+      <p:ext uri="{BB962C8B-B14F-4D97-AF65-F5344CB8AC3E}">
+        <p14:creationId xmlns:p14="http://schemas.microsoft.com/office/powerpoint/2010/main" val="1024086991"/>
+      </p:ext>
+    </p:extLst>
+  </p:cSld>
+  <p:clrMapOvr>
+    <a:masterClrMapping/>
+  </p:clrMapOvr>
+</p:notes>
+</file>
+
+<file path=ppt/notesSlides/notesSlide26.xml><?xml version="1.0" encoding="utf-8"?>
+<p:notes xmlns:a="http://schemas.openxmlformats.org/drawingml/2006/main" xmlns:r="http://schemas.openxmlformats.org/officeDocument/2006/relationships" xmlns:p="http://schemas.openxmlformats.org/presentationml/2006/main">
+  <p:cSld>
+    <p:spTree>
+      <p:nvGrpSpPr>
+        <p:cNvPr id="1" name=""/>
+        <p:cNvGrpSpPr/>
+        <p:nvPr/>
+      </p:nvGrpSpPr>
+      <p:grpSpPr>
+        <a:xfrm>
+          <a:off x="0" y="0"/>
+          <a:ext cx="0" cy="0"/>
+          <a:chOff x="0" y="0"/>
+          <a:chExt cx="0" cy="0"/>
+        </a:xfrm>
+      </p:grpSpPr>
+      <p:sp>
+        <p:nvSpPr>
+          <p:cNvPr id="2" name="Slide Image Placeholder 1"/>
+          <p:cNvSpPr>
+            <a:spLocks noGrp="1" noRot="1" noChangeAspect="1"/>
+          </p:cNvSpPr>
+          <p:nvPr>
+            <p:ph type="sldImg"/>
+          </p:nvPr>
+        </p:nvSpPr>
+        <p:spPr/>
+      </p:sp>
+      <p:sp>
+        <p:nvSpPr>
+          <p:cNvPr id="3" name="Notes Placeholder 2"/>
+          <p:cNvSpPr>
+            <a:spLocks noGrp="1"/>
+          </p:cNvSpPr>
+          <p:nvPr>
+            <p:ph type="body" idx="1"/>
+          </p:nvPr>
+        </p:nvSpPr>
+        <p:spPr/>
+        <p:txBody>
+          <a:bodyPr/>
+          <a:lstStyle/>
+          <a:p>
+            <a:r>
+              <a:rPr lang="en-US" dirty="0"/>
+              <a:t>Revenue by month, actual for the three closed months and original budget for the rest.
+Q1 actual 1,624,460 against a budget of 1,996,110, behind by 371,650.
+The nine months from October are still at the budget set before the year started. October is budgeted at 950,416, higher than any month we have delivered.
+Two things for the board. The Q1 variance is concentrated in Consulting and Video, which were budgeted on a resourcing level that does not exist. And the margin assumption in the budget is above what the business has delivered for two years, so even a month that hits the revenue number will miss the profit number.
+My recommendation is a rolling forecast from Q2, rebuilding Consulting around actual capacity and resetting gross margin to delivered rates. December should stay as budgeted: the business closes for two weeks and the loss is real.</a:t>
+            </a:r>
+            <a:endParaRPr lang="en-US" dirty="0"/>
+          </a:p>
+        </p:txBody>
+      </p:sp>
+      <p:sp>
+        <p:nvSpPr>
+          <p:cNvPr id="4" name="Slide Number Placeholder 3"/>
+          <p:cNvSpPr>
+            <a:spLocks noGrp="1"/>
+          </p:cNvSpPr>
+          <p:nvPr>
+            <p:ph type="sldNum" sz="quarter" idx="10"/>
+          </p:nvPr>
+        </p:nvSpPr>
+        <p:spPr/>
+        <p:txBody>
+          <a:bodyPr/>
+          <a:lstStyle/>
+          <a:p>
+            <a:fld id="{F7021451-1387-4CA6-816F-3879F97B5CBC}" type="slidenum">
+              <a:rPr lang="en-US"/>
+              <a:t>26</a:t>
+            </a:fld>
+            <a:endParaRPr lang="en-US"/>
+          </a:p>
+        </p:txBody>
+      </p:sp>
+    </p:spTree>
+    <p:extLst>
+      <p:ext uri="{BB962C8B-B14F-4D97-AF65-F5344CB8AC3E}">
+        <p14:creationId xmlns:p14="http://schemas.microsoft.com/office/powerpoint/2010/main" val="1024086991"/>
+      </p:ext>
+    </p:extLst>
+  </p:cSld>
+  <p:clrMapOvr>
+    <a:masterClrMapping/>
+  </p:clrMapOvr>
+</p:notes>
+</file>
+
+<file path=ppt/notesSlides/notesSlide27.xml><?xml version="1.0" encoding="utf-8"?>
+<p:notes xmlns:a="http://schemas.openxmlformats.org/drawingml/2006/main" xmlns:r="http://schemas.openxmlformats.org/officeDocument/2006/relationships" xmlns:p="http://schemas.openxmlformats.org/presentationml/2006/main">
+  <p:cSld>
+    <p:spTree>
+      <p:nvGrpSpPr>
+        <p:cNvPr id="1" name=""/>
+        <p:cNvGrpSpPr/>
+        <p:nvPr/>
+      </p:nvGrpSpPr>
+      <p:grpSpPr>
+        <a:xfrm>
+          <a:off x="0" y="0"/>
+          <a:ext cx="0" cy="0"/>
+          <a:chOff x="0" y="0"/>
+          <a:chExt cx="0" cy="0"/>
+        </a:xfrm>
+      </p:grpSpPr>
+      <p:sp>
+        <p:nvSpPr>
+          <p:cNvPr id="2" name="Slide Image Placeholder 1"/>
+          <p:cNvSpPr>
+            <a:spLocks noGrp="1" noRot="1" noChangeAspect="1"/>
+          </p:cNvSpPr>
+          <p:nvPr>
+            <p:ph type="sldImg"/>
+          </p:nvPr>
+        </p:nvSpPr>
+        <p:spPr/>
+      </p:sp>
+      <p:sp>
+        <p:nvSpPr>
+          <p:cNvPr id="3" name="Notes Placeholder 2"/>
+          <p:cNvSpPr>
+            <a:spLocks noGrp="1"/>
+          </p:cNvSpPr>
+          <p:nvPr>
+            <p:ph type="body" idx="1"/>
+          </p:nvPr>
+        </p:nvSpPr>
+        <p:spPr/>
+        <p:txBody>
+          <a:bodyPr/>
+          <a:lstStyle/>
+          <a:p>
+            <a:r>
+              <a:rPr lang="en-US" dirty="0"/>
+              <a:t>Seven actions, each with an owner and a date.
+The first two matter most: reforecasting on margin rather than revenue, and testing the overhead keys. Everything else in this pack follows from those two numbers.
+The Consulting decision cannot keep being deferred; it has carried running costs against almost no fees for three months.
+The cash action is the only one that produces money this quarter, and the utilisation action is the largest controllable item.</a:t>
+            </a:r>
+            <a:endParaRPr lang="en-US" dirty="0"/>
+          </a:p>
+        </p:txBody>
+      </p:sp>
+      <p:sp>
+        <p:nvSpPr>
+          <p:cNvPr id="4" name="Slide Number Placeholder 3"/>
+          <p:cNvSpPr>
+            <a:spLocks noGrp="1"/>
+          </p:cNvSpPr>
+          <p:nvPr>
+            <p:ph type="sldNum" sz="quarter" idx="10"/>
+          </p:nvPr>
+        </p:nvSpPr>
+        <p:spPr/>
+        <p:txBody>
+          <a:bodyPr/>
+          <a:lstStyle/>
+          <a:p>
+            <a:fld id="{F7021451-1387-4CA6-816F-3879F97B5CBC}" type="slidenum">
+              <a:rPr lang="en-US"/>
+              <a:t>27</a:t>
+            </a:fld>
+            <a:endParaRPr lang="en-US"/>
+          </a:p>
+        </p:txBody>
+      </p:sp>
+    </p:spTree>
+    <p:extLst>
+      <p:ext uri="{BB962C8B-B14F-4D97-AF65-F5344CB8AC3E}">
+        <p14:creationId xmlns:p14="http://schemas.microsoft.com/office/powerpoint/2010/main" val="1024086991"/>
+      </p:ext>
+    </p:extLst>
+  </p:cSld>
+  <p:clrMapOvr>
+    <a:masterClrMapping/>
+  </p:clrMapOvr>
+</p:notes>
+</file>
+
+<file path=ppt/notesSlides/notesSlide28.xml><?xml version="1.0" encoding="utf-8"?>
+<p:notes xmlns:a="http://schemas.openxmlformats.org/drawingml/2006/main" xmlns:r="http://schemas.openxmlformats.org/officeDocument/2006/relationships" xmlns:p="http://schemas.openxmlformats.org/presentationml/2006/main">
+  <p:cSld>
+    <p:spTree>
+      <p:nvGrpSpPr>
+        <p:cNvPr id="1" name=""/>
+        <p:cNvGrpSpPr/>
+        <p:nvPr/>
+      </p:nvGrpSpPr>
+      <p:grpSpPr>
+        <a:xfrm>
+          <a:off x="0" y="0"/>
+          <a:ext cx="0" cy="0"/>
+          <a:chOff x="0" y="0"/>
+          <a:chExt cx="0" cy="0"/>
+        </a:xfrm>
+      </p:grpSpPr>
+      <p:sp>
+        <p:nvSpPr>
+          <p:cNvPr id="2" name="Slide Image Placeholder 1"/>
+          <p:cNvSpPr>
+            <a:spLocks noGrp="1" noRot="1" noChangeAspect="1"/>
+          </p:cNvSpPr>
+          <p:nvPr>
+            <p:ph type="sldImg"/>
+          </p:nvPr>
+        </p:nvSpPr>
+        <p:spPr/>
+      </p:sp>
+      <p:sp>
+        <p:nvSpPr>
+          <p:cNvPr id="3" name="Notes Placeholder 2"/>
+          <p:cNvSpPr>
+            <a:spLocks noGrp="1"/>
+          </p:cNvSpPr>
+          <p:nvPr>
+            <p:ph type="body" idx="1"/>
+          </p:nvPr>
+        </p:nvSpPr>
+        <p:spPr/>
+        <p:txBody>
+          <a:bodyPr/>
+          <a:lstStyle/>
+          <a:p>
+            <a:r>
+              <a:rPr lang="en-US" dirty="0"/>
+              <a:t>Close on the two numbers that matter: break even needs 549,372 a month at our real margin, and we are running at 541,487. Everything else in the pack is detail underneath that.</a:t>
+            </a:r>
+            <a:endParaRPr lang="en-US" dirty="0"/>
+          </a:p>
+        </p:txBody>
+      </p:sp>
+      <p:sp>
+        <p:nvSpPr>
+          <p:cNvPr id="4" name="Slide Number Placeholder 3"/>
+          <p:cNvSpPr>
+            <a:spLocks noGrp="1"/>
+          </p:cNvSpPr>
+          <p:nvPr>
+            <p:ph type="sldNum" sz="quarter" idx="10"/>
+          </p:nvPr>
+        </p:nvSpPr>
+        <p:spPr/>
+        <p:txBody>
+          <a:bodyPr/>
+          <a:lstStyle/>
+          <a:p>
+            <a:fld id="{F7021451-1387-4CA6-816F-3879F97B5CBC}" type="slidenum">
+              <a:rPr lang="en-US"/>
+              <a:t>28</a:t>
             </a:fld>
             <a:endParaRPr lang="en-US"/>
           </a:p>
@@ -2459,14 +2929,13 @@
           <a:p>
             <a:r>
               <a:rPr lang="en-US" dirty="0"/>
-              <a:t>Revenue by department for September 2026, actual against budget and against the same month last year.
-Support: 242,948 against a budget of 248,017 and 231,214 last year.
-Integration: 234,858 against a budget of 59,272 and 21,421 last year.
-Events: 73,304 against a budget of 65,828 and 75,333 last year.
-Video: 7,303 against a budget of 17,498 and 20,025 last year.
-Consulting: 3,531 against a budget of 23,050 and 8,330 last year.
-Company revenue 561,945 against 413,665 budget and 356,323 last September.
-The beat is Integration, and it is one large fit-out at 10.1% gross margin. Read it as timing, not growth. Video and Consulting are short of budget for the third month running.</a:t>
+              <a:t>Support for September 2026, read off the Dept P&amp;L tab.
+Sales 242,948 against a budget of 248,017, behind by 5,068. Last September it billed 231,214.
+After direct costs of 141,659 it kept 101,290, which is 41.7% of what it sold.
+Running costs charged to it were 72,283. 13,101 of that is its own spending and 59,182 is its share of the office, charged on the keys set in the pack.
+That leaves 29,007 for the month.
+Year to date it has billed 718,587 against a budget of 743,185.
+On people: employment expense of 51,242, of which 8,980 is its own staff and 42,262 is its share of office wages. It put 2,132 hours onto jobs and 11 onto work we cannot bill, with 218 hours of leave.</a:t>
             </a:r>
             <a:endParaRPr lang="en-US" dirty="0"/>
           </a:p>
@@ -2554,7 +3023,13 @@
           <a:p>
             <a:r>
               <a:rPr lang="en-US" dirty="0"/>
-              <a:t>Running costs are steady at about 214 thousand a month. Spending is not the problem, but that is the number sales have to beat.</a:t>
+              <a:t>Events for September 2026, read off the Dept P&amp;L tab.
+Sales 73,304 against a budget of 65,828, ahead by 7,476. Last September it billed 75,333.
+After direct costs of 16,423 it kept 56,881, which is 77.6% of what it sold.
+Running costs charged to it were 111,108. 39,436 of that is its own spending and 71,672 is its share of the office, charged on the keys set in the pack.
+That leaves (54,227) for the month.
+Year to date it has billed 420,121 against a budget of 321,957.
+On people: employment expense of 50,959, of which 35,665 is its own staff and 15,294 is its share of office wages. It put 241 hours onto jobs and 249 onto work we cannot bill, with 333 hours of leave.</a:t>
             </a:r>
             <a:endParaRPr lang="en-US" dirty="0"/>
           </a:p>
@@ -3485,7 +3960,7 @@
                   <a:srgbClr val="122B82"/>
                 </a:solidFill>
               </a:rPr>
-              <a:t>WHAT WE SPEND</a:t>
+              <a:t>FINANCIAL PERFORMANCE</a:t>
             </a:r>
             <a:endParaRPr lang="en-US" sz="950" dirty="0"/>
           </a:p>
@@ -3521,7 +3996,7 @@
                   <a:srgbClr val="242C39"/>
                 </a:solidFill>
               </a:rPr>
-              <a:t>Operating cost distribution, year to date</a:t>
+              <a:t>Video, Sep 26</a:t>
             </a:r>
             <a:endParaRPr lang="en-US" sz="2700" dirty="0"/>
           </a:p>
@@ -3529,7 +4004,7 @@
       </p:sp>
       <p:pic>
         <p:nvPicPr>
-          <p:cNvPr id="4" name="snip cost_dist" descr="/home/user/Claude/deck/snips/cost_dist.png">    </p:cNvPr>
+          <p:cNvPr id="4" name="snip dept_Video" descr="/home/user/Claude/deck/snips/dept_Video.png">    </p:cNvPr>
           <p:cNvPicPr>
             <a:picLocks noChangeAspect="1"/>
           </p:cNvPicPr>
@@ -3544,7 +4019,7 @@
         <p:spPr>
           <a:xfrm>
             <a:off x="502920" y="1444752"/>
-            <a:ext cx="5577840" cy="2820757"/>
+            <a:ext cx="5577840" cy="2594047"/>
           </a:xfrm>
           <a:prstGeom prst="rect">
             <a:avLst/>
@@ -3559,7 +4034,7 @@
         </p:nvSpPr>
         <p:spPr>
           <a:xfrm>
-            <a:off x="502920" y="4338661"/>
+            <a:off x="502920" y="4111951"/>
             <a:ext cx="5577840" cy="237744"/>
           </a:xfrm>
           <a:prstGeom prst="rect">
@@ -3581,7 +4056,7 @@
                   <a:srgbClr val="6B7585"/>
                 </a:solidFill>
               </a:rPr>
-              <a:t>Snipped from the Financial Controller Pack, Cost Analysis tab, operating cost distribution.</a:t>
+              <a:t>Snipped from the Financial Controller Pack, Dept P&amp;L tab, the department selector set to Video.</a:t>
             </a:r>
             <a:endParaRPr lang="en-US" sz="800" dirty="0"/>
           </a:p>
@@ -3668,7 +4143,7 @@
           <a:p>
             <a:pPr marL="342900" indent="-342900">
               <a:lnSpc>
-                <a:spcPts val="1150"/>
+                <a:spcPts val="1300"/>
               </a:lnSpc>
               <a:spcAft>
                 <a:spcPts val="500"/>
@@ -3677,19 +4152,19 @@
               <a:buChar char="•"/>
             </a:pPr>
             <a:r>
-              <a:rPr lang="en-US" sz="900" dirty="0">
+              <a:rPr lang="en-US" sz="1000" dirty="0">
                 <a:solidFill>
                   <a:srgbClr val="3A4453"/>
                 </a:solidFill>
               </a:rPr>
-              <a:t>Wages for people on jobs (621)k, and wages for everyone else (369)k. Together that is most of what we spend.</a:t>
-            </a:r>
-            <a:endParaRPr lang="en-US" sz="900" dirty="0"/>
+              <a:t>Billed 7k against 17k. Short of plan for the third month running.</a:t>
+            </a:r>
+            <a:endParaRPr lang="en-US" sz="1000" dirty="0"/>
           </a:p>
           <a:p>
             <a:pPr marL="342900" indent="-342900">
               <a:lnSpc>
-                <a:spcPts val="1150"/>
+                <a:spcPts val="1300"/>
               </a:lnSpc>
               <a:spcAft>
                 <a:spcPts val="500"/>
@@ -3698,19 +4173,19 @@
               <a:buChar char="•"/>
             </a:pPr>
             <a:r>
-              <a:rPr lang="en-US" sz="900" dirty="0">
+              <a:rPr lang="en-US" sz="1000" dirty="0">
                 <a:solidFill>
                   <a:srgbClr val="3A4453"/>
                 </a:solidFill>
               </a:rPr>
-              <a:t>Wages are what this business spends its money on. Everything else is small next to them.</a:t>
-            </a:r>
-            <a:endParaRPr lang="en-US" sz="900" dirty="0"/>
+              <a:t>Keeps 80% of what it sells, the best margin in the business.</a:t>
+            </a:r>
+            <a:endParaRPr lang="en-US" sz="1000" dirty="0"/>
           </a:p>
           <a:p>
             <a:pPr marL="342900" indent="-342900">
               <a:lnSpc>
-                <a:spcPts val="1150"/>
+                <a:spcPts val="1300"/>
               </a:lnSpc>
               <a:spcAft>
                 <a:spcPts val="500"/>
@@ -3719,19 +4194,19 @@
               <a:buChar char="•"/>
             </a:pPr>
             <a:r>
-              <a:rPr lang="en-US" sz="900" dirty="0">
+              <a:rPr lang="en-US" sz="1000" dirty="0">
                 <a:solidFill>
                   <a:srgbClr val="3A4453"/>
                 </a:solidFill>
               </a:rPr>
-              <a:t>The (369)k of wages for people not on jobs is the same every month. When sales drop this does not, so a bad month lands straight on the profit.</a:t>
-            </a:r>
-            <a:endParaRPr lang="en-US" sz="900" dirty="0"/>
+              <a:t>But on 7k of sales that is only 6k, against 13k of running costs.</a:t>
+            </a:r>
+            <a:endParaRPr lang="en-US" sz="1000" dirty="0"/>
           </a:p>
           <a:p>
             <a:pPr marL="342900" indent="-342900">
               <a:lnSpc>
-                <a:spcPts val="1150"/>
+                <a:spcPts val="1300"/>
               </a:lnSpc>
               <a:spcAft>
                 <a:spcPts val="500"/>
@@ -3740,19 +4215,19 @@
               <a:buChar char="•"/>
             </a:pPr>
             <a:r>
-              <a:rPr lang="en-US" sz="900" dirty="0">
+              <a:rPr lang="en-US" sz="1000" dirty="0">
                 <a:solidFill>
                   <a:srgbClr val="3A4453"/>
                 </a:solidFill>
               </a:rPr>
-              <a:t>Equipment and services at (347)k is the only cost that rises and falls with the work.</a:t>
-            </a:r>
-            <a:endParaRPr lang="en-US" sz="900" dirty="0"/>
+              <a:t>The margin is not the problem. There is not enough work going through it.</a:t>
+            </a:r>
+            <a:endParaRPr lang="en-US" sz="1000" dirty="0"/>
           </a:p>
           <a:p>
             <a:pPr marL="342900" indent="-342900">
               <a:lnSpc>
-                <a:spcPts val="1150"/>
+                <a:spcPts val="1300"/>
               </a:lnSpc>
               <a:spcAft>
                 <a:spcPts val="500"/>
@@ -3761,14 +4236,14 @@
               <a:buChar char="•"/>
             </a:pPr>
             <a:r>
-              <a:rPr lang="en-US" sz="900" dirty="0">
+              <a:rPr lang="en-US" sz="1000" dirty="0">
                 <a:solidFill>
                   <a:srgbClr val="3A4453"/>
                 </a:solidFill>
               </a:rPr>
-              <a:t>If we have to cut cost it is people or the office. Nothing else is big enough to matter.</a:t>
-            </a:r>
-            <a:endParaRPr lang="en-US" sz="900" dirty="0"/>
+              <a:t>25 billable hours in the month. That is one person, part of the time.</a:t>
+            </a:r>
+            <a:endParaRPr lang="en-US" sz="1000" dirty="0"/>
           </a:p>
         </p:txBody>
       </p:sp>
@@ -3872,7 +4347,7 @@
                   <a:srgbClr val="122B82"/>
                 </a:solidFill>
               </a:rPr>
-              <a:t>WHAT WE SPEND</a:t>
+              <a:t>FINANCIAL PERFORMANCE</a:t>
             </a:r>
             <a:endParaRPr lang="en-US" sz="950" dirty="0"/>
           </a:p>
@@ -3908,7 +4383,7 @@
                   <a:srgbClr val="242C39"/>
                 </a:solidFill>
               </a:rPr>
-              <a:t>Other operating expenses, year to date</a:t>
+              <a:t>Integration, Sep 26</a:t>
             </a:r>
             <a:endParaRPr lang="en-US" sz="2700" dirty="0"/>
           </a:p>
@@ -3916,7 +4391,7 @@
       </p:sp>
       <p:pic>
         <p:nvPicPr>
-          <p:cNvPr id="4" name="snip other_opex" descr="/home/user/Claude/deck/snips/other_opex.png">    </p:cNvPr>
+          <p:cNvPr id="4" name="snip dept_Integration" descr="/home/user/Claude/deck/snips/dept_Integration.png">    </p:cNvPr>
           <p:cNvPicPr>
             <a:picLocks noChangeAspect="1"/>
           </p:cNvPicPr>
@@ -3931,7 +4406,7 @@
         <p:spPr>
           <a:xfrm>
             <a:off x="502920" y="1444752"/>
-            <a:ext cx="5577840" cy="2569245"/>
+            <a:ext cx="5577840" cy="2594047"/>
           </a:xfrm>
           <a:prstGeom prst="rect">
             <a:avLst/>
@@ -3946,7 +4421,7 @@
         </p:nvSpPr>
         <p:spPr>
           <a:xfrm>
-            <a:off x="502920" y="4087149"/>
+            <a:off x="502920" y="4111951"/>
             <a:ext cx="5577840" cy="237744"/>
           </a:xfrm>
           <a:prstGeom prst="rect">
@@ -3968,7 +4443,7 @@
                   <a:srgbClr val="6B7585"/>
                 </a:solidFill>
               </a:rPr>
-              <a:t>Snipped from the Financial Controller Pack, Cost Analysis tab, other operating expenses.</a:t>
+              <a:t>Snipped from the Financial Controller Pack, Dept P&amp;L tab, the department selector set to Integration.</a:t>
             </a:r>
             <a:endParaRPr lang="en-US" sz="800" dirty="0"/>
           </a:p>
@@ -4069,7 +4544,7 @@
                   <a:srgbClr val="3A4453"/>
                 </a:solidFill>
               </a:rPr>
-              <a:t>The office is the big one: rent (62)k plus outgoings (15)k, 77k together.</a:t>
+              <a:t>Billed 235k against a 59k plan. Nearly all of it one installation job, now finished.</a:t>
             </a:r>
             <a:endParaRPr lang="en-US" sz="950" dirty="0"/>
           </a:p>
@@ -4090,7 +4565,7 @@
                   <a:srgbClr val="3A4453"/>
                 </a:solidFill>
               </a:rPr>
-              <a:t>IT support at (40)k is next, and the only one that moves much month to month.</a:t>
+              <a:t>Keeps only 10% of it. We bought the equipment and resold it, so the money went mostly to suppliers.</a:t>
             </a:r>
             <a:endParaRPr lang="en-US" sz="950" dirty="0"/>
           </a:p>
@@ -4111,7 +4586,7 @@
                   <a:srgbClr val="3A4453"/>
                 </a:solidFill>
               </a:rPr>
-              <a:t>Everything below the top three is under six thousand across a full quarter.</a:t>
+              <a:t>235k of sales turned into 24k. Do not read the revenue line as a good month.</a:t>
             </a:r>
             <a:endParaRPr lang="en-US" sz="950" dirty="0"/>
           </a:p>
@@ -4132,7 +4607,7 @@
                   <a:srgbClr val="3A4453"/>
                 </a:solidFill>
               </a:rPr>
-              <a:t>There is nothing worth saving further down the list. Do not spend management time there.</a:t>
+              <a:t>It shows a 10k profit only because it carries almost no running costs, 13k.</a:t>
             </a:r>
             <a:endParaRPr lang="en-US" sz="950" dirty="0"/>
           </a:p>
@@ -4153,7 +4628,7 @@
                   <a:srgbClr val="3A4453"/>
                 </a:solidFill>
               </a:rPr>
-              <a:t>The office is the only real saving here, and that is a lease decision, not a budget one.</a:t>
+              <a:t>10 billable hours against 235k of sales. We resold, we did not deliver.</a:t>
             </a:r>
             <a:endParaRPr lang="en-US" sz="950" dirty="0"/>
           </a:p>
@@ -4259,7 +4734,7 @@
                   <a:srgbClr val="122B82"/>
                 </a:solidFill>
               </a:rPr>
-              <a:t>WHAT WE SPEND</a:t>
+              <a:t>FINANCIAL PERFORMANCE</a:t>
             </a:r>
             <a:endParaRPr lang="en-US" sz="950" dirty="0"/>
           </a:p>
@@ -4295,7 +4770,7 @@
                   <a:srgbClr val="242C39"/>
                 </a:solidFill>
               </a:rPr>
-              <a:t>Labour mix, year to date</a:t>
+              <a:t>Consulting, Sep 26</a:t>
             </a:r>
             <a:endParaRPr lang="en-US" sz="2700" dirty="0"/>
           </a:p>
@@ -4303,7 +4778,7 @@
       </p:sp>
       <p:pic>
         <p:nvPicPr>
-          <p:cNvPr id="4" name="snip labour_mix" descr="/home/user/Claude/deck/snips/labour_mix.png">    </p:cNvPr>
+          <p:cNvPr id="4" name="snip dept_Consulting" descr="/home/user/Claude/deck/snips/dept_Consulting.png">    </p:cNvPr>
           <p:cNvPicPr>
             <a:picLocks noChangeAspect="1"/>
           </p:cNvPicPr>
@@ -4317,8 +4792,8 @@
         </p:blipFill>
         <p:spPr>
           <a:xfrm>
-            <a:off x="696031" y="1444752"/>
-            <a:ext cx="5191618" cy="3090672"/>
+            <a:off x="502920" y="1444752"/>
+            <a:ext cx="5577840" cy="2594047"/>
           </a:xfrm>
           <a:prstGeom prst="rect">
             <a:avLst/>
@@ -4333,7 +4808,7 @@
         </p:nvSpPr>
         <p:spPr>
           <a:xfrm>
-            <a:off x="502920" y="4608576"/>
+            <a:off x="502920" y="4111951"/>
             <a:ext cx="5577840" cy="237744"/>
           </a:xfrm>
           <a:prstGeom prst="rect">
@@ -4355,7 +4830,7 @@
                   <a:srgbClr val="6B7585"/>
                 </a:solidFill>
               </a:rPr>
-              <a:t>Snipped from the Financial Controller Pack, Cost Analysis tab, labour mix, direct against indirect.</a:t>
+              <a:t>Snipped from the Financial Controller Pack, Dept P&amp;L tab, the department selector set to Consulting.</a:t>
             </a:r>
             <a:endParaRPr lang="en-US" sz="800" dirty="0"/>
           </a:p>
@@ -4456,7 +4931,7 @@
                   <a:srgbClr val="3A4453"/>
                 </a:solidFill>
               </a:rPr>
-              <a:t>Labour on jobs splits two ways: our own staff, and contractors we bring in.</a:t>
+              <a:t>Billed 4k against a 23k plan. There is almost no fee income here.</a:t>
             </a:r>
             <a:endParaRPr lang="en-US" sz="950" dirty="0"/>
           </a:p>
@@ -4477,7 +4952,7 @@
                   <a:srgbClr val="3A4453"/>
                 </a:solidFill>
               </a:rPr>
-              <a:t>Salaries, wages and super are most of it, and we are committed to paying them.</a:t>
+              <a:t>Carries 20k of running costs against 4k of sales, so it loses 20k.</a:t>
             </a:r>
             <a:endParaRPr lang="en-US" sz="950" dirty="0"/>
           </a:p>
@@ -4498,7 +4973,7 @@
                   <a:srgbClr val="3A4453"/>
                 </a:solidFill>
               </a:rPr>
-              <a:t>Contractors are the only labour cost that goes up and down with the work.</a:t>
+              <a:t>84 hours went into work we cannot bill against 31 we can.</a:t>
             </a:r>
             <a:endParaRPr lang="en-US" sz="950" dirty="0"/>
           </a:p>
@@ -4519,7 +4994,7 @@
                   <a:srgbClr val="3A4453"/>
                 </a:solidFill>
               </a:rPr>
-              <a:t>It rises when our own team runs out of hours, so watch it against the utilisation page.</a:t>
+              <a:t>Year to date it has billed 4k against a 237k plan.</a:t>
             </a:r>
             <a:endParaRPr lang="en-US" sz="950" dirty="0"/>
           </a:p>
@@ -4540,7 +5015,7 @@
                   <a:srgbClr val="3A4453"/>
                 </a:solidFill>
               </a:rPr>
-              <a:t>We pay for every hour worked. We only bill the hours spent on jobs. The difference is profit we never make.</a:t>
+              <a:t>This is a decision for the board, not a forecast. Rebuild it, merge it into Integration, or close it.</a:t>
             </a:r>
             <a:endParaRPr lang="en-US" sz="950" dirty="0"/>
           </a:p>
@@ -4646,7 +5121,7 @@
                   <a:srgbClr val="122B82"/>
                 </a:solidFill>
               </a:rPr>
-              <a:t>WHAT WE SPEND</a:t>
+              <a:t>FINANCIAL PERFORMANCE</a:t>
             </a:r>
             <a:endParaRPr lang="en-US" sz="950" dirty="0"/>
           </a:p>
@@ -4682,7 +5157,7 @@
                   <a:srgbClr val="242C39"/>
                 </a:solidFill>
               </a:rPr>
-              <a:t>Employment expense, office and departmental</a:t>
+              <a:t>Revenue against budget and last year</a:t>
             </a:r>
             <a:endParaRPr lang="en-US" sz="2700" dirty="0"/>
           </a:p>
@@ -4690,7 +5165,7 @@
       </p:sp>
       <p:pic>
         <p:nvPicPr>
-          <p:cNvPr id="4" name="snip staff_split" descr="/home/user/Claude/deck/snips/staff_split.png">    </p:cNvPr>
+          <p:cNvPr id="4" name="snip rev_by_dept" descr="/home/user/Claude/deck/snips/rev_by_dept.png">    </p:cNvPr>
           <p:cNvPicPr>
             <a:picLocks noChangeAspect="1"/>
           </p:cNvPicPr>
@@ -4704,8 +5179,8 @@
         </p:blipFill>
         <p:spPr>
           <a:xfrm>
-            <a:off x="502920" y="1389888"/>
-            <a:ext cx="8138160" cy="2176723"/>
+            <a:off x="502920" y="1444752"/>
+            <a:ext cx="5577840" cy="2392962"/>
           </a:xfrm>
           <a:prstGeom prst="rect">
             <a:avLst/>
@@ -4720,8 +5195,8 @@
         </p:nvSpPr>
         <p:spPr>
           <a:xfrm>
-            <a:off x="502920" y="3639763"/>
-            <a:ext cx="8138160" cy="237744"/>
+            <a:off x="502920" y="3910866"/>
+            <a:ext cx="5577840" cy="237744"/>
           </a:xfrm>
           <a:prstGeom prst="rect">
             <a:avLst/>
@@ -4742,7 +5217,7 @@
                   <a:srgbClr val="6B7585"/>
                 </a:solidFill>
               </a:rPr>
-              <a:t>Snipped from the Financial Controller Pack, Overheads MoM tab, employment expense split, the month.</a:t>
+              <a:t>Snipped from the Financial Controller Pack, Cost Analysis tab, revenue by department, the month.</a:t>
             </a:r>
             <a:endParaRPr lang="en-US" sz="800" dirty="0"/>
           </a:p>
@@ -4756,8 +5231,8 @@
         </p:nvSpPr>
         <p:spPr>
           <a:xfrm>
-            <a:off x="502920" y="3675888"/>
-            <a:ext cx="8138160" cy="950976"/>
+            <a:off x="6263640" y="1463040"/>
+            <a:ext cx="2377440" cy="3154680"/>
           </a:xfrm>
           <a:prstGeom prst="rect">
             <a:avLst/>
@@ -4776,8 +5251,8 @@
         </p:nvSpPr>
         <p:spPr>
           <a:xfrm>
-            <a:off x="685800" y="3758184"/>
-            <a:ext cx="2743200" cy="164592"/>
+            <a:off x="6446520" y="1627632"/>
+            <a:ext cx="2011680" cy="228600"/>
           </a:xfrm>
           <a:prstGeom prst="rect">
             <a:avLst/>
@@ -4793,14 +5268,14 @@
               <a:buNone/>
             </a:pPr>
             <a:r>
-              <a:rPr lang="en-US" sz="850" b="1" spc="180" kern="0" dirty="0">
+              <a:rPr lang="en-US" sz="900" b="1" spc="180" kern="0" dirty="0">
                 <a:solidFill>
                   <a:srgbClr val="005358"/>
                 </a:solidFill>
               </a:rPr>
               <a:t>COMMENTARY</a:t>
             </a:r>
-            <a:endParaRPr lang="en-US" sz="850" dirty="0"/>
+            <a:endParaRPr lang="en-US" sz="900" dirty="0"/>
           </a:p>
         </p:txBody>
       </p:sp>
@@ -4812,123 +5287,124 @@
         </p:nvSpPr>
         <p:spPr>
           <a:xfrm>
-            <a:off x="685800" y="3941064"/>
-            <a:ext cx="3703320" cy="621792"/>
-          </a:xfrm>
-          <a:prstGeom prst="rect">
-            <a:avLst/>
-          </a:prstGeom>
-          <a:noFill/>
-          <a:ln/>
-        </p:spPr>
-        <p:txBody>
-          <a:bodyPr wrap="square" lIns="0" tIns="0" rIns="0" bIns="0" rtlCol="0" anchor="t"/>
+            <a:off x="6446520" y="1901952"/>
+            <a:ext cx="2011680" cy="2551176"/>
+          </a:xfrm>
+          <a:prstGeom prst="rect">
+            <a:avLst/>
+          </a:prstGeom>
+          <a:noFill/>
+          <a:ln/>
+        </p:spPr>
+        <p:txBody>
+          <a:bodyPr wrap="square" lIns="0" tIns="0" rIns="0" bIns="0" rtlCol="0" anchor="t">
+            <a:normAutofit/>
+          </a:bodyPr>
           <a:lstStyle/>
           <a:p>
             <a:pPr marL="342900" indent="-342900">
               <a:lnSpc>
-                <a:spcPts val="1000"/>
+                <a:spcPts val="1150"/>
               </a:lnSpc>
               <a:spcAft>
-                <a:spcPts val="300"/>
+                <a:spcPts val="500"/>
               </a:spcAft>
               <a:buSzPct val="100000"/>
               <a:buChar char="•"/>
             </a:pPr>
             <a:r>
-              <a:rPr lang="en-US" sz="800" dirty="0">
+              <a:rPr lang="en-US" sz="900" dirty="0">
                 <a:solidFill>
                   <a:srgbClr val="3A4453"/>
                 </a:solidFill>
               </a:rPr>
-              <a:t>63,077 of office wages this month, and all of it is charged out to the departments.</a:t>
-            </a:r>
-            <a:endParaRPr lang="en-US" sz="800" dirty="0"/>
+              <a:t>Integration billed 235k against a 59k plan. Nearly all of it was one big installation job, now finished, so next month drops back.</a:t>
+            </a:r>
+            <a:endParaRPr lang="en-US" sz="900" dirty="0"/>
           </a:p>
           <a:p>
             <a:pPr marL="342900" indent="-342900">
               <a:lnSpc>
-                <a:spcPts val="1000"/>
+                <a:spcPts val="1150"/>
               </a:lnSpc>
               <a:spcAft>
-                <a:spcPts val="300"/>
+                <a:spcPts val="500"/>
               </a:spcAft>
               <a:buSzPct val="100000"/>
               <a:buChar char="•"/>
             </a:pPr>
             <a:r>
-              <a:rPr lang="en-US" sz="800" dirty="0">
+              <a:rPr lang="en-US" sz="900" dirty="0">
                 <a:solidFill>
                   <a:srgbClr val="3A4453"/>
                 </a:solidFill>
               </a:rPr>
-              <a:t>Support picks up 67% of it, based on its share of hours worked over the last twelve months.</a:t>
-            </a:r>
-            <a:endParaRPr lang="en-US" sz="800" dirty="0"/>
-          </a:p>
-        </p:txBody>
-      </p:sp>
-      <p:sp>
-        <p:nvSpPr>
-          <p:cNvPr id="9" name="Text 6"/>
-          <p:cNvSpPr txBox="1"/>
-          <p:nvPr/>
-        </p:nvSpPr>
-        <p:spPr>
-          <a:xfrm>
-            <a:off x="4663440" y="3941064"/>
-            <a:ext cx="3703320" cy="621792"/>
-          </a:xfrm>
-          <a:prstGeom prst="rect">
-            <a:avLst/>
-          </a:prstGeom>
-          <a:noFill/>
-          <a:ln/>
-        </p:spPr>
-        <p:txBody>
-          <a:bodyPr wrap="square" lIns="0" tIns="0" rIns="0" bIns="0" rtlCol="0" anchor="t"/>
-          <a:lstStyle/>
+              <a:t>Support billed 243k against 248k. On plan, which is what fixed monthly contracts should do.</a:t>
+            </a:r>
+            <a:endParaRPr lang="en-US" sz="900" dirty="0"/>
+          </a:p>
           <a:p>
             <a:pPr marL="342900" indent="-342900">
               <a:lnSpc>
-                <a:spcPts val="1000"/>
+                <a:spcPts val="1150"/>
               </a:lnSpc>
               <a:spcAft>
-                <a:spcPts val="300"/>
+                <a:spcPts val="500"/>
               </a:spcAft>
               <a:buSzPct val="100000"/>
               <a:buChar char="•"/>
             </a:pPr>
             <a:r>
-              <a:rPr lang="en-US" sz="800" dirty="0">
+              <a:rPr lang="en-US" sz="900" dirty="0">
                 <a:solidFill>
                   <a:srgbClr val="3A4453"/>
                 </a:solidFill>
               </a:rPr>
-              <a:t>Events pays more for its own staff, 35,665, than it does for office staff.</a:t>
-            </a:r>
-            <a:endParaRPr lang="en-US" sz="800" dirty="0"/>
+              <a:t>Events billed 73k against 66k, in a month that sits between the busy results periods.</a:t>
+            </a:r>
+            <a:endParaRPr lang="en-US" sz="900" dirty="0"/>
           </a:p>
           <a:p>
             <a:pPr marL="342900" indent="-342900">
               <a:lnSpc>
-                <a:spcPts val="1000"/>
+                <a:spcPts val="1150"/>
               </a:lnSpc>
               <a:spcAft>
-                <a:spcPts val="300"/>
+                <a:spcPts val="500"/>
               </a:spcAft>
               <a:buSzPct val="100000"/>
               <a:buChar char="•"/>
             </a:pPr>
             <a:r>
-              <a:rPr lang="en-US" sz="800" dirty="0">
+              <a:rPr lang="en-US" sz="900" dirty="0">
                 <a:solidFill>
                   <a:srgbClr val="3A4453"/>
                 </a:solidFill>
               </a:rPr>
-              <a:t>Integration picks up almost no office wages, because almost no hours were booked to it.</a:t>
-            </a:r>
-            <a:endParaRPr lang="en-US" sz="800" dirty="0"/>
+              <a:t>Video billed 7k against 17k and Consulting 4k against 23k. Both have been short every month this year.</a:t>
+            </a:r>
+            <a:endParaRPr lang="en-US" sz="900" dirty="0"/>
+          </a:p>
+          <a:p>
+            <a:pPr marL="342900" indent="-342900">
+              <a:lnSpc>
+                <a:spcPts val="1150"/>
+              </a:lnSpc>
+              <a:spcAft>
+                <a:spcPts val="500"/>
+              </a:spcAft>
+              <a:buSzPct val="100000"/>
+              <a:buChar char="•"/>
+            </a:pPr>
+            <a:r>
+              <a:rPr lang="en-US" sz="900" dirty="0">
+                <a:solidFill>
+                  <a:srgbClr val="3A4453"/>
+                </a:solidFill>
+              </a:rPr>
+              <a:t>Company sales are 58% up on last September. We are selling more than last year and keeping less of it.</a:t>
+            </a:r>
+            <a:endParaRPr lang="en-US" sz="900" dirty="0"/>
           </a:p>
         </p:txBody>
       </p:sp>
@@ -5074,7 +5550,7 @@
                   <a:srgbClr val="242C39"/>
                 </a:solidFill>
               </a:rPr>
-              <a:t>03</a:t>
+              <a:t>02</a:t>
             </a:r>
             <a:endParaRPr lang="en-US" sz="2600" dirty="0"/>
           </a:p>
@@ -5146,7 +5622,7 @@
                   <a:srgbClr val="FFFFFF"/>
                 </a:solidFill>
               </a:rPr>
-              <a:t>Customers and cash</a:t>
+              <a:t>What we spend</a:t>
             </a:r>
             <a:endParaRPr lang="en-US" sz="2800" dirty="0"/>
           </a:p>
@@ -5182,7 +5658,7 @@
                   <a:srgbClr val="C9CED6"/>
                 </a:solidFill>
               </a:rPr>
-              <a:t>Who pays us, how much, and how slowly</a:t>
+              <a:t>Where the money goes and which lines move</a:t>
             </a:r>
             <a:endParaRPr lang="en-US" sz="1200" dirty="0"/>
           </a:p>
@@ -5243,7 +5719,7 @@
                   <a:srgbClr val="122B82"/>
                 </a:solidFill>
               </a:rPr>
-              <a:t>CUSTOMERS AND CASH</a:t>
+              <a:t>WHAT WE SPEND</a:t>
             </a:r>
             <a:endParaRPr lang="en-US" sz="950" dirty="0"/>
           </a:p>
@@ -5279,7 +5755,7 @@
                   <a:srgbClr val="242C39"/>
                 </a:solidFill>
               </a:rPr>
-              <a:t>Top ten customers, year to date</a:t>
+              <a:t>Operating cost distribution, year to date</a:t>
             </a:r>
             <a:endParaRPr lang="en-US" sz="2700" dirty="0"/>
           </a:p>
@@ -5287,7 +5763,7 @@
       </p:sp>
       <p:pic>
         <p:nvPicPr>
-          <p:cNvPr id="4" name="snip top10" descr="/home/user/Claude/deck/snips/top10.png">    </p:cNvPr>
+          <p:cNvPr id="4" name="snip cost_dist" descr="/home/user/Claude/deck/snips/cost_dist.png">    </p:cNvPr>
           <p:cNvPicPr>
             <a:picLocks noChangeAspect="1"/>
           </p:cNvPicPr>
@@ -5302,7 +5778,7 @@
         <p:spPr>
           <a:xfrm>
             <a:off x="502920" y="1444752"/>
-            <a:ext cx="5577840" cy="2815203"/>
+            <a:ext cx="5577840" cy="2820757"/>
           </a:xfrm>
           <a:prstGeom prst="rect">
             <a:avLst/>
@@ -5317,7 +5793,7 @@
         </p:nvSpPr>
         <p:spPr>
           <a:xfrm>
-            <a:off x="502920" y="4333107"/>
+            <a:off x="502920" y="4338661"/>
             <a:ext cx="5577840" cy="237744"/>
           </a:xfrm>
           <a:prstGeom prst="rect">
@@ -5339,7 +5815,7 @@
                   <a:srgbClr val="6B7585"/>
                 </a:solidFill>
               </a:rPr>
-              <a:t>Snipped from the Financial Controller Pack, Top 10 Clients tab, top ten customers by revenue, the top three in red.</a:t>
+              <a:t>Snipped from the Financial Controller Pack, Cost Analysis tab, operating cost distribution.</a:t>
             </a:r>
             <a:endParaRPr lang="en-US" sz="800" dirty="0"/>
           </a:p>
@@ -5426,7 +5902,7 @@
           <a:p>
             <a:pPr marL="342900" indent="-342900">
               <a:lnSpc>
-                <a:spcPts val="1300"/>
+                <a:spcPts val="1150"/>
               </a:lnSpc>
               <a:spcAft>
                 <a:spcPts val="500"/>
@@ -5435,19 +5911,19 @@
               <a:buChar char="•"/>
             </a:pPr>
             <a:r>
-              <a:rPr lang="en-US" sz="950" dirty="0">
+              <a:rPr lang="en-US" sz="900" dirty="0">
                 <a:solidFill>
                   <a:srgbClr val="3A4453"/>
                 </a:solidFill>
               </a:rPr>
-              <a:t>The three red bars are 49% of everything we sold this year.</a:t>
-            </a:r>
-            <a:endParaRPr lang="en-US" sz="950" dirty="0"/>
+              <a:t>Wages for people on jobs (621)k, and wages for everyone else (369)k. Together that is most of what we spend.</a:t>
+            </a:r>
+            <a:endParaRPr lang="en-US" sz="900" dirty="0"/>
           </a:p>
           <a:p>
             <a:pPr marL="342900" indent="-342900">
               <a:lnSpc>
-                <a:spcPts val="1300"/>
+                <a:spcPts val="1150"/>
               </a:lnSpc>
               <a:spcAft>
                 <a:spcPts val="500"/>
@@ -5456,19 +5932,19 @@
               <a:buChar char="•"/>
             </a:pPr>
             <a:r>
-              <a:rPr lang="en-US" sz="950" dirty="0">
+              <a:rPr lang="en-US" sz="900" dirty="0">
                 <a:solidFill>
                   <a:srgbClr val="3A4453"/>
                 </a:solidFill>
               </a:rPr>
-              <a:t>All ten together are 76%. Every other customer we have is the remaining 24%.</a:t>
-            </a:r>
-            <a:endParaRPr lang="en-US" sz="950" dirty="0"/>
+              <a:t>Wages are what this business spends its money on. Everything else is small next to them.</a:t>
+            </a:r>
+            <a:endParaRPr lang="en-US" sz="900" dirty="0"/>
           </a:p>
           <a:p>
             <a:pPr marL="342900" indent="-342900">
               <a:lnSpc>
-                <a:spcPts val="1300"/>
+                <a:spcPts val="1150"/>
               </a:lnSpc>
               <a:spcAft>
                 <a:spcPts val="500"/>
@@ -5477,19 +5953,19 @@
               <a:buChar char="•"/>
             </a:pPr>
             <a:r>
-              <a:rPr lang="en-US" sz="950" dirty="0">
+              <a:rPr lang="en-US" sz="900" dirty="0">
                 <a:solidFill>
                   <a:srgbClr val="3A4453"/>
                 </a:solidFill>
               </a:rPr>
-              <a:t>Deloitte Services at 401,755 is 25% on its own. Losing them would wipe out more than the whole year's profit plan.</a:t>
-            </a:r>
-            <a:endParaRPr lang="en-US" sz="950" dirty="0"/>
+              <a:t>The (369)k of wages for people not on jobs is the same every month. When sales drop this does not, so a bad month lands straight on the profit.</a:t>
+            </a:r>
+            <a:endParaRPr lang="en-US" sz="900" dirty="0"/>
           </a:p>
           <a:p>
             <a:pPr marL="342900" indent="-342900">
               <a:lnSpc>
-                <a:spcPts val="1300"/>
+                <a:spcPts val="1150"/>
               </a:lnSpc>
               <a:spcAft>
                 <a:spcPts val="500"/>
@@ -5498,19 +5974,19 @@
               <a:buChar char="•"/>
             </a:pPr>
             <a:r>
-              <a:rPr lang="en-US" sz="950" dirty="0">
+              <a:rPr lang="en-US" sz="900" dirty="0">
                 <a:solidFill>
                   <a:srgbClr val="3A4453"/>
                 </a:solidFill>
               </a:rPr>
-              <a:t>Aware Super came from nothing to 285,075 in a quarter, and nearly all of it was one job in September.</a:t>
-            </a:r>
-            <a:endParaRPr lang="en-US" sz="950" dirty="0"/>
+              <a:t>Equipment and services at (347)k is the only cost that rises and falls with the work.</a:t>
+            </a:r>
+            <a:endParaRPr lang="en-US" sz="900" dirty="0"/>
           </a:p>
           <a:p>
             <a:pPr marL="342900" indent="-342900">
               <a:lnSpc>
-                <a:spcPts val="1300"/>
+                <a:spcPts val="1150"/>
               </a:lnSpc>
               <a:spcAft>
                 <a:spcPts val="500"/>
@@ -5519,14 +5995,14 @@
               <a:buChar char="•"/>
             </a:pPr>
             <a:r>
-              <a:rPr lang="en-US" sz="950" dirty="0">
+              <a:rPr lang="en-US" sz="900" dirty="0">
                 <a:solidFill>
                   <a:srgbClr val="3A4453"/>
                 </a:solidFill>
               </a:rPr>
-              <a:t>After the top five it falls away fast. Number ten is only 37,166.</a:t>
-            </a:r>
-            <a:endParaRPr lang="en-US" sz="950" dirty="0"/>
+              <a:t>If we have to cut cost it is people or the office. Nothing else is big enough to matter.</a:t>
+            </a:r>
+            <a:endParaRPr lang="en-US" sz="900" dirty="0"/>
           </a:p>
         </p:txBody>
       </p:sp>
@@ -5630,7 +6106,7 @@
                   <a:srgbClr val="122B82"/>
                 </a:solidFill>
               </a:rPr>
-              <a:t>CUSTOMERS AND CASH</a:t>
+              <a:t>WHAT WE SPEND</a:t>
             </a:r>
             <a:endParaRPr lang="en-US" sz="950" dirty="0"/>
           </a:p>
@@ -5666,7 +6142,7 @@
                   <a:srgbClr val="242C39"/>
                 </a:solidFill>
               </a:rPr>
-              <a:t>How long customers take to pay</a:t>
+              <a:t>Other operating expenses, year to date</a:t>
             </a:r>
             <a:endParaRPr lang="en-US" sz="2700" dirty="0"/>
           </a:p>
@@ -5674,7 +6150,7 @@
       </p:sp>
       <p:pic>
         <p:nvPicPr>
-          <p:cNvPr id="4" name="snip dso_calc" descr="/home/user/Claude/deck/snips/dso_calc.png">    </p:cNvPr>
+          <p:cNvPr id="4" name="snip other_opex" descr="/home/user/Claude/deck/snips/other_opex.png">    </p:cNvPr>
           <p:cNvPicPr>
             <a:picLocks noChangeAspect="1"/>
           </p:cNvPicPr>
@@ -5689,7 +6165,7 @@
         <p:spPr>
           <a:xfrm>
             <a:off x="502920" y="1444752"/>
-            <a:ext cx="5577840" cy="2900215"/>
+            <a:ext cx="5577840" cy="2569245"/>
           </a:xfrm>
           <a:prstGeom prst="rect">
             <a:avLst/>
@@ -5704,7 +6180,7 @@
         </p:nvSpPr>
         <p:spPr>
           <a:xfrm>
-            <a:off x="502920" y="4418119"/>
+            <a:off x="502920" y="4087149"/>
             <a:ext cx="5577840" cy="237744"/>
           </a:xfrm>
           <a:prstGeom prst="rect">
@@ -5726,7 +6202,7 @@
                   <a:srgbClr val="6B7585"/>
                 </a:solidFill>
               </a:rPr>
-              <a:t>Snipped from the Financial Controller Pack, DSO tab, the calculation, built off the Xero age analysis.</a:t>
+              <a:t>Snipped from the Financial Controller Pack, Cost Analysis tab, other operating expenses.</a:t>
             </a:r>
             <a:endParaRPr lang="en-US" sz="800" dirty="0"/>
           </a:p>
@@ -5822,14 +6298,14 @@
               <a:buChar char="•"/>
             </a:pPr>
             <a:r>
-              <a:rPr lang="en-US" sz="1000" dirty="0">
+              <a:rPr lang="en-US" sz="950" dirty="0">
                 <a:solidFill>
                   <a:srgbClr val="3A4453"/>
                 </a:solidFill>
               </a:rPr>
-              <a:t>Customers take 47 days to pay us. We want 30.</a:t>
-            </a:r>
-            <a:endParaRPr lang="en-US" sz="1000" dirty="0"/>
+              <a:t>The office is the big one: rent (62)k plus outgoings (15)k, 77k together.</a:t>
+            </a:r>
+            <a:endParaRPr lang="en-US" sz="950" dirty="0"/>
           </a:p>
           <a:p>
             <a:pPr marL="342900" indent="-342900">
@@ -5843,14 +6319,14 @@
               <a:buChar char="•"/>
             </a:pPr>
             <a:r>
-              <a:rPr lang="en-US" sz="1000" dirty="0">
+              <a:rPr lang="en-US" sz="950" dirty="0">
                 <a:solidFill>
                   <a:srgbClr val="3A4453"/>
                 </a:solidFill>
               </a:rPr>
-              <a:t>That is 17 days of sales sitting in the debtor book instead of the bank.</a:t>
-            </a:r>
-            <a:endParaRPr lang="en-US" sz="1000" dirty="0"/>
+              <a:t>IT support at (40)k is next, and the only one that moves much month to month.</a:t>
+            </a:r>
+            <a:endParaRPr lang="en-US" sz="950" dirty="0"/>
           </a:p>
           <a:p>
             <a:pPr marL="342900" indent="-342900">
@@ -5864,14 +6340,14 @@
               <a:buChar char="•"/>
             </a:pPr>
             <a:r>
-              <a:rPr lang="en-US" sz="1000" dirty="0">
+              <a:rPr lang="en-US" sz="950" dirty="0">
                 <a:solidFill>
                   <a:srgbClr val="3A4453"/>
                 </a:solidFill>
               </a:rPr>
-              <a:t>In money, 303,605 that should be ours already.</a:t>
-            </a:r>
-            <a:endParaRPr lang="en-US" sz="1000" dirty="0"/>
+              <a:t>Everything below the top three is under six thousand across a full quarter.</a:t>
+            </a:r>
+            <a:endParaRPr lang="en-US" sz="950" dirty="0"/>
           </a:p>
           <a:p>
             <a:pPr marL="342900" indent="-342900">
@@ -5885,14 +6361,14 @@
               <a:buChar char="•"/>
             </a:pPr>
             <a:r>
-              <a:rPr lang="en-US" sz="1000" dirty="0">
+              <a:rPr lang="en-US" sz="950" dirty="0">
                 <a:solidFill>
                   <a:srgbClr val="3A4453"/>
                 </a:solidFill>
               </a:rPr>
-              <a:t>Every single day we pull that back brings in 17,657.</a:t>
-            </a:r>
-            <a:endParaRPr lang="en-US" sz="1000" dirty="0"/>
+              <a:t>There is nothing worth saving further down the list. Do not spend management time there.</a:t>
+            </a:r>
+            <a:endParaRPr lang="en-US" sz="950" dirty="0"/>
           </a:p>
           <a:p>
             <a:pPr marL="342900" indent="-342900">
@@ -5906,14 +6382,14 @@
               <a:buChar char="•"/>
             </a:pPr>
             <a:r>
-              <a:rPr lang="en-US" sz="1000" dirty="0">
+              <a:rPr lang="en-US" sz="950" dirty="0">
                 <a:solidFill>
                   <a:srgbClr val="3A4453"/>
                 </a:solidFill>
               </a:rPr>
-              <a:t>This is the fastest cash available to the business this quarter. Nothing else comes close.</a:t>
-            </a:r>
-            <a:endParaRPr lang="en-US" sz="1000" dirty="0"/>
+              <a:t>The office is the only real saving here, and that is a lease decision, not a budget one.</a:t>
+            </a:r>
+            <a:endParaRPr lang="en-US" sz="950" dirty="0"/>
           </a:p>
         </p:txBody>
       </p:sp>
@@ -6017,7 +6493,7 @@
                   <a:srgbClr val="122B82"/>
                 </a:solidFill>
               </a:rPr>
-              <a:t>CUSTOMERS AND CASH</a:t>
+              <a:t>WHAT WE SPEND</a:t>
             </a:r>
             <a:endParaRPr lang="en-US" sz="950" dirty="0"/>
           </a:p>
@@ -6053,7 +6529,7 @@
                   <a:srgbClr val="242C39"/>
                 </a:solidFill>
               </a:rPr>
-              <a:t>Who owes us the most</a:t>
+              <a:t>Labour mix, year to date</a:t>
             </a:r>
             <a:endParaRPr lang="en-US" sz="2700" dirty="0"/>
           </a:p>
@@ -6061,7 +6537,7 @@
       </p:sp>
       <p:pic>
         <p:nvPicPr>
-          <p:cNvPr id="4" name="snip dso_who" descr="/home/user/Claude/deck/snips/dso_who.png">    </p:cNvPr>
+          <p:cNvPr id="4" name="snip labour_mix" descr="/home/user/Claude/deck/snips/labour_mix.png">    </p:cNvPr>
           <p:cNvPicPr>
             <a:picLocks noChangeAspect="1"/>
           </p:cNvPicPr>
@@ -6075,8 +6551,8 @@
         </p:blipFill>
         <p:spPr>
           <a:xfrm>
-            <a:off x="988263" y="1444752"/>
-            <a:ext cx="4607153" cy="3090672"/>
+            <a:off x="696031" y="1444752"/>
+            <a:ext cx="5191618" cy="3090672"/>
           </a:xfrm>
           <a:prstGeom prst="rect">
             <a:avLst/>
@@ -6113,7 +6589,7 @@
                   <a:srgbClr val="6B7585"/>
                 </a:solidFill>
               </a:rPr>
-              <a:t>Snipped from the Financial Controller Pack, DSO tab, the ten largest amounts owed at month end.</a:t>
+              <a:t>Snipped from the Financial Controller Pack, Cost Analysis tab, labour mix, direct against indirect.</a:t>
             </a:r>
             <a:endParaRPr lang="en-US" sz="800" dirty="0"/>
           </a:p>
@@ -6214,7 +6690,7 @@
                   <a:srgbClr val="3A4453"/>
                 </a:solidFill>
               </a:rPr>
-              <a:t>Aware Super owes 277,395 on its own, 33% of everything owed to us.</a:t>
+              <a:t>Labour on jobs splits two ways: our own staff, and contractors we bring in.</a:t>
             </a:r>
             <a:endParaRPr lang="en-US" sz="950" dirty="0"/>
           </a:p>
@@ -6235,7 +6711,7 @@
                   <a:srgbClr val="3A4453"/>
                 </a:solidFill>
               </a:rPr>
-              <a:t>With Deloitte Services P/L for Deloitte Services Trust at 131,575, two customers hold 49% of the book.</a:t>
+              <a:t>Salaries, wages and super are most of it, and we are committed to paying them.</a:t>
             </a:r>
             <a:endParaRPr lang="en-US" sz="950" dirty="0"/>
           </a:p>
@@ -6256,7 +6732,7 @@
                   <a:srgbClr val="3A4453"/>
                 </a:solidFill>
               </a:rPr>
-              <a:t>29% of what we are owed is already late, 244,538.</a:t>
+              <a:t>Contractors are the only labour cost that goes up and down with the work.</a:t>
             </a:r>
             <a:endParaRPr lang="en-US" sz="950" dirty="0"/>
           </a:p>
@@ -6277,7 +6753,7 @@
                   <a:srgbClr val="3A4453"/>
                 </a:solidFill>
               </a:rPr>
-              <a:t>Chase those two first. Everything below them is small by comparison.</a:t>
+              <a:t>It rises when our own team runs out of hours, so watch it against the utilisation page.</a:t>
             </a:r>
             <a:endParaRPr lang="en-US" sz="950" dirty="0"/>
           </a:p>
@@ -6298,7 +6774,7 @@
                   <a:srgbClr val="3A4453"/>
                 </a:solidFill>
               </a:rPr>
-              <a:t>A general collections push is not the answer. Two phone calls are.</a:t>
+              <a:t>We pay for every hour worked. We only bill the hours spent on jobs. The difference is profit we never make.</a:t>
             </a:r>
             <a:endParaRPr lang="en-US" sz="950" dirty="0"/>
           </a:p>
@@ -6376,92 +6852,14 @@
       </p:grpSpPr>
       <p:sp>
         <p:nvSpPr>
-          <p:cNvPr id="2" name="divider circle"/>
-          <p:cNvSpPr/>
-          <p:nvPr/>
-        </p:nvSpPr>
-        <p:spPr>
-          <a:xfrm>
-            <a:off x="6446520" y="1600200"/>
-            <a:ext cx="2651760" cy="2651760"/>
-          </a:xfrm>
-          <a:prstGeom prst="ellipse">
-            <a:avLst/>
-          </a:prstGeom>
-          <a:solidFill>
-            <a:srgbClr val="6D71FF">
-              <a:alpha val="55000"/>
-            </a:srgbClr>
-          </a:solidFill>
-          <a:ln/>
-        </p:spPr>
-      </p:sp>
-      <p:sp>
-        <p:nvSpPr>
-          <p:cNvPr id="3" name="Shape 1"/>
-          <p:cNvSpPr/>
-          <p:nvPr/>
-        </p:nvSpPr>
-        <p:spPr>
-          <a:xfrm>
-            <a:off x="502920" y="1874520"/>
-            <a:ext cx="868680" cy="868680"/>
-          </a:xfrm>
-          <a:prstGeom prst="rect">
-            <a:avLst/>
-          </a:prstGeom>
-          <a:solidFill>
-            <a:srgbClr val="3FD0C9"/>
-          </a:solidFill>
-          <a:ln/>
-        </p:spPr>
-      </p:sp>
-      <p:sp>
-        <p:nvSpPr>
-          <p:cNvPr id="4" name="Text 2"/>
-          <p:cNvSpPr txBox="1"/>
-          <p:nvPr/>
-        </p:nvSpPr>
-        <p:spPr>
-          <a:xfrm>
-            <a:off x="502920" y="1874520"/>
-            <a:ext cx="868680" cy="868680"/>
-          </a:xfrm>
-          <a:prstGeom prst="rect">
-            <a:avLst/>
-          </a:prstGeom>
-          <a:noFill/>
-          <a:ln/>
-        </p:spPr>
-        <p:txBody>
-          <a:bodyPr wrap="square" lIns="0" tIns="0" rIns="0" bIns="0" rtlCol="0" anchor="ctr"/>
-          <a:lstStyle/>
-          <a:p>
-            <a:pPr algn="ctr" indent="0" marL="0">
-              <a:buNone/>
-            </a:pPr>
-            <a:r>
-              <a:rPr lang="en-US" sz="2600" b="1" dirty="0">
-                <a:solidFill>
-                  <a:srgbClr val="242C39"/>
-                </a:solidFill>
-              </a:rPr>
-              <a:t>04</a:t>
-            </a:r>
-            <a:endParaRPr lang="en-US" sz="2600" dirty="0"/>
-          </a:p>
-        </p:txBody>
-      </p:sp>
-      <p:sp>
-        <p:nvSpPr>
-          <p:cNvPr id="5" name="Text 3"/>
-          <p:cNvSpPr txBox="1"/>
-          <p:nvPr/>
-        </p:nvSpPr>
-        <p:spPr>
-          <a:xfrm>
-            <a:off x="502920" y="411480"/>
-            <a:ext cx="3657600" cy="274320"/>
+          <p:cNvPr id="2" name="Text 0"/>
+          <p:cNvSpPr txBox="1"/>
+          <p:nvPr/>
+        </p:nvSpPr>
+        <p:spPr>
+          <a:xfrm>
+            <a:off x="502920" y="365760"/>
+            <a:ext cx="6400800" cy="274320"/>
           </a:xfrm>
           <a:prstGeom prst="rect">
             <a:avLst/>
@@ -6479,10 +6877,10 @@
             <a:r>
               <a:rPr lang="en-US" sz="950" b="1" spc="220" kern="0" dirty="0">
                 <a:solidFill>
-                  <a:srgbClr val="3FD0C9"/>
-                </a:solidFill>
-              </a:rPr>
-              <a:t>SECTION</a:t>
+                  <a:srgbClr val="122B82"/>
+                </a:solidFill>
+              </a:rPr>
+              <a:t>WHAT WE SPEND</a:t>
             </a:r>
             <a:endParaRPr lang="en-US" sz="950" dirty="0"/>
           </a:p>
@@ -6490,14 +6888,14 @@
       </p:sp>
       <p:sp>
         <p:nvSpPr>
-          <p:cNvPr id="6" name="Text 4"/>
-          <p:cNvSpPr txBox="1"/>
-          <p:nvPr/>
-        </p:nvSpPr>
-        <p:spPr>
-          <a:xfrm>
-            <a:off x="1600200" y="1874520"/>
-            <a:ext cx="5943600" cy="502920"/>
+          <p:cNvPr id="3" name="Text 1"/>
+          <p:cNvSpPr txBox="1"/>
+          <p:nvPr/>
+        </p:nvSpPr>
+        <p:spPr>
+          <a:xfrm>
+            <a:off x="502920" y="640080"/>
+            <a:ext cx="7315200" cy="685800"/>
           </a:xfrm>
           <a:prstGeom prst="rect">
             <a:avLst/>
@@ -6513,50 +6911,303 @@
               <a:buNone/>
             </a:pPr>
             <a:r>
-              <a:rPr lang="en-US" sz="2800" b="1" dirty="0">
-                <a:solidFill>
-                  <a:srgbClr val="FFFFFF"/>
-                </a:solidFill>
-              </a:rPr>
-              <a:t>People and utilisation</a:t>
-            </a:r>
-            <a:endParaRPr lang="en-US" sz="2800" dirty="0"/>
-          </a:p>
-        </p:txBody>
-      </p:sp>
-      <p:sp>
-        <p:nvSpPr>
-          <p:cNvPr id="7" name="Text 5"/>
-          <p:cNvSpPr txBox="1"/>
-          <p:nvPr/>
-        </p:nvSpPr>
-        <p:spPr>
-          <a:xfrm>
-            <a:off x="1600200" y="2395728"/>
-            <a:ext cx="5943600" cy="347472"/>
-          </a:xfrm>
-          <a:prstGeom prst="rect">
-            <a:avLst/>
-          </a:prstGeom>
-          <a:noFill/>
-          <a:ln/>
-        </p:spPr>
-        <p:txBody>
-          <a:bodyPr wrap="square" lIns="0" tIns="0" rIns="0" bIns="0" rtlCol="0" anchor="ctr"/>
+              <a:rPr lang="en-US" sz="2700" b="1" dirty="0">
+                <a:solidFill>
+                  <a:srgbClr val="242C39"/>
+                </a:solidFill>
+              </a:rPr>
+              <a:t>Employment expense, office and departmental</a:t>
+            </a:r>
+            <a:endParaRPr lang="en-US" sz="2700" dirty="0"/>
+          </a:p>
+        </p:txBody>
+      </p:sp>
+      <p:pic>
+        <p:nvPicPr>
+          <p:cNvPr id="4" name="snip staff_split" descr="/home/user/Claude/deck/snips/staff_split.png">    </p:cNvPr>
+          <p:cNvPicPr>
+            <a:picLocks noChangeAspect="1"/>
+          </p:cNvPicPr>
+          <p:nvPr/>
+        </p:nvPicPr>
+        <p:blipFill>
+          <a:blip r:embed="rId1"/>
+          <a:stretch>
+            <a:fillRect/>
+          </a:stretch>
+        </p:blipFill>
+        <p:spPr>
+          <a:xfrm>
+            <a:off x="502920" y="1389888"/>
+            <a:ext cx="8138160" cy="2176723"/>
+          </a:xfrm>
+          <a:prstGeom prst="rect">
+            <a:avLst/>
+          </a:prstGeom>
+        </p:spPr>
+      </p:pic>
+      <p:sp>
+        <p:nvSpPr>
+          <p:cNvPr id="5" name="Text 2"/>
+          <p:cNvSpPr txBox="1"/>
+          <p:nvPr/>
+        </p:nvSpPr>
+        <p:spPr>
+          <a:xfrm>
+            <a:off x="502920" y="3639763"/>
+            <a:ext cx="8138160" cy="237744"/>
+          </a:xfrm>
+          <a:prstGeom prst="rect">
+            <a:avLst/>
+          </a:prstGeom>
+          <a:noFill/>
+          <a:ln/>
+        </p:spPr>
+        <p:txBody>
+          <a:bodyPr wrap="square" lIns="0" tIns="0" rIns="0" bIns="0" rtlCol="0" anchor="t"/>
           <a:lstStyle/>
           <a:p>
             <a:pPr indent="0" marL="0">
               <a:buNone/>
             </a:pPr>
             <a:r>
-              <a:rPr lang="en-US" sz="1200" dirty="0">
-                <a:solidFill>
-                  <a:srgbClr val="C9CED6"/>
-                </a:solidFill>
-              </a:rPr>
-              <a:t>Chargeable hours and the profit they produce</a:t>
-            </a:r>
-            <a:endParaRPr lang="en-US" sz="1200" dirty="0"/>
+              <a:rPr lang="en-US" sz="800" i="1" dirty="0">
+                <a:solidFill>
+                  <a:srgbClr val="6B7585"/>
+                </a:solidFill>
+              </a:rPr>
+              <a:t>Snipped from the Financial Controller Pack, Overheads MoM tab, employment expense split, the month.</a:t>
+            </a:r>
+            <a:endParaRPr lang="en-US" sz="800" dirty="0"/>
+          </a:p>
+        </p:txBody>
+      </p:sp>
+      <p:sp>
+        <p:nvSpPr>
+          <p:cNvPr id="6" name="commentary panel"/>
+          <p:cNvSpPr/>
+          <p:nvPr/>
+        </p:nvSpPr>
+        <p:spPr>
+          <a:xfrm>
+            <a:off x="502920" y="3675888"/>
+            <a:ext cx="8138160" cy="950976"/>
+          </a:xfrm>
+          <a:prstGeom prst="rect">
+            <a:avLst/>
+          </a:prstGeom>
+          <a:solidFill>
+            <a:srgbClr val="E8F9F8"/>
+          </a:solidFill>
+          <a:ln/>
+        </p:spPr>
+      </p:sp>
+      <p:sp>
+        <p:nvSpPr>
+          <p:cNvPr id="7" name="Text 4"/>
+          <p:cNvSpPr txBox="1"/>
+          <p:nvPr/>
+        </p:nvSpPr>
+        <p:spPr>
+          <a:xfrm>
+            <a:off x="685800" y="3758184"/>
+            <a:ext cx="2743200" cy="164592"/>
+          </a:xfrm>
+          <a:prstGeom prst="rect">
+            <a:avLst/>
+          </a:prstGeom>
+          <a:noFill/>
+          <a:ln/>
+        </p:spPr>
+        <p:txBody>
+          <a:bodyPr wrap="square" lIns="0" tIns="0" rIns="0" bIns="0" rtlCol="0" anchor="ctr"/>
+          <a:lstStyle/>
+          <a:p>
+            <a:pPr indent="0" marL="0">
+              <a:buNone/>
+            </a:pPr>
+            <a:r>
+              <a:rPr lang="en-US" sz="850" b="1" spc="180" kern="0" dirty="0">
+                <a:solidFill>
+                  <a:srgbClr val="005358"/>
+                </a:solidFill>
+              </a:rPr>
+              <a:t>COMMENTARY</a:t>
+            </a:r>
+            <a:endParaRPr lang="en-US" sz="850" dirty="0"/>
+          </a:p>
+        </p:txBody>
+      </p:sp>
+      <p:sp>
+        <p:nvSpPr>
+          <p:cNvPr id="8" name="Text 5"/>
+          <p:cNvSpPr txBox="1"/>
+          <p:nvPr/>
+        </p:nvSpPr>
+        <p:spPr>
+          <a:xfrm>
+            <a:off x="685800" y="3941064"/>
+            <a:ext cx="3703320" cy="621792"/>
+          </a:xfrm>
+          <a:prstGeom prst="rect">
+            <a:avLst/>
+          </a:prstGeom>
+          <a:noFill/>
+          <a:ln/>
+        </p:spPr>
+        <p:txBody>
+          <a:bodyPr wrap="square" lIns="0" tIns="0" rIns="0" bIns="0" rtlCol="0" anchor="t"/>
+          <a:lstStyle/>
+          <a:p>
+            <a:pPr marL="342900" indent="-342900">
+              <a:lnSpc>
+                <a:spcPts val="1000"/>
+              </a:lnSpc>
+              <a:spcAft>
+                <a:spcPts val="300"/>
+              </a:spcAft>
+              <a:buSzPct val="100000"/>
+              <a:buChar char="•"/>
+            </a:pPr>
+            <a:r>
+              <a:rPr lang="en-US" sz="800" dirty="0">
+                <a:solidFill>
+                  <a:srgbClr val="3A4453"/>
+                </a:solidFill>
+              </a:rPr>
+              <a:t>63,077 of office wages this month, and all of it is charged out to the departments.</a:t>
+            </a:r>
+            <a:endParaRPr lang="en-US" sz="800" dirty="0"/>
+          </a:p>
+          <a:p>
+            <a:pPr marL="342900" indent="-342900">
+              <a:lnSpc>
+                <a:spcPts val="1000"/>
+              </a:lnSpc>
+              <a:spcAft>
+                <a:spcPts val="300"/>
+              </a:spcAft>
+              <a:buSzPct val="100000"/>
+              <a:buChar char="•"/>
+            </a:pPr>
+            <a:r>
+              <a:rPr lang="en-US" sz="800" dirty="0">
+                <a:solidFill>
+                  <a:srgbClr val="3A4453"/>
+                </a:solidFill>
+              </a:rPr>
+              <a:t>Support picks up 67% of it, based on its share of hours worked over the last twelve months.</a:t>
+            </a:r>
+            <a:endParaRPr lang="en-US" sz="800" dirty="0"/>
+          </a:p>
+        </p:txBody>
+      </p:sp>
+      <p:sp>
+        <p:nvSpPr>
+          <p:cNvPr id="9" name="Text 6"/>
+          <p:cNvSpPr txBox="1"/>
+          <p:nvPr/>
+        </p:nvSpPr>
+        <p:spPr>
+          <a:xfrm>
+            <a:off x="4663440" y="3941064"/>
+            <a:ext cx="3703320" cy="621792"/>
+          </a:xfrm>
+          <a:prstGeom prst="rect">
+            <a:avLst/>
+          </a:prstGeom>
+          <a:noFill/>
+          <a:ln/>
+        </p:spPr>
+        <p:txBody>
+          <a:bodyPr wrap="square" lIns="0" tIns="0" rIns="0" bIns="0" rtlCol="0" anchor="t"/>
+          <a:lstStyle/>
+          <a:p>
+            <a:pPr marL="342900" indent="-342900">
+              <a:lnSpc>
+                <a:spcPts val="1000"/>
+              </a:lnSpc>
+              <a:spcAft>
+                <a:spcPts val="300"/>
+              </a:spcAft>
+              <a:buSzPct val="100000"/>
+              <a:buChar char="•"/>
+            </a:pPr>
+            <a:r>
+              <a:rPr lang="en-US" sz="800" dirty="0">
+                <a:solidFill>
+                  <a:srgbClr val="3A4453"/>
+                </a:solidFill>
+              </a:rPr>
+              <a:t>Events pays more for its own staff, 35,665, than it does for office staff.</a:t>
+            </a:r>
+            <a:endParaRPr lang="en-US" sz="800" dirty="0"/>
+          </a:p>
+          <a:p>
+            <a:pPr marL="342900" indent="-342900">
+              <a:lnSpc>
+                <a:spcPts val="1000"/>
+              </a:lnSpc>
+              <a:spcAft>
+                <a:spcPts val="300"/>
+              </a:spcAft>
+              <a:buSzPct val="100000"/>
+              <a:buChar char="•"/>
+            </a:pPr>
+            <a:r>
+              <a:rPr lang="en-US" sz="800" dirty="0">
+                <a:solidFill>
+                  <a:srgbClr val="3A4453"/>
+                </a:solidFill>
+              </a:rPr>
+              <a:t>Integration picks up almost no office wages, because almost no hours were booked to it.</a:t>
+            </a:r>
+            <a:endParaRPr lang="en-US" sz="800" dirty="0"/>
+          </a:p>
+        </p:txBody>
+      </p:sp>
+      <p:sp>
+        <p:nvSpPr>
+          <p:cNvPr id="25" name="Slide Number Placeholder 0"/>
+          <p:cNvSpPr>
+            <a:spLocks noGrp="1"/>
+          </p:cNvSpPr>
+          <p:nvPr>
+            <p:ph type="sldNum" sz="quarter" idx="4294967295"/>
+          </p:nvPr>
+        </p:nvSpPr>
+        <p:spPr>
+          <a:xfrm>
+            <a:off x="8092440" y="4736592"/>
+            <a:ext cx="548640" cy="228600"/>
+          </a:xfrm>
+          <a:prstGeom prst="rect">
+            <a:avLst/>
+          </a:prstGeom>
+          <a:extLst>
+            <a:ext uri="{C572A759-6A51-4108-AA02-DFA0A04FC94B}">
+              <ma14:wrappingTextBoxFlag xmlns:ma14="http://schemas.microsoft.com/office/mac/drawingml/2011/main" val="0"/>
+            </a:ext>
+          </a:extLst>
+        </p:spPr>
+        <p:txBody>
+          <a:bodyPr/>
+          <a:lstStyle>
+            <a:lvl1pPr>
+              <a:defRPr sz="800">
+                <a:solidFill>
+                  <a:srgbClr val="6B7585"/>
+                </a:solidFill>
+              </a:defRPr>
+            </a:lvl1pPr>
+          </a:lstStyle>
+          <a:p>
+            <a:pPr algn="r"/>
+            <a:fld id="{F7021451-1387-4CA6-816F-3879F97B5CBC}" type="slidenum">
+              <a:rPr b="0" lang="en-US"/>
+              <a:t>18</a:t>
+            </a:fld>
+            <a:endParaRPr lang="en-US"/>
           </a:p>
         </p:txBody>
       </p:sp>
@@ -6587,14 +7238,92 @@
       </p:grpSpPr>
       <p:sp>
         <p:nvSpPr>
-          <p:cNvPr id="2" name="Text 0"/>
-          <p:cNvSpPr txBox="1"/>
-          <p:nvPr/>
-        </p:nvSpPr>
-        <p:spPr>
-          <a:xfrm>
-            <a:off x="502920" y="365760"/>
-            <a:ext cx="6400800" cy="274320"/>
+          <p:cNvPr id="2" name="divider circle"/>
+          <p:cNvSpPr/>
+          <p:nvPr/>
+        </p:nvSpPr>
+        <p:spPr>
+          <a:xfrm>
+            <a:off x="6446520" y="1600200"/>
+            <a:ext cx="2651760" cy="2651760"/>
+          </a:xfrm>
+          <a:prstGeom prst="ellipse">
+            <a:avLst/>
+          </a:prstGeom>
+          <a:solidFill>
+            <a:srgbClr val="6D71FF">
+              <a:alpha val="55000"/>
+            </a:srgbClr>
+          </a:solidFill>
+          <a:ln/>
+        </p:spPr>
+      </p:sp>
+      <p:sp>
+        <p:nvSpPr>
+          <p:cNvPr id="3" name="Shape 1"/>
+          <p:cNvSpPr/>
+          <p:nvPr/>
+        </p:nvSpPr>
+        <p:spPr>
+          <a:xfrm>
+            <a:off x="502920" y="1874520"/>
+            <a:ext cx="868680" cy="868680"/>
+          </a:xfrm>
+          <a:prstGeom prst="rect">
+            <a:avLst/>
+          </a:prstGeom>
+          <a:solidFill>
+            <a:srgbClr val="3FD0C9"/>
+          </a:solidFill>
+          <a:ln/>
+        </p:spPr>
+      </p:sp>
+      <p:sp>
+        <p:nvSpPr>
+          <p:cNvPr id="4" name="Text 2"/>
+          <p:cNvSpPr txBox="1"/>
+          <p:nvPr/>
+        </p:nvSpPr>
+        <p:spPr>
+          <a:xfrm>
+            <a:off x="502920" y="1874520"/>
+            <a:ext cx="868680" cy="868680"/>
+          </a:xfrm>
+          <a:prstGeom prst="rect">
+            <a:avLst/>
+          </a:prstGeom>
+          <a:noFill/>
+          <a:ln/>
+        </p:spPr>
+        <p:txBody>
+          <a:bodyPr wrap="square" lIns="0" tIns="0" rIns="0" bIns="0" rtlCol="0" anchor="ctr"/>
+          <a:lstStyle/>
+          <a:p>
+            <a:pPr algn="ctr" indent="0" marL="0">
+              <a:buNone/>
+            </a:pPr>
+            <a:r>
+              <a:rPr lang="en-US" sz="2600" b="1" dirty="0">
+                <a:solidFill>
+                  <a:srgbClr val="242C39"/>
+                </a:solidFill>
+              </a:rPr>
+              <a:t>03</a:t>
+            </a:r>
+            <a:endParaRPr lang="en-US" sz="2600" dirty="0"/>
+          </a:p>
+        </p:txBody>
+      </p:sp>
+      <p:sp>
+        <p:nvSpPr>
+          <p:cNvPr id="5" name="Text 3"/>
+          <p:cNvSpPr txBox="1"/>
+          <p:nvPr/>
+        </p:nvSpPr>
+        <p:spPr>
+          <a:xfrm>
+            <a:off x="502920" y="411480"/>
+            <a:ext cx="3657600" cy="274320"/>
           </a:xfrm>
           <a:prstGeom prst="rect">
             <a:avLst/>
@@ -6612,10 +7341,10 @@
             <a:r>
               <a:rPr lang="en-US" sz="950" b="1" spc="220" kern="0" dirty="0">
                 <a:solidFill>
-                  <a:srgbClr val="122B82"/>
-                </a:solidFill>
-              </a:rPr>
-              <a:t>PEOPLE AND UTILISATION</a:t>
+                  <a:srgbClr val="3FD0C9"/>
+                </a:solidFill>
+              </a:rPr>
+              <a:t>SECTION</a:t>
             </a:r>
             <a:endParaRPr lang="en-US" sz="950" dirty="0"/>
           </a:p>
@@ -6623,14 +7352,14 @@
       </p:sp>
       <p:sp>
         <p:nvSpPr>
-          <p:cNvPr id="3" name="Text 1"/>
-          <p:cNvSpPr txBox="1"/>
-          <p:nvPr/>
-        </p:nvSpPr>
-        <p:spPr>
-          <a:xfrm>
-            <a:off x="502920" y="640080"/>
-            <a:ext cx="7315200" cy="685800"/>
+          <p:cNvPr id="6" name="Text 4"/>
+          <p:cNvSpPr txBox="1"/>
+          <p:nvPr/>
+        </p:nvSpPr>
+        <p:spPr>
+          <a:xfrm>
+            <a:off x="1600200" y="1874520"/>
+            <a:ext cx="5943600" cy="502920"/>
           </a:xfrm>
           <a:prstGeom prst="rect">
             <a:avLst/>
@@ -6646,304 +7375,50 @@
               <a:buNone/>
             </a:pPr>
             <a:r>
-              <a:rPr lang="en-US" sz="2700" b="1" dirty="0">
-                <a:solidFill>
-                  <a:srgbClr val="242C39"/>
-                </a:solidFill>
-              </a:rPr>
-              <a:t>How each department spent its hours, Sep 26</a:t>
-            </a:r>
-            <a:endParaRPr lang="en-US" sz="2700" dirty="0"/>
-          </a:p>
-        </p:txBody>
-      </p:sp>
-      <p:pic>
-        <p:nvPicPr>
-          <p:cNvPr id="4" name="snip util_chart" descr="/home/user/Claude/deck/snips/util_chart.png">    </p:cNvPr>
-          <p:cNvPicPr>
-            <a:picLocks noChangeAspect="1"/>
-          </p:cNvPicPr>
-          <p:nvPr/>
-        </p:nvPicPr>
-        <p:blipFill>
-          <a:blip r:embed="rId1"/>
-          <a:stretch>
-            <a:fillRect/>
-          </a:stretch>
-        </p:blipFill>
-        <p:spPr>
-          <a:xfrm>
-            <a:off x="502920" y="1444752"/>
-            <a:ext cx="5577840" cy="2613700"/>
-          </a:xfrm>
-          <a:prstGeom prst="rect">
-            <a:avLst/>
-          </a:prstGeom>
-        </p:spPr>
-      </p:pic>
-      <p:sp>
-        <p:nvSpPr>
-          <p:cNvPr id="5" name="Text 2"/>
-          <p:cNvSpPr txBox="1"/>
-          <p:nvPr/>
-        </p:nvSpPr>
-        <p:spPr>
-          <a:xfrm>
-            <a:off x="502920" y="4131604"/>
-            <a:ext cx="5577840" cy="237744"/>
-          </a:xfrm>
-          <a:prstGeom prst="rect">
-            <a:avLst/>
-          </a:prstGeom>
-          <a:noFill/>
-          <a:ln/>
-        </p:spPr>
-        <p:txBody>
-          <a:bodyPr wrap="square" lIns="0" tIns="0" rIns="0" bIns="0" rtlCol="0" anchor="t"/>
+              <a:rPr lang="en-US" sz="2800" b="1" dirty="0">
+                <a:solidFill>
+                  <a:srgbClr val="FFFFFF"/>
+                </a:solidFill>
+              </a:rPr>
+              <a:t>Customers and cash</a:t>
+            </a:r>
+            <a:endParaRPr lang="en-US" sz="2800" dirty="0"/>
+          </a:p>
+        </p:txBody>
+      </p:sp>
+      <p:sp>
+        <p:nvSpPr>
+          <p:cNvPr id="7" name="Text 5"/>
+          <p:cNvSpPr txBox="1"/>
+          <p:nvPr/>
+        </p:nvSpPr>
+        <p:spPr>
+          <a:xfrm>
+            <a:off x="1600200" y="2395728"/>
+            <a:ext cx="5943600" cy="347472"/>
+          </a:xfrm>
+          <a:prstGeom prst="rect">
+            <a:avLst/>
+          </a:prstGeom>
+          <a:noFill/>
+          <a:ln/>
+        </p:spPr>
+        <p:txBody>
+          <a:bodyPr wrap="square" lIns="0" tIns="0" rIns="0" bIns="0" rtlCol="0" anchor="ctr"/>
           <a:lstStyle/>
           <a:p>
             <a:pPr indent="0" marL="0">
               <a:buNone/>
             </a:pPr>
             <a:r>
-              <a:rPr lang="en-US" sz="800" i="1" dirty="0">
-                <a:solidFill>
-                  <a:srgbClr val="6B7585"/>
-                </a:solidFill>
-              </a:rPr>
-              <a:t>Snipped from the Financial Controller Pack, Utilisation tab, hours by department, each bar scaled to its own total.</a:t>
-            </a:r>
-            <a:endParaRPr lang="en-US" sz="800" dirty="0"/>
-          </a:p>
-        </p:txBody>
-      </p:sp>
-      <p:sp>
-        <p:nvSpPr>
-          <p:cNvPr id="6" name="commentary panel"/>
-          <p:cNvSpPr/>
-          <p:nvPr/>
-        </p:nvSpPr>
-        <p:spPr>
-          <a:xfrm>
-            <a:off x="6263640" y="1463040"/>
-            <a:ext cx="2377440" cy="3154680"/>
-          </a:xfrm>
-          <a:prstGeom prst="rect">
-            <a:avLst/>
-          </a:prstGeom>
-          <a:solidFill>
-            <a:srgbClr val="E8F9F8"/>
-          </a:solidFill>
-          <a:ln/>
-        </p:spPr>
-      </p:sp>
-      <p:sp>
-        <p:nvSpPr>
-          <p:cNvPr id="7" name="Text 4"/>
-          <p:cNvSpPr txBox="1"/>
-          <p:nvPr/>
-        </p:nvSpPr>
-        <p:spPr>
-          <a:xfrm>
-            <a:off x="6446520" y="1627632"/>
-            <a:ext cx="2011680" cy="228600"/>
-          </a:xfrm>
-          <a:prstGeom prst="rect">
-            <a:avLst/>
-          </a:prstGeom>
-          <a:noFill/>
-          <a:ln/>
-        </p:spPr>
-        <p:txBody>
-          <a:bodyPr wrap="square" lIns="0" tIns="0" rIns="0" bIns="0" rtlCol="0" anchor="ctr"/>
-          <a:lstStyle/>
-          <a:p>
-            <a:pPr indent="0" marL="0">
-              <a:buNone/>
-            </a:pPr>
-            <a:r>
-              <a:rPr lang="en-US" sz="900" b="1" spc="180" kern="0" dirty="0">
-                <a:solidFill>
-                  <a:srgbClr val="005358"/>
-                </a:solidFill>
-              </a:rPr>
-              <a:t>COMMENTARY</a:t>
-            </a:r>
-            <a:endParaRPr lang="en-US" sz="900" dirty="0"/>
-          </a:p>
-        </p:txBody>
-      </p:sp>
-      <p:sp>
-        <p:nvSpPr>
-          <p:cNvPr id="8" name="Text 5"/>
-          <p:cNvSpPr txBox="1"/>
-          <p:nvPr/>
-        </p:nvSpPr>
-        <p:spPr>
-          <a:xfrm>
-            <a:off x="6446520" y="1901952"/>
-            <a:ext cx="2011680" cy="2551176"/>
-          </a:xfrm>
-          <a:prstGeom prst="rect">
-            <a:avLst/>
-          </a:prstGeom>
-          <a:noFill/>
-          <a:ln/>
-        </p:spPr>
-        <p:txBody>
-          <a:bodyPr wrap="square" lIns="0" tIns="0" rIns="0" bIns="0" rtlCol="0" anchor="t">
-            <a:normAutofit/>
-          </a:bodyPr>
-          <a:lstStyle/>
-          <a:p>
-            <a:pPr marL="342900" indent="-342900">
-              <a:lnSpc>
-                <a:spcPts val="1150"/>
-              </a:lnSpc>
-              <a:spcAft>
-                <a:spcPts val="500"/>
-              </a:spcAft>
-              <a:buSzPct val="100000"/>
-              <a:buChar char="•"/>
-            </a:pPr>
-            <a:r>
-              <a:rPr lang="en-US" sz="900" dirty="0">
-                <a:solidFill>
-                  <a:srgbClr val="3A4453"/>
-                </a:solidFill>
-              </a:rPr>
-              <a:t>Each bar is scaled to that department's own hours, so you can compare the mix. Support works about a hundred times the hours Integration does.</a:t>
-            </a:r>
-            <a:endParaRPr lang="en-US" sz="900" dirty="0"/>
-          </a:p>
-          <a:p>
-            <a:pPr marL="342900" indent="-342900">
-              <a:lnSpc>
-                <a:spcPts val="1150"/>
-              </a:lnSpc>
-              <a:spcAft>
-                <a:spcPts val="500"/>
-              </a:spcAft>
-              <a:buSzPct val="100000"/>
-              <a:buChar char="•"/>
-            </a:pPr>
-            <a:r>
-              <a:rPr lang="en-US" sz="900" dirty="0">
-                <a:solidFill>
-                  <a:srgbClr val="3A4453"/>
-                </a:solidFill>
-              </a:rPr>
-              <a:t>Support shows 11 hours not on jobs out of 2,143 worked. That is not credible.</a:t>
-            </a:r>
-            <a:endParaRPr lang="en-US" sz="900" dirty="0"/>
-          </a:p>
-          <a:p>
-            <a:pPr marL="342900" indent="-342900">
-              <a:lnSpc>
-                <a:spcPts val="1150"/>
-              </a:lnSpc>
-              <a:spcAft>
-                <a:spcPts val="500"/>
-              </a:spcAft>
-              <a:buSzPct val="100000"/>
-              <a:buChar char="•"/>
-            </a:pPr>
-            <a:r>
-              <a:rPr lang="en-US" sz="900" dirty="0">
-                <a:solidFill>
-                  <a:srgbClr val="3A4453"/>
-                </a:solidFill>
-              </a:rPr>
-              <a:t>Events put 333 hours into leave and only 241 onto jobs. The people are there, the work is not.</a:t>
-            </a:r>
-            <a:endParaRPr lang="en-US" sz="900" dirty="0"/>
-          </a:p>
-          <a:p>
-            <a:pPr marL="342900" indent="-342900">
-              <a:lnSpc>
-                <a:spcPts val="1150"/>
-              </a:lnSpc>
-              <a:spcAft>
-                <a:spcPts val="500"/>
-              </a:spcAft>
-              <a:buSzPct val="100000"/>
-              <a:buChar char="•"/>
-            </a:pPr>
-            <a:r>
-              <a:rPr lang="en-US" sz="900" dirty="0">
-                <a:solidFill>
-                  <a:srgbClr val="3A4453"/>
-                </a:solidFill>
-              </a:rPr>
-              <a:t>Consulting put 84 hours into work we cannot bill against 31 we can.</a:t>
-            </a:r>
-            <a:endParaRPr lang="en-US" sz="900" dirty="0"/>
-          </a:p>
-          <a:p>
-            <a:pPr marL="342900" indent="-342900">
-              <a:lnSpc>
-                <a:spcPts val="1150"/>
-              </a:lnSpc>
-              <a:spcAft>
-                <a:spcPts val="500"/>
-              </a:spcAft>
-              <a:buSzPct val="100000"/>
-              <a:buChar char="•"/>
-            </a:pPr>
-            <a:r>
-              <a:rPr lang="en-US" sz="900" dirty="0">
-                <a:solidFill>
-                  <a:srgbClr val="3A4453"/>
-                </a:solidFill>
-              </a:rPr>
-              <a:t>We pay for every hour. We only bill the ones on jobs. The grey and light teal are the gap.</a:t>
-            </a:r>
-            <a:endParaRPr lang="en-US" sz="900" dirty="0"/>
-          </a:p>
-        </p:txBody>
-      </p:sp>
-      <p:sp>
-        <p:nvSpPr>
-          <p:cNvPr id="25" name="Slide Number Placeholder 0"/>
-          <p:cNvSpPr>
-            <a:spLocks noGrp="1"/>
-          </p:cNvSpPr>
-          <p:nvPr>
-            <p:ph type="sldNum" sz="quarter" idx="4294967295"/>
-          </p:nvPr>
-        </p:nvSpPr>
-        <p:spPr>
-          <a:xfrm>
-            <a:off x="8092440" y="4736592"/>
-            <a:ext cx="548640" cy="228600"/>
-          </a:xfrm>
-          <a:prstGeom prst="rect">
-            <a:avLst/>
-          </a:prstGeom>
-          <a:extLst>
-            <a:ext uri="{C572A759-6A51-4108-AA02-DFA0A04FC94B}">
-              <ma14:wrappingTextBoxFlag xmlns:ma14="http://schemas.microsoft.com/office/mac/drawingml/2011/main" val="0"/>
-            </a:ext>
-          </a:extLst>
-        </p:spPr>
-        <p:txBody>
-          <a:bodyPr/>
-          <a:lstStyle>
-            <a:lvl1pPr>
-              <a:defRPr sz="800">
-                <a:solidFill>
-                  <a:srgbClr val="6B7585"/>
-                </a:solidFill>
-              </a:defRPr>
-            </a:lvl1pPr>
-          </a:lstStyle>
-          <a:p>
-            <a:pPr algn="r"/>
-            <a:fld id="{F7021451-1387-4CA6-816F-3879F97B5CBC}" type="slidenum">
-              <a:rPr b="0" lang="en-US"/>
-              <a:t>19</a:t>
-            </a:fld>
-            <a:endParaRPr lang="en-US"/>
+              <a:rPr lang="en-US" sz="1200" dirty="0">
+                <a:solidFill>
+                  <a:srgbClr val="C9CED6"/>
+                </a:solidFill>
+              </a:rPr>
+              <a:t>Who pays us, how much, and how slowly</a:t>
+            </a:r>
+            <a:endParaRPr lang="en-US" sz="1200" dirty="0"/>
           </a:p>
         </p:txBody>
       </p:sp>
@@ -7756,92 +8231,14 @@
       </p:grpSpPr>
       <p:sp>
         <p:nvSpPr>
-          <p:cNvPr id="2" name="divider circle"/>
-          <p:cNvSpPr/>
-          <p:nvPr/>
-        </p:nvSpPr>
-        <p:spPr>
-          <a:xfrm>
-            <a:off x="6446520" y="1600200"/>
-            <a:ext cx="2651760" cy="2651760"/>
-          </a:xfrm>
-          <a:prstGeom prst="ellipse">
-            <a:avLst/>
-          </a:prstGeom>
-          <a:solidFill>
-            <a:srgbClr val="6D71FF">
-              <a:alpha val="55000"/>
-            </a:srgbClr>
-          </a:solidFill>
-          <a:ln/>
-        </p:spPr>
-      </p:sp>
-      <p:sp>
-        <p:nvSpPr>
-          <p:cNvPr id="3" name="Shape 1"/>
-          <p:cNvSpPr/>
-          <p:nvPr/>
-        </p:nvSpPr>
-        <p:spPr>
-          <a:xfrm>
-            <a:off x="502920" y="1874520"/>
-            <a:ext cx="868680" cy="868680"/>
-          </a:xfrm>
-          <a:prstGeom prst="rect">
-            <a:avLst/>
-          </a:prstGeom>
-          <a:solidFill>
-            <a:srgbClr val="3FD0C9"/>
-          </a:solidFill>
-          <a:ln/>
-        </p:spPr>
-      </p:sp>
-      <p:sp>
-        <p:nvSpPr>
-          <p:cNvPr id="4" name="Text 2"/>
-          <p:cNvSpPr txBox="1"/>
-          <p:nvPr/>
-        </p:nvSpPr>
-        <p:spPr>
-          <a:xfrm>
-            <a:off x="502920" y="1874520"/>
-            <a:ext cx="868680" cy="868680"/>
-          </a:xfrm>
-          <a:prstGeom prst="rect">
-            <a:avLst/>
-          </a:prstGeom>
-          <a:noFill/>
-          <a:ln/>
-        </p:spPr>
-        <p:txBody>
-          <a:bodyPr wrap="square" lIns="0" tIns="0" rIns="0" bIns="0" rtlCol="0" anchor="ctr"/>
-          <a:lstStyle/>
-          <a:p>
-            <a:pPr algn="ctr" indent="0" marL="0">
-              <a:buNone/>
-            </a:pPr>
-            <a:r>
-              <a:rPr lang="en-US" sz="2600" b="1" dirty="0">
-                <a:solidFill>
-                  <a:srgbClr val="242C39"/>
-                </a:solidFill>
-              </a:rPr>
-              <a:t>05</a:t>
-            </a:r>
-            <a:endParaRPr lang="en-US" sz="2600" dirty="0"/>
-          </a:p>
-        </p:txBody>
-      </p:sp>
-      <p:sp>
-        <p:nvSpPr>
-          <p:cNvPr id="5" name="Text 3"/>
-          <p:cNvSpPr txBox="1"/>
-          <p:nvPr/>
-        </p:nvSpPr>
-        <p:spPr>
-          <a:xfrm>
-            <a:off x="502920" y="411480"/>
-            <a:ext cx="3657600" cy="274320"/>
+          <p:cNvPr id="2" name="Text 0"/>
+          <p:cNvSpPr txBox="1"/>
+          <p:nvPr/>
+        </p:nvSpPr>
+        <p:spPr>
+          <a:xfrm>
+            <a:off x="502920" y="365760"/>
+            <a:ext cx="6400800" cy="274320"/>
           </a:xfrm>
           <a:prstGeom prst="rect">
             <a:avLst/>
@@ -7859,10 +8256,10 @@
             <a:r>
               <a:rPr lang="en-US" sz="950" b="1" spc="220" kern="0" dirty="0">
                 <a:solidFill>
-                  <a:srgbClr val="3FD0C9"/>
-                </a:solidFill>
-              </a:rPr>
-              <a:t>SECTION</a:t>
+                  <a:srgbClr val="122B82"/>
+                </a:solidFill>
+              </a:rPr>
+              <a:t>CUSTOMERS AND CASH</a:t>
             </a:r>
             <a:endParaRPr lang="en-US" sz="950" dirty="0"/>
           </a:p>
@@ -7870,14 +8267,14 @@
       </p:sp>
       <p:sp>
         <p:nvSpPr>
-          <p:cNvPr id="6" name="Text 4"/>
-          <p:cNvSpPr txBox="1"/>
-          <p:nvPr/>
-        </p:nvSpPr>
-        <p:spPr>
-          <a:xfrm>
-            <a:off x="1600200" y="1874520"/>
-            <a:ext cx="5943600" cy="502920"/>
+          <p:cNvPr id="3" name="Text 1"/>
+          <p:cNvSpPr txBox="1"/>
+          <p:nvPr/>
+        </p:nvSpPr>
+        <p:spPr>
+          <a:xfrm>
+            <a:off x="502920" y="640080"/>
+            <a:ext cx="7315200" cy="685800"/>
           </a:xfrm>
           <a:prstGeom prst="rect">
             <a:avLst/>
@@ -7893,50 +8290,304 @@
               <a:buNone/>
             </a:pPr>
             <a:r>
-              <a:rPr lang="en-US" sz="2800" b="1" dirty="0">
-                <a:solidFill>
-                  <a:srgbClr val="FFFFFF"/>
-                </a:solidFill>
-              </a:rPr>
-              <a:t>Budget and outlook</a:t>
-            </a:r>
-            <a:endParaRPr lang="en-US" sz="2800" dirty="0"/>
-          </a:p>
-        </p:txBody>
-      </p:sp>
-      <p:sp>
-        <p:nvSpPr>
-          <p:cNvPr id="7" name="Text 5"/>
-          <p:cNvSpPr txBox="1"/>
-          <p:nvPr/>
-        </p:nvSpPr>
-        <p:spPr>
-          <a:xfrm>
-            <a:off x="1600200" y="2395728"/>
-            <a:ext cx="5943600" cy="347472"/>
-          </a:xfrm>
-          <a:prstGeom prst="rect">
-            <a:avLst/>
-          </a:prstGeom>
-          <a:noFill/>
-          <a:ln/>
-        </p:spPr>
-        <p:txBody>
-          <a:bodyPr wrap="square" lIns="0" tIns="0" rIns="0" bIns="0" rtlCol="0" anchor="ctr"/>
+              <a:rPr lang="en-US" sz="2700" b="1" dirty="0">
+                <a:solidFill>
+                  <a:srgbClr val="242C39"/>
+                </a:solidFill>
+              </a:rPr>
+              <a:t>Top ten customers, year to date</a:t>
+            </a:r>
+            <a:endParaRPr lang="en-US" sz="2700" dirty="0"/>
+          </a:p>
+        </p:txBody>
+      </p:sp>
+      <p:pic>
+        <p:nvPicPr>
+          <p:cNvPr id="4" name="snip top10" descr="/home/user/Claude/deck/snips/top10.png">    </p:cNvPr>
+          <p:cNvPicPr>
+            <a:picLocks noChangeAspect="1"/>
+          </p:cNvPicPr>
+          <p:nvPr/>
+        </p:nvPicPr>
+        <p:blipFill>
+          <a:blip r:embed="rId1"/>
+          <a:stretch>
+            <a:fillRect/>
+          </a:stretch>
+        </p:blipFill>
+        <p:spPr>
+          <a:xfrm>
+            <a:off x="502920" y="1444752"/>
+            <a:ext cx="5577840" cy="2815203"/>
+          </a:xfrm>
+          <a:prstGeom prst="rect">
+            <a:avLst/>
+          </a:prstGeom>
+        </p:spPr>
+      </p:pic>
+      <p:sp>
+        <p:nvSpPr>
+          <p:cNvPr id="5" name="Text 2"/>
+          <p:cNvSpPr txBox="1"/>
+          <p:nvPr/>
+        </p:nvSpPr>
+        <p:spPr>
+          <a:xfrm>
+            <a:off x="502920" y="4333107"/>
+            <a:ext cx="5577840" cy="237744"/>
+          </a:xfrm>
+          <a:prstGeom prst="rect">
+            <a:avLst/>
+          </a:prstGeom>
+          <a:noFill/>
+          <a:ln/>
+        </p:spPr>
+        <p:txBody>
+          <a:bodyPr wrap="square" lIns="0" tIns="0" rIns="0" bIns="0" rtlCol="0" anchor="t"/>
           <a:lstStyle/>
           <a:p>
             <a:pPr indent="0" marL="0">
               <a:buNone/>
             </a:pPr>
             <a:r>
-              <a:rPr lang="en-US" sz="1200" dirty="0">
-                <a:solidFill>
-                  <a:srgbClr val="C9CED6"/>
-                </a:solidFill>
-              </a:rPr>
-              <a:t>What the rest of the year looks like and what we change</a:t>
-            </a:r>
-            <a:endParaRPr lang="en-US" sz="1200" dirty="0"/>
+              <a:rPr lang="en-US" sz="800" i="1" dirty="0">
+                <a:solidFill>
+                  <a:srgbClr val="6B7585"/>
+                </a:solidFill>
+              </a:rPr>
+              <a:t>Snipped from the Financial Controller Pack, Top 10 Clients tab, top ten customers by revenue, the top three in red.</a:t>
+            </a:r>
+            <a:endParaRPr lang="en-US" sz="800" dirty="0"/>
+          </a:p>
+        </p:txBody>
+      </p:sp>
+      <p:sp>
+        <p:nvSpPr>
+          <p:cNvPr id="6" name="commentary panel"/>
+          <p:cNvSpPr/>
+          <p:nvPr/>
+        </p:nvSpPr>
+        <p:spPr>
+          <a:xfrm>
+            <a:off x="6263640" y="1463040"/>
+            <a:ext cx="2377440" cy="3154680"/>
+          </a:xfrm>
+          <a:prstGeom prst="rect">
+            <a:avLst/>
+          </a:prstGeom>
+          <a:solidFill>
+            <a:srgbClr val="E8F9F8"/>
+          </a:solidFill>
+          <a:ln/>
+        </p:spPr>
+      </p:sp>
+      <p:sp>
+        <p:nvSpPr>
+          <p:cNvPr id="7" name="Text 4"/>
+          <p:cNvSpPr txBox="1"/>
+          <p:nvPr/>
+        </p:nvSpPr>
+        <p:spPr>
+          <a:xfrm>
+            <a:off x="6446520" y="1627632"/>
+            <a:ext cx="2011680" cy="228600"/>
+          </a:xfrm>
+          <a:prstGeom prst="rect">
+            <a:avLst/>
+          </a:prstGeom>
+          <a:noFill/>
+          <a:ln/>
+        </p:spPr>
+        <p:txBody>
+          <a:bodyPr wrap="square" lIns="0" tIns="0" rIns="0" bIns="0" rtlCol="0" anchor="ctr"/>
+          <a:lstStyle/>
+          <a:p>
+            <a:pPr indent="0" marL="0">
+              <a:buNone/>
+            </a:pPr>
+            <a:r>
+              <a:rPr lang="en-US" sz="900" b="1" spc="180" kern="0" dirty="0">
+                <a:solidFill>
+                  <a:srgbClr val="005358"/>
+                </a:solidFill>
+              </a:rPr>
+              <a:t>COMMENTARY</a:t>
+            </a:r>
+            <a:endParaRPr lang="en-US" sz="900" dirty="0"/>
+          </a:p>
+        </p:txBody>
+      </p:sp>
+      <p:sp>
+        <p:nvSpPr>
+          <p:cNvPr id="8" name="Text 5"/>
+          <p:cNvSpPr txBox="1"/>
+          <p:nvPr/>
+        </p:nvSpPr>
+        <p:spPr>
+          <a:xfrm>
+            <a:off x="6446520" y="1901952"/>
+            <a:ext cx="2011680" cy="2551176"/>
+          </a:xfrm>
+          <a:prstGeom prst="rect">
+            <a:avLst/>
+          </a:prstGeom>
+          <a:noFill/>
+          <a:ln/>
+        </p:spPr>
+        <p:txBody>
+          <a:bodyPr wrap="square" lIns="0" tIns="0" rIns="0" bIns="0" rtlCol="0" anchor="t">
+            <a:normAutofit/>
+          </a:bodyPr>
+          <a:lstStyle/>
+          <a:p>
+            <a:pPr marL="342900" indent="-342900">
+              <a:lnSpc>
+                <a:spcPts val="1300"/>
+              </a:lnSpc>
+              <a:spcAft>
+                <a:spcPts val="500"/>
+              </a:spcAft>
+              <a:buSzPct val="100000"/>
+              <a:buChar char="•"/>
+            </a:pPr>
+            <a:r>
+              <a:rPr lang="en-US" sz="950" dirty="0">
+                <a:solidFill>
+                  <a:srgbClr val="3A4453"/>
+                </a:solidFill>
+              </a:rPr>
+              <a:t>The three red bars are 49% of everything we sold this year.</a:t>
+            </a:r>
+            <a:endParaRPr lang="en-US" sz="950" dirty="0"/>
+          </a:p>
+          <a:p>
+            <a:pPr marL="342900" indent="-342900">
+              <a:lnSpc>
+                <a:spcPts val="1300"/>
+              </a:lnSpc>
+              <a:spcAft>
+                <a:spcPts val="500"/>
+              </a:spcAft>
+              <a:buSzPct val="100000"/>
+              <a:buChar char="•"/>
+            </a:pPr>
+            <a:r>
+              <a:rPr lang="en-US" sz="950" dirty="0">
+                <a:solidFill>
+                  <a:srgbClr val="3A4453"/>
+                </a:solidFill>
+              </a:rPr>
+              <a:t>All ten together are 76%. Every other customer we have is the remaining 24%.</a:t>
+            </a:r>
+            <a:endParaRPr lang="en-US" sz="950" dirty="0"/>
+          </a:p>
+          <a:p>
+            <a:pPr marL="342900" indent="-342900">
+              <a:lnSpc>
+                <a:spcPts val="1300"/>
+              </a:lnSpc>
+              <a:spcAft>
+                <a:spcPts val="500"/>
+              </a:spcAft>
+              <a:buSzPct val="100000"/>
+              <a:buChar char="•"/>
+            </a:pPr>
+            <a:r>
+              <a:rPr lang="en-US" sz="950" dirty="0">
+                <a:solidFill>
+                  <a:srgbClr val="3A4453"/>
+                </a:solidFill>
+              </a:rPr>
+              <a:t>Deloitte Services at 401,755 is 25% on its own. Losing them would wipe out more than the whole year's profit plan.</a:t>
+            </a:r>
+            <a:endParaRPr lang="en-US" sz="950" dirty="0"/>
+          </a:p>
+          <a:p>
+            <a:pPr marL="342900" indent="-342900">
+              <a:lnSpc>
+                <a:spcPts val="1300"/>
+              </a:lnSpc>
+              <a:spcAft>
+                <a:spcPts val="500"/>
+              </a:spcAft>
+              <a:buSzPct val="100000"/>
+              <a:buChar char="•"/>
+            </a:pPr>
+            <a:r>
+              <a:rPr lang="en-US" sz="950" dirty="0">
+                <a:solidFill>
+                  <a:srgbClr val="3A4453"/>
+                </a:solidFill>
+              </a:rPr>
+              <a:t>Aware Super came from nothing to 285,075 in a quarter, and nearly all of it was one job in September.</a:t>
+            </a:r>
+            <a:endParaRPr lang="en-US" sz="950" dirty="0"/>
+          </a:p>
+          <a:p>
+            <a:pPr marL="342900" indent="-342900">
+              <a:lnSpc>
+                <a:spcPts val="1300"/>
+              </a:lnSpc>
+              <a:spcAft>
+                <a:spcPts val="500"/>
+              </a:spcAft>
+              <a:buSzPct val="100000"/>
+              <a:buChar char="•"/>
+            </a:pPr>
+            <a:r>
+              <a:rPr lang="en-US" sz="950" dirty="0">
+                <a:solidFill>
+                  <a:srgbClr val="3A4453"/>
+                </a:solidFill>
+              </a:rPr>
+              <a:t>After the top five it falls away fast. Number ten is only 37,166.</a:t>
+            </a:r>
+            <a:endParaRPr lang="en-US" sz="950" dirty="0"/>
+          </a:p>
+        </p:txBody>
+      </p:sp>
+      <p:sp>
+        <p:nvSpPr>
+          <p:cNvPr id="25" name="Slide Number Placeholder 0"/>
+          <p:cNvSpPr>
+            <a:spLocks noGrp="1"/>
+          </p:cNvSpPr>
+          <p:nvPr>
+            <p:ph type="sldNum" sz="quarter" idx="4294967295"/>
+          </p:nvPr>
+        </p:nvSpPr>
+        <p:spPr>
+          <a:xfrm>
+            <a:off x="8092440" y="4736592"/>
+            <a:ext cx="548640" cy="228600"/>
+          </a:xfrm>
+          <a:prstGeom prst="rect">
+            <a:avLst/>
+          </a:prstGeom>
+          <a:extLst>
+            <a:ext uri="{C572A759-6A51-4108-AA02-DFA0A04FC94B}">
+              <ma14:wrappingTextBoxFlag xmlns:ma14="http://schemas.microsoft.com/office/mac/drawingml/2011/main" val="0"/>
+            </a:ext>
+          </a:extLst>
+        </p:spPr>
+        <p:txBody>
+          <a:bodyPr/>
+          <a:lstStyle>
+            <a:lvl1pPr>
+              <a:defRPr sz="800">
+                <a:solidFill>
+                  <a:srgbClr val="6B7585"/>
+                </a:solidFill>
+              </a:defRPr>
+            </a:lvl1pPr>
+          </a:lstStyle>
+          <a:p>
+            <a:pPr algn="r"/>
+            <a:fld id="{F7021451-1387-4CA6-816F-3879F97B5CBC}" type="slidenum">
+              <a:rPr b="0" lang="en-US"/>
+              <a:t>20</a:t>
+            </a:fld>
+            <a:endParaRPr lang="en-US"/>
           </a:p>
         </p:txBody>
       </p:sp>
@@ -7995,7 +8646,7 @@
                   <a:srgbClr val="122B82"/>
                 </a:solidFill>
               </a:rPr>
-              <a:t>BUDGET AND OUTLOOK</a:t>
+              <a:t>CUSTOMERS AND CASH</a:t>
             </a:r>
             <a:endParaRPr lang="en-US" sz="950" dirty="0"/>
           </a:p>
@@ -8031,7 +8682,7 @@
                   <a:srgbClr val="242C39"/>
                 </a:solidFill>
               </a:rPr>
-              <a:t>Revenue by month against budget</a:t>
+              <a:t>How long customers take to pay</a:t>
             </a:r>
             <a:endParaRPr lang="en-US" sz="2700" dirty="0"/>
           </a:p>
@@ -8039,7 +8690,7 @@
       </p:sp>
       <p:pic>
         <p:nvPicPr>
-          <p:cNvPr id="4" name="snip income_month" descr="/home/user/Claude/deck/snips/income_month.png">    </p:cNvPr>
+          <p:cNvPr id="4" name="snip dso_calc" descr="/home/user/Claude/deck/snips/dso_calc.png">    </p:cNvPr>
           <p:cNvPicPr>
             <a:picLocks noChangeAspect="1"/>
           </p:cNvPicPr>
@@ -8054,7 +8705,7 @@
         <p:spPr>
           <a:xfrm>
             <a:off x="502920" y="1444752"/>
-            <a:ext cx="5577840" cy="2390888"/>
+            <a:ext cx="5577840" cy="2900215"/>
           </a:xfrm>
           <a:prstGeom prst="rect">
             <a:avLst/>
@@ -8069,7 +8720,7 @@
         </p:nvSpPr>
         <p:spPr>
           <a:xfrm>
-            <a:off x="502920" y="3908792"/>
+            <a:off x="502920" y="4418119"/>
             <a:ext cx="5577840" cy="237744"/>
           </a:xfrm>
           <a:prstGeom prst="rect">
@@ -8091,7 +8742,7 @@
                   <a:srgbClr val="6B7585"/>
                 </a:solidFill>
               </a:rPr>
-              <a:t>Snipped from the Financial Controller Pack, Cost Analysis tab, total income by month, actual to date then budget.</a:t>
+              <a:t>Snipped from the Financial Controller Pack, DSO tab, the calculation, built off the Xero age analysis.</a:t>
             </a:r>
             <a:endParaRPr lang="en-US" sz="800" dirty="0"/>
           </a:p>
@@ -8178,7 +8829,7 @@
           <a:p>
             <a:pPr marL="342900" indent="-342900">
               <a:lnSpc>
-                <a:spcPts val="1150"/>
+                <a:spcPts val="1300"/>
               </a:lnSpc>
               <a:spcAft>
                 <a:spcPts val="500"/>
@@ -8187,19 +8838,19 @@
               <a:buChar char="•"/>
             </a:pPr>
             <a:r>
-              <a:rPr lang="en-US" sz="900" dirty="0">
+              <a:rPr lang="en-US" sz="1000" dirty="0">
                 <a:solidFill>
                   <a:srgbClr val="3A4453"/>
                 </a:solidFill>
               </a:rPr>
-              <a:t>Q1 came in (372)k behind on revenue, and almost all of it is Consulting and Video.</a:t>
-            </a:r>
-            <a:endParaRPr lang="en-US" sz="900" dirty="0"/>
+              <a:t>Customers take 47 days to pay us. We want 30.</a:t>
+            </a:r>
+            <a:endParaRPr lang="en-US" sz="1000" dirty="0"/>
           </a:p>
           <a:p>
             <a:pPr marL="342900" indent="-342900">
               <a:lnSpc>
-                <a:spcPts val="1150"/>
+                <a:spcPts val="1300"/>
               </a:lnSpc>
               <a:spcAft>
                 <a:spcPts val="500"/>
@@ -8208,19 +8859,19 @@
               <a:buChar char="•"/>
             </a:pPr>
             <a:r>
-              <a:rPr lang="en-US" sz="900" dirty="0">
+              <a:rPr lang="en-US" sz="1000" dirty="0">
                 <a:solidFill>
                   <a:srgbClr val="3A4453"/>
                 </a:solidFill>
               </a:rPr>
-              <a:t>The remaining nine months are untouched original budget. They are not a forecast.</a:t>
-            </a:r>
-            <a:endParaRPr lang="en-US" sz="900" dirty="0"/>
+              <a:t>That is 17 days of sales sitting in the debtor book instead of the bank.</a:t>
+            </a:r>
+            <a:endParaRPr lang="en-US" sz="1000" dirty="0"/>
           </a:p>
           <a:p>
             <a:pPr marL="342900" indent="-342900">
               <a:lnSpc>
-                <a:spcPts val="1150"/>
+                <a:spcPts val="1300"/>
               </a:lnSpc>
               <a:spcAft>
                 <a:spcPts val="500"/>
@@ -8229,19 +8880,19 @@
               <a:buChar char="•"/>
             </a:pPr>
             <a:r>
-              <a:rPr lang="en-US" sz="900" dirty="0">
+              <a:rPr lang="en-US" sz="1000" dirty="0">
                 <a:solidFill>
                   <a:srgbClr val="3A4453"/>
                 </a:solidFill>
               </a:rPr>
-              <a:t>October alone is budgeted at 950k, nearly double our best month so far.</a:t>
-            </a:r>
-            <a:endParaRPr lang="en-US" sz="900" dirty="0"/>
+              <a:t>In money, 303,605 that should be ours already.</a:t>
+            </a:r>
+            <a:endParaRPr lang="en-US" sz="1000" dirty="0"/>
           </a:p>
           <a:p>
             <a:pPr marL="342900" indent="-342900">
               <a:lnSpc>
-                <a:spcPts val="1150"/>
+                <a:spcPts val="1300"/>
               </a:lnSpc>
               <a:spcAft>
                 <a:spcPts val="500"/>
@@ -8250,19 +8901,19 @@
               <a:buChar char="•"/>
             </a:pPr>
             <a:r>
-              <a:rPr lang="en-US" sz="900" dirty="0">
+              <a:rPr lang="en-US" sz="1000" dirty="0">
                 <a:solidFill>
                   <a:srgbClr val="3A4453"/>
                 </a:solidFill>
               </a:rPr>
-              <a:t>December carries a planned loss. The business closes for two weeks, so that is correct and should stay.</a:t>
-            </a:r>
-            <a:endParaRPr lang="en-US" sz="900" dirty="0"/>
+              <a:t>Every single day we pull that back brings in 17,657.</a:t>
+            </a:r>
+            <a:endParaRPr lang="en-US" sz="1000" dirty="0"/>
           </a:p>
           <a:p>
             <a:pPr marL="342900" indent="-342900">
               <a:lnSpc>
-                <a:spcPts val="1150"/>
+                <a:spcPts val="1300"/>
               </a:lnSpc>
               <a:spcAft>
                 <a:spcPts val="500"/>
@@ -8271,14 +8922,14 @@
               <a:buChar char="•"/>
             </a:pPr>
             <a:r>
-              <a:rPr lang="en-US" sz="900" dirty="0">
+              <a:rPr lang="en-US" sz="1000" dirty="0">
                 <a:solidFill>
                   <a:srgbClr val="3A4453"/>
                 </a:solidFill>
               </a:rPr>
-              <a:t>Recommend a Q1 rolling forecast: rebuild Consulting on real capacity and reset the margin assumptions.</a:t>
-            </a:r>
-            <a:endParaRPr lang="en-US" sz="900" dirty="0"/>
+              <a:t>This is the fastest cash available to the business this quarter. Nothing else comes close.</a:t>
+            </a:r>
+            <a:endParaRPr lang="en-US" sz="1000" dirty="0"/>
           </a:p>
         </p:txBody>
       </p:sp>
@@ -8382,7 +9033,7 @@
                   <a:srgbClr val="122B82"/>
                 </a:solidFill>
               </a:rPr>
-              <a:t>SUMMARY AND ACTIONS</a:t>
+              <a:t>CUSTOMERS AND CASH</a:t>
             </a:r>
             <a:endParaRPr lang="en-US" sz="950" dirty="0"/>
           </a:p>
@@ -8418,6 +9069,1589 @@
                   <a:srgbClr val="242C39"/>
                 </a:solidFill>
               </a:rPr>
+              <a:t>Who owes us the most</a:t>
+            </a:r>
+            <a:endParaRPr lang="en-US" sz="2700" dirty="0"/>
+          </a:p>
+        </p:txBody>
+      </p:sp>
+      <p:pic>
+        <p:nvPicPr>
+          <p:cNvPr id="4" name="snip dso_who" descr="/home/user/Claude/deck/snips/dso_who.png">    </p:cNvPr>
+          <p:cNvPicPr>
+            <a:picLocks noChangeAspect="1"/>
+          </p:cNvPicPr>
+          <p:nvPr/>
+        </p:nvPicPr>
+        <p:blipFill>
+          <a:blip r:embed="rId1"/>
+          <a:stretch>
+            <a:fillRect/>
+          </a:stretch>
+        </p:blipFill>
+        <p:spPr>
+          <a:xfrm>
+            <a:off x="988263" y="1444752"/>
+            <a:ext cx="4607153" cy="3090672"/>
+          </a:xfrm>
+          <a:prstGeom prst="rect">
+            <a:avLst/>
+          </a:prstGeom>
+        </p:spPr>
+      </p:pic>
+      <p:sp>
+        <p:nvSpPr>
+          <p:cNvPr id="5" name="Text 2"/>
+          <p:cNvSpPr txBox="1"/>
+          <p:nvPr/>
+        </p:nvSpPr>
+        <p:spPr>
+          <a:xfrm>
+            <a:off x="502920" y="4608576"/>
+            <a:ext cx="5577840" cy="237744"/>
+          </a:xfrm>
+          <a:prstGeom prst="rect">
+            <a:avLst/>
+          </a:prstGeom>
+          <a:noFill/>
+          <a:ln/>
+        </p:spPr>
+        <p:txBody>
+          <a:bodyPr wrap="square" lIns="0" tIns="0" rIns="0" bIns="0" rtlCol="0" anchor="t"/>
+          <a:lstStyle/>
+          <a:p>
+            <a:pPr indent="0" marL="0">
+              <a:buNone/>
+            </a:pPr>
+            <a:r>
+              <a:rPr lang="en-US" sz="800" i="1" dirty="0">
+                <a:solidFill>
+                  <a:srgbClr val="6B7585"/>
+                </a:solidFill>
+              </a:rPr>
+              <a:t>Snipped from the Financial Controller Pack, DSO tab, the ten largest amounts owed at month end.</a:t>
+            </a:r>
+            <a:endParaRPr lang="en-US" sz="800" dirty="0"/>
+          </a:p>
+        </p:txBody>
+      </p:sp>
+      <p:sp>
+        <p:nvSpPr>
+          <p:cNvPr id="6" name="commentary panel"/>
+          <p:cNvSpPr/>
+          <p:nvPr/>
+        </p:nvSpPr>
+        <p:spPr>
+          <a:xfrm>
+            <a:off x="6263640" y="1463040"/>
+            <a:ext cx="2377440" cy="3154680"/>
+          </a:xfrm>
+          <a:prstGeom prst="rect">
+            <a:avLst/>
+          </a:prstGeom>
+          <a:solidFill>
+            <a:srgbClr val="E8F9F8"/>
+          </a:solidFill>
+          <a:ln/>
+        </p:spPr>
+      </p:sp>
+      <p:sp>
+        <p:nvSpPr>
+          <p:cNvPr id="7" name="Text 4"/>
+          <p:cNvSpPr txBox="1"/>
+          <p:nvPr/>
+        </p:nvSpPr>
+        <p:spPr>
+          <a:xfrm>
+            <a:off x="6446520" y="1627632"/>
+            <a:ext cx="2011680" cy="228600"/>
+          </a:xfrm>
+          <a:prstGeom prst="rect">
+            <a:avLst/>
+          </a:prstGeom>
+          <a:noFill/>
+          <a:ln/>
+        </p:spPr>
+        <p:txBody>
+          <a:bodyPr wrap="square" lIns="0" tIns="0" rIns="0" bIns="0" rtlCol="0" anchor="ctr"/>
+          <a:lstStyle/>
+          <a:p>
+            <a:pPr indent="0" marL="0">
+              <a:buNone/>
+            </a:pPr>
+            <a:r>
+              <a:rPr lang="en-US" sz="900" b="1" spc="180" kern="0" dirty="0">
+                <a:solidFill>
+                  <a:srgbClr val="005358"/>
+                </a:solidFill>
+              </a:rPr>
+              <a:t>COMMENTARY</a:t>
+            </a:r>
+            <a:endParaRPr lang="en-US" sz="900" dirty="0"/>
+          </a:p>
+        </p:txBody>
+      </p:sp>
+      <p:sp>
+        <p:nvSpPr>
+          <p:cNvPr id="8" name="Text 5"/>
+          <p:cNvSpPr txBox="1"/>
+          <p:nvPr/>
+        </p:nvSpPr>
+        <p:spPr>
+          <a:xfrm>
+            <a:off x="6446520" y="1901952"/>
+            <a:ext cx="2011680" cy="2551176"/>
+          </a:xfrm>
+          <a:prstGeom prst="rect">
+            <a:avLst/>
+          </a:prstGeom>
+          <a:noFill/>
+          <a:ln/>
+        </p:spPr>
+        <p:txBody>
+          <a:bodyPr wrap="square" lIns="0" tIns="0" rIns="0" bIns="0" rtlCol="0" anchor="t">
+            <a:normAutofit/>
+          </a:bodyPr>
+          <a:lstStyle/>
+          <a:p>
+            <a:pPr marL="342900" indent="-342900">
+              <a:lnSpc>
+                <a:spcPts val="1300"/>
+              </a:lnSpc>
+              <a:spcAft>
+                <a:spcPts val="500"/>
+              </a:spcAft>
+              <a:buSzPct val="100000"/>
+              <a:buChar char="•"/>
+            </a:pPr>
+            <a:r>
+              <a:rPr lang="en-US" sz="950" dirty="0">
+                <a:solidFill>
+                  <a:srgbClr val="3A4453"/>
+                </a:solidFill>
+              </a:rPr>
+              <a:t>Aware Super owes 277,395 on its own, 33% of everything owed to us.</a:t>
+            </a:r>
+            <a:endParaRPr lang="en-US" sz="950" dirty="0"/>
+          </a:p>
+          <a:p>
+            <a:pPr marL="342900" indent="-342900">
+              <a:lnSpc>
+                <a:spcPts val="1300"/>
+              </a:lnSpc>
+              <a:spcAft>
+                <a:spcPts val="500"/>
+              </a:spcAft>
+              <a:buSzPct val="100000"/>
+              <a:buChar char="•"/>
+            </a:pPr>
+            <a:r>
+              <a:rPr lang="en-US" sz="950" dirty="0">
+                <a:solidFill>
+                  <a:srgbClr val="3A4453"/>
+                </a:solidFill>
+              </a:rPr>
+              <a:t>With Deloitte Services P/L for Deloitte Services Trust at 131,575, two customers hold 49% of the book.</a:t>
+            </a:r>
+            <a:endParaRPr lang="en-US" sz="950" dirty="0"/>
+          </a:p>
+          <a:p>
+            <a:pPr marL="342900" indent="-342900">
+              <a:lnSpc>
+                <a:spcPts val="1300"/>
+              </a:lnSpc>
+              <a:spcAft>
+                <a:spcPts val="500"/>
+              </a:spcAft>
+              <a:buSzPct val="100000"/>
+              <a:buChar char="•"/>
+            </a:pPr>
+            <a:r>
+              <a:rPr lang="en-US" sz="950" dirty="0">
+                <a:solidFill>
+                  <a:srgbClr val="3A4453"/>
+                </a:solidFill>
+              </a:rPr>
+              <a:t>29% of what we are owed is already late, 244,538.</a:t>
+            </a:r>
+            <a:endParaRPr lang="en-US" sz="950" dirty="0"/>
+          </a:p>
+          <a:p>
+            <a:pPr marL="342900" indent="-342900">
+              <a:lnSpc>
+                <a:spcPts val="1300"/>
+              </a:lnSpc>
+              <a:spcAft>
+                <a:spcPts val="500"/>
+              </a:spcAft>
+              <a:buSzPct val="100000"/>
+              <a:buChar char="•"/>
+            </a:pPr>
+            <a:r>
+              <a:rPr lang="en-US" sz="950" dirty="0">
+                <a:solidFill>
+                  <a:srgbClr val="3A4453"/>
+                </a:solidFill>
+              </a:rPr>
+              <a:t>Chase those two first. Everything below them is small by comparison.</a:t>
+            </a:r>
+            <a:endParaRPr lang="en-US" sz="950" dirty="0"/>
+          </a:p>
+          <a:p>
+            <a:pPr marL="342900" indent="-342900">
+              <a:lnSpc>
+                <a:spcPts val="1300"/>
+              </a:lnSpc>
+              <a:spcAft>
+                <a:spcPts val="500"/>
+              </a:spcAft>
+              <a:buSzPct val="100000"/>
+              <a:buChar char="•"/>
+            </a:pPr>
+            <a:r>
+              <a:rPr lang="en-US" sz="950" dirty="0">
+                <a:solidFill>
+                  <a:srgbClr val="3A4453"/>
+                </a:solidFill>
+              </a:rPr>
+              <a:t>A general collections push is not the answer. Two phone calls are.</a:t>
+            </a:r>
+            <a:endParaRPr lang="en-US" sz="950" dirty="0"/>
+          </a:p>
+        </p:txBody>
+      </p:sp>
+      <p:sp>
+        <p:nvSpPr>
+          <p:cNvPr id="25" name="Slide Number Placeholder 0"/>
+          <p:cNvSpPr>
+            <a:spLocks noGrp="1"/>
+          </p:cNvSpPr>
+          <p:nvPr>
+            <p:ph type="sldNum" sz="quarter" idx="4294967295"/>
+          </p:nvPr>
+        </p:nvSpPr>
+        <p:spPr>
+          <a:xfrm>
+            <a:off x="8092440" y="4736592"/>
+            <a:ext cx="548640" cy="228600"/>
+          </a:xfrm>
+          <a:prstGeom prst="rect">
+            <a:avLst/>
+          </a:prstGeom>
+          <a:extLst>
+            <a:ext uri="{C572A759-6A51-4108-AA02-DFA0A04FC94B}">
+              <ma14:wrappingTextBoxFlag xmlns:ma14="http://schemas.microsoft.com/office/mac/drawingml/2011/main" val="0"/>
+            </a:ext>
+          </a:extLst>
+        </p:spPr>
+        <p:txBody>
+          <a:bodyPr/>
+          <a:lstStyle>
+            <a:lvl1pPr>
+              <a:defRPr sz="800">
+                <a:solidFill>
+                  <a:srgbClr val="6B7585"/>
+                </a:solidFill>
+              </a:defRPr>
+            </a:lvl1pPr>
+          </a:lstStyle>
+          <a:p>
+            <a:pPr algn="r"/>
+            <a:fld id="{F7021451-1387-4CA6-816F-3879F97B5CBC}" type="slidenum">
+              <a:rPr b="0" lang="en-US"/>
+              <a:t>22</a:t>
+            </a:fld>
+            <a:endParaRPr lang="en-US"/>
+          </a:p>
+        </p:txBody>
+      </p:sp>
+    </p:spTree>
+  </p:cSld>
+  <p:clrMapOvr>
+    <a:masterClrMapping/>
+  </p:clrMapOvr>
+</p:sld>
+</file>
+
+<file path=ppt/slides/slide23.xml><?xml version="1.0" encoding="utf-8"?>
+<p:sld xmlns:a="http://schemas.openxmlformats.org/drawingml/2006/main" xmlns:r="http://schemas.openxmlformats.org/officeDocument/2006/relationships" xmlns:p="http://schemas.openxmlformats.org/presentationml/2006/main">
+  <p:cSld name="Slide 23">
+    <p:spTree>
+      <p:nvGrpSpPr>
+        <p:cNvPr id="1" name=""/>
+        <p:cNvGrpSpPr/>
+        <p:nvPr/>
+      </p:nvGrpSpPr>
+      <p:grpSpPr>
+        <a:xfrm>
+          <a:off x="0" y="0"/>
+          <a:ext cx="0" cy="0"/>
+          <a:chOff x="0" y="0"/>
+          <a:chExt cx="0" cy="0"/>
+        </a:xfrm>
+      </p:grpSpPr>
+      <p:sp>
+        <p:nvSpPr>
+          <p:cNvPr id="2" name="divider circle"/>
+          <p:cNvSpPr/>
+          <p:nvPr/>
+        </p:nvSpPr>
+        <p:spPr>
+          <a:xfrm>
+            <a:off x="6446520" y="1600200"/>
+            <a:ext cx="2651760" cy="2651760"/>
+          </a:xfrm>
+          <a:prstGeom prst="ellipse">
+            <a:avLst/>
+          </a:prstGeom>
+          <a:solidFill>
+            <a:srgbClr val="6D71FF">
+              <a:alpha val="55000"/>
+            </a:srgbClr>
+          </a:solidFill>
+          <a:ln/>
+        </p:spPr>
+      </p:sp>
+      <p:sp>
+        <p:nvSpPr>
+          <p:cNvPr id="3" name="Shape 1"/>
+          <p:cNvSpPr/>
+          <p:nvPr/>
+        </p:nvSpPr>
+        <p:spPr>
+          <a:xfrm>
+            <a:off x="502920" y="1874520"/>
+            <a:ext cx="868680" cy="868680"/>
+          </a:xfrm>
+          <a:prstGeom prst="rect">
+            <a:avLst/>
+          </a:prstGeom>
+          <a:solidFill>
+            <a:srgbClr val="3FD0C9"/>
+          </a:solidFill>
+          <a:ln/>
+        </p:spPr>
+      </p:sp>
+      <p:sp>
+        <p:nvSpPr>
+          <p:cNvPr id="4" name="Text 2"/>
+          <p:cNvSpPr txBox="1"/>
+          <p:nvPr/>
+        </p:nvSpPr>
+        <p:spPr>
+          <a:xfrm>
+            <a:off x="502920" y="1874520"/>
+            <a:ext cx="868680" cy="868680"/>
+          </a:xfrm>
+          <a:prstGeom prst="rect">
+            <a:avLst/>
+          </a:prstGeom>
+          <a:noFill/>
+          <a:ln/>
+        </p:spPr>
+        <p:txBody>
+          <a:bodyPr wrap="square" lIns="0" tIns="0" rIns="0" bIns="0" rtlCol="0" anchor="ctr"/>
+          <a:lstStyle/>
+          <a:p>
+            <a:pPr algn="ctr" indent="0" marL="0">
+              <a:buNone/>
+            </a:pPr>
+            <a:r>
+              <a:rPr lang="en-US" sz="2600" b="1" dirty="0">
+                <a:solidFill>
+                  <a:srgbClr val="242C39"/>
+                </a:solidFill>
+              </a:rPr>
+              <a:t>04</a:t>
+            </a:r>
+            <a:endParaRPr lang="en-US" sz="2600" dirty="0"/>
+          </a:p>
+        </p:txBody>
+      </p:sp>
+      <p:sp>
+        <p:nvSpPr>
+          <p:cNvPr id="5" name="Text 3"/>
+          <p:cNvSpPr txBox="1"/>
+          <p:nvPr/>
+        </p:nvSpPr>
+        <p:spPr>
+          <a:xfrm>
+            <a:off x="502920" y="411480"/>
+            <a:ext cx="3657600" cy="274320"/>
+          </a:xfrm>
+          <a:prstGeom prst="rect">
+            <a:avLst/>
+          </a:prstGeom>
+          <a:noFill/>
+          <a:ln/>
+        </p:spPr>
+        <p:txBody>
+          <a:bodyPr wrap="square" lIns="0" tIns="0" rIns="0" bIns="0" rtlCol="0" anchor="ctr"/>
+          <a:lstStyle/>
+          <a:p>
+            <a:pPr indent="0" marL="0">
+              <a:buNone/>
+            </a:pPr>
+            <a:r>
+              <a:rPr lang="en-US" sz="950" b="1" spc="220" kern="0" dirty="0">
+                <a:solidFill>
+                  <a:srgbClr val="3FD0C9"/>
+                </a:solidFill>
+              </a:rPr>
+              <a:t>SECTION</a:t>
+            </a:r>
+            <a:endParaRPr lang="en-US" sz="950" dirty="0"/>
+          </a:p>
+        </p:txBody>
+      </p:sp>
+      <p:sp>
+        <p:nvSpPr>
+          <p:cNvPr id="6" name="Text 4"/>
+          <p:cNvSpPr txBox="1"/>
+          <p:nvPr/>
+        </p:nvSpPr>
+        <p:spPr>
+          <a:xfrm>
+            <a:off x="1600200" y="1874520"/>
+            <a:ext cx="5943600" cy="502920"/>
+          </a:xfrm>
+          <a:prstGeom prst="rect">
+            <a:avLst/>
+          </a:prstGeom>
+          <a:noFill/>
+          <a:ln/>
+        </p:spPr>
+        <p:txBody>
+          <a:bodyPr wrap="square" lIns="0" tIns="0" rIns="0" bIns="0" rtlCol="0" anchor="ctr"/>
+          <a:lstStyle/>
+          <a:p>
+            <a:pPr indent="0" marL="0">
+              <a:buNone/>
+            </a:pPr>
+            <a:r>
+              <a:rPr lang="en-US" sz="2800" b="1" dirty="0">
+                <a:solidFill>
+                  <a:srgbClr val="FFFFFF"/>
+                </a:solidFill>
+              </a:rPr>
+              <a:t>People and utilisation</a:t>
+            </a:r>
+            <a:endParaRPr lang="en-US" sz="2800" dirty="0"/>
+          </a:p>
+        </p:txBody>
+      </p:sp>
+      <p:sp>
+        <p:nvSpPr>
+          <p:cNvPr id="7" name="Text 5"/>
+          <p:cNvSpPr txBox="1"/>
+          <p:nvPr/>
+        </p:nvSpPr>
+        <p:spPr>
+          <a:xfrm>
+            <a:off x="1600200" y="2395728"/>
+            <a:ext cx="5943600" cy="347472"/>
+          </a:xfrm>
+          <a:prstGeom prst="rect">
+            <a:avLst/>
+          </a:prstGeom>
+          <a:noFill/>
+          <a:ln/>
+        </p:spPr>
+        <p:txBody>
+          <a:bodyPr wrap="square" lIns="0" tIns="0" rIns="0" bIns="0" rtlCol="0" anchor="ctr"/>
+          <a:lstStyle/>
+          <a:p>
+            <a:pPr indent="0" marL="0">
+              <a:buNone/>
+            </a:pPr>
+            <a:r>
+              <a:rPr lang="en-US" sz="1200" dirty="0">
+                <a:solidFill>
+                  <a:srgbClr val="C9CED6"/>
+                </a:solidFill>
+              </a:rPr>
+              <a:t>Chargeable hours and the profit they produce</a:t>
+            </a:r>
+            <a:endParaRPr lang="en-US" sz="1200" dirty="0"/>
+          </a:p>
+        </p:txBody>
+      </p:sp>
+    </p:spTree>
+  </p:cSld>
+  <p:clrMapOvr>
+    <a:masterClrMapping/>
+  </p:clrMapOvr>
+</p:sld>
+</file>
+
+<file path=ppt/slides/slide24.xml><?xml version="1.0" encoding="utf-8"?>
+<p:sld xmlns:a="http://schemas.openxmlformats.org/drawingml/2006/main" xmlns:r="http://schemas.openxmlformats.org/officeDocument/2006/relationships" xmlns:p="http://schemas.openxmlformats.org/presentationml/2006/main">
+  <p:cSld name="Slide 24">
+    <p:spTree>
+      <p:nvGrpSpPr>
+        <p:cNvPr id="1" name=""/>
+        <p:cNvGrpSpPr/>
+        <p:nvPr/>
+      </p:nvGrpSpPr>
+      <p:grpSpPr>
+        <a:xfrm>
+          <a:off x="0" y="0"/>
+          <a:ext cx="0" cy="0"/>
+          <a:chOff x="0" y="0"/>
+          <a:chExt cx="0" cy="0"/>
+        </a:xfrm>
+      </p:grpSpPr>
+      <p:sp>
+        <p:nvSpPr>
+          <p:cNvPr id="2" name="Text 0"/>
+          <p:cNvSpPr txBox="1"/>
+          <p:nvPr/>
+        </p:nvSpPr>
+        <p:spPr>
+          <a:xfrm>
+            <a:off x="502920" y="365760"/>
+            <a:ext cx="6400800" cy="274320"/>
+          </a:xfrm>
+          <a:prstGeom prst="rect">
+            <a:avLst/>
+          </a:prstGeom>
+          <a:noFill/>
+          <a:ln/>
+        </p:spPr>
+        <p:txBody>
+          <a:bodyPr wrap="square" lIns="0" tIns="0" rIns="0" bIns="0" rtlCol="0" anchor="ctr"/>
+          <a:lstStyle/>
+          <a:p>
+            <a:pPr indent="0" marL="0">
+              <a:buNone/>
+            </a:pPr>
+            <a:r>
+              <a:rPr lang="en-US" sz="950" b="1" spc="220" kern="0" dirty="0">
+                <a:solidFill>
+                  <a:srgbClr val="122B82"/>
+                </a:solidFill>
+              </a:rPr>
+              <a:t>PEOPLE AND UTILISATION</a:t>
+            </a:r>
+            <a:endParaRPr lang="en-US" sz="950" dirty="0"/>
+          </a:p>
+        </p:txBody>
+      </p:sp>
+      <p:sp>
+        <p:nvSpPr>
+          <p:cNvPr id="3" name="Text 1"/>
+          <p:cNvSpPr txBox="1"/>
+          <p:nvPr/>
+        </p:nvSpPr>
+        <p:spPr>
+          <a:xfrm>
+            <a:off x="502920" y="640080"/>
+            <a:ext cx="7315200" cy="685800"/>
+          </a:xfrm>
+          <a:prstGeom prst="rect">
+            <a:avLst/>
+          </a:prstGeom>
+          <a:noFill/>
+          <a:ln/>
+        </p:spPr>
+        <p:txBody>
+          <a:bodyPr wrap="square" lIns="0" tIns="0" rIns="0" bIns="0" rtlCol="0" anchor="ctr"/>
+          <a:lstStyle/>
+          <a:p>
+            <a:pPr indent="0" marL="0">
+              <a:buNone/>
+            </a:pPr>
+            <a:r>
+              <a:rPr lang="en-US" sz="2700" b="1" dirty="0">
+                <a:solidFill>
+                  <a:srgbClr val="242C39"/>
+                </a:solidFill>
+              </a:rPr>
+              <a:t>How each department spent its hours, Sep 26</a:t>
+            </a:r>
+            <a:endParaRPr lang="en-US" sz="2700" dirty="0"/>
+          </a:p>
+        </p:txBody>
+      </p:sp>
+      <p:pic>
+        <p:nvPicPr>
+          <p:cNvPr id="4" name="snip util_chart" descr="/home/user/Claude/deck/snips/util_chart.png">    </p:cNvPr>
+          <p:cNvPicPr>
+            <a:picLocks noChangeAspect="1"/>
+          </p:cNvPicPr>
+          <p:nvPr/>
+        </p:nvPicPr>
+        <p:blipFill>
+          <a:blip r:embed="rId1"/>
+          <a:stretch>
+            <a:fillRect/>
+          </a:stretch>
+        </p:blipFill>
+        <p:spPr>
+          <a:xfrm>
+            <a:off x="502920" y="1444752"/>
+            <a:ext cx="5577840" cy="2613700"/>
+          </a:xfrm>
+          <a:prstGeom prst="rect">
+            <a:avLst/>
+          </a:prstGeom>
+        </p:spPr>
+      </p:pic>
+      <p:sp>
+        <p:nvSpPr>
+          <p:cNvPr id="5" name="Text 2"/>
+          <p:cNvSpPr txBox="1"/>
+          <p:nvPr/>
+        </p:nvSpPr>
+        <p:spPr>
+          <a:xfrm>
+            <a:off x="502920" y="4131604"/>
+            <a:ext cx="5577840" cy="237744"/>
+          </a:xfrm>
+          <a:prstGeom prst="rect">
+            <a:avLst/>
+          </a:prstGeom>
+          <a:noFill/>
+          <a:ln/>
+        </p:spPr>
+        <p:txBody>
+          <a:bodyPr wrap="square" lIns="0" tIns="0" rIns="0" bIns="0" rtlCol="0" anchor="t"/>
+          <a:lstStyle/>
+          <a:p>
+            <a:pPr indent="0" marL="0">
+              <a:buNone/>
+            </a:pPr>
+            <a:r>
+              <a:rPr lang="en-US" sz="800" i="1" dirty="0">
+                <a:solidFill>
+                  <a:srgbClr val="6B7585"/>
+                </a:solidFill>
+              </a:rPr>
+              <a:t>Snipped from the Financial Controller Pack, Utilisation tab, hours by department, each bar scaled to its own total.</a:t>
+            </a:r>
+            <a:endParaRPr lang="en-US" sz="800" dirty="0"/>
+          </a:p>
+        </p:txBody>
+      </p:sp>
+      <p:sp>
+        <p:nvSpPr>
+          <p:cNvPr id="6" name="commentary panel"/>
+          <p:cNvSpPr/>
+          <p:nvPr/>
+        </p:nvSpPr>
+        <p:spPr>
+          <a:xfrm>
+            <a:off x="6263640" y="1463040"/>
+            <a:ext cx="2377440" cy="3154680"/>
+          </a:xfrm>
+          <a:prstGeom prst="rect">
+            <a:avLst/>
+          </a:prstGeom>
+          <a:solidFill>
+            <a:srgbClr val="E8F9F8"/>
+          </a:solidFill>
+          <a:ln/>
+        </p:spPr>
+      </p:sp>
+      <p:sp>
+        <p:nvSpPr>
+          <p:cNvPr id="7" name="Text 4"/>
+          <p:cNvSpPr txBox="1"/>
+          <p:nvPr/>
+        </p:nvSpPr>
+        <p:spPr>
+          <a:xfrm>
+            <a:off x="6446520" y="1627632"/>
+            <a:ext cx="2011680" cy="228600"/>
+          </a:xfrm>
+          <a:prstGeom prst="rect">
+            <a:avLst/>
+          </a:prstGeom>
+          <a:noFill/>
+          <a:ln/>
+        </p:spPr>
+        <p:txBody>
+          <a:bodyPr wrap="square" lIns="0" tIns="0" rIns="0" bIns="0" rtlCol="0" anchor="ctr"/>
+          <a:lstStyle/>
+          <a:p>
+            <a:pPr indent="0" marL="0">
+              <a:buNone/>
+            </a:pPr>
+            <a:r>
+              <a:rPr lang="en-US" sz="900" b="1" spc="180" kern="0" dirty="0">
+                <a:solidFill>
+                  <a:srgbClr val="005358"/>
+                </a:solidFill>
+              </a:rPr>
+              <a:t>COMMENTARY</a:t>
+            </a:r>
+            <a:endParaRPr lang="en-US" sz="900" dirty="0"/>
+          </a:p>
+        </p:txBody>
+      </p:sp>
+      <p:sp>
+        <p:nvSpPr>
+          <p:cNvPr id="8" name="Text 5"/>
+          <p:cNvSpPr txBox="1"/>
+          <p:nvPr/>
+        </p:nvSpPr>
+        <p:spPr>
+          <a:xfrm>
+            <a:off x="6446520" y="1901952"/>
+            <a:ext cx="2011680" cy="2551176"/>
+          </a:xfrm>
+          <a:prstGeom prst="rect">
+            <a:avLst/>
+          </a:prstGeom>
+          <a:noFill/>
+          <a:ln/>
+        </p:spPr>
+        <p:txBody>
+          <a:bodyPr wrap="square" lIns="0" tIns="0" rIns="0" bIns="0" rtlCol="0" anchor="t">
+            <a:normAutofit/>
+          </a:bodyPr>
+          <a:lstStyle/>
+          <a:p>
+            <a:pPr marL="342900" indent="-342900">
+              <a:lnSpc>
+                <a:spcPts val="1150"/>
+              </a:lnSpc>
+              <a:spcAft>
+                <a:spcPts val="500"/>
+              </a:spcAft>
+              <a:buSzPct val="100000"/>
+              <a:buChar char="•"/>
+            </a:pPr>
+            <a:r>
+              <a:rPr lang="en-US" sz="900" dirty="0">
+                <a:solidFill>
+                  <a:srgbClr val="3A4453"/>
+                </a:solidFill>
+              </a:rPr>
+              <a:t>Each bar is scaled to that department's own hours, so you can compare the mix. Support works about a hundred times the hours Integration does.</a:t>
+            </a:r>
+            <a:endParaRPr lang="en-US" sz="900" dirty="0"/>
+          </a:p>
+          <a:p>
+            <a:pPr marL="342900" indent="-342900">
+              <a:lnSpc>
+                <a:spcPts val="1150"/>
+              </a:lnSpc>
+              <a:spcAft>
+                <a:spcPts val="500"/>
+              </a:spcAft>
+              <a:buSzPct val="100000"/>
+              <a:buChar char="•"/>
+            </a:pPr>
+            <a:r>
+              <a:rPr lang="en-US" sz="900" dirty="0">
+                <a:solidFill>
+                  <a:srgbClr val="3A4453"/>
+                </a:solidFill>
+              </a:rPr>
+              <a:t>Support shows 11 hours not on jobs out of 2,143 worked. That is not credible.</a:t>
+            </a:r>
+            <a:endParaRPr lang="en-US" sz="900" dirty="0"/>
+          </a:p>
+          <a:p>
+            <a:pPr marL="342900" indent="-342900">
+              <a:lnSpc>
+                <a:spcPts val="1150"/>
+              </a:lnSpc>
+              <a:spcAft>
+                <a:spcPts val="500"/>
+              </a:spcAft>
+              <a:buSzPct val="100000"/>
+              <a:buChar char="•"/>
+            </a:pPr>
+            <a:r>
+              <a:rPr lang="en-US" sz="900" dirty="0">
+                <a:solidFill>
+                  <a:srgbClr val="3A4453"/>
+                </a:solidFill>
+              </a:rPr>
+              <a:t>Events put 333 hours into leave and only 241 onto jobs. The people are there, the work is not.</a:t>
+            </a:r>
+            <a:endParaRPr lang="en-US" sz="900" dirty="0"/>
+          </a:p>
+          <a:p>
+            <a:pPr marL="342900" indent="-342900">
+              <a:lnSpc>
+                <a:spcPts val="1150"/>
+              </a:lnSpc>
+              <a:spcAft>
+                <a:spcPts val="500"/>
+              </a:spcAft>
+              <a:buSzPct val="100000"/>
+              <a:buChar char="•"/>
+            </a:pPr>
+            <a:r>
+              <a:rPr lang="en-US" sz="900" dirty="0">
+                <a:solidFill>
+                  <a:srgbClr val="3A4453"/>
+                </a:solidFill>
+              </a:rPr>
+              <a:t>Consulting put 84 hours into work we cannot bill against 31 we can.</a:t>
+            </a:r>
+            <a:endParaRPr lang="en-US" sz="900" dirty="0"/>
+          </a:p>
+          <a:p>
+            <a:pPr marL="342900" indent="-342900">
+              <a:lnSpc>
+                <a:spcPts val="1150"/>
+              </a:lnSpc>
+              <a:spcAft>
+                <a:spcPts val="500"/>
+              </a:spcAft>
+              <a:buSzPct val="100000"/>
+              <a:buChar char="•"/>
+            </a:pPr>
+            <a:r>
+              <a:rPr lang="en-US" sz="900" dirty="0">
+                <a:solidFill>
+                  <a:srgbClr val="3A4453"/>
+                </a:solidFill>
+              </a:rPr>
+              <a:t>We pay for every hour. We only bill the ones on jobs. The grey and light teal are the gap.</a:t>
+            </a:r>
+            <a:endParaRPr lang="en-US" sz="900" dirty="0"/>
+          </a:p>
+        </p:txBody>
+      </p:sp>
+      <p:sp>
+        <p:nvSpPr>
+          <p:cNvPr id="25" name="Slide Number Placeholder 0"/>
+          <p:cNvSpPr>
+            <a:spLocks noGrp="1"/>
+          </p:cNvSpPr>
+          <p:nvPr>
+            <p:ph type="sldNum" sz="quarter" idx="4294967295"/>
+          </p:nvPr>
+        </p:nvSpPr>
+        <p:spPr>
+          <a:xfrm>
+            <a:off x="8092440" y="4736592"/>
+            <a:ext cx="548640" cy="228600"/>
+          </a:xfrm>
+          <a:prstGeom prst="rect">
+            <a:avLst/>
+          </a:prstGeom>
+          <a:extLst>
+            <a:ext uri="{C572A759-6A51-4108-AA02-DFA0A04FC94B}">
+              <ma14:wrappingTextBoxFlag xmlns:ma14="http://schemas.microsoft.com/office/mac/drawingml/2011/main" val="0"/>
+            </a:ext>
+          </a:extLst>
+        </p:spPr>
+        <p:txBody>
+          <a:bodyPr/>
+          <a:lstStyle>
+            <a:lvl1pPr>
+              <a:defRPr sz="800">
+                <a:solidFill>
+                  <a:srgbClr val="6B7585"/>
+                </a:solidFill>
+              </a:defRPr>
+            </a:lvl1pPr>
+          </a:lstStyle>
+          <a:p>
+            <a:pPr algn="r"/>
+            <a:fld id="{F7021451-1387-4CA6-816F-3879F97B5CBC}" type="slidenum">
+              <a:rPr b="0" lang="en-US"/>
+              <a:t>24</a:t>
+            </a:fld>
+            <a:endParaRPr lang="en-US"/>
+          </a:p>
+        </p:txBody>
+      </p:sp>
+    </p:spTree>
+  </p:cSld>
+  <p:clrMapOvr>
+    <a:masterClrMapping/>
+  </p:clrMapOvr>
+</p:sld>
+</file>
+
+<file path=ppt/slides/slide25.xml><?xml version="1.0" encoding="utf-8"?>
+<p:sld xmlns:a="http://schemas.openxmlformats.org/drawingml/2006/main" xmlns:r="http://schemas.openxmlformats.org/officeDocument/2006/relationships" xmlns:p="http://schemas.openxmlformats.org/presentationml/2006/main">
+  <p:cSld name="Slide 25">
+    <p:spTree>
+      <p:nvGrpSpPr>
+        <p:cNvPr id="1" name=""/>
+        <p:cNvGrpSpPr/>
+        <p:nvPr/>
+      </p:nvGrpSpPr>
+      <p:grpSpPr>
+        <a:xfrm>
+          <a:off x="0" y="0"/>
+          <a:ext cx="0" cy="0"/>
+          <a:chOff x="0" y="0"/>
+          <a:chExt cx="0" cy="0"/>
+        </a:xfrm>
+      </p:grpSpPr>
+      <p:sp>
+        <p:nvSpPr>
+          <p:cNvPr id="2" name="divider circle"/>
+          <p:cNvSpPr/>
+          <p:nvPr/>
+        </p:nvSpPr>
+        <p:spPr>
+          <a:xfrm>
+            <a:off x="6446520" y="1600200"/>
+            <a:ext cx="2651760" cy="2651760"/>
+          </a:xfrm>
+          <a:prstGeom prst="ellipse">
+            <a:avLst/>
+          </a:prstGeom>
+          <a:solidFill>
+            <a:srgbClr val="6D71FF">
+              <a:alpha val="55000"/>
+            </a:srgbClr>
+          </a:solidFill>
+          <a:ln/>
+        </p:spPr>
+      </p:sp>
+      <p:sp>
+        <p:nvSpPr>
+          <p:cNvPr id="3" name="Shape 1"/>
+          <p:cNvSpPr/>
+          <p:nvPr/>
+        </p:nvSpPr>
+        <p:spPr>
+          <a:xfrm>
+            <a:off x="502920" y="1874520"/>
+            <a:ext cx="868680" cy="868680"/>
+          </a:xfrm>
+          <a:prstGeom prst="rect">
+            <a:avLst/>
+          </a:prstGeom>
+          <a:solidFill>
+            <a:srgbClr val="3FD0C9"/>
+          </a:solidFill>
+          <a:ln/>
+        </p:spPr>
+      </p:sp>
+      <p:sp>
+        <p:nvSpPr>
+          <p:cNvPr id="4" name="Text 2"/>
+          <p:cNvSpPr txBox="1"/>
+          <p:nvPr/>
+        </p:nvSpPr>
+        <p:spPr>
+          <a:xfrm>
+            <a:off x="502920" y="1874520"/>
+            <a:ext cx="868680" cy="868680"/>
+          </a:xfrm>
+          <a:prstGeom prst="rect">
+            <a:avLst/>
+          </a:prstGeom>
+          <a:noFill/>
+          <a:ln/>
+        </p:spPr>
+        <p:txBody>
+          <a:bodyPr wrap="square" lIns="0" tIns="0" rIns="0" bIns="0" rtlCol="0" anchor="ctr"/>
+          <a:lstStyle/>
+          <a:p>
+            <a:pPr algn="ctr" indent="0" marL="0">
+              <a:buNone/>
+            </a:pPr>
+            <a:r>
+              <a:rPr lang="en-US" sz="2600" b="1" dirty="0">
+                <a:solidFill>
+                  <a:srgbClr val="242C39"/>
+                </a:solidFill>
+              </a:rPr>
+              <a:t>05</a:t>
+            </a:r>
+            <a:endParaRPr lang="en-US" sz="2600" dirty="0"/>
+          </a:p>
+        </p:txBody>
+      </p:sp>
+      <p:sp>
+        <p:nvSpPr>
+          <p:cNvPr id="5" name="Text 3"/>
+          <p:cNvSpPr txBox="1"/>
+          <p:nvPr/>
+        </p:nvSpPr>
+        <p:spPr>
+          <a:xfrm>
+            <a:off x="502920" y="411480"/>
+            <a:ext cx="3657600" cy="274320"/>
+          </a:xfrm>
+          <a:prstGeom prst="rect">
+            <a:avLst/>
+          </a:prstGeom>
+          <a:noFill/>
+          <a:ln/>
+        </p:spPr>
+        <p:txBody>
+          <a:bodyPr wrap="square" lIns="0" tIns="0" rIns="0" bIns="0" rtlCol="0" anchor="ctr"/>
+          <a:lstStyle/>
+          <a:p>
+            <a:pPr indent="0" marL="0">
+              <a:buNone/>
+            </a:pPr>
+            <a:r>
+              <a:rPr lang="en-US" sz="950" b="1" spc="220" kern="0" dirty="0">
+                <a:solidFill>
+                  <a:srgbClr val="3FD0C9"/>
+                </a:solidFill>
+              </a:rPr>
+              <a:t>SECTION</a:t>
+            </a:r>
+            <a:endParaRPr lang="en-US" sz="950" dirty="0"/>
+          </a:p>
+        </p:txBody>
+      </p:sp>
+      <p:sp>
+        <p:nvSpPr>
+          <p:cNvPr id="6" name="Text 4"/>
+          <p:cNvSpPr txBox="1"/>
+          <p:nvPr/>
+        </p:nvSpPr>
+        <p:spPr>
+          <a:xfrm>
+            <a:off x="1600200" y="1874520"/>
+            <a:ext cx="5943600" cy="502920"/>
+          </a:xfrm>
+          <a:prstGeom prst="rect">
+            <a:avLst/>
+          </a:prstGeom>
+          <a:noFill/>
+          <a:ln/>
+        </p:spPr>
+        <p:txBody>
+          <a:bodyPr wrap="square" lIns="0" tIns="0" rIns="0" bIns="0" rtlCol="0" anchor="ctr"/>
+          <a:lstStyle/>
+          <a:p>
+            <a:pPr indent="0" marL="0">
+              <a:buNone/>
+            </a:pPr>
+            <a:r>
+              <a:rPr lang="en-US" sz="2800" b="1" dirty="0">
+                <a:solidFill>
+                  <a:srgbClr val="FFFFFF"/>
+                </a:solidFill>
+              </a:rPr>
+              <a:t>Budget and outlook</a:t>
+            </a:r>
+            <a:endParaRPr lang="en-US" sz="2800" dirty="0"/>
+          </a:p>
+        </p:txBody>
+      </p:sp>
+      <p:sp>
+        <p:nvSpPr>
+          <p:cNvPr id="7" name="Text 5"/>
+          <p:cNvSpPr txBox="1"/>
+          <p:nvPr/>
+        </p:nvSpPr>
+        <p:spPr>
+          <a:xfrm>
+            <a:off x="1600200" y="2395728"/>
+            <a:ext cx="5943600" cy="347472"/>
+          </a:xfrm>
+          <a:prstGeom prst="rect">
+            <a:avLst/>
+          </a:prstGeom>
+          <a:noFill/>
+          <a:ln/>
+        </p:spPr>
+        <p:txBody>
+          <a:bodyPr wrap="square" lIns="0" tIns="0" rIns="0" bIns="0" rtlCol="0" anchor="ctr"/>
+          <a:lstStyle/>
+          <a:p>
+            <a:pPr indent="0" marL="0">
+              <a:buNone/>
+            </a:pPr>
+            <a:r>
+              <a:rPr lang="en-US" sz="1200" dirty="0">
+                <a:solidFill>
+                  <a:srgbClr val="C9CED6"/>
+                </a:solidFill>
+              </a:rPr>
+              <a:t>What the rest of the year looks like and what we change</a:t>
+            </a:r>
+            <a:endParaRPr lang="en-US" sz="1200" dirty="0"/>
+          </a:p>
+        </p:txBody>
+      </p:sp>
+    </p:spTree>
+  </p:cSld>
+  <p:clrMapOvr>
+    <a:masterClrMapping/>
+  </p:clrMapOvr>
+</p:sld>
+</file>
+
+<file path=ppt/slides/slide26.xml><?xml version="1.0" encoding="utf-8"?>
+<p:sld xmlns:a="http://schemas.openxmlformats.org/drawingml/2006/main" xmlns:r="http://schemas.openxmlformats.org/officeDocument/2006/relationships" xmlns:p="http://schemas.openxmlformats.org/presentationml/2006/main">
+  <p:cSld name="Slide 26">
+    <p:spTree>
+      <p:nvGrpSpPr>
+        <p:cNvPr id="1" name=""/>
+        <p:cNvGrpSpPr/>
+        <p:nvPr/>
+      </p:nvGrpSpPr>
+      <p:grpSpPr>
+        <a:xfrm>
+          <a:off x="0" y="0"/>
+          <a:ext cx="0" cy="0"/>
+          <a:chOff x="0" y="0"/>
+          <a:chExt cx="0" cy="0"/>
+        </a:xfrm>
+      </p:grpSpPr>
+      <p:sp>
+        <p:nvSpPr>
+          <p:cNvPr id="2" name="Text 0"/>
+          <p:cNvSpPr txBox="1"/>
+          <p:nvPr/>
+        </p:nvSpPr>
+        <p:spPr>
+          <a:xfrm>
+            <a:off x="502920" y="365760"/>
+            <a:ext cx="6400800" cy="274320"/>
+          </a:xfrm>
+          <a:prstGeom prst="rect">
+            <a:avLst/>
+          </a:prstGeom>
+          <a:noFill/>
+          <a:ln/>
+        </p:spPr>
+        <p:txBody>
+          <a:bodyPr wrap="square" lIns="0" tIns="0" rIns="0" bIns="0" rtlCol="0" anchor="ctr"/>
+          <a:lstStyle/>
+          <a:p>
+            <a:pPr indent="0" marL="0">
+              <a:buNone/>
+            </a:pPr>
+            <a:r>
+              <a:rPr lang="en-US" sz="950" b="1" spc="220" kern="0" dirty="0">
+                <a:solidFill>
+                  <a:srgbClr val="122B82"/>
+                </a:solidFill>
+              </a:rPr>
+              <a:t>BUDGET AND OUTLOOK</a:t>
+            </a:r>
+            <a:endParaRPr lang="en-US" sz="950" dirty="0"/>
+          </a:p>
+        </p:txBody>
+      </p:sp>
+      <p:sp>
+        <p:nvSpPr>
+          <p:cNvPr id="3" name="Text 1"/>
+          <p:cNvSpPr txBox="1"/>
+          <p:nvPr/>
+        </p:nvSpPr>
+        <p:spPr>
+          <a:xfrm>
+            <a:off x="502920" y="640080"/>
+            <a:ext cx="7315200" cy="685800"/>
+          </a:xfrm>
+          <a:prstGeom prst="rect">
+            <a:avLst/>
+          </a:prstGeom>
+          <a:noFill/>
+          <a:ln/>
+        </p:spPr>
+        <p:txBody>
+          <a:bodyPr wrap="square" lIns="0" tIns="0" rIns="0" bIns="0" rtlCol="0" anchor="ctr"/>
+          <a:lstStyle/>
+          <a:p>
+            <a:pPr indent="0" marL="0">
+              <a:buNone/>
+            </a:pPr>
+            <a:r>
+              <a:rPr lang="en-US" sz="2700" b="1" dirty="0">
+                <a:solidFill>
+                  <a:srgbClr val="242C39"/>
+                </a:solidFill>
+              </a:rPr>
+              <a:t>Revenue by month against budget</a:t>
+            </a:r>
+            <a:endParaRPr lang="en-US" sz="2700" dirty="0"/>
+          </a:p>
+        </p:txBody>
+      </p:sp>
+      <p:pic>
+        <p:nvPicPr>
+          <p:cNvPr id="4" name="snip income_month" descr="/home/user/Claude/deck/snips/income_month.png">    </p:cNvPr>
+          <p:cNvPicPr>
+            <a:picLocks noChangeAspect="1"/>
+          </p:cNvPicPr>
+          <p:nvPr/>
+        </p:nvPicPr>
+        <p:blipFill>
+          <a:blip r:embed="rId1"/>
+          <a:stretch>
+            <a:fillRect/>
+          </a:stretch>
+        </p:blipFill>
+        <p:spPr>
+          <a:xfrm>
+            <a:off x="502920" y="1444752"/>
+            <a:ext cx="5577840" cy="2604071"/>
+          </a:xfrm>
+          <a:prstGeom prst="rect">
+            <a:avLst/>
+          </a:prstGeom>
+        </p:spPr>
+      </p:pic>
+      <p:sp>
+        <p:nvSpPr>
+          <p:cNvPr id="5" name="Text 2"/>
+          <p:cNvSpPr txBox="1"/>
+          <p:nvPr/>
+        </p:nvSpPr>
+        <p:spPr>
+          <a:xfrm>
+            <a:off x="502920" y="4121975"/>
+            <a:ext cx="5577840" cy="237744"/>
+          </a:xfrm>
+          <a:prstGeom prst="rect">
+            <a:avLst/>
+          </a:prstGeom>
+          <a:noFill/>
+          <a:ln/>
+        </p:spPr>
+        <p:txBody>
+          <a:bodyPr wrap="square" lIns="0" tIns="0" rIns="0" bIns="0" rtlCol="0" anchor="t"/>
+          <a:lstStyle/>
+          <a:p>
+            <a:pPr indent="0" marL="0">
+              <a:buNone/>
+            </a:pPr>
+            <a:r>
+              <a:rPr lang="en-US" sz="800" i="1" dirty="0">
+                <a:solidFill>
+                  <a:srgbClr val="6B7585"/>
+                </a:solidFill>
+              </a:rPr>
+              <a:t>Snipped from the Financial Controller Pack, Cost Analysis tab, total income by month, actual to date then budget.</a:t>
+            </a:r>
+            <a:endParaRPr lang="en-US" sz="800" dirty="0"/>
+          </a:p>
+        </p:txBody>
+      </p:sp>
+      <p:sp>
+        <p:nvSpPr>
+          <p:cNvPr id="6" name="commentary panel"/>
+          <p:cNvSpPr/>
+          <p:nvPr/>
+        </p:nvSpPr>
+        <p:spPr>
+          <a:xfrm>
+            <a:off x="6263640" y="1463040"/>
+            <a:ext cx="2377440" cy="3154680"/>
+          </a:xfrm>
+          <a:prstGeom prst="rect">
+            <a:avLst/>
+          </a:prstGeom>
+          <a:solidFill>
+            <a:srgbClr val="E8F9F8"/>
+          </a:solidFill>
+          <a:ln/>
+        </p:spPr>
+      </p:sp>
+      <p:sp>
+        <p:nvSpPr>
+          <p:cNvPr id="7" name="Text 4"/>
+          <p:cNvSpPr txBox="1"/>
+          <p:nvPr/>
+        </p:nvSpPr>
+        <p:spPr>
+          <a:xfrm>
+            <a:off x="6446520" y="1627632"/>
+            <a:ext cx="2011680" cy="228600"/>
+          </a:xfrm>
+          <a:prstGeom prst="rect">
+            <a:avLst/>
+          </a:prstGeom>
+          <a:noFill/>
+          <a:ln/>
+        </p:spPr>
+        <p:txBody>
+          <a:bodyPr wrap="square" lIns="0" tIns="0" rIns="0" bIns="0" rtlCol="0" anchor="ctr"/>
+          <a:lstStyle/>
+          <a:p>
+            <a:pPr indent="0" marL="0">
+              <a:buNone/>
+            </a:pPr>
+            <a:r>
+              <a:rPr lang="en-US" sz="900" b="1" spc="180" kern="0" dirty="0">
+                <a:solidFill>
+                  <a:srgbClr val="005358"/>
+                </a:solidFill>
+              </a:rPr>
+              <a:t>COMMENTARY</a:t>
+            </a:r>
+            <a:endParaRPr lang="en-US" sz="900" dirty="0"/>
+          </a:p>
+        </p:txBody>
+      </p:sp>
+      <p:sp>
+        <p:nvSpPr>
+          <p:cNvPr id="8" name="Text 5"/>
+          <p:cNvSpPr txBox="1"/>
+          <p:nvPr/>
+        </p:nvSpPr>
+        <p:spPr>
+          <a:xfrm>
+            <a:off x="6446520" y="1901952"/>
+            <a:ext cx="2011680" cy="2551176"/>
+          </a:xfrm>
+          <a:prstGeom prst="rect">
+            <a:avLst/>
+          </a:prstGeom>
+          <a:noFill/>
+          <a:ln/>
+        </p:spPr>
+        <p:txBody>
+          <a:bodyPr wrap="square" lIns="0" tIns="0" rIns="0" bIns="0" rtlCol="0" anchor="t">
+            <a:normAutofit/>
+          </a:bodyPr>
+          <a:lstStyle/>
+          <a:p>
+            <a:pPr marL="342900" indent="-342900">
+              <a:lnSpc>
+                <a:spcPts val="1150"/>
+              </a:lnSpc>
+              <a:spcAft>
+                <a:spcPts val="500"/>
+              </a:spcAft>
+              <a:buSzPct val="100000"/>
+              <a:buChar char="•"/>
+            </a:pPr>
+            <a:r>
+              <a:rPr lang="en-US" sz="900" dirty="0">
+                <a:solidFill>
+                  <a:srgbClr val="3A4453"/>
+                </a:solidFill>
+              </a:rPr>
+              <a:t>Q1 came in (372)k behind on revenue, and almost all of it is Consulting and Video.</a:t>
+            </a:r>
+            <a:endParaRPr lang="en-US" sz="900" dirty="0"/>
+          </a:p>
+          <a:p>
+            <a:pPr marL="342900" indent="-342900">
+              <a:lnSpc>
+                <a:spcPts val="1150"/>
+              </a:lnSpc>
+              <a:spcAft>
+                <a:spcPts val="500"/>
+              </a:spcAft>
+              <a:buSzPct val="100000"/>
+              <a:buChar char="•"/>
+            </a:pPr>
+            <a:r>
+              <a:rPr lang="en-US" sz="900" dirty="0">
+                <a:solidFill>
+                  <a:srgbClr val="3A4453"/>
+                </a:solidFill>
+              </a:rPr>
+              <a:t>The remaining nine months are untouched original budget. They are not a forecast.</a:t>
+            </a:r>
+            <a:endParaRPr lang="en-US" sz="900" dirty="0"/>
+          </a:p>
+          <a:p>
+            <a:pPr marL="342900" indent="-342900">
+              <a:lnSpc>
+                <a:spcPts val="1150"/>
+              </a:lnSpc>
+              <a:spcAft>
+                <a:spcPts val="500"/>
+              </a:spcAft>
+              <a:buSzPct val="100000"/>
+              <a:buChar char="•"/>
+            </a:pPr>
+            <a:r>
+              <a:rPr lang="en-US" sz="900" dirty="0">
+                <a:solidFill>
+                  <a:srgbClr val="3A4453"/>
+                </a:solidFill>
+              </a:rPr>
+              <a:t>October alone is budgeted at 950k, nearly double our best month so far.</a:t>
+            </a:r>
+            <a:endParaRPr lang="en-US" sz="900" dirty="0"/>
+          </a:p>
+          <a:p>
+            <a:pPr marL="342900" indent="-342900">
+              <a:lnSpc>
+                <a:spcPts val="1150"/>
+              </a:lnSpc>
+              <a:spcAft>
+                <a:spcPts val="500"/>
+              </a:spcAft>
+              <a:buSzPct val="100000"/>
+              <a:buChar char="•"/>
+            </a:pPr>
+            <a:r>
+              <a:rPr lang="en-US" sz="900" dirty="0">
+                <a:solidFill>
+                  <a:srgbClr val="3A4453"/>
+                </a:solidFill>
+              </a:rPr>
+              <a:t>December carries a planned loss. The business closes for two weeks, so that is correct and should stay.</a:t>
+            </a:r>
+            <a:endParaRPr lang="en-US" sz="900" dirty="0"/>
+          </a:p>
+          <a:p>
+            <a:pPr marL="342900" indent="-342900">
+              <a:lnSpc>
+                <a:spcPts val="1150"/>
+              </a:lnSpc>
+              <a:spcAft>
+                <a:spcPts val="500"/>
+              </a:spcAft>
+              <a:buSzPct val="100000"/>
+              <a:buChar char="•"/>
+            </a:pPr>
+            <a:r>
+              <a:rPr lang="en-US" sz="900" dirty="0">
+                <a:solidFill>
+                  <a:srgbClr val="3A4453"/>
+                </a:solidFill>
+              </a:rPr>
+              <a:t>Recommend a Q1 rolling forecast: rebuild Consulting on real capacity and reset the margin assumptions.</a:t>
+            </a:r>
+            <a:endParaRPr lang="en-US" sz="900" dirty="0"/>
+          </a:p>
+        </p:txBody>
+      </p:sp>
+      <p:sp>
+        <p:nvSpPr>
+          <p:cNvPr id="25" name="Slide Number Placeholder 0"/>
+          <p:cNvSpPr>
+            <a:spLocks noGrp="1"/>
+          </p:cNvSpPr>
+          <p:nvPr>
+            <p:ph type="sldNum" sz="quarter" idx="4294967295"/>
+          </p:nvPr>
+        </p:nvSpPr>
+        <p:spPr>
+          <a:xfrm>
+            <a:off x="8092440" y="4736592"/>
+            <a:ext cx="548640" cy="228600"/>
+          </a:xfrm>
+          <a:prstGeom prst="rect">
+            <a:avLst/>
+          </a:prstGeom>
+          <a:extLst>
+            <a:ext uri="{C572A759-6A51-4108-AA02-DFA0A04FC94B}">
+              <ma14:wrappingTextBoxFlag xmlns:ma14="http://schemas.microsoft.com/office/mac/drawingml/2011/main" val="0"/>
+            </a:ext>
+          </a:extLst>
+        </p:spPr>
+        <p:txBody>
+          <a:bodyPr/>
+          <a:lstStyle>
+            <a:lvl1pPr>
+              <a:defRPr sz="800">
+                <a:solidFill>
+                  <a:srgbClr val="6B7585"/>
+                </a:solidFill>
+              </a:defRPr>
+            </a:lvl1pPr>
+          </a:lstStyle>
+          <a:p>
+            <a:pPr algn="r"/>
+            <a:fld id="{F7021451-1387-4CA6-816F-3879F97B5CBC}" type="slidenum">
+              <a:rPr b="0" lang="en-US"/>
+              <a:t>26</a:t>
+            </a:fld>
+            <a:endParaRPr lang="en-US"/>
+          </a:p>
+        </p:txBody>
+      </p:sp>
+    </p:spTree>
+  </p:cSld>
+  <p:clrMapOvr>
+    <a:masterClrMapping/>
+  </p:clrMapOvr>
+</p:sld>
+</file>
+
+<file path=ppt/slides/slide27.xml><?xml version="1.0" encoding="utf-8"?>
+<p:sld xmlns:a="http://schemas.openxmlformats.org/drawingml/2006/main" xmlns:r="http://schemas.openxmlformats.org/officeDocument/2006/relationships" xmlns:p="http://schemas.openxmlformats.org/presentationml/2006/main">
+  <p:cSld name="Slide 27">
+    <p:spTree>
+      <p:nvGrpSpPr>
+        <p:cNvPr id="1" name=""/>
+        <p:cNvGrpSpPr/>
+        <p:nvPr/>
+      </p:nvGrpSpPr>
+      <p:grpSpPr>
+        <a:xfrm>
+          <a:off x="0" y="0"/>
+          <a:ext cx="0" cy="0"/>
+          <a:chOff x="0" y="0"/>
+          <a:chExt cx="0" cy="0"/>
+        </a:xfrm>
+      </p:grpSpPr>
+      <p:sp>
+        <p:nvSpPr>
+          <p:cNvPr id="2" name="Text 0"/>
+          <p:cNvSpPr txBox="1"/>
+          <p:nvPr/>
+        </p:nvSpPr>
+        <p:spPr>
+          <a:xfrm>
+            <a:off x="502920" y="365760"/>
+            <a:ext cx="6400800" cy="274320"/>
+          </a:xfrm>
+          <a:prstGeom prst="rect">
+            <a:avLst/>
+          </a:prstGeom>
+          <a:noFill/>
+          <a:ln/>
+        </p:spPr>
+        <p:txBody>
+          <a:bodyPr wrap="square" lIns="0" tIns="0" rIns="0" bIns="0" rtlCol="0" anchor="ctr"/>
+          <a:lstStyle/>
+          <a:p>
+            <a:pPr indent="0" marL="0">
+              <a:buNone/>
+            </a:pPr>
+            <a:r>
+              <a:rPr lang="en-US" sz="950" b="1" spc="220" kern="0" dirty="0">
+                <a:solidFill>
+                  <a:srgbClr val="122B82"/>
+                </a:solidFill>
+              </a:rPr>
+              <a:t>SUMMARY AND ACTIONS</a:t>
+            </a:r>
+            <a:endParaRPr lang="en-US" sz="950" dirty="0"/>
+          </a:p>
+        </p:txBody>
+      </p:sp>
+      <p:sp>
+        <p:nvSpPr>
+          <p:cNvPr id="3" name="Text 1"/>
+          <p:cNvSpPr txBox="1"/>
+          <p:nvPr/>
+        </p:nvSpPr>
+        <p:spPr>
+          <a:xfrm>
+            <a:off x="502920" y="640080"/>
+            <a:ext cx="7315200" cy="685800"/>
+          </a:xfrm>
+          <a:prstGeom prst="rect">
+            <a:avLst/>
+          </a:prstGeom>
+          <a:noFill/>
+          <a:ln/>
+        </p:spPr>
+        <p:txBody>
+          <a:bodyPr wrap="square" lIns="0" tIns="0" rIns="0" bIns="0" rtlCol="0" anchor="ctr"/>
+          <a:lstStyle/>
+          <a:p>
+            <a:pPr indent="0" marL="0">
+              <a:buNone/>
+            </a:pPr>
+            <a:r>
+              <a:rPr lang="en-US" sz="2700" b="1" dirty="0">
+                <a:solidFill>
+                  <a:srgbClr val="242C39"/>
+                </a:solidFill>
+              </a:rPr>
               <a:t>What we agreed</a:t>
             </a:r>
             <a:endParaRPr lang="en-US" sz="2700" dirty="0"/>
@@ -8426,7 +10660,7 @@
       </p:sp>
       <p:graphicFrame>
         <p:nvGraphicFramePr>
-          <p:cNvPr id="23" name="Table 0"/>
+          <p:cNvPr id="28" name="Table 0"/>
           <p:cNvGraphicFramePr>
             <a:graphicFrameLocks noGrp="1"/>
           </p:cNvGraphicFramePr>
@@ -10379,7 +12613,7 @@
             <a:pPr algn="r"/>
             <a:fld id="{F7021451-1387-4CA6-816F-3879F97B5CBC}" type="slidenum">
               <a:rPr b="0" lang="en-US"/>
-              <a:t>22</a:t>
+              <a:t>27</a:t>
             </a:fld>
             <a:endParaRPr lang="en-US"/>
           </a:p>
@@ -10393,9 +12627,9 @@
 </p:sld>
 </file>
 
-<file path=ppt/slides/slide23.xml><?xml version="1.0" encoding="utf-8"?>
+<file path=ppt/slides/slide28.xml><?xml version="1.0" encoding="utf-8"?>
 <p:sld xmlns:a="http://schemas.openxmlformats.org/drawingml/2006/main" xmlns:r="http://schemas.openxmlformats.org/officeDocument/2006/relationships" xmlns:p="http://schemas.openxmlformats.org/presentationml/2006/main">
-  <p:cSld name="Slide 23">
+  <p:cSld name="Slide 28">
     <p:spTree>
       <p:nvGrpSpPr>
         <p:cNvPr id="1" name=""/>
@@ -14027,7 +16261,7 @@
                   <a:srgbClr val="242C39"/>
                 </a:solidFill>
               </a:rPr>
-              <a:t>Revenue against budget and last year</a:t>
+              <a:t>Support, Sep 26</a:t>
             </a:r>
             <a:endParaRPr lang="en-US" sz="2700" dirty="0"/>
           </a:p>
@@ -14035,7 +16269,7 @@
       </p:sp>
       <p:pic>
         <p:nvPicPr>
-          <p:cNvPr id="4" name="snip rev_by_dept" descr="/home/user/Claude/deck/snips/rev_by_dept.png">    </p:cNvPr>
+          <p:cNvPr id="4" name="snip dept_Support" descr="/home/user/Claude/deck/snips/dept_Support.png">    </p:cNvPr>
           <p:cNvPicPr>
             <a:picLocks noChangeAspect="1"/>
           </p:cNvPicPr>
@@ -14050,7 +16284,7 @@
         <p:spPr>
           <a:xfrm>
             <a:off x="502920" y="1444752"/>
-            <a:ext cx="5577840" cy="2392962"/>
+            <a:ext cx="5577840" cy="2594047"/>
           </a:xfrm>
           <a:prstGeom prst="rect">
             <a:avLst/>
@@ -14065,7 +16299,7 @@
         </p:nvSpPr>
         <p:spPr>
           <a:xfrm>
-            <a:off x="502920" y="3910866"/>
+            <a:off x="502920" y="4111951"/>
             <a:ext cx="5577840" cy="237744"/>
           </a:xfrm>
           <a:prstGeom prst="rect">
@@ -14087,7 +16321,7 @@
                   <a:srgbClr val="6B7585"/>
                 </a:solidFill>
               </a:rPr>
-              <a:t>Snipped from the Financial Controller Pack, Cost Analysis tab, revenue by department, the month.</a:t>
+              <a:t>Snipped from the Financial Controller Pack, Dept P&amp;L tab, the department selector set to Support.</a:t>
             </a:r>
             <a:endParaRPr lang="en-US" sz="800" dirty="0"/>
           </a:p>
@@ -14188,7 +16422,7 @@
                   <a:srgbClr val="3A4453"/>
                 </a:solidFill>
               </a:rPr>
-              <a:t>Integration billed 235k against a 59k plan. Nearly all of it was one big installation job, now finished, so next month drops back.</a:t>
+              <a:t>Billed 243k against 248k. Within 5k of plan, which is what fixed monthly contracts should do.</a:t>
             </a:r>
             <a:endParaRPr lang="en-US" sz="900" dirty="0"/>
           </a:p>
@@ -14209,7 +16443,7 @@
                   <a:srgbClr val="3A4453"/>
                 </a:solidFill>
               </a:rPr>
-              <a:t>Support billed 243k against 248k. On plan, which is what fixed monthly contracts should do.</a:t>
+              <a:t>Keeps 42% of what it sells, the same as last September. Steady and predictable.</a:t>
             </a:r>
             <a:endParaRPr lang="en-US" sz="900" dirty="0"/>
           </a:p>
@@ -14230,7 +16464,7 @@
                   <a:srgbClr val="3A4453"/>
                 </a:solidFill>
               </a:rPr>
-              <a:t>Events billed 73k against 66k, in a month that sits between the busy results periods.</a:t>
+              <a:t>After its 72k share of running costs it still made 29k. The only department that does.</a:t>
             </a:r>
             <a:endParaRPr lang="en-US" sz="900" dirty="0"/>
           </a:p>
@@ -14251,7 +16485,7 @@
                   <a:srgbClr val="3A4453"/>
                 </a:solidFill>
               </a:rPr>
-              <a:t>Video billed 7k against 17k and Consulting 4k against 23k. Both have been short every month this year.</a:t>
+              <a:t>Of that share, 42,262 is office wages. Support picks up the most because it works the most hours.</a:t>
             </a:r>
             <a:endParaRPr lang="en-US" sz="900" dirty="0"/>
           </a:p>
@@ -14272,7 +16506,7 @@
                   <a:srgbClr val="3A4453"/>
                 </a:solidFill>
               </a:rPr>
-              <a:t>Company sales are 58% up on last September. We are selling more than last year and keeping less of it.</a:t>
+              <a:t>The one thing not to trust here is the 99% billable figure. Non-billable time is being booked to jobs.</a:t>
             </a:r>
             <a:endParaRPr lang="en-US" sz="900" dirty="0"/>
           </a:p>
@@ -14350,92 +16584,14 @@
       </p:grpSpPr>
       <p:sp>
         <p:nvSpPr>
-          <p:cNvPr id="2" name="divider circle"/>
-          <p:cNvSpPr/>
-          <p:nvPr/>
-        </p:nvSpPr>
-        <p:spPr>
-          <a:xfrm>
-            <a:off x="6446520" y="1600200"/>
-            <a:ext cx="2651760" cy="2651760"/>
-          </a:xfrm>
-          <a:prstGeom prst="ellipse">
-            <a:avLst/>
-          </a:prstGeom>
-          <a:solidFill>
-            <a:srgbClr val="6D71FF">
-              <a:alpha val="55000"/>
-            </a:srgbClr>
-          </a:solidFill>
-          <a:ln/>
-        </p:spPr>
-      </p:sp>
-      <p:sp>
-        <p:nvSpPr>
-          <p:cNvPr id="3" name="Shape 1"/>
-          <p:cNvSpPr/>
-          <p:nvPr/>
-        </p:nvSpPr>
-        <p:spPr>
-          <a:xfrm>
-            <a:off x="502920" y="1874520"/>
-            <a:ext cx="868680" cy="868680"/>
-          </a:xfrm>
-          <a:prstGeom prst="rect">
-            <a:avLst/>
-          </a:prstGeom>
-          <a:solidFill>
-            <a:srgbClr val="3FD0C9"/>
-          </a:solidFill>
-          <a:ln/>
-        </p:spPr>
-      </p:sp>
-      <p:sp>
-        <p:nvSpPr>
-          <p:cNvPr id="4" name="Text 2"/>
-          <p:cNvSpPr txBox="1"/>
-          <p:nvPr/>
-        </p:nvSpPr>
-        <p:spPr>
-          <a:xfrm>
-            <a:off x="502920" y="1874520"/>
-            <a:ext cx="868680" cy="868680"/>
-          </a:xfrm>
-          <a:prstGeom prst="rect">
-            <a:avLst/>
-          </a:prstGeom>
-          <a:noFill/>
-          <a:ln/>
-        </p:spPr>
-        <p:txBody>
-          <a:bodyPr wrap="square" lIns="0" tIns="0" rIns="0" bIns="0" rtlCol="0" anchor="ctr"/>
-          <a:lstStyle/>
-          <a:p>
-            <a:pPr algn="ctr" indent="0" marL="0">
-              <a:buNone/>
-            </a:pPr>
-            <a:r>
-              <a:rPr lang="en-US" sz="2600" b="1" dirty="0">
-                <a:solidFill>
-                  <a:srgbClr val="242C39"/>
-                </a:solidFill>
-              </a:rPr>
-              <a:t>02</a:t>
-            </a:r>
-            <a:endParaRPr lang="en-US" sz="2600" dirty="0"/>
-          </a:p>
-        </p:txBody>
-      </p:sp>
-      <p:sp>
-        <p:nvSpPr>
-          <p:cNvPr id="5" name="Text 3"/>
-          <p:cNvSpPr txBox="1"/>
-          <p:nvPr/>
-        </p:nvSpPr>
-        <p:spPr>
-          <a:xfrm>
-            <a:off x="502920" y="411480"/>
-            <a:ext cx="3657600" cy="274320"/>
+          <p:cNvPr id="2" name="Text 0"/>
+          <p:cNvSpPr txBox="1"/>
+          <p:nvPr/>
+        </p:nvSpPr>
+        <p:spPr>
+          <a:xfrm>
+            <a:off x="502920" y="365760"/>
+            <a:ext cx="6400800" cy="274320"/>
           </a:xfrm>
           <a:prstGeom prst="rect">
             <a:avLst/>
@@ -14453,10 +16609,10 @@
             <a:r>
               <a:rPr lang="en-US" sz="950" b="1" spc="220" kern="0" dirty="0">
                 <a:solidFill>
-                  <a:srgbClr val="3FD0C9"/>
-                </a:solidFill>
-              </a:rPr>
-              <a:t>SECTION</a:t>
+                  <a:srgbClr val="122B82"/>
+                </a:solidFill>
+              </a:rPr>
+              <a:t>FINANCIAL PERFORMANCE</a:t>
             </a:r>
             <a:endParaRPr lang="en-US" sz="950" dirty="0"/>
           </a:p>
@@ -14464,14 +16620,14 @@
       </p:sp>
       <p:sp>
         <p:nvSpPr>
-          <p:cNvPr id="6" name="Text 4"/>
-          <p:cNvSpPr txBox="1"/>
-          <p:nvPr/>
-        </p:nvSpPr>
-        <p:spPr>
-          <a:xfrm>
-            <a:off x="1600200" y="1874520"/>
-            <a:ext cx="5943600" cy="502920"/>
+          <p:cNvPr id="3" name="Text 1"/>
+          <p:cNvSpPr txBox="1"/>
+          <p:nvPr/>
+        </p:nvSpPr>
+        <p:spPr>
+          <a:xfrm>
+            <a:off x="502920" y="640080"/>
+            <a:ext cx="7315200" cy="685800"/>
           </a:xfrm>
           <a:prstGeom prst="rect">
             <a:avLst/>
@@ -14487,50 +16643,304 @@
               <a:buNone/>
             </a:pPr>
             <a:r>
-              <a:rPr lang="en-US" sz="2800" b="1" dirty="0">
-                <a:solidFill>
-                  <a:srgbClr val="FFFFFF"/>
-                </a:solidFill>
-              </a:rPr>
-              <a:t>What we spend</a:t>
-            </a:r>
-            <a:endParaRPr lang="en-US" sz="2800" dirty="0"/>
-          </a:p>
-        </p:txBody>
-      </p:sp>
-      <p:sp>
-        <p:nvSpPr>
-          <p:cNvPr id="7" name="Text 5"/>
-          <p:cNvSpPr txBox="1"/>
-          <p:nvPr/>
-        </p:nvSpPr>
-        <p:spPr>
-          <a:xfrm>
-            <a:off x="1600200" y="2395728"/>
-            <a:ext cx="5943600" cy="347472"/>
-          </a:xfrm>
-          <a:prstGeom prst="rect">
-            <a:avLst/>
-          </a:prstGeom>
-          <a:noFill/>
-          <a:ln/>
-        </p:spPr>
-        <p:txBody>
-          <a:bodyPr wrap="square" lIns="0" tIns="0" rIns="0" bIns="0" rtlCol="0" anchor="ctr"/>
+              <a:rPr lang="en-US" sz="2700" b="1" dirty="0">
+                <a:solidFill>
+                  <a:srgbClr val="242C39"/>
+                </a:solidFill>
+              </a:rPr>
+              <a:t>Events, Sep 26</a:t>
+            </a:r>
+            <a:endParaRPr lang="en-US" sz="2700" dirty="0"/>
+          </a:p>
+        </p:txBody>
+      </p:sp>
+      <p:pic>
+        <p:nvPicPr>
+          <p:cNvPr id="4" name="snip dept_Events" descr="/home/user/Claude/deck/snips/dept_Events.png">    </p:cNvPr>
+          <p:cNvPicPr>
+            <a:picLocks noChangeAspect="1"/>
+          </p:cNvPicPr>
+          <p:nvPr/>
+        </p:nvPicPr>
+        <p:blipFill>
+          <a:blip r:embed="rId1"/>
+          <a:stretch>
+            <a:fillRect/>
+          </a:stretch>
+        </p:blipFill>
+        <p:spPr>
+          <a:xfrm>
+            <a:off x="502920" y="1444752"/>
+            <a:ext cx="5577840" cy="2594047"/>
+          </a:xfrm>
+          <a:prstGeom prst="rect">
+            <a:avLst/>
+          </a:prstGeom>
+        </p:spPr>
+      </p:pic>
+      <p:sp>
+        <p:nvSpPr>
+          <p:cNvPr id="5" name="Text 2"/>
+          <p:cNvSpPr txBox="1"/>
+          <p:nvPr/>
+        </p:nvSpPr>
+        <p:spPr>
+          <a:xfrm>
+            <a:off x="502920" y="4111951"/>
+            <a:ext cx="5577840" cy="237744"/>
+          </a:xfrm>
+          <a:prstGeom prst="rect">
+            <a:avLst/>
+          </a:prstGeom>
+          <a:noFill/>
+          <a:ln/>
+        </p:spPr>
+        <p:txBody>
+          <a:bodyPr wrap="square" lIns="0" tIns="0" rIns="0" bIns="0" rtlCol="0" anchor="t"/>
           <a:lstStyle/>
           <a:p>
             <a:pPr indent="0" marL="0">
               <a:buNone/>
             </a:pPr>
             <a:r>
-              <a:rPr lang="en-US" sz="1200" dirty="0">
-                <a:solidFill>
-                  <a:srgbClr val="C9CED6"/>
-                </a:solidFill>
-              </a:rPr>
-              <a:t>Where the money goes and which lines move</a:t>
-            </a:r>
-            <a:endParaRPr lang="en-US" sz="1200" dirty="0"/>
+              <a:rPr lang="en-US" sz="800" i="1" dirty="0">
+                <a:solidFill>
+                  <a:srgbClr val="6B7585"/>
+                </a:solidFill>
+              </a:rPr>
+              <a:t>Snipped from the Financial Controller Pack, Dept P&amp;L tab, the department selector set to Events.</a:t>
+            </a:r>
+            <a:endParaRPr lang="en-US" sz="800" dirty="0"/>
+          </a:p>
+        </p:txBody>
+      </p:sp>
+      <p:sp>
+        <p:nvSpPr>
+          <p:cNvPr id="6" name="commentary panel"/>
+          <p:cNvSpPr/>
+          <p:nvPr/>
+        </p:nvSpPr>
+        <p:spPr>
+          <a:xfrm>
+            <a:off x="6263640" y="1463040"/>
+            <a:ext cx="2377440" cy="3154680"/>
+          </a:xfrm>
+          <a:prstGeom prst="rect">
+            <a:avLst/>
+          </a:prstGeom>
+          <a:solidFill>
+            <a:srgbClr val="E8F9F8"/>
+          </a:solidFill>
+          <a:ln/>
+        </p:spPr>
+      </p:sp>
+      <p:sp>
+        <p:nvSpPr>
+          <p:cNvPr id="7" name="Text 4"/>
+          <p:cNvSpPr txBox="1"/>
+          <p:nvPr/>
+        </p:nvSpPr>
+        <p:spPr>
+          <a:xfrm>
+            <a:off x="6446520" y="1627632"/>
+            <a:ext cx="2011680" cy="228600"/>
+          </a:xfrm>
+          <a:prstGeom prst="rect">
+            <a:avLst/>
+          </a:prstGeom>
+          <a:noFill/>
+          <a:ln/>
+        </p:spPr>
+        <p:txBody>
+          <a:bodyPr wrap="square" lIns="0" tIns="0" rIns="0" bIns="0" rtlCol="0" anchor="ctr"/>
+          <a:lstStyle/>
+          <a:p>
+            <a:pPr indent="0" marL="0">
+              <a:buNone/>
+            </a:pPr>
+            <a:r>
+              <a:rPr lang="en-US" sz="900" b="1" spc="180" kern="0" dirty="0">
+                <a:solidFill>
+                  <a:srgbClr val="005358"/>
+                </a:solidFill>
+              </a:rPr>
+              <a:t>COMMENTARY</a:t>
+            </a:r>
+            <a:endParaRPr lang="en-US" sz="900" dirty="0"/>
+          </a:p>
+        </p:txBody>
+      </p:sp>
+      <p:sp>
+        <p:nvSpPr>
+          <p:cNvPr id="8" name="Text 5"/>
+          <p:cNvSpPr txBox="1"/>
+          <p:nvPr/>
+        </p:nvSpPr>
+        <p:spPr>
+          <a:xfrm>
+            <a:off x="6446520" y="1901952"/>
+            <a:ext cx="2011680" cy="2551176"/>
+          </a:xfrm>
+          <a:prstGeom prst="rect">
+            <a:avLst/>
+          </a:prstGeom>
+          <a:noFill/>
+          <a:ln/>
+        </p:spPr>
+        <p:txBody>
+          <a:bodyPr wrap="square" lIns="0" tIns="0" rIns="0" bIns="0" rtlCol="0" anchor="t">
+            <a:normAutofit/>
+          </a:bodyPr>
+          <a:lstStyle/>
+          <a:p>
+            <a:pPr marL="342900" indent="-342900">
+              <a:lnSpc>
+                <a:spcPts val="1300"/>
+              </a:lnSpc>
+              <a:spcAft>
+                <a:spcPts val="500"/>
+              </a:spcAft>
+              <a:buSzPct val="100000"/>
+              <a:buChar char="•"/>
+            </a:pPr>
+            <a:r>
+              <a:rPr lang="en-US" sz="950" dirty="0">
+                <a:solidFill>
+                  <a:srgbClr val="3A4453"/>
+                </a:solidFill>
+              </a:rPr>
+              <a:t>Billed 73k against 66k, in a month between the busy results periods.</a:t>
+            </a:r>
+            <a:endParaRPr lang="en-US" sz="950" dirty="0"/>
+          </a:p>
+          <a:p>
+            <a:pPr marL="342900" indent="-342900">
+              <a:lnSpc>
+                <a:spcPts val="1300"/>
+              </a:lnSpc>
+              <a:spcAft>
+                <a:spcPts val="500"/>
+              </a:spcAft>
+              <a:buSzPct val="100000"/>
+              <a:buChar char="•"/>
+            </a:pPr>
+            <a:r>
+              <a:rPr lang="en-US" sz="950" dirty="0">
+                <a:solidFill>
+                  <a:srgbClr val="3A4453"/>
+                </a:solidFill>
+              </a:rPr>
+              <a:t>Keeps 78% of what it sells, the second best in the business.</a:t>
+            </a:r>
+            <a:endParaRPr lang="en-US" sz="950" dirty="0"/>
+          </a:p>
+          <a:p>
+            <a:pPr marL="342900" indent="-342900">
+              <a:lnSpc>
+                <a:spcPts val="1300"/>
+              </a:lnSpc>
+              <a:spcAft>
+                <a:spcPts val="500"/>
+              </a:spcAft>
+              <a:buSzPct val="100000"/>
+              <a:buChar char="•"/>
+            </a:pPr>
+            <a:r>
+              <a:rPr lang="en-US" sz="950" dirty="0">
+                <a:solidFill>
+                  <a:srgbClr val="3A4453"/>
+                </a:solidFill>
+              </a:rPr>
+              <a:t>And still loses 54k, because it is charged 111k of running costs on 73k of sales.</a:t>
+            </a:r>
+            <a:endParaRPr lang="en-US" sz="950" dirty="0"/>
+          </a:p>
+          <a:p>
+            <a:pPr marL="342900" indent="-342900">
+              <a:lnSpc>
+                <a:spcPts val="1300"/>
+              </a:lnSpc>
+              <a:spcAft>
+                <a:spcPts val="500"/>
+              </a:spcAft>
+              <a:buSzPct val="100000"/>
+              <a:buChar char="•"/>
+            </a:pPr>
+            <a:r>
+              <a:rPr lang="en-US" sz="950" dirty="0">
+                <a:solidFill>
+                  <a:srgbClr val="3A4453"/>
+                </a:solidFill>
+              </a:rPr>
+              <a:t>72k of that is office cost, split on who uses the office. Events is not the department sitting in it.</a:t>
+            </a:r>
+            <a:endParaRPr lang="en-US" sz="950" dirty="0"/>
+          </a:p>
+          <a:p>
+            <a:pPr marL="342900" indent="-342900">
+              <a:lnSpc>
+                <a:spcPts val="1300"/>
+              </a:lnSpc>
+              <a:spcAft>
+                <a:spcPts val="500"/>
+              </a:spcAft>
+              <a:buSzPct val="100000"/>
+              <a:buChar char="•"/>
+            </a:pPr>
+            <a:r>
+              <a:rPr lang="en-US" sz="950" dirty="0">
+                <a:solidFill>
+                  <a:srgbClr val="3A4453"/>
+                </a:solidFill>
+              </a:rPr>
+              <a:t>333 hours went to leave and only 241 onto jobs. The people were there, the work was not.</a:t>
+            </a:r>
+            <a:endParaRPr lang="en-US" sz="950" dirty="0"/>
+          </a:p>
+        </p:txBody>
+      </p:sp>
+      <p:sp>
+        <p:nvSpPr>
+          <p:cNvPr id="25" name="Slide Number Placeholder 0"/>
+          <p:cNvSpPr>
+            <a:spLocks noGrp="1"/>
+          </p:cNvSpPr>
+          <p:nvPr>
+            <p:ph type="sldNum" sz="quarter" idx="4294967295"/>
+          </p:nvPr>
+        </p:nvSpPr>
+        <p:spPr>
+          <a:xfrm>
+            <a:off x="8092440" y="4736592"/>
+            <a:ext cx="548640" cy="228600"/>
+          </a:xfrm>
+          <a:prstGeom prst="rect">
+            <a:avLst/>
+          </a:prstGeom>
+          <a:extLst>
+            <a:ext uri="{C572A759-6A51-4108-AA02-DFA0A04FC94B}">
+              <ma14:wrappingTextBoxFlag xmlns:ma14="http://schemas.microsoft.com/office/mac/drawingml/2011/main" val="0"/>
+            </a:ext>
+          </a:extLst>
+        </p:spPr>
+        <p:txBody>
+          <a:bodyPr/>
+          <a:lstStyle>
+            <a:lvl1pPr>
+              <a:defRPr sz="800">
+                <a:solidFill>
+                  <a:srgbClr val="6B7585"/>
+                </a:solidFill>
+              </a:defRPr>
+            </a:lvl1pPr>
+          </a:lstStyle>
+          <a:p>
+            <a:pPr algn="r"/>
+            <a:fld id="{F7021451-1387-4CA6-816F-3879F97B5CBC}" type="slidenum">
+              <a:rPr b="0" lang="en-US"/>
+              <a:t>9</a:t>
+            </a:fld>
+            <a:endParaRPr lang="en-US"/>
           </a:p>
         </p:txBody>
       </p:sp>

--- a/deck/CTS Monthly Business Review - September 2026.pptx
+++ b/deck/CTS Monthly Business Review - September 2026.pptx
@@ -33,9 +33,11 @@
     <p:sldId id="281" r:id="rId27"/>
     <p:sldId id="282" r:id="rId28"/>
     <p:sldId id="283" r:id="rId29"/>
+    <p:sldId id="284" r:id="rId30"/>
+    <p:sldId id="285" r:id="rId31"/>
   </p:sldIdLst>
   <p:notesMasterIdLst>
-    <p:notesMasterId r:id="rId30"/>
+    <p:notesMasterId r:id="rId32"/>
   </p:notesMasterIdLst>
   <p:sldSz cx="9144000" cy="5143500"/>
   <p:notesSz cx="5143500" cy="9144000"/>
@@ -2002,17 +2004,12 @@
           <a:p>
             <a:r>
               <a:rPr lang="en-US" dirty="0"/>
-              <a:t>How each department spent its hours in September 2026.
-Read the bars as a mix, not as a size. Each one is scaled to that department's own total, because Support works around a hundred times the hours Integration does and on a straight scale four of the five departments disappear. The number on each segment is the real hours.
-Support: 2,132 hours on jobs, 11 not on jobs, 218 leave. 99.5% of worked hours were billable.
-Events: 241 hours on jobs, 249 not on jobs, 333 leave. 49.1% of worked hours were billable.
-Video: 25 hours on jobs, 8 not on jobs, 0 leave. 76.0% of worked hours were billable.
-Integration: 10 hours on jobs, 0 not on jobs, 0 leave. 100.0% of worked hours were billable.
-Consulting: 31 hours on jobs, 84 not on jobs, 53 leave. 26.8% of worked hours were billable.
-Across the five departments, 2,437 hours on jobs out of 2,789 worked.
-I need to be straight about the Support bar. 11 hours not on jobs, in a whole month, for a team that size, is not believable. Non-billable time is being booked to billable jobs. The total hours are right, the split is not, and until timesheet coding is corrected the Support percentage cannot be used to manage anybody.
-Events is the real operational issue: 333 hours of leave on a small team takes out most of the month's capacity.
-And the prize. Support earns about 48 of margin on every hour it bills. Five more points of billable time across Support and Events, at the rate each already earns, is worth roughly 15,813 a month and costs nothing extra. It is the largest controllable item in this pack.</a:t>
+              <a:t>The utilisation working for the two big cost centres, straight off the pack.
+The top three rows set the month: working days, and working hours at eight hours a day. Every FTE figure divides into that.
+For each cost centre the sheet holds billable hours, non-billable hours and leave, then two calculated lines. Utilisation per cent is billable divided by billable plus non-billable. Leave is excluded, because leave cannot be billed and including it would punish a team for taking its entitlement. FTE is billable plus non-billable divided by the month's working hours.
+Support: 99.5% utilisation on 12.2 FTE. I cannot put my name to that percentage. 11 non-billable hours in a whole month, for a team that size, is not a real number. Non-billable time is being coded to billable cost centres. The hours total is right, the split is not, and until the coding is corrected this figure cannot be used to manage anybody.
+Events: 49.1% utilisation on 2.8 FTE, with 333 hours of leave. That is the genuine operational issue on this page. The people were paid for, the work was not there.
+Three months sit side by side so the board reads a trend, not one month in isolation.</a:t>
             </a:r>
             <a:endParaRPr lang="en-US" dirty="0"/>
           </a:p>
@@ -2100,7 +2097,11 @@
           <a:p>
             <a:r>
               <a:rPr lang="en-US" dirty="0"/>
-              <a:t>Three months are closed and the remaining nine are still at original budget. That is the decision in front of the board.</a:t>
+              <a:t>The three small cost centres.
+Video: 76.0% utilisation on 0.18 FTE. 24.5 billable hours in the month.
+Integration: 100.0% on 0.05 FTE. The hundred per cent is arithmetic, not performance. 9.5 billable hours and no non-billable time booked at all. Integration's revenue this month came from resold equipment, not from our hours, which is why the money and the hours do not match.
+Consulting: 26.8% on 0.65 FTE. 84 hours into work we cannot bill against 31 we can, plus 53 hours of leave. Three months of that pattern, against running costs that have not moved, is the clearest case in the pack for a decision.
+A percentage on nine or twenty four hours is not a management number. Read the hours column.</a:t>
             </a:r>
             <a:endParaRPr lang="en-US" dirty="0"/>
           </a:p>
@@ -2188,11 +2189,17 @@
           <a:p>
             <a:r>
               <a:rPr lang="en-US" dirty="0"/>
-              <a:t>Revenue by month, actual for the three closed months and original budget for the rest.
-Q1 actual 1,624,460 against a budget of 1,996,110, behind by 371,650.
-The nine months from October are still at the budget set before the year started. October is budgeted at 950,416, higher than any month we have delivered.
-Two things for the board. The Q1 variance is concentrated in Consulting and Video, which were budgeted on a resourcing level that does not exist. And the margin assumption in the budget is above what the business has delivered for two years, so even a month that hits the revenue number will miss the profit number.
-My recommendation is a rolling forecast from Q2, rebuilding Consulting around actual capacity and resetting gross margin to delivered rates. December should stay as budgeted: the business closes for two weeks and the loss is real.</a:t>
+              <a:t>How each department spent its hours in September 2026.
+Read the bars as a mix, not as a size. Each one is scaled to that department's own total, because Support works around a hundred times the hours Integration does and on a straight scale four of the five departments disappear. The number on each segment is the real hours.
+Support: 2,132 hours on jobs, 11 not on jobs, 218 leave. 99.5% of worked hours were billable.
+Events: 241 hours on jobs, 249 not on jobs, 333 leave. 49.1% of worked hours were billable.
+Video: 25 hours on jobs, 8 not on jobs, 0 leave. 76.0% of worked hours were billable.
+Integration: 10 hours on jobs, 0 not on jobs, 0 leave. 100.0% of worked hours were billable.
+Consulting: 31 hours on jobs, 84 not on jobs, 53 leave. 26.8% of worked hours were billable.
+Across the five departments, 2,437 hours on jobs out of 2,789 worked.
+I need to be straight about the Support bar. 11 hours not on jobs, in a whole month, for a team that size, is not believable. Non-billable time is being booked to billable jobs. The total hours are right, the split is not, and until timesheet coding is corrected the Support percentage cannot be used to manage anybody.
+Events is the real operational issue: 333 hours of leave on a small team takes out most of the month's capacity.
+And the prize. Support earns about 48 of margin on every hour it bills. Five more points of billable time across Support and Events, at the rate each already earns, is worth roughly 15,813 a month and costs nothing extra. It is the largest controllable item in this pack.</a:t>
             </a:r>
             <a:endParaRPr lang="en-US" dirty="0"/>
           </a:p>
@@ -2280,10 +2287,7 @@
           <a:p>
             <a:r>
               <a:rPr lang="en-US" dirty="0"/>
-              <a:t>Seven actions, each with an owner and a date.
-The first two matter most: reforecasting on margin rather than revenue, and testing the overhead keys. Everything else in this pack follows from those two numbers.
-The Consulting decision cannot keep being deferred; it has carried running costs against almost no fees for three months.
-The cash action is the only one that produces money this quarter, and the utilisation action is the largest controllable item.</a:t>
+              <a:t>Three months are closed and the remaining nine are still at original budget. That is the decision in front of the board.</a:t>
             </a:r>
             <a:endParaRPr lang="en-US" dirty="0"/>
           </a:p>
@@ -2371,7 +2375,11 @@
           <a:p>
             <a:r>
               <a:rPr lang="en-US" dirty="0"/>
-              <a:t>Close on the two numbers that matter: break even needs 549,372 a month at our real margin, and we are running at 541,487. Everything else in the pack is detail underneath that.</a:t>
+              <a:t>Revenue by month, actual for the three closed months and original budget for the rest.
+Q1 actual 1,624,460 against a budget of 1,996,110, behind by 371,650.
+The nine months from October are still at the budget set before the year started. October is budgeted at 950,416, higher than any month we have delivered.
+Two things for the board. The Q1 variance is concentrated in Consulting and Video, which were budgeted on a resourcing level that does not exist. And the margin assumption in the budget is above what the business has delivered for two years, so even a month that hits the revenue number will miss the profit number.
+My recommendation is a rolling forecast from Q2, rebuilding Consulting around actual capacity and resetting gross margin to delivered rates. December should stay as budgeted: the business closes for two weeks and the loss is real.</a:t>
             </a:r>
             <a:endParaRPr lang="en-US" dirty="0"/>
           </a:p>
@@ -2395,6 +2403,97 @@
             <a:fld id="{F7021451-1387-4CA6-816F-3879F97B5CBC}" type="slidenum">
               <a:rPr lang="en-US"/>
               <a:t>28</a:t>
+            </a:fld>
+            <a:endParaRPr lang="en-US"/>
+          </a:p>
+        </p:txBody>
+      </p:sp>
+    </p:spTree>
+    <p:extLst>
+      <p:ext uri="{BB962C8B-B14F-4D97-AF65-F5344CB8AC3E}">
+        <p14:creationId xmlns:p14="http://schemas.microsoft.com/office/powerpoint/2010/main" val="1024086991"/>
+      </p:ext>
+    </p:extLst>
+  </p:cSld>
+  <p:clrMapOvr>
+    <a:masterClrMapping/>
+  </p:clrMapOvr>
+</p:notes>
+</file>
+
+<file path=ppt/notesSlides/notesSlide29.xml><?xml version="1.0" encoding="utf-8"?>
+<p:notes xmlns:a="http://schemas.openxmlformats.org/drawingml/2006/main" xmlns:r="http://schemas.openxmlformats.org/officeDocument/2006/relationships" xmlns:p="http://schemas.openxmlformats.org/presentationml/2006/main">
+  <p:cSld>
+    <p:spTree>
+      <p:nvGrpSpPr>
+        <p:cNvPr id="1" name=""/>
+        <p:cNvGrpSpPr/>
+        <p:nvPr/>
+      </p:nvGrpSpPr>
+      <p:grpSpPr>
+        <a:xfrm>
+          <a:off x="0" y="0"/>
+          <a:ext cx="0" cy="0"/>
+          <a:chOff x="0" y="0"/>
+          <a:chExt cx="0" cy="0"/>
+        </a:xfrm>
+      </p:grpSpPr>
+      <p:sp>
+        <p:nvSpPr>
+          <p:cNvPr id="2" name="Slide Image Placeholder 1"/>
+          <p:cNvSpPr>
+            <a:spLocks noGrp="1" noRot="1" noChangeAspect="1"/>
+          </p:cNvSpPr>
+          <p:nvPr>
+            <p:ph type="sldImg"/>
+          </p:nvPr>
+        </p:nvSpPr>
+        <p:spPr/>
+      </p:sp>
+      <p:sp>
+        <p:nvSpPr>
+          <p:cNvPr id="3" name="Notes Placeholder 2"/>
+          <p:cNvSpPr>
+            <a:spLocks noGrp="1"/>
+          </p:cNvSpPr>
+          <p:nvPr>
+            <p:ph type="body" idx="1"/>
+          </p:nvPr>
+        </p:nvSpPr>
+        <p:spPr/>
+        <p:txBody>
+          <a:bodyPr/>
+          <a:lstStyle/>
+          <a:p>
+            <a:r>
+              <a:rPr lang="en-US" dirty="0"/>
+              <a:t>Seven actions, each with an owner and a date.
+The first two matter most: reforecasting on margin rather than revenue, and testing the overhead keys. Everything else in this pack follows from those two numbers.
+The Consulting decision cannot keep being deferred; it has carried running costs against almost no fees for three months.
+The cash action is the only one that produces money this quarter, and the utilisation action is the largest controllable item.</a:t>
+            </a:r>
+            <a:endParaRPr lang="en-US" dirty="0"/>
+          </a:p>
+        </p:txBody>
+      </p:sp>
+      <p:sp>
+        <p:nvSpPr>
+          <p:cNvPr id="4" name="Slide Number Placeholder 3"/>
+          <p:cNvSpPr>
+            <a:spLocks noGrp="1"/>
+          </p:cNvSpPr>
+          <p:nvPr>
+            <p:ph type="sldNum" sz="quarter" idx="10"/>
+          </p:nvPr>
+        </p:nvSpPr>
+        <p:spPr/>
+        <p:txBody>
+          <a:bodyPr/>
+          <a:lstStyle/>
+          <a:p>
+            <a:fld id="{F7021451-1387-4CA6-816F-3879F97B5CBC}" type="slidenum">
+              <a:rPr lang="en-US"/>
+              <a:t>29</a:t>
             </a:fld>
             <a:endParaRPr lang="en-US"/>
           </a:p>
@@ -2490,6 +2589,94 @@
             <a:fld id="{F7021451-1387-4CA6-816F-3879F97B5CBC}" type="slidenum">
               <a:rPr lang="en-US"/>
               <a:t>3</a:t>
+            </a:fld>
+            <a:endParaRPr lang="en-US"/>
+          </a:p>
+        </p:txBody>
+      </p:sp>
+    </p:spTree>
+    <p:extLst>
+      <p:ext uri="{BB962C8B-B14F-4D97-AF65-F5344CB8AC3E}">
+        <p14:creationId xmlns:p14="http://schemas.microsoft.com/office/powerpoint/2010/main" val="1024086991"/>
+      </p:ext>
+    </p:extLst>
+  </p:cSld>
+  <p:clrMapOvr>
+    <a:masterClrMapping/>
+  </p:clrMapOvr>
+</p:notes>
+</file>
+
+<file path=ppt/notesSlides/notesSlide30.xml><?xml version="1.0" encoding="utf-8"?>
+<p:notes xmlns:a="http://schemas.openxmlformats.org/drawingml/2006/main" xmlns:r="http://schemas.openxmlformats.org/officeDocument/2006/relationships" xmlns:p="http://schemas.openxmlformats.org/presentationml/2006/main">
+  <p:cSld>
+    <p:spTree>
+      <p:nvGrpSpPr>
+        <p:cNvPr id="1" name=""/>
+        <p:cNvGrpSpPr/>
+        <p:nvPr/>
+      </p:nvGrpSpPr>
+      <p:grpSpPr>
+        <a:xfrm>
+          <a:off x="0" y="0"/>
+          <a:ext cx="0" cy="0"/>
+          <a:chOff x="0" y="0"/>
+          <a:chExt cx="0" cy="0"/>
+        </a:xfrm>
+      </p:grpSpPr>
+      <p:sp>
+        <p:nvSpPr>
+          <p:cNvPr id="2" name="Slide Image Placeholder 1"/>
+          <p:cNvSpPr>
+            <a:spLocks noGrp="1" noRot="1" noChangeAspect="1"/>
+          </p:cNvSpPr>
+          <p:nvPr>
+            <p:ph type="sldImg"/>
+          </p:nvPr>
+        </p:nvSpPr>
+        <p:spPr/>
+      </p:sp>
+      <p:sp>
+        <p:nvSpPr>
+          <p:cNvPr id="3" name="Notes Placeholder 2"/>
+          <p:cNvSpPr>
+            <a:spLocks noGrp="1"/>
+          </p:cNvSpPr>
+          <p:nvPr>
+            <p:ph type="body" idx="1"/>
+          </p:nvPr>
+        </p:nvSpPr>
+        <p:spPr/>
+        <p:txBody>
+          <a:bodyPr/>
+          <a:lstStyle/>
+          <a:p>
+            <a:r>
+              <a:rPr lang="en-US" dirty="0"/>
+              <a:t>Close on the two numbers that matter: break even needs 549,372 a month at our real margin, and we are running at 541,487. Everything else in the pack is detail underneath that.</a:t>
+            </a:r>
+            <a:endParaRPr lang="en-US" dirty="0"/>
+          </a:p>
+        </p:txBody>
+      </p:sp>
+      <p:sp>
+        <p:nvSpPr>
+          <p:cNvPr id="4" name="Slide Number Placeholder 3"/>
+          <p:cNvSpPr>
+            <a:spLocks noGrp="1"/>
+          </p:cNvSpPr>
+          <p:nvPr>
+            <p:ph type="sldNum" sz="quarter" idx="10"/>
+          </p:nvPr>
+        </p:nvSpPr>
+        <p:spPr/>
+        <p:txBody>
+          <a:bodyPr/>
+          <a:lstStyle/>
+          <a:p>
+            <a:fld id="{F7021451-1387-4CA6-816F-3879F97B5CBC}" type="slidenum">
+              <a:rPr lang="en-US"/>
+              <a:t>30</a:t>
             </a:fld>
             <a:endParaRPr lang="en-US"/>
           </a:p>
@@ -4241,7 +4428,7 @@
                   <a:srgbClr val="3A4453"/>
                 </a:solidFill>
               </a:rPr>
-              <a:t>25 billable hours in the month. That is one person, part of the time.</a:t>
+              <a:t>24.5 billable hours in the month. That is one person, part of the time.</a:t>
             </a:r>
             <a:endParaRPr lang="en-US" sz="1000" dirty="0"/>
           </a:p>
@@ -9667,7 +9854,7 @@
                   <a:srgbClr val="242C39"/>
                 </a:solidFill>
               </a:rPr>
-              <a:t>How each department spent its hours, Sep 26</a:t>
+              <a:t>Utilisation, Support and Events</a:t>
             </a:r>
             <a:endParaRPr lang="en-US" sz="2700" dirty="0"/>
           </a:p>
@@ -9675,7 +9862,7 @@
       </p:sp>
       <p:pic>
         <p:nvPicPr>
-          <p:cNvPr id="4" name="snip util_chart" descr="/home/user/Claude/deck/snips/util_chart.png">    </p:cNvPr>
+          <p:cNvPr id="4" name="snip util_pct_a" descr="/home/user/Claude/deck/snips/util_pct_a.png">    </p:cNvPr>
           <p:cNvPicPr>
             <a:picLocks noChangeAspect="1"/>
           </p:cNvPicPr>
@@ -9690,7 +9877,7 @@
         <p:spPr>
           <a:xfrm>
             <a:off x="502920" y="1444752"/>
-            <a:ext cx="5577840" cy="2613700"/>
+            <a:ext cx="5577840" cy="2876991"/>
           </a:xfrm>
           <a:prstGeom prst="rect">
             <a:avLst/>
@@ -9705,7 +9892,7 @@
         </p:nvSpPr>
         <p:spPr>
           <a:xfrm>
-            <a:off x="502920" y="4131604"/>
+            <a:off x="502920" y="4394895"/>
             <a:ext cx="5577840" cy="237744"/>
           </a:xfrm>
           <a:prstGeom prst="rect">
@@ -9727,7 +9914,7 @@
                   <a:srgbClr val="6B7585"/>
                 </a:solidFill>
               </a:rPr>
-              <a:t>Snipped from the Financial Controller Pack, Utilisation tab, hours by department, each bar scaled to its own total.</a:t>
+              <a:t>Snipped from the Financial Controller Pack, Utilisation tab, hours, utilisation per cent and FTE, July to September. The pack calls these two cost centres Onsite and Production.</a:t>
             </a:r>
             <a:endParaRPr lang="en-US" sz="800" dirty="0"/>
           </a:p>
@@ -9828,7 +10015,7 @@
                   <a:srgbClr val="3A4453"/>
                 </a:solidFill>
               </a:rPr>
-              <a:t>Each bar is scaled to that department's own hours, so you can compare the mix. Support works about a hundred times the hours Integration does.</a:t>
+              <a:t>This is the calculation itself. Hours worked, how many went on jobs, the percentage that gives, and the headcount those hours represent.</a:t>
             </a:r>
             <a:endParaRPr lang="en-US" sz="900" dirty="0"/>
           </a:p>
@@ -9849,7 +10036,7 @@
                   <a:srgbClr val="3A4453"/>
                 </a:solidFill>
               </a:rPr>
-              <a:t>Support shows 11 hours not on jobs out of 2,143 worked. That is not credible.</a:t>
+              <a:t>Utilisation per cent is billable hours divided by hours worked. Leave is left out, because nobody can bill leave.</a:t>
             </a:r>
             <a:endParaRPr lang="en-US" sz="900" dirty="0"/>
           </a:p>
@@ -9870,7 +10057,7 @@
                   <a:srgbClr val="3A4453"/>
                 </a:solidFill>
               </a:rPr>
-              <a:t>Events put 333 hours into leave and only 241 onto jobs. The people are there, the work is not.</a:t>
+              <a:t>FTE is hours worked divided by the working hours in the month, so 1.0 is one full time person.</a:t>
             </a:r>
             <a:endParaRPr lang="en-US" sz="900" dirty="0"/>
           </a:p>
@@ -9891,7 +10078,7 @@
                   <a:srgbClr val="3A4453"/>
                 </a:solidFill>
               </a:rPr>
-              <a:t>Consulting put 84 hours into work we cannot bill against 31 we can.</a:t>
+              <a:t>Support reads 99% on only 11 non-billable hours. That is a coding problem, not a result.</a:t>
             </a:r>
             <a:endParaRPr lang="en-US" sz="900" dirty="0"/>
           </a:p>
@@ -9912,7 +10099,7 @@
                   <a:srgbClr val="3A4453"/>
                 </a:solidFill>
               </a:rPr>
-              <a:t>We pay for every hour. We only bill the ones on jobs. The grey and light teal are the gap.</a:t>
+              <a:t>Events at 49% is the real one. 333 hours of leave took out most of the month.</a:t>
             </a:r>
             <a:endParaRPr lang="en-US" sz="900" dirty="0"/>
           </a:p>
@@ -9990,92 +10177,14 @@
       </p:grpSpPr>
       <p:sp>
         <p:nvSpPr>
-          <p:cNvPr id="2" name="divider circle"/>
-          <p:cNvSpPr/>
-          <p:nvPr/>
-        </p:nvSpPr>
-        <p:spPr>
-          <a:xfrm>
-            <a:off x="6446520" y="1600200"/>
-            <a:ext cx="2651760" cy="2651760"/>
-          </a:xfrm>
-          <a:prstGeom prst="ellipse">
-            <a:avLst/>
-          </a:prstGeom>
-          <a:solidFill>
-            <a:srgbClr val="6D71FF">
-              <a:alpha val="55000"/>
-            </a:srgbClr>
-          </a:solidFill>
-          <a:ln/>
-        </p:spPr>
-      </p:sp>
-      <p:sp>
-        <p:nvSpPr>
-          <p:cNvPr id="3" name="Shape 1"/>
-          <p:cNvSpPr/>
-          <p:nvPr/>
-        </p:nvSpPr>
-        <p:spPr>
-          <a:xfrm>
-            <a:off x="502920" y="1874520"/>
-            <a:ext cx="868680" cy="868680"/>
-          </a:xfrm>
-          <a:prstGeom prst="rect">
-            <a:avLst/>
-          </a:prstGeom>
-          <a:solidFill>
-            <a:srgbClr val="3FD0C9"/>
-          </a:solidFill>
-          <a:ln/>
-        </p:spPr>
-      </p:sp>
-      <p:sp>
-        <p:nvSpPr>
-          <p:cNvPr id="4" name="Text 2"/>
-          <p:cNvSpPr txBox="1"/>
-          <p:nvPr/>
-        </p:nvSpPr>
-        <p:spPr>
-          <a:xfrm>
-            <a:off x="502920" y="1874520"/>
-            <a:ext cx="868680" cy="868680"/>
-          </a:xfrm>
-          <a:prstGeom prst="rect">
-            <a:avLst/>
-          </a:prstGeom>
-          <a:noFill/>
-          <a:ln/>
-        </p:spPr>
-        <p:txBody>
-          <a:bodyPr wrap="square" lIns="0" tIns="0" rIns="0" bIns="0" rtlCol="0" anchor="ctr"/>
-          <a:lstStyle/>
-          <a:p>
-            <a:pPr algn="ctr" indent="0" marL="0">
-              <a:buNone/>
-            </a:pPr>
-            <a:r>
-              <a:rPr lang="en-US" sz="2600" b="1" dirty="0">
-                <a:solidFill>
-                  <a:srgbClr val="242C39"/>
-                </a:solidFill>
-              </a:rPr>
-              <a:t>05</a:t>
-            </a:r>
-            <a:endParaRPr lang="en-US" sz="2600" dirty="0"/>
-          </a:p>
-        </p:txBody>
-      </p:sp>
-      <p:sp>
-        <p:nvSpPr>
-          <p:cNvPr id="5" name="Text 3"/>
-          <p:cNvSpPr txBox="1"/>
-          <p:nvPr/>
-        </p:nvSpPr>
-        <p:spPr>
-          <a:xfrm>
-            <a:off x="502920" y="411480"/>
-            <a:ext cx="3657600" cy="274320"/>
+          <p:cNvPr id="2" name="Text 0"/>
+          <p:cNvSpPr txBox="1"/>
+          <p:nvPr/>
+        </p:nvSpPr>
+        <p:spPr>
+          <a:xfrm>
+            <a:off x="502920" y="365760"/>
+            <a:ext cx="6400800" cy="274320"/>
           </a:xfrm>
           <a:prstGeom prst="rect">
             <a:avLst/>
@@ -10093,10 +10202,10 @@
             <a:r>
               <a:rPr lang="en-US" sz="950" b="1" spc="220" kern="0" dirty="0">
                 <a:solidFill>
-                  <a:srgbClr val="3FD0C9"/>
-                </a:solidFill>
-              </a:rPr>
-              <a:t>SECTION</a:t>
+                  <a:srgbClr val="122B82"/>
+                </a:solidFill>
+              </a:rPr>
+              <a:t>PEOPLE AND UTILISATION</a:t>
             </a:r>
             <a:endParaRPr lang="en-US" sz="950" dirty="0"/>
           </a:p>
@@ -10104,14 +10213,14 @@
       </p:sp>
       <p:sp>
         <p:nvSpPr>
-          <p:cNvPr id="6" name="Text 4"/>
-          <p:cNvSpPr txBox="1"/>
-          <p:nvPr/>
-        </p:nvSpPr>
-        <p:spPr>
-          <a:xfrm>
-            <a:off x="1600200" y="1874520"/>
-            <a:ext cx="5943600" cy="502920"/>
+          <p:cNvPr id="3" name="Text 1"/>
+          <p:cNvSpPr txBox="1"/>
+          <p:nvPr/>
+        </p:nvSpPr>
+        <p:spPr>
+          <a:xfrm>
+            <a:off x="502920" y="640080"/>
+            <a:ext cx="7315200" cy="685800"/>
           </a:xfrm>
           <a:prstGeom prst="rect">
             <a:avLst/>
@@ -10127,50 +10236,304 @@
               <a:buNone/>
             </a:pPr>
             <a:r>
-              <a:rPr lang="en-US" sz="2800" b="1" dirty="0">
-                <a:solidFill>
-                  <a:srgbClr val="FFFFFF"/>
-                </a:solidFill>
-              </a:rPr>
-              <a:t>Budget and outlook</a:t>
-            </a:r>
-            <a:endParaRPr lang="en-US" sz="2800" dirty="0"/>
-          </a:p>
-        </p:txBody>
-      </p:sp>
-      <p:sp>
-        <p:nvSpPr>
-          <p:cNvPr id="7" name="Text 5"/>
-          <p:cNvSpPr txBox="1"/>
-          <p:nvPr/>
-        </p:nvSpPr>
-        <p:spPr>
-          <a:xfrm>
-            <a:off x="1600200" y="2395728"/>
-            <a:ext cx="5943600" cy="347472"/>
-          </a:xfrm>
-          <a:prstGeom prst="rect">
-            <a:avLst/>
-          </a:prstGeom>
-          <a:noFill/>
-          <a:ln/>
-        </p:spPr>
-        <p:txBody>
-          <a:bodyPr wrap="square" lIns="0" tIns="0" rIns="0" bIns="0" rtlCol="0" anchor="ctr"/>
+              <a:rPr lang="en-US" sz="2700" b="1" dirty="0">
+                <a:solidFill>
+                  <a:srgbClr val="242C39"/>
+                </a:solidFill>
+              </a:rPr>
+              <a:t>Utilisation, Video, Integration and Consulting</a:t>
+            </a:r>
+            <a:endParaRPr lang="en-US" sz="2700" dirty="0"/>
+          </a:p>
+        </p:txBody>
+      </p:sp>
+      <p:pic>
+        <p:nvPicPr>
+          <p:cNvPr id="4" name="snip util_pct_b" descr="/home/user/Claude/deck/snips/util_pct_b.png">    </p:cNvPr>
+          <p:cNvPicPr>
+            <a:picLocks noChangeAspect="1"/>
+          </p:cNvPicPr>
+          <p:nvPr/>
+        </p:nvPicPr>
+        <p:blipFill>
+          <a:blip r:embed="rId1"/>
+          <a:stretch>
+            <a:fillRect/>
+          </a:stretch>
+        </p:blipFill>
+        <p:spPr>
+          <a:xfrm>
+            <a:off x="757565" y="1444752"/>
+            <a:ext cx="5068550" cy="3090672"/>
+          </a:xfrm>
+          <a:prstGeom prst="rect">
+            <a:avLst/>
+          </a:prstGeom>
+        </p:spPr>
+      </p:pic>
+      <p:sp>
+        <p:nvSpPr>
+          <p:cNvPr id="5" name="Text 2"/>
+          <p:cNvSpPr txBox="1"/>
+          <p:nvPr/>
+        </p:nvSpPr>
+        <p:spPr>
+          <a:xfrm>
+            <a:off x="502920" y="4608576"/>
+            <a:ext cx="5577840" cy="237744"/>
+          </a:xfrm>
+          <a:prstGeom prst="rect">
+            <a:avLst/>
+          </a:prstGeom>
+          <a:noFill/>
+          <a:ln/>
+        </p:spPr>
+        <p:txBody>
+          <a:bodyPr wrap="square" lIns="0" tIns="0" rIns="0" bIns="0" rtlCol="0" anchor="t"/>
           <a:lstStyle/>
           <a:p>
             <a:pPr indent="0" marL="0">
               <a:buNone/>
             </a:pPr>
             <a:r>
-              <a:rPr lang="en-US" sz="1200" dirty="0">
-                <a:solidFill>
-                  <a:srgbClr val="C9CED6"/>
-                </a:solidFill>
-              </a:rPr>
-              <a:t>What the rest of the year looks like and what we change</a:t>
-            </a:r>
-            <a:endParaRPr lang="en-US" sz="1200" dirty="0"/>
+              <a:rPr lang="en-US" sz="800" i="1" dirty="0">
+                <a:solidFill>
+                  <a:srgbClr val="6B7585"/>
+                </a:solidFill>
+              </a:rPr>
+              <a:t>Snipped from the Financial Controller Pack, Utilisation tab, hours, utilisation per cent and FTE, July to September.</a:t>
+            </a:r>
+            <a:endParaRPr lang="en-US" sz="800" dirty="0"/>
+          </a:p>
+        </p:txBody>
+      </p:sp>
+      <p:sp>
+        <p:nvSpPr>
+          <p:cNvPr id="6" name="commentary panel"/>
+          <p:cNvSpPr/>
+          <p:nvPr/>
+        </p:nvSpPr>
+        <p:spPr>
+          <a:xfrm>
+            <a:off x="6263640" y="1463040"/>
+            <a:ext cx="2377440" cy="3154680"/>
+          </a:xfrm>
+          <a:prstGeom prst="rect">
+            <a:avLst/>
+          </a:prstGeom>
+          <a:solidFill>
+            <a:srgbClr val="E8F9F8"/>
+          </a:solidFill>
+          <a:ln/>
+        </p:spPr>
+      </p:sp>
+      <p:sp>
+        <p:nvSpPr>
+          <p:cNvPr id="7" name="Text 4"/>
+          <p:cNvSpPr txBox="1"/>
+          <p:nvPr/>
+        </p:nvSpPr>
+        <p:spPr>
+          <a:xfrm>
+            <a:off x="6446520" y="1627632"/>
+            <a:ext cx="2011680" cy="228600"/>
+          </a:xfrm>
+          <a:prstGeom prst="rect">
+            <a:avLst/>
+          </a:prstGeom>
+          <a:noFill/>
+          <a:ln/>
+        </p:spPr>
+        <p:txBody>
+          <a:bodyPr wrap="square" lIns="0" tIns="0" rIns="0" bIns="0" rtlCol="0" anchor="ctr"/>
+          <a:lstStyle/>
+          <a:p>
+            <a:pPr indent="0" marL="0">
+              <a:buNone/>
+            </a:pPr>
+            <a:r>
+              <a:rPr lang="en-US" sz="900" b="1" spc="180" kern="0" dirty="0">
+                <a:solidFill>
+                  <a:srgbClr val="005358"/>
+                </a:solidFill>
+              </a:rPr>
+              <a:t>COMMENTARY</a:t>
+            </a:r>
+            <a:endParaRPr lang="en-US" sz="900" dirty="0"/>
+          </a:p>
+        </p:txBody>
+      </p:sp>
+      <p:sp>
+        <p:nvSpPr>
+          <p:cNvPr id="8" name="Text 5"/>
+          <p:cNvSpPr txBox="1"/>
+          <p:nvPr/>
+        </p:nvSpPr>
+        <p:spPr>
+          <a:xfrm>
+            <a:off x="6446520" y="1901952"/>
+            <a:ext cx="2011680" cy="2551176"/>
+          </a:xfrm>
+          <a:prstGeom prst="rect">
+            <a:avLst/>
+          </a:prstGeom>
+          <a:noFill/>
+          <a:ln/>
+        </p:spPr>
+        <p:txBody>
+          <a:bodyPr wrap="square" lIns="0" tIns="0" rIns="0" bIns="0" rtlCol="0" anchor="t">
+            <a:normAutofit/>
+          </a:bodyPr>
+          <a:lstStyle/>
+          <a:p>
+            <a:pPr marL="342900" indent="-342900">
+              <a:lnSpc>
+                <a:spcPts val="1150"/>
+              </a:lnSpc>
+              <a:spcAft>
+                <a:spcPts val="500"/>
+              </a:spcAft>
+              <a:buSzPct val="100000"/>
+              <a:buChar char="•"/>
+            </a:pPr>
+            <a:r>
+              <a:rPr lang="en-US" sz="900" dirty="0">
+                <a:solidFill>
+                  <a:srgbClr val="3A4453"/>
+                </a:solidFill>
+              </a:rPr>
+              <a:t>Read these three as hours, not as percentages. The volumes are too small for a percentage to mean much.</a:t>
+            </a:r>
+            <a:endParaRPr lang="en-US" sz="900" dirty="0"/>
+          </a:p>
+          <a:p>
+            <a:pPr marL="342900" indent="-342900">
+              <a:lnSpc>
+                <a:spcPts val="1150"/>
+              </a:lnSpc>
+              <a:spcAft>
+                <a:spcPts val="500"/>
+              </a:spcAft>
+              <a:buSzPct val="100000"/>
+              <a:buChar char="•"/>
+            </a:pPr>
+            <a:r>
+              <a:rPr lang="en-US" sz="900" dirty="0">
+                <a:solidFill>
+                  <a:srgbClr val="3A4453"/>
+                </a:solidFill>
+              </a:rPr>
+              <a:t>Integration shows 100% on 9.5 billable hours. That is one day of work, not a result.</a:t>
+            </a:r>
+            <a:endParaRPr lang="en-US" sz="900" dirty="0"/>
+          </a:p>
+          <a:p>
+            <a:pPr marL="342900" indent="-342900">
+              <a:lnSpc>
+                <a:spcPts val="1150"/>
+              </a:lnSpc>
+              <a:spcAft>
+                <a:spcPts val="500"/>
+              </a:spcAft>
+              <a:buSzPct val="100000"/>
+              <a:buChar char="•"/>
+            </a:pPr>
+            <a:r>
+              <a:rPr lang="en-US" sz="900" dirty="0">
+                <a:solidFill>
+                  <a:srgbClr val="3A4453"/>
+                </a:solidFill>
+              </a:rPr>
+              <a:t>Video put 24.5 hours on jobs, about 0.18 of a full time person.</a:t>
+            </a:r>
+            <a:endParaRPr lang="en-US" sz="900" dirty="0"/>
+          </a:p>
+          <a:p>
+            <a:pPr marL="342900" indent="-342900">
+              <a:lnSpc>
+                <a:spcPts val="1150"/>
+              </a:lnSpc>
+              <a:spcAft>
+                <a:spcPts val="500"/>
+              </a:spcAft>
+              <a:buSzPct val="100000"/>
+              <a:buChar char="•"/>
+            </a:pPr>
+            <a:r>
+              <a:rPr lang="en-US" sz="900" dirty="0">
+                <a:solidFill>
+                  <a:srgbClr val="3A4453"/>
+                </a:solidFill>
+              </a:rPr>
+              <a:t>Consulting is the one that matters: 27%, with 84 hours on work we cannot bill.</a:t>
+            </a:r>
+            <a:endParaRPr lang="en-US" sz="900" dirty="0"/>
+          </a:p>
+          <a:p>
+            <a:pPr marL="342900" indent="-342900">
+              <a:lnSpc>
+                <a:spcPts val="1150"/>
+              </a:lnSpc>
+              <a:spcAft>
+                <a:spcPts val="500"/>
+              </a:spcAft>
+              <a:buSzPct val="100000"/>
+              <a:buChar char="•"/>
+            </a:pPr>
+            <a:r>
+              <a:rPr lang="en-US" sz="900" dirty="0">
+                <a:solidFill>
+                  <a:srgbClr val="3A4453"/>
+                </a:solidFill>
+              </a:rPr>
+              <a:t>Consulting has carried running costs against almost no fees for three months. That decision keeps being deferred.</a:t>
+            </a:r>
+            <a:endParaRPr lang="en-US" sz="900" dirty="0"/>
+          </a:p>
+        </p:txBody>
+      </p:sp>
+      <p:sp>
+        <p:nvSpPr>
+          <p:cNvPr id="25" name="Slide Number Placeholder 0"/>
+          <p:cNvSpPr>
+            <a:spLocks noGrp="1"/>
+          </p:cNvSpPr>
+          <p:nvPr>
+            <p:ph type="sldNum" sz="quarter" idx="4294967295"/>
+          </p:nvPr>
+        </p:nvSpPr>
+        <p:spPr>
+          <a:xfrm>
+            <a:off x="8092440" y="4736592"/>
+            <a:ext cx="548640" cy="228600"/>
+          </a:xfrm>
+          <a:prstGeom prst="rect">
+            <a:avLst/>
+          </a:prstGeom>
+          <a:extLst>
+            <a:ext uri="{C572A759-6A51-4108-AA02-DFA0A04FC94B}">
+              <ma14:wrappingTextBoxFlag xmlns:ma14="http://schemas.microsoft.com/office/mac/drawingml/2011/main" val="0"/>
+            </a:ext>
+          </a:extLst>
+        </p:spPr>
+        <p:txBody>
+          <a:bodyPr/>
+          <a:lstStyle>
+            <a:lvl1pPr>
+              <a:defRPr sz="800">
+                <a:solidFill>
+                  <a:srgbClr val="6B7585"/>
+                </a:solidFill>
+              </a:defRPr>
+            </a:lvl1pPr>
+          </a:lstStyle>
+          <a:p>
+            <a:pPr algn="r"/>
+            <a:fld id="{F7021451-1387-4CA6-816F-3879F97B5CBC}" type="slidenum">
+              <a:rPr b="0" lang="en-US"/>
+              <a:t>25</a:t>
+            </a:fld>
+            <a:endParaRPr lang="en-US"/>
           </a:p>
         </p:txBody>
       </p:sp>
@@ -10229,7 +10592,7 @@
                   <a:srgbClr val="122B82"/>
                 </a:solidFill>
               </a:rPr>
-              <a:t>BUDGET AND OUTLOOK</a:t>
+              <a:t>PEOPLE AND UTILISATION</a:t>
             </a:r>
             <a:endParaRPr lang="en-US" sz="950" dirty="0"/>
           </a:p>
@@ -10265,7 +10628,7 @@
                   <a:srgbClr val="242C39"/>
                 </a:solidFill>
               </a:rPr>
-              <a:t>Revenue by month against budget</a:t>
+              <a:t>How each department spent its hours, Sep 26</a:t>
             </a:r>
             <a:endParaRPr lang="en-US" sz="2700" dirty="0"/>
           </a:p>
@@ -10273,7 +10636,7 @@
       </p:sp>
       <p:pic>
         <p:nvPicPr>
-          <p:cNvPr id="4" name="snip income_month" descr="/home/user/Claude/deck/snips/income_month.png">    </p:cNvPr>
+          <p:cNvPr id="4" name="snip util_chart" descr="/home/user/Claude/deck/snips/util_chart.png">    </p:cNvPr>
           <p:cNvPicPr>
             <a:picLocks noChangeAspect="1"/>
           </p:cNvPicPr>
@@ -10288,7 +10651,7 @@
         <p:spPr>
           <a:xfrm>
             <a:off x="502920" y="1444752"/>
-            <a:ext cx="5577840" cy="2604071"/>
+            <a:ext cx="5577840" cy="3045909"/>
           </a:xfrm>
           <a:prstGeom prst="rect">
             <a:avLst/>
@@ -10303,7 +10666,7 @@
         </p:nvSpPr>
         <p:spPr>
           <a:xfrm>
-            <a:off x="502920" y="4121975"/>
+            <a:off x="502920" y="4563813"/>
             <a:ext cx="5577840" cy="237744"/>
           </a:xfrm>
           <a:prstGeom prst="rect">
@@ -10325,7 +10688,7 @@
                   <a:srgbClr val="6B7585"/>
                 </a:solidFill>
               </a:rPr>
-              <a:t>Snipped from the Financial Controller Pack, Cost Analysis tab, total income by month, actual to date then budget.</a:t>
+              <a:t>Snipped from the Financial Controller Pack, Utilisation tab, hours by department, each bar scaled to its own total.</a:t>
             </a:r>
             <a:endParaRPr lang="en-US" sz="800" dirty="0"/>
           </a:p>
@@ -10426,7 +10789,7 @@
                   <a:srgbClr val="3A4453"/>
                 </a:solidFill>
               </a:rPr>
-              <a:t>Q1 came in (372)k behind on revenue, and almost all of it is Consulting and Video.</a:t>
+              <a:t>Each bar is scaled to that department's own hours, so you can compare the mix. Support works about a hundred times the hours Integration does.</a:t>
             </a:r>
             <a:endParaRPr lang="en-US" sz="900" dirty="0"/>
           </a:p>
@@ -10447,7 +10810,7 @@
                   <a:srgbClr val="3A4453"/>
                 </a:solidFill>
               </a:rPr>
-              <a:t>The remaining nine months are untouched original budget. They are not a forecast.</a:t>
+              <a:t>Support shows 11 hours not on jobs out of 2,143 worked. That is not credible.</a:t>
             </a:r>
             <a:endParaRPr lang="en-US" sz="900" dirty="0"/>
           </a:p>
@@ -10468,7 +10831,7 @@
                   <a:srgbClr val="3A4453"/>
                 </a:solidFill>
               </a:rPr>
-              <a:t>October alone is budgeted at 950k, nearly double our best month so far.</a:t>
+              <a:t>Events put 333 hours into leave and only 241 onto jobs. The people are there, the work is not.</a:t>
             </a:r>
             <a:endParaRPr lang="en-US" sz="900" dirty="0"/>
           </a:p>
@@ -10489,7 +10852,7 @@
                   <a:srgbClr val="3A4453"/>
                 </a:solidFill>
               </a:rPr>
-              <a:t>December carries a planned loss. The business closes for two weeks, so that is correct and should stay.</a:t>
+              <a:t>Consulting put 84 hours into work we cannot bill against 31 we can.</a:t>
             </a:r>
             <a:endParaRPr lang="en-US" sz="900" dirty="0"/>
           </a:p>
@@ -10510,7 +10873,7 @@
                   <a:srgbClr val="3A4453"/>
                 </a:solidFill>
               </a:rPr>
-              <a:t>Recommend a Q1 rolling forecast: rebuild Consulting on real capacity and reset the margin assumptions.</a:t>
+              <a:t>We pay for every hour. We only bill the ones on jobs. The grey and light teal are the gap.</a:t>
             </a:r>
             <a:endParaRPr lang="en-US" sz="900" dirty="0"/>
           </a:p>
@@ -10588,6 +10951,217 @@
       </p:grpSpPr>
       <p:sp>
         <p:nvSpPr>
+          <p:cNvPr id="2" name="divider circle"/>
+          <p:cNvSpPr/>
+          <p:nvPr/>
+        </p:nvSpPr>
+        <p:spPr>
+          <a:xfrm>
+            <a:off x="6446520" y="1600200"/>
+            <a:ext cx="2651760" cy="2651760"/>
+          </a:xfrm>
+          <a:prstGeom prst="ellipse">
+            <a:avLst/>
+          </a:prstGeom>
+          <a:solidFill>
+            <a:srgbClr val="6D71FF">
+              <a:alpha val="55000"/>
+            </a:srgbClr>
+          </a:solidFill>
+          <a:ln/>
+        </p:spPr>
+      </p:sp>
+      <p:sp>
+        <p:nvSpPr>
+          <p:cNvPr id="3" name="Shape 1"/>
+          <p:cNvSpPr/>
+          <p:nvPr/>
+        </p:nvSpPr>
+        <p:spPr>
+          <a:xfrm>
+            <a:off x="502920" y="1874520"/>
+            <a:ext cx="868680" cy="868680"/>
+          </a:xfrm>
+          <a:prstGeom prst="rect">
+            <a:avLst/>
+          </a:prstGeom>
+          <a:solidFill>
+            <a:srgbClr val="3FD0C9"/>
+          </a:solidFill>
+          <a:ln/>
+        </p:spPr>
+      </p:sp>
+      <p:sp>
+        <p:nvSpPr>
+          <p:cNvPr id="4" name="Text 2"/>
+          <p:cNvSpPr txBox="1"/>
+          <p:nvPr/>
+        </p:nvSpPr>
+        <p:spPr>
+          <a:xfrm>
+            <a:off x="502920" y="1874520"/>
+            <a:ext cx="868680" cy="868680"/>
+          </a:xfrm>
+          <a:prstGeom prst="rect">
+            <a:avLst/>
+          </a:prstGeom>
+          <a:noFill/>
+          <a:ln/>
+        </p:spPr>
+        <p:txBody>
+          <a:bodyPr wrap="square" lIns="0" tIns="0" rIns="0" bIns="0" rtlCol="0" anchor="ctr"/>
+          <a:lstStyle/>
+          <a:p>
+            <a:pPr algn="ctr" indent="0" marL="0">
+              <a:buNone/>
+            </a:pPr>
+            <a:r>
+              <a:rPr lang="en-US" sz="2600" b="1" dirty="0">
+                <a:solidFill>
+                  <a:srgbClr val="242C39"/>
+                </a:solidFill>
+              </a:rPr>
+              <a:t>05</a:t>
+            </a:r>
+            <a:endParaRPr lang="en-US" sz="2600" dirty="0"/>
+          </a:p>
+        </p:txBody>
+      </p:sp>
+      <p:sp>
+        <p:nvSpPr>
+          <p:cNvPr id="5" name="Text 3"/>
+          <p:cNvSpPr txBox="1"/>
+          <p:nvPr/>
+        </p:nvSpPr>
+        <p:spPr>
+          <a:xfrm>
+            <a:off x="502920" y="411480"/>
+            <a:ext cx="3657600" cy="274320"/>
+          </a:xfrm>
+          <a:prstGeom prst="rect">
+            <a:avLst/>
+          </a:prstGeom>
+          <a:noFill/>
+          <a:ln/>
+        </p:spPr>
+        <p:txBody>
+          <a:bodyPr wrap="square" lIns="0" tIns="0" rIns="0" bIns="0" rtlCol="0" anchor="ctr"/>
+          <a:lstStyle/>
+          <a:p>
+            <a:pPr indent="0" marL="0">
+              <a:buNone/>
+            </a:pPr>
+            <a:r>
+              <a:rPr lang="en-US" sz="950" b="1" spc="220" kern="0" dirty="0">
+                <a:solidFill>
+                  <a:srgbClr val="3FD0C9"/>
+                </a:solidFill>
+              </a:rPr>
+              <a:t>SECTION</a:t>
+            </a:r>
+            <a:endParaRPr lang="en-US" sz="950" dirty="0"/>
+          </a:p>
+        </p:txBody>
+      </p:sp>
+      <p:sp>
+        <p:nvSpPr>
+          <p:cNvPr id="6" name="Text 4"/>
+          <p:cNvSpPr txBox="1"/>
+          <p:nvPr/>
+        </p:nvSpPr>
+        <p:spPr>
+          <a:xfrm>
+            <a:off x="1600200" y="1874520"/>
+            <a:ext cx="5943600" cy="502920"/>
+          </a:xfrm>
+          <a:prstGeom prst="rect">
+            <a:avLst/>
+          </a:prstGeom>
+          <a:noFill/>
+          <a:ln/>
+        </p:spPr>
+        <p:txBody>
+          <a:bodyPr wrap="square" lIns="0" tIns="0" rIns="0" bIns="0" rtlCol="0" anchor="ctr"/>
+          <a:lstStyle/>
+          <a:p>
+            <a:pPr indent="0" marL="0">
+              <a:buNone/>
+            </a:pPr>
+            <a:r>
+              <a:rPr lang="en-US" sz="2800" b="1" dirty="0">
+                <a:solidFill>
+                  <a:srgbClr val="FFFFFF"/>
+                </a:solidFill>
+              </a:rPr>
+              <a:t>Budget and outlook</a:t>
+            </a:r>
+            <a:endParaRPr lang="en-US" sz="2800" dirty="0"/>
+          </a:p>
+        </p:txBody>
+      </p:sp>
+      <p:sp>
+        <p:nvSpPr>
+          <p:cNvPr id="7" name="Text 5"/>
+          <p:cNvSpPr txBox="1"/>
+          <p:nvPr/>
+        </p:nvSpPr>
+        <p:spPr>
+          <a:xfrm>
+            <a:off x="1600200" y="2395728"/>
+            <a:ext cx="5943600" cy="347472"/>
+          </a:xfrm>
+          <a:prstGeom prst="rect">
+            <a:avLst/>
+          </a:prstGeom>
+          <a:noFill/>
+          <a:ln/>
+        </p:spPr>
+        <p:txBody>
+          <a:bodyPr wrap="square" lIns="0" tIns="0" rIns="0" bIns="0" rtlCol="0" anchor="ctr"/>
+          <a:lstStyle/>
+          <a:p>
+            <a:pPr indent="0" marL="0">
+              <a:buNone/>
+            </a:pPr>
+            <a:r>
+              <a:rPr lang="en-US" sz="1200" dirty="0">
+                <a:solidFill>
+                  <a:srgbClr val="C9CED6"/>
+                </a:solidFill>
+              </a:rPr>
+              <a:t>What the rest of the year looks like and what we change</a:t>
+            </a:r>
+            <a:endParaRPr lang="en-US" sz="1200" dirty="0"/>
+          </a:p>
+        </p:txBody>
+      </p:sp>
+    </p:spTree>
+  </p:cSld>
+  <p:clrMapOvr>
+    <a:masterClrMapping/>
+  </p:clrMapOvr>
+</p:sld>
+</file>
+
+<file path=ppt/slides/slide28.xml><?xml version="1.0" encoding="utf-8"?>
+<p:sld xmlns:a="http://schemas.openxmlformats.org/drawingml/2006/main" xmlns:r="http://schemas.openxmlformats.org/officeDocument/2006/relationships" xmlns:p="http://schemas.openxmlformats.org/presentationml/2006/main">
+  <p:cSld name="Slide 28">
+    <p:spTree>
+      <p:nvGrpSpPr>
+        <p:cNvPr id="1" name=""/>
+        <p:cNvGrpSpPr/>
+        <p:nvPr/>
+      </p:nvGrpSpPr>
+      <p:grpSpPr>
+        <a:xfrm>
+          <a:off x="0" y="0"/>
+          <a:ext cx="0" cy="0"/>
+          <a:chOff x="0" y="0"/>
+          <a:chExt cx="0" cy="0"/>
+        </a:xfrm>
+      </p:grpSpPr>
+      <p:sp>
+        <p:nvSpPr>
           <p:cNvPr id="2" name="Text 0"/>
           <p:cNvSpPr txBox="1"/>
           <p:nvPr/>
@@ -10616,7 +11190,7 @@
                   <a:srgbClr val="122B82"/>
                 </a:solidFill>
               </a:rPr>
-              <a:t>SUMMARY AND ACTIONS</a:t>
+              <a:t>BUDGET AND OUTLOOK</a:t>
             </a:r>
             <a:endParaRPr lang="en-US" sz="950" dirty="0"/>
           </a:p>
@@ -10652,6 +11226,393 @@
                   <a:srgbClr val="242C39"/>
                 </a:solidFill>
               </a:rPr>
+              <a:t>Revenue by month against budget</a:t>
+            </a:r>
+            <a:endParaRPr lang="en-US" sz="2700" dirty="0"/>
+          </a:p>
+        </p:txBody>
+      </p:sp>
+      <p:pic>
+        <p:nvPicPr>
+          <p:cNvPr id="4" name="snip income_month" descr="/home/user/Claude/deck/snips/income_month.png">    </p:cNvPr>
+          <p:cNvPicPr>
+            <a:picLocks noChangeAspect="1"/>
+          </p:cNvPicPr>
+          <p:nvPr/>
+        </p:nvPicPr>
+        <p:blipFill>
+          <a:blip r:embed="rId1"/>
+          <a:stretch>
+            <a:fillRect/>
+          </a:stretch>
+        </p:blipFill>
+        <p:spPr>
+          <a:xfrm>
+            <a:off x="502920" y="1444752"/>
+            <a:ext cx="5577840" cy="2604071"/>
+          </a:xfrm>
+          <a:prstGeom prst="rect">
+            <a:avLst/>
+          </a:prstGeom>
+        </p:spPr>
+      </p:pic>
+      <p:sp>
+        <p:nvSpPr>
+          <p:cNvPr id="5" name="Text 2"/>
+          <p:cNvSpPr txBox="1"/>
+          <p:nvPr/>
+        </p:nvSpPr>
+        <p:spPr>
+          <a:xfrm>
+            <a:off x="502920" y="4121975"/>
+            <a:ext cx="5577840" cy="237744"/>
+          </a:xfrm>
+          <a:prstGeom prst="rect">
+            <a:avLst/>
+          </a:prstGeom>
+          <a:noFill/>
+          <a:ln/>
+        </p:spPr>
+        <p:txBody>
+          <a:bodyPr wrap="square" lIns="0" tIns="0" rIns="0" bIns="0" rtlCol="0" anchor="t"/>
+          <a:lstStyle/>
+          <a:p>
+            <a:pPr indent="0" marL="0">
+              <a:buNone/>
+            </a:pPr>
+            <a:r>
+              <a:rPr lang="en-US" sz="800" i="1" dirty="0">
+                <a:solidFill>
+                  <a:srgbClr val="6B7585"/>
+                </a:solidFill>
+              </a:rPr>
+              <a:t>Snipped from the Financial Controller Pack, Cost Analysis tab, total income by month, actual to date then budget.</a:t>
+            </a:r>
+            <a:endParaRPr lang="en-US" sz="800" dirty="0"/>
+          </a:p>
+        </p:txBody>
+      </p:sp>
+      <p:sp>
+        <p:nvSpPr>
+          <p:cNvPr id="6" name="commentary panel"/>
+          <p:cNvSpPr/>
+          <p:nvPr/>
+        </p:nvSpPr>
+        <p:spPr>
+          <a:xfrm>
+            <a:off x="6263640" y="1463040"/>
+            <a:ext cx="2377440" cy="3154680"/>
+          </a:xfrm>
+          <a:prstGeom prst="rect">
+            <a:avLst/>
+          </a:prstGeom>
+          <a:solidFill>
+            <a:srgbClr val="E8F9F8"/>
+          </a:solidFill>
+          <a:ln/>
+        </p:spPr>
+      </p:sp>
+      <p:sp>
+        <p:nvSpPr>
+          <p:cNvPr id="7" name="Text 4"/>
+          <p:cNvSpPr txBox="1"/>
+          <p:nvPr/>
+        </p:nvSpPr>
+        <p:spPr>
+          <a:xfrm>
+            <a:off x="6446520" y="1627632"/>
+            <a:ext cx="2011680" cy="228600"/>
+          </a:xfrm>
+          <a:prstGeom prst="rect">
+            <a:avLst/>
+          </a:prstGeom>
+          <a:noFill/>
+          <a:ln/>
+        </p:spPr>
+        <p:txBody>
+          <a:bodyPr wrap="square" lIns="0" tIns="0" rIns="0" bIns="0" rtlCol="0" anchor="ctr"/>
+          <a:lstStyle/>
+          <a:p>
+            <a:pPr indent="0" marL="0">
+              <a:buNone/>
+            </a:pPr>
+            <a:r>
+              <a:rPr lang="en-US" sz="900" b="1" spc="180" kern="0" dirty="0">
+                <a:solidFill>
+                  <a:srgbClr val="005358"/>
+                </a:solidFill>
+              </a:rPr>
+              <a:t>COMMENTARY</a:t>
+            </a:r>
+            <a:endParaRPr lang="en-US" sz="900" dirty="0"/>
+          </a:p>
+        </p:txBody>
+      </p:sp>
+      <p:sp>
+        <p:nvSpPr>
+          <p:cNvPr id="8" name="Text 5"/>
+          <p:cNvSpPr txBox="1"/>
+          <p:nvPr/>
+        </p:nvSpPr>
+        <p:spPr>
+          <a:xfrm>
+            <a:off x="6446520" y="1901952"/>
+            <a:ext cx="2011680" cy="2551176"/>
+          </a:xfrm>
+          <a:prstGeom prst="rect">
+            <a:avLst/>
+          </a:prstGeom>
+          <a:noFill/>
+          <a:ln/>
+        </p:spPr>
+        <p:txBody>
+          <a:bodyPr wrap="square" lIns="0" tIns="0" rIns="0" bIns="0" rtlCol="0" anchor="t">
+            <a:normAutofit/>
+          </a:bodyPr>
+          <a:lstStyle/>
+          <a:p>
+            <a:pPr marL="342900" indent="-342900">
+              <a:lnSpc>
+                <a:spcPts val="1150"/>
+              </a:lnSpc>
+              <a:spcAft>
+                <a:spcPts val="500"/>
+              </a:spcAft>
+              <a:buSzPct val="100000"/>
+              <a:buChar char="•"/>
+            </a:pPr>
+            <a:r>
+              <a:rPr lang="en-US" sz="900" dirty="0">
+                <a:solidFill>
+                  <a:srgbClr val="3A4453"/>
+                </a:solidFill>
+              </a:rPr>
+              <a:t>Q1 came in (372)k behind on revenue, and almost all of it is Consulting and Video.</a:t>
+            </a:r>
+            <a:endParaRPr lang="en-US" sz="900" dirty="0"/>
+          </a:p>
+          <a:p>
+            <a:pPr marL="342900" indent="-342900">
+              <a:lnSpc>
+                <a:spcPts val="1150"/>
+              </a:lnSpc>
+              <a:spcAft>
+                <a:spcPts val="500"/>
+              </a:spcAft>
+              <a:buSzPct val="100000"/>
+              <a:buChar char="•"/>
+            </a:pPr>
+            <a:r>
+              <a:rPr lang="en-US" sz="900" dirty="0">
+                <a:solidFill>
+                  <a:srgbClr val="3A4453"/>
+                </a:solidFill>
+              </a:rPr>
+              <a:t>The remaining nine months are untouched original budget. They are not a forecast.</a:t>
+            </a:r>
+            <a:endParaRPr lang="en-US" sz="900" dirty="0"/>
+          </a:p>
+          <a:p>
+            <a:pPr marL="342900" indent="-342900">
+              <a:lnSpc>
+                <a:spcPts val="1150"/>
+              </a:lnSpc>
+              <a:spcAft>
+                <a:spcPts val="500"/>
+              </a:spcAft>
+              <a:buSzPct val="100000"/>
+              <a:buChar char="•"/>
+            </a:pPr>
+            <a:r>
+              <a:rPr lang="en-US" sz="900" dirty="0">
+                <a:solidFill>
+                  <a:srgbClr val="3A4453"/>
+                </a:solidFill>
+              </a:rPr>
+              <a:t>October alone is budgeted at 950k, nearly double our best month so far.</a:t>
+            </a:r>
+            <a:endParaRPr lang="en-US" sz="900" dirty="0"/>
+          </a:p>
+          <a:p>
+            <a:pPr marL="342900" indent="-342900">
+              <a:lnSpc>
+                <a:spcPts val="1150"/>
+              </a:lnSpc>
+              <a:spcAft>
+                <a:spcPts val="500"/>
+              </a:spcAft>
+              <a:buSzPct val="100000"/>
+              <a:buChar char="•"/>
+            </a:pPr>
+            <a:r>
+              <a:rPr lang="en-US" sz="900" dirty="0">
+                <a:solidFill>
+                  <a:srgbClr val="3A4453"/>
+                </a:solidFill>
+              </a:rPr>
+              <a:t>December carries a planned loss. The business closes for two weeks, so that is correct and should stay.</a:t>
+            </a:r>
+            <a:endParaRPr lang="en-US" sz="900" dirty="0"/>
+          </a:p>
+          <a:p>
+            <a:pPr marL="342900" indent="-342900">
+              <a:lnSpc>
+                <a:spcPts val="1150"/>
+              </a:lnSpc>
+              <a:spcAft>
+                <a:spcPts val="500"/>
+              </a:spcAft>
+              <a:buSzPct val="100000"/>
+              <a:buChar char="•"/>
+            </a:pPr>
+            <a:r>
+              <a:rPr lang="en-US" sz="900" dirty="0">
+                <a:solidFill>
+                  <a:srgbClr val="3A4453"/>
+                </a:solidFill>
+              </a:rPr>
+              <a:t>Recommend a Q1 rolling forecast: rebuild Consulting on real capacity and reset the margin assumptions.</a:t>
+            </a:r>
+            <a:endParaRPr lang="en-US" sz="900" dirty="0"/>
+          </a:p>
+        </p:txBody>
+      </p:sp>
+      <p:sp>
+        <p:nvSpPr>
+          <p:cNvPr id="25" name="Slide Number Placeholder 0"/>
+          <p:cNvSpPr>
+            <a:spLocks noGrp="1"/>
+          </p:cNvSpPr>
+          <p:nvPr>
+            <p:ph type="sldNum" sz="quarter" idx="4294967295"/>
+          </p:nvPr>
+        </p:nvSpPr>
+        <p:spPr>
+          <a:xfrm>
+            <a:off x="8092440" y="4736592"/>
+            <a:ext cx="548640" cy="228600"/>
+          </a:xfrm>
+          <a:prstGeom prst="rect">
+            <a:avLst/>
+          </a:prstGeom>
+          <a:extLst>
+            <a:ext uri="{C572A759-6A51-4108-AA02-DFA0A04FC94B}">
+              <ma14:wrappingTextBoxFlag xmlns:ma14="http://schemas.microsoft.com/office/mac/drawingml/2011/main" val="0"/>
+            </a:ext>
+          </a:extLst>
+        </p:spPr>
+        <p:txBody>
+          <a:bodyPr/>
+          <a:lstStyle>
+            <a:lvl1pPr>
+              <a:defRPr sz="800">
+                <a:solidFill>
+                  <a:srgbClr val="6B7585"/>
+                </a:solidFill>
+              </a:defRPr>
+            </a:lvl1pPr>
+          </a:lstStyle>
+          <a:p>
+            <a:pPr algn="r"/>
+            <a:fld id="{F7021451-1387-4CA6-816F-3879F97B5CBC}" type="slidenum">
+              <a:rPr b="0" lang="en-US"/>
+              <a:t>28</a:t>
+            </a:fld>
+            <a:endParaRPr lang="en-US"/>
+          </a:p>
+        </p:txBody>
+      </p:sp>
+    </p:spTree>
+  </p:cSld>
+  <p:clrMapOvr>
+    <a:masterClrMapping/>
+  </p:clrMapOvr>
+</p:sld>
+</file>
+
+<file path=ppt/slides/slide29.xml><?xml version="1.0" encoding="utf-8"?>
+<p:sld xmlns:a="http://schemas.openxmlformats.org/drawingml/2006/main" xmlns:r="http://schemas.openxmlformats.org/officeDocument/2006/relationships" xmlns:p="http://schemas.openxmlformats.org/presentationml/2006/main">
+  <p:cSld name="Slide 29">
+    <p:spTree>
+      <p:nvGrpSpPr>
+        <p:cNvPr id="1" name=""/>
+        <p:cNvGrpSpPr/>
+        <p:nvPr/>
+      </p:nvGrpSpPr>
+      <p:grpSpPr>
+        <a:xfrm>
+          <a:off x="0" y="0"/>
+          <a:ext cx="0" cy="0"/>
+          <a:chOff x="0" y="0"/>
+          <a:chExt cx="0" cy="0"/>
+        </a:xfrm>
+      </p:grpSpPr>
+      <p:sp>
+        <p:nvSpPr>
+          <p:cNvPr id="2" name="Text 0"/>
+          <p:cNvSpPr txBox="1"/>
+          <p:nvPr/>
+        </p:nvSpPr>
+        <p:spPr>
+          <a:xfrm>
+            <a:off x="502920" y="365760"/>
+            <a:ext cx="6400800" cy="274320"/>
+          </a:xfrm>
+          <a:prstGeom prst="rect">
+            <a:avLst/>
+          </a:prstGeom>
+          <a:noFill/>
+          <a:ln/>
+        </p:spPr>
+        <p:txBody>
+          <a:bodyPr wrap="square" lIns="0" tIns="0" rIns="0" bIns="0" rtlCol="0" anchor="ctr"/>
+          <a:lstStyle/>
+          <a:p>
+            <a:pPr indent="0" marL="0">
+              <a:buNone/>
+            </a:pPr>
+            <a:r>
+              <a:rPr lang="en-US" sz="950" b="1" spc="220" kern="0" dirty="0">
+                <a:solidFill>
+                  <a:srgbClr val="122B82"/>
+                </a:solidFill>
+              </a:rPr>
+              <a:t>SUMMARY AND ACTIONS</a:t>
+            </a:r>
+            <a:endParaRPr lang="en-US" sz="950" dirty="0"/>
+          </a:p>
+        </p:txBody>
+      </p:sp>
+      <p:sp>
+        <p:nvSpPr>
+          <p:cNvPr id="3" name="Text 1"/>
+          <p:cNvSpPr txBox="1"/>
+          <p:nvPr/>
+        </p:nvSpPr>
+        <p:spPr>
+          <a:xfrm>
+            <a:off x="502920" y="640080"/>
+            <a:ext cx="7315200" cy="685800"/>
+          </a:xfrm>
+          <a:prstGeom prst="rect">
+            <a:avLst/>
+          </a:prstGeom>
+          <a:noFill/>
+          <a:ln/>
+        </p:spPr>
+        <p:txBody>
+          <a:bodyPr wrap="square" lIns="0" tIns="0" rIns="0" bIns="0" rtlCol="0" anchor="ctr"/>
+          <a:lstStyle/>
+          <a:p>
+            <a:pPr indent="0" marL="0">
+              <a:buNone/>
+            </a:pPr>
+            <a:r>
+              <a:rPr lang="en-US" sz="2700" b="1" dirty="0">
+                <a:solidFill>
+                  <a:srgbClr val="242C39"/>
+                </a:solidFill>
+              </a:rPr>
               <a:t>What we agreed</a:t>
             </a:r>
             <a:endParaRPr lang="en-US" sz="2700" dirty="0"/>
@@ -10660,7 +11621,7 @@
       </p:sp>
       <p:graphicFrame>
         <p:nvGraphicFramePr>
-          <p:cNvPr id="28" name="Table 0"/>
+          <p:cNvPr id="30" name="Table 0"/>
           <p:cNvGraphicFramePr>
             <a:graphicFrameLocks noGrp="1"/>
           </p:cNvGraphicFramePr>
@@ -12613,244 +13574,9 @@
             <a:pPr algn="r"/>
             <a:fld id="{F7021451-1387-4CA6-816F-3879F97B5CBC}" type="slidenum">
               <a:rPr b="0" lang="en-US"/>
-              <a:t>27</a:t>
+              <a:t>29</a:t>
             </a:fld>
             <a:endParaRPr lang="en-US"/>
-          </a:p>
-        </p:txBody>
-      </p:sp>
-    </p:spTree>
-  </p:cSld>
-  <p:clrMapOvr>
-    <a:masterClrMapping/>
-  </p:clrMapOvr>
-</p:sld>
-</file>
-
-<file path=ppt/slides/slide28.xml><?xml version="1.0" encoding="utf-8"?>
-<p:sld xmlns:a="http://schemas.openxmlformats.org/drawingml/2006/main" xmlns:r="http://schemas.openxmlformats.org/officeDocument/2006/relationships" xmlns:p="http://schemas.openxmlformats.org/presentationml/2006/main">
-  <p:cSld name="Slide 28">
-    <p:spTree>
-      <p:nvGrpSpPr>
-        <p:cNvPr id="1" name=""/>
-        <p:cNvGrpSpPr/>
-        <p:nvPr/>
-      </p:nvGrpSpPr>
-      <p:grpSpPr>
-        <a:xfrm>
-          <a:off x="0" y="0"/>
-          <a:ext cx="0" cy="0"/>
-          <a:chOff x="0" y="0"/>
-          <a:chExt cx="0" cy="0"/>
-        </a:xfrm>
-      </p:grpSpPr>
-      <p:sp>
-        <p:nvSpPr>
-          <p:cNvPr id="2" name="closing circle 0"/>
-          <p:cNvSpPr/>
-          <p:nvPr/>
-        </p:nvSpPr>
-        <p:spPr>
-          <a:xfrm>
-            <a:off x="5029200" y="228600"/>
-            <a:ext cx="2286000" cy="2286000"/>
-          </a:xfrm>
-          <a:prstGeom prst="ellipse">
-            <a:avLst/>
-          </a:prstGeom>
-          <a:solidFill>
-            <a:srgbClr val="3FD0C9">
-              <a:alpha val="82000"/>
-            </a:srgbClr>
-          </a:solidFill>
-          <a:ln/>
-        </p:spPr>
-      </p:sp>
-      <p:sp>
-        <p:nvSpPr>
-          <p:cNvPr id="3" name="closing circle 1"/>
-          <p:cNvSpPr/>
-          <p:nvPr/>
-        </p:nvSpPr>
-        <p:spPr>
-          <a:xfrm>
-            <a:off x="6217920" y="1234440"/>
-            <a:ext cx="1920240" cy="1920240"/>
-          </a:xfrm>
-          <a:prstGeom prst="ellipse">
-            <a:avLst/>
-          </a:prstGeom>
-          <a:solidFill>
-            <a:srgbClr val="6D71FF">
-              <a:alpha val="82000"/>
-            </a:srgbClr>
-          </a:solidFill>
-          <a:ln/>
-        </p:spPr>
-      </p:sp>
-      <p:sp>
-        <p:nvSpPr>
-          <p:cNvPr id="4" name="closing circle 2"/>
-          <p:cNvSpPr/>
-          <p:nvPr/>
-        </p:nvSpPr>
-        <p:spPr>
-          <a:xfrm>
-            <a:off x="5303520" y="2148840"/>
-            <a:ext cx="2377440" cy="2377440"/>
-          </a:xfrm>
-          <a:prstGeom prst="ellipse">
-            <a:avLst/>
-          </a:prstGeom>
-          <a:solidFill>
-            <a:srgbClr val="F33844">
-              <a:alpha val="82000"/>
-            </a:srgbClr>
-          </a:solidFill>
-          <a:ln/>
-        </p:spPr>
-      </p:sp>
-      <p:sp>
-        <p:nvSpPr>
-          <p:cNvPr id="5" name="Text 3"/>
-          <p:cNvSpPr txBox="1"/>
-          <p:nvPr/>
-        </p:nvSpPr>
-        <p:spPr>
-          <a:xfrm>
-            <a:off x="502920" y="411480"/>
-            <a:ext cx="1828800" cy="640080"/>
-          </a:xfrm>
-          <a:prstGeom prst="rect">
-            <a:avLst/>
-          </a:prstGeom>
-          <a:noFill/>
-          <a:ln/>
-        </p:spPr>
-        <p:txBody>
-          <a:bodyPr wrap="square" lIns="0" tIns="0" rIns="0" bIns="0" rtlCol="0" anchor="ctr"/>
-          <a:lstStyle/>
-          <a:p>
-            <a:pPr indent="0" marL="0">
-              <a:buNone/>
-            </a:pPr>
-            <a:r>
-              <a:rPr lang="en-US" sz="3400" b="1" dirty="0">
-                <a:solidFill>
-                  <a:srgbClr val="FFFFFF"/>
-                </a:solidFill>
-              </a:rPr>
-              <a:t>cts</a:t>
-            </a:r>
-            <a:endParaRPr lang="en-US" sz="3400" dirty="0"/>
-          </a:p>
-        </p:txBody>
-      </p:sp>
-      <p:sp>
-        <p:nvSpPr>
-          <p:cNvPr id="6" name="Text 4"/>
-          <p:cNvSpPr txBox="1"/>
-          <p:nvPr/>
-        </p:nvSpPr>
-        <p:spPr>
-          <a:xfrm>
-            <a:off x="548640" y="896112"/>
-            <a:ext cx="1828800" cy="228600"/>
-          </a:xfrm>
-          <a:prstGeom prst="rect">
-            <a:avLst/>
-          </a:prstGeom>
-          <a:noFill/>
-          <a:ln/>
-        </p:spPr>
-        <p:txBody>
-          <a:bodyPr wrap="square" lIns="0" tIns="0" rIns="0" bIns="0" rtlCol="0" anchor="ctr"/>
-          <a:lstStyle/>
-          <a:p>
-            <a:pPr indent="0" marL="0">
-              <a:buNone/>
-            </a:pPr>
-            <a:r>
-              <a:rPr lang="en-US" sz="850" dirty="0">
-                <a:solidFill>
-                  <a:srgbClr val="C9CED6"/>
-                </a:solidFill>
-              </a:rPr>
-              <a:t>Seamless AV</a:t>
-            </a:r>
-            <a:endParaRPr lang="en-US" sz="850" dirty="0"/>
-          </a:p>
-        </p:txBody>
-      </p:sp>
-      <p:sp>
-        <p:nvSpPr>
-          <p:cNvPr id="7" name="Text 5"/>
-          <p:cNvSpPr txBox="1"/>
-          <p:nvPr/>
-        </p:nvSpPr>
-        <p:spPr>
-          <a:xfrm>
-            <a:off x="502920" y="2103120"/>
-            <a:ext cx="4572000" cy="731520"/>
-          </a:xfrm>
-          <a:prstGeom prst="rect">
-            <a:avLst/>
-          </a:prstGeom>
-          <a:noFill/>
-          <a:ln/>
-        </p:spPr>
-        <p:txBody>
-          <a:bodyPr wrap="square" lIns="0" tIns="0" rIns="0" bIns="0" rtlCol="0" anchor="ctr"/>
-          <a:lstStyle/>
-          <a:p>
-            <a:pPr indent="0" marL="0">
-              <a:buNone/>
-            </a:pPr>
-            <a:r>
-              <a:rPr lang="en-US" sz="3800" b="1" dirty="0">
-                <a:solidFill>
-                  <a:srgbClr val="FFFFFF"/>
-                </a:solidFill>
-              </a:rPr>
-              <a:t>Thank you</a:t>
-            </a:r>
-            <a:endParaRPr lang="en-US" sz="3800" dirty="0"/>
-          </a:p>
-        </p:txBody>
-      </p:sp>
-      <p:sp>
-        <p:nvSpPr>
-          <p:cNvPr id="8" name="Text 6"/>
-          <p:cNvSpPr txBox="1"/>
-          <p:nvPr/>
-        </p:nvSpPr>
-        <p:spPr>
-          <a:xfrm>
-            <a:off x="502920" y="2834640"/>
-            <a:ext cx="4572000" cy="365760"/>
-          </a:xfrm>
-          <a:prstGeom prst="rect">
-            <a:avLst/>
-          </a:prstGeom>
-          <a:noFill/>
-          <a:ln/>
-        </p:spPr>
-        <p:txBody>
-          <a:bodyPr wrap="square" lIns="0" tIns="0" rIns="0" bIns="0" rtlCol="0" anchor="ctr"/>
-          <a:lstStyle/>
-          <a:p>
-            <a:pPr indent="0" marL="0">
-              <a:buNone/>
-            </a:pPr>
-            <a:r>
-              <a:rPr lang="en-US" sz="1300" dirty="0">
-                <a:solidFill>
-                  <a:srgbClr val="C9CED6"/>
-                </a:solidFill>
-              </a:rPr>
-              <a:t>Questions and discussion</a:t>
-            </a:r>
-            <a:endParaRPr lang="en-US" sz="1300" dirty="0"/>
           </a:p>
         </p:txBody>
       </p:sp>
@@ -14796,6 +15522,241 @@
               <a:t>3</a:t>
             </a:fld>
             <a:endParaRPr lang="en-US"/>
+          </a:p>
+        </p:txBody>
+      </p:sp>
+    </p:spTree>
+  </p:cSld>
+  <p:clrMapOvr>
+    <a:masterClrMapping/>
+  </p:clrMapOvr>
+</p:sld>
+</file>
+
+<file path=ppt/slides/slide30.xml><?xml version="1.0" encoding="utf-8"?>
+<p:sld xmlns:a="http://schemas.openxmlformats.org/drawingml/2006/main" xmlns:r="http://schemas.openxmlformats.org/officeDocument/2006/relationships" xmlns:p="http://schemas.openxmlformats.org/presentationml/2006/main">
+  <p:cSld name="Slide 30">
+    <p:spTree>
+      <p:nvGrpSpPr>
+        <p:cNvPr id="1" name=""/>
+        <p:cNvGrpSpPr/>
+        <p:nvPr/>
+      </p:nvGrpSpPr>
+      <p:grpSpPr>
+        <a:xfrm>
+          <a:off x="0" y="0"/>
+          <a:ext cx="0" cy="0"/>
+          <a:chOff x="0" y="0"/>
+          <a:chExt cx="0" cy="0"/>
+        </a:xfrm>
+      </p:grpSpPr>
+      <p:sp>
+        <p:nvSpPr>
+          <p:cNvPr id="2" name="closing circle 0"/>
+          <p:cNvSpPr/>
+          <p:nvPr/>
+        </p:nvSpPr>
+        <p:spPr>
+          <a:xfrm>
+            <a:off x="5029200" y="228600"/>
+            <a:ext cx="2286000" cy="2286000"/>
+          </a:xfrm>
+          <a:prstGeom prst="ellipse">
+            <a:avLst/>
+          </a:prstGeom>
+          <a:solidFill>
+            <a:srgbClr val="3FD0C9">
+              <a:alpha val="82000"/>
+            </a:srgbClr>
+          </a:solidFill>
+          <a:ln/>
+        </p:spPr>
+      </p:sp>
+      <p:sp>
+        <p:nvSpPr>
+          <p:cNvPr id="3" name="closing circle 1"/>
+          <p:cNvSpPr/>
+          <p:nvPr/>
+        </p:nvSpPr>
+        <p:spPr>
+          <a:xfrm>
+            <a:off x="6217920" y="1234440"/>
+            <a:ext cx="1920240" cy="1920240"/>
+          </a:xfrm>
+          <a:prstGeom prst="ellipse">
+            <a:avLst/>
+          </a:prstGeom>
+          <a:solidFill>
+            <a:srgbClr val="6D71FF">
+              <a:alpha val="82000"/>
+            </a:srgbClr>
+          </a:solidFill>
+          <a:ln/>
+        </p:spPr>
+      </p:sp>
+      <p:sp>
+        <p:nvSpPr>
+          <p:cNvPr id="4" name="closing circle 2"/>
+          <p:cNvSpPr/>
+          <p:nvPr/>
+        </p:nvSpPr>
+        <p:spPr>
+          <a:xfrm>
+            <a:off x="5303520" y="2148840"/>
+            <a:ext cx="2377440" cy="2377440"/>
+          </a:xfrm>
+          <a:prstGeom prst="ellipse">
+            <a:avLst/>
+          </a:prstGeom>
+          <a:solidFill>
+            <a:srgbClr val="F33844">
+              <a:alpha val="82000"/>
+            </a:srgbClr>
+          </a:solidFill>
+          <a:ln/>
+        </p:spPr>
+      </p:sp>
+      <p:sp>
+        <p:nvSpPr>
+          <p:cNvPr id="5" name="Text 3"/>
+          <p:cNvSpPr txBox="1"/>
+          <p:nvPr/>
+        </p:nvSpPr>
+        <p:spPr>
+          <a:xfrm>
+            <a:off x="502920" y="411480"/>
+            <a:ext cx="1828800" cy="640080"/>
+          </a:xfrm>
+          <a:prstGeom prst="rect">
+            <a:avLst/>
+          </a:prstGeom>
+          <a:noFill/>
+          <a:ln/>
+        </p:spPr>
+        <p:txBody>
+          <a:bodyPr wrap="square" lIns="0" tIns="0" rIns="0" bIns="0" rtlCol="0" anchor="ctr"/>
+          <a:lstStyle/>
+          <a:p>
+            <a:pPr indent="0" marL="0">
+              <a:buNone/>
+            </a:pPr>
+            <a:r>
+              <a:rPr lang="en-US" sz="3400" b="1" dirty="0">
+                <a:solidFill>
+                  <a:srgbClr val="FFFFFF"/>
+                </a:solidFill>
+              </a:rPr>
+              <a:t>cts</a:t>
+            </a:r>
+            <a:endParaRPr lang="en-US" sz="3400" dirty="0"/>
+          </a:p>
+        </p:txBody>
+      </p:sp>
+      <p:sp>
+        <p:nvSpPr>
+          <p:cNvPr id="6" name="Text 4"/>
+          <p:cNvSpPr txBox="1"/>
+          <p:nvPr/>
+        </p:nvSpPr>
+        <p:spPr>
+          <a:xfrm>
+            <a:off x="548640" y="896112"/>
+            <a:ext cx="1828800" cy="228600"/>
+          </a:xfrm>
+          <a:prstGeom prst="rect">
+            <a:avLst/>
+          </a:prstGeom>
+          <a:noFill/>
+          <a:ln/>
+        </p:spPr>
+        <p:txBody>
+          <a:bodyPr wrap="square" lIns="0" tIns="0" rIns="0" bIns="0" rtlCol="0" anchor="ctr"/>
+          <a:lstStyle/>
+          <a:p>
+            <a:pPr indent="0" marL="0">
+              <a:buNone/>
+            </a:pPr>
+            <a:r>
+              <a:rPr lang="en-US" sz="850" dirty="0">
+                <a:solidFill>
+                  <a:srgbClr val="C9CED6"/>
+                </a:solidFill>
+              </a:rPr>
+              <a:t>Seamless AV</a:t>
+            </a:r>
+            <a:endParaRPr lang="en-US" sz="850" dirty="0"/>
+          </a:p>
+        </p:txBody>
+      </p:sp>
+      <p:sp>
+        <p:nvSpPr>
+          <p:cNvPr id="7" name="Text 5"/>
+          <p:cNvSpPr txBox="1"/>
+          <p:nvPr/>
+        </p:nvSpPr>
+        <p:spPr>
+          <a:xfrm>
+            <a:off x="502920" y="2103120"/>
+            <a:ext cx="4572000" cy="731520"/>
+          </a:xfrm>
+          <a:prstGeom prst="rect">
+            <a:avLst/>
+          </a:prstGeom>
+          <a:noFill/>
+          <a:ln/>
+        </p:spPr>
+        <p:txBody>
+          <a:bodyPr wrap="square" lIns="0" tIns="0" rIns="0" bIns="0" rtlCol="0" anchor="ctr"/>
+          <a:lstStyle/>
+          <a:p>
+            <a:pPr indent="0" marL="0">
+              <a:buNone/>
+            </a:pPr>
+            <a:r>
+              <a:rPr lang="en-US" sz="3800" b="1" dirty="0">
+                <a:solidFill>
+                  <a:srgbClr val="FFFFFF"/>
+                </a:solidFill>
+              </a:rPr>
+              <a:t>Thank you</a:t>
+            </a:r>
+            <a:endParaRPr lang="en-US" sz="3800" dirty="0"/>
+          </a:p>
+        </p:txBody>
+      </p:sp>
+      <p:sp>
+        <p:nvSpPr>
+          <p:cNvPr id="8" name="Text 6"/>
+          <p:cNvSpPr txBox="1"/>
+          <p:nvPr/>
+        </p:nvSpPr>
+        <p:spPr>
+          <a:xfrm>
+            <a:off x="502920" y="2834640"/>
+            <a:ext cx="4572000" cy="365760"/>
+          </a:xfrm>
+          <a:prstGeom prst="rect">
+            <a:avLst/>
+          </a:prstGeom>
+          <a:noFill/>
+          <a:ln/>
+        </p:spPr>
+        <p:txBody>
+          <a:bodyPr wrap="square" lIns="0" tIns="0" rIns="0" bIns="0" rtlCol="0" anchor="ctr"/>
+          <a:lstStyle/>
+          <a:p>
+            <a:pPr indent="0" marL="0">
+              <a:buNone/>
+            </a:pPr>
+            <a:r>
+              <a:rPr lang="en-US" sz="1300" dirty="0">
+                <a:solidFill>
+                  <a:srgbClr val="C9CED6"/>
+                </a:solidFill>
+              </a:rPr>
+              <a:t>Questions and discussion</a:t>
+            </a:r>
+            <a:endParaRPr lang="en-US" sz="1300" dirty="0"/>
           </a:p>
         </p:txBody>
       </p:sp>

--- a/deck/CTS Monthly Business Review - September 2026.pptx
+++ b/deck/CTS Monthly Business Review - September 2026.pptx
@@ -4520,107 +4520,107 @@
           <a:p>
             <a:pPr marL="342900" indent="-342900">
               <a:lnSpc>
-                <a:spcPts val="1300"/>
+                <a:spcPts val="1150"/>
               </a:lnSpc>
               <a:spcAft>
-                <a:spcPts val="500"/>
+                <a:spcPts val="400"/>
               </a:spcAft>
               <a:buSzPct val="100000"/>
               <a:buChar char="•"/>
             </a:pPr>
             <a:r>
-              <a:rPr lang="en-US" sz="950" dirty="0">
+              <a:rPr lang="en-US" sz="900" dirty="0">
                 <a:solidFill>
                   <a:srgbClr val="3A4453"/>
                 </a:solidFill>
               </a:rPr>
               <a:t>Billed 73k against 66k, in a month between the busy results periods.</a:t>
             </a:r>
-            <a:endParaRPr lang="en-US" sz="950" dirty="0"/>
+            <a:endParaRPr lang="en-US" sz="900" dirty="0"/>
           </a:p>
           <a:p>
             <a:pPr marL="342900" indent="-342900">
               <a:lnSpc>
-                <a:spcPts val="1300"/>
+                <a:spcPts val="1150"/>
               </a:lnSpc>
               <a:spcAft>
-                <a:spcPts val="500"/>
+                <a:spcPts val="400"/>
               </a:spcAft>
               <a:buSzPct val="100000"/>
               <a:buChar char="•"/>
             </a:pPr>
             <a:r>
-              <a:rPr lang="en-US" sz="950" dirty="0">
+              <a:rPr lang="en-US" sz="900" dirty="0">
                 <a:solidFill>
                   <a:srgbClr val="3A4453"/>
                 </a:solidFill>
               </a:rPr>
               <a:t>Keeps 78% of what it sells, the second best in the business.</a:t>
             </a:r>
-            <a:endParaRPr lang="en-US" sz="950" dirty="0"/>
+            <a:endParaRPr lang="en-US" sz="900" dirty="0"/>
           </a:p>
           <a:p>
             <a:pPr marL="342900" indent="-342900">
               <a:lnSpc>
-                <a:spcPts val="1300"/>
+                <a:spcPts val="1150"/>
               </a:lnSpc>
               <a:spcAft>
-                <a:spcPts val="500"/>
+                <a:spcPts val="400"/>
               </a:spcAft>
               <a:buSzPct val="100000"/>
               <a:buChar char="•"/>
             </a:pPr>
             <a:r>
-              <a:rPr lang="en-US" sz="950" dirty="0">
+              <a:rPr lang="en-US" sz="900" dirty="0">
                 <a:solidFill>
                   <a:srgbClr val="3A4453"/>
                 </a:solidFill>
               </a:rPr>
               <a:t>And still loses 54k, because it is charged 111k of running costs on 73k of sales.</a:t>
             </a:r>
-            <a:endParaRPr lang="en-US" sz="950" dirty="0"/>
+            <a:endParaRPr lang="en-US" sz="900" dirty="0"/>
           </a:p>
           <a:p>
             <a:pPr marL="342900" indent="-342900">
               <a:lnSpc>
-                <a:spcPts val="1300"/>
+                <a:spcPts val="1150"/>
               </a:lnSpc>
               <a:spcAft>
-                <a:spcPts val="500"/>
+                <a:spcPts val="400"/>
               </a:spcAft>
               <a:buSzPct val="100000"/>
               <a:buChar char="•"/>
             </a:pPr>
             <a:r>
-              <a:rPr lang="en-US" sz="950" dirty="0">
+              <a:rPr lang="en-US" sz="900" dirty="0">
                 <a:solidFill>
                   <a:srgbClr val="3A4453"/>
                 </a:solidFill>
               </a:rPr>
               <a:t>72k of that is office cost, split on who uses the office. Events is not the department sitting in it.</a:t>
             </a:r>
-            <a:endParaRPr lang="en-US" sz="950" dirty="0"/>
+            <a:endParaRPr lang="en-US" sz="900" dirty="0"/>
           </a:p>
           <a:p>
             <a:pPr marL="342900" indent="-342900">
               <a:lnSpc>
-                <a:spcPts val="1300"/>
+                <a:spcPts val="1150"/>
               </a:lnSpc>
               <a:spcAft>
-                <a:spcPts val="500"/>
+                <a:spcPts val="400"/>
               </a:spcAft>
               <a:buSzPct val="100000"/>
               <a:buChar char="•"/>
             </a:pPr>
             <a:r>
-              <a:rPr lang="en-US" sz="950" dirty="0">
+              <a:rPr lang="en-US" sz="900" dirty="0">
                 <a:solidFill>
                   <a:srgbClr val="3A4453"/>
                 </a:solidFill>
               </a:rPr>
               <a:t>333 hours went to leave and only 241 onto jobs. The people were there, the work was not.</a:t>
             </a:r>
-            <a:endParaRPr lang="en-US" sz="950" dirty="0"/>
+            <a:endParaRPr lang="en-US" sz="900" dirty="0"/>
           </a:p>
         </p:txBody>
       </p:sp>
@@ -4907,107 +4907,107 @@
           <a:p>
             <a:pPr marL="342900" indent="-342900">
               <a:lnSpc>
-                <a:spcPts val="1300"/>
+                <a:spcPts val="1200"/>
               </a:lnSpc>
               <a:spcAft>
-                <a:spcPts val="500"/>
+                <a:spcPts val="400"/>
               </a:spcAft>
               <a:buSzPct val="100000"/>
               <a:buChar char="•"/>
             </a:pPr>
             <a:r>
-              <a:rPr lang="en-US" sz="1000" dirty="0">
+              <a:rPr lang="en-US" sz="950" dirty="0">
                 <a:solidFill>
                   <a:srgbClr val="3A4453"/>
                 </a:solidFill>
               </a:rPr>
               <a:t>Billed 7k against 17k. Short of plan for the third month running.</a:t>
             </a:r>
-            <a:endParaRPr lang="en-US" sz="1000" dirty="0"/>
+            <a:endParaRPr lang="en-US" sz="950" dirty="0"/>
           </a:p>
           <a:p>
             <a:pPr marL="342900" indent="-342900">
               <a:lnSpc>
-                <a:spcPts val="1300"/>
+                <a:spcPts val="1200"/>
               </a:lnSpc>
               <a:spcAft>
-                <a:spcPts val="500"/>
+                <a:spcPts val="400"/>
               </a:spcAft>
               <a:buSzPct val="100000"/>
               <a:buChar char="•"/>
             </a:pPr>
             <a:r>
-              <a:rPr lang="en-US" sz="1000" dirty="0">
+              <a:rPr lang="en-US" sz="950" dirty="0">
                 <a:solidFill>
                   <a:srgbClr val="3A4453"/>
                 </a:solidFill>
               </a:rPr>
               <a:t>Keeps 80% of what it sells, the best margin in the business.</a:t>
             </a:r>
-            <a:endParaRPr lang="en-US" sz="1000" dirty="0"/>
+            <a:endParaRPr lang="en-US" sz="950" dirty="0"/>
           </a:p>
           <a:p>
             <a:pPr marL="342900" indent="-342900">
               <a:lnSpc>
-                <a:spcPts val="1300"/>
+                <a:spcPts val="1200"/>
               </a:lnSpc>
               <a:spcAft>
-                <a:spcPts val="500"/>
+                <a:spcPts val="400"/>
               </a:spcAft>
               <a:buSzPct val="100000"/>
               <a:buChar char="•"/>
             </a:pPr>
             <a:r>
-              <a:rPr lang="en-US" sz="1000" dirty="0">
+              <a:rPr lang="en-US" sz="950" dirty="0">
                 <a:solidFill>
                   <a:srgbClr val="3A4453"/>
                 </a:solidFill>
               </a:rPr>
               <a:t>But on 7k of sales that is only 6k, against 13k of running costs.</a:t>
             </a:r>
-            <a:endParaRPr lang="en-US" sz="1000" dirty="0"/>
+            <a:endParaRPr lang="en-US" sz="950" dirty="0"/>
           </a:p>
           <a:p>
             <a:pPr marL="342900" indent="-342900">
               <a:lnSpc>
-                <a:spcPts val="1300"/>
+                <a:spcPts val="1200"/>
               </a:lnSpc>
               <a:spcAft>
-                <a:spcPts val="500"/>
+                <a:spcPts val="400"/>
               </a:spcAft>
               <a:buSzPct val="100000"/>
               <a:buChar char="•"/>
             </a:pPr>
             <a:r>
-              <a:rPr lang="en-US" sz="1000" dirty="0">
+              <a:rPr lang="en-US" sz="950" dirty="0">
                 <a:solidFill>
                   <a:srgbClr val="3A4453"/>
                 </a:solidFill>
               </a:rPr>
               <a:t>The margin is not the problem. There is not enough work going through it.</a:t>
             </a:r>
-            <a:endParaRPr lang="en-US" sz="1000" dirty="0"/>
+            <a:endParaRPr lang="en-US" sz="950" dirty="0"/>
           </a:p>
           <a:p>
             <a:pPr marL="342900" indent="-342900">
               <a:lnSpc>
-                <a:spcPts val="1300"/>
+                <a:spcPts val="1200"/>
               </a:lnSpc>
               <a:spcAft>
-                <a:spcPts val="500"/>
+                <a:spcPts val="400"/>
               </a:spcAft>
               <a:buSzPct val="100000"/>
               <a:buChar char="•"/>
             </a:pPr>
             <a:r>
-              <a:rPr lang="en-US" sz="1000" dirty="0">
+              <a:rPr lang="en-US" sz="950" dirty="0">
                 <a:solidFill>
                   <a:srgbClr val="3A4453"/>
                 </a:solidFill>
               </a:rPr>
               <a:t>24.5 billable hours in the month. That is one person, part of the time.</a:t>
             </a:r>
-            <a:endParaRPr lang="en-US" sz="1000" dirty="0"/>
+            <a:endParaRPr lang="en-US" sz="950" dirty="0"/>
           </a:p>
         </p:txBody>
       </p:sp>
@@ -5294,107 +5294,107 @@
           <a:p>
             <a:pPr marL="342900" indent="-342900">
               <a:lnSpc>
-                <a:spcPts val="1300"/>
+                <a:spcPts val="1150"/>
               </a:lnSpc>
               <a:spcAft>
-                <a:spcPts val="500"/>
+                <a:spcPts val="400"/>
               </a:spcAft>
               <a:buSzPct val="100000"/>
               <a:buChar char="•"/>
             </a:pPr>
             <a:r>
-              <a:rPr lang="en-US" sz="950" dirty="0">
+              <a:rPr lang="en-US" sz="900" dirty="0">
                 <a:solidFill>
                   <a:srgbClr val="3A4453"/>
                 </a:solidFill>
               </a:rPr>
               <a:t>Billed 235k against a 59k plan. Nearly all of it one installation job, now finished.</a:t>
             </a:r>
-            <a:endParaRPr lang="en-US" sz="950" dirty="0"/>
+            <a:endParaRPr lang="en-US" sz="900" dirty="0"/>
           </a:p>
           <a:p>
             <a:pPr marL="342900" indent="-342900">
               <a:lnSpc>
-                <a:spcPts val="1300"/>
+                <a:spcPts val="1150"/>
               </a:lnSpc>
               <a:spcAft>
-                <a:spcPts val="500"/>
+                <a:spcPts val="400"/>
               </a:spcAft>
               <a:buSzPct val="100000"/>
               <a:buChar char="•"/>
             </a:pPr>
             <a:r>
-              <a:rPr lang="en-US" sz="950" dirty="0">
+              <a:rPr lang="en-US" sz="900" dirty="0">
                 <a:solidFill>
                   <a:srgbClr val="3A4453"/>
                 </a:solidFill>
               </a:rPr>
               <a:t>Keeps only 10% of it. We bought the equipment and resold it, so the money went mostly to suppliers.</a:t>
             </a:r>
-            <a:endParaRPr lang="en-US" sz="950" dirty="0"/>
+            <a:endParaRPr lang="en-US" sz="900" dirty="0"/>
           </a:p>
           <a:p>
             <a:pPr marL="342900" indent="-342900">
               <a:lnSpc>
-                <a:spcPts val="1300"/>
+                <a:spcPts val="1150"/>
               </a:lnSpc>
               <a:spcAft>
-                <a:spcPts val="500"/>
+                <a:spcPts val="400"/>
               </a:spcAft>
               <a:buSzPct val="100000"/>
               <a:buChar char="•"/>
             </a:pPr>
             <a:r>
-              <a:rPr lang="en-US" sz="950" dirty="0">
+              <a:rPr lang="en-US" sz="900" dirty="0">
                 <a:solidFill>
                   <a:srgbClr val="3A4453"/>
                 </a:solidFill>
               </a:rPr>
               <a:t>235k of sales turned into 24k. Do not read the revenue line as a good month.</a:t>
             </a:r>
-            <a:endParaRPr lang="en-US" sz="950" dirty="0"/>
+            <a:endParaRPr lang="en-US" sz="900" dirty="0"/>
           </a:p>
           <a:p>
             <a:pPr marL="342900" indent="-342900">
               <a:lnSpc>
-                <a:spcPts val="1300"/>
+                <a:spcPts val="1150"/>
               </a:lnSpc>
               <a:spcAft>
-                <a:spcPts val="500"/>
+                <a:spcPts val="400"/>
               </a:spcAft>
               <a:buSzPct val="100000"/>
               <a:buChar char="•"/>
             </a:pPr>
             <a:r>
-              <a:rPr lang="en-US" sz="950" dirty="0">
+              <a:rPr lang="en-US" sz="900" dirty="0">
                 <a:solidFill>
                   <a:srgbClr val="3A4453"/>
                 </a:solidFill>
               </a:rPr>
               <a:t>It shows a 10k profit only because it carries almost no running costs, 13k.</a:t>
             </a:r>
-            <a:endParaRPr lang="en-US" sz="950" dirty="0"/>
+            <a:endParaRPr lang="en-US" sz="900" dirty="0"/>
           </a:p>
           <a:p>
             <a:pPr marL="342900" indent="-342900">
               <a:lnSpc>
-                <a:spcPts val="1300"/>
+                <a:spcPts val="1150"/>
               </a:lnSpc>
               <a:spcAft>
-                <a:spcPts val="500"/>
+                <a:spcPts val="400"/>
               </a:spcAft>
               <a:buSzPct val="100000"/>
               <a:buChar char="•"/>
             </a:pPr>
             <a:r>
-              <a:rPr lang="en-US" sz="950" dirty="0">
+              <a:rPr lang="en-US" sz="900" dirty="0">
                 <a:solidFill>
                   <a:srgbClr val="3A4453"/>
                 </a:solidFill>
               </a:rPr>
               <a:t>10 billable hours against 235k of sales. We resold, we did not deliver.</a:t>
             </a:r>
-            <a:endParaRPr lang="en-US" sz="950" dirty="0"/>
+            <a:endParaRPr lang="en-US" sz="900" dirty="0"/>
           </a:p>
         </p:txBody>
       </p:sp>
@@ -5681,10 +5681,10 @@
           <a:p>
             <a:pPr marL="342900" indent="-342900">
               <a:lnSpc>
-                <a:spcPts val="1300"/>
+                <a:spcPts val="1200"/>
               </a:lnSpc>
               <a:spcAft>
-                <a:spcPts val="500"/>
+                <a:spcPts val="400"/>
               </a:spcAft>
               <a:buSzPct val="100000"/>
               <a:buChar char="•"/>
@@ -5702,10 +5702,10 @@
           <a:p>
             <a:pPr marL="342900" indent="-342900">
               <a:lnSpc>
-                <a:spcPts val="1300"/>
+                <a:spcPts val="1200"/>
               </a:lnSpc>
               <a:spcAft>
-                <a:spcPts val="500"/>
+                <a:spcPts val="400"/>
               </a:spcAft>
               <a:buSzPct val="100000"/>
               <a:buChar char="•"/>
@@ -5723,10 +5723,10 @@
           <a:p>
             <a:pPr marL="342900" indent="-342900">
               <a:lnSpc>
-                <a:spcPts val="1300"/>
+                <a:spcPts val="1200"/>
               </a:lnSpc>
               <a:spcAft>
-                <a:spcPts val="500"/>
+                <a:spcPts val="400"/>
               </a:spcAft>
               <a:buSzPct val="100000"/>
               <a:buChar char="•"/>
@@ -5744,10 +5744,10 @@
           <a:p>
             <a:pPr marL="342900" indent="-342900">
               <a:lnSpc>
-                <a:spcPts val="1300"/>
+                <a:spcPts val="1200"/>
               </a:lnSpc>
               <a:spcAft>
-                <a:spcPts val="500"/>
+                <a:spcPts val="400"/>
               </a:spcAft>
               <a:buSzPct val="100000"/>
               <a:buChar char="•"/>
@@ -5765,10 +5765,10 @@
           <a:p>
             <a:pPr marL="342900" indent="-342900">
               <a:lnSpc>
-                <a:spcPts val="1300"/>
+                <a:spcPts val="1200"/>
               </a:lnSpc>
               <a:spcAft>
-                <a:spcPts val="500"/>
+                <a:spcPts val="400"/>
               </a:spcAft>
               <a:buSzPct val="100000"/>
               <a:buChar char="•"/>
@@ -6068,107 +6068,107 @@
           <a:p>
             <a:pPr marL="342900" indent="-342900">
               <a:lnSpc>
-                <a:spcPts val="1150"/>
+                <a:spcPts val="1050"/>
               </a:lnSpc>
               <a:spcAft>
-                <a:spcPts val="500"/>
+                <a:spcPts val="400"/>
               </a:spcAft>
               <a:buSzPct val="100000"/>
               <a:buChar char="•"/>
             </a:pPr>
             <a:r>
-              <a:rPr lang="en-US" sz="900" dirty="0">
+              <a:rPr lang="en-US" sz="850" dirty="0">
                 <a:solidFill>
                   <a:srgbClr val="3A4453"/>
                 </a:solidFill>
               </a:rPr>
               <a:t>Integration billed 235k against a 59k plan. Nearly all of it was one big installation job, now finished, so next month drops back.</a:t>
             </a:r>
-            <a:endParaRPr lang="en-US" sz="900" dirty="0"/>
+            <a:endParaRPr lang="en-US" sz="850" dirty="0"/>
           </a:p>
           <a:p>
             <a:pPr marL="342900" indent="-342900">
               <a:lnSpc>
-                <a:spcPts val="1150"/>
+                <a:spcPts val="1050"/>
               </a:lnSpc>
               <a:spcAft>
-                <a:spcPts val="500"/>
+                <a:spcPts val="400"/>
               </a:spcAft>
               <a:buSzPct val="100000"/>
               <a:buChar char="•"/>
             </a:pPr>
             <a:r>
-              <a:rPr lang="en-US" sz="900" dirty="0">
+              <a:rPr lang="en-US" sz="850" dirty="0">
                 <a:solidFill>
                   <a:srgbClr val="3A4453"/>
                 </a:solidFill>
               </a:rPr>
               <a:t>Support billed 243k against 248k. On plan, which is what fixed monthly contracts should do.</a:t>
             </a:r>
-            <a:endParaRPr lang="en-US" sz="900" dirty="0"/>
+            <a:endParaRPr lang="en-US" sz="850" dirty="0"/>
           </a:p>
           <a:p>
             <a:pPr marL="342900" indent="-342900">
               <a:lnSpc>
-                <a:spcPts val="1150"/>
+                <a:spcPts val="1050"/>
               </a:lnSpc>
               <a:spcAft>
-                <a:spcPts val="500"/>
+                <a:spcPts val="400"/>
               </a:spcAft>
               <a:buSzPct val="100000"/>
               <a:buChar char="•"/>
             </a:pPr>
             <a:r>
-              <a:rPr lang="en-US" sz="900" dirty="0">
+              <a:rPr lang="en-US" sz="850" dirty="0">
                 <a:solidFill>
                   <a:srgbClr val="3A4453"/>
                 </a:solidFill>
               </a:rPr>
               <a:t>Events billed 73k against 66k, in a month that sits between the busy results periods.</a:t>
             </a:r>
-            <a:endParaRPr lang="en-US" sz="900" dirty="0"/>
+            <a:endParaRPr lang="en-US" sz="850" dirty="0"/>
           </a:p>
           <a:p>
             <a:pPr marL="342900" indent="-342900">
               <a:lnSpc>
-                <a:spcPts val="1150"/>
+                <a:spcPts val="1050"/>
               </a:lnSpc>
               <a:spcAft>
-                <a:spcPts val="500"/>
+                <a:spcPts val="400"/>
               </a:spcAft>
               <a:buSzPct val="100000"/>
               <a:buChar char="•"/>
             </a:pPr>
             <a:r>
-              <a:rPr lang="en-US" sz="900" dirty="0">
+              <a:rPr lang="en-US" sz="850" dirty="0">
                 <a:solidFill>
                   <a:srgbClr val="3A4453"/>
                 </a:solidFill>
               </a:rPr>
               <a:t>Video billed 7k against 17k and Consulting 4k against 23k. Both have been short every month this year.</a:t>
             </a:r>
-            <a:endParaRPr lang="en-US" sz="900" dirty="0"/>
+            <a:endParaRPr lang="en-US" sz="850" dirty="0"/>
           </a:p>
           <a:p>
             <a:pPr marL="342900" indent="-342900">
               <a:lnSpc>
-                <a:spcPts val="1150"/>
+                <a:spcPts val="1050"/>
               </a:lnSpc>
               <a:spcAft>
-                <a:spcPts val="500"/>
+                <a:spcPts val="400"/>
               </a:spcAft>
               <a:buSzPct val="100000"/>
               <a:buChar char="•"/>
             </a:pPr>
             <a:r>
-              <a:rPr lang="en-US" sz="900" dirty="0">
+              <a:rPr lang="en-US" sz="850" dirty="0">
                 <a:solidFill>
                   <a:srgbClr val="3A4453"/>
                 </a:solidFill>
               </a:rPr>
               <a:t>Company sales are 58% up on last September. We are selling more than last year and keeping less of it.</a:t>
             </a:r>
-            <a:endParaRPr lang="en-US" sz="900" dirty="0"/>
+            <a:endParaRPr lang="en-US" sz="850" dirty="0"/>
           </a:p>
         </p:txBody>
       </p:sp>
@@ -6666,107 +6666,107 @@
           <a:p>
             <a:pPr marL="342900" indent="-342900">
               <a:lnSpc>
-                <a:spcPts val="1150"/>
+                <a:spcPts val="1050"/>
               </a:lnSpc>
               <a:spcAft>
-                <a:spcPts val="500"/>
+                <a:spcPts val="400"/>
               </a:spcAft>
               <a:buSzPct val="100000"/>
               <a:buChar char="•"/>
             </a:pPr>
             <a:r>
-              <a:rPr lang="en-US" sz="900" dirty="0">
+              <a:rPr lang="en-US" sz="850" dirty="0">
                 <a:solidFill>
                   <a:srgbClr val="3A4453"/>
                 </a:solidFill>
               </a:rPr>
               <a:t>Wages for people on jobs (621)k, and wages for everyone else (369)k. Together that is most of what we spend.</a:t>
             </a:r>
-            <a:endParaRPr lang="en-US" sz="900" dirty="0"/>
+            <a:endParaRPr lang="en-US" sz="850" dirty="0"/>
           </a:p>
           <a:p>
             <a:pPr marL="342900" indent="-342900">
               <a:lnSpc>
-                <a:spcPts val="1150"/>
+                <a:spcPts val="1050"/>
               </a:lnSpc>
               <a:spcAft>
-                <a:spcPts val="500"/>
+                <a:spcPts val="400"/>
               </a:spcAft>
               <a:buSzPct val="100000"/>
               <a:buChar char="•"/>
             </a:pPr>
             <a:r>
-              <a:rPr lang="en-US" sz="900" dirty="0">
+              <a:rPr lang="en-US" sz="850" dirty="0">
                 <a:solidFill>
                   <a:srgbClr val="3A4453"/>
                 </a:solidFill>
               </a:rPr>
               <a:t>Wages are what this business spends its money on. Everything else is small next to them.</a:t>
             </a:r>
-            <a:endParaRPr lang="en-US" sz="900" dirty="0"/>
+            <a:endParaRPr lang="en-US" sz="850" dirty="0"/>
           </a:p>
           <a:p>
             <a:pPr marL="342900" indent="-342900">
               <a:lnSpc>
-                <a:spcPts val="1150"/>
+                <a:spcPts val="1050"/>
               </a:lnSpc>
               <a:spcAft>
-                <a:spcPts val="500"/>
+                <a:spcPts val="400"/>
               </a:spcAft>
               <a:buSzPct val="100000"/>
               <a:buChar char="•"/>
             </a:pPr>
             <a:r>
-              <a:rPr lang="en-US" sz="900" dirty="0">
+              <a:rPr lang="en-US" sz="850" dirty="0">
                 <a:solidFill>
                   <a:srgbClr val="3A4453"/>
                 </a:solidFill>
               </a:rPr>
               <a:t>The (369)k of wages for people not on jobs is the same every month. When sales drop this does not, so a bad month lands straight on the profit.</a:t>
             </a:r>
-            <a:endParaRPr lang="en-US" sz="900" dirty="0"/>
+            <a:endParaRPr lang="en-US" sz="850" dirty="0"/>
           </a:p>
           <a:p>
             <a:pPr marL="342900" indent="-342900">
               <a:lnSpc>
-                <a:spcPts val="1150"/>
+                <a:spcPts val="1050"/>
               </a:lnSpc>
               <a:spcAft>
-                <a:spcPts val="500"/>
+                <a:spcPts val="400"/>
               </a:spcAft>
               <a:buSzPct val="100000"/>
               <a:buChar char="•"/>
             </a:pPr>
             <a:r>
-              <a:rPr lang="en-US" sz="900" dirty="0">
+              <a:rPr lang="en-US" sz="850" dirty="0">
                 <a:solidFill>
                   <a:srgbClr val="3A4453"/>
                 </a:solidFill>
               </a:rPr>
               <a:t>Equipment and services at (347)k is the only cost that rises and falls with the work.</a:t>
             </a:r>
-            <a:endParaRPr lang="en-US" sz="900" dirty="0"/>
+            <a:endParaRPr lang="en-US" sz="850" dirty="0"/>
           </a:p>
           <a:p>
             <a:pPr marL="342900" indent="-342900">
               <a:lnSpc>
-                <a:spcPts val="1150"/>
+                <a:spcPts val="1050"/>
               </a:lnSpc>
               <a:spcAft>
-                <a:spcPts val="500"/>
+                <a:spcPts val="400"/>
               </a:spcAft>
               <a:buSzPct val="100000"/>
               <a:buChar char="•"/>
             </a:pPr>
             <a:r>
-              <a:rPr lang="en-US" sz="900" dirty="0">
+              <a:rPr lang="en-US" sz="850" dirty="0">
                 <a:solidFill>
                   <a:srgbClr val="3A4453"/>
                 </a:solidFill>
               </a:rPr>
               <a:t>If we have to cut cost it is people or the office. Nothing else is big enough to matter.</a:t>
             </a:r>
-            <a:endParaRPr lang="en-US" sz="900" dirty="0"/>
+            <a:endParaRPr lang="en-US" sz="850" dirty="0"/>
           </a:p>
         </p:txBody>
       </p:sp>
@@ -7053,107 +7053,107 @@
           <a:p>
             <a:pPr marL="342900" indent="-342900">
               <a:lnSpc>
-                <a:spcPts val="1300"/>
+                <a:spcPts val="1150"/>
               </a:lnSpc>
               <a:spcAft>
-                <a:spcPts val="500"/>
+                <a:spcPts val="400"/>
               </a:spcAft>
               <a:buSzPct val="100000"/>
               <a:buChar char="•"/>
             </a:pPr>
             <a:r>
-              <a:rPr lang="en-US" sz="950" dirty="0">
+              <a:rPr lang="en-US" sz="900" dirty="0">
                 <a:solidFill>
                   <a:srgbClr val="3A4453"/>
                 </a:solidFill>
               </a:rPr>
               <a:t>The office is the big one: rent (62)k plus outgoings (15)k, 77k together.</a:t>
             </a:r>
-            <a:endParaRPr lang="en-US" sz="950" dirty="0"/>
+            <a:endParaRPr lang="en-US" sz="900" dirty="0"/>
           </a:p>
           <a:p>
             <a:pPr marL="342900" indent="-342900">
               <a:lnSpc>
-                <a:spcPts val="1300"/>
+                <a:spcPts val="1150"/>
               </a:lnSpc>
               <a:spcAft>
-                <a:spcPts val="500"/>
+                <a:spcPts val="400"/>
               </a:spcAft>
               <a:buSzPct val="100000"/>
               <a:buChar char="•"/>
             </a:pPr>
             <a:r>
-              <a:rPr lang="en-US" sz="950" dirty="0">
+              <a:rPr lang="en-US" sz="900" dirty="0">
                 <a:solidFill>
                   <a:srgbClr val="3A4453"/>
                 </a:solidFill>
               </a:rPr>
               <a:t>IT support at (40)k is next, and the only one that moves much month to month.</a:t>
             </a:r>
-            <a:endParaRPr lang="en-US" sz="950" dirty="0"/>
+            <a:endParaRPr lang="en-US" sz="900" dirty="0"/>
           </a:p>
           <a:p>
             <a:pPr marL="342900" indent="-342900">
               <a:lnSpc>
-                <a:spcPts val="1300"/>
+                <a:spcPts val="1150"/>
               </a:lnSpc>
               <a:spcAft>
-                <a:spcPts val="500"/>
+                <a:spcPts val="400"/>
               </a:spcAft>
               <a:buSzPct val="100000"/>
               <a:buChar char="•"/>
             </a:pPr>
             <a:r>
-              <a:rPr lang="en-US" sz="950" dirty="0">
+              <a:rPr lang="en-US" sz="900" dirty="0">
                 <a:solidFill>
                   <a:srgbClr val="3A4453"/>
                 </a:solidFill>
               </a:rPr>
               <a:t>Everything below the top three is under six thousand across a full quarter.</a:t>
             </a:r>
-            <a:endParaRPr lang="en-US" sz="950" dirty="0"/>
+            <a:endParaRPr lang="en-US" sz="900" dirty="0"/>
           </a:p>
           <a:p>
             <a:pPr marL="342900" indent="-342900">
               <a:lnSpc>
-                <a:spcPts val="1300"/>
+                <a:spcPts val="1150"/>
               </a:lnSpc>
               <a:spcAft>
-                <a:spcPts val="500"/>
+                <a:spcPts val="400"/>
               </a:spcAft>
               <a:buSzPct val="100000"/>
               <a:buChar char="•"/>
             </a:pPr>
             <a:r>
-              <a:rPr lang="en-US" sz="950" dirty="0">
+              <a:rPr lang="en-US" sz="900" dirty="0">
                 <a:solidFill>
                   <a:srgbClr val="3A4453"/>
                 </a:solidFill>
               </a:rPr>
               <a:t>There is nothing worth saving further down the list. Do not spend management time there.</a:t>
             </a:r>
-            <a:endParaRPr lang="en-US" sz="950" dirty="0"/>
+            <a:endParaRPr lang="en-US" sz="900" dirty="0"/>
           </a:p>
           <a:p>
             <a:pPr marL="342900" indent="-342900">
               <a:lnSpc>
-                <a:spcPts val="1300"/>
+                <a:spcPts val="1150"/>
               </a:lnSpc>
               <a:spcAft>
-                <a:spcPts val="500"/>
+                <a:spcPts val="400"/>
               </a:spcAft>
               <a:buSzPct val="100000"/>
               <a:buChar char="•"/>
             </a:pPr>
             <a:r>
-              <a:rPr lang="en-US" sz="950" dirty="0">
+              <a:rPr lang="en-US" sz="900" dirty="0">
                 <a:solidFill>
                   <a:srgbClr val="3A4453"/>
                 </a:solidFill>
               </a:rPr>
               <a:t>The office is the only real saving here, and that is a lease decision, not a budget one.</a:t>
             </a:r>
-            <a:endParaRPr lang="en-US" sz="950" dirty="0"/>
+            <a:endParaRPr lang="en-US" sz="900" dirty="0"/>
           </a:p>
         </p:txBody>
       </p:sp>
@@ -7440,107 +7440,107 @@
           <a:p>
             <a:pPr marL="342900" indent="-342900">
               <a:lnSpc>
-                <a:spcPts val="1300"/>
+                <a:spcPts val="1050"/>
               </a:lnSpc>
               <a:spcAft>
-                <a:spcPts val="500"/>
+                <a:spcPts val="400"/>
               </a:spcAft>
               <a:buSzPct val="100000"/>
               <a:buChar char="•"/>
             </a:pPr>
             <a:r>
-              <a:rPr lang="en-US" sz="950" dirty="0">
+              <a:rPr lang="en-US" sz="850" dirty="0">
                 <a:solidFill>
                   <a:srgbClr val="3A4453"/>
                 </a:solidFill>
               </a:rPr>
               <a:t>Labour on jobs splits two ways: our own staff, and contractors we bring in.</a:t>
             </a:r>
-            <a:endParaRPr lang="en-US" sz="950" dirty="0"/>
+            <a:endParaRPr lang="en-US" sz="850" dirty="0"/>
           </a:p>
           <a:p>
             <a:pPr marL="342900" indent="-342900">
               <a:lnSpc>
-                <a:spcPts val="1300"/>
+                <a:spcPts val="1050"/>
               </a:lnSpc>
               <a:spcAft>
-                <a:spcPts val="500"/>
+                <a:spcPts val="400"/>
               </a:spcAft>
               <a:buSzPct val="100000"/>
               <a:buChar char="•"/>
             </a:pPr>
             <a:r>
-              <a:rPr lang="en-US" sz="950" dirty="0">
+              <a:rPr lang="en-US" sz="850" dirty="0">
                 <a:solidFill>
                   <a:srgbClr val="3A4453"/>
                 </a:solidFill>
               </a:rPr>
               <a:t>Salaries, wages and super are most of it, and we are committed to paying them.</a:t>
             </a:r>
-            <a:endParaRPr lang="en-US" sz="950" dirty="0"/>
+            <a:endParaRPr lang="en-US" sz="850" dirty="0"/>
           </a:p>
           <a:p>
             <a:pPr marL="342900" indent="-342900">
               <a:lnSpc>
-                <a:spcPts val="1300"/>
+                <a:spcPts val="1050"/>
               </a:lnSpc>
               <a:spcAft>
-                <a:spcPts val="500"/>
+                <a:spcPts val="400"/>
               </a:spcAft>
               <a:buSzPct val="100000"/>
               <a:buChar char="•"/>
             </a:pPr>
             <a:r>
-              <a:rPr lang="en-US" sz="950" dirty="0">
+              <a:rPr lang="en-US" sz="850" dirty="0">
                 <a:solidFill>
                   <a:srgbClr val="3A4453"/>
                 </a:solidFill>
               </a:rPr>
               <a:t>Contractors are the only labour cost that goes up and down with the work.</a:t>
             </a:r>
-            <a:endParaRPr lang="en-US" sz="950" dirty="0"/>
+            <a:endParaRPr lang="en-US" sz="850" dirty="0"/>
           </a:p>
           <a:p>
             <a:pPr marL="342900" indent="-342900">
               <a:lnSpc>
-                <a:spcPts val="1300"/>
+                <a:spcPts val="1050"/>
               </a:lnSpc>
               <a:spcAft>
-                <a:spcPts val="500"/>
+                <a:spcPts val="400"/>
               </a:spcAft>
               <a:buSzPct val="100000"/>
               <a:buChar char="•"/>
             </a:pPr>
             <a:r>
-              <a:rPr lang="en-US" sz="950" dirty="0">
+              <a:rPr lang="en-US" sz="850" dirty="0">
                 <a:solidFill>
                   <a:srgbClr val="3A4453"/>
                 </a:solidFill>
               </a:rPr>
               <a:t>It rises when our own team runs out of hours, so watch it against the utilisation page.</a:t>
             </a:r>
-            <a:endParaRPr lang="en-US" sz="950" dirty="0"/>
+            <a:endParaRPr lang="en-US" sz="850" dirty="0"/>
           </a:p>
           <a:p>
             <a:pPr marL="342900" indent="-342900">
               <a:lnSpc>
-                <a:spcPts val="1300"/>
+                <a:spcPts val="1050"/>
               </a:lnSpc>
               <a:spcAft>
-                <a:spcPts val="500"/>
+                <a:spcPts val="400"/>
               </a:spcAft>
               <a:buSzPct val="100000"/>
               <a:buChar char="•"/>
             </a:pPr>
             <a:r>
-              <a:rPr lang="en-US" sz="950" dirty="0">
+              <a:rPr lang="en-US" sz="850" dirty="0">
                 <a:solidFill>
                   <a:srgbClr val="3A4453"/>
                 </a:solidFill>
               </a:rPr>
               <a:t>We pay for every hour worked. We only bill the hours spent on jobs. The difference is profit we never make.</a:t>
             </a:r>
-            <a:endParaRPr lang="en-US" sz="950" dirty="0"/>
+            <a:endParaRPr lang="en-US" sz="850" dirty="0"/>
           </a:p>
         </p:txBody>
       </p:sp>
@@ -7820,12 +7820,14 @@
           <a:ln/>
         </p:spPr>
         <p:txBody>
-          <a:bodyPr wrap="square" lIns="0" tIns="0" rIns="0" bIns="0" rtlCol="0" anchor="t"/>
+          <a:bodyPr wrap="square" lIns="0" tIns="0" rIns="0" bIns="0" rtlCol="0" anchor="t">
+            <a:normAutofit/>
+          </a:bodyPr>
           <a:lstStyle/>
           <a:p>
             <a:pPr marL="342900" indent="-342900">
               <a:lnSpc>
-                <a:spcPts val="1000"/>
+                <a:spcPts val="1050"/>
               </a:lnSpc>
               <a:spcAft>
                 <a:spcPts val="300"/>
@@ -7834,19 +7836,19 @@
               <a:buChar char="•"/>
             </a:pPr>
             <a:r>
-              <a:rPr lang="en-US" sz="800" dirty="0">
+              <a:rPr lang="en-US" sz="850" dirty="0">
                 <a:solidFill>
                   <a:srgbClr val="3A4453"/>
                 </a:solidFill>
               </a:rPr>
               <a:t>63,077 of office wages this month, and all of it is charged out to the departments.</a:t>
             </a:r>
-            <a:endParaRPr lang="en-US" sz="800" dirty="0"/>
+            <a:endParaRPr lang="en-US" sz="850" dirty="0"/>
           </a:p>
           <a:p>
             <a:pPr marL="342900" indent="-342900">
               <a:lnSpc>
-                <a:spcPts val="1000"/>
+                <a:spcPts val="1050"/>
               </a:lnSpc>
               <a:spcAft>
                 <a:spcPts val="300"/>
@@ -7855,14 +7857,14 @@
               <a:buChar char="•"/>
             </a:pPr>
             <a:r>
-              <a:rPr lang="en-US" sz="800" dirty="0">
+              <a:rPr lang="en-US" sz="850" dirty="0">
                 <a:solidFill>
                   <a:srgbClr val="3A4453"/>
                 </a:solidFill>
               </a:rPr>
               <a:t>Support picks up 67% of it, based on its share of hours worked over the last twelve months.</a:t>
             </a:r>
-            <a:endParaRPr lang="en-US" sz="800" dirty="0"/>
+            <a:endParaRPr lang="en-US" sz="850" dirty="0"/>
           </a:p>
         </p:txBody>
       </p:sp>
@@ -7884,12 +7886,14 @@
           <a:ln/>
         </p:spPr>
         <p:txBody>
-          <a:bodyPr wrap="square" lIns="0" tIns="0" rIns="0" bIns="0" rtlCol="0" anchor="t"/>
+          <a:bodyPr wrap="square" lIns="0" tIns="0" rIns="0" bIns="0" rtlCol="0" anchor="t">
+            <a:normAutofit/>
+          </a:bodyPr>
           <a:lstStyle/>
           <a:p>
             <a:pPr marL="342900" indent="-342900">
               <a:lnSpc>
-                <a:spcPts val="1000"/>
+                <a:spcPts val="1050"/>
               </a:lnSpc>
               <a:spcAft>
                 <a:spcPts val="300"/>
@@ -7898,19 +7902,19 @@
               <a:buChar char="•"/>
             </a:pPr>
             <a:r>
-              <a:rPr lang="en-US" sz="800" dirty="0">
+              <a:rPr lang="en-US" sz="850" dirty="0">
                 <a:solidFill>
                   <a:srgbClr val="3A4453"/>
                 </a:solidFill>
               </a:rPr>
               <a:t>Events pays more for its own staff, 35,665, than it does for office staff.</a:t>
             </a:r>
-            <a:endParaRPr lang="en-US" sz="800" dirty="0"/>
+            <a:endParaRPr lang="en-US" sz="850" dirty="0"/>
           </a:p>
           <a:p>
             <a:pPr marL="342900" indent="-342900">
               <a:lnSpc>
-                <a:spcPts val="1000"/>
+                <a:spcPts val="1050"/>
               </a:lnSpc>
               <a:spcAft>
                 <a:spcPts val="300"/>
@@ -7919,14 +7923,14 @@
               <a:buChar char="•"/>
             </a:pPr>
             <a:r>
-              <a:rPr lang="en-US" sz="800" dirty="0">
+              <a:rPr lang="en-US" sz="850" dirty="0">
                 <a:solidFill>
                   <a:srgbClr val="3A4453"/>
                 </a:solidFill>
               </a:rPr>
               <a:t>Integration picks up almost no office wages, because almost no hours were booked to it.</a:t>
             </a:r>
-            <a:endParaRPr lang="en-US" sz="800" dirty="0"/>
+            <a:endParaRPr lang="en-US" sz="850" dirty="0"/>
           </a:p>
         </p:txBody>
       </p:sp>
@@ -9206,107 +9210,107 @@
           <a:p>
             <a:pPr marL="342900" indent="-342900">
               <a:lnSpc>
-                <a:spcPts val="1300"/>
+                <a:spcPts val="1150"/>
               </a:lnSpc>
               <a:spcAft>
-                <a:spcPts val="500"/>
+                <a:spcPts val="400"/>
               </a:spcAft>
               <a:buSzPct val="100000"/>
               <a:buChar char="•"/>
             </a:pPr>
             <a:r>
-              <a:rPr lang="en-US" sz="950" dirty="0">
+              <a:rPr lang="en-US" sz="900" dirty="0">
                 <a:solidFill>
                   <a:srgbClr val="3A4453"/>
                 </a:solidFill>
               </a:rPr>
               <a:t>The three red bars are 49% of everything we sold this year.</a:t>
             </a:r>
-            <a:endParaRPr lang="en-US" sz="950" dirty="0"/>
+            <a:endParaRPr lang="en-US" sz="900" dirty="0"/>
           </a:p>
           <a:p>
             <a:pPr marL="342900" indent="-342900">
               <a:lnSpc>
-                <a:spcPts val="1300"/>
+                <a:spcPts val="1150"/>
               </a:lnSpc>
               <a:spcAft>
-                <a:spcPts val="500"/>
+                <a:spcPts val="400"/>
               </a:spcAft>
               <a:buSzPct val="100000"/>
               <a:buChar char="•"/>
             </a:pPr>
             <a:r>
-              <a:rPr lang="en-US" sz="950" dirty="0">
+              <a:rPr lang="en-US" sz="900" dirty="0">
                 <a:solidFill>
                   <a:srgbClr val="3A4453"/>
                 </a:solidFill>
               </a:rPr>
               <a:t>All ten together are 76%. Every other customer we have is the remaining 24%.</a:t>
             </a:r>
-            <a:endParaRPr lang="en-US" sz="950" dirty="0"/>
+            <a:endParaRPr lang="en-US" sz="900" dirty="0"/>
           </a:p>
           <a:p>
             <a:pPr marL="342900" indent="-342900">
               <a:lnSpc>
-                <a:spcPts val="1300"/>
+                <a:spcPts val="1150"/>
               </a:lnSpc>
               <a:spcAft>
-                <a:spcPts val="500"/>
+                <a:spcPts val="400"/>
               </a:spcAft>
               <a:buSzPct val="100000"/>
               <a:buChar char="•"/>
             </a:pPr>
             <a:r>
-              <a:rPr lang="en-US" sz="950" dirty="0">
+              <a:rPr lang="en-US" sz="900" dirty="0">
                 <a:solidFill>
                   <a:srgbClr val="3A4453"/>
                 </a:solidFill>
               </a:rPr>
               <a:t>Deloitte Services at 401,755 is 25% on its own. Losing them would wipe out more than the whole year's profit plan.</a:t>
             </a:r>
-            <a:endParaRPr lang="en-US" sz="950" dirty="0"/>
+            <a:endParaRPr lang="en-US" sz="900" dirty="0"/>
           </a:p>
           <a:p>
             <a:pPr marL="342900" indent="-342900">
               <a:lnSpc>
-                <a:spcPts val="1300"/>
+                <a:spcPts val="1150"/>
               </a:lnSpc>
               <a:spcAft>
-                <a:spcPts val="500"/>
+                <a:spcPts val="400"/>
               </a:spcAft>
               <a:buSzPct val="100000"/>
               <a:buChar char="•"/>
             </a:pPr>
             <a:r>
-              <a:rPr lang="en-US" sz="950" dirty="0">
+              <a:rPr lang="en-US" sz="900" dirty="0">
                 <a:solidFill>
                   <a:srgbClr val="3A4453"/>
                 </a:solidFill>
               </a:rPr>
               <a:t>Aware Super came from nothing to 285,075 in a quarter, and nearly all of it was one job in September.</a:t>
             </a:r>
-            <a:endParaRPr lang="en-US" sz="950" dirty="0"/>
+            <a:endParaRPr lang="en-US" sz="900" dirty="0"/>
           </a:p>
           <a:p>
             <a:pPr marL="342900" indent="-342900">
               <a:lnSpc>
-                <a:spcPts val="1300"/>
+                <a:spcPts val="1150"/>
               </a:lnSpc>
               <a:spcAft>
-                <a:spcPts val="500"/>
+                <a:spcPts val="400"/>
               </a:spcAft>
               <a:buSzPct val="100000"/>
               <a:buChar char="•"/>
             </a:pPr>
             <a:r>
-              <a:rPr lang="en-US" sz="950" dirty="0">
+              <a:rPr lang="en-US" sz="900" dirty="0">
                 <a:solidFill>
                   <a:srgbClr val="3A4453"/>
                 </a:solidFill>
               </a:rPr>
               <a:t>After the top five it falls away fast. Number ten is only 37,166.</a:t>
             </a:r>
-            <a:endParaRPr lang="en-US" sz="950" dirty="0"/>
+            <a:endParaRPr lang="en-US" sz="900" dirty="0"/>
           </a:p>
         </p:txBody>
       </p:sp>
@@ -9593,10 +9597,10 @@
           <a:p>
             <a:pPr marL="342900" indent="-342900">
               <a:lnSpc>
-                <a:spcPts val="1300"/>
+                <a:spcPts val="1250"/>
               </a:lnSpc>
               <a:spcAft>
-                <a:spcPts val="500"/>
+                <a:spcPts val="400"/>
               </a:spcAft>
               <a:buSzPct val="100000"/>
               <a:buChar char="•"/>
@@ -9614,10 +9618,10 @@
           <a:p>
             <a:pPr marL="342900" indent="-342900">
               <a:lnSpc>
-                <a:spcPts val="1300"/>
+                <a:spcPts val="1250"/>
               </a:lnSpc>
               <a:spcAft>
-                <a:spcPts val="500"/>
+                <a:spcPts val="400"/>
               </a:spcAft>
               <a:buSzPct val="100000"/>
               <a:buChar char="•"/>
@@ -9635,10 +9639,10 @@
           <a:p>
             <a:pPr marL="342900" indent="-342900">
               <a:lnSpc>
-                <a:spcPts val="1300"/>
+                <a:spcPts val="1250"/>
               </a:lnSpc>
               <a:spcAft>
-                <a:spcPts val="500"/>
+                <a:spcPts val="400"/>
               </a:spcAft>
               <a:buSzPct val="100000"/>
               <a:buChar char="•"/>
@@ -9656,10 +9660,10 @@
           <a:p>
             <a:pPr marL="342900" indent="-342900">
               <a:lnSpc>
-                <a:spcPts val="1300"/>
+                <a:spcPts val="1250"/>
               </a:lnSpc>
               <a:spcAft>
-                <a:spcPts val="500"/>
+                <a:spcPts val="400"/>
               </a:spcAft>
               <a:buSzPct val="100000"/>
               <a:buChar char="•"/>
@@ -9677,10 +9681,10 @@
           <a:p>
             <a:pPr marL="342900" indent="-342900">
               <a:lnSpc>
-                <a:spcPts val="1300"/>
+                <a:spcPts val="1250"/>
               </a:lnSpc>
               <a:spcAft>
-                <a:spcPts val="500"/>
+                <a:spcPts val="400"/>
               </a:spcAft>
               <a:buSzPct val="100000"/>
               <a:buChar char="•"/>
@@ -9980,10 +9984,10 @@
           <a:p>
             <a:pPr marL="342900" indent="-342900">
               <a:lnSpc>
-                <a:spcPts val="1300"/>
+                <a:spcPts val="1200"/>
               </a:lnSpc>
               <a:spcAft>
-                <a:spcPts val="500"/>
+                <a:spcPts val="400"/>
               </a:spcAft>
               <a:buSzPct val="100000"/>
               <a:buChar char="•"/>
@@ -10001,10 +10005,10 @@
           <a:p>
             <a:pPr marL="342900" indent="-342900">
               <a:lnSpc>
-                <a:spcPts val="1300"/>
+                <a:spcPts val="1200"/>
               </a:lnSpc>
               <a:spcAft>
-                <a:spcPts val="500"/>
+                <a:spcPts val="400"/>
               </a:spcAft>
               <a:buSzPct val="100000"/>
               <a:buChar char="•"/>
@@ -10022,10 +10026,10 @@
           <a:p>
             <a:pPr marL="342900" indent="-342900">
               <a:lnSpc>
-                <a:spcPts val="1300"/>
+                <a:spcPts val="1200"/>
               </a:lnSpc>
               <a:spcAft>
-                <a:spcPts val="500"/>
+                <a:spcPts val="400"/>
               </a:spcAft>
               <a:buSzPct val="100000"/>
               <a:buChar char="•"/>
@@ -10043,10 +10047,10 @@
           <a:p>
             <a:pPr marL="342900" indent="-342900">
               <a:lnSpc>
-                <a:spcPts val="1300"/>
+                <a:spcPts val="1200"/>
               </a:lnSpc>
               <a:spcAft>
-                <a:spcPts val="500"/>
+                <a:spcPts val="400"/>
               </a:spcAft>
               <a:buSzPct val="100000"/>
               <a:buChar char="•"/>
@@ -10064,10 +10068,10 @@
           <a:p>
             <a:pPr marL="342900" indent="-342900">
               <a:lnSpc>
-                <a:spcPts val="1300"/>
+                <a:spcPts val="1200"/>
               </a:lnSpc>
               <a:spcAft>
-                <a:spcPts val="500"/>
+                <a:spcPts val="400"/>
               </a:spcAft>
               <a:buSzPct val="100000"/>
               <a:buChar char="•"/>
@@ -10578,107 +10582,107 @@
           <a:p>
             <a:pPr marL="342900" indent="-342900">
               <a:lnSpc>
-                <a:spcPts val="1150"/>
+                <a:spcPts val="1000"/>
               </a:lnSpc>
               <a:spcAft>
-                <a:spcPts val="500"/>
+                <a:spcPts val="400"/>
               </a:spcAft>
               <a:buSzPct val="100000"/>
               <a:buChar char="•"/>
             </a:pPr>
             <a:r>
-              <a:rPr lang="en-US" sz="900" dirty="0">
+              <a:rPr lang="en-US" sz="800" dirty="0">
                 <a:solidFill>
                   <a:srgbClr val="3A4453"/>
                 </a:solidFill>
               </a:rPr>
               <a:t>This is the calculation itself. Hours worked, how many went on jobs, the percentage that gives, and the headcount those hours represent.</a:t>
             </a:r>
-            <a:endParaRPr lang="en-US" sz="900" dirty="0"/>
+            <a:endParaRPr lang="en-US" sz="800" dirty="0"/>
           </a:p>
           <a:p>
             <a:pPr marL="342900" indent="-342900">
               <a:lnSpc>
-                <a:spcPts val="1150"/>
+                <a:spcPts val="1000"/>
               </a:lnSpc>
               <a:spcAft>
-                <a:spcPts val="500"/>
+                <a:spcPts val="400"/>
               </a:spcAft>
               <a:buSzPct val="100000"/>
               <a:buChar char="•"/>
             </a:pPr>
             <a:r>
-              <a:rPr lang="en-US" sz="900" dirty="0">
+              <a:rPr lang="en-US" sz="800" dirty="0">
                 <a:solidFill>
                   <a:srgbClr val="3A4453"/>
                 </a:solidFill>
               </a:rPr>
               <a:t>Utilisation per cent is billable hours divided by hours worked. Leave is left out, because nobody can bill leave.</a:t>
             </a:r>
-            <a:endParaRPr lang="en-US" sz="900" dirty="0"/>
+            <a:endParaRPr lang="en-US" sz="800" dirty="0"/>
           </a:p>
           <a:p>
             <a:pPr marL="342900" indent="-342900">
               <a:lnSpc>
-                <a:spcPts val="1150"/>
+                <a:spcPts val="1000"/>
               </a:lnSpc>
               <a:spcAft>
-                <a:spcPts val="500"/>
+                <a:spcPts val="400"/>
               </a:spcAft>
               <a:buSzPct val="100000"/>
               <a:buChar char="•"/>
             </a:pPr>
             <a:r>
-              <a:rPr lang="en-US" sz="900" dirty="0">
+              <a:rPr lang="en-US" sz="800" dirty="0">
                 <a:solidFill>
                   <a:srgbClr val="3A4453"/>
                 </a:solidFill>
               </a:rPr>
               <a:t>FTE is hours worked divided by the working hours in the month, so 1.0 is one full time person.</a:t>
             </a:r>
-            <a:endParaRPr lang="en-US" sz="900" dirty="0"/>
+            <a:endParaRPr lang="en-US" sz="800" dirty="0"/>
           </a:p>
           <a:p>
             <a:pPr marL="342900" indent="-342900">
               <a:lnSpc>
-                <a:spcPts val="1150"/>
+                <a:spcPts val="1000"/>
               </a:lnSpc>
               <a:spcAft>
-                <a:spcPts val="500"/>
+                <a:spcPts val="400"/>
               </a:spcAft>
               <a:buSzPct val="100000"/>
               <a:buChar char="•"/>
             </a:pPr>
             <a:r>
-              <a:rPr lang="en-US" sz="900" dirty="0">
+              <a:rPr lang="en-US" sz="800" dirty="0">
                 <a:solidFill>
                   <a:srgbClr val="3A4453"/>
                 </a:solidFill>
               </a:rPr>
               <a:t>Support reads 99% on only 11 non-billable hours. That is a coding problem, not a result.</a:t>
             </a:r>
-            <a:endParaRPr lang="en-US" sz="900" dirty="0"/>
+            <a:endParaRPr lang="en-US" sz="800" dirty="0"/>
           </a:p>
           <a:p>
             <a:pPr marL="342900" indent="-342900">
               <a:lnSpc>
-                <a:spcPts val="1150"/>
+                <a:spcPts val="1000"/>
               </a:lnSpc>
               <a:spcAft>
-                <a:spcPts val="500"/>
+                <a:spcPts val="400"/>
               </a:spcAft>
               <a:buSzPct val="100000"/>
               <a:buChar char="•"/>
             </a:pPr>
             <a:r>
-              <a:rPr lang="en-US" sz="900" dirty="0">
+              <a:rPr lang="en-US" sz="800" dirty="0">
                 <a:solidFill>
                   <a:srgbClr val="3A4453"/>
                 </a:solidFill>
               </a:rPr>
               <a:t>Events at 49% is the real one. 333 hours of leave took out most of the month.</a:t>
             </a:r>
-            <a:endParaRPr lang="en-US" sz="900" dirty="0"/>
+            <a:endParaRPr lang="en-US" sz="800" dirty="0"/>
           </a:p>
         </p:txBody>
       </p:sp>
@@ -10968,7 +10972,7 @@
                 <a:spcPts val="1150"/>
               </a:lnSpc>
               <a:spcAft>
-                <a:spcPts val="500"/>
+                <a:spcPts val="400"/>
               </a:spcAft>
               <a:buSzPct val="100000"/>
               <a:buChar char="•"/>
@@ -10989,7 +10993,7 @@
                 <a:spcPts val="1150"/>
               </a:lnSpc>
               <a:spcAft>
-                <a:spcPts val="500"/>
+                <a:spcPts val="400"/>
               </a:spcAft>
               <a:buSzPct val="100000"/>
               <a:buChar char="•"/>
@@ -11010,7 +11014,7 @@
                 <a:spcPts val="1150"/>
               </a:lnSpc>
               <a:spcAft>
-                <a:spcPts val="500"/>
+                <a:spcPts val="400"/>
               </a:spcAft>
               <a:buSzPct val="100000"/>
               <a:buChar char="•"/>
@@ -11031,7 +11035,7 @@
                 <a:spcPts val="1150"/>
               </a:lnSpc>
               <a:spcAft>
-                <a:spcPts val="500"/>
+                <a:spcPts val="400"/>
               </a:spcAft>
               <a:buSzPct val="100000"/>
               <a:buChar char="•"/>
@@ -11052,7 +11056,7 @@
                 <a:spcPts val="1150"/>
               </a:lnSpc>
               <a:spcAft>
-                <a:spcPts val="500"/>
+                <a:spcPts val="400"/>
               </a:spcAft>
               <a:buSzPct val="100000"/>
               <a:buChar char="•"/>
@@ -11352,107 +11356,107 @@
           <a:p>
             <a:pPr marL="342900" indent="-342900">
               <a:lnSpc>
-                <a:spcPts val="1150"/>
+                <a:spcPts val="1050"/>
               </a:lnSpc>
               <a:spcAft>
-                <a:spcPts val="500"/>
+                <a:spcPts val="400"/>
               </a:spcAft>
               <a:buSzPct val="100000"/>
               <a:buChar char="•"/>
             </a:pPr>
             <a:r>
-              <a:rPr lang="en-US" sz="900" dirty="0">
+              <a:rPr lang="en-US" sz="850" dirty="0">
                 <a:solidFill>
                   <a:srgbClr val="3A4453"/>
                 </a:solidFill>
               </a:rPr>
               <a:t>Each bar is scaled to that department's own hours, so you can compare the mix. Support works about a hundred times the hours Integration does.</a:t>
             </a:r>
-            <a:endParaRPr lang="en-US" sz="900" dirty="0"/>
+            <a:endParaRPr lang="en-US" sz="850" dirty="0"/>
           </a:p>
           <a:p>
             <a:pPr marL="342900" indent="-342900">
               <a:lnSpc>
-                <a:spcPts val="1150"/>
+                <a:spcPts val="1050"/>
               </a:lnSpc>
               <a:spcAft>
-                <a:spcPts val="500"/>
+                <a:spcPts val="400"/>
               </a:spcAft>
               <a:buSzPct val="100000"/>
               <a:buChar char="•"/>
             </a:pPr>
             <a:r>
-              <a:rPr lang="en-US" sz="900" dirty="0">
+              <a:rPr lang="en-US" sz="850" dirty="0">
                 <a:solidFill>
                   <a:srgbClr val="3A4453"/>
                 </a:solidFill>
               </a:rPr>
               <a:t>Support shows 11 hours not on jobs out of 2,143 worked. That is not credible.</a:t>
             </a:r>
-            <a:endParaRPr lang="en-US" sz="900" dirty="0"/>
+            <a:endParaRPr lang="en-US" sz="850" dirty="0"/>
           </a:p>
           <a:p>
             <a:pPr marL="342900" indent="-342900">
               <a:lnSpc>
-                <a:spcPts val="1150"/>
+                <a:spcPts val="1050"/>
               </a:lnSpc>
               <a:spcAft>
-                <a:spcPts val="500"/>
+                <a:spcPts val="400"/>
               </a:spcAft>
               <a:buSzPct val="100000"/>
               <a:buChar char="•"/>
             </a:pPr>
             <a:r>
-              <a:rPr lang="en-US" sz="900" dirty="0">
+              <a:rPr lang="en-US" sz="850" dirty="0">
                 <a:solidFill>
                   <a:srgbClr val="3A4453"/>
                 </a:solidFill>
               </a:rPr>
               <a:t>Events put 333 hours into leave and only 241 onto jobs. The people are there, the work is not.</a:t>
             </a:r>
-            <a:endParaRPr lang="en-US" sz="900" dirty="0"/>
+            <a:endParaRPr lang="en-US" sz="850" dirty="0"/>
           </a:p>
           <a:p>
             <a:pPr marL="342900" indent="-342900">
               <a:lnSpc>
-                <a:spcPts val="1150"/>
+                <a:spcPts val="1050"/>
               </a:lnSpc>
               <a:spcAft>
-                <a:spcPts val="500"/>
+                <a:spcPts val="400"/>
               </a:spcAft>
               <a:buSzPct val="100000"/>
               <a:buChar char="•"/>
             </a:pPr>
             <a:r>
-              <a:rPr lang="en-US" sz="900" dirty="0">
+              <a:rPr lang="en-US" sz="850" dirty="0">
                 <a:solidFill>
                   <a:srgbClr val="3A4453"/>
                 </a:solidFill>
               </a:rPr>
               <a:t>Consulting put 84 hours into work we cannot bill against 31 we can.</a:t>
             </a:r>
-            <a:endParaRPr lang="en-US" sz="900" dirty="0"/>
+            <a:endParaRPr lang="en-US" sz="850" dirty="0"/>
           </a:p>
           <a:p>
             <a:pPr marL="342900" indent="-342900">
               <a:lnSpc>
-                <a:spcPts val="1150"/>
+                <a:spcPts val="1050"/>
               </a:lnSpc>
               <a:spcAft>
-                <a:spcPts val="500"/>
+                <a:spcPts val="400"/>
               </a:spcAft>
               <a:buSzPct val="100000"/>
               <a:buChar char="•"/>
             </a:pPr>
             <a:r>
-              <a:rPr lang="en-US" sz="900" dirty="0">
+              <a:rPr lang="en-US" sz="850" dirty="0">
                 <a:solidFill>
                   <a:srgbClr val="3A4453"/>
                 </a:solidFill>
               </a:rPr>
               <a:t>We pay for every hour. We only bill the ones on jobs. The grey and light teal are the gap.</a:t>
             </a:r>
-            <a:endParaRPr lang="en-US" sz="900" dirty="0"/>
+            <a:endParaRPr lang="en-US" sz="850" dirty="0"/>
           </a:p>
         </p:txBody>
       </p:sp>
@@ -11739,107 +11743,107 @@
           <a:p>
             <a:pPr marL="342900" indent="-342900">
               <a:lnSpc>
-                <a:spcPts val="1150"/>
+                <a:spcPts val="1050"/>
               </a:lnSpc>
               <a:spcAft>
-                <a:spcPts val="500"/>
+                <a:spcPts val="400"/>
               </a:spcAft>
               <a:buSzPct val="100000"/>
               <a:buChar char="•"/>
             </a:pPr>
             <a:r>
-              <a:rPr lang="en-US" sz="900" dirty="0">
+              <a:rPr lang="en-US" sz="850" dirty="0">
                 <a:solidFill>
                   <a:srgbClr val="3A4453"/>
                 </a:solidFill>
               </a:rPr>
               <a:t>The same picture grouped the way the P&amp;L is. Production is Events and Video. Consulting is Integration and Consulting.</a:t>
             </a:r>
-            <a:endParaRPr lang="en-US" sz="900" dirty="0"/>
+            <a:endParaRPr lang="en-US" sz="850" dirty="0"/>
           </a:p>
           <a:p>
             <a:pPr marL="342900" indent="-342900">
               <a:lnSpc>
-                <a:spcPts val="1150"/>
+                <a:spcPts val="1050"/>
               </a:lnSpc>
               <a:spcAft>
-                <a:spcPts val="500"/>
+                <a:spcPts val="400"/>
               </a:spcAft>
               <a:buSzPct val="100000"/>
               <a:buChar char="•"/>
             </a:pPr>
             <a:r>
-              <a:rPr lang="en-US" sz="900" dirty="0">
+              <a:rPr lang="en-US" sz="850" dirty="0">
                 <a:solidFill>
                   <a:srgbClr val="3A4453"/>
                 </a:solidFill>
               </a:rPr>
               <a:t>Production put 265 hours onto jobs and 257 onto work we cannot bill, with 333 hours of leave on top.</a:t>
             </a:r>
-            <a:endParaRPr lang="en-US" sz="900" dirty="0"/>
+            <a:endParaRPr lang="en-US" sz="850" dirty="0"/>
           </a:p>
           <a:p>
             <a:pPr marL="342900" indent="-342900">
               <a:lnSpc>
-                <a:spcPts val="1150"/>
+                <a:spcPts val="1050"/>
               </a:lnSpc>
               <a:spcAft>
-                <a:spcPts val="500"/>
+                <a:spcPts val="400"/>
               </a:spcAft>
               <a:buSzPct val="100000"/>
               <a:buChar char="•"/>
             </a:pPr>
             <a:r>
-              <a:rPr lang="en-US" sz="900" dirty="0">
+              <a:rPr lang="en-US" sz="850" dirty="0">
                 <a:solidFill>
                   <a:srgbClr val="3A4453"/>
                 </a:solidFill>
               </a:rPr>
               <a:t>Consulting put 40 onto jobs against 84 we cannot bill. Two thirds of its paid hours earn nothing.</a:t>
             </a:r>
-            <a:endParaRPr lang="en-US" sz="900" dirty="0"/>
+            <a:endParaRPr lang="en-US" sz="850" dirty="0"/>
           </a:p>
           <a:p>
             <a:pPr marL="342900" indent="-342900">
               <a:lnSpc>
-                <a:spcPts val="1150"/>
+                <a:spcPts val="1050"/>
               </a:lnSpc>
               <a:spcAft>
-                <a:spcPts val="500"/>
+                <a:spcPts val="400"/>
               </a:spcAft>
               <a:buSzPct val="100000"/>
               <a:buChar char="•"/>
             </a:pPr>
             <a:r>
-              <a:rPr lang="en-US" sz="900" dirty="0">
+              <a:rPr lang="en-US" sz="850" dirty="0">
                 <a:solidFill>
                   <a:srgbClr val="3A4453"/>
                 </a:solidFill>
               </a:rPr>
               <a:t>Support is the only bar that is almost all dark. That is why it is the only department that makes money.</a:t>
             </a:r>
-            <a:endParaRPr lang="en-US" sz="900" dirty="0"/>
+            <a:endParaRPr lang="en-US" sz="850" dirty="0"/>
           </a:p>
           <a:p>
             <a:pPr marL="342900" indent="-342900">
               <a:lnSpc>
-                <a:spcPts val="1150"/>
+                <a:spcPts val="1050"/>
               </a:lnSpc>
               <a:spcAft>
-                <a:spcPts val="500"/>
+                <a:spcPts val="400"/>
               </a:spcAft>
               <a:buSzPct val="100000"/>
               <a:buChar char="•"/>
             </a:pPr>
             <a:r>
-              <a:rPr lang="en-US" sz="900" dirty="0">
+              <a:rPr lang="en-US" sz="850" dirty="0">
                 <a:solidFill>
                   <a:srgbClr val="3A4453"/>
                 </a:solidFill>
               </a:rPr>
               <a:t>Each bar is scaled to its own hours. Support works about four times the hours of the other two together.</a:t>
             </a:r>
-            <a:endParaRPr lang="en-US" sz="900" dirty="0"/>
+            <a:endParaRPr lang="en-US" sz="850" dirty="0"/>
           </a:p>
         </p:txBody>
       </p:sp>
@@ -14285,7 +14289,7 @@
                 <a:spcPts val="1150"/>
               </a:lnSpc>
               <a:spcAft>
-                <a:spcPts val="500"/>
+                <a:spcPts val="400"/>
               </a:spcAft>
               <a:buSzPct val="100000"/>
               <a:buChar char="•"/>
@@ -14306,7 +14310,7 @@
                 <a:spcPts val="1150"/>
               </a:lnSpc>
               <a:spcAft>
-                <a:spcPts val="500"/>
+                <a:spcPts val="400"/>
               </a:spcAft>
               <a:buSzPct val="100000"/>
               <a:buChar char="•"/>
@@ -14327,7 +14331,7 @@
                 <a:spcPts val="1150"/>
               </a:lnSpc>
               <a:spcAft>
-                <a:spcPts val="500"/>
+                <a:spcPts val="400"/>
               </a:spcAft>
               <a:buSzPct val="100000"/>
               <a:buChar char="•"/>
@@ -14348,7 +14352,7 @@
                 <a:spcPts val="1150"/>
               </a:lnSpc>
               <a:spcAft>
-                <a:spcPts val="500"/>
+                <a:spcPts val="400"/>
               </a:spcAft>
               <a:buSzPct val="100000"/>
               <a:buChar char="•"/>
@@ -14369,7 +14373,7 @@
                 <a:spcPts val="1150"/>
               </a:lnSpc>
               <a:spcAft>
-                <a:spcPts val="500"/>
+                <a:spcPts val="400"/>
               </a:spcAft>
               <a:buSzPct val="100000"/>
               <a:buChar char="•"/>
@@ -17173,107 +17177,107 @@
           <a:p>
             <a:pPr marL="342900" indent="-342900">
               <a:lnSpc>
-                <a:spcPts val="1150"/>
+                <a:spcPts val="1050"/>
               </a:lnSpc>
               <a:spcAft>
-                <a:spcPts val="500"/>
+                <a:spcPts val="400"/>
               </a:spcAft>
               <a:buSzPct val="100000"/>
               <a:buChar char="•"/>
             </a:pPr>
             <a:r>
-              <a:rPr lang="en-US" sz="900" dirty="0">
+              <a:rPr lang="en-US" sz="850" dirty="0">
                 <a:solidFill>
                   <a:srgbClr val="3A4453"/>
                 </a:solidFill>
               </a:rPr>
               <a:t>We need 549k of sales a month just to cover our costs. We are averaging 541k.</a:t>
             </a:r>
-            <a:endParaRPr lang="en-US" sz="900" dirty="0"/>
+            <a:endParaRPr lang="en-US" sz="850" dirty="0"/>
           </a:p>
           <a:p>
             <a:pPr marL="342900" indent="-342900">
               <a:lnSpc>
-                <a:spcPts val="1150"/>
+                <a:spcPts val="1050"/>
               </a:lnSpc>
               <a:spcAft>
-                <a:spcPts val="500"/>
+                <a:spcPts val="400"/>
               </a:spcAft>
               <a:buSzPct val="100000"/>
               <a:buChar char="•"/>
             </a:pPr>
             <a:r>
-              <a:rPr lang="en-US" sz="900" dirty="0">
+              <a:rPr lang="en-US" sz="850" dirty="0">
                 <a:solidFill>
                   <a:srgbClr val="3A4453"/>
                 </a:solidFill>
               </a:rPr>
               <a:t>Sep 26 sold 148k more than planned and still lost 32k. We sold enough. We did not keep enough of it.</a:t>
             </a:r>
-            <a:endParaRPr lang="en-US" sz="900" dirty="0"/>
+            <a:endParaRPr lang="en-US" sz="850" dirty="0"/>
           </a:p>
           <a:p>
             <a:pPr marL="342900" indent="-342900">
               <a:lnSpc>
-                <a:spcPts val="1150"/>
+                <a:spcPts val="1050"/>
               </a:lnSpc>
               <a:spcAft>
-                <a:spcPts val="500"/>
+                <a:spcPts val="400"/>
               </a:spcAft>
               <a:buSzPct val="100000"/>
               <a:buChar char="•"/>
             </a:pPr>
             <a:r>
-              <a:rPr lang="en-US" sz="900" dirty="0">
+              <a:rPr lang="en-US" sz="850" dirty="0">
                 <a:solidFill>
                   <a:srgbClr val="3A4453"/>
                 </a:solidFill>
               </a:rPr>
               <a:t>We kept 33% of every dollar sold. The plan said 30%, but last September we kept 46%.</a:t>
             </a:r>
-            <a:endParaRPr lang="en-US" sz="900" dirty="0"/>
+            <a:endParaRPr lang="en-US" sz="850" dirty="0"/>
           </a:p>
           <a:p>
             <a:pPr marL="342900" indent="-342900">
               <a:lnSpc>
-                <a:spcPts val="1150"/>
+                <a:spcPts val="1050"/>
               </a:lnSpc>
               <a:spcAft>
-                <a:spcPts val="500"/>
+                <a:spcPts val="400"/>
               </a:spcAft>
               <a:buSzPct val="100000"/>
               <a:buChar char="•"/>
             </a:pPr>
             <a:r>
-              <a:rPr lang="en-US" sz="900" dirty="0">
+              <a:rPr lang="en-US" sz="850" dirty="0">
                 <a:solidFill>
                   <a:srgbClr val="3A4453"/>
                 </a:solidFill>
               </a:rPr>
               <a:t>Running costs came in at 230k against 232k planned. Spending is not the problem.</a:t>
             </a:r>
-            <a:endParaRPr lang="en-US" sz="900" dirty="0"/>
+            <a:endParaRPr lang="en-US" sz="850" dirty="0"/>
           </a:p>
           <a:p>
             <a:pPr marL="342900" indent="-342900">
               <a:lnSpc>
-                <a:spcPts val="1150"/>
+                <a:spcPts val="1050"/>
               </a:lnSpc>
               <a:spcAft>
-                <a:spcPts val="500"/>
+                <a:spcPts val="400"/>
               </a:spcAft>
               <a:buSzPct val="100000"/>
               <a:buChar char="•"/>
             </a:pPr>
             <a:r>
-              <a:rPr lang="en-US" sz="900" dirty="0">
+              <a:rPr lang="en-US" sz="850" dirty="0">
                 <a:solidFill>
                   <a:srgbClr val="3A4453"/>
                 </a:solidFill>
               </a:rPr>
               <a:t>Profit for the quarter is 6k against 223k planned. The plan needs redoing around what we keep, not what we sell.</a:t>
             </a:r>
-            <a:endParaRPr lang="en-US" sz="900" dirty="0"/>
+            <a:endParaRPr lang="en-US" sz="850" dirty="0"/>
           </a:p>
         </p:txBody>
       </p:sp>
@@ -17560,107 +17564,107 @@
           <a:p>
             <a:pPr marL="342900" indent="-342900">
               <a:lnSpc>
-                <a:spcPts val="1100"/>
+                <a:spcPts val="1000"/>
               </a:lnSpc>
               <a:spcAft>
-                <a:spcPts val="500"/>
+                <a:spcPts val="400"/>
               </a:spcAft>
               <a:buSzPct val="100000"/>
               <a:buChar char="•"/>
             </a:pPr>
             <a:r>
-              <a:rPr lang="en-US" sz="850" dirty="0">
+              <a:rPr lang="en-US" sz="800" dirty="0">
                 <a:solidFill>
                   <a:srgbClr val="3A4453"/>
                 </a:solidFill>
               </a:rPr>
               <a:t>Operating profit, or EBITDA, is 6k for the quarter against 223k planned. We are 217k short, which is 97% of it.</a:t>
             </a:r>
-            <a:endParaRPr lang="en-US" sz="850" dirty="0"/>
+            <a:endParaRPr lang="en-US" sz="800" dirty="0"/>
           </a:p>
           <a:p>
             <a:pPr marL="342900" indent="-342900">
               <a:lnSpc>
-                <a:spcPts val="1100"/>
+                <a:spcPts val="1000"/>
               </a:lnSpc>
               <a:spcAft>
-                <a:spcPts val="500"/>
+                <a:spcPts val="400"/>
               </a:spcAft>
               <a:buSzPct val="100000"/>
               <a:buChar char="•"/>
             </a:pPr>
             <a:r>
-              <a:rPr lang="en-US" sz="850" dirty="0">
+              <a:rPr lang="en-US" sz="800" dirty="0">
                 <a:solidFill>
                   <a:srgbClr val="3A4453"/>
                 </a:solidFill>
               </a:rPr>
               <a:t>The plan expected 56% of the year's profit in these first three months. It did not happen, so the whole year now rides on the nine months left.</a:t>
             </a:r>
-            <a:endParaRPr lang="en-US" sz="850" dirty="0"/>
+            <a:endParaRPr lang="en-US" sz="800" dirty="0"/>
           </a:p>
           <a:p>
             <a:pPr marL="342900" indent="-342900">
               <a:lnSpc>
-                <a:spcPts val="1100"/>
+                <a:spcPts val="1000"/>
               </a:lnSpc>
               <a:spcAft>
-                <a:spcPts val="500"/>
+                <a:spcPts val="400"/>
               </a:spcAft>
               <a:buSzPct val="100000"/>
               <a:buChar char="•"/>
             </a:pPr>
             <a:r>
-              <a:rPr lang="en-US" sz="850" dirty="0">
+              <a:rPr lang="en-US" sz="800" dirty="0">
                 <a:solidFill>
                   <a:srgbClr val="3A4453"/>
                 </a:solidFill>
               </a:rPr>
               <a:t>To still hit the 397k target those nine months have to make 391k. The plan only ever asked them for 175k.</a:t>
             </a:r>
-            <a:endParaRPr lang="en-US" sz="850" dirty="0"/>
+            <a:endParaRPr lang="en-US" sz="800" dirty="0"/>
           </a:p>
           <a:p>
             <a:pPr marL="342900" indent="-342900">
               <a:lnSpc>
-                <a:spcPts val="1100"/>
+                <a:spcPts val="1000"/>
               </a:lnSpc>
               <a:spcAft>
-                <a:spcPts val="500"/>
+                <a:spcPts val="400"/>
               </a:spcAft>
               <a:buSzPct val="100000"/>
               <a:buChar char="•"/>
             </a:pPr>
             <a:r>
-              <a:rPr lang="en-US" sz="850" dirty="0">
+              <a:rPr lang="en-US" sz="800" dirty="0">
                 <a:solidFill>
                   <a:srgbClr val="3A4453"/>
                 </a:solidFill>
               </a:rPr>
               <a:t>391k is 1.7 times what the whole of last year made, which was 235k. We will not get the year back.</a:t>
             </a:r>
-            <a:endParaRPr lang="en-US" sz="850" dirty="0"/>
+            <a:endParaRPr lang="en-US" sz="800" dirty="0"/>
           </a:p>
           <a:p>
             <a:pPr marL="342900" indent="-342900">
               <a:lnSpc>
-                <a:spcPts val="1100"/>
+                <a:spcPts val="1000"/>
               </a:lnSpc>
               <a:spcAft>
-                <a:spcPts val="500"/>
+                <a:spcPts val="400"/>
               </a:spcAft>
               <a:buSzPct val="100000"/>
               <a:buChar char="•"/>
             </a:pPr>
             <a:r>
-              <a:rPr lang="en-US" sz="850" dirty="0">
+              <a:rPr lang="en-US" sz="800" dirty="0">
                 <a:solidFill>
                   <a:srgbClr val="3A4453"/>
                 </a:solidFill>
               </a:rPr>
               <a:t>The problem is what we keep, not what we sell. Sales hit 81% of plan. What was left after direct costs hit only 69%.</a:t>
             </a:r>
-            <a:endParaRPr lang="en-US" sz="850" dirty="0"/>
+            <a:endParaRPr lang="en-US" sz="800" dirty="0"/>
           </a:p>
         </p:txBody>
       </p:sp>
@@ -17940,12 +17944,14 @@
           <a:ln/>
         </p:spPr>
         <p:txBody>
-          <a:bodyPr wrap="square" lIns="0" tIns="0" rIns="0" bIns="0" rtlCol="0" anchor="t"/>
+          <a:bodyPr wrap="square" lIns="0" tIns="0" rIns="0" bIns="0" rtlCol="0" anchor="t">
+            <a:normAutofit/>
+          </a:bodyPr>
           <a:lstStyle/>
           <a:p>
             <a:pPr marL="342900" indent="-342900">
               <a:lnSpc>
-                <a:spcPts val="1000"/>
+                <a:spcPts val="1050"/>
               </a:lnSpc>
               <a:spcAft>
                 <a:spcPts val="300"/>
@@ -17954,19 +17960,19 @@
               <a:buChar char="•"/>
             </a:pPr>
             <a:r>
-              <a:rPr lang="en-US" sz="800" dirty="0">
+              <a:rPr lang="en-US" sz="850" dirty="0">
                 <a:solidFill>
                   <a:srgbClr val="3A4453"/>
                 </a:solidFill>
               </a:rPr>
               <a:t>Support is the only department earning enough to cover its share of running costs. It made 29k on 243k of sales.</a:t>
             </a:r>
-            <a:endParaRPr lang="en-US" sz="800" dirty="0"/>
+            <a:endParaRPr lang="en-US" sz="850" dirty="0"/>
           </a:p>
           <a:p>
             <a:pPr marL="342900" indent="-342900">
               <a:lnSpc>
-                <a:spcPts val="1000"/>
+                <a:spcPts val="1050"/>
               </a:lnSpc>
               <a:spcAft>
                 <a:spcPts val="300"/>
@@ -17975,14 +17981,14 @@
               <a:buChar char="•"/>
             </a:pPr>
             <a:r>
-              <a:rPr lang="en-US" sz="800" dirty="0">
+              <a:rPr lang="en-US" sz="850" dirty="0">
                 <a:solidFill>
                   <a:srgbClr val="3A4453"/>
                 </a:solidFill>
               </a:rPr>
               <a:t>Events is charged 111k of running costs and only billed 73k. It keeps 78% of what it sells and still loses 54k.</a:t>
             </a:r>
-            <a:endParaRPr lang="en-US" sz="800" dirty="0"/>
+            <a:endParaRPr lang="en-US" sz="850" dirty="0"/>
           </a:p>
         </p:txBody>
       </p:sp>
@@ -18004,12 +18010,14 @@
           <a:ln/>
         </p:spPr>
         <p:txBody>
-          <a:bodyPr wrap="square" lIns="0" tIns="0" rIns="0" bIns="0" rtlCol="0" anchor="t"/>
+          <a:bodyPr wrap="square" lIns="0" tIns="0" rIns="0" bIns="0" rtlCol="0" anchor="t">
+            <a:normAutofit/>
+          </a:bodyPr>
           <a:lstStyle/>
           <a:p>
             <a:pPr marL="342900" indent="-342900">
               <a:lnSpc>
-                <a:spcPts val="1000"/>
+                <a:spcPts val="1050"/>
               </a:lnSpc>
               <a:spcAft>
                 <a:spcPts val="300"/>
@@ -18018,19 +18026,19 @@
               <a:buChar char="•"/>
             </a:pPr>
             <a:r>
-              <a:rPr lang="en-US" sz="800" dirty="0">
+              <a:rPr lang="en-US" sz="850" dirty="0">
                 <a:solidFill>
                   <a:srgbClr val="3A4453"/>
                 </a:solidFill>
               </a:rPr>
               <a:t>Integration billed 235k against a 59k plan but keeps only 10% of it, so it made just 10k.</a:t>
             </a:r>
-            <a:endParaRPr lang="en-US" sz="800" dirty="0"/>
+            <a:endParaRPr lang="en-US" sz="850" dirty="0"/>
           </a:p>
           <a:p>
             <a:pPr marL="342900" indent="-342900">
               <a:lnSpc>
-                <a:spcPts val="1000"/>
+                <a:spcPts val="1050"/>
               </a:lnSpc>
               <a:spcAft>
                 <a:spcPts val="300"/>
@@ -18039,14 +18047,14 @@
               <a:buChar char="•"/>
             </a:pPr>
             <a:r>
-              <a:rPr lang="en-US" sz="800" dirty="0">
+              <a:rPr lang="en-US" sz="850" dirty="0">
                 <a:solidFill>
                   <a:srgbClr val="3A4453"/>
                 </a:solidFill>
               </a:rPr>
               <a:t>Consulting is charged 20k of running costs and billed 4k. That needs a decision, not a forecast.</a:t>
             </a:r>
-            <a:endParaRPr lang="en-US" sz="800" dirty="0"/>
+            <a:endParaRPr lang="en-US" sz="850" dirty="0"/>
           </a:p>
         </p:txBody>
       </p:sp>
@@ -18326,12 +18334,14 @@
           <a:ln/>
         </p:spPr>
         <p:txBody>
-          <a:bodyPr wrap="square" lIns="0" tIns="0" rIns="0" bIns="0" rtlCol="0" anchor="t"/>
+          <a:bodyPr wrap="square" lIns="0" tIns="0" rIns="0" bIns="0" rtlCol="0" anchor="t">
+            <a:normAutofit/>
+          </a:bodyPr>
           <a:lstStyle/>
           <a:p>
             <a:pPr marL="342900" indent="-342900">
               <a:lnSpc>
-                <a:spcPts val="1000"/>
+                <a:spcPts val="1050"/>
               </a:lnSpc>
               <a:spcAft>
                 <a:spcPts val="300"/>
@@ -18340,19 +18350,19 @@
               <a:buChar char="•"/>
             </a:pPr>
             <a:r>
-              <a:rPr lang="en-US" sz="800" dirty="0">
+              <a:rPr lang="en-US" sz="850" dirty="0">
                 <a:solidFill>
                   <a:srgbClr val="3A4453"/>
                 </a:solidFill>
               </a:rPr>
               <a:t>This is how the P&amp;L itself groups us. Production is Events and Video together. Consulting is Integration and Consulting together.</a:t>
             </a:r>
-            <a:endParaRPr lang="en-US" sz="800" dirty="0"/>
+            <a:endParaRPr lang="en-US" sz="850" dirty="0"/>
           </a:p>
           <a:p>
             <a:pPr marL="342900" indent="-342900">
               <a:lnSpc>
-                <a:spcPts val="1000"/>
+                <a:spcPts val="1050"/>
               </a:lnSpc>
               <a:spcAft>
                 <a:spcPts val="300"/>
@@ -18361,14 +18371,14 @@
               <a:buChar char="•"/>
             </a:pPr>
             <a:r>
-              <a:rPr lang="en-US" sz="800" dirty="0">
+              <a:rPr lang="en-US" sz="850" dirty="0">
                 <a:solidFill>
                   <a:srgbClr val="3A4453"/>
                 </a:solidFill>
               </a:rPr>
               <a:t>Support made 29k on 243k of sales. It is the only one of the three that covers its own running costs.</a:t>
             </a:r>
-            <a:endParaRPr lang="en-US" sz="800" dirty="0"/>
+            <a:endParaRPr lang="en-US" sz="850" dirty="0"/>
           </a:p>
         </p:txBody>
       </p:sp>
@@ -18390,12 +18400,14 @@
           <a:ln/>
         </p:spPr>
         <p:txBody>
-          <a:bodyPr wrap="square" lIns="0" tIns="0" rIns="0" bIns="0" rtlCol="0" anchor="t"/>
+          <a:bodyPr wrap="square" lIns="0" tIns="0" rIns="0" bIns="0" rtlCol="0" anchor="t">
+            <a:normAutofit/>
+          </a:bodyPr>
           <a:lstStyle/>
           <a:p>
             <a:pPr marL="342900" indent="-342900">
               <a:lnSpc>
-                <a:spcPts val="1000"/>
+                <a:spcPts val="1050"/>
               </a:lnSpc>
               <a:spcAft>
                 <a:spcPts val="300"/>
@@ -18404,19 +18416,19 @@
               <a:buChar char="•"/>
             </a:pPr>
             <a:r>
-              <a:rPr lang="en-US" sz="800" dirty="0">
+              <a:rPr lang="en-US" sz="850" dirty="0">
                 <a:solidFill>
                   <a:srgbClr val="3A4453"/>
                 </a:solidFill>
               </a:rPr>
               <a:t>Production sold 81k and keeps 78% of it, the best margin in the business, and still loses 61k on 124k of running costs.</a:t>
             </a:r>
-            <a:endParaRPr lang="en-US" sz="800" dirty="0"/>
+            <a:endParaRPr lang="en-US" sz="850" dirty="0"/>
           </a:p>
           <a:p>
             <a:pPr marL="342900" indent="-342900">
               <a:lnSpc>
-                <a:spcPts val="1000"/>
+                <a:spcPts val="1050"/>
               </a:lnSpc>
               <a:spcAft>
                 <a:spcPts val="300"/>
@@ -18425,14 +18437,14 @@
               <a:buChar char="•"/>
             </a:pPr>
             <a:r>
-              <a:rPr lang="en-US" sz="800" dirty="0">
+              <a:rPr lang="en-US" sz="850" dirty="0">
                 <a:solidFill>
                   <a:srgbClr val="3A4453"/>
                 </a:solidFill>
               </a:rPr>
               <a:t>Consulting sold 238k against a 82k plan and keeps only 10%, so it still loses 9k.</a:t>
             </a:r>
-            <a:endParaRPr lang="en-US" sz="800" dirty="0"/>
+            <a:endParaRPr lang="en-US" sz="850" dirty="0"/>
           </a:p>
         </p:txBody>
       </p:sp>
@@ -18722,7 +18734,7 @@
                 <a:spcPts val="1150"/>
               </a:lnSpc>
               <a:spcAft>
-                <a:spcPts val="500"/>
+                <a:spcPts val="400"/>
               </a:spcAft>
               <a:buSzPct val="100000"/>
               <a:buChar char="•"/>
@@ -18743,7 +18755,7 @@
                 <a:spcPts val="1150"/>
               </a:lnSpc>
               <a:spcAft>
-                <a:spcPts val="500"/>
+                <a:spcPts val="400"/>
               </a:spcAft>
               <a:buSzPct val="100000"/>
               <a:buChar char="•"/>
@@ -18764,7 +18776,7 @@
                 <a:spcPts val="1150"/>
               </a:lnSpc>
               <a:spcAft>
-                <a:spcPts val="500"/>
+                <a:spcPts val="400"/>
               </a:spcAft>
               <a:buSzPct val="100000"/>
               <a:buChar char="•"/>
@@ -18785,7 +18797,7 @@
                 <a:spcPts val="1150"/>
               </a:lnSpc>
               <a:spcAft>
-                <a:spcPts val="500"/>
+                <a:spcPts val="400"/>
               </a:spcAft>
               <a:buSzPct val="100000"/>
               <a:buChar char="•"/>
@@ -18806,7 +18818,7 @@
                 <a:spcPts val="1150"/>
               </a:lnSpc>
               <a:spcAft>
-                <a:spcPts val="500"/>
+                <a:spcPts val="400"/>
               </a:spcAft>
               <a:buSzPct val="100000"/>
               <a:buChar char="•"/>

--- a/deck/CTS Monthly Business Review - September 2026.pptx
+++ b/deck/CTS Monthly Business Review - September 2026.pptx
@@ -37,9 +37,10 @@
     <p:sldId id="285" r:id="rId31"/>
     <p:sldId id="286" r:id="rId32"/>
     <p:sldId id="287" r:id="rId33"/>
+    <p:sldId id="288" r:id="rId34"/>
   </p:sldIdLst>
   <p:notesMasterIdLst>
-    <p:notesMasterId r:id="rId34"/>
+    <p:notesMasterId r:id="rId35"/>
   </p:notesMasterIdLst>
   <p:sldSz cx="9144000" cy="5143500"/>
   <p:notesSz cx="5143500" cy="9144000"/>
@@ -2012,7 +2013,7 @@
           <a:p>
             <a:r>
               <a:rPr lang="en-US" dirty="0"/>
-              <a:t>The company billed 2,437 chargeable hours in September 2026 out of 2,789 worked. Where chargeable hours fall short, margin follows.</a:t>
+              <a:t>The company billed 2,438 hours in September 2026 out of 3,395 it was available for, which is 72%. Where chargeable hours fall short, margin follows.</a:t>
             </a:r>
             <a:endParaRPr lang="en-US" dirty="0"/>
           </a:p>
@@ -2100,12 +2101,12 @@
           <a:p>
             <a:r>
               <a:rPr lang="en-US" dirty="0"/>
-              <a:t>The utilisation working for the two big cost centres, straight off the pack.
-The top three rows set the month: working days, and working hours at eight hours a day. Every FTE figure divides into that.
-For each cost centre the sheet holds billable hours, non-billable hours and leave, then two calculated lines. Utilisation per cent is billable divided by billable plus non-billable. Leave is excluded, because leave cannot be billed and including it would punish a team for taking its entitlement. FTE is billable plus non-billable divided by the month's working hours.
-Support: 99.5% utilisation on 12.2 FTE. I cannot put my name to that percentage. 11 non-billable hours in a whole month, for a team that size, is not a real number. Non-billable time is being coded to billable cost centres. The hours total is right, the split is not, and until the coding is corrected this figure cannot be used to manage anybody.
-Events: 49.1% utilisation on 2.8 FTE, with 333 hours of leave. That is the genuine operational issue on this page. The people were paid for, the work was not there.
-Three months sit side by side so the board reads a trend, not one month in isolation.</a:t>
+              <a:t>Chargeable per cent for September 2026, calculated exactly as the monthly Utilisation Report calculates it.
+The formula is billable hours divided by Workable Business Hours, which is the hours each person was available for in the month. Leave and public holidays stay in the bottom of the fraction, so a team that takes its leave shows a lower percentage. That is the business's own definition and this pack now uses it.
+Support 91.2% on 2,338 available hours. Production 30.2% on 882. Consulting 23.0% on 175. The company 71.8%.
+There are three person groups because the report groups by the department a person belongs to, and nobody is assigned to Video or Integration. Their work is carried out by Production and Consulting people and appears under those groups.
+Workable Business Hours is a paste, like the hours themselves. It cannot be calculated inside the pack, because it needs the headcount of each group and who is part time, and neither of those is in here.
+What this replaces. An earlier version of this pack divided billable hours by hours actually worked, leaving leave out of the sum. That put Support at 99.5 per cent and made it look like a coding error. It was not. On this basis Support is 91.2% and the figure is sound.</a:t>
             </a:r>
             <a:endParaRPr lang="en-US" dirty="0"/>
           </a:p>
@@ -2193,11 +2194,12 @@
           <a:p>
             <a:r>
               <a:rPr lang="en-US" dirty="0"/>
-              <a:t>The three small cost centres.
-Video: 76.0% utilisation on 0.18 FTE. 24.5 billable hours in the month.
-Integration: 100.0% on 0.05 FTE. The hundred per cent is arithmetic, not performance. 9.5 billable hours and no non-billable time booked at all. Integration's revenue this month came from resold equipment, not from our hours, which is why the money and the hours do not match.
-Consulting: 26.8% on 0.65 FTE. 84 hours into work we cannot bill against 31 we can, plus 53 hours of leave. Three months of that pattern, against running costs that have not moved, is the clearest case in the pack for a decision.
-A percentage on nine or twenty four hours is not a management number. Read the hours column.</a:t>
+              <a:t>The utilisation working for the two big cost centres, straight off the pack.
+The top three rows set the month: working days, and working hours at eight hours a day. Every FTE figure divides into that.
+For each cost centre the sheet holds billable hours, non-billable hours and leave, then two calculated lines. The percentage here is the billable share of the hours actually worked, which is not the same as the Chargeable per cent on the slide before: this one leaves leave out of the sum, your report keeps it in. Both are on the tab and each is labelled for what it is. FTE is billable plus non-billable divided by the month's working hours.
+Support: 2,132 billable hours on 12.2 FTE. The 11 of non-billable time shown here is an artefact of the grouping, not a coding error. The monthly report shows Support with no non-billable hours at all in September 2026; this tab regroups by the job the work was for, which moves a small amount of other people's non-billable time into Support.
+Events: 49.1% utilisation on 2.8 FTE, with 333 hours of leave. That is the genuine operational issue on this page. The people were paid for, the work was not there.
+Three months sit side by side so the board reads a trend, not one month in isolation.</a:t>
             </a:r>
             <a:endParaRPr lang="en-US" dirty="0"/>
           </a:p>
@@ -2285,17 +2287,11 @@
           <a:p>
             <a:r>
               <a:rPr lang="en-US" dirty="0"/>
-              <a:t>How each department spent its hours in September 2026.
-Read the bars as a mix, not as a size. Each one is scaled to that department's own total, because Support works around a hundred times the hours Integration does and on a straight scale four of the five departments disappear. The number on each segment is the real hours.
-Support: 2,132 hours on jobs, 11 not on jobs, 218 leave. 99.5% of worked hours were billable.
-Events: 241 hours on jobs, 249 not on jobs, 333 leave. 49.1% of worked hours were billable.
-Video: 25 hours on jobs, 8 not on jobs, 0 leave. 76.0% of worked hours were billable.
-Integration: 10 hours on jobs, 0 not on jobs, 0 leave. 100.0% of worked hours were billable.
-Consulting: 31 hours on jobs, 84 not on jobs, 53 leave. 26.8% of worked hours were billable.
-Across the five departments, 2,437 hours on jobs out of 2,789 worked.
-I need to be straight about the Support bar. 11 hours not on jobs, in a whole month, for a team that size, is not believable. Non-billable time is being booked to billable jobs. The total hours are right, the split is not, and until timesheet coding is corrected the Support percentage cannot be used to manage anybody.
-Events is the real operational issue: 333 hours of leave on a small team takes out most of the month's capacity.
-And the prize. Support earns about 48 of margin on every hour it bills. Five more points of billable time across Support and Events, at the rate each already earns, is worth roughly 15,813 a month and costs nothing extra. It is the largest controllable item in this pack.</a:t>
+              <a:t>The three small cost centres.
+Video: 76.0% utilisation on 0.18 FTE. 24.5 billable hours in the month.
+Integration: 100.0% on 0.05 FTE. The hundred per cent is arithmetic, not performance. 9.5 billable hours and no non-billable time booked at all. Integration's revenue this month came from resold equipment, not from our hours, which is why the money and the hours do not match.
+Consulting: 26.8% on 0.65 FTE. 84 hours into work we cannot bill against 31 we can, plus 53 hours of leave. Three months of that pattern, against running costs that have not moved, is the clearest case in the pack for a decision.
+A percentage on nine or twenty four hours is not a management number. Read the hours column.</a:t>
             </a:r>
             <a:endParaRPr lang="en-US" dirty="0"/>
           </a:p>
@@ -2383,11 +2379,17 @@
           <a:p>
             <a:r>
               <a:rPr lang="en-US" dirty="0"/>
-              <a:t>The hours mix for September 2026, rolled up to the three departments the P&amp;L is built on.
-Production is Events and Video together. Consulting is Integration and Consulting together. Support stands alone.
-Read each bar as a mix, not a size. Each is scaled to its own total, because Support works far more hours than the other two combined.
-The pattern is the whole argument of this pack. Support is almost entirely billable and it is the only department that covers its costs. Production and Consulting both spend roughly half their paid hours, or more, on work no customer pays for, and both lose money.
-The Support bar still cannot be used as a performance figure. 11 non-billable hours in a month is a coding problem, as set out on the earlier slide. What the bar does show correctly is the hours total and the leave.</a:t>
+              <a:t>How each department spent its hours in September 2026.
+Read the bars as a mix, not as a size. Each one is scaled to that department's own total, because Support works around a hundred times the hours Integration does and on a straight scale four of the five departments disappear. The number on each segment is the real hours.
+Support: 2,132 hours on jobs, 11 not on jobs, 218 leave. 99.5% of worked hours were billable.
+Events: 241 hours on jobs, 249 not on jobs, 333 leave. 49.1% of worked hours were billable.
+Video: 25 hours on jobs, 8 not on jobs, 0 leave. 76.0% of worked hours were billable.
+Integration: 10 hours on jobs, 0 not on jobs, 0 leave. 100.0% of worked hours were billable.
+Consulting: 31 hours on jobs, 84 not on jobs, 53 leave. 26.8% of worked hours were billable.
+Across the five departments, 2,437 hours on jobs out of 2,789 worked.
+On the Support bar: the small slice of non-billable time comes from the regrouping, not from bad coding. The monthly report shows Support with no non-billable hours in September 2026. This view regroups by the job the work was for, so a little of other people's non-billable time lands here.
+Events is the real operational issue: 333 hours of leave on a small team takes out most of the month's capacity.
+And the prize. Support earns about 48 of margin on every hour it bills. Five more points of billable time across Support and Events, at the rate each already earns, is worth roughly 15,813 a month and costs nothing extra. It is the largest controllable item in this pack.</a:t>
             </a:r>
             <a:endParaRPr lang="en-US" dirty="0"/>
           </a:p>
@@ -2475,7 +2477,11 @@
           <a:p>
             <a:r>
               <a:rPr lang="en-US" dirty="0"/>
-              <a:t>Three months are closed and the remaining nine are still at original budget. That is the decision in front of the board.</a:t>
+              <a:t>The hours mix for September 2026, rolled up to the three departments the P&amp;L is built on.
+Production is Events and Video together. Consulting is Integration and Consulting together. Support stands alone.
+Read each bar as a mix, not a size. Each is scaled to its own total, because Support works far more hours than the other two combined.
+The pattern is the whole argument of this pack. Support is almost entirely billable and it is the only department that covers its costs. Production and Consulting both spend roughly half their paid hours, or more, on work no customer pays for, and both lose money.
+Support reads 91.2% on the monthly report's own basis, which counts leave against it. That is the figure to quote in the room.</a:t>
             </a:r>
             <a:endParaRPr lang="en-US" dirty="0"/>
           </a:p>
@@ -2658,11 +2664,7 @@
           <a:p>
             <a:r>
               <a:rPr lang="en-US" dirty="0"/>
-              <a:t>Revenue by month, actual for the three closed months and original budget for the rest.
-Q1 actual 1,624,460 against a budget of 1,996,110, behind by 371,650.
-The nine months from October are still at the budget set before the year started. October is budgeted at 950,416, higher than any month we have delivered.
-Two things for the board. The Q1 variance is concentrated in Consulting and Video, which were budgeted on a resourcing level that does not exist. And the margin assumption in the budget is above what the business has delivered for two years, so even a month that hits the revenue number will miss the profit number.
-My recommendation is a rolling forecast from Q2, rebuilding Consulting around actual capacity and resetting gross margin to delivered rates. December should stay as budgeted: the business closes for two weeks and the loss is real.</a:t>
+              <a:t>Three months are closed and the remaining nine are still at original budget. That is the decision in front of the board.</a:t>
             </a:r>
             <a:endParaRPr lang="en-US" dirty="0"/>
           </a:p>
@@ -2750,10 +2752,11 @@
           <a:p>
             <a:r>
               <a:rPr lang="en-US" dirty="0"/>
-              <a:t>Seven actions, each with an owner and a date.
-The first two matter most: reforecasting on margin rather than revenue, and testing the overhead keys. Everything else in this pack follows from those two numbers.
-The Consulting decision cannot keep being deferred; it has carried running costs against almost no fees for three months.
-The cash action is the only one that produces money this quarter, and the utilisation action is the largest controllable item.</a:t>
+              <a:t>Revenue by month, actual for the three closed months and original budget for the rest.
+Q1 actual 1,624,460 against a budget of 1,996,110, behind by 371,650.
+The nine months from October are still at the budget set before the year started. October is budgeted at 950,416, higher than any month we have delivered.
+Two things for the board. The Q1 variance is concentrated in Consulting and Video, which were budgeted on a resourcing level that does not exist. And the margin assumption in the budget is above what the business has delivered for two years, so even a month that hits the revenue number will miss the profit number.
+My recommendation is a rolling forecast from Q2, rebuilding Consulting around actual capacity and resetting gross margin to delivered rates. December should stay as budgeted: the business closes for two weeks and the loss is real.</a:t>
             </a:r>
             <a:endParaRPr lang="en-US" dirty="0"/>
           </a:p>
@@ -2841,7 +2844,10 @@
           <a:p>
             <a:r>
               <a:rPr lang="en-US" dirty="0"/>
-              <a:t>Close on the two numbers that matter: break even needs 549,372 a month at our real margin, and we are running at 541,487. Everything else in the pack is detail underneath that.</a:t>
+              <a:t>Seven actions, each with an owner and a date.
+The first two matter most: reforecasting on margin rather than revenue, and testing the overhead keys. Everything else in this pack follows from those two numbers.
+The Consulting decision cannot keep being deferred; it has carried running costs against almost no fees for three months.
+The cash action is the only one that produces money this quarter, and the utilisation action is the largest controllable item.</a:t>
             </a:r>
             <a:endParaRPr lang="en-US" dirty="0"/>
           </a:p>
@@ -2865,6 +2871,94 @@
             <a:fld id="{F7021451-1387-4CA6-816F-3879F97B5CBC}" type="slidenum">
               <a:rPr lang="en-US"/>
               <a:t>32</a:t>
+            </a:fld>
+            <a:endParaRPr lang="en-US"/>
+          </a:p>
+        </p:txBody>
+      </p:sp>
+    </p:spTree>
+    <p:extLst>
+      <p:ext uri="{BB962C8B-B14F-4D97-AF65-F5344CB8AC3E}">
+        <p14:creationId xmlns:p14="http://schemas.microsoft.com/office/powerpoint/2010/main" val="1024086991"/>
+      </p:ext>
+    </p:extLst>
+  </p:cSld>
+  <p:clrMapOvr>
+    <a:masterClrMapping/>
+  </p:clrMapOvr>
+</p:notes>
+</file>
+
+<file path=ppt/notesSlides/notesSlide33.xml><?xml version="1.0" encoding="utf-8"?>
+<p:notes xmlns:a="http://schemas.openxmlformats.org/drawingml/2006/main" xmlns:r="http://schemas.openxmlformats.org/officeDocument/2006/relationships" xmlns:p="http://schemas.openxmlformats.org/presentationml/2006/main">
+  <p:cSld>
+    <p:spTree>
+      <p:nvGrpSpPr>
+        <p:cNvPr id="1" name=""/>
+        <p:cNvGrpSpPr/>
+        <p:nvPr/>
+      </p:nvGrpSpPr>
+      <p:grpSpPr>
+        <a:xfrm>
+          <a:off x="0" y="0"/>
+          <a:ext cx="0" cy="0"/>
+          <a:chOff x="0" y="0"/>
+          <a:chExt cx="0" cy="0"/>
+        </a:xfrm>
+      </p:grpSpPr>
+      <p:sp>
+        <p:nvSpPr>
+          <p:cNvPr id="2" name="Slide Image Placeholder 1"/>
+          <p:cNvSpPr>
+            <a:spLocks noGrp="1" noRot="1" noChangeAspect="1"/>
+          </p:cNvSpPr>
+          <p:nvPr>
+            <p:ph type="sldImg"/>
+          </p:nvPr>
+        </p:nvSpPr>
+        <p:spPr/>
+      </p:sp>
+      <p:sp>
+        <p:nvSpPr>
+          <p:cNvPr id="3" name="Notes Placeholder 2"/>
+          <p:cNvSpPr>
+            <a:spLocks noGrp="1"/>
+          </p:cNvSpPr>
+          <p:nvPr>
+            <p:ph type="body" idx="1"/>
+          </p:nvPr>
+        </p:nvSpPr>
+        <p:spPr/>
+        <p:txBody>
+          <a:bodyPr/>
+          <a:lstStyle/>
+          <a:p>
+            <a:r>
+              <a:rPr lang="en-US" dirty="0"/>
+              <a:t>Close on the two numbers that matter: break even needs 549,372 a month at our real margin, and we are running at 541,487. Everything else in the pack is detail underneath that.</a:t>
+            </a:r>
+            <a:endParaRPr lang="en-US" dirty="0"/>
+          </a:p>
+        </p:txBody>
+      </p:sp>
+      <p:sp>
+        <p:nvSpPr>
+          <p:cNvPr id="4" name="Slide Number Placeholder 3"/>
+          <p:cNvSpPr>
+            <a:spLocks noGrp="1"/>
+          </p:cNvSpPr>
+          <p:nvPr>
+            <p:ph type="sldNum" sz="quarter" idx="10"/>
+          </p:nvPr>
+        </p:nvSpPr>
+        <p:spPr/>
+        <p:txBody>
+          <a:bodyPr/>
+          <a:lstStyle/>
+          <a:p>
+            <a:fld id="{F7021451-1387-4CA6-816F-3879F97B5CBC}" type="slidenum">
+              <a:rPr lang="en-US"/>
+              <a:t>33</a:t>
             </a:fld>
             <a:endParaRPr lang="en-US"/>
           </a:p>
@@ -10435,7 +10529,7 @@
                   <a:srgbClr val="242C39"/>
                 </a:solidFill>
               </a:rPr>
-              <a:t>Utilisation, Support and Events</a:t>
+              <a:t>Chargeable per cent, Sep 26</a:t>
             </a:r>
             <a:endParaRPr lang="en-US" sz="2700" dirty="0"/>
           </a:p>
@@ -10443,7 +10537,7 @@
       </p:sp>
       <p:pic>
         <p:nvPicPr>
-          <p:cNvPr id="4" name="snip util_pct_a" descr="/home/user/Claude/deck/snips/util_pct_a.png">    </p:cNvPr>
+          <p:cNvPr id="4" name="snip util_her" descr="/home/user/Claude/deck/snips/util_her.png">    </p:cNvPr>
           <p:cNvPicPr>
             <a:picLocks noChangeAspect="1"/>
           </p:cNvPicPr>
@@ -10457,8 +10551,8 @@
         </p:blipFill>
         <p:spPr>
           <a:xfrm>
-            <a:off x="502920" y="1444752"/>
-            <a:ext cx="5577840" cy="2876991"/>
+            <a:off x="1515437" y="1444752"/>
+            <a:ext cx="3552806" cy="3090672"/>
           </a:xfrm>
           <a:prstGeom prst="rect">
             <a:avLst/>
@@ -10473,7 +10567,7 @@
         </p:nvSpPr>
         <p:spPr>
           <a:xfrm>
-            <a:off x="502920" y="4394895"/>
+            <a:off x="502920" y="4608576"/>
             <a:ext cx="5577840" cy="237744"/>
           </a:xfrm>
           <a:prstGeom prst="rect">
@@ -10495,7 +10589,7 @@
                   <a:srgbClr val="6B7585"/>
                 </a:solidFill>
               </a:rPr>
-              <a:t>Snipped from the Financial Controller Pack, Utilisation tab, hours, utilisation per cent and FTE, July to September. The pack calls these two cost centres Onsite and Production.</a:t>
+              <a:t>Snipped from the Financial Controller Pack, Utilisation tab, Chargeable per cent, the Utilisation Report basis.</a:t>
             </a:r>
             <a:endParaRPr lang="en-US" sz="800" dirty="0"/>
           </a:p>
@@ -10596,7 +10690,7 @@
                   <a:srgbClr val="3A4453"/>
                 </a:solidFill>
               </a:rPr>
-              <a:t>This is the calculation itself. Hours worked, how many went on jobs, the percentage that gives, and the headcount those hours represent.</a:t>
+              <a:t>This is the monthly Utilisation Report's own calculation. Billable hours divided by the hours each person was available for, so leave and public holidays count against it.</a:t>
             </a:r>
             <a:endParaRPr lang="en-US" sz="800" dirty="0"/>
           </a:p>
@@ -10617,7 +10711,7 @@
                   <a:srgbClr val="3A4453"/>
                 </a:solidFill>
               </a:rPr>
-              <a:t>Utilisation per cent is billable hours divided by hours worked. Leave is left out, because nobody can bill leave.</a:t>
+              <a:t>Support 91%. Production 30%. Consulting 23%. The company 72%.</a:t>
             </a:r>
             <a:endParaRPr lang="en-US" sz="800" dirty="0"/>
           </a:p>
@@ -10638,7 +10732,7 @@
                   <a:srgbClr val="3A4453"/>
                 </a:solidFill>
               </a:rPr>
-              <a:t>FTE is hours worked divided by the working hours in the month, so 1.0 is one full time person.</a:t>
+              <a:t>Three person groups, not five, because nobody is assigned to Video or Integration. Their work is done by Production and Consulting people.</a:t>
             </a:r>
             <a:endParaRPr lang="en-US" sz="800" dirty="0"/>
           </a:p>
@@ -10659,7 +10753,7 @@
                   <a:srgbClr val="3A4453"/>
                 </a:solidFill>
               </a:rPr>
-              <a:t>Support reads 99% on only 11 non-billable hours. That is a coding problem, not a result.</a:t>
+              <a:t>Production is the one to act on. 333 hours of leave on 882 available took most of the month out.</a:t>
             </a:r>
             <a:endParaRPr lang="en-US" sz="800" dirty="0"/>
           </a:p>
@@ -10680,7 +10774,7 @@
                   <a:srgbClr val="3A4453"/>
                 </a:solidFill>
               </a:rPr>
-              <a:t>Events at 49% is the real one. 333 hours of leave took out most of the month.</a:t>
+              <a:t>Each month ties to the Grand Total on the monthly report to four decimal places.</a:t>
             </a:r>
             <a:endParaRPr lang="en-US" sz="800" dirty="0"/>
           </a:p>
@@ -10822,7 +10916,7 @@
                   <a:srgbClr val="242C39"/>
                 </a:solidFill>
               </a:rPr>
-              <a:t>Utilisation, Video, Integration and Consulting</a:t>
+              <a:t>Utilisation, Support and Events</a:t>
             </a:r>
             <a:endParaRPr lang="en-US" sz="2700" dirty="0"/>
           </a:p>
@@ -10830,7 +10924,7 @@
       </p:sp>
       <p:pic>
         <p:nvPicPr>
-          <p:cNvPr id="4" name="snip util_pct_b" descr="/home/user/Claude/deck/snips/util_pct_b.png">    </p:cNvPr>
+          <p:cNvPr id="4" name="snip util_pct_a" descr="/home/user/Claude/deck/snips/util_pct_a.png">    </p:cNvPr>
           <p:cNvPicPr>
             <a:picLocks noChangeAspect="1"/>
           </p:cNvPicPr>
@@ -10844,8 +10938,8 @@
         </p:blipFill>
         <p:spPr>
           <a:xfrm>
-            <a:off x="757565" y="1444752"/>
-            <a:ext cx="5068550" cy="3090672"/>
+            <a:off x="502920" y="1444752"/>
+            <a:ext cx="5577840" cy="2633447"/>
           </a:xfrm>
           <a:prstGeom prst="rect">
             <a:avLst/>
@@ -10860,7 +10954,7 @@
         </p:nvSpPr>
         <p:spPr>
           <a:xfrm>
-            <a:off x="502920" y="4608576"/>
+            <a:off x="502920" y="4151351"/>
             <a:ext cx="5577840" cy="237744"/>
           </a:xfrm>
           <a:prstGeom prst="rect">
@@ -10882,7 +10976,7 @@
                   <a:srgbClr val="6B7585"/>
                 </a:solidFill>
               </a:rPr>
-              <a:t>Snipped from the Financial Controller Pack, Utilisation tab, hours, utilisation per cent and FTE, July to September.</a:t>
+              <a:t>Snipped from the Financial Controller Pack, Utilisation tab, hours, utilisation per cent and FTE, July to September. The pack calls these two cost centres Onsite and Production.</a:t>
             </a:r>
             <a:endParaRPr lang="en-US" sz="800" dirty="0"/>
           </a:p>
@@ -10969,7 +11063,7 @@
           <a:p>
             <a:pPr marL="342900" indent="-342900">
               <a:lnSpc>
-                <a:spcPts val="1150"/>
+                <a:spcPts val="1000"/>
               </a:lnSpc>
               <a:spcAft>
                 <a:spcPts val="400"/>
@@ -10978,19 +11072,19 @@
               <a:buChar char="•"/>
             </a:pPr>
             <a:r>
-              <a:rPr lang="en-US" sz="900" dirty="0">
+              <a:rPr lang="en-US" sz="800" dirty="0">
                 <a:solidFill>
                   <a:srgbClr val="3A4453"/>
                 </a:solidFill>
               </a:rPr>
-              <a:t>Read these three as hours, not as percentages. The volumes are too small for a percentage to mean much.</a:t>
-            </a:r>
-            <a:endParaRPr lang="en-US" sz="900" dirty="0"/>
+              <a:t>This is the calculation itself. Hours worked, how many went on jobs, the percentage that gives, and the headcount those hours represent.</a:t>
+            </a:r>
+            <a:endParaRPr lang="en-US" sz="800" dirty="0"/>
           </a:p>
           <a:p>
             <a:pPr marL="342900" indent="-342900">
               <a:lnSpc>
-                <a:spcPts val="1150"/>
+                <a:spcPts val="1000"/>
               </a:lnSpc>
               <a:spcAft>
                 <a:spcPts val="400"/>
@@ -10999,19 +11093,19 @@
               <a:buChar char="•"/>
             </a:pPr>
             <a:r>
-              <a:rPr lang="en-US" sz="900" dirty="0">
+              <a:rPr lang="en-US" sz="800" dirty="0">
                 <a:solidFill>
                   <a:srgbClr val="3A4453"/>
                 </a:solidFill>
               </a:rPr>
-              <a:t>Integration shows 100% on 9.5 billable hours. That is one day of work, not a result.</a:t>
-            </a:r>
-            <a:endParaRPr lang="en-US" sz="900" dirty="0"/>
+              <a:t>Utilisation per cent is billable hours divided by hours worked. Leave is left out, because nobody can bill leave.</a:t>
+            </a:r>
+            <a:endParaRPr lang="en-US" sz="800" dirty="0"/>
           </a:p>
           <a:p>
             <a:pPr marL="342900" indent="-342900">
               <a:lnSpc>
-                <a:spcPts val="1150"/>
+                <a:spcPts val="1000"/>
               </a:lnSpc>
               <a:spcAft>
                 <a:spcPts val="400"/>
@@ -11020,19 +11114,19 @@
               <a:buChar char="•"/>
             </a:pPr>
             <a:r>
-              <a:rPr lang="en-US" sz="900" dirty="0">
+              <a:rPr lang="en-US" sz="800" dirty="0">
                 <a:solidFill>
                   <a:srgbClr val="3A4453"/>
                 </a:solidFill>
               </a:rPr>
-              <a:t>Video put 24.5 hours on jobs, about 0.18 of a full time person.</a:t>
-            </a:r>
-            <a:endParaRPr lang="en-US" sz="900" dirty="0"/>
+              <a:t>FTE is hours worked divided by the working hours in the month, so 1.0 is one full time person.</a:t>
+            </a:r>
+            <a:endParaRPr lang="en-US" sz="800" dirty="0"/>
           </a:p>
           <a:p>
             <a:pPr marL="342900" indent="-342900">
               <a:lnSpc>
-                <a:spcPts val="1150"/>
+                <a:spcPts val="1000"/>
               </a:lnSpc>
               <a:spcAft>
                 <a:spcPts val="400"/>
@@ -11041,19 +11135,19 @@
               <a:buChar char="•"/>
             </a:pPr>
             <a:r>
-              <a:rPr lang="en-US" sz="900" dirty="0">
+              <a:rPr lang="en-US" sz="800" dirty="0">
                 <a:solidFill>
                   <a:srgbClr val="3A4453"/>
                 </a:solidFill>
               </a:rPr>
-              <a:t>Consulting is the one that matters: 27%, with 84 hours on work we cannot bill.</a:t>
-            </a:r>
-            <a:endParaRPr lang="en-US" sz="900" dirty="0"/>
+              <a:t>This page is the hours record, grouped by the job the work was for. The Chargeable per cent the monthly report uses is on the slide before.</a:t>
+            </a:r>
+            <a:endParaRPr lang="en-US" sz="800" dirty="0"/>
           </a:p>
           <a:p>
             <a:pPr marL="342900" indent="-342900">
               <a:lnSpc>
-                <a:spcPts val="1150"/>
+                <a:spcPts val="1000"/>
               </a:lnSpc>
               <a:spcAft>
                 <a:spcPts val="400"/>
@@ -11062,14 +11156,14 @@
               <a:buChar char="•"/>
             </a:pPr>
             <a:r>
-              <a:rPr lang="en-US" sz="900" dirty="0">
+              <a:rPr lang="en-US" sz="800" dirty="0">
                 <a:solidFill>
                   <a:srgbClr val="3A4453"/>
                 </a:solidFill>
               </a:rPr>
-              <a:t>Consulting has carried running costs against almost no fees for three months. That decision keeps being deferred.</a:t>
-            </a:r>
-            <a:endParaRPr lang="en-US" sz="900" dirty="0"/>
+              <a:t>Support billed 2,132 hours. Events billed 241 and lost 333 to leave.</a:t>
+            </a:r>
+            <a:endParaRPr lang="en-US" sz="800" dirty="0"/>
           </a:p>
         </p:txBody>
       </p:sp>
@@ -11209,7 +11303,7 @@
                   <a:srgbClr val="242C39"/>
                 </a:solidFill>
               </a:rPr>
-              <a:t>How each department spent its hours, Sep 26</a:t>
+              <a:t>Utilisation, Video, Integration and Consulting</a:t>
             </a:r>
             <a:endParaRPr lang="en-US" sz="2700" dirty="0"/>
           </a:p>
@@ -11217,7 +11311,7 @@
       </p:sp>
       <p:pic>
         <p:nvPicPr>
-          <p:cNvPr id="4" name="snip util_chart" descr="/home/user/Claude/deck/snips/util_chart.png">    </p:cNvPr>
+          <p:cNvPr id="4" name="snip util_pct_b" descr="/home/user/Claude/deck/snips/util_pct_b.png">    </p:cNvPr>
           <p:cNvPicPr>
             <a:picLocks noChangeAspect="1"/>
           </p:cNvPicPr>
@@ -11231,8 +11325,8 @@
         </p:blipFill>
         <p:spPr>
           <a:xfrm>
-            <a:off x="502920" y="1444752"/>
-            <a:ext cx="5577840" cy="3045909"/>
+            <a:off x="523192" y="1444752"/>
+            <a:ext cx="5537295" cy="3090672"/>
           </a:xfrm>
           <a:prstGeom prst="rect">
             <a:avLst/>
@@ -11247,7 +11341,7 @@
         </p:nvSpPr>
         <p:spPr>
           <a:xfrm>
-            <a:off x="502920" y="4563813"/>
+            <a:off x="502920" y="4608576"/>
             <a:ext cx="5577840" cy="237744"/>
           </a:xfrm>
           <a:prstGeom prst="rect">
@@ -11269,7 +11363,7 @@
                   <a:srgbClr val="6B7585"/>
                 </a:solidFill>
               </a:rPr>
-              <a:t>Snipped from the Financial Controller Pack, Utilisation tab, hours by department, each bar scaled to its own total.</a:t>
+              <a:t>Snipped from the Financial Controller Pack, Utilisation tab, hours, utilisation per cent and FTE, July to September.</a:t>
             </a:r>
             <a:endParaRPr lang="en-US" sz="800" dirty="0"/>
           </a:p>
@@ -11356,7 +11450,7 @@
           <a:p>
             <a:pPr marL="342900" indent="-342900">
               <a:lnSpc>
-                <a:spcPts val="1050"/>
+                <a:spcPts val="1150"/>
               </a:lnSpc>
               <a:spcAft>
                 <a:spcPts val="400"/>
@@ -11365,19 +11459,19 @@
               <a:buChar char="•"/>
             </a:pPr>
             <a:r>
-              <a:rPr lang="en-US" sz="850" dirty="0">
+              <a:rPr lang="en-US" sz="900" dirty="0">
                 <a:solidFill>
                   <a:srgbClr val="3A4453"/>
                 </a:solidFill>
               </a:rPr>
-              <a:t>Each bar is scaled to that department's own hours, so you can compare the mix. Support works about a hundred times the hours Integration does.</a:t>
-            </a:r>
-            <a:endParaRPr lang="en-US" sz="850" dirty="0"/>
+              <a:t>Read these three as hours, not as percentages. The volumes are too small for a percentage to mean much.</a:t>
+            </a:r>
+            <a:endParaRPr lang="en-US" sz="900" dirty="0"/>
           </a:p>
           <a:p>
             <a:pPr marL="342900" indent="-342900">
               <a:lnSpc>
-                <a:spcPts val="1050"/>
+                <a:spcPts val="1150"/>
               </a:lnSpc>
               <a:spcAft>
                 <a:spcPts val="400"/>
@@ -11386,19 +11480,19 @@
               <a:buChar char="•"/>
             </a:pPr>
             <a:r>
-              <a:rPr lang="en-US" sz="850" dirty="0">
+              <a:rPr lang="en-US" sz="900" dirty="0">
                 <a:solidFill>
                   <a:srgbClr val="3A4453"/>
                 </a:solidFill>
               </a:rPr>
-              <a:t>Support shows 11 hours not on jobs out of 2,143 worked. That is not credible.</a:t>
-            </a:r>
-            <a:endParaRPr lang="en-US" sz="850" dirty="0"/>
+              <a:t>Integration shows 100% on 9.5 billable hours. That is one day of work, not a result.</a:t>
+            </a:r>
+            <a:endParaRPr lang="en-US" sz="900" dirty="0"/>
           </a:p>
           <a:p>
             <a:pPr marL="342900" indent="-342900">
               <a:lnSpc>
-                <a:spcPts val="1050"/>
+                <a:spcPts val="1150"/>
               </a:lnSpc>
               <a:spcAft>
                 <a:spcPts val="400"/>
@@ -11407,19 +11501,19 @@
               <a:buChar char="•"/>
             </a:pPr>
             <a:r>
-              <a:rPr lang="en-US" sz="850" dirty="0">
+              <a:rPr lang="en-US" sz="900" dirty="0">
                 <a:solidFill>
                   <a:srgbClr val="3A4453"/>
                 </a:solidFill>
               </a:rPr>
-              <a:t>Events put 333 hours into leave and only 241 onto jobs. The people are there, the work is not.</a:t>
-            </a:r>
-            <a:endParaRPr lang="en-US" sz="850" dirty="0"/>
+              <a:t>Video put 24.5 hours on jobs, about 0.18 of a full time person.</a:t>
+            </a:r>
+            <a:endParaRPr lang="en-US" sz="900" dirty="0"/>
           </a:p>
           <a:p>
             <a:pPr marL="342900" indent="-342900">
               <a:lnSpc>
-                <a:spcPts val="1050"/>
+                <a:spcPts val="1150"/>
               </a:lnSpc>
               <a:spcAft>
                 <a:spcPts val="400"/>
@@ -11428,19 +11522,19 @@
               <a:buChar char="•"/>
             </a:pPr>
             <a:r>
-              <a:rPr lang="en-US" sz="850" dirty="0">
+              <a:rPr lang="en-US" sz="900" dirty="0">
                 <a:solidFill>
                   <a:srgbClr val="3A4453"/>
                 </a:solidFill>
               </a:rPr>
-              <a:t>Consulting put 84 hours into work we cannot bill against 31 we can.</a:t>
-            </a:r>
-            <a:endParaRPr lang="en-US" sz="850" dirty="0"/>
+              <a:t>Consulting is the one that matters: 27%, with 84 hours on work we cannot bill.</a:t>
+            </a:r>
+            <a:endParaRPr lang="en-US" sz="900" dirty="0"/>
           </a:p>
           <a:p>
             <a:pPr marL="342900" indent="-342900">
               <a:lnSpc>
-                <a:spcPts val="1050"/>
+                <a:spcPts val="1150"/>
               </a:lnSpc>
               <a:spcAft>
                 <a:spcPts val="400"/>
@@ -11449,14 +11543,14 @@
               <a:buChar char="•"/>
             </a:pPr>
             <a:r>
-              <a:rPr lang="en-US" sz="850" dirty="0">
+              <a:rPr lang="en-US" sz="900" dirty="0">
                 <a:solidFill>
                   <a:srgbClr val="3A4453"/>
                 </a:solidFill>
               </a:rPr>
-              <a:t>We pay for every hour. We only bill the ones on jobs. The grey and light teal are the gap.</a:t>
-            </a:r>
-            <a:endParaRPr lang="en-US" sz="850" dirty="0"/>
+              <a:t>Consulting has carried running costs against almost no fees for three months. That decision keeps being deferred.</a:t>
+            </a:r>
+            <a:endParaRPr lang="en-US" sz="900" dirty="0"/>
           </a:p>
         </p:txBody>
       </p:sp>
@@ -11596,7 +11690,7 @@
                   <a:srgbClr val="242C39"/>
                 </a:solidFill>
               </a:rPr>
-              <a:t>Hours, the three departments, Sep 26</a:t>
+              <a:t>How each department spent its hours, Sep 26</a:t>
             </a:r>
             <a:endParaRPr lang="en-US" sz="2700" dirty="0"/>
           </a:p>
@@ -11604,7 +11698,7 @@
       </p:sp>
       <p:pic>
         <p:nvPicPr>
-          <p:cNvPr id="4" name="snip util_three" descr="/home/user/Claude/deck/snips/util_three.png">    </p:cNvPr>
+          <p:cNvPr id="4" name="snip util_chart" descr="/home/user/Claude/deck/snips/util_chart.png">    </p:cNvPr>
           <p:cNvPicPr>
             <a:picLocks noChangeAspect="1"/>
           </p:cNvPicPr>
@@ -11619,7 +11713,7 @@
         <p:spPr>
           <a:xfrm>
             <a:off x="502920" y="1444752"/>
-            <a:ext cx="5577840" cy="2587417"/>
+            <a:ext cx="5577840" cy="3045909"/>
           </a:xfrm>
           <a:prstGeom prst="rect">
             <a:avLst/>
@@ -11634,7 +11728,7 @@
         </p:nvSpPr>
         <p:spPr>
           <a:xfrm>
-            <a:off x="502920" y="4105321"/>
+            <a:off x="502920" y="4563813"/>
             <a:ext cx="5577840" cy="237744"/>
           </a:xfrm>
           <a:prstGeom prst="rect">
@@ -11656,7 +11750,7 @@
                   <a:srgbClr val="6B7585"/>
                 </a:solidFill>
               </a:rPr>
-              <a:t>Snipped from the Financial Controller Pack, Utilisation tab, hours rolled up to the three departments, each bar scaled to its own total.</a:t>
+              <a:t>Snipped from the Financial Controller Pack, Utilisation tab, hours by department, each bar scaled to its own total.</a:t>
             </a:r>
             <a:endParaRPr lang="en-US" sz="800" dirty="0"/>
           </a:p>
@@ -11757,7 +11851,7 @@
                   <a:srgbClr val="3A4453"/>
                 </a:solidFill>
               </a:rPr>
-              <a:t>The same picture grouped the way the P&amp;L is. Production is Events and Video. Consulting is Integration and Consulting.</a:t>
+              <a:t>Each bar is scaled to that department's own hours, so you can compare the mix. Support works about a hundred times the hours Integration does.</a:t>
             </a:r>
             <a:endParaRPr lang="en-US" sz="850" dirty="0"/>
           </a:p>
@@ -11778,7 +11872,7 @@
                   <a:srgbClr val="3A4453"/>
                 </a:solidFill>
               </a:rPr>
-              <a:t>Production put 265 hours onto jobs and 257 onto work we cannot bill, with 333 hours of leave on top.</a:t>
+              <a:t>Support is almost entirely billable, which is why it is the only department that makes money.</a:t>
             </a:r>
             <a:endParaRPr lang="en-US" sz="850" dirty="0"/>
           </a:p>
@@ -11799,7 +11893,7 @@
                   <a:srgbClr val="3A4453"/>
                 </a:solidFill>
               </a:rPr>
-              <a:t>Consulting put 40 onto jobs against 84 we cannot bill. Two thirds of its paid hours earn nothing.</a:t>
+              <a:t>Events put 333 hours into leave and only 241 onto jobs. The people are there, the work is not.</a:t>
             </a:r>
             <a:endParaRPr lang="en-US" sz="850" dirty="0"/>
           </a:p>
@@ -11820,7 +11914,7 @@
                   <a:srgbClr val="3A4453"/>
                 </a:solidFill>
               </a:rPr>
-              <a:t>Support is the only bar that is almost all dark. That is why it is the only department that makes money.</a:t>
+              <a:t>Consulting put 84 hours into work we cannot bill against 31 we can.</a:t>
             </a:r>
             <a:endParaRPr lang="en-US" sz="850" dirty="0"/>
           </a:p>
@@ -11841,7 +11935,7 @@
                   <a:srgbClr val="3A4453"/>
                 </a:solidFill>
               </a:rPr>
-              <a:t>Each bar is scaled to its own hours. Support works about four times the hours of the other two together.</a:t>
+              <a:t>We pay for every hour. We only bill the ones on jobs. The grey and light teal are the gap.</a:t>
             </a:r>
             <a:endParaRPr lang="en-US" sz="850" dirty="0"/>
           </a:p>
@@ -11919,92 +12013,14 @@
       </p:grpSpPr>
       <p:sp>
         <p:nvSpPr>
-          <p:cNvPr id="2" name="divider circle"/>
-          <p:cNvSpPr/>
-          <p:nvPr/>
-        </p:nvSpPr>
-        <p:spPr>
-          <a:xfrm>
-            <a:off x="6446520" y="1600200"/>
-            <a:ext cx="2651760" cy="2651760"/>
-          </a:xfrm>
-          <a:prstGeom prst="ellipse">
-            <a:avLst/>
-          </a:prstGeom>
-          <a:solidFill>
-            <a:srgbClr val="6D71FF">
-              <a:alpha val="55000"/>
-            </a:srgbClr>
-          </a:solidFill>
-          <a:ln/>
-        </p:spPr>
-      </p:sp>
-      <p:sp>
-        <p:nvSpPr>
-          <p:cNvPr id="3" name="Shape 1"/>
-          <p:cNvSpPr/>
-          <p:nvPr/>
-        </p:nvSpPr>
-        <p:spPr>
-          <a:xfrm>
-            <a:off x="502920" y="1874520"/>
-            <a:ext cx="868680" cy="868680"/>
-          </a:xfrm>
-          <a:prstGeom prst="rect">
-            <a:avLst/>
-          </a:prstGeom>
-          <a:solidFill>
-            <a:srgbClr val="3FD0C9"/>
-          </a:solidFill>
-          <a:ln/>
-        </p:spPr>
-      </p:sp>
-      <p:sp>
-        <p:nvSpPr>
-          <p:cNvPr id="4" name="Text 2"/>
-          <p:cNvSpPr txBox="1"/>
-          <p:nvPr/>
-        </p:nvSpPr>
-        <p:spPr>
-          <a:xfrm>
-            <a:off x="502920" y="1874520"/>
-            <a:ext cx="868680" cy="868680"/>
-          </a:xfrm>
-          <a:prstGeom prst="rect">
-            <a:avLst/>
-          </a:prstGeom>
-          <a:noFill/>
-          <a:ln/>
-        </p:spPr>
-        <p:txBody>
-          <a:bodyPr wrap="square" lIns="0" tIns="0" rIns="0" bIns="0" rtlCol="0" anchor="ctr"/>
-          <a:lstStyle/>
-          <a:p>
-            <a:pPr algn="ctr" indent="0" marL="0">
-              <a:buNone/>
-            </a:pPr>
-            <a:r>
-              <a:rPr lang="en-US" sz="2600" b="1" dirty="0">
-                <a:solidFill>
-                  <a:srgbClr val="242C39"/>
-                </a:solidFill>
-              </a:rPr>
-              <a:t>05</a:t>
-            </a:r>
-            <a:endParaRPr lang="en-US" sz="2600" dirty="0"/>
-          </a:p>
-        </p:txBody>
-      </p:sp>
-      <p:sp>
-        <p:nvSpPr>
-          <p:cNvPr id="5" name="Text 3"/>
-          <p:cNvSpPr txBox="1"/>
-          <p:nvPr/>
-        </p:nvSpPr>
-        <p:spPr>
-          <a:xfrm>
-            <a:off x="502920" y="411480"/>
-            <a:ext cx="3657600" cy="274320"/>
+          <p:cNvPr id="2" name="Text 0"/>
+          <p:cNvSpPr txBox="1"/>
+          <p:nvPr/>
+        </p:nvSpPr>
+        <p:spPr>
+          <a:xfrm>
+            <a:off x="502920" y="365760"/>
+            <a:ext cx="6400800" cy="274320"/>
           </a:xfrm>
           <a:prstGeom prst="rect">
             <a:avLst/>
@@ -12022,10 +12038,10 @@
             <a:r>
               <a:rPr lang="en-US" sz="950" b="1" spc="220" kern="0" dirty="0">
                 <a:solidFill>
-                  <a:srgbClr val="3FD0C9"/>
-                </a:solidFill>
-              </a:rPr>
-              <a:t>SECTION</a:t>
+                  <a:srgbClr val="122B82"/>
+                </a:solidFill>
+              </a:rPr>
+              <a:t>PEOPLE AND UTILISATION</a:t>
             </a:r>
             <a:endParaRPr lang="en-US" sz="950" dirty="0"/>
           </a:p>
@@ -12033,14 +12049,14 @@
       </p:sp>
       <p:sp>
         <p:nvSpPr>
-          <p:cNvPr id="6" name="Text 4"/>
-          <p:cNvSpPr txBox="1"/>
-          <p:nvPr/>
-        </p:nvSpPr>
-        <p:spPr>
-          <a:xfrm>
-            <a:off x="1600200" y="1874520"/>
-            <a:ext cx="5943600" cy="502920"/>
+          <p:cNvPr id="3" name="Text 1"/>
+          <p:cNvSpPr txBox="1"/>
+          <p:nvPr/>
+        </p:nvSpPr>
+        <p:spPr>
+          <a:xfrm>
+            <a:off x="502920" y="640080"/>
+            <a:ext cx="7315200" cy="685800"/>
           </a:xfrm>
           <a:prstGeom prst="rect">
             <a:avLst/>
@@ -12056,50 +12072,304 @@
               <a:buNone/>
             </a:pPr>
             <a:r>
-              <a:rPr lang="en-US" sz="2800" b="1" dirty="0">
-                <a:solidFill>
-                  <a:srgbClr val="FFFFFF"/>
-                </a:solidFill>
-              </a:rPr>
-              <a:t>Budget and outlook</a:t>
-            </a:r>
-            <a:endParaRPr lang="en-US" sz="2800" dirty="0"/>
-          </a:p>
-        </p:txBody>
-      </p:sp>
-      <p:sp>
-        <p:nvSpPr>
-          <p:cNvPr id="7" name="Text 5"/>
-          <p:cNvSpPr txBox="1"/>
-          <p:nvPr/>
-        </p:nvSpPr>
-        <p:spPr>
-          <a:xfrm>
-            <a:off x="1600200" y="2395728"/>
-            <a:ext cx="5943600" cy="347472"/>
-          </a:xfrm>
-          <a:prstGeom prst="rect">
-            <a:avLst/>
-          </a:prstGeom>
-          <a:noFill/>
-          <a:ln/>
-        </p:spPr>
-        <p:txBody>
-          <a:bodyPr wrap="square" lIns="0" tIns="0" rIns="0" bIns="0" rtlCol="0" anchor="ctr"/>
+              <a:rPr lang="en-US" sz="2700" b="1" dirty="0">
+                <a:solidFill>
+                  <a:srgbClr val="242C39"/>
+                </a:solidFill>
+              </a:rPr>
+              <a:t>Hours, the three departments, Sep 26</a:t>
+            </a:r>
+            <a:endParaRPr lang="en-US" sz="2700" dirty="0"/>
+          </a:p>
+        </p:txBody>
+      </p:sp>
+      <p:pic>
+        <p:nvPicPr>
+          <p:cNvPr id="4" name="snip util_three" descr="/home/user/Claude/deck/snips/util_three.png">    </p:cNvPr>
+          <p:cNvPicPr>
+            <a:picLocks noChangeAspect="1"/>
+          </p:cNvPicPr>
+          <p:nvPr/>
+        </p:nvPicPr>
+        <p:blipFill>
+          <a:blip r:embed="rId1"/>
+          <a:stretch>
+            <a:fillRect/>
+          </a:stretch>
+        </p:blipFill>
+        <p:spPr>
+          <a:xfrm>
+            <a:off x="502920" y="1444752"/>
+            <a:ext cx="5577840" cy="2587417"/>
+          </a:xfrm>
+          <a:prstGeom prst="rect">
+            <a:avLst/>
+          </a:prstGeom>
+        </p:spPr>
+      </p:pic>
+      <p:sp>
+        <p:nvSpPr>
+          <p:cNvPr id="5" name="Text 2"/>
+          <p:cNvSpPr txBox="1"/>
+          <p:nvPr/>
+        </p:nvSpPr>
+        <p:spPr>
+          <a:xfrm>
+            <a:off x="502920" y="4105321"/>
+            <a:ext cx="5577840" cy="237744"/>
+          </a:xfrm>
+          <a:prstGeom prst="rect">
+            <a:avLst/>
+          </a:prstGeom>
+          <a:noFill/>
+          <a:ln/>
+        </p:spPr>
+        <p:txBody>
+          <a:bodyPr wrap="square" lIns="0" tIns="0" rIns="0" bIns="0" rtlCol="0" anchor="t"/>
           <a:lstStyle/>
           <a:p>
             <a:pPr indent="0" marL="0">
               <a:buNone/>
             </a:pPr>
             <a:r>
-              <a:rPr lang="en-US" sz="1200" dirty="0">
-                <a:solidFill>
-                  <a:srgbClr val="C9CED6"/>
-                </a:solidFill>
-              </a:rPr>
-              <a:t>What the rest of the year looks like and what we change</a:t>
-            </a:r>
-            <a:endParaRPr lang="en-US" sz="1200" dirty="0"/>
+              <a:rPr lang="en-US" sz="800" i="1" dirty="0">
+                <a:solidFill>
+                  <a:srgbClr val="6B7585"/>
+                </a:solidFill>
+              </a:rPr>
+              <a:t>Snipped from the Financial Controller Pack, Utilisation tab, hours rolled up to the three departments, each bar scaled to its own total.</a:t>
+            </a:r>
+            <a:endParaRPr lang="en-US" sz="800" dirty="0"/>
+          </a:p>
+        </p:txBody>
+      </p:sp>
+      <p:sp>
+        <p:nvSpPr>
+          <p:cNvPr id="6" name="commentary panel"/>
+          <p:cNvSpPr/>
+          <p:nvPr/>
+        </p:nvSpPr>
+        <p:spPr>
+          <a:xfrm>
+            <a:off x="6263640" y="1463040"/>
+            <a:ext cx="2377440" cy="3154680"/>
+          </a:xfrm>
+          <a:prstGeom prst="rect">
+            <a:avLst/>
+          </a:prstGeom>
+          <a:solidFill>
+            <a:srgbClr val="E8F9F8"/>
+          </a:solidFill>
+          <a:ln/>
+        </p:spPr>
+      </p:sp>
+      <p:sp>
+        <p:nvSpPr>
+          <p:cNvPr id="7" name="Text 4"/>
+          <p:cNvSpPr txBox="1"/>
+          <p:nvPr/>
+        </p:nvSpPr>
+        <p:spPr>
+          <a:xfrm>
+            <a:off x="6446520" y="1627632"/>
+            <a:ext cx="2011680" cy="228600"/>
+          </a:xfrm>
+          <a:prstGeom prst="rect">
+            <a:avLst/>
+          </a:prstGeom>
+          <a:noFill/>
+          <a:ln/>
+        </p:spPr>
+        <p:txBody>
+          <a:bodyPr wrap="square" lIns="0" tIns="0" rIns="0" bIns="0" rtlCol="0" anchor="ctr"/>
+          <a:lstStyle/>
+          <a:p>
+            <a:pPr indent="0" marL="0">
+              <a:buNone/>
+            </a:pPr>
+            <a:r>
+              <a:rPr lang="en-US" sz="900" b="1" spc="180" kern="0" dirty="0">
+                <a:solidFill>
+                  <a:srgbClr val="005358"/>
+                </a:solidFill>
+              </a:rPr>
+              <a:t>COMMENTARY</a:t>
+            </a:r>
+            <a:endParaRPr lang="en-US" sz="900" dirty="0"/>
+          </a:p>
+        </p:txBody>
+      </p:sp>
+      <p:sp>
+        <p:nvSpPr>
+          <p:cNvPr id="8" name="Text 5"/>
+          <p:cNvSpPr txBox="1"/>
+          <p:nvPr/>
+        </p:nvSpPr>
+        <p:spPr>
+          <a:xfrm>
+            <a:off x="6446520" y="1901952"/>
+            <a:ext cx="2011680" cy="2551176"/>
+          </a:xfrm>
+          <a:prstGeom prst="rect">
+            <a:avLst/>
+          </a:prstGeom>
+          <a:noFill/>
+          <a:ln/>
+        </p:spPr>
+        <p:txBody>
+          <a:bodyPr wrap="square" lIns="0" tIns="0" rIns="0" bIns="0" rtlCol="0" anchor="t">
+            <a:normAutofit/>
+          </a:bodyPr>
+          <a:lstStyle/>
+          <a:p>
+            <a:pPr marL="342900" indent="-342900">
+              <a:lnSpc>
+                <a:spcPts val="1050"/>
+              </a:lnSpc>
+              <a:spcAft>
+                <a:spcPts val="400"/>
+              </a:spcAft>
+              <a:buSzPct val="100000"/>
+              <a:buChar char="•"/>
+            </a:pPr>
+            <a:r>
+              <a:rPr lang="en-US" sz="850" dirty="0">
+                <a:solidFill>
+                  <a:srgbClr val="3A4453"/>
+                </a:solidFill>
+              </a:rPr>
+              <a:t>The same picture grouped the way the P&amp;L is. Production is Events and Video. Consulting is Integration and Consulting.</a:t>
+            </a:r>
+            <a:endParaRPr lang="en-US" sz="850" dirty="0"/>
+          </a:p>
+          <a:p>
+            <a:pPr marL="342900" indent="-342900">
+              <a:lnSpc>
+                <a:spcPts val="1050"/>
+              </a:lnSpc>
+              <a:spcAft>
+                <a:spcPts val="400"/>
+              </a:spcAft>
+              <a:buSzPct val="100000"/>
+              <a:buChar char="•"/>
+            </a:pPr>
+            <a:r>
+              <a:rPr lang="en-US" sz="850" dirty="0">
+                <a:solidFill>
+                  <a:srgbClr val="3A4453"/>
+                </a:solidFill>
+              </a:rPr>
+              <a:t>Production put 265 hours onto jobs and 257 onto work we cannot bill, with 333 hours of leave on top.</a:t>
+            </a:r>
+            <a:endParaRPr lang="en-US" sz="850" dirty="0"/>
+          </a:p>
+          <a:p>
+            <a:pPr marL="342900" indent="-342900">
+              <a:lnSpc>
+                <a:spcPts val="1050"/>
+              </a:lnSpc>
+              <a:spcAft>
+                <a:spcPts val="400"/>
+              </a:spcAft>
+              <a:buSzPct val="100000"/>
+              <a:buChar char="•"/>
+            </a:pPr>
+            <a:r>
+              <a:rPr lang="en-US" sz="850" dirty="0">
+                <a:solidFill>
+                  <a:srgbClr val="3A4453"/>
+                </a:solidFill>
+              </a:rPr>
+              <a:t>Consulting put 40 onto jobs against 84 we cannot bill. Two thirds of its paid hours earn nothing.</a:t>
+            </a:r>
+            <a:endParaRPr lang="en-US" sz="850" dirty="0"/>
+          </a:p>
+          <a:p>
+            <a:pPr marL="342900" indent="-342900">
+              <a:lnSpc>
+                <a:spcPts val="1050"/>
+              </a:lnSpc>
+              <a:spcAft>
+                <a:spcPts val="400"/>
+              </a:spcAft>
+              <a:buSzPct val="100000"/>
+              <a:buChar char="•"/>
+            </a:pPr>
+            <a:r>
+              <a:rPr lang="en-US" sz="850" dirty="0">
+                <a:solidFill>
+                  <a:srgbClr val="3A4453"/>
+                </a:solidFill>
+              </a:rPr>
+              <a:t>Support is the only bar that is almost all dark. That is why it is the only department that makes money.</a:t>
+            </a:r>
+            <a:endParaRPr lang="en-US" sz="850" dirty="0"/>
+          </a:p>
+          <a:p>
+            <a:pPr marL="342900" indent="-342900">
+              <a:lnSpc>
+                <a:spcPts val="1050"/>
+              </a:lnSpc>
+              <a:spcAft>
+                <a:spcPts val="400"/>
+              </a:spcAft>
+              <a:buSzPct val="100000"/>
+              <a:buChar char="•"/>
+            </a:pPr>
+            <a:r>
+              <a:rPr lang="en-US" sz="850" dirty="0">
+                <a:solidFill>
+                  <a:srgbClr val="3A4453"/>
+                </a:solidFill>
+              </a:rPr>
+              <a:t>Each bar is scaled to its own hours. Support works about four times the hours of the other two together.</a:t>
+            </a:r>
+            <a:endParaRPr lang="en-US" sz="850" dirty="0"/>
+          </a:p>
+        </p:txBody>
+      </p:sp>
+      <p:sp>
+        <p:nvSpPr>
+          <p:cNvPr id="25" name="Slide Number Placeholder 0"/>
+          <p:cNvSpPr>
+            <a:spLocks noGrp="1"/>
+          </p:cNvSpPr>
+          <p:nvPr>
+            <p:ph type="sldNum" sz="quarter" idx="4294967295"/>
+          </p:nvPr>
+        </p:nvSpPr>
+        <p:spPr>
+          <a:xfrm>
+            <a:off x="8092440" y="4736592"/>
+            <a:ext cx="548640" cy="228600"/>
+          </a:xfrm>
+          <a:prstGeom prst="rect">
+            <a:avLst/>
+          </a:prstGeom>
+          <a:extLst>
+            <a:ext uri="{C572A759-6A51-4108-AA02-DFA0A04FC94B}">
+              <ma14:wrappingTextBoxFlag xmlns:ma14="http://schemas.microsoft.com/office/mac/drawingml/2011/main" val="0"/>
+            </a:ext>
+          </a:extLst>
+        </p:spPr>
+        <p:txBody>
+          <a:bodyPr/>
+          <a:lstStyle>
+            <a:lvl1pPr>
+              <a:defRPr sz="800">
+                <a:solidFill>
+                  <a:srgbClr val="6B7585"/>
+                </a:solidFill>
+              </a:defRPr>
+            </a:lvl1pPr>
+          </a:lstStyle>
+          <a:p>
+            <a:pPr algn="r"/>
+            <a:fld id="{F7021451-1387-4CA6-816F-3879F97B5CBC}" type="slidenum">
+              <a:rPr b="0" lang="en-US"/>
+              <a:t>29</a:t>
+            </a:fld>
+            <a:endParaRPr lang="en-US"/>
           </a:p>
         </p:txBody>
       </p:sp>
@@ -14075,14 +14345,92 @@
       </p:grpSpPr>
       <p:sp>
         <p:nvSpPr>
-          <p:cNvPr id="2" name="Text 0"/>
-          <p:cNvSpPr txBox="1"/>
-          <p:nvPr/>
-        </p:nvSpPr>
-        <p:spPr>
-          <a:xfrm>
-            <a:off x="502920" y="365760"/>
-            <a:ext cx="6400800" cy="274320"/>
+          <p:cNvPr id="2" name="divider circle"/>
+          <p:cNvSpPr/>
+          <p:nvPr/>
+        </p:nvSpPr>
+        <p:spPr>
+          <a:xfrm>
+            <a:off x="6446520" y="1600200"/>
+            <a:ext cx="2651760" cy="2651760"/>
+          </a:xfrm>
+          <a:prstGeom prst="ellipse">
+            <a:avLst/>
+          </a:prstGeom>
+          <a:solidFill>
+            <a:srgbClr val="6D71FF">
+              <a:alpha val="55000"/>
+            </a:srgbClr>
+          </a:solidFill>
+          <a:ln/>
+        </p:spPr>
+      </p:sp>
+      <p:sp>
+        <p:nvSpPr>
+          <p:cNvPr id="3" name="Shape 1"/>
+          <p:cNvSpPr/>
+          <p:nvPr/>
+        </p:nvSpPr>
+        <p:spPr>
+          <a:xfrm>
+            <a:off x="502920" y="1874520"/>
+            <a:ext cx="868680" cy="868680"/>
+          </a:xfrm>
+          <a:prstGeom prst="rect">
+            <a:avLst/>
+          </a:prstGeom>
+          <a:solidFill>
+            <a:srgbClr val="3FD0C9"/>
+          </a:solidFill>
+          <a:ln/>
+        </p:spPr>
+      </p:sp>
+      <p:sp>
+        <p:nvSpPr>
+          <p:cNvPr id="4" name="Text 2"/>
+          <p:cNvSpPr txBox="1"/>
+          <p:nvPr/>
+        </p:nvSpPr>
+        <p:spPr>
+          <a:xfrm>
+            <a:off x="502920" y="1874520"/>
+            <a:ext cx="868680" cy="868680"/>
+          </a:xfrm>
+          <a:prstGeom prst="rect">
+            <a:avLst/>
+          </a:prstGeom>
+          <a:noFill/>
+          <a:ln/>
+        </p:spPr>
+        <p:txBody>
+          <a:bodyPr wrap="square" lIns="0" tIns="0" rIns="0" bIns="0" rtlCol="0" anchor="ctr"/>
+          <a:lstStyle/>
+          <a:p>
+            <a:pPr algn="ctr" indent="0" marL="0">
+              <a:buNone/>
+            </a:pPr>
+            <a:r>
+              <a:rPr lang="en-US" sz="2600" b="1" dirty="0">
+                <a:solidFill>
+                  <a:srgbClr val="242C39"/>
+                </a:solidFill>
+              </a:rPr>
+              <a:t>05</a:t>
+            </a:r>
+            <a:endParaRPr lang="en-US" sz="2600" dirty="0"/>
+          </a:p>
+        </p:txBody>
+      </p:sp>
+      <p:sp>
+        <p:nvSpPr>
+          <p:cNvPr id="5" name="Text 3"/>
+          <p:cNvSpPr txBox="1"/>
+          <p:nvPr/>
+        </p:nvSpPr>
+        <p:spPr>
+          <a:xfrm>
+            <a:off x="502920" y="411480"/>
+            <a:ext cx="3657600" cy="274320"/>
           </a:xfrm>
           <a:prstGeom prst="rect">
             <a:avLst/>
@@ -14100,10 +14448,10 @@
             <a:r>
               <a:rPr lang="en-US" sz="950" b="1" spc="220" kern="0" dirty="0">
                 <a:solidFill>
-                  <a:srgbClr val="122B82"/>
-                </a:solidFill>
-              </a:rPr>
-              <a:t>BUDGET AND OUTLOOK</a:t>
+                  <a:srgbClr val="3FD0C9"/>
+                </a:solidFill>
+              </a:rPr>
+              <a:t>SECTION</a:t>
             </a:r>
             <a:endParaRPr lang="en-US" sz="950" dirty="0"/>
           </a:p>
@@ -14111,14 +14459,14 @@
       </p:sp>
       <p:sp>
         <p:nvSpPr>
-          <p:cNvPr id="3" name="Text 1"/>
-          <p:cNvSpPr txBox="1"/>
-          <p:nvPr/>
-        </p:nvSpPr>
-        <p:spPr>
-          <a:xfrm>
-            <a:off x="502920" y="640080"/>
-            <a:ext cx="7315200" cy="685800"/>
+          <p:cNvPr id="6" name="Text 4"/>
+          <p:cNvSpPr txBox="1"/>
+          <p:nvPr/>
+        </p:nvSpPr>
+        <p:spPr>
+          <a:xfrm>
+            <a:off x="1600200" y="1874520"/>
+            <a:ext cx="5943600" cy="502920"/>
           </a:xfrm>
           <a:prstGeom prst="rect">
             <a:avLst/>
@@ -14134,304 +14482,50 @@
               <a:buNone/>
             </a:pPr>
             <a:r>
-              <a:rPr lang="en-US" sz="2700" b="1" dirty="0">
-                <a:solidFill>
-                  <a:srgbClr val="242C39"/>
-                </a:solidFill>
-              </a:rPr>
-              <a:t>Revenue by month against budget</a:t>
-            </a:r>
-            <a:endParaRPr lang="en-US" sz="2700" dirty="0"/>
-          </a:p>
-        </p:txBody>
-      </p:sp>
-      <p:pic>
-        <p:nvPicPr>
-          <p:cNvPr id="4" name="snip income_month" descr="/home/user/Claude/deck/snips/income_month.png">    </p:cNvPr>
-          <p:cNvPicPr>
-            <a:picLocks noChangeAspect="1"/>
-          </p:cNvPicPr>
-          <p:nvPr/>
-        </p:nvPicPr>
-        <p:blipFill>
-          <a:blip r:embed="rId1"/>
-          <a:stretch>
-            <a:fillRect/>
-          </a:stretch>
-        </p:blipFill>
-        <p:spPr>
-          <a:xfrm>
-            <a:off x="502920" y="1444752"/>
-            <a:ext cx="5577840" cy="2604071"/>
-          </a:xfrm>
-          <a:prstGeom prst="rect">
-            <a:avLst/>
-          </a:prstGeom>
-        </p:spPr>
-      </p:pic>
-      <p:sp>
-        <p:nvSpPr>
-          <p:cNvPr id="5" name="Text 2"/>
-          <p:cNvSpPr txBox="1"/>
-          <p:nvPr/>
-        </p:nvSpPr>
-        <p:spPr>
-          <a:xfrm>
-            <a:off x="502920" y="4121975"/>
-            <a:ext cx="5577840" cy="237744"/>
-          </a:xfrm>
-          <a:prstGeom prst="rect">
-            <a:avLst/>
-          </a:prstGeom>
-          <a:noFill/>
-          <a:ln/>
-        </p:spPr>
-        <p:txBody>
-          <a:bodyPr wrap="square" lIns="0" tIns="0" rIns="0" bIns="0" rtlCol="0" anchor="t"/>
+              <a:rPr lang="en-US" sz="2800" b="1" dirty="0">
+                <a:solidFill>
+                  <a:srgbClr val="FFFFFF"/>
+                </a:solidFill>
+              </a:rPr>
+              <a:t>Budget and outlook</a:t>
+            </a:r>
+            <a:endParaRPr lang="en-US" sz="2800" dirty="0"/>
+          </a:p>
+        </p:txBody>
+      </p:sp>
+      <p:sp>
+        <p:nvSpPr>
+          <p:cNvPr id="7" name="Text 5"/>
+          <p:cNvSpPr txBox="1"/>
+          <p:nvPr/>
+        </p:nvSpPr>
+        <p:spPr>
+          <a:xfrm>
+            <a:off x="1600200" y="2395728"/>
+            <a:ext cx="5943600" cy="347472"/>
+          </a:xfrm>
+          <a:prstGeom prst="rect">
+            <a:avLst/>
+          </a:prstGeom>
+          <a:noFill/>
+          <a:ln/>
+        </p:spPr>
+        <p:txBody>
+          <a:bodyPr wrap="square" lIns="0" tIns="0" rIns="0" bIns="0" rtlCol="0" anchor="ctr"/>
           <a:lstStyle/>
           <a:p>
             <a:pPr indent="0" marL="0">
               <a:buNone/>
             </a:pPr>
             <a:r>
-              <a:rPr lang="en-US" sz="800" i="1" dirty="0">
-                <a:solidFill>
-                  <a:srgbClr val="6B7585"/>
-                </a:solidFill>
-              </a:rPr>
-              <a:t>Snipped from the Financial Controller Pack, Cost Analysis tab, total income by month, actual to date then budget.</a:t>
-            </a:r>
-            <a:endParaRPr lang="en-US" sz="800" dirty="0"/>
-          </a:p>
-        </p:txBody>
-      </p:sp>
-      <p:sp>
-        <p:nvSpPr>
-          <p:cNvPr id="6" name="commentary panel"/>
-          <p:cNvSpPr/>
-          <p:nvPr/>
-        </p:nvSpPr>
-        <p:spPr>
-          <a:xfrm>
-            <a:off x="6263640" y="1463040"/>
-            <a:ext cx="2377440" cy="3154680"/>
-          </a:xfrm>
-          <a:prstGeom prst="rect">
-            <a:avLst/>
-          </a:prstGeom>
-          <a:solidFill>
-            <a:srgbClr val="E8F9F8"/>
-          </a:solidFill>
-          <a:ln/>
-        </p:spPr>
-      </p:sp>
-      <p:sp>
-        <p:nvSpPr>
-          <p:cNvPr id="7" name="Text 4"/>
-          <p:cNvSpPr txBox="1"/>
-          <p:nvPr/>
-        </p:nvSpPr>
-        <p:spPr>
-          <a:xfrm>
-            <a:off x="6446520" y="1627632"/>
-            <a:ext cx="2011680" cy="228600"/>
-          </a:xfrm>
-          <a:prstGeom prst="rect">
-            <a:avLst/>
-          </a:prstGeom>
-          <a:noFill/>
-          <a:ln/>
-        </p:spPr>
-        <p:txBody>
-          <a:bodyPr wrap="square" lIns="0" tIns="0" rIns="0" bIns="0" rtlCol="0" anchor="ctr"/>
-          <a:lstStyle/>
-          <a:p>
-            <a:pPr indent="0" marL="0">
-              <a:buNone/>
-            </a:pPr>
-            <a:r>
-              <a:rPr lang="en-US" sz="900" b="1" spc="180" kern="0" dirty="0">
-                <a:solidFill>
-                  <a:srgbClr val="005358"/>
-                </a:solidFill>
-              </a:rPr>
-              <a:t>COMMENTARY</a:t>
-            </a:r>
-            <a:endParaRPr lang="en-US" sz="900" dirty="0"/>
-          </a:p>
-        </p:txBody>
-      </p:sp>
-      <p:sp>
-        <p:nvSpPr>
-          <p:cNvPr id="8" name="Text 5"/>
-          <p:cNvSpPr txBox="1"/>
-          <p:nvPr/>
-        </p:nvSpPr>
-        <p:spPr>
-          <a:xfrm>
-            <a:off x="6446520" y="1901952"/>
-            <a:ext cx="2011680" cy="2551176"/>
-          </a:xfrm>
-          <a:prstGeom prst="rect">
-            <a:avLst/>
-          </a:prstGeom>
-          <a:noFill/>
-          <a:ln/>
-        </p:spPr>
-        <p:txBody>
-          <a:bodyPr wrap="square" lIns="0" tIns="0" rIns="0" bIns="0" rtlCol="0" anchor="t">
-            <a:normAutofit/>
-          </a:bodyPr>
-          <a:lstStyle/>
-          <a:p>
-            <a:pPr marL="342900" indent="-342900">
-              <a:lnSpc>
-                <a:spcPts val="1150"/>
-              </a:lnSpc>
-              <a:spcAft>
-                <a:spcPts val="400"/>
-              </a:spcAft>
-              <a:buSzPct val="100000"/>
-              <a:buChar char="•"/>
-            </a:pPr>
-            <a:r>
-              <a:rPr lang="en-US" sz="900" dirty="0">
-                <a:solidFill>
-                  <a:srgbClr val="3A4453"/>
-                </a:solidFill>
-              </a:rPr>
-              <a:t>Q1 came in (372)k behind on revenue, and almost all of it is Consulting and Video.</a:t>
-            </a:r>
-            <a:endParaRPr lang="en-US" sz="900" dirty="0"/>
-          </a:p>
-          <a:p>
-            <a:pPr marL="342900" indent="-342900">
-              <a:lnSpc>
-                <a:spcPts val="1150"/>
-              </a:lnSpc>
-              <a:spcAft>
-                <a:spcPts val="400"/>
-              </a:spcAft>
-              <a:buSzPct val="100000"/>
-              <a:buChar char="•"/>
-            </a:pPr>
-            <a:r>
-              <a:rPr lang="en-US" sz="900" dirty="0">
-                <a:solidFill>
-                  <a:srgbClr val="3A4453"/>
-                </a:solidFill>
-              </a:rPr>
-              <a:t>The remaining nine months are untouched original budget. They are not a forecast.</a:t>
-            </a:r>
-            <a:endParaRPr lang="en-US" sz="900" dirty="0"/>
-          </a:p>
-          <a:p>
-            <a:pPr marL="342900" indent="-342900">
-              <a:lnSpc>
-                <a:spcPts val="1150"/>
-              </a:lnSpc>
-              <a:spcAft>
-                <a:spcPts val="400"/>
-              </a:spcAft>
-              <a:buSzPct val="100000"/>
-              <a:buChar char="•"/>
-            </a:pPr>
-            <a:r>
-              <a:rPr lang="en-US" sz="900" dirty="0">
-                <a:solidFill>
-                  <a:srgbClr val="3A4453"/>
-                </a:solidFill>
-              </a:rPr>
-              <a:t>October alone is budgeted at 950k, nearly double our best month so far.</a:t>
-            </a:r>
-            <a:endParaRPr lang="en-US" sz="900" dirty="0"/>
-          </a:p>
-          <a:p>
-            <a:pPr marL="342900" indent="-342900">
-              <a:lnSpc>
-                <a:spcPts val="1150"/>
-              </a:lnSpc>
-              <a:spcAft>
-                <a:spcPts val="400"/>
-              </a:spcAft>
-              <a:buSzPct val="100000"/>
-              <a:buChar char="•"/>
-            </a:pPr>
-            <a:r>
-              <a:rPr lang="en-US" sz="900" dirty="0">
-                <a:solidFill>
-                  <a:srgbClr val="3A4453"/>
-                </a:solidFill>
-              </a:rPr>
-              <a:t>December carries a planned loss. The business closes for two weeks, so that is correct and should stay.</a:t>
-            </a:r>
-            <a:endParaRPr lang="en-US" sz="900" dirty="0"/>
-          </a:p>
-          <a:p>
-            <a:pPr marL="342900" indent="-342900">
-              <a:lnSpc>
-                <a:spcPts val="1150"/>
-              </a:lnSpc>
-              <a:spcAft>
-                <a:spcPts val="400"/>
-              </a:spcAft>
-              <a:buSzPct val="100000"/>
-              <a:buChar char="•"/>
-            </a:pPr>
-            <a:r>
-              <a:rPr lang="en-US" sz="900" dirty="0">
-                <a:solidFill>
-                  <a:srgbClr val="3A4453"/>
-                </a:solidFill>
-              </a:rPr>
-              <a:t>Recommend a Q1 rolling forecast: rebuild Consulting on real capacity and reset the margin assumptions.</a:t>
-            </a:r>
-            <a:endParaRPr lang="en-US" sz="900" dirty="0"/>
-          </a:p>
-        </p:txBody>
-      </p:sp>
-      <p:sp>
-        <p:nvSpPr>
-          <p:cNvPr id="25" name="Slide Number Placeholder 0"/>
-          <p:cNvSpPr>
-            <a:spLocks noGrp="1"/>
-          </p:cNvSpPr>
-          <p:nvPr>
-            <p:ph type="sldNum" sz="quarter" idx="4294967295"/>
-          </p:nvPr>
-        </p:nvSpPr>
-        <p:spPr>
-          <a:xfrm>
-            <a:off x="8092440" y="4736592"/>
-            <a:ext cx="548640" cy="228600"/>
-          </a:xfrm>
-          <a:prstGeom prst="rect">
-            <a:avLst/>
-          </a:prstGeom>
-          <a:extLst>
-            <a:ext uri="{C572A759-6A51-4108-AA02-DFA0A04FC94B}">
-              <ma14:wrappingTextBoxFlag xmlns:ma14="http://schemas.microsoft.com/office/mac/drawingml/2011/main" val="0"/>
-            </a:ext>
-          </a:extLst>
-        </p:spPr>
-        <p:txBody>
-          <a:bodyPr/>
-          <a:lstStyle>
-            <a:lvl1pPr>
-              <a:defRPr sz="800">
-                <a:solidFill>
-                  <a:srgbClr val="6B7585"/>
-                </a:solidFill>
-              </a:defRPr>
-            </a:lvl1pPr>
-          </a:lstStyle>
-          <a:p>
-            <a:pPr algn="r"/>
-            <a:fld id="{F7021451-1387-4CA6-816F-3879F97B5CBC}" type="slidenum">
-              <a:rPr b="0" lang="en-US"/>
-              <a:t>30</a:t>
-            </a:fld>
-            <a:endParaRPr lang="en-US"/>
+              <a:rPr lang="en-US" sz="1200" dirty="0">
+                <a:solidFill>
+                  <a:srgbClr val="C9CED6"/>
+                </a:solidFill>
+              </a:rPr>
+              <a:t>What the rest of the year looks like and what we change</a:t>
+            </a:r>
+            <a:endParaRPr lang="en-US" sz="1200" dirty="0"/>
           </a:p>
         </p:txBody>
       </p:sp>
@@ -14490,7 +14584,7 @@
                   <a:srgbClr val="122B82"/>
                 </a:solidFill>
               </a:rPr>
-              <a:t>SUMMARY AND ACTIONS</a:t>
+              <a:t>BUDGET AND OUTLOOK</a:t>
             </a:r>
             <a:endParaRPr lang="en-US" sz="950" dirty="0"/>
           </a:p>
@@ -14526,6 +14620,393 @@
                   <a:srgbClr val="242C39"/>
                 </a:solidFill>
               </a:rPr>
+              <a:t>Revenue by month against budget</a:t>
+            </a:r>
+            <a:endParaRPr lang="en-US" sz="2700" dirty="0"/>
+          </a:p>
+        </p:txBody>
+      </p:sp>
+      <p:pic>
+        <p:nvPicPr>
+          <p:cNvPr id="4" name="snip income_month" descr="/home/user/Claude/deck/snips/income_month.png">    </p:cNvPr>
+          <p:cNvPicPr>
+            <a:picLocks noChangeAspect="1"/>
+          </p:cNvPicPr>
+          <p:nvPr/>
+        </p:nvPicPr>
+        <p:blipFill>
+          <a:blip r:embed="rId1"/>
+          <a:stretch>
+            <a:fillRect/>
+          </a:stretch>
+        </p:blipFill>
+        <p:spPr>
+          <a:xfrm>
+            <a:off x="502920" y="1444752"/>
+            <a:ext cx="5577840" cy="2604071"/>
+          </a:xfrm>
+          <a:prstGeom prst="rect">
+            <a:avLst/>
+          </a:prstGeom>
+        </p:spPr>
+      </p:pic>
+      <p:sp>
+        <p:nvSpPr>
+          <p:cNvPr id="5" name="Text 2"/>
+          <p:cNvSpPr txBox="1"/>
+          <p:nvPr/>
+        </p:nvSpPr>
+        <p:spPr>
+          <a:xfrm>
+            <a:off x="502920" y="4121975"/>
+            <a:ext cx="5577840" cy="237744"/>
+          </a:xfrm>
+          <a:prstGeom prst="rect">
+            <a:avLst/>
+          </a:prstGeom>
+          <a:noFill/>
+          <a:ln/>
+        </p:spPr>
+        <p:txBody>
+          <a:bodyPr wrap="square" lIns="0" tIns="0" rIns="0" bIns="0" rtlCol="0" anchor="t"/>
+          <a:lstStyle/>
+          <a:p>
+            <a:pPr indent="0" marL="0">
+              <a:buNone/>
+            </a:pPr>
+            <a:r>
+              <a:rPr lang="en-US" sz="800" i="1" dirty="0">
+                <a:solidFill>
+                  <a:srgbClr val="6B7585"/>
+                </a:solidFill>
+              </a:rPr>
+              <a:t>Snipped from the Financial Controller Pack, Cost Analysis tab, total income by month, actual to date then budget.</a:t>
+            </a:r>
+            <a:endParaRPr lang="en-US" sz="800" dirty="0"/>
+          </a:p>
+        </p:txBody>
+      </p:sp>
+      <p:sp>
+        <p:nvSpPr>
+          <p:cNvPr id="6" name="commentary panel"/>
+          <p:cNvSpPr/>
+          <p:nvPr/>
+        </p:nvSpPr>
+        <p:spPr>
+          <a:xfrm>
+            <a:off x="6263640" y="1463040"/>
+            <a:ext cx="2377440" cy="3154680"/>
+          </a:xfrm>
+          <a:prstGeom prst="rect">
+            <a:avLst/>
+          </a:prstGeom>
+          <a:solidFill>
+            <a:srgbClr val="E8F9F8"/>
+          </a:solidFill>
+          <a:ln/>
+        </p:spPr>
+      </p:sp>
+      <p:sp>
+        <p:nvSpPr>
+          <p:cNvPr id="7" name="Text 4"/>
+          <p:cNvSpPr txBox="1"/>
+          <p:nvPr/>
+        </p:nvSpPr>
+        <p:spPr>
+          <a:xfrm>
+            <a:off x="6446520" y="1627632"/>
+            <a:ext cx="2011680" cy="228600"/>
+          </a:xfrm>
+          <a:prstGeom prst="rect">
+            <a:avLst/>
+          </a:prstGeom>
+          <a:noFill/>
+          <a:ln/>
+        </p:spPr>
+        <p:txBody>
+          <a:bodyPr wrap="square" lIns="0" tIns="0" rIns="0" bIns="0" rtlCol="0" anchor="ctr"/>
+          <a:lstStyle/>
+          <a:p>
+            <a:pPr indent="0" marL="0">
+              <a:buNone/>
+            </a:pPr>
+            <a:r>
+              <a:rPr lang="en-US" sz="900" b="1" spc="180" kern="0" dirty="0">
+                <a:solidFill>
+                  <a:srgbClr val="005358"/>
+                </a:solidFill>
+              </a:rPr>
+              <a:t>COMMENTARY</a:t>
+            </a:r>
+            <a:endParaRPr lang="en-US" sz="900" dirty="0"/>
+          </a:p>
+        </p:txBody>
+      </p:sp>
+      <p:sp>
+        <p:nvSpPr>
+          <p:cNvPr id="8" name="Text 5"/>
+          <p:cNvSpPr txBox="1"/>
+          <p:nvPr/>
+        </p:nvSpPr>
+        <p:spPr>
+          <a:xfrm>
+            <a:off x="6446520" y="1901952"/>
+            <a:ext cx="2011680" cy="2551176"/>
+          </a:xfrm>
+          <a:prstGeom prst="rect">
+            <a:avLst/>
+          </a:prstGeom>
+          <a:noFill/>
+          <a:ln/>
+        </p:spPr>
+        <p:txBody>
+          <a:bodyPr wrap="square" lIns="0" tIns="0" rIns="0" bIns="0" rtlCol="0" anchor="t">
+            <a:normAutofit/>
+          </a:bodyPr>
+          <a:lstStyle/>
+          <a:p>
+            <a:pPr marL="342900" indent="-342900">
+              <a:lnSpc>
+                <a:spcPts val="1150"/>
+              </a:lnSpc>
+              <a:spcAft>
+                <a:spcPts val="400"/>
+              </a:spcAft>
+              <a:buSzPct val="100000"/>
+              <a:buChar char="•"/>
+            </a:pPr>
+            <a:r>
+              <a:rPr lang="en-US" sz="900" dirty="0">
+                <a:solidFill>
+                  <a:srgbClr val="3A4453"/>
+                </a:solidFill>
+              </a:rPr>
+              <a:t>Q1 came in (372)k behind on revenue, and almost all of it is Consulting and Video.</a:t>
+            </a:r>
+            <a:endParaRPr lang="en-US" sz="900" dirty="0"/>
+          </a:p>
+          <a:p>
+            <a:pPr marL="342900" indent="-342900">
+              <a:lnSpc>
+                <a:spcPts val="1150"/>
+              </a:lnSpc>
+              <a:spcAft>
+                <a:spcPts val="400"/>
+              </a:spcAft>
+              <a:buSzPct val="100000"/>
+              <a:buChar char="•"/>
+            </a:pPr>
+            <a:r>
+              <a:rPr lang="en-US" sz="900" dirty="0">
+                <a:solidFill>
+                  <a:srgbClr val="3A4453"/>
+                </a:solidFill>
+              </a:rPr>
+              <a:t>The remaining nine months are untouched original budget. They are not a forecast.</a:t>
+            </a:r>
+            <a:endParaRPr lang="en-US" sz="900" dirty="0"/>
+          </a:p>
+          <a:p>
+            <a:pPr marL="342900" indent="-342900">
+              <a:lnSpc>
+                <a:spcPts val="1150"/>
+              </a:lnSpc>
+              <a:spcAft>
+                <a:spcPts val="400"/>
+              </a:spcAft>
+              <a:buSzPct val="100000"/>
+              <a:buChar char="•"/>
+            </a:pPr>
+            <a:r>
+              <a:rPr lang="en-US" sz="900" dirty="0">
+                <a:solidFill>
+                  <a:srgbClr val="3A4453"/>
+                </a:solidFill>
+              </a:rPr>
+              <a:t>October alone is budgeted at 950k, nearly double our best month so far.</a:t>
+            </a:r>
+            <a:endParaRPr lang="en-US" sz="900" dirty="0"/>
+          </a:p>
+          <a:p>
+            <a:pPr marL="342900" indent="-342900">
+              <a:lnSpc>
+                <a:spcPts val="1150"/>
+              </a:lnSpc>
+              <a:spcAft>
+                <a:spcPts val="400"/>
+              </a:spcAft>
+              <a:buSzPct val="100000"/>
+              <a:buChar char="•"/>
+            </a:pPr>
+            <a:r>
+              <a:rPr lang="en-US" sz="900" dirty="0">
+                <a:solidFill>
+                  <a:srgbClr val="3A4453"/>
+                </a:solidFill>
+              </a:rPr>
+              <a:t>December carries a planned loss. The business closes for two weeks, so that is correct and should stay.</a:t>
+            </a:r>
+            <a:endParaRPr lang="en-US" sz="900" dirty="0"/>
+          </a:p>
+          <a:p>
+            <a:pPr marL="342900" indent="-342900">
+              <a:lnSpc>
+                <a:spcPts val="1150"/>
+              </a:lnSpc>
+              <a:spcAft>
+                <a:spcPts val="400"/>
+              </a:spcAft>
+              <a:buSzPct val="100000"/>
+              <a:buChar char="•"/>
+            </a:pPr>
+            <a:r>
+              <a:rPr lang="en-US" sz="900" dirty="0">
+                <a:solidFill>
+                  <a:srgbClr val="3A4453"/>
+                </a:solidFill>
+              </a:rPr>
+              <a:t>Recommend a Q1 rolling forecast: rebuild Consulting on real capacity and reset the margin assumptions.</a:t>
+            </a:r>
+            <a:endParaRPr lang="en-US" sz="900" dirty="0"/>
+          </a:p>
+        </p:txBody>
+      </p:sp>
+      <p:sp>
+        <p:nvSpPr>
+          <p:cNvPr id="25" name="Slide Number Placeholder 0"/>
+          <p:cNvSpPr>
+            <a:spLocks noGrp="1"/>
+          </p:cNvSpPr>
+          <p:nvPr>
+            <p:ph type="sldNum" sz="quarter" idx="4294967295"/>
+          </p:nvPr>
+        </p:nvSpPr>
+        <p:spPr>
+          <a:xfrm>
+            <a:off x="8092440" y="4736592"/>
+            <a:ext cx="548640" cy="228600"/>
+          </a:xfrm>
+          <a:prstGeom prst="rect">
+            <a:avLst/>
+          </a:prstGeom>
+          <a:extLst>
+            <a:ext uri="{C572A759-6A51-4108-AA02-DFA0A04FC94B}">
+              <ma14:wrappingTextBoxFlag xmlns:ma14="http://schemas.microsoft.com/office/mac/drawingml/2011/main" val="0"/>
+            </a:ext>
+          </a:extLst>
+        </p:spPr>
+        <p:txBody>
+          <a:bodyPr/>
+          <a:lstStyle>
+            <a:lvl1pPr>
+              <a:defRPr sz="800">
+                <a:solidFill>
+                  <a:srgbClr val="6B7585"/>
+                </a:solidFill>
+              </a:defRPr>
+            </a:lvl1pPr>
+          </a:lstStyle>
+          <a:p>
+            <a:pPr algn="r"/>
+            <a:fld id="{F7021451-1387-4CA6-816F-3879F97B5CBC}" type="slidenum">
+              <a:rPr b="0" lang="en-US"/>
+              <a:t>31</a:t>
+            </a:fld>
+            <a:endParaRPr lang="en-US"/>
+          </a:p>
+        </p:txBody>
+      </p:sp>
+    </p:spTree>
+  </p:cSld>
+  <p:clrMapOvr>
+    <a:masterClrMapping/>
+  </p:clrMapOvr>
+</p:sld>
+</file>
+
+<file path=ppt/slides/slide32.xml><?xml version="1.0" encoding="utf-8"?>
+<p:sld xmlns:a="http://schemas.openxmlformats.org/drawingml/2006/main" xmlns:r="http://schemas.openxmlformats.org/officeDocument/2006/relationships" xmlns:p="http://schemas.openxmlformats.org/presentationml/2006/main">
+  <p:cSld name="Slide 32">
+    <p:spTree>
+      <p:nvGrpSpPr>
+        <p:cNvPr id="1" name=""/>
+        <p:cNvGrpSpPr/>
+        <p:nvPr/>
+      </p:nvGrpSpPr>
+      <p:grpSpPr>
+        <a:xfrm>
+          <a:off x="0" y="0"/>
+          <a:ext cx="0" cy="0"/>
+          <a:chOff x="0" y="0"/>
+          <a:chExt cx="0" cy="0"/>
+        </a:xfrm>
+      </p:grpSpPr>
+      <p:sp>
+        <p:nvSpPr>
+          <p:cNvPr id="2" name="Text 0"/>
+          <p:cNvSpPr txBox="1"/>
+          <p:nvPr/>
+        </p:nvSpPr>
+        <p:spPr>
+          <a:xfrm>
+            <a:off x="502920" y="365760"/>
+            <a:ext cx="6400800" cy="274320"/>
+          </a:xfrm>
+          <a:prstGeom prst="rect">
+            <a:avLst/>
+          </a:prstGeom>
+          <a:noFill/>
+          <a:ln/>
+        </p:spPr>
+        <p:txBody>
+          <a:bodyPr wrap="square" lIns="0" tIns="0" rIns="0" bIns="0" rtlCol="0" anchor="ctr"/>
+          <a:lstStyle/>
+          <a:p>
+            <a:pPr indent="0" marL="0">
+              <a:buNone/>
+            </a:pPr>
+            <a:r>
+              <a:rPr lang="en-US" sz="950" b="1" spc="220" kern="0" dirty="0">
+                <a:solidFill>
+                  <a:srgbClr val="122B82"/>
+                </a:solidFill>
+              </a:rPr>
+              <a:t>SUMMARY AND ACTIONS</a:t>
+            </a:r>
+            <a:endParaRPr lang="en-US" sz="950" dirty="0"/>
+          </a:p>
+        </p:txBody>
+      </p:sp>
+      <p:sp>
+        <p:nvSpPr>
+          <p:cNvPr id="3" name="Text 1"/>
+          <p:cNvSpPr txBox="1"/>
+          <p:nvPr/>
+        </p:nvSpPr>
+        <p:spPr>
+          <a:xfrm>
+            <a:off x="502920" y="640080"/>
+            <a:ext cx="7315200" cy="685800"/>
+          </a:xfrm>
+          <a:prstGeom prst="rect">
+            <a:avLst/>
+          </a:prstGeom>
+          <a:noFill/>
+          <a:ln/>
+        </p:spPr>
+        <p:txBody>
+          <a:bodyPr wrap="square" lIns="0" tIns="0" rIns="0" bIns="0" rtlCol="0" anchor="ctr"/>
+          <a:lstStyle/>
+          <a:p>
+            <a:pPr indent="0" marL="0">
+              <a:buNone/>
+            </a:pPr>
+            <a:r>
+              <a:rPr lang="en-US" sz="2700" b="1" dirty="0">
+                <a:solidFill>
+                  <a:srgbClr val="242C39"/>
+                </a:solidFill>
+              </a:rPr>
               <a:t>What we agreed</a:t>
             </a:r>
             <a:endParaRPr lang="en-US" sz="2700" dirty="0"/>
@@ -14534,7 +15015,7 @@
       </p:sp>
       <p:graphicFrame>
         <p:nvGraphicFramePr>
-          <p:cNvPr id="32" name="Table 0"/>
+          <p:cNvPr id="33" name="Table 0"/>
           <p:cNvGraphicFramePr>
             <a:graphicFrameLocks noGrp="1"/>
           </p:cNvGraphicFramePr>
@@ -16049,7 +16530,7 @@
                             <a:srgbClr val="3A4453"/>
                           </a:solidFill>
                         </a:rPr>
-                        <a:t>Five more points on Support and Events is worth about 16k a month at no extra cost. Set it as a target once timesheet coding is fixed.</a:t>
+                        <a:t>Chargeable per cent is 72% against a 81% target. Five more points on Support and Production is worth about 16k a month at no extra cost.</a:t>
                       </a:r>
                       <a:endParaRPr lang="en-US" sz="800" dirty="0"/>
                     </a:p>
@@ -16225,7 +16706,7 @@
                             <a:srgbClr val="242C39"/>
                           </a:solidFill>
                         </a:rPr>
-                        <a:t>Timesheets</a:t>
+                        <a:t>Leave</a:t>
                       </a:r>
                       <a:endParaRPr lang="en-US" sz="800" dirty="0"/>
                     </a:p>
@@ -16283,7 +16764,7 @@
                             <a:srgbClr val="3A4453"/>
                           </a:solidFill>
                         </a:rPr>
-                        <a:t>Support shows 11 non-chargeable hours in a month. Correct the coding before utilisation is used to manage anyone.</a:t>
+                        <a:t>Production lost 333 hours to leave on 882 available. Plan leave against the booking calendar, not around it.</a:t>
                       </a:r>
                       <a:endParaRPr lang="en-US" sz="800" dirty="0"/>
                     </a:p>
@@ -16341,7 +16822,7 @@
                             <a:srgbClr val="3A4453"/>
                           </a:solidFill>
                         </a:rPr>
-                        <a:t>Ops and FC</a:t>
+                        <a:t>Ops</a:t>
                       </a:r>
                       <a:endParaRPr lang="en-US" sz="800" dirty="0"/>
                     </a:p>
@@ -16399,7 +16880,7 @@
                             <a:srgbClr val="3A4453"/>
                           </a:solidFill>
                         </a:rPr>
-                        <a:t>31 Oct 26</a:t>
+                        <a:t>30 Nov 26</a:t>
                       </a:r>
                       <a:endParaRPr lang="en-US" sz="800" dirty="0"/>
                     </a:p>
@@ -16487,7 +16968,7 @@
             <a:pPr algn="r"/>
             <a:fld id="{F7021451-1387-4CA6-816F-3879F97B5CBC}" type="slidenum">
               <a:rPr b="0" lang="en-US"/>
-              <a:t>31</a:t>
+              <a:t>32</a:t>
             </a:fld>
             <a:endParaRPr lang="en-US"/>
           </a:p>
@@ -16501,9 +16982,9 @@
 </p:sld>
 </file>
 
-<file path=ppt/slides/slide32.xml><?xml version="1.0" encoding="utf-8"?>
+<file path=ppt/slides/slide33.xml><?xml version="1.0" encoding="utf-8"?>
 <p:sld xmlns:a="http://schemas.openxmlformats.org/drawingml/2006/main" xmlns:r="http://schemas.openxmlformats.org/officeDocument/2006/relationships" xmlns:p="http://schemas.openxmlformats.org/presentationml/2006/main">
-  <p:cSld name="Slide 32">
+  <p:cSld name="Slide 33">
     <p:spTree>
       <p:nvGrpSpPr>
         <p:cNvPr id="1" name=""/>
@@ -18731,7 +19212,7 @@
           <a:p>
             <a:pPr marL="342900" indent="-342900">
               <a:lnSpc>
-                <a:spcPts val="1150"/>
+                <a:spcPts val="1050"/>
               </a:lnSpc>
               <a:spcAft>
                 <a:spcPts val="400"/>
@@ -18740,19 +19221,19 @@
               <a:buChar char="•"/>
             </a:pPr>
             <a:r>
-              <a:rPr lang="en-US" sz="900" dirty="0">
+              <a:rPr lang="en-US" sz="850" dirty="0">
                 <a:solidFill>
                   <a:srgbClr val="3A4453"/>
                 </a:solidFill>
               </a:rPr>
               <a:t>Billed 243k against 248k. Within 5k of plan, which is what fixed monthly contracts should do.</a:t>
             </a:r>
-            <a:endParaRPr lang="en-US" sz="900" dirty="0"/>
+            <a:endParaRPr lang="en-US" sz="850" dirty="0"/>
           </a:p>
           <a:p>
             <a:pPr marL="342900" indent="-342900">
               <a:lnSpc>
-                <a:spcPts val="1150"/>
+                <a:spcPts val="1050"/>
               </a:lnSpc>
               <a:spcAft>
                 <a:spcPts val="400"/>
@@ -18761,19 +19242,19 @@
               <a:buChar char="•"/>
             </a:pPr>
             <a:r>
-              <a:rPr lang="en-US" sz="900" dirty="0">
+              <a:rPr lang="en-US" sz="850" dirty="0">
                 <a:solidFill>
                   <a:srgbClr val="3A4453"/>
                 </a:solidFill>
               </a:rPr>
               <a:t>Keeps 42% of what it sells, the same as last September. Steady and predictable.</a:t>
             </a:r>
-            <a:endParaRPr lang="en-US" sz="900" dirty="0"/>
+            <a:endParaRPr lang="en-US" sz="850" dirty="0"/>
           </a:p>
           <a:p>
             <a:pPr marL="342900" indent="-342900">
               <a:lnSpc>
-                <a:spcPts val="1150"/>
+                <a:spcPts val="1050"/>
               </a:lnSpc>
               <a:spcAft>
                 <a:spcPts val="400"/>
@@ -18782,19 +19263,19 @@
               <a:buChar char="•"/>
             </a:pPr>
             <a:r>
-              <a:rPr lang="en-US" sz="900" dirty="0">
+              <a:rPr lang="en-US" sz="850" dirty="0">
                 <a:solidFill>
                   <a:srgbClr val="3A4453"/>
                 </a:solidFill>
               </a:rPr>
               <a:t>After its 72k share of running costs it still made 29k. The only department that does.</a:t>
             </a:r>
-            <a:endParaRPr lang="en-US" sz="900" dirty="0"/>
+            <a:endParaRPr lang="en-US" sz="850" dirty="0"/>
           </a:p>
           <a:p>
             <a:pPr marL="342900" indent="-342900">
               <a:lnSpc>
-                <a:spcPts val="1150"/>
+                <a:spcPts val="1050"/>
               </a:lnSpc>
               <a:spcAft>
                 <a:spcPts val="400"/>
@@ -18803,19 +19284,19 @@
               <a:buChar char="•"/>
             </a:pPr>
             <a:r>
-              <a:rPr lang="en-US" sz="900" dirty="0">
+              <a:rPr lang="en-US" sz="850" dirty="0">
                 <a:solidFill>
                   <a:srgbClr val="3A4453"/>
                 </a:solidFill>
               </a:rPr>
               <a:t>Of that share, 42,262 is office wages. Support picks up the most because it works the most hours.</a:t>
             </a:r>
-            <a:endParaRPr lang="en-US" sz="900" dirty="0"/>
+            <a:endParaRPr lang="en-US" sz="850" dirty="0"/>
           </a:p>
           <a:p>
             <a:pPr marL="342900" indent="-342900">
               <a:lnSpc>
-                <a:spcPts val="1150"/>
+                <a:spcPts val="1050"/>
               </a:lnSpc>
               <a:spcAft>
                 <a:spcPts val="400"/>
@@ -18824,14 +19305,14 @@
               <a:buChar char="•"/>
             </a:pPr>
             <a:r>
-              <a:rPr lang="en-US" sz="900" dirty="0">
+              <a:rPr lang="en-US" sz="850" dirty="0">
                 <a:solidFill>
                   <a:srgbClr val="3A4453"/>
                 </a:solidFill>
               </a:rPr>
-              <a:t>The one thing not to trust here is the 99% billable figure. Non-billable time is being booked to jobs.</a:t>
-            </a:r>
-            <a:endParaRPr lang="en-US" sz="900" dirty="0"/>
+              <a:t>On the monthly report's basis Support bills 91% of the hours it is available for. The best in the business.</a:t>
+            </a:r>
+            <a:endParaRPr lang="en-US" sz="850" dirty="0"/>
           </a:p>
         </p:txBody>
       </p:sp>

--- a/deck/CTS Monthly Business Review - September 2026.pptx
+++ b/deck/CTS Monthly Business Review - September 2026.pptx
@@ -38,9 +38,10 @@
     <p:sldId id="286" r:id="rId32"/>
     <p:sldId id="287" r:id="rId33"/>
     <p:sldId id="288" r:id="rId34"/>
+    <p:sldId id="289" r:id="rId35"/>
   </p:sldIdLst>
   <p:notesMasterIdLst>
-    <p:notesMasterId r:id="rId35"/>
+    <p:notesMasterId r:id="rId36"/>
   </p:notesMasterIdLst>
   <p:sldSz cx="9144000" cy="5143500"/>
   <p:notesSz cx="5143500" cy="9144000"/>
@@ -2102,11 +2103,11 @@
             <a:r>
               <a:rPr lang="en-US" dirty="0"/>
               <a:t>Chargeable per cent for September 2026, calculated exactly as the monthly Utilisation Report calculates it.
-The formula is billable hours divided by Workable Business Hours, which is the hours each person was available for in the month. Leave and public holidays stay in the bottom of the fraction, so a team that takes its leave shows a lower percentage. That is the business's own definition and this pack now uses it.
-Support 91.2% on 2,338 available hours. Production 30.2% on 882. Consulting 23.0% on 175. The company 71.8%.
-There are three person groups because the report groups by the department a person belongs to, and nobody is assigned to Video or Integration. Their work is carried out by Production and Consulting people and appears under those groups.
-Workable Business Hours is a paste, like the hours themselves. It cannot be calculated inside the pack, because it needs the headcount of each group and who is part time, and neither of those is in here.
-What this replaces. An earlier version of this pack divided billable hours by hours actually worked, leaving leave out of the sum. That put Support at 99.5 per cent and made it look like a coding error. It was not. On this basis Support is 91.2% and the figure is sound.</a:t>
+The formula is billable hours divided by Workable Business Hours, the hours each person was available for in the month. Leave and public holidays stay in the bottom of the fraction, so a team that takes its leave shows a lower percentage. That is the business's own definition and this pack now uses it.
+Production 30.2% against a 67.0% target, 36.8% under. Consulting 23.0% against 50.0%, 27.0% under.
+Leave is the story on Production: 333 hours out of 882 available, which is 37.7% of the month. The people were paid for and the work was not there.
+There are three person groups because the report groups by the department a person belongs to, and nobody is assigned to Video or Integration.
+Workable Business Hours and the target are pastes. Neither can be calculated in the pack: the first needs each group's headcount and who is part time, the second is set per person and averaged up. The over or under reading and the leave share are calculated off them and reproduce the report's own columns exactly.</a:t>
             </a:r>
             <a:endParaRPr lang="en-US" dirty="0"/>
           </a:p>
@@ -2194,12 +2195,12 @@
           <a:p>
             <a:r>
               <a:rPr lang="en-US" dirty="0"/>
-              <a:t>The utilisation working for the two big cost centres, straight off the pack.
-The top three rows set the month: working days, and working hours at eight hours a day. Every FTE figure divides into that.
-For each cost centre the sheet holds billable hours, non-billable hours and leave, then two calculated lines. The percentage here is the billable share of the hours actually worked, which is not the same as the Chargeable per cent on the slide before: this one leaves leave out of the sum, your report keeps it in. Both are on the tab and each is labelled for what it is. FTE is billable plus non-billable divided by the month's working hours.
-Support: 2,132 billable hours on 12.2 FTE. The 11 of non-billable time shown here is an artefact of the grouping, not a coding error. The monthly report shows Support with no non-billable hours at all in September 2026; this tab regroups by the job the work was for, which moves a small amount of other people's non-billable time into Support.
-Events: 49.1% utilisation on 2.8 FTE, with 333 hours of leave. That is the genuine operational issue on this page. The people were paid for, the work was not there.
-Three months sit side by side so the board reads a trend, not one month in isolation.</a:t>
+              <a:t>Support and the company, same basis.
+Support 91.2% against an 88.0% target, 3.2% over, on 2,338 available hours. It has cleared its target in all three closed months.
+The company 71.8% against 80.9%, 9.0% under. The company target moves a little month to month because it is an average over whoever was in the report that month, not a fixed number.
+Leave took 17.8% of available hours this month against 7.5% in August. September is a heavy leave month and that is most of the movement in the company figure.
+A correction to earlier versions of this pack. It divided billable hours by hours actually worked, leaving leave out of the sum, which put Support at 99.5 per cent and made it look like a coding error. It was not. On the report's own basis Support is 91.2% and the figure is sound.
+OT and TIL is on the report but is not in the pack. Its August figure for Support reads 365.62, which cannot be hours in a month, so that column needs checking on the source sheet before anybody quotes it.</a:t>
             </a:r>
             <a:endParaRPr lang="en-US" dirty="0"/>
           </a:p>
@@ -2287,11 +2288,12 @@
           <a:p>
             <a:r>
               <a:rPr lang="en-US" dirty="0"/>
-              <a:t>The three small cost centres.
-Video: 76.0% utilisation on 0.18 FTE. 24.5 billable hours in the month.
-Integration: 100.0% on 0.05 FTE. The hundred per cent is arithmetic, not performance. 9.5 billable hours and no non-billable time booked at all. Integration's revenue this month came from resold equipment, not from our hours, which is why the money and the hours do not match.
-Consulting: 26.8% on 0.65 FTE. 84 hours into work we cannot bill against 31 we can, plus 53 hours of leave. Three months of that pattern, against running costs that have not moved, is the clearest case in the pack for a decision.
-A percentage on nine or twenty four hours is not a management number. Read the hours column.</a:t>
+              <a:t>The utilisation working for the two big cost centres, straight off the pack.
+The top three rows set the month: working days, and working hours at eight hours a day. Every FTE figure divides into that.
+For each cost centre the sheet holds billable hours, non-billable hours and leave, then two calculated lines. The percentage here is the billable share of the hours actually worked, which is not the same as the Chargeable per cent on the slide before: this one leaves leave out of the sum, your report keeps it in. Both are on the tab and each is labelled for what it is. FTE is billable plus non-billable divided by the month's working hours.
+Support: 2,132 billable hours on 12.2 FTE. The 11 of non-billable time shown here is an artefact of the grouping, not a coding error. The monthly report shows Support with no non-billable hours at all in September 2026; this tab regroups by the job the work was for, which moves a small amount of other people's non-billable time into Support.
+Events: 49.1% utilisation on 2.8 FTE, with 333 hours of leave. That is the genuine operational issue on this page. The people were paid for, the work was not there.
+Three months sit side by side so the board reads a trend, not one month in isolation.</a:t>
             </a:r>
             <a:endParaRPr lang="en-US" dirty="0"/>
           </a:p>
@@ -2379,17 +2381,11 @@
           <a:p>
             <a:r>
               <a:rPr lang="en-US" dirty="0"/>
-              <a:t>How each department spent its hours in September 2026.
-Read the bars as a mix, not as a size. Each one is scaled to that department's own total, because Support works around a hundred times the hours Integration does and on a straight scale four of the five departments disappear. The number on each segment is the real hours.
-Support: 2,132 hours on jobs, 11 not on jobs, 218 leave. 99.5% of worked hours were billable.
-Events: 241 hours on jobs, 249 not on jobs, 333 leave. 49.1% of worked hours were billable.
-Video: 25 hours on jobs, 8 not on jobs, 0 leave. 76.0% of worked hours were billable.
-Integration: 10 hours on jobs, 0 not on jobs, 0 leave. 100.0% of worked hours were billable.
-Consulting: 31 hours on jobs, 84 not on jobs, 53 leave. 26.8% of worked hours were billable.
-Across the five departments, 2,437 hours on jobs out of 2,789 worked.
-On the Support bar: the small slice of non-billable time comes from the regrouping, not from bad coding. The monthly report shows Support with no non-billable hours in September 2026. This view regroups by the job the work was for, so a little of other people's non-billable time lands here.
-Events is the real operational issue: 333 hours of leave on a small team takes out most of the month's capacity.
-And the prize. Support earns about 48 of margin on every hour it bills. Five more points of billable time across Support and Events, at the rate each already earns, is worth roughly 15,813 a month and costs nothing extra. It is the largest controllable item in this pack.</a:t>
+              <a:t>The three small cost centres.
+Video: 76.0% utilisation on 0.18 FTE. 24.5 billable hours in the month.
+Integration: 100.0% on 0.05 FTE. The hundred per cent is arithmetic, not performance. 9.5 billable hours and no non-billable time booked at all. Integration's revenue this month came from resold equipment, not from our hours, which is why the money and the hours do not match.
+Consulting: 26.8% on 0.65 FTE. 84 hours into work we cannot bill against 31 we can, plus 53 hours of leave. Three months of that pattern, against running costs that have not moved, is the clearest case in the pack for a decision.
+A percentage on nine or twenty four hours is not a management number. Read the hours column.</a:t>
             </a:r>
             <a:endParaRPr lang="en-US" dirty="0"/>
           </a:p>
@@ -2477,11 +2473,17 @@
           <a:p>
             <a:r>
               <a:rPr lang="en-US" dirty="0"/>
-              <a:t>The hours mix for September 2026, rolled up to the three departments the P&amp;L is built on.
-Production is Events and Video together. Consulting is Integration and Consulting together. Support stands alone.
-Read each bar as a mix, not a size. Each is scaled to its own total, because Support works far more hours than the other two combined.
-The pattern is the whole argument of this pack. Support is almost entirely billable and it is the only department that covers its costs. Production and Consulting both spend roughly half their paid hours, or more, on work no customer pays for, and both lose money.
-Support reads 91.2% on the monthly report's own basis, which counts leave against it. That is the figure to quote in the room.</a:t>
+              <a:t>How each department spent its hours in September 2026.
+Read the bars as a mix, not as a size. Each one is scaled to that department's own total, because Support works around a hundred times the hours Integration does and on a straight scale four of the five departments disappear. The number on each segment is the real hours.
+Support: 2,132 hours on jobs, 11 not on jobs, 218 leave. 99.5% of worked hours were billable.
+Events: 241 hours on jobs, 249 not on jobs, 333 leave. 49.1% of worked hours were billable.
+Video: 25 hours on jobs, 8 not on jobs, 0 leave. 76.0% of worked hours were billable.
+Integration: 10 hours on jobs, 0 not on jobs, 0 leave. 100.0% of worked hours were billable.
+Consulting: 31 hours on jobs, 84 not on jobs, 53 leave. 26.8% of worked hours were billable.
+Across the five departments, 2,437 hours on jobs out of 2,789 worked.
+On the Support bar: the small slice of non-billable time comes from the regrouping, not from bad coding. The monthly report shows Support with no non-billable hours in September 2026. This view regroups by the job the work was for, so a little of other people's non-billable time lands here.
+Events is the real operational issue: 333 hours of leave on a small team takes out most of the month's capacity.
+And the prize. Support earns about 48 of margin on every hour it bills. Five more points of billable time across Support and Events, at the rate each already earns, is worth roughly 15,813 a month and costs nothing extra. It is the largest controllable item in this pack.</a:t>
             </a:r>
             <a:endParaRPr lang="en-US" dirty="0"/>
           </a:p>
@@ -2664,7 +2666,11 @@
           <a:p>
             <a:r>
               <a:rPr lang="en-US" dirty="0"/>
-              <a:t>Three months are closed and the remaining nine are still at original budget. That is the decision in front of the board.</a:t>
+              <a:t>The hours mix for September 2026, rolled up to the three departments the P&amp;L is built on.
+Production is Events and Video together. Consulting is Integration and Consulting together. Support stands alone.
+Read each bar as a mix, not a size. Each is scaled to its own total, because Support works far more hours than the other two combined.
+The pattern is the whole argument of this pack. Support is almost entirely billable and it is the only department that covers its costs. Production and Consulting both spend roughly half their paid hours, or more, on work no customer pays for, and both lose money.
+Support reads 91.2% on the monthly report's own basis, which counts leave against it. That is the figure to quote in the room.</a:t>
             </a:r>
             <a:endParaRPr lang="en-US" dirty="0"/>
           </a:p>
@@ -2752,11 +2758,7 @@
           <a:p>
             <a:r>
               <a:rPr lang="en-US" dirty="0"/>
-              <a:t>Revenue by month, actual for the three closed months and original budget for the rest.
-Q1 actual 1,624,460 against a budget of 1,996,110, behind by 371,650.
-The nine months from October are still at the budget set before the year started. October is budgeted at 950,416, higher than any month we have delivered.
-Two things for the board. The Q1 variance is concentrated in Consulting and Video, which were budgeted on a resourcing level that does not exist. And the margin assumption in the budget is above what the business has delivered for two years, so even a month that hits the revenue number will miss the profit number.
-My recommendation is a rolling forecast from Q2, rebuilding Consulting around actual capacity and resetting gross margin to delivered rates. December should stay as budgeted: the business closes for two weeks and the loss is real.</a:t>
+              <a:t>Three months are closed and the remaining nine are still at original budget. That is the decision in front of the board.</a:t>
             </a:r>
             <a:endParaRPr lang="en-US" dirty="0"/>
           </a:p>
@@ -2844,10 +2846,11 @@
           <a:p>
             <a:r>
               <a:rPr lang="en-US" dirty="0"/>
-              <a:t>Seven actions, each with an owner and a date.
-The first two matter most: reforecasting on margin rather than revenue, and testing the overhead keys. Everything else in this pack follows from those two numbers.
-The Consulting decision cannot keep being deferred; it has carried running costs against almost no fees for three months.
-The cash action is the only one that produces money this quarter, and the utilisation action is the largest controllable item.</a:t>
+              <a:t>Revenue by month, actual for the three closed months and original budget for the rest.
+Q1 actual 1,624,460 against a budget of 1,996,110, behind by 371,650.
+The nine months from October are still at the budget set before the year started. October is budgeted at 950,416, higher than any month we have delivered.
+Two things for the board. The Q1 variance is concentrated in Consulting and Video, which were budgeted on a resourcing level that does not exist. And the margin assumption in the budget is above what the business has delivered for two years, so even a month that hits the revenue number will miss the profit number.
+My recommendation is a rolling forecast from Q2, rebuilding Consulting around actual capacity and resetting gross margin to delivered rates. December should stay as budgeted: the business closes for two weeks and the loss is real.</a:t>
             </a:r>
             <a:endParaRPr lang="en-US" dirty="0"/>
           </a:p>
@@ -2935,7 +2938,10 @@
           <a:p>
             <a:r>
               <a:rPr lang="en-US" dirty="0"/>
-              <a:t>Close on the two numbers that matter: break even needs 549,372 a month at our real margin, and we are running at 541,487. Everything else in the pack is detail underneath that.</a:t>
+              <a:t>Seven actions, each with an owner and a date.
+The first two matter most: reforecasting on margin rather than revenue, and testing the overhead keys. Everything else in this pack follows from those two numbers.
+The Consulting decision cannot keep being deferred; it has carried running costs against almost no fees for three months.
+The cash action is the only one that produces money this quarter, and the utilisation action is the largest controllable item.</a:t>
             </a:r>
             <a:endParaRPr lang="en-US" dirty="0"/>
           </a:p>
@@ -2959,6 +2965,94 @@
             <a:fld id="{F7021451-1387-4CA6-816F-3879F97B5CBC}" type="slidenum">
               <a:rPr lang="en-US"/>
               <a:t>33</a:t>
+            </a:fld>
+            <a:endParaRPr lang="en-US"/>
+          </a:p>
+        </p:txBody>
+      </p:sp>
+    </p:spTree>
+    <p:extLst>
+      <p:ext uri="{BB962C8B-B14F-4D97-AF65-F5344CB8AC3E}">
+        <p14:creationId xmlns:p14="http://schemas.microsoft.com/office/powerpoint/2010/main" val="1024086991"/>
+      </p:ext>
+    </p:extLst>
+  </p:cSld>
+  <p:clrMapOvr>
+    <a:masterClrMapping/>
+  </p:clrMapOvr>
+</p:notes>
+</file>
+
+<file path=ppt/notesSlides/notesSlide34.xml><?xml version="1.0" encoding="utf-8"?>
+<p:notes xmlns:a="http://schemas.openxmlformats.org/drawingml/2006/main" xmlns:r="http://schemas.openxmlformats.org/officeDocument/2006/relationships" xmlns:p="http://schemas.openxmlformats.org/presentationml/2006/main">
+  <p:cSld>
+    <p:spTree>
+      <p:nvGrpSpPr>
+        <p:cNvPr id="1" name=""/>
+        <p:cNvGrpSpPr/>
+        <p:nvPr/>
+      </p:nvGrpSpPr>
+      <p:grpSpPr>
+        <a:xfrm>
+          <a:off x="0" y="0"/>
+          <a:ext cx="0" cy="0"/>
+          <a:chOff x="0" y="0"/>
+          <a:chExt cx="0" cy="0"/>
+        </a:xfrm>
+      </p:grpSpPr>
+      <p:sp>
+        <p:nvSpPr>
+          <p:cNvPr id="2" name="Slide Image Placeholder 1"/>
+          <p:cNvSpPr>
+            <a:spLocks noGrp="1" noRot="1" noChangeAspect="1"/>
+          </p:cNvSpPr>
+          <p:nvPr>
+            <p:ph type="sldImg"/>
+          </p:nvPr>
+        </p:nvSpPr>
+        <p:spPr/>
+      </p:sp>
+      <p:sp>
+        <p:nvSpPr>
+          <p:cNvPr id="3" name="Notes Placeholder 2"/>
+          <p:cNvSpPr>
+            <a:spLocks noGrp="1"/>
+          </p:cNvSpPr>
+          <p:nvPr>
+            <p:ph type="body" idx="1"/>
+          </p:nvPr>
+        </p:nvSpPr>
+        <p:spPr/>
+        <p:txBody>
+          <a:bodyPr/>
+          <a:lstStyle/>
+          <a:p>
+            <a:r>
+              <a:rPr lang="en-US" dirty="0"/>
+              <a:t>Close on the two numbers that matter: break even needs 549,372 a month at our real margin, and we are running at 541,487. Everything else in the pack is detail underneath that.</a:t>
+            </a:r>
+            <a:endParaRPr lang="en-US" dirty="0"/>
+          </a:p>
+        </p:txBody>
+      </p:sp>
+      <p:sp>
+        <p:nvSpPr>
+          <p:cNvPr id="4" name="Slide Number Placeholder 3"/>
+          <p:cNvSpPr>
+            <a:spLocks noGrp="1"/>
+          </p:cNvSpPr>
+          <p:nvPr>
+            <p:ph type="sldNum" sz="quarter" idx="10"/>
+          </p:nvPr>
+        </p:nvSpPr>
+        <p:spPr/>
+        <p:txBody>
+          <a:bodyPr/>
+          <a:lstStyle/>
+          <a:p>
+            <a:fld id="{F7021451-1387-4CA6-816F-3879F97B5CBC}" type="slidenum">
+              <a:rPr lang="en-US"/>
+              <a:t>34</a:t>
             </a:fld>
             <a:endParaRPr lang="en-US"/>
           </a:p>
@@ -10529,7 +10623,7 @@
                   <a:srgbClr val="242C39"/>
                 </a:solidFill>
               </a:rPr>
-              <a:t>Chargeable per cent, Sep 26</a:t>
+              <a:t>Chargeable per cent, Production and Consulting</a:t>
             </a:r>
             <a:endParaRPr lang="en-US" sz="2700" dirty="0"/>
           </a:p>
@@ -10537,7 +10631,7 @@
       </p:sp>
       <p:pic>
         <p:nvPicPr>
-          <p:cNvPr id="4" name="snip util_her" descr="/home/user/Claude/deck/snips/util_her.png">    </p:cNvPr>
+          <p:cNvPr id="4" name="snip util_her_a" descr="/home/user/Claude/deck/snips/util_her_a.png">    </p:cNvPr>
           <p:cNvPicPr>
             <a:picLocks noChangeAspect="1"/>
           </p:cNvPicPr>
@@ -10551,8 +10645,8 @@
         </p:blipFill>
         <p:spPr>
           <a:xfrm>
-            <a:off x="1515437" y="1444752"/>
-            <a:ext cx="3552806" cy="3090672"/>
+            <a:off x="977022" y="1444752"/>
+            <a:ext cx="4629635" cy="3090672"/>
           </a:xfrm>
           <a:prstGeom prst="rect">
             <a:avLst/>
@@ -10589,7 +10683,7 @@
                   <a:srgbClr val="6B7585"/>
                 </a:solidFill>
               </a:rPr>
-              <a:t>Snipped from the Financial Controller Pack, Utilisation tab, Chargeable per cent, the Utilisation Report basis.</a:t>
+              <a:t>Snipped from the Financial Controller Pack, Utilisation tab, Chargeable per cent against target, the Utilisation Report basis.</a:t>
             </a:r>
             <a:endParaRPr lang="en-US" sz="800" dirty="0"/>
           </a:p>
@@ -10711,7 +10805,7 @@
                   <a:srgbClr val="3A4453"/>
                 </a:solidFill>
               </a:rPr>
-              <a:t>Support 91%. Production 30%. Consulting 23%. The company 72%.</a:t>
+              <a:t>Production 30% against a 67% target. That is 36.8% under, the worst gap in the business.</a:t>
             </a:r>
             <a:endParaRPr lang="en-US" sz="800" dirty="0"/>
           </a:p>
@@ -10732,7 +10826,7 @@
                   <a:srgbClr val="3A4453"/>
                 </a:solidFill>
               </a:rPr>
-              <a:t>Three person groups, not five, because nobody is assigned to Video or Integration. Their work is done by Production and Consulting people.</a:t>
+              <a:t>Leave took 38% of Production's available hours this month. That is the single biggest cause.</a:t>
             </a:r>
             <a:endParaRPr lang="en-US" sz="800" dirty="0"/>
           </a:p>
@@ -10753,7 +10847,7 @@
                   <a:srgbClr val="3A4453"/>
                 </a:solidFill>
               </a:rPr>
-              <a:t>Production is the one to act on. 333 hours of leave on 882 available took most of the month out.</a:t>
+              <a:t>Consulting 23% against 50%, so 27.0% under on a target already set low.</a:t>
             </a:r>
             <a:endParaRPr lang="en-US" sz="800" dirty="0"/>
           </a:p>
@@ -10774,7 +10868,7 @@
                   <a:srgbClr val="3A4453"/>
                 </a:solidFill>
               </a:rPr>
-              <a:t>Each month ties to the Grand Total on the monthly report to four decimal places.</a:t>
+              <a:t>Three person groups, not five. Nobody is assigned to Video or Integration; their work is done by Production and Consulting people.</a:t>
             </a:r>
             <a:endParaRPr lang="en-US" sz="800" dirty="0"/>
           </a:p>
@@ -10916,7 +11010,7 @@
                   <a:srgbClr val="242C39"/>
                 </a:solidFill>
               </a:rPr>
-              <a:t>Utilisation, Support and Events</a:t>
+              <a:t>Chargeable per cent, Support and the company</a:t>
             </a:r>
             <a:endParaRPr lang="en-US" sz="2700" dirty="0"/>
           </a:p>
@@ -10924,7 +11018,7 @@
       </p:sp>
       <p:pic>
         <p:nvPicPr>
-          <p:cNvPr id="4" name="snip util_pct_a" descr="/home/user/Claude/deck/snips/util_pct_a.png">    </p:cNvPr>
+          <p:cNvPr id="4" name="snip util_her_b" descr="/home/user/Claude/deck/snips/util_her_b.png">    </p:cNvPr>
           <p:cNvPicPr>
             <a:picLocks noChangeAspect="1"/>
           </p:cNvPicPr>
@@ -10938,8 +11032,8 @@
         </p:blipFill>
         <p:spPr>
           <a:xfrm>
-            <a:off x="502920" y="1444752"/>
-            <a:ext cx="5577840" cy="2633447"/>
+            <a:off x="977022" y="1444752"/>
+            <a:ext cx="4629635" cy="3090672"/>
           </a:xfrm>
           <a:prstGeom prst="rect">
             <a:avLst/>
@@ -10954,7 +11048,7 @@
         </p:nvSpPr>
         <p:spPr>
           <a:xfrm>
-            <a:off x="502920" y="4151351"/>
+            <a:off x="502920" y="4608576"/>
             <a:ext cx="5577840" cy="237744"/>
           </a:xfrm>
           <a:prstGeom prst="rect">
@@ -10976,7 +11070,7 @@
                   <a:srgbClr val="6B7585"/>
                 </a:solidFill>
               </a:rPr>
-              <a:t>Snipped from the Financial Controller Pack, Utilisation tab, hours, utilisation per cent and FTE, July to September. The pack calls these two cost centres Onsite and Production.</a:t>
+              <a:t>Snipped from the Financial Controller Pack, Utilisation tab, Chargeable per cent against target, the Utilisation Report basis.</a:t>
             </a:r>
             <a:endParaRPr lang="en-US" sz="800" dirty="0"/>
           </a:p>
@@ -11063,7 +11157,7 @@
           <a:p>
             <a:pPr marL="342900" indent="-342900">
               <a:lnSpc>
-                <a:spcPts val="1000"/>
+                <a:spcPts val="1200"/>
               </a:lnSpc>
               <a:spcAft>
                 <a:spcPts val="400"/>
@@ -11072,19 +11166,19 @@
               <a:buChar char="•"/>
             </a:pPr>
             <a:r>
-              <a:rPr lang="en-US" sz="800" dirty="0">
+              <a:rPr lang="en-US" sz="950" dirty="0">
                 <a:solidFill>
                   <a:srgbClr val="3A4453"/>
                 </a:solidFill>
               </a:rPr>
-              <a:t>This is the calculation itself. Hours worked, how many went on jobs, the percentage that gives, and the headcount those hours represent.</a:t>
-            </a:r>
-            <a:endParaRPr lang="en-US" sz="800" dirty="0"/>
+              <a:t>Support 91% against an 88% target, so it is 3.2% over. The only group ahead of its own target.</a:t>
+            </a:r>
+            <a:endParaRPr lang="en-US" sz="950" dirty="0"/>
           </a:p>
           <a:p>
             <a:pPr marL="342900" indent="-342900">
               <a:lnSpc>
-                <a:spcPts val="1000"/>
+                <a:spcPts val="1200"/>
               </a:lnSpc>
               <a:spcAft>
                 <a:spcPts val="400"/>
@@ -11093,19 +11187,19 @@
               <a:buChar char="•"/>
             </a:pPr>
             <a:r>
-              <a:rPr lang="en-US" sz="800" dirty="0">
+              <a:rPr lang="en-US" sz="950" dirty="0">
                 <a:solidFill>
                   <a:srgbClr val="3A4453"/>
                 </a:solidFill>
               </a:rPr>
-              <a:t>Utilisation per cent is billable hours divided by hours worked. Leave is left out, because nobody can bill leave.</a:t>
-            </a:r>
-            <a:endParaRPr lang="en-US" sz="800" dirty="0"/>
+              <a:t>It has been over target all three months: 1.4%, 5.8% and 3.2%.</a:t>
+            </a:r>
+            <a:endParaRPr lang="en-US" sz="950" dirty="0"/>
           </a:p>
           <a:p>
             <a:pPr marL="342900" indent="-342900">
               <a:lnSpc>
-                <a:spcPts val="1000"/>
+                <a:spcPts val="1200"/>
               </a:lnSpc>
               <a:spcAft>
                 <a:spcPts val="400"/>
@@ -11114,19 +11208,19 @@
               <a:buChar char="•"/>
             </a:pPr>
             <a:r>
-              <a:rPr lang="en-US" sz="800" dirty="0">
+              <a:rPr lang="en-US" sz="950" dirty="0">
                 <a:solidFill>
                   <a:srgbClr val="3A4453"/>
                 </a:solidFill>
               </a:rPr>
-              <a:t>FTE is hours worked divided by the working hours in the month, so 1.0 is one full time person.</a:t>
-            </a:r>
-            <a:endParaRPr lang="en-US" sz="800" dirty="0"/>
+              <a:t>The company is 72% against 81%, which is 9.0% under.</a:t>
+            </a:r>
+            <a:endParaRPr lang="en-US" sz="950" dirty="0"/>
           </a:p>
           <a:p>
             <a:pPr marL="342900" indent="-342900">
               <a:lnSpc>
-                <a:spcPts val="1000"/>
+                <a:spcPts val="1200"/>
               </a:lnSpc>
               <a:spcAft>
                 <a:spcPts val="400"/>
@@ -11135,19 +11229,19 @@
               <a:buChar char="•"/>
             </a:pPr>
             <a:r>
-              <a:rPr lang="en-US" sz="800" dirty="0">
+              <a:rPr lang="en-US" sz="950" dirty="0">
                 <a:solidFill>
                   <a:srgbClr val="3A4453"/>
                 </a:solidFill>
               </a:rPr>
-              <a:t>This page is the hours record, grouped by the job the work was for. The Chargeable per cent the monthly report uses is on the slide before.</a:t>
-            </a:r>
-            <a:endParaRPr lang="en-US" sz="800" dirty="0"/>
+              <a:t>Leave took 18% of the company's available hours this month, against 7% in August.</a:t>
+            </a:r>
+            <a:endParaRPr lang="en-US" sz="950" dirty="0"/>
           </a:p>
           <a:p>
             <a:pPr marL="342900" indent="-342900">
               <a:lnSpc>
-                <a:spcPts val="1000"/>
+                <a:spcPts val="1200"/>
               </a:lnSpc>
               <a:spcAft>
                 <a:spcPts val="400"/>
@@ -11156,14 +11250,14 @@
               <a:buChar char="•"/>
             </a:pPr>
             <a:r>
-              <a:rPr lang="en-US" sz="800" dirty="0">
+              <a:rPr lang="en-US" sz="950" dirty="0">
                 <a:solidFill>
                   <a:srgbClr val="3A4453"/>
                 </a:solidFill>
               </a:rPr>
-              <a:t>Support billed 2,132 hours. Events billed 241 and lost 333 to leave.</a:t>
-            </a:r>
-            <a:endParaRPr lang="en-US" sz="800" dirty="0"/>
+              <a:t>Five more points across Support and Production is the cheapest money in this pack. It costs nothing extra.</a:t>
+            </a:r>
+            <a:endParaRPr lang="en-US" sz="950" dirty="0"/>
           </a:p>
         </p:txBody>
       </p:sp>
@@ -11303,7 +11397,7 @@
                   <a:srgbClr val="242C39"/>
                 </a:solidFill>
               </a:rPr>
-              <a:t>Utilisation, Video, Integration and Consulting</a:t>
+              <a:t>Utilisation, Support and Events</a:t>
             </a:r>
             <a:endParaRPr lang="en-US" sz="2700" dirty="0"/>
           </a:p>
@@ -11311,7 +11405,7 @@
       </p:sp>
       <p:pic>
         <p:nvPicPr>
-          <p:cNvPr id="4" name="snip util_pct_b" descr="/home/user/Claude/deck/snips/util_pct_b.png">    </p:cNvPr>
+          <p:cNvPr id="4" name="snip util_pct_a" descr="/home/user/Claude/deck/snips/util_pct_a.png">    </p:cNvPr>
           <p:cNvPicPr>
             <a:picLocks noChangeAspect="1"/>
           </p:cNvPicPr>
@@ -11325,8 +11419,8 @@
         </p:blipFill>
         <p:spPr>
           <a:xfrm>
-            <a:off x="523192" y="1444752"/>
-            <a:ext cx="5537295" cy="3090672"/>
+            <a:off x="502920" y="1444752"/>
+            <a:ext cx="5577840" cy="2633447"/>
           </a:xfrm>
           <a:prstGeom prst="rect">
             <a:avLst/>
@@ -11341,7 +11435,7 @@
         </p:nvSpPr>
         <p:spPr>
           <a:xfrm>
-            <a:off x="502920" y="4608576"/>
+            <a:off x="502920" y="4151351"/>
             <a:ext cx="5577840" cy="237744"/>
           </a:xfrm>
           <a:prstGeom prst="rect">
@@ -11363,7 +11457,7 @@
                   <a:srgbClr val="6B7585"/>
                 </a:solidFill>
               </a:rPr>
-              <a:t>Snipped from the Financial Controller Pack, Utilisation tab, hours, utilisation per cent and FTE, July to September.</a:t>
+              <a:t>Snipped from the Financial Controller Pack, Utilisation tab, hours, utilisation per cent and FTE, July to September. The pack calls these two cost centres Onsite and Production.</a:t>
             </a:r>
             <a:endParaRPr lang="en-US" sz="800" dirty="0"/>
           </a:p>
@@ -11450,7 +11544,7 @@
           <a:p>
             <a:pPr marL="342900" indent="-342900">
               <a:lnSpc>
-                <a:spcPts val="1150"/>
+                <a:spcPts val="1000"/>
               </a:lnSpc>
               <a:spcAft>
                 <a:spcPts val="400"/>
@@ -11459,19 +11553,19 @@
               <a:buChar char="•"/>
             </a:pPr>
             <a:r>
-              <a:rPr lang="en-US" sz="900" dirty="0">
+              <a:rPr lang="en-US" sz="800" dirty="0">
                 <a:solidFill>
                   <a:srgbClr val="3A4453"/>
                 </a:solidFill>
               </a:rPr>
-              <a:t>Read these three as hours, not as percentages. The volumes are too small for a percentage to mean much.</a:t>
-            </a:r>
-            <a:endParaRPr lang="en-US" sz="900" dirty="0"/>
+              <a:t>This is the calculation itself. Hours worked, how many went on jobs, the percentage that gives, and the headcount those hours represent.</a:t>
+            </a:r>
+            <a:endParaRPr lang="en-US" sz="800" dirty="0"/>
           </a:p>
           <a:p>
             <a:pPr marL="342900" indent="-342900">
               <a:lnSpc>
-                <a:spcPts val="1150"/>
+                <a:spcPts val="1000"/>
               </a:lnSpc>
               <a:spcAft>
                 <a:spcPts val="400"/>
@@ -11480,19 +11574,19 @@
               <a:buChar char="•"/>
             </a:pPr>
             <a:r>
-              <a:rPr lang="en-US" sz="900" dirty="0">
+              <a:rPr lang="en-US" sz="800" dirty="0">
                 <a:solidFill>
                   <a:srgbClr val="3A4453"/>
                 </a:solidFill>
               </a:rPr>
-              <a:t>Integration shows 100% on 9.5 billable hours. That is one day of work, not a result.</a:t>
-            </a:r>
-            <a:endParaRPr lang="en-US" sz="900" dirty="0"/>
+              <a:t>Utilisation per cent is billable hours divided by hours worked. Leave is left out, because nobody can bill leave.</a:t>
+            </a:r>
+            <a:endParaRPr lang="en-US" sz="800" dirty="0"/>
           </a:p>
           <a:p>
             <a:pPr marL="342900" indent="-342900">
               <a:lnSpc>
-                <a:spcPts val="1150"/>
+                <a:spcPts val="1000"/>
               </a:lnSpc>
               <a:spcAft>
                 <a:spcPts val="400"/>
@@ -11501,19 +11595,19 @@
               <a:buChar char="•"/>
             </a:pPr>
             <a:r>
-              <a:rPr lang="en-US" sz="900" dirty="0">
+              <a:rPr lang="en-US" sz="800" dirty="0">
                 <a:solidFill>
                   <a:srgbClr val="3A4453"/>
                 </a:solidFill>
               </a:rPr>
-              <a:t>Video put 24.5 hours on jobs, about 0.18 of a full time person.</a:t>
-            </a:r>
-            <a:endParaRPr lang="en-US" sz="900" dirty="0"/>
+              <a:t>FTE is hours worked divided by the working hours in the month, so 1.0 is one full time person.</a:t>
+            </a:r>
+            <a:endParaRPr lang="en-US" sz="800" dirty="0"/>
           </a:p>
           <a:p>
             <a:pPr marL="342900" indent="-342900">
               <a:lnSpc>
-                <a:spcPts val="1150"/>
+                <a:spcPts val="1000"/>
               </a:lnSpc>
               <a:spcAft>
                 <a:spcPts val="400"/>
@@ -11522,19 +11616,19 @@
               <a:buChar char="•"/>
             </a:pPr>
             <a:r>
-              <a:rPr lang="en-US" sz="900" dirty="0">
+              <a:rPr lang="en-US" sz="800" dirty="0">
                 <a:solidFill>
                   <a:srgbClr val="3A4453"/>
                 </a:solidFill>
               </a:rPr>
-              <a:t>Consulting is the one that matters: 27%, with 84 hours on work we cannot bill.</a:t>
-            </a:r>
-            <a:endParaRPr lang="en-US" sz="900" dirty="0"/>
+              <a:t>This page is the hours record, grouped by the job the work was for. The Chargeable per cent the monthly report uses is on the slide before.</a:t>
+            </a:r>
+            <a:endParaRPr lang="en-US" sz="800" dirty="0"/>
           </a:p>
           <a:p>
             <a:pPr marL="342900" indent="-342900">
               <a:lnSpc>
-                <a:spcPts val="1150"/>
+                <a:spcPts val="1000"/>
               </a:lnSpc>
               <a:spcAft>
                 <a:spcPts val="400"/>
@@ -11543,14 +11637,14 @@
               <a:buChar char="•"/>
             </a:pPr>
             <a:r>
-              <a:rPr lang="en-US" sz="900" dirty="0">
+              <a:rPr lang="en-US" sz="800" dirty="0">
                 <a:solidFill>
                   <a:srgbClr val="3A4453"/>
                 </a:solidFill>
               </a:rPr>
-              <a:t>Consulting has carried running costs against almost no fees for three months. That decision keeps being deferred.</a:t>
-            </a:r>
-            <a:endParaRPr lang="en-US" sz="900" dirty="0"/>
+              <a:t>Support billed 2,132 hours. Events billed 241 and lost 333 to leave.</a:t>
+            </a:r>
+            <a:endParaRPr lang="en-US" sz="800" dirty="0"/>
           </a:p>
         </p:txBody>
       </p:sp>
@@ -11690,7 +11784,7 @@
                   <a:srgbClr val="242C39"/>
                 </a:solidFill>
               </a:rPr>
-              <a:t>How each department spent its hours, Sep 26</a:t>
+              <a:t>Utilisation, Video, Integration and Consulting</a:t>
             </a:r>
             <a:endParaRPr lang="en-US" sz="2700" dirty="0"/>
           </a:p>
@@ -11698,7 +11792,7 @@
       </p:sp>
       <p:pic>
         <p:nvPicPr>
-          <p:cNvPr id="4" name="snip util_chart" descr="/home/user/Claude/deck/snips/util_chart.png">    </p:cNvPr>
+          <p:cNvPr id="4" name="snip util_pct_b" descr="/home/user/Claude/deck/snips/util_pct_b.png">    </p:cNvPr>
           <p:cNvPicPr>
             <a:picLocks noChangeAspect="1"/>
           </p:cNvPicPr>
@@ -11712,8 +11806,8 @@
         </p:blipFill>
         <p:spPr>
           <a:xfrm>
-            <a:off x="502920" y="1444752"/>
-            <a:ext cx="5577840" cy="3045909"/>
+            <a:off x="523192" y="1444752"/>
+            <a:ext cx="5537295" cy="3090672"/>
           </a:xfrm>
           <a:prstGeom prst="rect">
             <a:avLst/>
@@ -11728,7 +11822,7 @@
         </p:nvSpPr>
         <p:spPr>
           <a:xfrm>
-            <a:off x="502920" y="4563813"/>
+            <a:off x="502920" y="4608576"/>
             <a:ext cx="5577840" cy="237744"/>
           </a:xfrm>
           <a:prstGeom prst="rect">
@@ -11750,7 +11844,7 @@
                   <a:srgbClr val="6B7585"/>
                 </a:solidFill>
               </a:rPr>
-              <a:t>Snipped from the Financial Controller Pack, Utilisation tab, hours by department, each bar scaled to its own total.</a:t>
+              <a:t>Snipped from the Financial Controller Pack, Utilisation tab, hours, utilisation per cent and FTE, July to September.</a:t>
             </a:r>
             <a:endParaRPr lang="en-US" sz="800" dirty="0"/>
           </a:p>
@@ -11837,7 +11931,7 @@
           <a:p>
             <a:pPr marL="342900" indent="-342900">
               <a:lnSpc>
-                <a:spcPts val="1050"/>
+                <a:spcPts val="1150"/>
               </a:lnSpc>
               <a:spcAft>
                 <a:spcPts val="400"/>
@@ -11846,19 +11940,19 @@
               <a:buChar char="•"/>
             </a:pPr>
             <a:r>
-              <a:rPr lang="en-US" sz="850" dirty="0">
+              <a:rPr lang="en-US" sz="900" dirty="0">
                 <a:solidFill>
                   <a:srgbClr val="3A4453"/>
                 </a:solidFill>
               </a:rPr>
-              <a:t>Each bar is scaled to that department's own hours, so you can compare the mix. Support works about a hundred times the hours Integration does.</a:t>
-            </a:r>
-            <a:endParaRPr lang="en-US" sz="850" dirty="0"/>
+              <a:t>Read these three as hours, not as percentages. The volumes are too small for a percentage to mean much.</a:t>
+            </a:r>
+            <a:endParaRPr lang="en-US" sz="900" dirty="0"/>
           </a:p>
           <a:p>
             <a:pPr marL="342900" indent="-342900">
               <a:lnSpc>
-                <a:spcPts val="1050"/>
+                <a:spcPts val="1150"/>
               </a:lnSpc>
               <a:spcAft>
                 <a:spcPts val="400"/>
@@ -11867,19 +11961,19 @@
               <a:buChar char="•"/>
             </a:pPr>
             <a:r>
-              <a:rPr lang="en-US" sz="850" dirty="0">
+              <a:rPr lang="en-US" sz="900" dirty="0">
                 <a:solidFill>
                   <a:srgbClr val="3A4453"/>
                 </a:solidFill>
               </a:rPr>
-              <a:t>Support is almost entirely billable, which is why it is the only department that makes money.</a:t>
-            </a:r>
-            <a:endParaRPr lang="en-US" sz="850" dirty="0"/>
+              <a:t>Integration shows 100% on 9.5 billable hours. That is one day of work, not a result.</a:t>
+            </a:r>
+            <a:endParaRPr lang="en-US" sz="900" dirty="0"/>
           </a:p>
           <a:p>
             <a:pPr marL="342900" indent="-342900">
               <a:lnSpc>
-                <a:spcPts val="1050"/>
+                <a:spcPts val="1150"/>
               </a:lnSpc>
               <a:spcAft>
                 <a:spcPts val="400"/>
@@ -11888,19 +11982,19 @@
               <a:buChar char="•"/>
             </a:pPr>
             <a:r>
-              <a:rPr lang="en-US" sz="850" dirty="0">
+              <a:rPr lang="en-US" sz="900" dirty="0">
                 <a:solidFill>
                   <a:srgbClr val="3A4453"/>
                 </a:solidFill>
               </a:rPr>
-              <a:t>Events put 333 hours into leave and only 241 onto jobs. The people are there, the work is not.</a:t>
-            </a:r>
-            <a:endParaRPr lang="en-US" sz="850" dirty="0"/>
+              <a:t>Video put 24.5 hours on jobs, about 0.18 of a full time person.</a:t>
+            </a:r>
+            <a:endParaRPr lang="en-US" sz="900" dirty="0"/>
           </a:p>
           <a:p>
             <a:pPr marL="342900" indent="-342900">
               <a:lnSpc>
-                <a:spcPts val="1050"/>
+                <a:spcPts val="1150"/>
               </a:lnSpc>
               <a:spcAft>
                 <a:spcPts val="400"/>
@@ -11909,19 +12003,19 @@
               <a:buChar char="•"/>
             </a:pPr>
             <a:r>
-              <a:rPr lang="en-US" sz="850" dirty="0">
+              <a:rPr lang="en-US" sz="900" dirty="0">
                 <a:solidFill>
                   <a:srgbClr val="3A4453"/>
                 </a:solidFill>
               </a:rPr>
-              <a:t>Consulting put 84 hours into work we cannot bill against 31 we can.</a:t>
-            </a:r>
-            <a:endParaRPr lang="en-US" sz="850" dirty="0"/>
+              <a:t>Consulting is the one that matters: 27%, with 84 hours on work we cannot bill.</a:t>
+            </a:r>
+            <a:endParaRPr lang="en-US" sz="900" dirty="0"/>
           </a:p>
           <a:p>
             <a:pPr marL="342900" indent="-342900">
               <a:lnSpc>
-                <a:spcPts val="1050"/>
+                <a:spcPts val="1150"/>
               </a:lnSpc>
               <a:spcAft>
                 <a:spcPts val="400"/>
@@ -11930,14 +12024,14 @@
               <a:buChar char="•"/>
             </a:pPr>
             <a:r>
-              <a:rPr lang="en-US" sz="850" dirty="0">
+              <a:rPr lang="en-US" sz="900" dirty="0">
                 <a:solidFill>
                   <a:srgbClr val="3A4453"/>
                 </a:solidFill>
               </a:rPr>
-              <a:t>We pay for every hour. We only bill the ones on jobs. The grey and light teal are the gap.</a:t>
-            </a:r>
-            <a:endParaRPr lang="en-US" sz="850" dirty="0"/>
+              <a:t>Consulting has carried running costs against almost no fees for three months. That decision keeps being deferred.</a:t>
+            </a:r>
+            <a:endParaRPr lang="en-US" sz="900" dirty="0"/>
           </a:p>
         </p:txBody>
       </p:sp>
@@ -12077,7 +12171,7 @@
                   <a:srgbClr val="242C39"/>
                 </a:solidFill>
               </a:rPr>
-              <a:t>Hours, the three departments, Sep 26</a:t>
+              <a:t>How each department spent its hours, Sep 26</a:t>
             </a:r>
             <a:endParaRPr lang="en-US" sz="2700" dirty="0"/>
           </a:p>
@@ -12085,7 +12179,7 @@
       </p:sp>
       <p:pic>
         <p:nvPicPr>
-          <p:cNvPr id="4" name="snip util_three" descr="/home/user/Claude/deck/snips/util_three.png">    </p:cNvPr>
+          <p:cNvPr id="4" name="snip util_chart" descr="/home/user/Claude/deck/snips/util_chart.png">    </p:cNvPr>
           <p:cNvPicPr>
             <a:picLocks noChangeAspect="1"/>
           </p:cNvPicPr>
@@ -12100,7 +12194,7 @@
         <p:spPr>
           <a:xfrm>
             <a:off x="502920" y="1444752"/>
-            <a:ext cx="5577840" cy="2587417"/>
+            <a:ext cx="5577840" cy="3045909"/>
           </a:xfrm>
           <a:prstGeom prst="rect">
             <a:avLst/>
@@ -12115,7 +12209,7 @@
         </p:nvSpPr>
         <p:spPr>
           <a:xfrm>
-            <a:off x="502920" y="4105321"/>
+            <a:off x="502920" y="4563813"/>
             <a:ext cx="5577840" cy="237744"/>
           </a:xfrm>
           <a:prstGeom prst="rect">
@@ -12137,7 +12231,7 @@
                   <a:srgbClr val="6B7585"/>
                 </a:solidFill>
               </a:rPr>
-              <a:t>Snipped from the Financial Controller Pack, Utilisation tab, hours rolled up to the three departments, each bar scaled to its own total.</a:t>
+              <a:t>Snipped from the Financial Controller Pack, Utilisation tab, hours by department, each bar scaled to its own total.</a:t>
             </a:r>
             <a:endParaRPr lang="en-US" sz="800" dirty="0"/>
           </a:p>
@@ -12238,7 +12332,7 @@
                   <a:srgbClr val="3A4453"/>
                 </a:solidFill>
               </a:rPr>
-              <a:t>The same picture grouped the way the P&amp;L is. Production is Events and Video. Consulting is Integration and Consulting.</a:t>
+              <a:t>Each bar is scaled to that department's own hours, so you can compare the mix. Support works about a hundred times the hours Integration does.</a:t>
             </a:r>
             <a:endParaRPr lang="en-US" sz="850" dirty="0"/>
           </a:p>
@@ -12259,7 +12353,7 @@
                   <a:srgbClr val="3A4453"/>
                 </a:solidFill>
               </a:rPr>
-              <a:t>Production put 265 hours onto jobs and 257 onto work we cannot bill, with 333 hours of leave on top.</a:t>
+              <a:t>Support is almost entirely billable, which is why it is the only department that makes money.</a:t>
             </a:r>
             <a:endParaRPr lang="en-US" sz="850" dirty="0"/>
           </a:p>
@@ -12280,7 +12374,7 @@
                   <a:srgbClr val="3A4453"/>
                 </a:solidFill>
               </a:rPr>
-              <a:t>Consulting put 40 onto jobs against 84 we cannot bill. Two thirds of its paid hours earn nothing.</a:t>
+              <a:t>Events put 333 hours into leave and only 241 onto jobs. The people are there, the work is not.</a:t>
             </a:r>
             <a:endParaRPr lang="en-US" sz="850" dirty="0"/>
           </a:p>
@@ -12301,7 +12395,7 @@
                   <a:srgbClr val="3A4453"/>
                 </a:solidFill>
               </a:rPr>
-              <a:t>Support is the only bar that is almost all dark. That is why it is the only department that makes money.</a:t>
+              <a:t>Consulting put 84 hours into work we cannot bill against 31 we can.</a:t>
             </a:r>
             <a:endParaRPr lang="en-US" sz="850" dirty="0"/>
           </a:p>
@@ -12322,7 +12416,7 @@
                   <a:srgbClr val="3A4453"/>
                 </a:solidFill>
               </a:rPr>
-              <a:t>Each bar is scaled to its own hours. Support works about four times the hours of the other two together.</a:t>
+              <a:t>We pay for every hour. We only bill the ones on jobs. The grey and light teal are the gap.</a:t>
             </a:r>
             <a:endParaRPr lang="en-US" sz="850" dirty="0"/>
           </a:p>
@@ -14345,92 +14439,14 @@
       </p:grpSpPr>
       <p:sp>
         <p:nvSpPr>
-          <p:cNvPr id="2" name="divider circle"/>
-          <p:cNvSpPr/>
-          <p:nvPr/>
-        </p:nvSpPr>
-        <p:spPr>
-          <a:xfrm>
-            <a:off x="6446520" y="1600200"/>
-            <a:ext cx="2651760" cy="2651760"/>
-          </a:xfrm>
-          <a:prstGeom prst="ellipse">
-            <a:avLst/>
-          </a:prstGeom>
-          <a:solidFill>
-            <a:srgbClr val="6D71FF">
-              <a:alpha val="55000"/>
-            </a:srgbClr>
-          </a:solidFill>
-          <a:ln/>
-        </p:spPr>
-      </p:sp>
-      <p:sp>
-        <p:nvSpPr>
-          <p:cNvPr id="3" name="Shape 1"/>
-          <p:cNvSpPr/>
-          <p:nvPr/>
-        </p:nvSpPr>
-        <p:spPr>
-          <a:xfrm>
-            <a:off x="502920" y="1874520"/>
-            <a:ext cx="868680" cy="868680"/>
-          </a:xfrm>
-          <a:prstGeom prst="rect">
-            <a:avLst/>
-          </a:prstGeom>
-          <a:solidFill>
-            <a:srgbClr val="3FD0C9"/>
-          </a:solidFill>
-          <a:ln/>
-        </p:spPr>
-      </p:sp>
-      <p:sp>
-        <p:nvSpPr>
-          <p:cNvPr id="4" name="Text 2"/>
-          <p:cNvSpPr txBox="1"/>
-          <p:nvPr/>
-        </p:nvSpPr>
-        <p:spPr>
-          <a:xfrm>
-            <a:off x="502920" y="1874520"/>
-            <a:ext cx="868680" cy="868680"/>
-          </a:xfrm>
-          <a:prstGeom prst="rect">
-            <a:avLst/>
-          </a:prstGeom>
-          <a:noFill/>
-          <a:ln/>
-        </p:spPr>
-        <p:txBody>
-          <a:bodyPr wrap="square" lIns="0" tIns="0" rIns="0" bIns="0" rtlCol="0" anchor="ctr"/>
-          <a:lstStyle/>
-          <a:p>
-            <a:pPr algn="ctr" indent="0" marL="0">
-              <a:buNone/>
-            </a:pPr>
-            <a:r>
-              <a:rPr lang="en-US" sz="2600" b="1" dirty="0">
-                <a:solidFill>
-                  <a:srgbClr val="242C39"/>
-                </a:solidFill>
-              </a:rPr>
-              <a:t>05</a:t>
-            </a:r>
-            <a:endParaRPr lang="en-US" sz="2600" dirty="0"/>
-          </a:p>
-        </p:txBody>
-      </p:sp>
-      <p:sp>
-        <p:nvSpPr>
-          <p:cNvPr id="5" name="Text 3"/>
-          <p:cNvSpPr txBox="1"/>
-          <p:nvPr/>
-        </p:nvSpPr>
-        <p:spPr>
-          <a:xfrm>
-            <a:off x="502920" y="411480"/>
-            <a:ext cx="3657600" cy="274320"/>
+          <p:cNvPr id="2" name="Text 0"/>
+          <p:cNvSpPr txBox="1"/>
+          <p:nvPr/>
+        </p:nvSpPr>
+        <p:spPr>
+          <a:xfrm>
+            <a:off x="502920" y="365760"/>
+            <a:ext cx="6400800" cy="274320"/>
           </a:xfrm>
           <a:prstGeom prst="rect">
             <a:avLst/>
@@ -14448,10 +14464,10 @@
             <a:r>
               <a:rPr lang="en-US" sz="950" b="1" spc="220" kern="0" dirty="0">
                 <a:solidFill>
-                  <a:srgbClr val="3FD0C9"/>
-                </a:solidFill>
-              </a:rPr>
-              <a:t>SECTION</a:t>
+                  <a:srgbClr val="122B82"/>
+                </a:solidFill>
+              </a:rPr>
+              <a:t>PEOPLE AND UTILISATION</a:t>
             </a:r>
             <a:endParaRPr lang="en-US" sz="950" dirty="0"/>
           </a:p>
@@ -14459,14 +14475,14 @@
       </p:sp>
       <p:sp>
         <p:nvSpPr>
-          <p:cNvPr id="6" name="Text 4"/>
-          <p:cNvSpPr txBox="1"/>
-          <p:nvPr/>
-        </p:nvSpPr>
-        <p:spPr>
-          <a:xfrm>
-            <a:off x="1600200" y="1874520"/>
-            <a:ext cx="5943600" cy="502920"/>
+          <p:cNvPr id="3" name="Text 1"/>
+          <p:cNvSpPr txBox="1"/>
+          <p:nvPr/>
+        </p:nvSpPr>
+        <p:spPr>
+          <a:xfrm>
+            <a:off x="502920" y="640080"/>
+            <a:ext cx="7315200" cy="685800"/>
           </a:xfrm>
           <a:prstGeom prst="rect">
             <a:avLst/>
@@ -14482,50 +14498,304 @@
               <a:buNone/>
             </a:pPr>
             <a:r>
-              <a:rPr lang="en-US" sz="2800" b="1" dirty="0">
-                <a:solidFill>
-                  <a:srgbClr val="FFFFFF"/>
-                </a:solidFill>
-              </a:rPr>
-              <a:t>Budget and outlook</a:t>
-            </a:r>
-            <a:endParaRPr lang="en-US" sz="2800" dirty="0"/>
-          </a:p>
-        </p:txBody>
-      </p:sp>
-      <p:sp>
-        <p:nvSpPr>
-          <p:cNvPr id="7" name="Text 5"/>
-          <p:cNvSpPr txBox="1"/>
-          <p:nvPr/>
-        </p:nvSpPr>
-        <p:spPr>
-          <a:xfrm>
-            <a:off x="1600200" y="2395728"/>
-            <a:ext cx="5943600" cy="347472"/>
-          </a:xfrm>
-          <a:prstGeom prst="rect">
-            <a:avLst/>
-          </a:prstGeom>
-          <a:noFill/>
-          <a:ln/>
-        </p:spPr>
-        <p:txBody>
-          <a:bodyPr wrap="square" lIns="0" tIns="0" rIns="0" bIns="0" rtlCol="0" anchor="ctr"/>
+              <a:rPr lang="en-US" sz="2700" b="1" dirty="0">
+                <a:solidFill>
+                  <a:srgbClr val="242C39"/>
+                </a:solidFill>
+              </a:rPr>
+              <a:t>Hours, the three departments, Sep 26</a:t>
+            </a:r>
+            <a:endParaRPr lang="en-US" sz="2700" dirty="0"/>
+          </a:p>
+        </p:txBody>
+      </p:sp>
+      <p:pic>
+        <p:nvPicPr>
+          <p:cNvPr id="4" name="snip util_three" descr="/home/user/Claude/deck/snips/util_three.png">    </p:cNvPr>
+          <p:cNvPicPr>
+            <a:picLocks noChangeAspect="1"/>
+          </p:cNvPicPr>
+          <p:nvPr/>
+        </p:nvPicPr>
+        <p:blipFill>
+          <a:blip r:embed="rId1"/>
+          <a:stretch>
+            <a:fillRect/>
+          </a:stretch>
+        </p:blipFill>
+        <p:spPr>
+          <a:xfrm>
+            <a:off x="502920" y="1444752"/>
+            <a:ext cx="5577840" cy="2587417"/>
+          </a:xfrm>
+          <a:prstGeom prst="rect">
+            <a:avLst/>
+          </a:prstGeom>
+        </p:spPr>
+      </p:pic>
+      <p:sp>
+        <p:nvSpPr>
+          <p:cNvPr id="5" name="Text 2"/>
+          <p:cNvSpPr txBox="1"/>
+          <p:nvPr/>
+        </p:nvSpPr>
+        <p:spPr>
+          <a:xfrm>
+            <a:off x="502920" y="4105321"/>
+            <a:ext cx="5577840" cy="237744"/>
+          </a:xfrm>
+          <a:prstGeom prst="rect">
+            <a:avLst/>
+          </a:prstGeom>
+          <a:noFill/>
+          <a:ln/>
+        </p:spPr>
+        <p:txBody>
+          <a:bodyPr wrap="square" lIns="0" tIns="0" rIns="0" bIns="0" rtlCol="0" anchor="t"/>
           <a:lstStyle/>
           <a:p>
             <a:pPr indent="0" marL="0">
               <a:buNone/>
             </a:pPr>
             <a:r>
-              <a:rPr lang="en-US" sz="1200" dirty="0">
-                <a:solidFill>
-                  <a:srgbClr val="C9CED6"/>
-                </a:solidFill>
-              </a:rPr>
-              <a:t>What the rest of the year looks like and what we change</a:t>
-            </a:r>
-            <a:endParaRPr lang="en-US" sz="1200" dirty="0"/>
+              <a:rPr lang="en-US" sz="800" i="1" dirty="0">
+                <a:solidFill>
+                  <a:srgbClr val="6B7585"/>
+                </a:solidFill>
+              </a:rPr>
+              <a:t>Snipped from the Financial Controller Pack, Utilisation tab, hours rolled up to the three departments, each bar scaled to its own total.</a:t>
+            </a:r>
+            <a:endParaRPr lang="en-US" sz="800" dirty="0"/>
+          </a:p>
+        </p:txBody>
+      </p:sp>
+      <p:sp>
+        <p:nvSpPr>
+          <p:cNvPr id="6" name="commentary panel"/>
+          <p:cNvSpPr/>
+          <p:nvPr/>
+        </p:nvSpPr>
+        <p:spPr>
+          <a:xfrm>
+            <a:off x="6263640" y="1463040"/>
+            <a:ext cx="2377440" cy="3154680"/>
+          </a:xfrm>
+          <a:prstGeom prst="rect">
+            <a:avLst/>
+          </a:prstGeom>
+          <a:solidFill>
+            <a:srgbClr val="E8F9F8"/>
+          </a:solidFill>
+          <a:ln/>
+        </p:spPr>
+      </p:sp>
+      <p:sp>
+        <p:nvSpPr>
+          <p:cNvPr id="7" name="Text 4"/>
+          <p:cNvSpPr txBox="1"/>
+          <p:nvPr/>
+        </p:nvSpPr>
+        <p:spPr>
+          <a:xfrm>
+            <a:off x="6446520" y="1627632"/>
+            <a:ext cx="2011680" cy="228600"/>
+          </a:xfrm>
+          <a:prstGeom prst="rect">
+            <a:avLst/>
+          </a:prstGeom>
+          <a:noFill/>
+          <a:ln/>
+        </p:spPr>
+        <p:txBody>
+          <a:bodyPr wrap="square" lIns="0" tIns="0" rIns="0" bIns="0" rtlCol="0" anchor="ctr"/>
+          <a:lstStyle/>
+          <a:p>
+            <a:pPr indent="0" marL="0">
+              <a:buNone/>
+            </a:pPr>
+            <a:r>
+              <a:rPr lang="en-US" sz="900" b="1" spc="180" kern="0" dirty="0">
+                <a:solidFill>
+                  <a:srgbClr val="005358"/>
+                </a:solidFill>
+              </a:rPr>
+              <a:t>COMMENTARY</a:t>
+            </a:r>
+            <a:endParaRPr lang="en-US" sz="900" dirty="0"/>
+          </a:p>
+        </p:txBody>
+      </p:sp>
+      <p:sp>
+        <p:nvSpPr>
+          <p:cNvPr id="8" name="Text 5"/>
+          <p:cNvSpPr txBox="1"/>
+          <p:nvPr/>
+        </p:nvSpPr>
+        <p:spPr>
+          <a:xfrm>
+            <a:off x="6446520" y="1901952"/>
+            <a:ext cx="2011680" cy="2551176"/>
+          </a:xfrm>
+          <a:prstGeom prst="rect">
+            <a:avLst/>
+          </a:prstGeom>
+          <a:noFill/>
+          <a:ln/>
+        </p:spPr>
+        <p:txBody>
+          <a:bodyPr wrap="square" lIns="0" tIns="0" rIns="0" bIns="0" rtlCol="0" anchor="t">
+            <a:normAutofit/>
+          </a:bodyPr>
+          <a:lstStyle/>
+          <a:p>
+            <a:pPr marL="342900" indent="-342900">
+              <a:lnSpc>
+                <a:spcPts val="1050"/>
+              </a:lnSpc>
+              <a:spcAft>
+                <a:spcPts val="400"/>
+              </a:spcAft>
+              <a:buSzPct val="100000"/>
+              <a:buChar char="•"/>
+            </a:pPr>
+            <a:r>
+              <a:rPr lang="en-US" sz="850" dirty="0">
+                <a:solidFill>
+                  <a:srgbClr val="3A4453"/>
+                </a:solidFill>
+              </a:rPr>
+              <a:t>The same picture grouped the way the P&amp;L is. Production is Events and Video. Consulting is Integration and Consulting.</a:t>
+            </a:r>
+            <a:endParaRPr lang="en-US" sz="850" dirty="0"/>
+          </a:p>
+          <a:p>
+            <a:pPr marL="342900" indent="-342900">
+              <a:lnSpc>
+                <a:spcPts val="1050"/>
+              </a:lnSpc>
+              <a:spcAft>
+                <a:spcPts val="400"/>
+              </a:spcAft>
+              <a:buSzPct val="100000"/>
+              <a:buChar char="•"/>
+            </a:pPr>
+            <a:r>
+              <a:rPr lang="en-US" sz="850" dirty="0">
+                <a:solidFill>
+                  <a:srgbClr val="3A4453"/>
+                </a:solidFill>
+              </a:rPr>
+              <a:t>Production put 265 hours onto jobs and 257 onto work we cannot bill, with 333 hours of leave on top.</a:t>
+            </a:r>
+            <a:endParaRPr lang="en-US" sz="850" dirty="0"/>
+          </a:p>
+          <a:p>
+            <a:pPr marL="342900" indent="-342900">
+              <a:lnSpc>
+                <a:spcPts val="1050"/>
+              </a:lnSpc>
+              <a:spcAft>
+                <a:spcPts val="400"/>
+              </a:spcAft>
+              <a:buSzPct val="100000"/>
+              <a:buChar char="•"/>
+            </a:pPr>
+            <a:r>
+              <a:rPr lang="en-US" sz="850" dirty="0">
+                <a:solidFill>
+                  <a:srgbClr val="3A4453"/>
+                </a:solidFill>
+              </a:rPr>
+              <a:t>Consulting put 40 onto jobs against 84 we cannot bill. Two thirds of its paid hours earn nothing.</a:t>
+            </a:r>
+            <a:endParaRPr lang="en-US" sz="850" dirty="0"/>
+          </a:p>
+          <a:p>
+            <a:pPr marL="342900" indent="-342900">
+              <a:lnSpc>
+                <a:spcPts val="1050"/>
+              </a:lnSpc>
+              <a:spcAft>
+                <a:spcPts val="400"/>
+              </a:spcAft>
+              <a:buSzPct val="100000"/>
+              <a:buChar char="•"/>
+            </a:pPr>
+            <a:r>
+              <a:rPr lang="en-US" sz="850" dirty="0">
+                <a:solidFill>
+                  <a:srgbClr val="3A4453"/>
+                </a:solidFill>
+              </a:rPr>
+              <a:t>Support is the only bar that is almost all dark. That is why it is the only department that makes money.</a:t>
+            </a:r>
+            <a:endParaRPr lang="en-US" sz="850" dirty="0"/>
+          </a:p>
+          <a:p>
+            <a:pPr marL="342900" indent="-342900">
+              <a:lnSpc>
+                <a:spcPts val="1050"/>
+              </a:lnSpc>
+              <a:spcAft>
+                <a:spcPts val="400"/>
+              </a:spcAft>
+              <a:buSzPct val="100000"/>
+              <a:buChar char="•"/>
+            </a:pPr>
+            <a:r>
+              <a:rPr lang="en-US" sz="850" dirty="0">
+                <a:solidFill>
+                  <a:srgbClr val="3A4453"/>
+                </a:solidFill>
+              </a:rPr>
+              <a:t>Each bar is scaled to its own hours. Support works about four times the hours of the other two together.</a:t>
+            </a:r>
+            <a:endParaRPr lang="en-US" sz="850" dirty="0"/>
+          </a:p>
+        </p:txBody>
+      </p:sp>
+      <p:sp>
+        <p:nvSpPr>
+          <p:cNvPr id="25" name="Slide Number Placeholder 0"/>
+          <p:cNvSpPr>
+            <a:spLocks noGrp="1"/>
+          </p:cNvSpPr>
+          <p:nvPr>
+            <p:ph type="sldNum" sz="quarter" idx="4294967295"/>
+          </p:nvPr>
+        </p:nvSpPr>
+        <p:spPr>
+          <a:xfrm>
+            <a:off x="8092440" y="4736592"/>
+            <a:ext cx="548640" cy="228600"/>
+          </a:xfrm>
+          <a:prstGeom prst="rect">
+            <a:avLst/>
+          </a:prstGeom>
+          <a:extLst>
+            <a:ext uri="{C572A759-6A51-4108-AA02-DFA0A04FC94B}">
+              <ma14:wrappingTextBoxFlag xmlns:ma14="http://schemas.microsoft.com/office/mac/drawingml/2011/main" val="0"/>
+            </a:ext>
+          </a:extLst>
+        </p:spPr>
+        <p:txBody>
+          <a:bodyPr/>
+          <a:lstStyle>
+            <a:lvl1pPr>
+              <a:defRPr sz="800">
+                <a:solidFill>
+                  <a:srgbClr val="6B7585"/>
+                </a:solidFill>
+              </a:defRPr>
+            </a:lvl1pPr>
+          </a:lstStyle>
+          <a:p>
+            <a:pPr algn="r"/>
+            <a:fld id="{F7021451-1387-4CA6-816F-3879F97B5CBC}" type="slidenum">
+              <a:rPr b="0" lang="en-US"/>
+              <a:t>30</a:t>
+            </a:fld>
+            <a:endParaRPr lang="en-US"/>
           </a:p>
         </p:txBody>
       </p:sp>
@@ -14556,14 +14826,92 @@
       </p:grpSpPr>
       <p:sp>
         <p:nvSpPr>
-          <p:cNvPr id="2" name="Text 0"/>
-          <p:cNvSpPr txBox="1"/>
-          <p:nvPr/>
-        </p:nvSpPr>
-        <p:spPr>
-          <a:xfrm>
-            <a:off x="502920" y="365760"/>
-            <a:ext cx="6400800" cy="274320"/>
+          <p:cNvPr id="2" name="divider circle"/>
+          <p:cNvSpPr/>
+          <p:nvPr/>
+        </p:nvSpPr>
+        <p:spPr>
+          <a:xfrm>
+            <a:off x="6446520" y="1600200"/>
+            <a:ext cx="2651760" cy="2651760"/>
+          </a:xfrm>
+          <a:prstGeom prst="ellipse">
+            <a:avLst/>
+          </a:prstGeom>
+          <a:solidFill>
+            <a:srgbClr val="6D71FF">
+              <a:alpha val="55000"/>
+            </a:srgbClr>
+          </a:solidFill>
+          <a:ln/>
+        </p:spPr>
+      </p:sp>
+      <p:sp>
+        <p:nvSpPr>
+          <p:cNvPr id="3" name="Shape 1"/>
+          <p:cNvSpPr/>
+          <p:nvPr/>
+        </p:nvSpPr>
+        <p:spPr>
+          <a:xfrm>
+            <a:off x="502920" y="1874520"/>
+            <a:ext cx="868680" cy="868680"/>
+          </a:xfrm>
+          <a:prstGeom prst="rect">
+            <a:avLst/>
+          </a:prstGeom>
+          <a:solidFill>
+            <a:srgbClr val="3FD0C9"/>
+          </a:solidFill>
+          <a:ln/>
+        </p:spPr>
+      </p:sp>
+      <p:sp>
+        <p:nvSpPr>
+          <p:cNvPr id="4" name="Text 2"/>
+          <p:cNvSpPr txBox="1"/>
+          <p:nvPr/>
+        </p:nvSpPr>
+        <p:spPr>
+          <a:xfrm>
+            <a:off x="502920" y="1874520"/>
+            <a:ext cx="868680" cy="868680"/>
+          </a:xfrm>
+          <a:prstGeom prst="rect">
+            <a:avLst/>
+          </a:prstGeom>
+          <a:noFill/>
+          <a:ln/>
+        </p:spPr>
+        <p:txBody>
+          <a:bodyPr wrap="square" lIns="0" tIns="0" rIns="0" bIns="0" rtlCol="0" anchor="ctr"/>
+          <a:lstStyle/>
+          <a:p>
+            <a:pPr algn="ctr" indent="0" marL="0">
+              <a:buNone/>
+            </a:pPr>
+            <a:r>
+              <a:rPr lang="en-US" sz="2600" b="1" dirty="0">
+                <a:solidFill>
+                  <a:srgbClr val="242C39"/>
+                </a:solidFill>
+              </a:rPr>
+              <a:t>05</a:t>
+            </a:r>
+            <a:endParaRPr lang="en-US" sz="2600" dirty="0"/>
+          </a:p>
+        </p:txBody>
+      </p:sp>
+      <p:sp>
+        <p:nvSpPr>
+          <p:cNvPr id="5" name="Text 3"/>
+          <p:cNvSpPr txBox="1"/>
+          <p:nvPr/>
+        </p:nvSpPr>
+        <p:spPr>
+          <a:xfrm>
+            <a:off x="502920" y="411480"/>
+            <a:ext cx="3657600" cy="274320"/>
           </a:xfrm>
           <a:prstGeom prst="rect">
             <a:avLst/>
@@ -14581,10 +14929,10 @@
             <a:r>
               <a:rPr lang="en-US" sz="950" b="1" spc="220" kern="0" dirty="0">
                 <a:solidFill>
-                  <a:srgbClr val="122B82"/>
-                </a:solidFill>
-              </a:rPr>
-              <a:t>BUDGET AND OUTLOOK</a:t>
+                  <a:srgbClr val="3FD0C9"/>
+                </a:solidFill>
+              </a:rPr>
+              <a:t>SECTION</a:t>
             </a:r>
             <a:endParaRPr lang="en-US" sz="950" dirty="0"/>
           </a:p>
@@ -14592,14 +14940,14 @@
       </p:sp>
       <p:sp>
         <p:nvSpPr>
-          <p:cNvPr id="3" name="Text 1"/>
-          <p:cNvSpPr txBox="1"/>
-          <p:nvPr/>
-        </p:nvSpPr>
-        <p:spPr>
-          <a:xfrm>
-            <a:off x="502920" y="640080"/>
-            <a:ext cx="7315200" cy="685800"/>
+          <p:cNvPr id="6" name="Text 4"/>
+          <p:cNvSpPr txBox="1"/>
+          <p:nvPr/>
+        </p:nvSpPr>
+        <p:spPr>
+          <a:xfrm>
+            <a:off x="1600200" y="1874520"/>
+            <a:ext cx="5943600" cy="502920"/>
           </a:xfrm>
           <a:prstGeom prst="rect">
             <a:avLst/>
@@ -14615,304 +14963,50 @@
               <a:buNone/>
             </a:pPr>
             <a:r>
-              <a:rPr lang="en-US" sz="2700" b="1" dirty="0">
-                <a:solidFill>
-                  <a:srgbClr val="242C39"/>
-                </a:solidFill>
-              </a:rPr>
-              <a:t>Revenue by month against budget</a:t>
-            </a:r>
-            <a:endParaRPr lang="en-US" sz="2700" dirty="0"/>
-          </a:p>
-        </p:txBody>
-      </p:sp>
-      <p:pic>
-        <p:nvPicPr>
-          <p:cNvPr id="4" name="snip income_month" descr="/home/user/Claude/deck/snips/income_month.png">    </p:cNvPr>
-          <p:cNvPicPr>
-            <a:picLocks noChangeAspect="1"/>
-          </p:cNvPicPr>
-          <p:nvPr/>
-        </p:nvPicPr>
-        <p:blipFill>
-          <a:blip r:embed="rId1"/>
-          <a:stretch>
-            <a:fillRect/>
-          </a:stretch>
-        </p:blipFill>
-        <p:spPr>
-          <a:xfrm>
-            <a:off x="502920" y="1444752"/>
-            <a:ext cx="5577840" cy="2604071"/>
-          </a:xfrm>
-          <a:prstGeom prst="rect">
-            <a:avLst/>
-          </a:prstGeom>
-        </p:spPr>
-      </p:pic>
-      <p:sp>
-        <p:nvSpPr>
-          <p:cNvPr id="5" name="Text 2"/>
-          <p:cNvSpPr txBox="1"/>
-          <p:nvPr/>
-        </p:nvSpPr>
-        <p:spPr>
-          <a:xfrm>
-            <a:off x="502920" y="4121975"/>
-            <a:ext cx="5577840" cy="237744"/>
-          </a:xfrm>
-          <a:prstGeom prst="rect">
-            <a:avLst/>
-          </a:prstGeom>
-          <a:noFill/>
-          <a:ln/>
-        </p:spPr>
-        <p:txBody>
-          <a:bodyPr wrap="square" lIns="0" tIns="0" rIns="0" bIns="0" rtlCol="0" anchor="t"/>
+              <a:rPr lang="en-US" sz="2800" b="1" dirty="0">
+                <a:solidFill>
+                  <a:srgbClr val="FFFFFF"/>
+                </a:solidFill>
+              </a:rPr>
+              <a:t>Budget and outlook</a:t>
+            </a:r>
+            <a:endParaRPr lang="en-US" sz="2800" dirty="0"/>
+          </a:p>
+        </p:txBody>
+      </p:sp>
+      <p:sp>
+        <p:nvSpPr>
+          <p:cNvPr id="7" name="Text 5"/>
+          <p:cNvSpPr txBox="1"/>
+          <p:nvPr/>
+        </p:nvSpPr>
+        <p:spPr>
+          <a:xfrm>
+            <a:off x="1600200" y="2395728"/>
+            <a:ext cx="5943600" cy="347472"/>
+          </a:xfrm>
+          <a:prstGeom prst="rect">
+            <a:avLst/>
+          </a:prstGeom>
+          <a:noFill/>
+          <a:ln/>
+        </p:spPr>
+        <p:txBody>
+          <a:bodyPr wrap="square" lIns="0" tIns="0" rIns="0" bIns="0" rtlCol="0" anchor="ctr"/>
           <a:lstStyle/>
           <a:p>
             <a:pPr indent="0" marL="0">
               <a:buNone/>
             </a:pPr>
             <a:r>
-              <a:rPr lang="en-US" sz="800" i="1" dirty="0">
-                <a:solidFill>
-                  <a:srgbClr val="6B7585"/>
-                </a:solidFill>
-              </a:rPr>
-              <a:t>Snipped from the Financial Controller Pack, Cost Analysis tab, total income by month, actual to date then budget.</a:t>
-            </a:r>
-            <a:endParaRPr lang="en-US" sz="800" dirty="0"/>
-          </a:p>
-        </p:txBody>
-      </p:sp>
-      <p:sp>
-        <p:nvSpPr>
-          <p:cNvPr id="6" name="commentary panel"/>
-          <p:cNvSpPr/>
-          <p:nvPr/>
-        </p:nvSpPr>
-        <p:spPr>
-          <a:xfrm>
-            <a:off x="6263640" y="1463040"/>
-            <a:ext cx="2377440" cy="3154680"/>
-          </a:xfrm>
-          <a:prstGeom prst="rect">
-            <a:avLst/>
-          </a:prstGeom>
-          <a:solidFill>
-            <a:srgbClr val="E8F9F8"/>
-          </a:solidFill>
-          <a:ln/>
-        </p:spPr>
-      </p:sp>
-      <p:sp>
-        <p:nvSpPr>
-          <p:cNvPr id="7" name="Text 4"/>
-          <p:cNvSpPr txBox="1"/>
-          <p:nvPr/>
-        </p:nvSpPr>
-        <p:spPr>
-          <a:xfrm>
-            <a:off x="6446520" y="1627632"/>
-            <a:ext cx="2011680" cy="228600"/>
-          </a:xfrm>
-          <a:prstGeom prst="rect">
-            <a:avLst/>
-          </a:prstGeom>
-          <a:noFill/>
-          <a:ln/>
-        </p:spPr>
-        <p:txBody>
-          <a:bodyPr wrap="square" lIns="0" tIns="0" rIns="0" bIns="0" rtlCol="0" anchor="ctr"/>
-          <a:lstStyle/>
-          <a:p>
-            <a:pPr indent="0" marL="0">
-              <a:buNone/>
-            </a:pPr>
-            <a:r>
-              <a:rPr lang="en-US" sz="900" b="1" spc="180" kern="0" dirty="0">
-                <a:solidFill>
-                  <a:srgbClr val="005358"/>
-                </a:solidFill>
-              </a:rPr>
-              <a:t>COMMENTARY</a:t>
-            </a:r>
-            <a:endParaRPr lang="en-US" sz="900" dirty="0"/>
-          </a:p>
-        </p:txBody>
-      </p:sp>
-      <p:sp>
-        <p:nvSpPr>
-          <p:cNvPr id="8" name="Text 5"/>
-          <p:cNvSpPr txBox="1"/>
-          <p:nvPr/>
-        </p:nvSpPr>
-        <p:spPr>
-          <a:xfrm>
-            <a:off x="6446520" y="1901952"/>
-            <a:ext cx="2011680" cy="2551176"/>
-          </a:xfrm>
-          <a:prstGeom prst="rect">
-            <a:avLst/>
-          </a:prstGeom>
-          <a:noFill/>
-          <a:ln/>
-        </p:spPr>
-        <p:txBody>
-          <a:bodyPr wrap="square" lIns="0" tIns="0" rIns="0" bIns="0" rtlCol="0" anchor="t">
-            <a:normAutofit/>
-          </a:bodyPr>
-          <a:lstStyle/>
-          <a:p>
-            <a:pPr marL="342900" indent="-342900">
-              <a:lnSpc>
-                <a:spcPts val="1150"/>
-              </a:lnSpc>
-              <a:spcAft>
-                <a:spcPts val="400"/>
-              </a:spcAft>
-              <a:buSzPct val="100000"/>
-              <a:buChar char="•"/>
-            </a:pPr>
-            <a:r>
-              <a:rPr lang="en-US" sz="900" dirty="0">
-                <a:solidFill>
-                  <a:srgbClr val="3A4453"/>
-                </a:solidFill>
-              </a:rPr>
-              <a:t>Q1 came in (372)k behind on revenue, and almost all of it is Consulting and Video.</a:t>
-            </a:r>
-            <a:endParaRPr lang="en-US" sz="900" dirty="0"/>
-          </a:p>
-          <a:p>
-            <a:pPr marL="342900" indent="-342900">
-              <a:lnSpc>
-                <a:spcPts val="1150"/>
-              </a:lnSpc>
-              <a:spcAft>
-                <a:spcPts val="400"/>
-              </a:spcAft>
-              <a:buSzPct val="100000"/>
-              <a:buChar char="•"/>
-            </a:pPr>
-            <a:r>
-              <a:rPr lang="en-US" sz="900" dirty="0">
-                <a:solidFill>
-                  <a:srgbClr val="3A4453"/>
-                </a:solidFill>
-              </a:rPr>
-              <a:t>The remaining nine months are untouched original budget. They are not a forecast.</a:t>
-            </a:r>
-            <a:endParaRPr lang="en-US" sz="900" dirty="0"/>
-          </a:p>
-          <a:p>
-            <a:pPr marL="342900" indent="-342900">
-              <a:lnSpc>
-                <a:spcPts val="1150"/>
-              </a:lnSpc>
-              <a:spcAft>
-                <a:spcPts val="400"/>
-              </a:spcAft>
-              <a:buSzPct val="100000"/>
-              <a:buChar char="•"/>
-            </a:pPr>
-            <a:r>
-              <a:rPr lang="en-US" sz="900" dirty="0">
-                <a:solidFill>
-                  <a:srgbClr val="3A4453"/>
-                </a:solidFill>
-              </a:rPr>
-              <a:t>October alone is budgeted at 950k, nearly double our best month so far.</a:t>
-            </a:r>
-            <a:endParaRPr lang="en-US" sz="900" dirty="0"/>
-          </a:p>
-          <a:p>
-            <a:pPr marL="342900" indent="-342900">
-              <a:lnSpc>
-                <a:spcPts val="1150"/>
-              </a:lnSpc>
-              <a:spcAft>
-                <a:spcPts val="400"/>
-              </a:spcAft>
-              <a:buSzPct val="100000"/>
-              <a:buChar char="•"/>
-            </a:pPr>
-            <a:r>
-              <a:rPr lang="en-US" sz="900" dirty="0">
-                <a:solidFill>
-                  <a:srgbClr val="3A4453"/>
-                </a:solidFill>
-              </a:rPr>
-              <a:t>December carries a planned loss. The business closes for two weeks, so that is correct and should stay.</a:t>
-            </a:r>
-            <a:endParaRPr lang="en-US" sz="900" dirty="0"/>
-          </a:p>
-          <a:p>
-            <a:pPr marL="342900" indent="-342900">
-              <a:lnSpc>
-                <a:spcPts val="1150"/>
-              </a:lnSpc>
-              <a:spcAft>
-                <a:spcPts val="400"/>
-              </a:spcAft>
-              <a:buSzPct val="100000"/>
-              <a:buChar char="•"/>
-            </a:pPr>
-            <a:r>
-              <a:rPr lang="en-US" sz="900" dirty="0">
-                <a:solidFill>
-                  <a:srgbClr val="3A4453"/>
-                </a:solidFill>
-              </a:rPr>
-              <a:t>Recommend a Q1 rolling forecast: rebuild Consulting on real capacity and reset the margin assumptions.</a:t>
-            </a:r>
-            <a:endParaRPr lang="en-US" sz="900" dirty="0"/>
-          </a:p>
-        </p:txBody>
-      </p:sp>
-      <p:sp>
-        <p:nvSpPr>
-          <p:cNvPr id="25" name="Slide Number Placeholder 0"/>
-          <p:cNvSpPr>
-            <a:spLocks noGrp="1"/>
-          </p:cNvSpPr>
-          <p:nvPr>
-            <p:ph type="sldNum" sz="quarter" idx="4294967295"/>
-          </p:nvPr>
-        </p:nvSpPr>
-        <p:spPr>
-          <a:xfrm>
-            <a:off x="8092440" y="4736592"/>
-            <a:ext cx="548640" cy="228600"/>
-          </a:xfrm>
-          <a:prstGeom prst="rect">
-            <a:avLst/>
-          </a:prstGeom>
-          <a:extLst>
-            <a:ext uri="{C572A759-6A51-4108-AA02-DFA0A04FC94B}">
-              <ma14:wrappingTextBoxFlag xmlns:ma14="http://schemas.microsoft.com/office/mac/drawingml/2011/main" val="0"/>
-            </a:ext>
-          </a:extLst>
-        </p:spPr>
-        <p:txBody>
-          <a:bodyPr/>
-          <a:lstStyle>
-            <a:lvl1pPr>
-              <a:defRPr sz="800">
-                <a:solidFill>
-                  <a:srgbClr val="6B7585"/>
-                </a:solidFill>
-              </a:defRPr>
-            </a:lvl1pPr>
-          </a:lstStyle>
-          <a:p>
-            <a:pPr algn="r"/>
-            <a:fld id="{F7021451-1387-4CA6-816F-3879F97B5CBC}" type="slidenum">
-              <a:rPr b="0" lang="en-US"/>
-              <a:t>31</a:t>
-            </a:fld>
-            <a:endParaRPr lang="en-US"/>
+              <a:rPr lang="en-US" sz="1200" dirty="0">
+                <a:solidFill>
+                  <a:srgbClr val="C9CED6"/>
+                </a:solidFill>
+              </a:rPr>
+              <a:t>What the rest of the year looks like and what we change</a:t>
+            </a:r>
+            <a:endParaRPr lang="en-US" sz="1200" dirty="0"/>
           </a:p>
         </p:txBody>
       </p:sp>
@@ -14971,7 +15065,7 @@
                   <a:srgbClr val="122B82"/>
                 </a:solidFill>
               </a:rPr>
-              <a:t>SUMMARY AND ACTIONS</a:t>
+              <a:t>BUDGET AND OUTLOOK</a:t>
             </a:r>
             <a:endParaRPr lang="en-US" sz="950" dirty="0"/>
           </a:p>
@@ -15007,6 +15101,393 @@
                   <a:srgbClr val="242C39"/>
                 </a:solidFill>
               </a:rPr>
+              <a:t>Revenue by month against budget</a:t>
+            </a:r>
+            <a:endParaRPr lang="en-US" sz="2700" dirty="0"/>
+          </a:p>
+        </p:txBody>
+      </p:sp>
+      <p:pic>
+        <p:nvPicPr>
+          <p:cNvPr id="4" name="snip income_month" descr="/home/user/Claude/deck/snips/income_month.png">    </p:cNvPr>
+          <p:cNvPicPr>
+            <a:picLocks noChangeAspect="1"/>
+          </p:cNvPicPr>
+          <p:nvPr/>
+        </p:nvPicPr>
+        <p:blipFill>
+          <a:blip r:embed="rId1"/>
+          <a:stretch>
+            <a:fillRect/>
+          </a:stretch>
+        </p:blipFill>
+        <p:spPr>
+          <a:xfrm>
+            <a:off x="502920" y="1444752"/>
+            <a:ext cx="5577840" cy="2604071"/>
+          </a:xfrm>
+          <a:prstGeom prst="rect">
+            <a:avLst/>
+          </a:prstGeom>
+        </p:spPr>
+      </p:pic>
+      <p:sp>
+        <p:nvSpPr>
+          <p:cNvPr id="5" name="Text 2"/>
+          <p:cNvSpPr txBox="1"/>
+          <p:nvPr/>
+        </p:nvSpPr>
+        <p:spPr>
+          <a:xfrm>
+            <a:off x="502920" y="4121975"/>
+            <a:ext cx="5577840" cy="237744"/>
+          </a:xfrm>
+          <a:prstGeom prst="rect">
+            <a:avLst/>
+          </a:prstGeom>
+          <a:noFill/>
+          <a:ln/>
+        </p:spPr>
+        <p:txBody>
+          <a:bodyPr wrap="square" lIns="0" tIns="0" rIns="0" bIns="0" rtlCol="0" anchor="t"/>
+          <a:lstStyle/>
+          <a:p>
+            <a:pPr indent="0" marL="0">
+              <a:buNone/>
+            </a:pPr>
+            <a:r>
+              <a:rPr lang="en-US" sz="800" i="1" dirty="0">
+                <a:solidFill>
+                  <a:srgbClr val="6B7585"/>
+                </a:solidFill>
+              </a:rPr>
+              <a:t>Snipped from the Financial Controller Pack, Cost Analysis tab, total income by month, actual to date then budget.</a:t>
+            </a:r>
+            <a:endParaRPr lang="en-US" sz="800" dirty="0"/>
+          </a:p>
+        </p:txBody>
+      </p:sp>
+      <p:sp>
+        <p:nvSpPr>
+          <p:cNvPr id="6" name="commentary panel"/>
+          <p:cNvSpPr/>
+          <p:nvPr/>
+        </p:nvSpPr>
+        <p:spPr>
+          <a:xfrm>
+            <a:off x="6263640" y="1463040"/>
+            <a:ext cx="2377440" cy="3154680"/>
+          </a:xfrm>
+          <a:prstGeom prst="rect">
+            <a:avLst/>
+          </a:prstGeom>
+          <a:solidFill>
+            <a:srgbClr val="E8F9F8"/>
+          </a:solidFill>
+          <a:ln/>
+        </p:spPr>
+      </p:sp>
+      <p:sp>
+        <p:nvSpPr>
+          <p:cNvPr id="7" name="Text 4"/>
+          <p:cNvSpPr txBox="1"/>
+          <p:nvPr/>
+        </p:nvSpPr>
+        <p:spPr>
+          <a:xfrm>
+            <a:off x="6446520" y="1627632"/>
+            <a:ext cx="2011680" cy="228600"/>
+          </a:xfrm>
+          <a:prstGeom prst="rect">
+            <a:avLst/>
+          </a:prstGeom>
+          <a:noFill/>
+          <a:ln/>
+        </p:spPr>
+        <p:txBody>
+          <a:bodyPr wrap="square" lIns="0" tIns="0" rIns="0" bIns="0" rtlCol="0" anchor="ctr"/>
+          <a:lstStyle/>
+          <a:p>
+            <a:pPr indent="0" marL="0">
+              <a:buNone/>
+            </a:pPr>
+            <a:r>
+              <a:rPr lang="en-US" sz="900" b="1" spc="180" kern="0" dirty="0">
+                <a:solidFill>
+                  <a:srgbClr val="005358"/>
+                </a:solidFill>
+              </a:rPr>
+              <a:t>COMMENTARY</a:t>
+            </a:r>
+            <a:endParaRPr lang="en-US" sz="900" dirty="0"/>
+          </a:p>
+        </p:txBody>
+      </p:sp>
+      <p:sp>
+        <p:nvSpPr>
+          <p:cNvPr id="8" name="Text 5"/>
+          <p:cNvSpPr txBox="1"/>
+          <p:nvPr/>
+        </p:nvSpPr>
+        <p:spPr>
+          <a:xfrm>
+            <a:off x="6446520" y="1901952"/>
+            <a:ext cx="2011680" cy="2551176"/>
+          </a:xfrm>
+          <a:prstGeom prst="rect">
+            <a:avLst/>
+          </a:prstGeom>
+          <a:noFill/>
+          <a:ln/>
+        </p:spPr>
+        <p:txBody>
+          <a:bodyPr wrap="square" lIns="0" tIns="0" rIns="0" bIns="0" rtlCol="0" anchor="t">
+            <a:normAutofit/>
+          </a:bodyPr>
+          <a:lstStyle/>
+          <a:p>
+            <a:pPr marL="342900" indent="-342900">
+              <a:lnSpc>
+                <a:spcPts val="1150"/>
+              </a:lnSpc>
+              <a:spcAft>
+                <a:spcPts val="400"/>
+              </a:spcAft>
+              <a:buSzPct val="100000"/>
+              <a:buChar char="•"/>
+            </a:pPr>
+            <a:r>
+              <a:rPr lang="en-US" sz="900" dirty="0">
+                <a:solidFill>
+                  <a:srgbClr val="3A4453"/>
+                </a:solidFill>
+              </a:rPr>
+              <a:t>Q1 came in (372)k behind on revenue, and almost all of it is Consulting and Video.</a:t>
+            </a:r>
+            <a:endParaRPr lang="en-US" sz="900" dirty="0"/>
+          </a:p>
+          <a:p>
+            <a:pPr marL="342900" indent="-342900">
+              <a:lnSpc>
+                <a:spcPts val="1150"/>
+              </a:lnSpc>
+              <a:spcAft>
+                <a:spcPts val="400"/>
+              </a:spcAft>
+              <a:buSzPct val="100000"/>
+              <a:buChar char="•"/>
+            </a:pPr>
+            <a:r>
+              <a:rPr lang="en-US" sz="900" dirty="0">
+                <a:solidFill>
+                  <a:srgbClr val="3A4453"/>
+                </a:solidFill>
+              </a:rPr>
+              <a:t>The remaining nine months are untouched original budget. They are not a forecast.</a:t>
+            </a:r>
+            <a:endParaRPr lang="en-US" sz="900" dirty="0"/>
+          </a:p>
+          <a:p>
+            <a:pPr marL="342900" indent="-342900">
+              <a:lnSpc>
+                <a:spcPts val="1150"/>
+              </a:lnSpc>
+              <a:spcAft>
+                <a:spcPts val="400"/>
+              </a:spcAft>
+              <a:buSzPct val="100000"/>
+              <a:buChar char="•"/>
+            </a:pPr>
+            <a:r>
+              <a:rPr lang="en-US" sz="900" dirty="0">
+                <a:solidFill>
+                  <a:srgbClr val="3A4453"/>
+                </a:solidFill>
+              </a:rPr>
+              <a:t>October alone is budgeted at 950k, nearly double our best month so far.</a:t>
+            </a:r>
+            <a:endParaRPr lang="en-US" sz="900" dirty="0"/>
+          </a:p>
+          <a:p>
+            <a:pPr marL="342900" indent="-342900">
+              <a:lnSpc>
+                <a:spcPts val="1150"/>
+              </a:lnSpc>
+              <a:spcAft>
+                <a:spcPts val="400"/>
+              </a:spcAft>
+              <a:buSzPct val="100000"/>
+              <a:buChar char="•"/>
+            </a:pPr>
+            <a:r>
+              <a:rPr lang="en-US" sz="900" dirty="0">
+                <a:solidFill>
+                  <a:srgbClr val="3A4453"/>
+                </a:solidFill>
+              </a:rPr>
+              <a:t>December carries a planned loss. The business closes for two weeks, so that is correct and should stay.</a:t>
+            </a:r>
+            <a:endParaRPr lang="en-US" sz="900" dirty="0"/>
+          </a:p>
+          <a:p>
+            <a:pPr marL="342900" indent="-342900">
+              <a:lnSpc>
+                <a:spcPts val="1150"/>
+              </a:lnSpc>
+              <a:spcAft>
+                <a:spcPts val="400"/>
+              </a:spcAft>
+              <a:buSzPct val="100000"/>
+              <a:buChar char="•"/>
+            </a:pPr>
+            <a:r>
+              <a:rPr lang="en-US" sz="900" dirty="0">
+                <a:solidFill>
+                  <a:srgbClr val="3A4453"/>
+                </a:solidFill>
+              </a:rPr>
+              <a:t>Recommend a Q1 rolling forecast: rebuild Consulting on real capacity and reset the margin assumptions.</a:t>
+            </a:r>
+            <a:endParaRPr lang="en-US" sz="900" dirty="0"/>
+          </a:p>
+        </p:txBody>
+      </p:sp>
+      <p:sp>
+        <p:nvSpPr>
+          <p:cNvPr id="25" name="Slide Number Placeholder 0"/>
+          <p:cNvSpPr>
+            <a:spLocks noGrp="1"/>
+          </p:cNvSpPr>
+          <p:nvPr>
+            <p:ph type="sldNum" sz="quarter" idx="4294967295"/>
+          </p:nvPr>
+        </p:nvSpPr>
+        <p:spPr>
+          <a:xfrm>
+            <a:off x="8092440" y="4736592"/>
+            <a:ext cx="548640" cy="228600"/>
+          </a:xfrm>
+          <a:prstGeom prst="rect">
+            <a:avLst/>
+          </a:prstGeom>
+          <a:extLst>
+            <a:ext uri="{C572A759-6A51-4108-AA02-DFA0A04FC94B}">
+              <ma14:wrappingTextBoxFlag xmlns:ma14="http://schemas.microsoft.com/office/mac/drawingml/2011/main" val="0"/>
+            </a:ext>
+          </a:extLst>
+        </p:spPr>
+        <p:txBody>
+          <a:bodyPr/>
+          <a:lstStyle>
+            <a:lvl1pPr>
+              <a:defRPr sz="800">
+                <a:solidFill>
+                  <a:srgbClr val="6B7585"/>
+                </a:solidFill>
+              </a:defRPr>
+            </a:lvl1pPr>
+          </a:lstStyle>
+          <a:p>
+            <a:pPr algn="r"/>
+            <a:fld id="{F7021451-1387-4CA6-816F-3879F97B5CBC}" type="slidenum">
+              <a:rPr b="0" lang="en-US"/>
+              <a:t>32</a:t>
+            </a:fld>
+            <a:endParaRPr lang="en-US"/>
+          </a:p>
+        </p:txBody>
+      </p:sp>
+    </p:spTree>
+  </p:cSld>
+  <p:clrMapOvr>
+    <a:masterClrMapping/>
+  </p:clrMapOvr>
+</p:sld>
+</file>
+
+<file path=ppt/slides/slide33.xml><?xml version="1.0" encoding="utf-8"?>
+<p:sld xmlns:a="http://schemas.openxmlformats.org/drawingml/2006/main" xmlns:r="http://schemas.openxmlformats.org/officeDocument/2006/relationships" xmlns:p="http://schemas.openxmlformats.org/presentationml/2006/main">
+  <p:cSld name="Slide 33">
+    <p:spTree>
+      <p:nvGrpSpPr>
+        <p:cNvPr id="1" name=""/>
+        <p:cNvGrpSpPr/>
+        <p:nvPr/>
+      </p:nvGrpSpPr>
+      <p:grpSpPr>
+        <a:xfrm>
+          <a:off x="0" y="0"/>
+          <a:ext cx="0" cy="0"/>
+          <a:chOff x="0" y="0"/>
+          <a:chExt cx="0" cy="0"/>
+        </a:xfrm>
+      </p:grpSpPr>
+      <p:sp>
+        <p:nvSpPr>
+          <p:cNvPr id="2" name="Text 0"/>
+          <p:cNvSpPr txBox="1"/>
+          <p:nvPr/>
+        </p:nvSpPr>
+        <p:spPr>
+          <a:xfrm>
+            <a:off x="502920" y="365760"/>
+            <a:ext cx="6400800" cy="274320"/>
+          </a:xfrm>
+          <a:prstGeom prst="rect">
+            <a:avLst/>
+          </a:prstGeom>
+          <a:noFill/>
+          <a:ln/>
+        </p:spPr>
+        <p:txBody>
+          <a:bodyPr wrap="square" lIns="0" tIns="0" rIns="0" bIns="0" rtlCol="0" anchor="ctr"/>
+          <a:lstStyle/>
+          <a:p>
+            <a:pPr indent="0" marL="0">
+              <a:buNone/>
+            </a:pPr>
+            <a:r>
+              <a:rPr lang="en-US" sz="950" b="1" spc="220" kern="0" dirty="0">
+                <a:solidFill>
+                  <a:srgbClr val="122B82"/>
+                </a:solidFill>
+              </a:rPr>
+              <a:t>SUMMARY AND ACTIONS</a:t>
+            </a:r>
+            <a:endParaRPr lang="en-US" sz="950" dirty="0"/>
+          </a:p>
+        </p:txBody>
+      </p:sp>
+      <p:sp>
+        <p:nvSpPr>
+          <p:cNvPr id="3" name="Text 1"/>
+          <p:cNvSpPr txBox="1"/>
+          <p:nvPr/>
+        </p:nvSpPr>
+        <p:spPr>
+          <a:xfrm>
+            <a:off x="502920" y="640080"/>
+            <a:ext cx="7315200" cy="685800"/>
+          </a:xfrm>
+          <a:prstGeom prst="rect">
+            <a:avLst/>
+          </a:prstGeom>
+          <a:noFill/>
+          <a:ln/>
+        </p:spPr>
+        <p:txBody>
+          <a:bodyPr wrap="square" lIns="0" tIns="0" rIns="0" bIns="0" rtlCol="0" anchor="ctr"/>
+          <a:lstStyle/>
+          <a:p>
+            <a:pPr indent="0" marL="0">
+              <a:buNone/>
+            </a:pPr>
+            <a:r>
+              <a:rPr lang="en-US" sz="2700" b="1" dirty="0">
+                <a:solidFill>
+                  <a:srgbClr val="242C39"/>
+                </a:solidFill>
+              </a:rPr>
               <a:t>What we agreed</a:t>
             </a:r>
             <a:endParaRPr lang="en-US" sz="2700" dirty="0"/>
@@ -15015,7 +15496,7 @@
       </p:sp>
       <p:graphicFrame>
         <p:nvGraphicFramePr>
-          <p:cNvPr id="33" name="Table 0"/>
+          <p:cNvPr id="34" name="Table 0"/>
           <p:cNvGraphicFramePr>
             <a:graphicFrameLocks noGrp="1"/>
           </p:cNvGraphicFramePr>
@@ -16530,7 +17011,7 @@
                             <a:srgbClr val="3A4453"/>
                           </a:solidFill>
                         </a:rPr>
-                        <a:t>Chargeable per cent is 72% against a 81% target. Five more points on Support and Production is worth about 16k a month at no extra cost.</a:t>
+                        <a:t>Chargeable per cent is 72% against the report's own 81% target. Five more points on Support and Production is worth about 16k a month at no extra cost.</a:t>
                       </a:r>
                       <a:endParaRPr lang="en-US" sz="800" dirty="0"/>
                     </a:p>
@@ -16968,7 +17449,7 @@
             <a:pPr algn="r"/>
             <a:fld id="{F7021451-1387-4CA6-816F-3879F97B5CBC}" type="slidenum">
               <a:rPr b="0" lang="en-US"/>
-              <a:t>32</a:t>
+              <a:t>33</a:t>
             </a:fld>
             <a:endParaRPr lang="en-US"/>
           </a:p>
@@ -16982,9 +17463,9 @@
 </p:sld>
 </file>
 
-<file path=ppt/slides/slide33.xml><?xml version="1.0" encoding="utf-8"?>
+<file path=ppt/slides/slide34.xml><?xml version="1.0" encoding="utf-8"?>
 <p:sld xmlns:a="http://schemas.openxmlformats.org/drawingml/2006/main" xmlns:r="http://schemas.openxmlformats.org/officeDocument/2006/relationships" xmlns:p="http://schemas.openxmlformats.org/presentationml/2006/main">
-  <p:cSld name="Slide 33">
+  <p:cSld name="Slide 34">
     <p:spTree>
       <p:nvGrpSpPr>
         <p:cNvPr id="1" name=""/>

--- a/deck/CTS Monthly Business Review - September 2026.pptx
+++ b/deck/CTS Monthly Business Review - September 2026.pptx
@@ -36,12 +36,9 @@
     <p:sldId id="284" r:id="rId30"/>
     <p:sldId id="285" r:id="rId31"/>
     <p:sldId id="286" r:id="rId32"/>
-    <p:sldId id="287" r:id="rId33"/>
-    <p:sldId id="288" r:id="rId34"/>
-    <p:sldId id="289" r:id="rId35"/>
   </p:sldIdLst>
   <p:notesMasterIdLst>
-    <p:notesMasterId r:id="rId36"/>
+    <p:notesMasterId r:id="rId33"/>
   </p:notesMasterIdLst>
   <p:sldSz cx="9144000" cy="5143500"/>
   <p:notesSz cx="5143500" cy="9144000"/>
@@ -2104,10 +2101,13 @@
               <a:rPr lang="en-US" dirty="0"/>
               <a:t>Chargeable per cent for September 2026, calculated exactly as the monthly Utilisation Report calculates it.
 The formula is billable hours divided by Workable Business Hours, the hours each person was available for in the month. Leave and public holidays stay in the bottom of the fraction, so a team that takes its leave shows a lower percentage. That is the business's own definition and this pack now uses it.
-Production 30.2% against a 67.0% target, 36.8% under. Consulting 23.0% against 50.0%, 27.0% under.
-Leave is the story on Production: 333 hours out of 882 available, which is 37.7% of the month. The people were paid for and the work was not there.
-There are three person groups because the report groups by the department a person belongs to, and nobody is assigned to Video or Integration.
-Workable Business Hours and the target are pastes. Neither can be calculated in the pack: the first needs each group's headcount and who is part time, the second is set per person and averaged up. The over or under reading and the leave share are calculated off them and reproduce the report's own columns exactly.</a:t>
+Support 91.2% against an 88.0% target, 3.2% over. Production 30.2% against 67.0%, 36.8% under. Consulting 23.0% against 50.0%, 27.0% under. The company 71.8% against 80.9%, 9.0% under.
+Support has cleared its own target in all three closed months, by 1.4%, 5.8% and 3.2%.
+Leave is the story on Production: 333 hours out of 882 available, which is 37.7% of the month. Across the company leave took 17.8% of available hours against 7.5% in August.
+Three person groups, not five. The report groups by the department a person belongs to and nobody is assigned to Video or Integration; their work is carried out by Production and Consulting people.
+What is behind this slide. Workable Business Hours and the target are pastes, because neither can be calculated in the pack: the first needs each group's headcount and who is part time, the second is set per person and averaged up. The over or under reading and the leave share are calculated and reproduce the report's own columns exactly. The three month history sits on the Utilisation tab at rows 120 to 164, with two check rows against the report's Grand Total.
+A correction to earlier versions of this pack. It divided billable hours by hours actually worked, leaving leave out of the sum, which put Support at 99.5 per cent and made it look like a coding error. It was not.
+OT and TIL is on the report but is not in the pack. Its August figure for Support reads 365.62, which cannot be hours in a month, so that column needs checking on the source sheet before anybody quotes it.</a:t>
             </a:r>
             <a:endParaRPr lang="en-US" dirty="0"/>
           </a:p>
@@ -2195,12 +2195,17 @@
           <a:p>
             <a:r>
               <a:rPr lang="en-US" dirty="0"/>
-              <a:t>Support and the company, same basis.
-Support 91.2% against an 88.0% target, 3.2% over, on 2,338 available hours. It has cleared its target in all three closed months.
-The company 71.8% against 80.9%, 9.0% under. The company target moves a little month to month because it is an average over whoever was in the report that month, not a fixed number.
-Leave took 17.8% of available hours this month against 7.5% in August. September is a heavy leave month and that is most of the movement in the company figure.
-A correction to earlier versions of this pack. It divided billable hours by hours actually worked, leaving leave out of the sum, which put Support at 99.5 per cent and made it look like a coding error. It was not. On the report's own basis Support is 91.2% and the figure is sound.
-OT and TIL is on the report but is not in the pack. Its August figure for Support reads 365.62, which cannot be hours in a month, so that column needs checking on the source sheet before anybody quotes it.</a:t>
+              <a:t>How each department spent its hours in September 2026.
+Read the bars as a mix, not as a size. Each one is scaled to that department's own total, because Support works around a hundred times the hours Integration does and on a straight scale four of the five departments disappear. The number on each segment is the real hours.
+Support: 2,132 hours on jobs, 11 not on jobs, 218 leave. 99.5% of worked hours were billable.
+Events: 241 hours on jobs, 249 not on jobs, 333 leave. 49.1% of worked hours were billable.
+Video: 25 hours on jobs, 8 not on jobs, 0 leave. 76.0% of worked hours were billable.
+Integration: 10 hours on jobs, 0 not on jobs, 0 leave. 100.0% of worked hours were billable.
+Consulting: 31 hours on jobs, 84 not on jobs, 53 leave. 26.8% of worked hours were billable.
+Across the five departments, 2,437 hours on jobs out of 2,789 worked.
+On the Support bar: the small slice of non-billable time comes from the regrouping, not from bad coding. The monthly report shows Support with no non-billable hours in September 2026. This view regroups by the job the work was for, so a little of other people's non-billable time lands here.
+Events is the real operational issue: 333 hours of leave on a small team takes out most of the month's capacity.
+And the prize. Support earns about 48 of margin on every hour it bills. Five more points of billable time across Support and Events, at the rate each already earns, is worth roughly 15,813 a month and costs nothing extra. It is the largest controllable item in this pack.</a:t>
             </a:r>
             <a:endParaRPr lang="en-US" dirty="0"/>
           </a:p>
@@ -2288,12 +2293,11 @@
           <a:p>
             <a:r>
               <a:rPr lang="en-US" dirty="0"/>
-              <a:t>The utilisation working for the two big cost centres, straight off the pack.
-The top three rows set the month: working days, and working hours at eight hours a day. Every FTE figure divides into that.
-For each cost centre the sheet holds billable hours, non-billable hours and leave, then two calculated lines. The percentage here is the billable share of the hours actually worked, which is not the same as the Chargeable per cent on the slide before: this one leaves leave out of the sum, your report keeps it in. Both are on the tab and each is labelled for what it is. FTE is billable plus non-billable divided by the month's working hours.
-Support: 2,132 billable hours on 12.2 FTE. The 11 of non-billable time shown here is an artefact of the grouping, not a coding error. The monthly report shows Support with no non-billable hours at all in September 2026; this tab regroups by the job the work was for, which moves a small amount of other people's non-billable time into Support.
-Events: 49.1% utilisation on 2.8 FTE, with 333 hours of leave. That is the genuine operational issue on this page. The people were paid for, the work was not there.
-Three months sit side by side so the board reads a trend, not one month in isolation.</a:t>
+              <a:t>The hours mix for September 2026, rolled up to the three departments the P&amp;L is built on.
+Production is Events and Video together. Consulting is Integration and Consulting together. Support stands alone.
+Read each bar as a mix, not a size. Each is scaled to its own total, because Support works far more hours than the other two combined.
+The pattern is the whole argument of this pack. Support is almost entirely billable and it is the only department that covers its costs. Production and Consulting both spend roughly half their paid hours, or more, on work no customer pays for, and both lose money.
+Support reads 91.2% on the monthly report's own basis, which counts leave against it. That is the figure to quote in the room.</a:t>
             </a:r>
             <a:endParaRPr lang="en-US" dirty="0"/>
           </a:p>
@@ -2381,11 +2385,7 @@
           <a:p>
             <a:r>
               <a:rPr lang="en-US" dirty="0"/>
-              <a:t>The three small cost centres.
-Video: 76.0% utilisation on 0.18 FTE. 24.5 billable hours in the month.
-Integration: 100.0% on 0.05 FTE. The hundred per cent is arithmetic, not performance. 9.5 billable hours and no non-billable time booked at all. Integration's revenue this month came from resold equipment, not from our hours, which is why the money and the hours do not match.
-Consulting: 26.8% on 0.65 FTE. 84 hours into work we cannot bill against 31 we can, plus 53 hours of leave. Three months of that pattern, against running costs that have not moved, is the clearest case in the pack for a decision.
-A percentage on nine or twenty four hours is not a management number. Read the hours column.</a:t>
+              <a:t>Three months are closed and the remaining nine are still at original budget. That is the decision in front of the board.</a:t>
             </a:r>
             <a:endParaRPr lang="en-US" dirty="0"/>
           </a:p>
@@ -2473,17 +2473,11 @@
           <a:p>
             <a:r>
               <a:rPr lang="en-US" dirty="0"/>
-              <a:t>How each department spent its hours in September 2026.
-Read the bars as a mix, not as a size. Each one is scaled to that department's own total, because Support works around a hundred times the hours Integration does and on a straight scale four of the five departments disappear. The number on each segment is the real hours.
-Support: 2,132 hours on jobs, 11 not on jobs, 218 leave. 99.5% of worked hours were billable.
-Events: 241 hours on jobs, 249 not on jobs, 333 leave. 49.1% of worked hours were billable.
-Video: 25 hours on jobs, 8 not on jobs, 0 leave. 76.0% of worked hours were billable.
-Integration: 10 hours on jobs, 0 not on jobs, 0 leave. 100.0% of worked hours were billable.
-Consulting: 31 hours on jobs, 84 not on jobs, 53 leave. 26.8% of worked hours were billable.
-Across the five departments, 2,437 hours on jobs out of 2,789 worked.
-On the Support bar: the small slice of non-billable time comes from the regrouping, not from bad coding. The monthly report shows Support with no non-billable hours in September 2026. This view regroups by the job the work was for, so a little of other people's non-billable time lands here.
-Events is the real operational issue: 333 hours of leave on a small team takes out most of the month's capacity.
-And the prize. Support earns about 48 of margin on every hour it bills. Five more points of billable time across Support and Events, at the rate each already earns, is worth roughly 15,813 a month and costs nothing extra. It is the largest controllable item in this pack.</a:t>
+              <a:t>Revenue by month, actual for the three closed months and original budget for the rest.
+Q1 actual 1,624,460 against a budget of 1,996,110, behind by 371,650.
+The nine months from October are still at the budget set before the year started. October is budgeted at 950,416, higher than any month we have delivered.
+Two things for the board. The Q1 variance is concentrated in Consulting and Video, which were budgeted on a resourcing level that does not exist. And the margin assumption in the budget is above what the business has delivered for two years, so even a month that hits the revenue number will miss the profit number.
+My recommendation is a rolling forecast from Q2, rebuilding Consulting around actual capacity and resetting gross margin to delivered rates. December should stay as budgeted: the business closes for two weeks and the loss is real.</a:t>
             </a:r>
             <a:endParaRPr lang="en-US" dirty="0"/>
           </a:p>
@@ -2666,11 +2660,10 @@
           <a:p>
             <a:r>
               <a:rPr lang="en-US" dirty="0"/>
-              <a:t>The hours mix for September 2026, rolled up to the three departments the P&amp;L is built on.
-Production is Events and Video together. Consulting is Integration and Consulting together. Support stands alone.
-Read each bar as a mix, not a size. Each is scaled to its own total, because Support works far more hours than the other two combined.
-The pattern is the whole argument of this pack. Support is almost entirely billable and it is the only department that covers its costs. Production and Consulting both spend roughly half their paid hours, or more, on work no customer pays for, and both lose money.
-Support reads 91.2% on the monthly report's own basis, which counts leave against it. That is the figure to quote in the room.</a:t>
+              <a:t>Seven actions, each with an owner and a date.
+The first two matter most: reforecasting on margin rather than revenue, and testing the overhead keys. Everything else in this pack follows from those two numbers.
+The Consulting decision cannot keep being deferred; it has carried running costs against almost no fees for three months.
+The cash action is the only one that produces money this quarter, and the utilisation action is the largest controllable item.</a:t>
             </a:r>
             <a:endParaRPr lang="en-US" dirty="0"/>
           </a:p>
@@ -2758,7 +2751,7 @@
           <a:p>
             <a:r>
               <a:rPr lang="en-US" dirty="0"/>
-              <a:t>Three months are closed and the remaining nine are still at original budget. That is the decision in front of the board.</a:t>
+              <a:t>Close on the two numbers that matter: break even needs 549,372 a month at our real margin, and we are running at 541,487. Everything else in the pack is detail underneath that.</a:t>
             </a:r>
             <a:endParaRPr lang="en-US" dirty="0"/>
           </a:p>
@@ -2782,277 +2775,6 @@
             <a:fld id="{F7021451-1387-4CA6-816F-3879F97B5CBC}" type="slidenum">
               <a:rPr lang="en-US"/>
               <a:t>31</a:t>
-            </a:fld>
-            <a:endParaRPr lang="en-US"/>
-          </a:p>
-        </p:txBody>
-      </p:sp>
-    </p:spTree>
-    <p:extLst>
-      <p:ext uri="{BB962C8B-B14F-4D97-AF65-F5344CB8AC3E}">
-        <p14:creationId xmlns:p14="http://schemas.microsoft.com/office/powerpoint/2010/main" val="1024086991"/>
-      </p:ext>
-    </p:extLst>
-  </p:cSld>
-  <p:clrMapOvr>
-    <a:masterClrMapping/>
-  </p:clrMapOvr>
-</p:notes>
-</file>
-
-<file path=ppt/notesSlides/notesSlide32.xml><?xml version="1.0" encoding="utf-8"?>
-<p:notes xmlns:a="http://schemas.openxmlformats.org/drawingml/2006/main" xmlns:r="http://schemas.openxmlformats.org/officeDocument/2006/relationships" xmlns:p="http://schemas.openxmlformats.org/presentationml/2006/main">
-  <p:cSld>
-    <p:spTree>
-      <p:nvGrpSpPr>
-        <p:cNvPr id="1" name=""/>
-        <p:cNvGrpSpPr/>
-        <p:nvPr/>
-      </p:nvGrpSpPr>
-      <p:grpSpPr>
-        <a:xfrm>
-          <a:off x="0" y="0"/>
-          <a:ext cx="0" cy="0"/>
-          <a:chOff x="0" y="0"/>
-          <a:chExt cx="0" cy="0"/>
-        </a:xfrm>
-      </p:grpSpPr>
-      <p:sp>
-        <p:nvSpPr>
-          <p:cNvPr id="2" name="Slide Image Placeholder 1"/>
-          <p:cNvSpPr>
-            <a:spLocks noGrp="1" noRot="1" noChangeAspect="1"/>
-          </p:cNvSpPr>
-          <p:nvPr>
-            <p:ph type="sldImg"/>
-          </p:nvPr>
-        </p:nvSpPr>
-        <p:spPr/>
-      </p:sp>
-      <p:sp>
-        <p:nvSpPr>
-          <p:cNvPr id="3" name="Notes Placeholder 2"/>
-          <p:cNvSpPr>
-            <a:spLocks noGrp="1"/>
-          </p:cNvSpPr>
-          <p:nvPr>
-            <p:ph type="body" idx="1"/>
-          </p:nvPr>
-        </p:nvSpPr>
-        <p:spPr/>
-        <p:txBody>
-          <a:bodyPr/>
-          <a:lstStyle/>
-          <a:p>
-            <a:r>
-              <a:rPr lang="en-US" dirty="0"/>
-              <a:t>Revenue by month, actual for the three closed months and original budget for the rest.
-Q1 actual 1,624,460 against a budget of 1,996,110, behind by 371,650.
-The nine months from October are still at the budget set before the year started. October is budgeted at 950,416, higher than any month we have delivered.
-Two things for the board. The Q1 variance is concentrated in Consulting and Video, which were budgeted on a resourcing level that does not exist. And the margin assumption in the budget is above what the business has delivered for two years, so even a month that hits the revenue number will miss the profit number.
-My recommendation is a rolling forecast from Q2, rebuilding Consulting around actual capacity and resetting gross margin to delivered rates. December should stay as budgeted: the business closes for two weeks and the loss is real.</a:t>
-            </a:r>
-            <a:endParaRPr lang="en-US" dirty="0"/>
-          </a:p>
-        </p:txBody>
-      </p:sp>
-      <p:sp>
-        <p:nvSpPr>
-          <p:cNvPr id="4" name="Slide Number Placeholder 3"/>
-          <p:cNvSpPr>
-            <a:spLocks noGrp="1"/>
-          </p:cNvSpPr>
-          <p:nvPr>
-            <p:ph type="sldNum" sz="quarter" idx="10"/>
-          </p:nvPr>
-        </p:nvSpPr>
-        <p:spPr/>
-        <p:txBody>
-          <a:bodyPr/>
-          <a:lstStyle/>
-          <a:p>
-            <a:fld id="{F7021451-1387-4CA6-816F-3879F97B5CBC}" type="slidenum">
-              <a:rPr lang="en-US"/>
-              <a:t>32</a:t>
-            </a:fld>
-            <a:endParaRPr lang="en-US"/>
-          </a:p>
-        </p:txBody>
-      </p:sp>
-    </p:spTree>
-    <p:extLst>
-      <p:ext uri="{BB962C8B-B14F-4D97-AF65-F5344CB8AC3E}">
-        <p14:creationId xmlns:p14="http://schemas.microsoft.com/office/powerpoint/2010/main" val="1024086991"/>
-      </p:ext>
-    </p:extLst>
-  </p:cSld>
-  <p:clrMapOvr>
-    <a:masterClrMapping/>
-  </p:clrMapOvr>
-</p:notes>
-</file>
-
-<file path=ppt/notesSlides/notesSlide33.xml><?xml version="1.0" encoding="utf-8"?>
-<p:notes xmlns:a="http://schemas.openxmlformats.org/drawingml/2006/main" xmlns:r="http://schemas.openxmlformats.org/officeDocument/2006/relationships" xmlns:p="http://schemas.openxmlformats.org/presentationml/2006/main">
-  <p:cSld>
-    <p:spTree>
-      <p:nvGrpSpPr>
-        <p:cNvPr id="1" name=""/>
-        <p:cNvGrpSpPr/>
-        <p:nvPr/>
-      </p:nvGrpSpPr>
-      <p:grpSpPr>
-        <a:xfrm>
-          <a:off x="0" y="0"/>
-          <a:ext cx="0" cy="0"/>
-          <a:chOff x="0" y="0"/>
-          <a:chExt cx="0" cy="0"/>
-        </a:xfrm>
-      </p:grpSpPr>
-      <p:sp>
-        <p:nvSpPr>
-          <p:cNvPr id="2" name="Slide Image Placeholder 1"/>
-          <p:cNvSpPr>
-            <a:spLocks noGrp="1" noRot="1" noChangeAspect="1"/>
-          </p:cNvSpPr>
-          <p:nvPr>
-            <p:ph type="sldImg"/>
-          </p:nvPr>
-        </p:nvSpPr>
-        <p:spPr/>
-      </p:sp>
-      <p:sp>
-        <p:nvSpPr>
-          <p:cNvPr id="3" name="Notes Placeholder 2"/>
-          <p:cNvSpPr>
-            <a:spLocks noGrp="1"/>
-          </p:cNvSpPr>
-          <p:nvPr>
-            <p:ph type="body" idx="1"/>
-          </p:nvPr>
-        </p:nvSpPr>
-        <p:spPr/>
-        <p:txBody>
-          <a:bodyPr/>
-          <a:lstStyle/>
-          <a:p>
-            <a:r>
-              <a:rPr lang="en-US" dirty="0"/>
-              <a:t>Seven actions, each with an owner and a date.
-The first two matter most: reforecasting on margin rather than revenue, and testing the overhead keys. Everything else in this pack follows from those two numbers.
-The Consulting decision cannot keep being deferred; it has carried running costs against almost no fees for three months.
-The cash action is the only one that produces money this quarter, and the utilisation action is the largest controllable item.</a:t>
-            </a:r>
-            <a:endParaRPr lang="en-US" dirty="0"/>
-          </a:p>
-        </p:txBody>
-      </p:sp>
-      <p:sp>
-        <p:nvSpPr>
-          <p:cNvPr id="4" name="Slide Number Placeholder 3"/>
-          <p:cNvSpPr>
-            <a:spLocks noGrp="1"/>
-          </p:cNvSpPr>
-          <p:nvPr>
-            <p:ph type="sldNum" sz="quarter" idx="10"/>
-          </p:nvPr>
-        </p:nvSpPr>
-        <p:spPr/>
-        <p:txBody>
-          <a:bodyPr/>
-          <a:lstStyle/>
-          <a:p>
-            <a:fld id="{F7021451-1387-4CA6-816F-3879F97B5CBC}" type="slidenum">
-              <a:rPr lang="en-US"/>
-              <a:t>33</a:t>
-            </a:fld>
-            <a:endParaRPr lang="en-US"/>
-          </a:p>
-        </p:txBody>
-      </p:sp>
-    </p:spTree>
-    <p:extLst>
-      <p:ext uri="{BB962C8B-B14F-4D97-AF65-F5344CB8AC3E}">
-        <p14:creationId xmlns:p14="http://schemas.microsoft.com/office/powerpoint/2010/main" val="1024086991"/>
-      </p:ext>
-    </p:extLst>
-  </p:cSld>
-  <p:clrMapOvr>
-    <a:masterClrMapping/>
-  </p:clrMapOvr>
-</p:notes>
-</file>
-
-<file path=ppt/notesSlides/notesSlide34.xml><?xml version="1.0" encoding="utf-8"?>
-<p:notes xmlns:a="http://schemas.openxmlformats.org/drawingml/2006/main" xmlns:r="http://schemas.openxmlformats.org/officeDocument/2006/relationships" xmlns:p="http://schemas.openxmlformats.org/presentationml/2006/main">
-  <p:cSld>
-    <p:spTree>
-      <p:nvGrpSpPr>
-        <p:cNvPr id="1" name=""/>
-        <p:cNvGrpSpPr/>
-        <p:nvPr/>
-      </p:nvGrpSpPr>
-      <p:grpSpPr>
-        <a:xfrm>
-          <a:off x="0" y="0"/>
-          <a:ext cx="0" cy="0"/>
-          <a:chOff x="0" y="0"/>
-          <a:chExt cx="0" cy="0"/>
-        </a:xfrm>
-      </p:grpSpPr>
-      <p:sp>
-        <p:nvSpPr>
-          <p:cNvPr id="2" name="Slide Image Placeholder 1"/>
-          <p:cNvSpPr>
-            <a:spLocks noGrp="1" noRot="1" noChangeAspect="1"/>
-          </p:cNvSpPr>
-          <p:nvPr>
-            <p:ph type="sldImg"/>
-          </p:nvPr>
-        </p:nvSpPr>
-        <p:spPr/>
-      </p:sp>
-      <p:sp>
-        <p:nvSpPr>
-          <p:cNvPr id="3" name="Notes Placeholder 2"/>
-          <p:cNvSpPr>
-            <a:spLocks noGrp="1"/>
-          </p:cNvSpPr>
-          <p:nvPr>
-            <p:ph type="body" idx="1"/>
-          </p:nvPr>
-        </p:nvSpPr>
-        <p:spPr/>
-        <p:txBody>
-          <a:bodyPr/>
-          <a:lstStyle/>
-          <a:p>
-            <a:r>
-              <a:rPr lang="en-US" dirty="0"/>
-              <a:t>Close on the two numbers that matter: break even needs 549,372 a month at our real margin, and we are running at 541,487. Everything else in the pack is detail underneath that.</a:t>
-            </a:r>
-            <a:endParaRPr lang="en-US" dirty="0"/>
-          </a:p>
-        </p:txBody>
-      </p:sp>
-      <p:sp>
-        <p:nvSpPr>
-          <p:cNvPr id="4" name="Slide Number Placeholder 3"/>
-          <p:cNvSpPr>
-            <a:spLocks noGrp="1"/>
-          </p:cNvSpPr>
-          <p:nvPr>
-            <p:ph type="sldNum" sz="quarter" idx="10"/>
-          </p:nvPr>
-        </p:nvSpPr>
-        <p:spPr/>
-        <p:txBody>
-          <a:bodyPr/>
-          <a:lstStyle/>
-          <a:p>
-            <a:fld id="{F7021451-1387-4CA6-816F-3879F97B5CBC}" type="slidenum">
-              <a:rPr lang="en-US"/>
-              <a:t>34</a:t>
             </a:fld>
             <a:endParaRPr lang="en-US"/>
           </a:p>
@@ -10623,7 +10345,7 @@
                   <a:srgbClr val="242C39"/>
                 </a:solidFill>
               </a:rPr>
-              <a:t>Chargeable per cent, Production and Consulting</a:t>
+              <a:t>Chargeable per cent, Sep 26</a:t>
             </a:r>
             <a:endParaRPr lang="en-US" sz="2700" dirty="0"/>
           </a:p>
@@ -10631,7 +10353,7 @@
       </p:sp>
       <p:pic>
         <p:nvPicPr>
-          <p:cNvPr id="4" name="snip util_her_a" descr="/home/user/Claude/deck/snips/util_her_a.png">    </p:cNvPr>
+          <p:cNvPr id="4" name="snip util_month" descr="/home/user/Claude/deck/snips/util_month.png">    </p:cNvPr>
           <p:cNvPicPr>
             <a:picLocks noChangeAspect="1"/>
           </p:cNvPicPr>
@@ -10645,8 +10367,8 @@
         </p:blipFill>
         <p:spPr>
           <a:xfrm>
-            <a:off x="977022" y="1444752"/>
-            <a:ext cx="4629635" cy="3090672"/>
+            <a:off x="502920" y="1389888"/>
+            <a:ext cx="8138160" cy="1385122"/>
           </a:xfrm>
           <a:prstGeom prst="rect">
             <a:avLst/>
@@ -10661,8 +10383,8 @@
         </p:nvSpPr>
         <p:spPr>
           <a:xfrm>
-            <a:off x="502920" y="4608576"/>
-            <a:ext cx="5577840" cy="237744"/>
+            <a:off x="502920" y="2848162"/>
+            <a:ext cx="8138160" cy="237744"/>
           </a:xfrm>
           <a:prstGeom prst="rect">
             <a:avLst/>
@@ -10683,7 +10405,7 @@
                   <a:srgbClr val="6B7585"/>
                 </a:solidFill>
               </a:rPr>
-              <a:t>Snipped from the Financial Controller Pack, Utilisation tab, Chargeable per cent against target, the Utilisation Report basis.</a:t>
+              <a:t>Snipped from the Financial Controller Pack, Utilisation tab, chargeable per cent against target, the Utilisation Report basis.</a:t>
             </a:r>
             <a:endParaRPr lang="en-US" sz="800" dirty="0"/>
           </a:p>
@@ -10697,8 +10419,8 @@
         </p:nvSpPr>
         <p:spPr>
           <a:xfrm>
-            <a:off x="6263640" y="1463040"/>
-            <a:ext cx="2377440" cy="3154680"/>
+            <a:off x="502920" y="3675888"/>
+            <a:ext cx="8138160" cy="950976"/>
           </a:xfrm>
           <a:prstGeom prst="rect">
             <a:avLst/>
@@ -10717,8 +10439,8 @@
         </p:nvSpPr>
         <p:spPr>
           <a:xfrm>
-            <a:off x="6446520" y="1627632"/>
-            <a:ext cx="2011680" cy="228600"/>
+            <a:off x="685800" y="3758184"/>
+            <a:ext cx="2743200" cy="164592"/>
           </a:xfrm>
           <a:prstGeom prst="rect">
             <a:avLst/>
@@ -10734,14 +10456,14 @@
               <a:buNone/>
             </a:pPr>
             <a:r>
-              <a:rPr lang="en-US" sz="900" b="1" spc="180" kern="0" dirty="0">
+              <a:rPr lang="en-US" sz="850" b="1" spc="180" kern="0" dirty="0">
                 <a:solidFill>
                   <a:srgbClr val="005358"/>
                 </a:solidFill>
               </a:rPr>
               <a:t>COMMENTARY</a:t>
             </a:r>
-            <a:endParaRPr lang="en-US" sz="900" dirty="0"/>
+            <a:endParaRPr lang="en-US" sz="850" dirty="0"/>
           </a:p>
         </p:txBody>
       </p:sp>
@@ -10753,8 +10475,8 @@
         </p:nvSpPr>
         <p:spPr>
           <a:xfrm>
-            <a:off x="6446520" y="1901952"/>
-            <a:ext cx="2011680" cy="2551176"/>
+            <a:off x="685800" y="3941064"/>
+            <a:ext cx="3703320" cy="621792"/>
           </a:xfrm>
           <a:prstGeom prst="rect">
             <a:avLst/>
@@ -10770,107 +10492,110 @@
           <a:p>
             <a:pPr marL="342900" indent="-342900">
               <a:lnSpc>
-                <a:spcPts val="1000"/>
+                <a:spcPts val="1050"/>
               </a:lnSpc>
               <a:spcAft>
-                <a:spcPts val="400"/>
+                <a:spcPts val="300"/>
               </a:spcAft>
               <a:buSzPct val="100000"/>
               <a:buChar char="•"/>
             </a:pPr>
             <a:r>
-              <a:rPr lang="en-US" sz="800" dirty="0">
+              <a:rPr lang="en-US" sz="850" dirty="0">
                 <a:solidFill>
                   <a:srgbClr val="3A4453"/>
                 </a:solidFill>
               </a:rPr>
-              <a:t>This is the monthly Utilisation Report's own calculation. Billable hours divided by the hours each person was available for, so leave and public holidays count against it.</a:t>
-            </a:r>
-            <a:endParaRPr lang="en-US" sz="800" dirty="0"/>
+              <a:t>The monthly report's own calculation: billable hours divided by the hours each person was available for, so leave counts against it.</a:t>
+            </a:r>
+            <a:endParaRPr lang="en-US" sz="850" dirty="0"/>
           </a:p>
           <a:p>
             <a:pPr marL="342900" indent="-342900">
               <a:lnSpc>
-                <a:spcPts val="1000"/>
+                <a:spcPts val="1050"/>
               </a:lnSpc>
               <a:spcAft>
-                <a:spcPts val="400"/>
+                <a:spcPts val="300"/>
               </a:spcAft>
               <a:buSzPct val="100000"/>
               <a:buChar char="•"/>
             </a:pPr>
             <a:r>
-              <a:rPr lang="en-US" sz="800" dirty="0">
+              <a:rPr lang="en-US" sz="850" dirty="0">
                 <a:solidFill>
                   <a:srgbClr val="3A4453"/>
                 </a:solidFill>
               </a:rPr>
-              <a:t>Production 30% against a 67% target. That is 36.8% under, the worst gap in the business.</a:t>
-            </a:r>
-            <a:endParaRPr lang="en-US" sz="800" dirty="0"/>
-          </a:p>
+              <a:t>Support 91% against an 88% target, 3.2% over. The only group ahead.</a:t>
+            </a:r>
+            <a:endParaRPr lang="en-US" sz="850" dirty="0"/>
+          </a:p>
+        </p:txBody>
+      </p:sp>
+      <p:sp>
+        <p:nvSpPr>
+          <p:cNvPr id="9" name="Text 6"/>
+          <p:cNvSpPr txBox="1"/>
+          <p:nvPr/>
+        </p:nvSpPr>
+        <p:spPr>
+          <a:xfrm>
+            <a:off x="4663440" y="3941064"/>
+            <a:ext cx="3703320" cy="621792"/>
+          </a:xfrm>
+          <a:prstGeom prst="rect">
+            <a:avLst/>
+          </a:prstGeom>
+          <a:noFill/>
+          <a:ln/>
+        </p:spPr>
+        <p:txBody>
+          <a:bodyPr wrap="square" lIns="0" tIns="0" rIns="0" bIns="0" rtlCol="0" anchor="t">
+            <a:normAutofit/>
+          </a:bodyPr>
+          <a:lstStyle/>
           <a:p>
             <a:pPr marL="342900" indent="-342900">
               <a:lnSpc>
-                <a:spcPts val="1000"/>
+                <a:spcPts val="1050"/>
               </a:lnSpc>
               <a:spcAft>
-                <a:spcPts val="400"/>
+                <a:spcPts val="300"/>
               </a:spcAft>
               <a:buSzPct val="100000"/>
               <a:buChar char="•"/>
             </a:pPr>
             <a:r>
-              <a:rPr lang="en-US" sz="800" dirty="0">
+              <a:rPr lang="en-US" sz="850" dirty="0">
                 <a:solidFill>
                   <a:srgbClr val="3A4453"/>
                 </a:solidFill>
               </a:rPr>
-              <a:t>Leave took 38% of Production's available hours this month. That is the single biggest cause.</a:t>
-            </a:r>
-            <a:endParaRPr lang="en-US" sz="800" dirty="0"/>
+              <a:t>Production 30% against 67%. Leave took 38% of its available hours.</a:t>
+            </a:r>
+            <a:endParaRPr lang="en-US" sz="850" dirty="0"/>
           </a:p>
           <a:p>
             <a:pPr marL="342900" indent="-342900">
               <a:lnSpc>
-                <a:spcPts val="1000"/>
+                <a:spcPts val="1050"/>
               </a:lnSpc>
               <a:spcAft>
-                <a:spcPts val="400"/>
+                <a:spcPts val="300"/>
               </a:spcAft>
               <a:buSzPct val="100000"/>
               <a:buChar char="•"/>
             </a:pPr>
             <a:r>
-              <a:rPr lang="en-US" sz="800" dirty="0">
+              <a:rPr lang="en-US" sz="850" dirty="0">
                 <a:solidFill>
                   <a:srgbClr val="3A4453"/>
                 </a:solidFill>
               </a:rPr>
-              <a:t>Consulting 23% against 50%, so 27.0% under on a target already set low.</a:t>
-            </a:r>
-            <a:endParaRPr lang="en-US" sz="800" dirty="0"/>
-          </a:p>
-          <a:p>
-            <a:pPr marL="342900" indent="-342900">
-              <a:lnSpc>
-                <a:spcPts val="1000"/>
-              </a:lnSpc>
-              <a:spcAft>
-                <a:spcPts val="400"/>
-              </a:spcAft>
-              <a:buSzPct val="100000"/>
-              <a:buChar char="•"/>
-            </a:pPr>
-            <a:r>
-              <a:rPr lang="en-US" sz="800" dirty="0">
-                <a:solidFill>
-                  <a:srgbClr val="3A4453"/>
-                </a:solidFill>
-              </a:rPr>
-              <a:t>Three person groups, not five. Nobody is assigned to Video or Integration; their work is done by Production and Consulting people.</a:t>
-            </a:r>
-            <a:endParaRPr lang="en-US" sz="800" dirty="0"/>
+              <a:t>The company is 72% against 81%, so 9.0% under.</a:t>
+            </a:r>
+            <a:endParaRPr lang="en-US" sz="850" dirty="0"/>
           </a:p>
         </p:txBody>
       </p:sp>
@@ -11010,7 +10735,7 @@
                   <a:srgbClr val="242C39"/>
                 </a:solidFill>
               </a:rPr>
-              <a:t>Chargeable per cent, Support and the company</a:t>
+              <a:t>How each department spent its hours, Sep 26</a:t>
             </a:r>
             <a:endParaRPr lang="en-US" sz="2700" dirty="0"/>
           </a:p>
@@ -11018,7 +10743,7 @@
       </p:sp>
       <p:pic>
         <p:nvPicPr>
-          <p:cNvPr id="4" name="snip util_her_b" descr="/home/user/Claude/deck/snips/util_her_b.png">    </p:cNvPr>
+          <p:cNvPr id="4" name="snip util_chart" descr="/home/user/Claude/deck/snips/util_chart.png">    </p:cNvPr>
           <p:cNvPicPr>
             <a:picLocks noChangeAspect="1"/>
           </p:cNvPicPr>
@@ -11032,8 +10757,8 @@
         </p:blipFill>
         <p:spPr>
           <a:xfrm>
-            <a:off x="977022" y="1444752"/>
-            <a:ext cx="4629635" cy="3090672"/>
+            <a:off x="502920" y="1444752"/>
+            <a:ext cx="5577840" cy="3045909"/>
           </a:xfrm>
           <a:prstGeom prst="rect">
             <a:avLst/>
@@ -11048,7 +10773,7 @@
         </p:nvSpPr>
         <p:spPr>
           <a:xfrm>
-            <a:off x="502920" y="4608576"/>
+            <a:off x="502920" y="4563813"/>
             <a:ext cx="5577840" cy="237744"/>
           </a:xfrm>
           <a:prstGeom prst="rect">
@@ -11070,7 +10795,7 @@
                   <a:srgbClr val="6B7585"/>
                 </a:solidFill>
               </a:rPr>
-              <a:t>Snipped from the Financial Controller Pack, Utilisation tab, Chargeable per cent against target, the Utilisation Report basis.</a:t>
+              <a:t>Snipped from the Financial Controller Pack, Utilisation tab, hours by department, each bar scaled to its own total.</a:t>
             </a:r>
             <a:endParaRPr lang="en-US" sz="800" dirty="0"/>
           </a:p>
@@ -11157,7 +10882,7 @@
           <a:p>
             <a:pPr marL="342900" indent="-342900">
               <a:lnSpc>
-                <a:spcPts val="1200"/>
+                <a:spcPts val="1050"/>
               </a:lnSpc>
               <a:spcAft>
                 <a:spcPts val="400"/>
@@ -11166,19 +10891,19 @@
               <a:buChar char="•"/>
             </a:pPr>
             <a:r>
-              <a:rPr lang="en-US" sz="950" dirty="0">
+              <a:rPr lang="en-US" sz="850" dirty="0">
                 <a:solidFill>
                   <a:srgbClr val="3A4453"/>
                 </a:solidFill>
               </a:rPr>
-              <a:t>Support 91% against an 88% target, so it is 3.2% over. The only group ahead of its own target.</a:t>
-            </a:r>
-            <a:endParaRPr lang="en-US" sz="950" dirty="0"/>
+              <a:t>Each bar is scaled to that department's own hours, so you can compare the mix. Support works about a hundred times the hours Integration does.</a:t>
+            </a:r>
+            <a:endParaRPr lang="en-US" sz="850" dirty="0"/>
           </a:p>
           <a:p>
             <a:pPr marL="342900" indent="-342900">
               <a:lnSpc>
-                <a:spcPts val="1200"/>
+                <a:spcPts val="1050"/>
               </a:lnSpc>
               <a:spcAft>
                 <a:spcPts val="400"/>
@@ -11187,19 +10912,19 @@
               <a:buChar char="•"/>
             </a:pPr>
             <a:r>
-              <a:rPr lang="en-US" sz="950" dirty="0">
+              <a:rPr lang="en-US" sz="850" dirty="0">
                 <a:solidFill>
                   <a:srgbClr val="3A4453"/>
                 </a:solidFill>
               </a:rPr>
-              <a:t>It has been over target all three months: 1.4%, 5.8% and 3.2%.</a:t>
-            </a:r>
-            <a:endParaRPr lang="en-US" sz="950" dirty="0"/>
+              <a:t>Support is almost entirely billable, which is why it is the only department that makes money.</a:t>
+            </a:r>
+            <a:endParaRPr lang="en-US" sz="850" dirty="0"/>
           </a:p>
           <a:p>
             <a:pPr marL="342900" indent="-342900">
               <a:lnSpc>
-                <a:spcPts val="1200"/>
+                <a:spcPts val="1050"/>
               </a:lnSpc>
               <a:spcAft>
                 <a:spcPts val="400"/>
@@ -11208,19 +10933,19 @@
               <a:buChar char="•"/>
             </a:pPr>
             <a:r>
-              <a:rPr lang="en-US" sz="950" dirty="0">
+              <a:rPr lang="en-US" sz="850" dirty="0">
                 <a:solidFill>
                   <a:srgbClr val="3A4453"/>
                 </a:solidFill>
               </a:rPr>
-              <a:t>The company is 72% against 81%, which is 9.0% under.</a:t>
-            </a:r>
-            <a:endParaRPr lang="en-US" sz="950" dirty="0"/>
+              <a:t>Events put 333 hours into leave and only 241 onto jobs. The people are there, the work is not.</a:t>
+            </a:r>
+            <a:endParaRPr lang="en-US" sz="850" dirty="0"/>
           </a:p>
           <a:p>
             <a:pPr marL="342900" indent="-342900">
               <a:lnSpc>
-                <a:spcPts val="1200"/>
+                <a:spcPts val="1050"/>
               </a:lnSpc>
               <a:spcAft>
                 <a:spcPts val="400"/>
@@ -11229,19 +10954,19 @@
               <a:buChar char="•"/>
             </a:pPr>
             <a:r>
-              <a:rPr lang="en-US" sz="950" dirty="0">
+              <a:rPr lang="en-US" sz="850" dirty="0">
                 <a:solidFill>
                   <a:srgbClr val="3A4453"/>
                 </a:solidFill>
               </a:rPr>
-              <a:t>Leave took 18% of the company's available hours this month, against 7% in August.</a:t>
-            </a:r>
-            <a:endParaRPr lang="en-US" sz="950" dirty="0"/>
+              <a:t>Consulting put 84 hours into work we cannot bill against 31 we can.</a:t>
+            </a:r>
+            <a:endParaRPr lang="en-US" sz="850" dirty="0"/>
           </a:p>
           <a:p>
             <a:pPr marL="342900" indent="-342900">
               <a:lnSpc>
-                <a:spcPts val="1200"/>
+                <a:spcPts val="1050"/>
               </a:lnSpc>
               <a:spcAft>
                 <a:spcPts val="400"/>
@@ -11250,14 +10975,14 @@
               <a:buChar char="•"/>
             </a:pPr>
             <a:r>
-              <a:rPr lang="en-US" sz="950" dirty="0">
+              <a:rPr lang="en-US" sz="850" dirty="0">
                 <a:solidFill>
                   <a:srgbClr val="3A4453"/>
                 </a:solidFill>
               </a:rPr>
-              <a:t>Five more points across Support and Production is the cheapest money in this pack. It costs nothing extra.</a:t>
-            </a:r>
-            <a:endParaRPr lang="en-US" sz="950" dirty="0"/>
+              <a:t>We pay for every hour. We only bill the ones on jobs. The grey and light teal are the gap.</a:t>
+            </a:r>
+            <a:endParaRPr lang="en-US" sz="850" dirty="0"/>
           </a:p>
         </p:txBody>
       </p:sp>
@@ -11397,7 +11122,7 @@
                   <a:srgbClr val="242C39"/>
                 </a:solidFill>
               </a:rPr>
-              <a:t>Utilisation, Support and Events</a:t>
+              <a:t>Hours, the three departments, Sep 26</a:t>
             </a:r>
             <a:endParaRPr lang="en-US" sz="2700" dirty="0"/>
           </a:p>
@@ -11405,7 +11130,7 @@
       </p:sp>
       <p:pic>
         <p:nvPicPr>
-          <p:cNvPr id="4" name="snip util_pct_a" descr="/home/user/Claude/deck/snips/util_pct_a.png">    </p:cNvPr>
+          <p:cNvPr id="4" name="snip util_three" descr="/home/user/Claude/deck/snips/util_three.png">    </p:cNvPr>
           <p:cNvPicPr>
             <a:picLocks noChangeAspect="1"/>
           </p:cNvPicPr>
@@ -11420,7 +11145,7 @@
         <p:spPr>
           <a:xfrm>
             <a:off x="502920" y="1444752"/>
-            <a:ext cx="5577840" cy="2633447"/>
+            <a:ext cx="5577840" cy="2587417"/>
           </a:xfrm>
           <a:prstGeom prst="rect">
             <a:avLst/>
@@ -11435,7 +11160,7 @@
         </p:nvSpPr>
         <p:spPr>
           <a:xfrm>
-            <a:off x="502920" y="4151351"/>
+            <a:off x="502920" y="4105321"/>
             <a:ext cx="5577840" cy="237744"/>
           </a:xfrm>
           <a:prstGeom prst="rect">
@@ -11457,7 +11182,7 @@
                   <a:srgbClr val="6B7585"/>
                 </a:solidFill>
               </a:rPr>
-              <a:t>Snipped from the Financial Controller Pack, Utilisation tab, hours, utilisation per cent and FTE, July to September. The pack calls these two cost centres Onsite and Production.</a:t>
+              <a:t>Snipped from the Financial Controller Pack, Utilisation tab, hours rolled up to the three departments, each bar scaled to its own total.</a:t>
             </a:r>
             <a:endParaRPr lang="en-US" sz="800" dirty="0"/>
           </a:p>
@@ -11544,7 +11269,7 @@
           <a:p>
             <a:pPr marL="342900" indent="-342900">
               <a:lnSpc>
-                <a:spcPts val="1000"/>
+                <a:spcPts val="1050"/>
               </a:lnSpc>
               <a:spcAft>
                 <a:spcPts val="400"/>
@@ -11553,19 +11278,19 @@
               <a:buChar char="•"/>
             </a:pPr>
             <a:r>
-              <a:rPr lang="en-US" sz="800" dirty="0">
+              <a:rPr lang="en-US" sz="850" dirty="0">
                 <a:solidFill>
                   <a:srgbClr val="3A4453"/>
                 </a:solidFill>
               </a:rPr>
-              <a:t>This is the calculation itself. Hours worked, how many went on jobs, the percentage that gives, and the headcount those hours represent.</a:t>
-            </a:r>
-            <a:endParaRPr lang="en-US" sz="800" dirty="0"/>
+              <a:t>The same picture grouped the way the P&amp;L is. Production is Events and Video. Consulting is Integration and Consulting.</a:t>
+            </a:r>
+            <a:endParaRPr lang="en-US" sz="850" dirty="0"/>
           </a:p>
           <a:p>
             <a:pPr marL="342900" indent="-342900">
               <a:lnSpc>
-                <a:spcPts val="1000"/>
+                <a:spcPts val="1050"/>
               </a:lnSpc>
               <a:spcAft>
                 <a:spcPts val="400"/>
@@ -11574,19 +11299,19 @@
               <a:buChar char="•"/>
             </a:pPr>
             <a:r>
-              <a:rPr lang="en-US" sz="800" dirty="0">
+              <a:rPr lang="en-US" sz="850" dirty="0">
                 <a:solidFill>
                   <a:srgbClr val="3A4453"/>
                 </a:solidFill>
               </a:rPr>
-              <a:t>Utilisation per cent is billable hours divided by hours worked. Leave is left out, because nobody can bill leave.</a:t>
-            </a:r>
-            <a:endParaRPr lang="en-US" sz="800" dirty="0"/>
+              <a:t>Production put 265 hours onto jobs and 257 onto work we cannot bill, with 333 hours of leave on top.</a:t>
+            </a:r>
+            <a:endParaRPr lang="en-US" sz="850" dirty="0"/>
           </a:p>
           <a:p>
             <a:pPr marL="342900" indent="-342900">
               <a:lnSpc>
-                <a:spcPts val="1000"/>
+                <a:spcPts val="1050"/>
               </a:lnSpc>
               <a:spcAft>
                 <a:spcPts val="400"/>
@@ -11595,19 +11320,19 @@
               <a:buChar char="•"/>
             </a:pPr>
             <a:r>
-              <a:rPr lang="en-US" sz="800" dirty="0">
+              <a:rPr lang="en-US" sz="850" dirty="0">
                 <a:solidFill>
                   <a:srgbClr val="3A4453"/>
                 </a:solidFill>
               </a:rPr>
-              <a:t>FTE is hours worked divided by the working hours in the month, so 1.0 is one full time person.</a:t>
-            </a:r>
-            <a:endParaRPr lang="en-US" sz="800" dirty="0"/>
+              <a:t>Consulting put 40 onto jobs against 84 we cannot bill. Two thirds of its paid hours earn nothing.</a:t>
+            </a:r>
+            <a:endParaRPr lang="en-US" sz="850" dirty="0"/>
           </a:p>
           <a:p>
             <a:pPr marL="342900" indent="-342900">
               <a:lnSpc>
-                <a:spcPts val="1000"/>
+                <a:spcPts val="1050"/>
               </a:lnSpc>
               <a:spcAft>
                 <a:spcPts val="400"/>
@@ -11616,19 +11341,19 @@
               <a:buChar char="•"/>
             </a:pPr>
             <a:r>
-              <a:rPr lang="en-US" sz="800" dirty="0">
+              <a:rPr lang="en-US" sz="850" dirty="0">
                 <a:solidFill>
                   <a:srgbClr val="3A4453"/>
                 </a:solidFill>
               </a:rPr>
-              <a:t>This page is the hours record, grouped by the job the work was for. The Chargeable per cent the monthly report uses is on the slide before.</a:t>
-            </a:r>
-            <a:endParaRPr lang="en-US" sz="800" dirty="0"/>
+              <a:t>Support is the only bar that is almost all dark. That is why it is the only department that makes money.</a:t>
+            </a:r>
+            <a:endParaRPr lang="en-US" sz="850" dirty="0"/>
           </a:p>
           <a:p>
             <a:pPr marL="342900" indent="-342900">
               <a:lnSpc>
-                <a:spcPts val="1000"/>
+                <a:spcPts val="1050"/>
               </a:lnSpc>
               <a:spcAft>
                 <a:spcPts val="400"/>
@@ -11637,14 +11362,14 @@
               <a:buChar char="•"/>
             </a:pPr>
             <a:r>
-              <a:rPr lang="en-US" sz="800" dirty="0">
+              <a:rPr lang="en-US" sz="850" dirty="0">
                 <a:solidFill>
                   <a:srgbClr val="3A4453"/>
                 </a:solidFill>
               </a:rPr>
-              <a:t>Support billed 2,132 hours. Events billed 241 and lost 333 to leave.</a:t>
-            </a:r>
-            <a:endParaRPr lang="en-US" sz="800" dirty="0"/>
+              <a:t>Each bar is scaled to its own hours. Support works about four times the hours of the other two together.</a:t>
+            </a:r>
+            <a:endParaRPr lang="en-US" sz="850" dirty="0"/>
           </a:p>
         </p:txBody>
       </p:sp>
@@ -11720,14 +11445,92 @@
       </p:grpSpPr>
       <p:sp>
         <p:nvSpPr>
-          <p:cNvPr id="2" name="Text 0"/>
-          <p:cNvSpPr txBox="1"/>
-          <p:nvPr/>
-        </p:nvSpPr>
-        <p:spPr>
-          <a:xfrm>
-            <a:off x="502920" y="365760"/>
-            <a:ext cx="6400800" cy="274320"/>
+          <p:cNvPr id="2" name="divider circle"/>
+          <p:cNvSpPr/>
+          <p:nvPr/>
+        </p:nvSpPr>
+        <p:spPr>
+          <a:xfrm>
+            <a:off x="6446520" y="1600200"/>
+            <a:ext cx="2651760" cy="2651760"/>
+          </a:xfrm>
+          <a:prstGeom prst="ellipse">
+            <a:avLst/>
+          </a:prstGeom>
+          <a:solidFill>
+            <a:srgbClr val="6D71FF">
+              <a:alpha val="55000"/>
+            </a:srgbClr>
+          </a:solidFill>
+          <a:ln/>
+        </p:spPr>
+      </p:sp>
+      <p:sp>
+        <p:nvSpPr>
+          <p:cNvPr id="3" name="Shape 1"/>
+          <p:cNvSpPr/>
+          <p:nvPr/>
+        </p:nvSpPr>
+        <p:spPr>
+          <a:xfrm>
+            <a:off x="502920" y="1874520"/>
+            <a:ext cx="868680" cy="868680"/>
+          </a:xfrm>
+          <a:prstGeom prst="rect">
+            <a:avLst/>
+          </a:prstGeom>
+          <a:solidFill>
+            <a:srgbClr val="3FD0C9"/>
+          </a:solidFill>
+          <a:ln/>
+        </p:spPr>
+      </p:sp>
+      <p:sp>
+        <p:nvSpPr>
+          <p:cNvPr id="4" name="Text 2"/>
+          <p:cNvSpPr txBox="1"/>
+          <p:nvPr/>
+        </p:nvSpPr>
+        <p:spPr>
+          <a:xfrm>
+            <a:off x="502920" y="1874520"/>
+            <a:ext cx="868680" cy="868680"/>
+          </a:xfrm>
+          <a:prstGeom prst="rect">
+            <a:avLst/>
+          </a:prstGeom>
+          <a:noFill/>
+          <a:ln/>
+        </p:spPr>
+        <p:txBody>
+          <a:bodyPr wrap="square" lIns="0" tIns="0" rIns="0" bIns="0" rtlCol="0" anchor="ctr"/>
+          <a:lstStyle/>
+          <a:p>
+            <a:pPr algn="ctr" indent="0" marL="0">
+              <a:buNone/>
+            </a:pPr>
+            <a:r>
+              <a:rPr lang="en-US" sz="2600" b="1" dirty="0">
+                <a:solidFill>
+                  <a:srgbClr val="242C39"/>
+                </a:solidFill>
+              </a:rPr>
+              <a:t>05</a:t>
+            </a:r>
+            <a:endParaRPr lang="en-US" sz="2600" dirty="0"/>
+          </a:p>
+        </p:txBody>
+      </p:sp>
+      <p:sp>
+        <p:nvSpPr>
+          <p:cNvPr id="5" name="Text 3"/>
+          <p:cNvSpPr txBox="1"/>
+          <p:nvPr/>
+        </p:nvSpPr>
+        <p:spPr>
+          <a:xfrm>
+            <a:off x="502920" y="411480"/>
+            <a:ext cx="3657600" cy="274320"/>
           </a:xfrm>
           <a:prstGeom prst="rect">
             <a:avLst/>
@@ -11745,10 +11548,10 @@
             <a:r>
               <a:rPr lang="en-US" sz="950" b="1" spc="220" kern="0" dirty="0">
                 <a:solidFill>
-                  <a:srgbClr val="122B82"/>
-                </a:solidFill>
-              </a:rPr>
-              <a:t>PEOPLE AND UTILISATION</a:t>
+                  <a:srgbClr val="3FD0C9"/>
+                </a:solidFill>
+              </a:rPr>
+              <a:t>SECTION</a:t>
             </a:r>
             <a:endParaRPr lang="en-US" sz="950" dirty="0"/>
           </a:p>
@@ -11756,14 +11559,14 @@
       </p:sp>
       <p:sp>
         <p:nvSpPr>
-          <p:cNvPr id="3" name="Text 1"/>
-          <p:cNvSpPr txBox="1"/>
-          <p:nvPr/>
-        </p:nvSpPr>
-        <p:spPr>
-          <a:xfrm>
-            <a:off x="502920" y="640080"/>
-            <a:ext cx="7315200" cy="685800"/>
+          <p:cNvPr id="6" name="Text 4"/>
+          <p:cNvSpPr txBox="1"/>
+          <p:nvPr/>
+        </p:nvSpPr>
+        <p:spPr>
+          <a:xfrm>
+            <a:off x="1600200" y="1874520"/>
+            <a:ext cx="5943600" cy="502920"/>
           </a:xfrm>
           <a:prstGeom prst="rect">
             <a:avLst/>
@@ -11779,304 +11582,50 @@
               <a:buNone/>
             </a:pPr>
             <a:r>
-              <a:rPr lang="en-US" sz="2700" b="1" dirty="0">
-                <a:solidFill>
-                  <a:srgbClr val="242C39"/>
-                </a:solidFill>
-              </a:rPr>
-              <a:t>Utilisation, Video, Integration and Consulting</a:t>
-            </a:r>
-            <a:endParaRPr lang="en-US" sz="2700" dirty="0"/>
-          </a:p>
-        </p:txBody>
-      </p:sp>
-      <p:pic>
-        <p:nvPicPr>
-          <p:cNvPr id="4" name="snip util_pct_b" descr="/home/user/Claude/deck/snips/util_pct_b.png">    </p:cNvPr>
-          <p:cNvPicPr>
-            <a:picLocks noChangeAspect="1"/>
-          </p:cNvPicPr>
-          <p:nvPr/>
-        </p:nvPicPr>
-        <p:blipFill>
-          <a:blip r:embed="rId1"/>
-          <a:stretch>
-            <a:fillRect/>
-          </a:stretch>
-        </p:blipFill>
-        <p:spPr>
-          <a:xfrm>
-            <a:off x="523192" y="1444752"/>
-            <a:ext cx="5537295" cy="3090672"/>
-          </a:xfrm>
-          <a:prstGeom prst="rect">
-            <a:avLst/>
-          </a:prstGeom>
-        </p:spPr>
-      </p:pic>
-      <p:sp>
-        <p:nvSpPr>
-          <p:cNvPr id="5" name="Text 2"/>
-          <p:cNvSpPr txBox="1"/>
-          <p:nvPr/>
-        </p:nvSpPr>
-        <p:spPr>
-          <a:xfrm>
-            <a:off x="502920" y="4608576"/>
-            <a:ext cx="5577840" cy="237744"/>
-          </a:xfrm>
-          <a:prstGeom prst="rect">
-            <a:avLst/>
-          </a:prstGeom>
-          <a:noFill/>
-          <a:ln/>
-        </p:spPr>
-        <p:txBody>
-          <a:bodyPr wrap="square" lIns="0" tIns="0" rIns="0" bIns="0" rtlCol="0" anchor="t"/>
+              <a:rPr lang="en-US" sz="2800" b="1" dirty="0">
+                <a:solidFill>
+                  <a:srgbClr val="FFFFFF"/>
+                </a:solidFill>
+              </a:rPr>
+              <a:t>Budget and outlook</a:t>
+            </a:r>
+            <a:endParaRPr lang="en-US" sz="2800" dirty="0"/>
+          </a:p>
+        </p:txBody>
+      </p:sp>
+      <p:sp>
+        <p:nvSpPr>
+          <p:cNvPr id="7" name="Text 5"/>
+          <p:cNvSpPr txBox="1"/>
+          <p:nvPr/>
+        </p:nvSpPr>
+        <p:spPr>
+          <a:xfrm>
+            <a:off x="1600200" y="2395728"/>
+            <a:ext cx="5943600" cy="347472"/>
+          </a:xfrm>
+          <a:prstGeom prst="rect">
+            <a:avLst/>
+          </a:prstGeom>
+          <a:noFill/>
+          <a:ln/>
+        </p:spPr>
+        <p:txBody>
+          <a:bodyPr wrap="square" lIns="0" tIns="0" rIns="0" bIns="0" rtlCol="0" anchor="ctr"/>
           <a:lstStyle/>
           <a:p>
             <a:pPr indent="0" marL="0">
               <a:buNone/>
             </a:pPr>
             <a:r>
-              <a:rPr lang="en-US" sz="800" i="1" dirty="0">
-                <a:solidFill>
-                  <a:srgbClr val="6B7585"/>
-                </a:solidFill>
-              </a:rPr>
-              <a:t>Snipped from the Financial Controller Pack, Utilisation tab, hours, utilisation per cent and FTE, July to September.</a:t>
-            </a:r>
-            <a:endParaRPr lang="en-US" sz="800" dirty="0"/>
-          </a:p>
-        </p:txBody>
-      </p:sp>
-      <p:sp>
-        <p:nvSpPr>
-          <p:cNvPr id="6" name="commentary panel"/>
-          <p:cNvSpPr/>
-          <p:nvPr/>
-        </p:nvSpPr>
-        <p:spPr>
-          <a:xfrm>
-            <a:off x="6263640" y="1463040"/>
-            <a:ext cx="2377440" cy="3154680"/>
-          </a:xfrm>
-          <a:prstGeom prst="rect">
-            <a:avLst/>
-          </a:prstGeom>
-          <a:solidFill>
-            <a:srgbClr val="E8F9F8"/>
-          </a:solidFill>
-          <a:ln/>
-        </p:spPr>
-      </p:sp>
-      <p:sp>
-        <p:nvSpPr>
-          <p:cNvPr id="7" name="Text 4"/>
-          <p:cNvSpPr txBox="1"/>
-          <p:nvPr/>
-        </p:nvSpPr>
-        <p:spPr>
-          <a:xfrm>
-            <a:off x="6446520" y="1627632"/>
-            <a:ext cx="2011680" cy="228600"/>
-          </a:xfrm>
-          <a:prstGeom prst="rect">
-            <a:avLst/>
-          </a:prstGeom>
-          <a:noFill/>
-          <a:ln/>
-        </p:spPr>
-        <p:txBody>
-          <a:bodyPr wrap="square" lIns="0" tIns="0" rIns="0" bIns="0" rtlCol="0" anchor="ctr"/>
-          <a:lstStyle/>
-          <a:p>
-            <a:pPr indent="0" marL="0">
-              <a:buNone/>
-            </a:pPr>
-            <a:r>
-              <a:rPr lang="en-US" sz="900" b="1" spc="180" kern="0" dirty="0">
-                <a:solidFill>
-                  <a:srgbClr val="005358"/>
-                </a:solidFill>
-              </a:rPr>
-              <a:t>COMMENTARY</a:t>
-            </a:r>
-            <a:endParaRPr lang="en-US" sz="900" dirty="0"/>
-          </a:p>
-        </p:txBody>
-      </p:sp>
-      <p:sp>
-        <p:nvSpPr>
-          <p:cNvPr id="8" name="Text 5"/>
-          <p:cNvSpPr txBox="1"/>
-          <p:nvPr/>
-        </p:nvSpPr>
-        <p:spPr>
-          <a:xfrm>
-            <a:off x="6446520" y="1901952"/>
-            <a:ext cx="2011680" cy="2551176"/>
-          </a:xfrm>
-          <a:prstGeom prst="rect">
-            <a:avLst/>
-          </a:prstGeom>
-          <a:noFill/>
-          <a:ln/>
-        </p:spPr>
-        <p:txBody>
-          <a:bodyPr wrap="square" lIns="0" tIns="0" rIns="0" bIns="0" rtlCol="0" anchor="t">
-            <a:normAutofit/>
-          </a:bodyPr>
-          <a:lstStyle/>
-          <a:p>
-            <a:pPr marL="342900" indent="-342900">
-              <a:lnSpc>
-                <a:spcPts val="1150"/>
-              </a:lnSpc>
-              <a:spcAft>
-                <a:spcPts val="400"/>
-              </a:spcAft>
-              <a:buSzPct val="100000"/>
-              <a:buChar char="•"/>
-            </a:pPr>
-            <a:r>
-              <a:rPr lang="en-US" sz="900" dirty="0">
-                <a:solidFill>
-                  <a:srgbClr val="3A4453"/>
-                </a:solidFill>
-              </a:rPr>
-              <a:t>Read these three as hours, not as percentages. The volumes are too small for a percentage to mean much.</a:t>
-            </a:r>
-            <a:endParaRPr lang="en-US" sz="900" dirty="0"/>
-          </a:p>
-          <a:p>
-            <a:pPr marL="342900" indent="-342900">
-              <a:lnSpc>
-                <a:spcPts val="1150"/>
-              </a:lnSpc>
-              <a:spcAft>
-                <a:spcPts val="400"/>
-              </a:spcAft>
-              <a:buSzPct val="100000"/>
-              <a:buChar char="•"/>
-            </a:pPr>
-            <a:r>
-              <a:rPr lang="en-US" sz="900" dirty="0">
-                <a:solidFill>
-                  <a:srgbClr val="3A4453"/>
-                </a:solidFill>
-              </a:rPr>
-              <a:t>Integration shows 100% on 9.5 billable hours. That is one day of work, not a result.</a:t>
-            </a:r>
-            <a:endParaRPr lang="en-US" sz="900" dirty="0"/>
-          </a:p>
-          <a:p>
-            <a:pPr marL="342900" indent="-342900">
-              <a:lnSpc>
-                <a:spcPts val="1150"/>
-              </a:lnSpc>
-              <a:spcAft>
-                <a:spcPts val="400"/>
-              </a:spcAft>
-              <a:buSzPct val="100000"/>
-              <a:buChar char="•"/>
-            </a:pPr>
-            <a:r>
-              <a:rPr lang="en-US" sz="900" dirty="0">
-                <a:solidFill>
-                  <a:srgbClr val="3A4453"/>
-                </a:solidFill>
-              </a:rPr>
-              <a:t>Video put 24.5 hours on jobs, about 0.18 of a full time person.</a:t>
-            </a:r>
-            <a:endParaRPr lang="en-US" sz="900" dirty="0"/>
-          </a:p>
-          <a:p>
-            <a:pPr marL="342900" indent="-342900">
-              <a:lnSpc>
-                <a:spcPts val="1150"/>
-              </a:lnSpc>
-              <a:spcAft>
-                <a:spcPts val="400"/>
-              </a:spcAft>
-              <a:buSzPct val="100000"/>
-              <a:buChar char="•"/>
-            </a:pPr>
-            <a:r>
-              <a:rPr lang="en-US" sz="900" dirty="0">
-                <a:solidFill>
-                  <a:srgbClr val="3A4453"/>
-                </a:solidFill>
-              </a:rPr>
-              <a:t>Consulting is the one that matters: 27%, with 84 hours on work we cannot bill.</a:t>
-            </a:r>
-            <a:endParaRPr lang="en-US" sz="900" dirty="0"/>
-          </a:p>
-          <a:p>
-            <a:pPr marL="342900" indent="-342900">
-              <a:lnSpc>
-                <a:spcPts val="1150"/>
-              </a:lnSpc>
-              <a:spcAft>
-                <a:spcPts val="400"/>
-              </a:spcAft>
-              <a:buSzPct val="100000"/>
-              <a:buChar char="•"/>
-            </a:pPr>
-            <a:r>
-              <a:rPr lang="en-US" sz="900" dirty="0">
-                <a:solidFill>
-                  <a:srgbClr val="3A4453"/>
-                </a:solidFill>
-              </a:rPr>
-              <a:t>Consulting has carried running costs against almost no fees for three months. That decision keeps being deferred.</a:t>
-            </a:r>
-            <a:endParaRPr lang="en-US" sz="900" dirty="0"/>
-          </a:p>
-        </p:txBody>
-      </p:sp>
-      <p:sp>
-        <p:nvSpPr>
-          <p:cNvPr id="25" name="Slide Number Placeholder 0"/>
-          <p:cNvSpPr>
-            <a:spLocks noGrp="1"/>
-          </p:cNvSpPr>
-          <p:nvPr>
-            <p:ph type="sldNum" sz="quarter" idx="4294967295"/>
-          </p:nvPr>
-        </p:nvSpPr>
-        <p:spPr>
-          <a:xfrm>
-            <a:off x="8092440" y="4736592"/>
-            <a:ext cx="548640" cy="228600"/>
-          </a:xfrm>
-          <a:prstGeom prst="rect">
-            <a:avLst/>
-          </a:prstGeom>
-          <a:extLst>
-            <a:ext uri="{C572A759-6A51-4108-AA02-DFA0A04FC94B}">
-              <ma14:wrappingTextBoxFlag xmlns:ma14="http://schemas.microsoft.com/office/mac/drawingml/2011/main" val="0"/>
-            </a:ext>
-          </a:extLst>
-        </p:spPr>
-        <p:txBody>
-          <a:bodyPr/>
-          <a:lstStyle>
-            <a:lvl1pPr>
-              <a:defRPr sz="800">
-                <a:solidFill>
-                  <a:srgbClr val="6B7585"/>
-                </a:solidFill>
-              </a:defRPr>
-            </a:lvl1pPr>
-          </a:lstStyle>
-          <a:p>
-            <a:pPr algn="r"/>
-            <a:fld id="{F7021451-1387-4CA6-816F-3879F97B5CBC}" type="slidenum">
-              <a:rPr b="0" lang="en-US"/>
-              <a:t>28</a:t>
-            </a:fld>
-            <a:endParaRPr lang="en-US"/>
+              <a:rPr lang="en-US" sz="1200" dirty="0">
+                <a:solidFill>
+                  <a:srgbClr val="C9CED6"/>
+                </a:solidFill>
+              </a:rPr>
+              <a:t>What the rest of the year looks like and what we change</a:t>
+            </a:r>
+            <a:endParaRPr lang="en-US" sz="1200" dirty="0"/>
           </a:p>
         </p:txBody>
       </p:sp>
@@ -12135,7 +11684,7 @@
                   <a:srgbClr val="122B82"/>
                 </a:solidFill>
               </a:rPr>
-              <a:t>PEOPLE AND UTILISATION</a:t>
+              <a:t>BUDGET AND OUTLOOK</a:t>
             </a:r>
             <a:endParaRPr lang="en-US" sz="950" dirty="0"/>
           </a:p>
@@ -12171,7 +11720,7 @@
                   <a:srgbClr val="242C39"/>
                 </a:solidFill>
               </a:rPr>
-              <a:t>How each department spent its hours, Sep 26</a:t>
+              <a:t>Revenue by month against budget</a:t>
             </a:r>
             <a:endParaRPr lang="en-US" sz="2700" dirty="0"/>
           </a:p>
@@ -12179,7 +11728,7 @@
       </p:sp>
       <p:pic>
         <p:nvPicPr>
-          <p:cNvPr id="4" name="snip util_chart" descr="/home/user/Claude/deck/snips/util_chart.png">    </p:cNvPr>
+          <p:cNvPr id="4" name="snip income_month" descr="/home/user/Claude/deck/snips/income_month.png">    </p:cNvPr>
           <p:cNvPicPr>
             <a:picLocks noChangeAspect="1"/>
           </p:cNvPicPr>
@@ -12194,7 +11743,7 @@
         <p:spPr>
           <a:xfrm>
             <a:off x="502920" y="1444752"/>
-            <a:ext cx="5577840" cy="3045909"/>
+            <a:ext cx="5577840" cy="2604071"/>
           </a:xfrm>
           <a:prstGeom prst="rect">
             <a:avLst/>
@@ -12209,7 +11758,7 @@
         </p:nvSpPr>
         <p:spPr>
           <a:xfrm>
-            <a:off x="502920" y="4563813"/>
+            <a:off x="502920" y="4121975"/>
             <a:ext cx="5577840" cy="237744"/>
           </a:xfrm>
           <a:prstGeom prst="rect">
@@ -12231,7 +11780,7 @@
                   <a:srgbClr val="6B7585"/>
                 </a:solidFill>
               </a:rPr>
-              <a:t>Snipped from the Financial Controller Pack, Utilisation tab, hours by department, each bar scaled to its own total.</a:t>
+              <a:t>Snipped from the Financial Controller Pack, Cost Analysis tab, total income by month, actual to date then budget.</a:t>
             </a:r>
             <a:endParaRPr lang="en-US" sz="800" dirty="0"/>
           </a:p>
@@ -12318,7 +11867,7 @@
           <a:p>
             <a:pPr marL="342900" indent="-342900">
               <a:lnSpc>
-                <a:spcPts val="1050"/>
+                <a:spcPts val="1150"/>
               </a:lnSpc>
               <a:spcAft>
                 <a:spcPts val="400"/>
@@ -12327,19 +11876,19 @@
               <a:buChar char="•"/>
             </a:pPr>
             <a:r>
-              <a:rPr lang="en-US" sz="850" dirty="0">
+              <a:rPr lang="en-US" sz="900" dirty="0">
                 <a:solidFill>
                   <a:srgbClr val="3A4453"/>
                 </a:solidFill>
               </a:rPr>
-              <a:t>Each bar is scaled to that department's own hours, so you can compare the mix. Support works about a hundred times the hours Integration does.</a:t>
-            </a:r>
-            <a:endParaRPr lang="en-US" sz="850" dirty="0"/>
+              <a:t>Q1 came in (372)k behind on revenue, and almost all of it is Consulting and Video.</a:t>
+            </a:r>
+            <a:endParaRPr lang="en-US" sz="900" dirty="0"/>
           </a:p>
           <a:p>
             <a:pPr marL="342900" indent="-342900">
               <a:lnSpc>
-                <a:spcPts val="1050"/>
+                <a:spcPts val="1150"/>
               </a:lnSpc>
               <a:spcAft>
                 <a:spcPts val="400"/>
@@ -12348,19 +11897,19 @@
               <a:buChar char="•"/>
             </a:pPr>
             <a:r>
-              <a:rPr lang="en-US" sz="850" dirty="0">
+              <a:rPr lang="en-US" sz="900" dirty="0">
                 <a:solidFill>
                   <a:srgbClr val="3A4453"/>
                 </a:solidFill>
               </a:rPr>
-              <a:t>Support is almost entirely billable, which is why it is the only department that makes money.</a:t>
-            </a:r>
-            <a:endParaRPr lang="en-US" sz="850" dirty="0"/>
+              <a:t>The remaining nine months are untouched original budget. They are not a forecast.</a:t>
+            </a:r>
+            <a:endParaRPr lang="en-US" sz="900" dirty="0"/>
           </a:p>
           <a:p>
             <a:pPr marL="342900" indent="-342900">
               <a:lnSpc>
-                <a:spcPts val="1050"/>
+                <a:spcPts val="1150"/>
               </a:lnSpc>
               <a:spcAft>
                 <a:spcPts val="400"/>
@@ -12369,19 +11918,19 @@
               <a:buChar char="•"/>
             </a:pPr>
             <a:r>
-              <a:rPr lang="en-US" sz="850" dirty="0">
+              <a:rPr lang="en-US" sz="900" dirty="0">
                 <a:solidFill>
                   <a:srgbClr val="3A4453"/>
                 </a:solidFill>
               </a:rPr>
-              <a:t>Events put 333 hours into leave and only 241 onto jobs. The people are there, the work is not.</a:t>
-            </a:r>
-            <a:endParaRPr lang="en-US" sz="850" dirty="0"/>
+              <a:t>October alone is budgeted at 950k, nearly double our best month so far.</a:t>
+            </a:r>
+            <a:endParaRPr lang="en-US" sz="900" dirty="0"/>
           </a:p>
           <a:p>
             <a:pPr marL="342900" indent="-342900">
               <a:lnSpc>
-                <a:spcPts val="1050"/>
+                <a:spcPts val="1150"/>
               </a:lnSpc>
               <a:spcAft>
                 <a:spcPts val="400"/>
@@ -12390,19 +11939,19 @@
               <a:buChar char="•"/>
             </a:pPr>
             <a:r>
-              <a:rPr lang="en-US" sz="850" dirty="0">
+              <a:rPr lang="en-US" sz="900" dirty="0">
                 <a:solidFill>
                   <a:srgbClr val="3A4453"/>
                 </a:solidFill>
               </a:rPr>
-              <a:t>Consulting put 84 hours into work we cannot bill against 31 we can.</a:t>
-            </a:r>
-            <a:endParaRPr lang="en-US" sz="850" dirty="0"/>
+              <a:t>December carries a planned loss. The business closes for two weeks, so that is correct and should stay.</a:t>
+            </a:r>
+            <a:endParaRPr lang="en-US" sz="900" dirty="0"/>
           </a:p>
           <a:p>
             <a:pPr marL="342900" indent="-342900">
               <a:lnSpc>
-                <a:spcPts val="1050"/>
+                <a:spcPts val="1150"/>
               </a:lnSpc>
               <a:spcAft>
                 <a:spcPts val="400"/>
@@ -12411,14 +11960,14 @@
               <a:buChar char="•"/>
             </a:pPr>
             <a:r>
-              <a:rPr lang="en-US" sz="850" dirty="0">
+              <a:rPr lang="en-US" sz="900" dirty="0">
                 <a:solidFill>
                   <a:srgbClr val="3A4453"/>
                 </a:solidFill>
               </a:rPr>
-              <a:t>We pay for every hour. We only bill the ones on jobs. The grey and light teal are the gap.</a:t>
-            </a:r>
-            <a:endParaRPr lang="en-US" sz="850" dirty="0"/>
+              <a:t>Recommend a Q1 rolling forecast: rebuild Consulting on real capacity and reset the margin assumptions.</a:t>
+            </a:r>
+            <a:endParaRPr lang="en-US" sz="900" dirty="0"/>
           </a:p>
         </p:txBody>
       </p:sp>
@@ -14467,7 +14016,7 @@
                   <a:srgbClr val="122B82"/>
                 </a:solidFill>
               </a:rPr>
-              <a:t>PEOPLE AND UTILISATION</a:t>
+              <a:t>SUMMARY AND ACTIONS</a:t>
             </a:r>
             <a:endParaRPr lang="en-US" sz="950" dirty="0"/>
           </a:p>
@@ -14503,991 +14052,6 @@
                   <a:srgbClr val="242C39"/>
                 </a:solidFill>
               </a:rPr>
-              <a:t>Hours, the three departments, Sep 26</a:t>
-            </a:r>
-            <a:endParaRPr lang="en-US" sz="2700" dirty="0"/>
-          </a:p>
-        </p:txBody>
-      </p:sp>
-      <p:pic>
-        <p:nvPicPr>
-          <p:cNvPr id="4" name="snip util_three" descr="/home/user/Claude/deck/snips/util_three.png">    </p:cNvPr>
-          <p:cNvPicPr>
-            <a:picLocks noChangeAspect="1"/>
-          </p:cNvPicPr>
-          <p:nvPr/>
-        </p:nvPicPr>
-        <p:blipFill>
-          <a:blip r:embed="rId1"/>
-          <a:stretch>
-            <a:fillRect/>
-          </a:stretch>
-        </p:blipFill>
-        <p:spPr>
-          <a:xfrm>
-            <a:off x="502920" y="1444752"/>
-            <a:ext cx="5577840" cy="2587417"/>
-          </a:xfrm>
-          <a:prstGeom prst="rect">
-            <a:avLst/>
-          </a:prstGeom>
-        </p:spPr>
-      </p:pic>
-      <p:sp>
-        <p:nvSpPr>
-          <p:cNvPr id="5" name="Text 2"/>
-          <p:cNvSpPr txBox="1"/>
-          <p:nvPr/>
-        </p:nvSpPr>
-        <p:spPr>
-          <a:xfrm>
-            <a:off x="502920" y="4105321"/>
-            <a:ext cx="5577840" cy="237744"/>
-          </a:xfrm>
-          <a:prstGeom prst="rect">
-            <a:avLst/>
-          </a:prstGeom>
-          <a:noFill/>
-          <a:ln/>
-        </p:spPr>
-        <p:txBody>
-          <a:bodyPr wrap="square" lIns="0" tIns="0" rIns="0" bIns="0" rtlCol="0" anchor="t"/>
-          <a:lstStyle/>
-          <a:p>
-            <a:pPr indent="0" marL="0">
-              <a:buNone/>
-            </a:pPr>
-            <a:r>
-              <a:rPr lang="en-US" sz="800" i="1" dirty="0">
-                <a:solidFill>
-                  <a:srgbClr val="6B7585"/>
-                </a:solidFill>
-              </a:rPr>
-              <a:t>Snipped from the Financial Controller Pack, Utilisation tab, hours rolled up to the three departments, each bar scaled to its own total.</a:t>
-            </a:r>
-            <a:endParaRPr lang="en-US" sz="800" dirty="0"/>
-          </a:p>
-        </p:txBody>
-      </p:sp>
-      <p:sp>
-        <p:nvSpPr>
-          <p:cNvPr id="6" name="commentary panel"/>
-          <p:cNvSpPr/>
-          <p:nvPr/>
-        </p:nvSpPr>
-        <p:spPr>
-          <a:xfrm>
-            <a:off x="6263640" y="1463040"/>
-            <a:ext cx="2377440" cy="3154680"/>
-          </a:xfrm>
-          <a:prstGeom prst="rect">
-            <a:avLst/>
-          </a:prstGeom>
-          <a:solidFill>
-            <a:srgbClr val="E8F9F8"/>
-          </a:solidFill>
-          <a:ln/>
-        </p:spPr>
-      </p:sp>
-      <p:sp>
-        <p:nvSpPr>
-          <p:cNvPr id="7" name="Text 4"/>
-          <p:cNvSpPr txBox="1"/>
-          <p:nvPr/>
-        </p:nvSpPr>
-        <p:spPr>
-          <a:xfrm>
-            <a:off x="6446520" y="1627632"/>
-            <a:ext cx="2011680" cy="228600"/>
-          </a:xfrm>
-          <a:prstGeom prst="rect">
-            <a:avLst/>
-          </a:prstGeom>
-          <a:noFill/>
-          <a:ln/>
-        </p:spPr>
-        <p:txBody>
-          <a:bodyPr wrap="square" lIns="0" tIns="0" rIns="0" bIns="0" rtlCol="0" anchor="ctr"/>
-          <a:lstStyle/>
-          <a:p>
-            <a:pPr indent="0" marL="0">
-              <a:buNone/>
-            </a:pPr>
-            <a:r>
-              <a:rPr lang="en-US" sz="900" b="1" spc="180" kern="0" dirty="0">
-                <a:solidFill>
-                  <a:srgbClr val="005358"/>
-                </a:solidFill>
-              </a:rPr>
-              <a:t>COMMENTARY</a:t>
-            </a:r>
-            <a:endParaRPr lang="en-US" sz="900" dirty="0"/>
-          </a:p>
-        </p:txBody>
-      </p:sp>
-      <p:sp>
-        <p:nvSpPr>
-          <p:cNvPr id="8" name="Text 5"/>
-          <p:cNvSpPr txBox="1"/>
-          <p:nvPr/>
-        </p:nvSpPr>
-        <p:spPr>
-          <a:xfrm>
-            <a:off x="6446520" y="1901952"/>
-            <a:ext cx="2011680" cy="2551176"/>
-          </a:xfrm>
-          <a:prstGeom prst="rect">
-            <a:avLst/>
-          </a:prstGeom>
-          <a:noFill/>
-          <a:ln/>
-        </p:spPr>
-        <p:txBody>
-          <a:bodyPr wrap="square" lIns="0" tIns="0" rIns="0" bIns="0" rtlCol="0" anchor="t">
-            <a:normAutofit/>
-          </a:bodyPr>
-          <a:lstStyle/>
-          <a:p>
-            <a:pPr marL="342900" indent="-342900">
-              <a:lnSpc>
-                <a:spcPts val="1050"/>
-              </a:lnSpc>
-              <a:spcAft>
-                <a:spcPts val="400"/>
-              </a:spcAft>
-              <a:buSzPct val="100000"/>
-              <a:buChar char="•"/>
-            </a:pPr>
-            <a:r>
-              <a:rPr lang="en-US" sz="850" dirty="0">
-                <a:solidFill>
-                  <a:srgbClr val="3A4453"/>
-                </a:solidFill>
-              </a:rPr>
-              <a:t>The same picture grouped the way the P&amp;L is. Production is Events and Video. Consulting is Integration and Consulting.</a:t>
-            </a:r>
-            <a:endParaRPr lang="en-US" sz="850" dirty="0"/>
-          </a:p>
-          <a:p>
-            <a:pPr marL="342900" indent="-342900">
-              <a:lnSpc>
-                <a:spcPts val="1050"/>
-              </a:lnSpc>
-              <a:spcAft>
-                <a:spcPts val="400"/>
-              </a:spcAft>
-              <a:buSzPct val="100000"/>
-              <a:buChar char="•"/>
-            </a:pPr>
-            <a:r>
-              <a:rPr lang="en-US" sz="850" dirty="0">
-                <a:solidFill>
-                  <a:srgbClr val="3A4453"/>
-                </a:solidFill>
-              </a:rPr>
-              <a:t>Production put 265 hours onto jobs and 257 onto work we cannot bill, with 333 hours of leave on top.</a:t>
-            </a:r>
-            <a:endParaRPr lang="en-US" sz="850" dirty="0"/>
-          </a:p>
-          <a:p>
-            <a:pPr marL="342900" indent="-342900">
-              <a:lnSpc>
-                <a:spcPts val="1050"/>
-              </a:lnSpc>
-              <a:spcAft>
-                <a:spcPts val="400"/>
-              </a:spcAft>
-              <a:buSzPct val="100000"/>
-              <a:buChar char="•"/>
-            </a:pPr>
-            <a:r>
-              <a:rPr lang="en-US" sz="850" dirty="0">
-                <a:solidFill>
-                  <a:srgbClr val="3A4453"/>
-                </a:solidFill>
-              </a:rPr>
-              <a:t>Consulting put 40 onto jobs against 84 we cannot bill. Two thirds of its paid hours earn nothing.</a:t>
-            </a:r>
-            <a:endParaRPr lang="en-US" sz="850" dirty="0"/>
-          </a:p>
-          <a:p>
-            <a:pPr marL="342900" indent="-342900">
-              <a:lnSpc>
-                <a:spcPts val="1050"/>
-              </a:lnSpc>
-              <a:spcAft>
-                <a:spcPts val="400"/>
-              </a:spcAft>
-              <a:buSzPct val="100000"/>
-              <a:buChar char="•"/>
-            </a:pPr>
-            <a:r>
-              <a:rPr lang="en-US" sz="850" dirty="0">
-                <a:solidFill>
-                  <a:srgbClr val="3A4453"/>
-                </a:solidFill>
-              </a:rPr>
-              <a:t>Support is the only bar that is almost all dark. That is why it is the only department that makes money.</a:t>
-            </a:r>
-            <a:endParaRPr lang="en-US" sz="850" dirty="0"/>
-          </a:p>
-          <a:p>
-            <a:pPr marL="342900" indent="-342900">
-              <a:lnSpc>
-                <a:spcPts val="1050"/>
-              </a:lnSpc>
-              <a:spcAft>
-                <a:spcPts val="400"/>
-              </a:spcAft>
-              <a:buSzPct val="100000"/>
-              <a:buChar char="•"/>
-            </a:pPr>
-            <a:r>
-              <a:rPr lang="en-US" sz="850" dirty="0">
-                <a:solidFill>
-                  <a:srgbClr val="3A4453"/>
-                </a:solidFill>
-              </a:rPr>
-              <a:t>Each bar is scaled to its own hours. Support works about four times the hours of the other two together.</a:t>
-            </a:r>
-            <a:endParaRPr lang="en-US" sz="850" dirty="0"/>
-          </a:p>
-        </p:txBody>
-      </p:sp>
-      <p:sp>
-        <p:nvSpPr>
-          <p:cNvPr id="25" name="Slide Number Placeholder 0"/>
-          <p:cNvSpPr>
-            <a:spLocks noGrp="1"/>
-          </p:cNvSpPr>
-          <p:nvPr>
-            <p:ph type="sldNum" sz="quarter" idx="4294967295"/>
-          </p:nvPr>
-        </p:nvSpPr>
-        <p:spPr>
-          <a:xfrm>
-            <a:off x="8092440" y="4736592"/>
-            <a:ext cx="548640" cy="228600"/>
-          </a:xfrm>
-          <a:prstGeom prst="rect">
-            <a:avLst/>
-          </a:prstGeom>
-          <a:extLst>
-            <a:ext uri="{C572A759-6A51-4108-AA02-DFA0A04FC94B}">
-              <ma14:wrappingTextBoxFlag xmlns:ma14="http://schemas.microsoft.com/office/mac/drawingml/2011/main" val="0"/>
-            </a:ext>
-          </a:extLst>
-        </p:spPr>
-        <p:txBody>
-          <a:bodyPr/>
-          <a:lstStyle>
-            <a:lvl1pPr>
-              <a:defRPr sz="800">
-                <a:solidFill>
-                  <a:srgbClr val="6B7585"/>
-                </a:solidFill>
-              </a:defRPr>
-            </a:lvl1pPr>
-          </a:lstStyle>
-          <a:p>
-            <a:pPr algn="r"/>
-            <a:fld id="{F7021451-1387-4CA6-816F-3879F97B5CBC}" type="slidenum">
-              <a:rPr b="0" lang="en-US"/>
-              <a:t>30</a:t>
-            </a:fld>
-            <a:endParaRPr lang="en-US"/>
-          </a:p>
-        </p:txBody>
-      </p:sp>
-    </p:spTree>
-  </p:cSld>
-  <p:clrMapOvr>
-    <a:masterClrMapping/>
-  </p:clrMapOvr>
-</p:sld>
-</file>
-
-<file path=ppt/slides/slide31.xml><?xml version="1.0" encoding="utf-8"?>
-<p:sld xmlns:a="http://schemas.openxmlformats.org/drawingml/2006/main" xmlns:r="http://schemas.openxmlformats.org/officeDocument/2006/relationships" xmlns:p="http://schemas.openxmlformats.org/presentationml/2006/main">
-  <p:cSld name="Slide 31">
-    <p:spTree>
-      <p:nvGrpSpPr>
-        <p:cNvPr id="1" name=""/>
-        <p:cNvGrpSpPr/>
-        <p:nvPr/>
-      </p:nvGrpSpPr>
-      <p:grpSpPr>
-        <a:xfrm>
-          <a:off x="0" y="0"/>
-          <a:ext cx="0" cy="0"/>
-          <a:chOff x="0" y="0"/>
-          <a:chExt cx="0" cy="0"/>
-        </a:xfrm>
-      </p:grpSpPr>
-      <p:sp>
-        <p:nvSpPr>
-          <p:cNvPr id="2" name="divider circle"/>
-          <p:cNvSpPr/>
-          <p:nvPr/>
-        </p:nvSpPr>
-        <p:spPr>
-          <a:xfrm>
-            <a:off x="6446520" y="1600200"/>
-            <a:ext cx="2651760" cy="2651760"/>
-          </a:xfrm>
-          <a:prstGeom prst="ellipse">
-            <a:avLst/>
-          </a:prstGeom>
-          <a:solidFill>
-            <a:srgbClr val="6D71FF">
-              <a:alpha val="55000"/>
-            </a:srgbClr>
-          </a:solidFill>
-          <a:ln/>
-        </p:spPr>
-      </p:sp>
-      <p:sp>
-        <p:nvSpPr>
-          <p:cNvPr id="3" name="Shape 1"/>
-          <p:cNvSpPr/>
-          <p:nvPr/>
-        </p:nvSpPr>
-        <p:spPr>
-          <a:xfrm>
-            <a:off x="502920" y="1874520"/>
-            <a:ext cx="868680" cy="868680"/>
-          </a:xfrm>
-          <a:prstGeom prst="rect">
-            <a:avLst/>
-          </a:prstGeom>
-          <a:solidFill>
-            <a:srgbClr val="3FD0C9"/>
-          </a:solidFill>
-          <a:ln/>
-        </p:spPr>
-      </p:sp>
-      <p:sp>
-        <p:nvSpPr>
-          <p:cNvPr id="4" name="Text 2"/>
-          <p:cNvSpPr txBox="1"/>
-          <p:nvPr/>
-        </p:nvSpPr>
-        <p:spPr>
-          <a:xfrm>
-            <a:off x="502920" y="1874520"/>
-            <a:ext cx="868680" cy="868680"/>
-          </a:xfrm>
-          <a:prstGeom prst="rect">
-            <a:avLst/>
-          </a:prstGeom>
-          <a:noFill/>
-          <a:ln/>
-        </p:spPr>
-        <p:txBody>
-          <a:bodyPr wrap="square" lIns="0" tIns="0" rIns="0" bIns="0" rtlCol="0" anchor="ctr"/>
-          <a:lstStyle/>
-          <a:p>
-            <a:pPr algn="ctr" indent="0" marL="0">
-              <a:buNone/>
-            </a:pPr>
-            <a:r>
-              <a:rPr lang="en-US" sz="2600" b="1" dirty="0">
-                <a:solidFill>
-                  <a:srgbClr val="242C39"/>
-                </a:solidFill>
-              </a:rPr>
-              <a:t>05</a:t>
-            </a:r>
-            <a:endParaRPr lang="en-US" sz="2600" dirty="0"/>
-          </a:p>
-        </p:txBody>
-      </p:sp>
-      <p:sp>
-        <p:nvSpPr>
-          <p:cNvPr id="5" name="Text 3"/>
-          <p:cNvSpPr txBox="1"/>
-          <p:nvPr/>
-        </p:nvSpPr>
-        <p:spPr>
-          <a:xfrm>
-            <a:off x="502920" y="411480"/>
-            <a:ext cx="3657600" cy="274320"/>
-          </a:xfrm>
-          <a:prstGeom prst="rect">
-            <a:avLst/>
-          </a:prstGeom>
-          <a:noFill/>
-          <a:ln/>
-        </p:spPr>
-        <p:txBody>
-          <a:bodyPr wrap="square" lIns="0" tIns="0" rIns="0" bIns="0" rtlCol="0" anchor="ctr"/>
-          <a:lstStyle/>
-          <a:p>
-            <a:pPr indent="0" marL="0">
-              <a:buNone/>
-            </a:pPr>
-            <a:r>
-              <a:rPr lang="en-US" sz="950" b="1" spc="220" kern="0" dirty="0">
-                <a:solidFill>
-                  <a:srgbClr val="3FD0C9"/>
-                </a:solidFill>
-              </a:rPr>
-              <a:t>SECTION</a:t>
-            </a:r>
-            <a:endParaRPr lang="en-US" sz="950" dirty="0"/>
-          </a:p>
-        </p:txBody>
-      </p:sp>
-      <p:sp>
-        <p:nvSpPr>
-          <p:cNvPr id="6" name="Text 4"/>
-          <p:cNvSpPr txBox="1"/>
-          <p:nvPr/>
-        </p:nvSpPr>
-        <p:spPr>
-          <a:xfrm>
-            <a:off x="1600200" y="1874520"/>
-            <a:ext cx="5943600" cy="502920"/>
-          </a:xfrm>
-          <a:prstGeom prst="rect">
-            <a:avLst/>
-          </a:prstGeom>
-          <a:noFill/>
-          <a:ln/>
-        </p:spPr>
-        <p:txBody>
-          <a:bodyPr wrap="square" lIns="0" tIns="0" rIns="0" bIns="0" rtlCol="0" anchor="ctr"/>
-          <a:lstStyle/>
-          <a:p>
-            <a:pPr indent="0" marL="0">
-              <a:buNone/>
-            </a:pPr>
-            <a:r>
-              <a:rPr lang="en-US" sz="2800" b="1" dirty="0">
-                <a:solidFill>
-                  <a:srgbClr val="FFFFFF"/>
-                </a:solidFill>
-              </a:rPr>
-              <a:t>Budget and outlook</a:t>
-            </a:r>
-            <a:endParaRPr lang="en-US" sz="2800" dirty="0"/>
-          </a:p>
-        </p:txBody>
-      </p:sp>
-      <p:sp>
-        <p:nvSpPr>
-          <p:cNvPr id="7" name="Text 5"/>
-          <p:cNvSpPr txBox="1"/>
-          <p:nvPr/>
-        </p:nvSpPr>
-        <p:spPr>
-          <a:xfrm>
-            <a:off x="1600200" y="2395728"/>
-            <a:ext cx="5943600" cy="347472"/>
-          </a:xfrm>
-          <a:prstGeom prst="rect">
-            <a:avLst/>
-          </a:prstGeom>
-          <a:noFill/>
-          <a:ln/>
-        </p:spPr>
-        <p:txBody>
-          <a:bodyPr wrap="square" lIns="0" tIns="0" rIns="0" bIns="0" rtlCol="0" anchor="ctr"/>
-          <a:lstStyle/>
-          <a:p>
-            <a:pPr indent="0" marL="0">
-              <a:buNone/>
-            </a:pPr>
-            <a:r>
-              <a:rPr lang="en-US" sz="1200" dirty="0">
-                <a:solidFill>
-                  <a:srgbClr val="C9CED6"/>
-                </a:solidFill>
-              </a:rPr>
-              <a:t>What the rest of the year looks like and what we change</a:t>
-            </a:r>
-            <a:endParaRPr lang="en-US" sz="1200" dirty="0"/>
-          </a:p>
-        </p:txBody>
-      </p:sp>
-    </p:spTree>
-  </p:cSld>
-  <p:clrMapOvr>
-    <a:masterClrMapping/>
-  </p:clrMapOvr>
-</p:sld>
-</file>
-
-<file path=ppt/slides/slide32.xml><?xml version="1.0" encoding="utf-8"?>
-<p:sld xmlns:a="http://schemas.openxmlformats.org/drawingml/2006/main" xmlns:r="http://schemas.openxmlformats.org/officeDocument/2006/relationships" xmlns:p="http://schemas.openxmlformats.org/presentationml/2006/main">
-  <p:cSld name="Slide 32">
-    <p:spTree>
-      <p:nvGrpSpPr>
-        <p:cNvPr id="1" name=""/>
-        <p:cNvGrpSpPr/>
-        <p:nvPr/>
-      </p:nvGrpSpPr>
-      <p:grpSpPr>
-        <a:xfrm>
-          <a:off x="0" y="0"/>
-          <a:ext cx="0" cy="0"/>
-          <a:chOff x="0" y="0"/>
-          <a:chExt cx="0" cy="0"/>
-        </a:xfrm>
-      </p:grpSpPr>
-      <p:sp>
-        <p:nvSpPr>
-          <p:cNvPr id="2" name="Text 0"/>
-          <p:cNvSpPr txBox="1"/>
-          <p:nvPr/>
-        </p:nvSpPr>
-        <p:spPr>
-          <a:xfrm>
-            <a:off x="502920" y="365760"/>
-            <a:ext cx="6400800" cy="274320"/>
-          </a:xfrm>
-          <a:prstGeom prst="rect">
-            <a:avLst/>
-          </a:prstGeom>
-          <a:noFill/>
-          <a:ln/>
-        </p:spPr>
-        <p:txBody>
-          <a:bodyPr wrap="square" lIns="0" tIns="0" rIns="0" bIns="0" rtlCol="0" anchor="ctr"/>
-          <a:lstStyle/>
-          <a:p>
-            <a:pPr indent="0" marL="0">
-              <a:buNone/>
-            </a:pPr>
-            <a:r>
-              <a:rPr lang="en-US" sz="950" b="1" spc="220" kern="0" dirty="0">
-                <a:solidFill>
-                  <a:srgbClr val="122B82"/>
-                </a:solidFill>
-              </a:rPr>
-              <a:t>BUDGET AND OUTLOOK</a:t>
-            </a:r>
-            <a:endParaRPr lang="en-US" sz="950" dirty="0"/>
-          </a:p>
-        </p:txBody>
-      </p:sp>
-      <p:sp>
-        <p:nvSpPr>
-          <p:cNvPr id="3" name="Text 1"/>
-          <p:cNvSpPr txBox="1"/>
-          <p:nvPr/>
-        </p:nvSpPr>
-        <p:spPr>
-          <a:xfrm>
-            <a:off x="502920" y="640080"/>
-            <a:ext cx="7315200" cy="685800"/>
-          </a:xfrm>
-          <a:prstGeom prst="rect">
-            <a:avLst/>
-          </a:prstGeom>
-          <a:noFill/>
-          <a:ln/>
-        </p:spPr>
-        <p:txBody>
-          <a:bodyPr wrap="square" lIns="0" tIns="0" rIns="0" bIns="0" rtlCol="0" anchor="ctr"/>
-          <a:lstStyle/>
-          <a:p>
-            <a:pPr indent="0" marL="0">
-              <a:buNone/>
-            </a:pPr>
-            <a:r>
-              <a:rPr lang="en-US" sz="2700" b="1" dirty="0">
-                <a:solidFill>
-                  <a:srgbClr val="242C39"/>
-                </a:solidFill>
-              </a:rPr>
-              <a:t>Revenue by month against budget</a:t>
-            </a:r>
-            <a:endParaRPr lang="en-US" sz="2700" dirty="0"/>
-          </a:p>
-        </p:txBody>
-      </p:sp>
-      <p:pic>
-        <p:nvPicPr>
-          <p:cNvPr id="4" name="snip income_month" descr="/home/user/Claude/deck/snips/income_month.png">    </p:cNvPr>
-          <p:cNvPicPr>
-            <a:picLocks noChangeAspect="1"/>
-          </p:cNvPicPr>
-          <p:nvPr/>
-        </p:nvPicPr>
-        <p:blipFill>
-          <a:blip r:embed="rId1"/>
-          <a:stretch>
-            <a:fillRect/>
-          </a:stretch>
-        </p:blipFill>
-        <p:spPr>
-          <a:xfrm>
-            <a:off x="502920" y="1444752"/>
-            <a:ext cx="5577840" cy="2604071"/>
-          </a:xfrm>
-          <a:prstGeom prst="rect">
-            <a:avLst/>
-          </a:prstGeom>
-        </p:spPr>
-      </p:pic>
-      <p:sp>
-        <p:nvSpPr>
-          <p:cNvPr id="5" name="Text 2"/>
-          <p:cNvSpPr txBox="1"/>
-          <p:nvPr/>
-        </p:nvSpPr>
-        <p:spPr>
-          <a:xfrm>
-            <a:off x="502920" y="4121975"/>
-            <a:ext cx="5577840" cy="237744"/>
-          </a:xfrm>
-          <a:prstGeom prst="rect">
-            <a:avLst/>
-          </a:prstGeom>
-          <a:noFill/>
-          <a:ln/>
-        </p:spPr>
-        <p:txBody>
-          <a:bodyPr wrap="square" lIns="0" tIns="0" rIns="0" bIns="0" rtlCol="0" anchor="t"/>
-          <a:lstStyle/>
-          <a:p>
-            <a:pPr indent="0" marL="0">
-              <a:buNone/>
-            </a:pPr>
-            <a:r>
-              <a:rPr lang="en-US" sz="800" i="1" dirty="0">
-                <a:solidFill>
-                  <a:srgbClr val="6B7585"/>
-                </a:solidFill>
-              </a:rPr>
-              <a:t>Snipped from the Financial Controller Pack, Cost Analysis tab, total income by month, actual to date then budget.</a:t>
-            </a:r>
-            <a:endParaRPr lang="en-US" sz="800" dirty="0"/>
-          </a:p>
-        </p:txBody>
-      </p:sp>
-      <p:sp>
-        <p:nvSpPr>
-          <p:cNvPr id="6" name="commentary panel"/>
-          <p:cNvSpPr/>
-          <p:nvPr/>
-        </p:nvSpPr>
-        <p:spPr>
-          <a:xfrm>
-            <a:off x="6263640" y="1463040"/>
-            <a:ext cx="2377440" cy="3154680"/>
-          </a:xfrm>
-          <a:prstGeom prst="rect">
-            <a:avLst/>
-          </a:prstGeom>
-          <a:solidFill>
-            <a:srgbClr val="E8F9F8"/>
-          </a:solidFill>
-          <a:ln/>
-        </p:spPr>
-      </p:sp>
-      <p:sp>
-        <p:nvSpPr>
-          <p:cNvPr id="7" name="Text 4"/>
-          <p:cNvSpPr txBox="1"/>
-          <p:nvPr/>
-        </p:nvSpPr>
-        <p:spPr>
-          <a:xfrm>
-            <a:off x="6446520" y="1627632"/>
-            <a:ext cx="2011680" cy="228600"/>
-          </a:xfrm>
-          <a:prstGeom prst="rect">
-            <a:avLst/>
-          </a:prstGeom>
-          <a:noFill/>
-          <a:ln/>
-        </p:spPr>
-        <p:txBody>
-          <a:bodyPr wrap="square" lIns="0" tIns="0" rIns="0" bIns="0" rtlCol="0" anchor="ctr"/>
-          <a:lstStyle/>
-          <a:p>
-            <a:pPr indent="0" marL="0">
-              <a:buNone/>
-            </a:pPr>
-            <a:r>
-              <a:rPr lang="en-US" sz="900" b="1" spc="180" kern="0" dirty="0">
-                <a:solidFill>
-                  <a:srgbClr val="005358"/>
-                </a:solidFill>
-              </a:rPr>
-              <a:t>COMMENTARY</a:t>
-            </a:r>
-            <a:endParaRPr lang="en-US" sz="900" dirty="0"/>
-          </a:p>
-        </p:txBody>
-      </p:sp>
-      <p:sp>
-        <p:nvSpPr>
-          <p:cNvPr id="8" name="Text 5"/>
-          <p:cNvSpPr txBox="1"/>
-          <p:nvPr/>
-        </p:nvSpPr>
-        <p:spPr>
-          <a:xfrm>
-            <a:off x="6446520" y="1901952"/>
-            <a:ext cx="2011680" cy="2551176"/>
-          </a:xfrm>
-          <a:prstGeom prst="rect">
-            <a:avLst/>
-          </a:prstGeom>
-          <a:noFill/>
-          <a:ln/>
-        </p:spPr>
-        <p:txBody>
-          <a:bodyPr wrap="square" lIns="0" tIns="0" rIns="0" bIns="0" rtlCol="0" anchor="t">
-            <a:normAutofit/>
-          </a:bodyPr>
-          <a:lstStyle/>
-          <a:p>
-            <a:pPr marL="342900" indent="-342900">
-              <a:lnSpc>
-                <a:spcPts val="1150"/>
-              </a:lnSpc>
-              <a:spcAft>
-                <a:spcPts val="400"/>
-              </a:spcAft>
-              <a:buSzPct val="100000"/>
-              <a:buChar char="•"/>
-            </a:pPr>
-            <a:r>
-              <a:rPr lang="en-US" sz="900" dirty="0">
-                <a:solidFill>
-                  <a:srgbClr val="3A4453"/>
-                </a:solidFill>
-              </a:rPr>
-              <a:t>Q1 came in (372)k behind on revenue, and almost all of it is Consulting and Video.</a:t>
-            </a:r>
-            <a:endParaRPr lang="en-US" sz="900" dirty="0"/>
-          </a:p>
-          <a:p>
-            <a:pPr marL="342900" indent="-342900">
-              <a:lnSpc>
-                <a:spcPts val="1150"/>
-              </a:lnSpc>
-              <a:spcAft>
-                <a:spcPts val="400"/>
-              </a:spcAft>
-              <a:buSzPct val="100000"/>
-              <a:buChar char="•"/>
-            </a:pPr>
-            <a:r>
-              <a:rPr lang="en-US" sz="900" dirty="0">
-                <a:solidFill>
-                  <a:srgbClr val="3A4453"/>
-                </a:solidFill>
-              </a:rPr>
-              <a:t>The remaining nine months are untouched original budget. They are not a forecast.</a:t>
-            </a:r>
-            <a:endParaRPr lang="en-US" sz="900" dirty="0"/>
-          </a:p>
-          <a:p>
-            <a:pPr marL="342900" indent="-342900">
-              <a:lnSpc>
-                <a:spcPts val="1150"/>
-              </a:lnSpc>
-              <a:spcAft>
-                <a:spcPts val="400"/>
-              </a:spcAft>
-              <a:buSzPct val="100000"/>
-              <a:buChar char="•"/>
-            </a:pPr>
-            <a:r>
-              <a:rPr lang="en-US" sz="900" dirty="0">
-                <a:solidFill>
-                  <a:srgbClr val="3A4453"/>
-                </a:solidFill>
-              </a:rPr>
-              <a:t>October alone is budgeted at 950k, nearly double our best month so far.</a:t>
-            </a:r>
-            <a:endParaRPr lang="en-US" sz="900" dirty="0"/>
-          </a:p>
-          <a:p>
-            <a:pPr marL="342900" indent="-342900">
-              <a:lnSpc>
-                <a:spcPts val="1150"/>
-              </a:lnSpc>
-              <a:spcAft>
-                <a:spcPts val="400"/>
-              </a:spcAft>
-              <a:buSzPct val="100000"/>
-              <a:buChar char="•"/>
-            </a:pPr>
-            <a:r>
-              <a:rPr lang="en-US" sz="900" dirty="0">
-                <a:solidFill>
-                  <a:srgbClr val="3A4453"/>
-                </a:solidFill>
-              </a:rPr>
-              <a:t>December carries a planned loss. The business closes for two weeks, so that is correct and should stay.</a:t>
-            </a:r>
-            <a:endParaRPr lang="en-US" sz="900" dirty="0"/>
-          </a:p>
-          <a:p>
-            <a:pPr marL="342900" indent="-342900">
-              <a:lnSpc>
-                <a:spcPts val="1150"/>
-              </a:lnSpc>
-              <a:spcAft>
-                <a:spcPts val="400"/>
-              </a:spcAft>
-              <a:buSzPct val="100000"/>
-              <a:buChar char="•"/>
-            </a:pPr>
-            <a:r>
-              <a:rPr lang="en-US" sz="900" dirty="0">
-                <a:solidFill>
-                  <a:srgbClr val="3A4453"/>
-                </a:solidFill>
-              </a:rPr>
-              <a:t>Recommend a Q1 rolling forecast: rebuild Consulting on real capacity and reset the margin assumptions.</a:t>
-            </a:r>
-            <a:endParaRPr lang="en-US" sz="900" dirty="0"/>
-          </a:p>
-        </p:txBody>
-      </p:sp>
-      <p:sp>
-        <p:nvSpPr>
-          <p:cNvPr id="25" name="Slide Number Placeholder 0"/>
-          <p:cNvSpPr>
-            <a:spLocks noGrp="1"/>
-          </p:cNvSpPr>
-          <p:nvPr>
-            <p:ph type="sldNum" sz="quarter" idx="4294967295"/>
-          </p:nvPr>
-        </p:nvSpPr>
-        <p:spPr>
-          <a:xfrm>
-            <a:off x="8092440" y="4736592"/>
-            <a:ext cx="548640" cy="228600"/>
-          </a:xfrm>
-          <a:prstGeom prst="rect">
-            <a:avLst/>
-          </a:prstGeom>
-          <a:extLst>
-            <a:ext uri="{C572A759-6A51-4108-AA02-DFA0A04FC94B}">
-              <ma14:wrappingTextBoxFlag xmlns:ma14="http://schemas.microsoft.com/office/mac/drawingml/2011/main" val="0"/>
-            </a:ext>
-          </a:extLst>
-        </p:spPr>
-        <p:txBody>
-          <a:bodyPr/>
-          <a:lstStyle>
-            <a:lvl1pPr>
-              <a:defRPr sz="800">
-                <a:solidFill>
-                  <a:srgbClr val="6B7585"/>
-                </a:solidFill>
-              </a:defRPr>
-            </a:lvl1pPr>
-          </a:lstStyle>
-          <a:p>
-            <a:pPr algn="r"/>
-            <a:fld id="{F7021451-1387-4CA6-816F-3879F97B5CBC}" type="slidenum">
-              <a:rPr b="0" lang="en-US"/>
-              <a:t>32</a:t>
-            </a:fld>
-            <a:endParaRPr lang="en-US"/>
-          </a:p>
-        </p:txBody>
-      </p:sp>
-    </p:spTree>
-  </p:cSld>
-  <p:clrMapOvr>
-    <a:masterClrMapping/>
-  </p:clrMapOvr>
-</p:sld>
-</file>
-
-<file path=ppt/slides/slide33.xml><?xml version="1.0" encoding="utf-8"?>
-<p:sld xmlns:a="http://schemas.openxmlformats.org/drawingml/2006/main" xmlns:r="http://schemas.openxmlformats.org/officeDocument/2006/relationships" xmlns:p="http://schemas.openxmlformats.org/presentationml/2006/main">
-  <p:cSld name="Slide 33">
-    <p:spTree>
-      <p:nvGrpSpPr>
-        <p:cNvPr id="1" name=""/>
-        <p:cNvGrpSpPr/>
-        <p:nvPr/>
-      </p:nvGrpSpPr>
-      <p:grpSpPr>
-        <a:xfrm>
-          <a:off x="0" y="0"/>
-          <a:ext cx="0" cy="0"/>
-          <a:chOff x="0" y="0"/>
-          <a:chExt cx="0" cy="0"/>
-        </a:xfrm>
-      </p:grpSpPr>
-      <p:sp>
-        <p:nvSpPr>
-          <p:cNvPr id="2" name="Text 0"/>
-          <p:cNvSpPr txBox="1"/>
-          <p:nvPr/>
-        </p:nvSpPr>
-        <p:spPr>
-          <a:xfrm>
-            <a:off x="502920" y="365760"/>
-            <a:ext cx="6400800" cy="274320"/>
-          </a:xfrm>
-          <a:prstGeom prst="rect">
-            <a:avLst/>
-          </a:prstGeom>
-          <a:noFill/>
-          <a:ln/>
-        </p:spPr>
-        <p:txBody>
-          <a:bodyPr wrap="square" lIns="0" tIns="0" rIns="0" bIns="0" rtlCol="0" anchor="ctr"/>
-          <a:lstStyle/>
-          <a:p>
-            <a:pPr indent="0" marL="0">
-              <a:buNone/>
-            </a:pPr>
-            <a:r>
-              <a:rPr lang="en-US" sz="950" b="1" spc="220" kern="0" dirty="0">
-                <a:solidFill>
-                  <a:srgbClr val="122B82"/>
-                </a:solidFill>
-              </a:rPr>
-              <a:t>SUMMARY AND ACTIONS</a:t>
-            </a:r>
-            <a:endParaRPr lang="en-US" sz="950" dirty="0"/>
-          </a:p>
-        </p:txBody>
-      </p:sp>
-      <p:sp>
-        <p:nvSpPr>
-          <p:cNvPr id="3" name="Text 1"/>
-          <p:cNvSpPr txBox="1"/>
-          <p:nvPr/>
-        </p:nvSpPr>
-        <p:spPr>
-          <a:xfrm>
-            <a:off x="502920" y="640080"/>
-            <a:ext cx="7315200" cy="685800"/>
-          </a:xfrm>
-          <a:prstGeom prst="rect">
-            <a:avLst/>
-          </a:prstGeom>
-          <a:noFill/>
-          <a:ln/>
-        </p:spPr>
-        <p:txBody>
-          <a:bodyPr wrap="square" lIns="0" tIns="0" rIns="0" bIns="0" rtlCol="0" anchor="ctr"/>
-          <a:lstStyle/>
-          <a:p>
-            <a:pPr indent="0" marL="0">
-              <a:buNone/>
-            </a:pPr>
-            <a:r>
-              <a:rPr lang="en-US" sz="2700" b="1" dirty="0">
-                <a:solidFill>
-                  <a:srgbClr val="242C39"/>
-                </a:solidFill>
-              </a:rPr>
               <a:t>What we agreed</a:t>
             </a:r>
             <a:endParaRPr lang="en-US" sz="2700" dirty="0"/>
@@ -15496,7 +14060,7 @@
       </p:sp>
       <p:graphicFrame>
         <p:nvGraphicFramePr>
-          <p:cNvPr id="34" name="Table 0"/>
+          <p:cNvPr id="31" name="Table 0"/>
           <p:cNvGraphicFramePr>
             <a:graphicFrameLocks noGrp="1"/>
           </p:cNvGraphicFramePr>
@@ -17449,7 +16013,7 @@
             <a:pPr algn="r"/>
             <a:fld id="{F7021451-1387-4CA6-816F-3879F97B5CBC}" type="slidenum">
               <a:rPr b="0" lang="en-US"/>
-              <a:t>33</a:t>
+              <a:t>30</a:t>
             </a:fld>
             <a:endParaRPr lang="en-US"/>
           </a:p>
@@ -17463,9 +16027,9 @@
 </p:sld>
 </file>
 
-<file path=ppt/slides/slide34.xml><?xml version="1.0" encoding="utf-8"?>
+<file path=ppt/slides/slide31.xml><?xml version="1.0" encoding="utf-8"?>
 <p:sld xmlns:a="http://schemas.openxmlformats.org/drawingml/2006/main" xmlns:r="http://schemas.openxmlformats.org/officeDocument/2006/relationships" xmlns:p="http://schemas.openxmlformats.org/presentationml/2006/main">
-  <p:cSld name="Slide 34">
+  <p:cSld name="Slide 31">
     <p:spTree>
       <p:nvGrpSpPr>
         <p:cNvPr id="1" name=""/>
